--- a/Bayes_Bayesian.pptx
+++ b/Bayes_Bayesian.pptx
@@ -5,7 +5,7 @@
     <p:sldMasterId id="2147483659" r:id="rId1"/>
   </p:sldMasterIdLst>
   <p:notesMasterIdLst>
-    <p:notesMasterId r:id="rId7"/>
+    <p:notesMasterId r:id="rId9"/>
   </p:notesMasterIdLst>
   <p:sldIdLst>
     <p:sldId id="256" r:id="rId2"/>
@@ -13,6 +13,8 @@
     <p:sldId id="260" r:id="rId4"/>
     <p:sldId id="258" r:id="rId5"/>
     <p:sldId id="259" r:id="rId6"/>
+    <p:sldId id="261" r:id="rId7"/>
+    <p:sldId id="262" r:id="rId8"/>
   </p:sldIdLst>
   <p:sldSz cx="12192000" cy="6858000"/>
   <p:notesSz cx="6858000" cy="9144000"/>
@@ -257,264 +259,12 @@
 <pc:chgInfo xmlns:a="http://schemas.openxmlformats.org/drawingml/2006/main" xmlns:r="http://schemas.openxmlformats.org/officeDocument/2006/relationships" xmlns:ac="http://schemas.microsoft.com/office/drawing/2013/main/command" xmlns:pc="http://schemas.microsoft.com/office/powerpoint/2013/main/command">
   <pc:docChgLst>
     <pc:chgData name="Javier Valderrama" userId="S::javier.valderrama@nationaldebtrelief.com::4c07f5f7-6816-4e17-a145-d1bcaae26731" providerId="AD" clId="Web-{2A5AFB3E-5A76-6412-34B2-0286C53A7609}"/>
-    <pc:docChg chg="modSld">
-      <pc:chgData name="Javier Valderrama" userId="S::javier.valderrama@nationaldebtrelief.com::4c07f5f7-6816-4e17-a145-d1bcaae26731" providerId="AD" clId="Web-{2A5AFB3E-5A76-6412-34B2-0286C53A7609}" dt="2019-04-15T14:02:11.069" v="0" actId="1076"/>
-      <pc:docMkLst>
-        <pc:docMk/>
-      </pc:docMkLst>
-      <pc:sldChg chg="modSp">
-        <pc:chgData name="Javier Valderrama" userId="S::javier.valderrama@nationaldebtrelief.com::4c07f5f7-6816-4e17-a145-d1bcaae26731" providerId="AD" clId="Web-{2A5AFB3E-5A76-6412-34B2-0286C53A7609}" dt="2019-04-15T14:02:11.069" v="0" actId="1076"/>
-        <pc:sldMkLst>
-          <pc:docMk/>
-          <pc:sldMk cId="53163649" sldId="256"/>
-        </pc:sldMkLst>
-        <pc:spChg chg="mod">
-          <ac:chgData name="Javier Valderrama" userId="S::javier.valderrama@nationaldebtrelief.com::4c07f5f7-6816-4e17-a145-d1bcaae26731" providerId="AD" clId="Web-{2A5AFB3E-5A76-6412-34B2-0286C53A7609}" dt="2019-04-15T14:02:11.069" v="0" actId="1076"/>
-          <ac:spMkLst>
-            <pc:docMk/>
-            <pc:sldMk cId="53163649" sldId="256"/>
-            <ac:spMk id="88" creationId="{00000000-0000-0000-0000-000000000000}"/>
-          </ac:spMkLst>
-        </pc:spChg>
-      </pc:sldChg>
-    </pc:docChg>
   </pc:docChgLst>
   <pc:docChgLst>
     <pc:chgData name="Lev Selector" userId="314cf8c1-d356-4160-b242-72dee3bb7a46" providerId="ADAL" clId="{8C9BD69C-BC63-A845-A806-EC4BD0D69649}"/>
-    <pc:docChg chg="undo custSel addSld modSld">
-      <pc:chgData name="Lev Selector" userId="314cf8c1-d356-4160-b242-72dee3bb7a46" providerId="ADAL" clId="{8C9BD69C-BC63-A845-A806-EC4BD0D69649}" dt="2019-04-17T22:34:25.686" v="1248" actId="14100"/>
-      <pc:docMkLst>
-        <pc:docMk/>
-      </pc:docMkLst>
-      <pc:sldChg chg="addSp delSp modSp">
-        <pc:chgData name="Lev Selector" userId="314cf8c1-d356-4160-b242-72dee3bb7a46" providerId="ADAL" clId="{8C9BD69C-BC63-A845-A806-EC4BD0D69649}" dt="2019-04-17T22:31:16.206" v="962" actId="14100"/>
-        <pc:sldMkLst>
-          <pc:docMk/>
-          <pc:sldMk cId="0" sldId="257"/>
-        </pc:sldMkLst>
-        <pc:spChg chg="add del">
-          <ac:chgData name="Lev Selector" userId="314cf8c1-d356-4160-b242-72dee3bb7a46" providerId="ADAL" clId="{8C9BD69C-BC63-A845-A806-EC4BD0D69649}" dt="2019-04-17T22:10:07.414" v="7" actId="478"/>
-          <ac:spMkLst>
-            <pc:docMk/>
-            <pc:sldMk cId="0" sldId="257"/>
-            <ac:spMk id="3" creationId="{11C7D318-EE28-164A-87A7-71DE10B21FD7}"/>
-          </ac:spMkLst>
-        </pc:spChg>
-        <pc:spChg chg="add mod">
-          <ac:chgData name="Lev Selector" userId="314cf8c1-d356-4160-b242-72dee3bb7a46" providerId="ADAL" clId="{8C9BD69C-BC63-A845-A806-EC4BD0D69649}" dt="2019-04-15T15:42:37.366" v="3" actId="20577"/>
-          <ac:spMkLst>
-            <pc:docMk/>
-            <pc:sldMk cId="0" sldId="257"/>
-            <ac:spMk id="4" creationId="{C5F4338A-7460-2D43-8709-4C01BE3CBAE1}"/>
-          </ac:spMkLst>
-        </pc:spChg>
-        <pc:spChg chg="add mod">
-          <ac:chgData name="Lev Selector" userId="314cf8c1-d356-4160-b242-72dee3bb7a46" providerId="ADAL" clId="{8C9BD69C-BC63-A845-A806-EC4BD0D69649}" dt="2019-04-17T22:28:35.137" v="799" actId="14100"/>
-          <ac:spMkLst>
-            <pc:docMk/>
-            <pc:sldMk cId="0" sldId="257"/>
-            <ac:spMk id="5" creationId="{84C959D5-AEAE-C24D-891D-18CF918B93E3}"/>
-          </ac:spMkLst>
-        </pc:spChg>
-        <pc:spChg chg="add mod">
-          <ac:chgData name="Lev Selector" userId="314cf8c1-d356-4160-b242-72dee3bb7a46" providerId="ADAL" clId="{8C9BD69C-BC63-A845-A806-EC4BD0D69649}" dt="2019-04-17T22:16:05.393" v="97" actId="1076"/>
-          <ac:spMkLst>
-            <pc:docMk/>
-            <pc:sldMk cId="0" sldId="257"/>
-            <ac:spMk id="8" creationId="{E86965A6-BF94-F145-89D1-C6B2E5865414}"/>
-          </ac:spMkLst>
-        </pc:spChg>
-        <pc:spChg chg="add mod">
-          <ac:chgData name="Lev Selector" userId="314cf8c1-d356-4160-b242-72dee3bb7a46" providerId="ADAL" clId="{8C9BD69C-BC63-A845-A806-EC4BD0D69649}" dt="2019-04-17T22:16:05.393" v="97" actId="1076"/>
-          <ac:spMkLst>
-            <pc:docMk/>
-            <pc:sldMk cId="0" sldId="257"/>
-            <ac:spMk id="9" creationId="{345B8856-5B94-5446-A782-2394C9731CBF}"/>
-          </ac:spMkLst>
-        </pc:spChg>
-        <pc:spChg chg="add del">
-          <ac:chgData name="Lev Selector" userId="314cf8c1-d356-4160-b242-72dee3bb7a46" providerId="ADAL" clId="{8C9BD69C-BC63-A845-A806-EC4BD0D69649}" dt="2019-04-17T22:10:07.414" v="7" actId="478"/>
-          <ac:spMkLst>
-            <pc:docMk/>
-            <pc:sldMk cId="0" sldId="257"/>
-            <ac:spMk id="10" creationId="{812C9AFE-2DC4-2C49-A11B-4A24EEEF46C2}"/>
-          </ac:spMkLst>
-        </pc:spChg>
-        <pc:spChg chg="add del">
-          <ac:chgData name="Lev Selector" userId="314cf8c1-d356-4160-b242-72dee3bb7a46" providerId="ADAL" clId="{8C9BD69C-BC63-A845-A806-EC4BD0D69649}" dt="2019-04-17T22:10:07.414" v="7" actId="478"/>
-          <ac:spMkLst>
-            <pc:docMk/>
-            <pc:sldMk cId="0" sldId="257"/>
-            <ac:spMk id="11" creationId="{270CC2C1-38F9-C44F-AD2B-8120DE55C977}"/>
-          </ac:spMkLst>
-        </pc:spChg>
-        <pc:spChg chg="add mod">
-          <ac:chgData name="Lev Selector" userId="314cf8c1-d356-4160-b242-72dee3bb7a46" providerId="ADAL" clId="{8C9BD69C-BC63-A845-A806-EC4BD0D69649}" dt="2019-04-17T22:16:05.393" v="97" actId="1076"/>
-          <ac:spMkLst>
-            <pc:docMk/>
-            <pc:sldMk cId="0" sldId="257"/>
-            <ac:spMk id="12" creationId="{CB8CAB0A-ECE1-744B-AFD7-926EB6778306}"/>
-          </ac:spMkLst>
-        </pc:spChg>
-        <pc:spChg chg="add mod">
-          <ac:chgData name="Lev Selector" userId="314cf8c1-d356-4160-b242-72dee3bb7a46" providerId="ADAL" clId="{8C9BD69C-BC63-A845-A806-EC4BD0D69649}" dt="2019-04-17T22:19:50.375" v="541" actId="6549"/>
-          <ac:spMkLst>
-            <pc:docMk/>
-            <pc:sldMk cId="0" sldId="257"/>
-            <ac:spMk id="13" creationId="{1B3AAF2C-11F0-0049-B7DC-8141A6FF1C0C}"/>
-          </ac:spMkLst>
-        </pc:spChg>
-        <pc:spChg chg="add mod">
-          <ac:chgData name="Lev Selector" userId="314cf8c1-d356-4160-b242-72dee3bb7a46" providerId="ADAL" clId="{8C9BD69C-BC63-A845-A806-EC4BD0D69649}" dt="2019-04-17T22:20:21.059" v="572" actId="1076"/>
-          <ac:spMkLst>
-            <pc:docMk/>
-            <pc:sldMk cId="0" sldId="257"/>
-            <ac:spMk id="14" creationId="{E7891A24-DF90-8D43-8EDC-651D0443DDE8}"/>
-          </ac:spMkLst>
-        </pc:spChg>
-        <pc:spChg chg="add mod">
-          <ac:chgData name="Lev Selector" userId="314cf8c1-d356-4160-b242-72dee3bb7a46" providerId="ADAL" clId="{8C9BD69C-BC63-A845-A806-EC4BD0D69649}" dt="2019-04-17T22:16:05.393" v="97" actId="1076"/>
-          <ac:spMkLst>
-            <pc:docMk/>
-            <pc:sldMk cId="0" sldId="257"/>
-            <ac:spMk id="15" creationId="{5F331993-8839-E14F-87F0-12C37B552B26}"/>
-          </ac:spMkLst>
-        </pc:spChg>
-        <pc:spChg chg="add mod">
-          <ac:chgData name="Lev Selector" userId="314cf8c1-d356-4160-b242-72dee3bb7a46" providerId="ADAL" clId="{8C9BD69C-BC63-A845-A806-EC4BD0D69649}" dt="2019-04-17T22:16:05.393" v="97" actId="1076"/>
-          <ac:spMkLst>
-            <pc:docMk/>
-            <pc:sldMk cId="0" sldId="257"/>
-            <ac:spMk id="16" creationId="{8801D4D2-6C87-E448-BABD-2406AFC4D1B5}"/>
-          </ac:spMkLst>
-        </pc:spChg>
-        <pc:spChg chg="add mod">
-          <ac:chgData name="Lev Selector" userId="314cf8c1-d356-4160-b242-72dee3bb7a46" providerId="ADAL" clId="{8C9BD69C-BC63-A845-A806-EC4BD0D69649}" dt="2019-04-17T22:20:18.349" v="571" actId="1076"/>
-          <ac:spMkLst>
-            <pc:docMk/>
-            <pc:sldMk cId="0" sldId="257"/>
-            <ac:spMk id="17" creationId="{A4C67650-35D1-004F-BCDB-9A543C31DEBB}"/>
-          </ac:spMkLst>
-        </pc:spChg>
-        <pc:spChg chg="add mod">
-          <ac:chgData name="Lev Selector" userId="314cf8c1-d356-4160-b242-72dee3bb7a46" providerId="ADAL" clId="{8C9BD69C-BC63-A845-A806-EC4BD0D69649}" dt="2019-04-17T22:28:10.647" v="795" actId="1076"/>
-          <ac:spMkLst>
-            <pc:docMk/>
-            <pc:sldMk cId="0" sldId="257"/>
-            <ac:spMk id="18" creationId="{95068AA8-7119-4F4F-AEAA-537C8A13CD7B}"/>
-          </ac:spMkLst>
-        </pc:spChg>
-        <pc:spChg chg="add del mod">
-          <ac:chgData name="Lev Selector" userId="314cf8c1-d356-4160-b242-72dee3bb7a46" providerId="ADAL" clId="{8C9BD69C-BC63-A845-A806-EC4BD0D69649}" dt="2019-04-17T22:31:16.206" v="962" actId="14100"/>
-          <ac:spMkLst>
-            <pc:docMk/>
-            <pc:sldMk cId="0" sldId="257"/>
-            <ac:spMk id="108" creationId="{00000000-0000-0000-0000-000000000000}"/>
-          </ac:spMkLst>
-        </pc:spChg>
-        <pc:picChg chg="add del">
-          <ac:chgData name="Lev Selector" userId="314cf8c1-d356-4160-b242-72dee3bb7a46" providerId="ADAL" clId="{8C9BD69C-BC63-A845-A806-EC4BD0D69649}" dt="2019-04-17T22:10:07.414" v="7" actId="478"/>
-          <ac:picMkLst>
-            <pc:docMk/>
-            <pc:sldMk cId="0" sldId="257"/>
-            <ac:picMk id="2" creationId="{4627EC18-8F38-2442-B549-FBAD6F81E7EB}"/>
-          </ac:picMkLst>
-        </pc:picChg>
-      </pc:sldChg>
-      <pc:sldChg chg="modSp">
-        <pc:chgData name="Lev Selector" userId="314cf8c1-d356-4160-b242-72dee3bb7a46" providerId="ADAL" clId="{8C9BD69C-BC63-A845-A806-EC4BD0D69649}" dt="2019-04-17T22:24:59.724" v="685" actId="20577"/>
-        <pc:sldMkLst>
-          <pc:docMk/>
-          <pc:sldMk cId="3827244293" sldId="258"/>
-        </pc:sldMkLst>
-        <pc:spChg chg="mod">
-          <ac:chgData name="Lev Selector" userId="314cf8c1-d356-4160-b242-72dee3bb7a46" providerId="ADAL" clId="{8C9BD69C-BC63-A845-A806-EC4BD0D69649}" dt="2019-04-17T22:24:59.724" v="685" actId="20577"/>
-          <ac:spMkLst>
-            <pc:docMk/>
-            <pc:sldMk cId="3827244293" sldId="258"/>
-            <ac:spMk id="5" creationId="{637068B0-78A5-0E4A-8BEA-9B3F5428B23A}"/>
-          </ac:spMkLst>
-        </pc:spChg>
-      </pc:sldChg>
-      <pc:sldChg chg="modSp add">
-        <pc:chgData name="Lev Selector" userId="314cf8c1-d356-4160-b242-72dee3bb7a46" providerId="ADAL" clId="{8C9BD69C-BC63-A845-A806-EC4BD0D69649}" dt="2019-04-17T22:34:25.686" v="1248" actId="14100"/>
-        <pc:sldMkLst>
-          <pc:docMk/>
-          <pc:sldMk cId="2024227266" sldId="260"/>
-        </pc:sldMkLst>
-        <pc:spChg chg="mod">
-          <ac:chgData name="Lev Selector" userId="314cf8c1-d356-4160-b242-72dee3bb7a46" providerId="ADAL" clId="{8C9BD69C-BC63-A845-A806-EC4BD0D69649}" dt="2019-04-17T22:34:25.686" v="1248" actId="14100"/>
-          <ac:spMkLst>
-            <pc:docMk/>
-            <pc:sldMk cId="2024227266" sldId="260"/>
-            <ac:spMk id="108" creationId="{00000000-0000-0000-0000-000000000000}"/>
-          </ac:spMkLst>
-        </pc:spChg>
-      </pc:sldChg>
-    </pc:docChg>
   </pc:docChgLst>
   <pc:docChgLst>
     <pc:chgData name="Lev Selector" userId="314cf8c1-d356-4160-b242-72dee3bb7a46" providerId="ADAL" clId="{4CBB6E57-5808-8F48-8E34-7993863C1B7B}"/>
-    <pc:docChg chg="modSld">
-      <pc:chgData name="Lev Selector" userId="314cf8c1-d356-4160-b242-72dee3bb7a46" providerId="ADAL" clId="{4CBB6E57-5808-8F48-8E34-7993863C1B7B}" dt="2019-05-10T22:15:20.983" v="37" actId="20577"/>
-      <pc:docMkLst>
-        <pc:docMk/>
-      </pc:docMkLst>
-      <pc:sldChg chg="modSp">
-        <pc:chgData name="Lev Selector" userId="314cf8c1-d356-4160-b242-72dee3bb7a46" providerId="ADAL" clId="{4CBB6E57-5808-8F48-8E34-7993863C1B7B}" dt="2019-05-10T22:14:53.444" v="36" actId="1037"/>
-        <pc:sldMkLst>
-          <pc:docMk/>
-          <pc:sldMk cId="53163649" sldId="256"/>
-        </pc:sldMkLst>
-        <pc:spChg chg="mod">
-          <ac:chgData name="Lev Selector" userId="314cf8c1-d356-4160-b242-72dee3bb7a46" providerId="ADAL" clId="{4CBB6E57-5808-8F48-8E34-7993863C1B7B}" dt="2019-05-10T22:14:38.357" v="25" actId="1076"/>
-          <ac:spMkLst>
-            <pc:docMk/>
-            <pc:sldMk cId="53163649" sldId="256"/>
-            <ac:spMk id="96" creationId="{00000000-0000-0000-0000-000000000000}"/>
-          </ac:spMkLst>
-        </pc:spChg>
-        <pc:spChg chg="mod">
-          <ac:chgData name="Lev Selector" userId="314cf8c1-d356-4160-b242-72dee3bb7a46" providerId="ADAL" clId="{4CBB6E57-5808-8F48-8E34-7993863C1B7B}" dt="2019-05-10T22:14:38.357" v="25" actId="1076"/>
-          <ac:spMkLst>
-            <pc:docMk/>
-            <pc:sldMk cId="53163649" sldId="256"/>
-            <ac:spMk id="98" creationId="{00000000-0000-0000-0000-000000000000}"/>
-          </ac:spMkLst>
-        </pc:spChg>
-        <pc:spChg chg="mod">
-          <ac:chgData name="Lev Selector" userId="314cf8c1-d356-4160-b242-72dee3bb7a46" providerId="ADAL" clId="{4CBB6E57-5808-8F48-8E34-7993863C1B7B}" dt="2019-05-10T22:11:35.404" v="18" actId="1076"/>
-          <ac:spMkLst>
-            <pc:docMk/>
-            <pc:sldMk cId="53163649" sldId="256"/>
-            <ac:spMk id="99" creationId="{00000000-0000-0000-0000-000000000000}"/>
-          </ac:spMkLst>
-        </pc:spChg>
-        <pc:spChg chg="mod">
-          <ac:chgData name="Lev Selector" userId="314cf8c1-d356-4160-b242-72dee3bb7a46" providerId="ADAL" clId="{4CBB6E57-5808-8F48-8E34-7993863C1B7B}" dt="2019-05-10T22:14:53.444" v="36" actId="1037"/>
-          <ac:spMkLst>
-            <pc:docMk/>
-            <pc:sldMk cId="53163649" sldId="256"/>
-            <ac:spMk id="100" creationId="{00000000-0000-0000-0000-000000000000}"/>
-          </ac:spMkLst>
-        </pc:spChg>
-      </pc:sldChg>
-      <pc:sldChg chg="modSp">
-        <pc:chgData name="Lev Selector" userId="314cf8c1-d356-4160-b242-72dee3bb7a46" providerId="ADAL" clId="{4CBB6E57-5808-8F48-8E34-7993863C1B7B}" dt="2019-05-10T22:15:20.983" v="37" actId="20577"/>
-        <pc:sldMkLst>
-          <pc:docMk/>
-          <pc:sldMk cId="0" sldId="257"/>
-        </pc:sldMkLst>
-        <pc:spChg chg="mod">
-          <ac:chgData name="Lev Selector" userId="314cf8c1-d356-4160-b242-72dee3bb7a46" providerId="ADAL" clId="{4CBB6E57-5808-8F48-8E34-7993863C1B7B}" dt="2019-05-10T22:15:20.983" v="37" actId="20577"/>
-          <ac:spMkLst>
-            <pc:docMk/>
-            <pc:sldMk cId="0" sldId="257"/>
-            <ac:spMk id="108" creationId="{00000000-0000-0000-0000-000000000000}"/>
-          </ac:spMkLst>
-        </pc:spChg>
-      </pc:sldChg>
-    </pc:docChg>
   </pc:docChgLst>
 </pc:chgInfo>
 </file>
@@ -17034,8 +16784,13 @@
           <p:nvPr/>
         </p:nvPicPr>
         <p:blipFill rotWithShape="1">
-          <a:blip r:embed="rId4">
+          <a:blip r:embed="rId4" cstate="email">
             <a:alphaModFix/>
+            <a:extLst>
+              <a:ext uri="{28A0092B-C50C-407E-A947-70E740481C1C}">
+                <a14:useLocalDpi xmlns:a14="http://schemas.microsoft.com/office/drawing/2010/main"/>
+              </a:ext>
+            </a:extLst>
           </a:blip>
           <a:srcRect/>
           <a:stretch/>
@@ -21520,7 +21275,13 @@
           <p:nvPr/>
         </p:nvPicPr>
         <p:blipFill>
-          <a:blip r:embed="rId4"/>
+          <a:blip r:embed="rId4" cstate="email">
+            <a:extLst>
+              <a:ext uri="{28A0092B-C50C-407E-A947-70E740481C1C}">
+                <a14:useLocalDpi xmlns:a14="http://schemas.microsoft.com/office/drawing/2010/main"/>
+              </a:ext>
+            </a:extLst>
+          </a:blip>
           <a:stretch>
             <a:fillRect/>
           </a:stretch>
@@ -21622,6 +21383,816 @@
     <p:extLst>
       <p:ext uri="{BB962C8B-B14F-4D97-AF65-F5344CB8AC3E}">
         <p14:creationId xmlns:p14="http://schemas.microsoft.com/office/powerpoint/2010/main" val="3833733288"/>
+      </p:ext>
+    </p:extLst>
+  </p:cSld>
+  <p:clrMapOvr>
+    <a:masterClrMapping/>
+  </p:clrMapOvr>
+</p:sld>
+</file>
+
+<file path=ppt/slides/slide6.xml><?xml version="1.0" encoding="utf-8"?>
+<p:sld xmlns:a="http://schemas.openxmlformats.org/drawingml/2006/main" xmlns:r="http://schemas.openxmlformats.org/officeDocument/2006/relationships" xmlns:p="http://schemas.openxmlformats.org/presentationml/2006/main">
+  <p:cSld>
+    <p:spTree>
+      <p:nvGrpSpPr>
+        <p:cNvPr id="1" name=""/>
+        <p:cNvGrpSpPr/>
+        <p:nvPr/>
+      </p:nvGrpSpPr>
+      <p:grpSpPr>
+        <a:xfrm>
+          <a:off x="0" y="0"/>
+          <a:ext cx="0" cy="0"/>
+          <a:chOff x="0" y="0"/>
+          <a:chExt cx="0" cy="0"/>
+        </a:xfrm>
+      </p:grpSpPr>
+      <p:sp>
+        <p:nvSpPr>
+          <p:cNvPr id="4" name="TextBox 3">
+            <a:extLst>
+              <a:ext uri="{FF2B5EF4-FFF2-40B4-BE49-F238E27FC236}">
+                <a16:creationId xmlns:a16="http://schemas.microsoft.com/office/drawing/2014/main" id="{8A0212EB-D5F5-7C42-9867-3F4106A76AC3}"/>
+              </a:ext>
+            </a:extLst>
+          </p:cNvPr>
+          <p:cNvSpPr txBox="1"/>
+          <p:nvPr/>
+        </p:nvSpPr>
+        <p:spPr>
+          <a:xfrm>
+            <a:off x="0" y="37572"/>
+            <a:ext cx="4572000" cy="523220"/>
+          </a:xfrm>
+          <a:prstGeom prst="rect">
+            <a:avLst/>
+          </a:prstGeom>
+          <a:noFill/>
+        </p:spPr>
+        <p:txBody>
+          <a:bodyPr wrap="square" rtlCol="0">
+            <a:spAutoFit/>
+          </a:bodyPr>
+          <a:lstStyle/>
+          <a:p>
+            <a:r>
+              <a:rPr lang="en-US" sz="2800" b="1" dirty="0"/>
+              <a:t>Bayesian vs Frequentist</a:t>
+            </a:r>
+          </a:p>
+        </p:txBody>
+      </p:sp>
+      <p:sp>
+        <p:nvSpPr>
+          <p:cNvPr id="5" name="TextBox 4">
+            <a:extLst>
+              <a:ext uri="{FF2B5EF4-FFF2-40B4-BE49-F238E27FC236}">
+                <a16:creationId xmlns:a16="http://schemas.microsoft.com/office/drawing/2014/main" id="{AADE8889-8C42-E543-BA59-6986D4778221}"/>
+              </a:ext>
+            </a:extLst>
+          </p:cNvPr>
+          <p:cNvSpPr txBox="1"/>
+          <p:nvPr/>
+        </p:nvSpPr>
+        <p:spPr>
+          <a:xfrm>
+            <a:off x="54592" y="1563370"/>
+            <a:ext cx="5929952" cy="2031325"/>
+          </a:xfrm>
+          <a:prstGeom prst="rect">
+            <a:avLst/>
+          </a:prstGeom>
+          <a:noFill/>
+        </p:spPr>
+        <p:txBody>
+          <a:bodyPr wrap="square" rtlCol="0">
+            <a:spAutoFit/>
+          </a:bodyPr>
+          <a:lstStyle/>
+          <a:p>
+            <a:r>
+              <a:rPr lang="en-US" b="1" dirty="0">
+                <a:solidFill>
+                  <a:srgbClr val="FF0000"/>
+                </a:solidFill>
+              </a:rPr>
+              <a:t>Bayesian:</a:t>
+            </a:r>
+          </a:p>
+          <a:p>
+            <a:r>
+              <a:rPr lang="en-US" dirty="0"/>
+              <a:t>    Enumerate all possible hypotheses – and compute their probabilities.</a:t>
+            </a:r>
+          </a:p>
+          <a:p>
+            <a:r>
+              <a:rPr lang="en-US" dirty="0"/>
+              <a:t>    We make a (subjective) choice of “prior” (model, distribution)</a:t>
+            </a:r>
+          </a:p>
+          <a:p>
+            <a:r>
+              <a:rPr lang="en-US" dirty="0"/>
+              <a:t>    and produce posterior distribution.</a:t>
+            </a:r>
+          </a:p>
+          <a:p>
+            <a:r>
+              <a:rPr lang="en-US" dirty="0"/>
+              <a:t>    Allows for complex decision analysis under uncertainty.</a:t>
+            </a:r>
+          </a:p>
+          <a:p>
+            <a:r>
+              <a:rPr lang="en-US" b="1" dirty="0">
+                <a:solidFill>
+                  <a:srgbClr val="FF0000"/>
+                </a:solidFill>
+              </a:rPr>
+              <a:t>Frequentist (classical):</a:t>
+            </a:r>
+          </a:p>
+          <a:p>
+            <a:r>
+              <a:rPr lang="en-US" dirty="0"/>
+              <a:t>    Calculate means (estimates) and confidence intervals</a:t>
+            </a:r>
+          </a:p>
+          <a:p>
+            <a:r>
+              <a:rPr lang="en-US" dirty="0"/>
+              <a:t>    Problems treating missing data (survivorship bias)</a:t>
+            </a:r>
+          </a:p>
+          <a:p>
+            <a:r>
+              <a:rPr lang="en-US" dirty="0"/>
+              <a:t>    Problems with hypothesis testing (p-hacking)</a:t>
+            </a:r>
+          </a:p>
+        </p:txBody>
+      </p:sp>
+      <p:sp>
+        <p:nvSpPr>
+          <p:cNvPr id="6" name="TextBox 5">
+            <a:extLst>
+              <a:ext uri="{FF2B5EF4-FFF2-40B4-BE49-F238E27FC236}">
+                <a16:creationId xmlns:a16="http://schemas.microsoft.com/office/drawing/2014/main" id="{D86CA22F-D1DB-184B-8C0D-193FFD538439}"/>
+              </a:ext>
+            </a:extLst>
+          </p:cNvPr>
+          <p:cNvSpPr txBox="1"/>
+          <p:nvPr/>
+        </p:nvSpPr>
+        <p:spPr>
+          <a:xfrm>
+            <a:off x="6985379" y="682726"/>
+            <a:ext cx="5206621" cy="1815882"/>
+          </a:xfrm>
+          <a:prstGeom prst="rect">
+            <a:avLst/>
+          </a:prstGeom>
+          <a:noFill/>
+        </p:spPr>
+        <p:txBody>
+          <a:bodyPr wrap="square" rtlCol="0">
+            <a:spAutoFit/>
+          </a:bodyPr>
+          <a:lstStyle/>
+          <a:p>
+            <a:r>
+              <a:rPr lang="en-US" b="1" dirty="0">
+                <a:solidFill>
+                  <a:srgbClr val="FF0000"/>
+                </a:solidFill>
+              </a:rPr>
+              <a:t>Example1: </a:t>
+            </a:r>
+            <a:r>
+              <a:rPr lang="en-US" dirty="0"/>
+              <a:t>Polling, two candidates: Alice &amp; Bob.</a:t>
+            </a:r>
+          </a:p>
+          <a:p>
+            <a:r>
+              <a:rPr lang="en-US" dirty="0"/>
+              <a:t>52% of polled voters intend to vote for Alice.</a:t>
+            </a:r>
+          </a:p>
+          <a:p>
+            <a:r>
+              <a:rPr lang="en-US" dirty="0"/>
+              <a:t>Confidence interval [42%,62%], p-value = 0.34</a:t>
+            </a:r>
+          </a:p>
+          <a:p>
+            <a:r>
+              <a:rPr lang="en-US" dirty="0"/>
+              <a:t>What is the probability that Alice will win ?</a:t>
+            </a:r>
+          </a:p>
+          <a:p>
+            <a:r>
+              <a:rPr lang="en-US" dirty="0"/>
+              <a:t>Classical frequentist approach can not answer this question.</a:t>
+            </a:r>
+          </a:p>
+          <a:p>
+            <a:r>
+              <a:rPr lang="en-US" dirty="0"/>
+              <a:t>Bayesian method – result is a posterior distribution of possible </a:t>
+            </a:r>
+          </a:p>
+          <a:p>
+            <a:r>
+              <a:rPr lang="en-US" dirty="0"/>
+              <a:t>outcomes based on data.</a:t>
+            </a:r>
+          </a:p>
+          <a:p>
+            <a:r>
+              <a:rPr lang="en-US" dirty="0"/>
+              <a:t>Thus you can get your answer.</a:t>
+            </a:r>
+          </a:p>
+        </p:txBody>
+      </p:sp>
+      <p:sp>
+        <p:nvSpPr>
+          <p:cNvPr id="7" name="TextBox 6">
+            <a:extLst>
+              <a:ext uri="{FF2B5EF4-FFF2-40B4-BE49-F238E27FC236}">
+                <a16:creationId xmlns:a16="http://schemas.microsoft.com/office/drawing/2014/main" id="{E88A1638-21E4-C746-A837-4CF59231442C}"/>
+              </a:ext>
+            </a:extLst>
+          </p:cNvPr>
+          <p:cNvSpPr txBox="1"/>
+          <p:nvPr/>
+        </p:nvSpPr>
+        <p:spPr>
+          <a:xfrm>
+            <a:off x="6985379" y="2498608"/>
+            <a:ext cx="5206621" cy="1600438"/>
+          </a:xfrm>
+          <a:prstGeom prst="rect">
+            <a:avLst/>
+          </a:prstGeom>
+          <a:noFill/>
+        </p:spPr>
+        <p:txBody>
+          <a:bodyPr wrap="square" rtlCol="0">
+            <a:spAutoFit/>
+          </a:bodyPr>
+          <a:lstStyle/>
+          <a:p>
+            <a:r>
+              <a:rPr lang="en-US" b="1" dirty="0">
+                <a:solidFill>
+                  <a:srgbClr val="FF0000"/>
+                </a:solidFill>
+              </a:rPr>
+              <a:t>Example2:</a:t>
+            </a:r>
+            <a:r>
+              <a:rPr lang="en-US" dirty="0"/>
+              <a:t> comparing two drugs A &amp; B.</a:t>
+            </a:r>
+          </a:p>
+          <a:p>
+            <a:r>
+              <a:rPr lang="en-US" dirty="0"/>
+              <a:t>A is better than B with p value &lt; 0.001</a:t>
+            </a:r>
+          </a:p>
+          <a:p>
+            <a:r>
+              <a:rPr lang="en-US" dirty="0"/>
+              <a:t>A is more expensive.</a:t>
+            </a:r>
+          </a:p>
+          <a:p>
+            <a:r>
+              <a:rPr lang="en-US" dirty="0"/>
+              <a:t>Which drug should we prescribe?</a:t>
+            </a:r>
+          </a:p>
+          <a:p>
+            <a:r>
+              <a:rPr lang="en-US" dirty="0"/>
+              <a:t>Cost-benefit. </a:t>
+            </a:r>
+          </a:p>
+          <a:p>
+            <a:r>
+              <a:rPr lang="en-US" dirty="0"/>
+              <a:t>Suppose we get predicted probability of survival with A and B.</a:t>
+            </a:r>
+          </a:p>
+          <a:p>
+            <a:r>
+              <a:rPr lang="en-US" dirty="0"/>
+              <a:t>We could then compute dollars per life saved. </a:t>
+            </a:r>
+          </a:p>
+        </p:txBody>
+      </p:sp>
+      <p:sp>
+        <p:nvSpPr>
+          <p:cNvPr id="8" name="TextBox 7">
+            <a:extLst>
+              <a:ext uri="{FF2B5EF4-FFF2-40B4-BE49-F238E27FC236}">
+                <a16:creationId xmlns:a16="http://schemas.microsoft.com/office/drawing/2014/main" id="{81EB3310-1369-7647-9FF9-5016F01991CC}"/>
+              </a:ext>
+            </a:extLst>
+          </p:cNvPr>
+          <p:cNvSpPr txBox="1"/>
+          <p:nvPr/>
+        </p:nvSpPr>
+        <p:spPr>
+          <a:xfrm>
+            <a:off x="6985379" y="4099046"/>
+            <a:ext cx="5206621" cy="1169551"/>
+          </a:xfrm>
+          <a:prstGeom prst="rect">
+            <a:avLst/>
+          </a:prstGeom>
+          <a:noFill/>
+        </p:spPr>
+        <p:txBody>
+          <a:bodyPr wrap="square" rtlCol="0">
+            <a:spAutoFit/>
+          </a:bodyPr>
+          <a:lstStyle/>
+          <a:p>
+            <a:r>
+              <a:rPr lang="en-US" b="1" dirty="0">
+                <a:solidFill>
+                  <a:srgbClr val="FF0000"/>
+                </a:solidFill>
+              </a:rPr>
+              <a:t>Example3:</a:t>
+            </a:r>
+            <a:r>
+              <a:rPr lang="en-US" dirty="0"/>
+              <a:t> Guessing game</a:t>
+            </a:r>
+          </a:p>
+          <a:p>
+            <a:r>
+              <a:rPr lang="en-US" dirty="0"/>
+              <a:t>You see the prize – and guess the price</a:t>
+            </a:r>
+          </a:p>
+          <a:p>
+            <a:r>
+              <a:rPr lang="en-US" dirty="0"/>
+              <a:t>Opponent sees a different prize – and guesses the price.</a:t>
+            </a:r>
+          </a:p>
+          <a:p>
+            <a:r>
+              <a:rPr lang="en-US" dirty="0"/>
+              <a:t>Whoever is closer (without going over) wins.</a:t>
+            </a:r>
+          </a:p>
+          <a:p>
+            <a:r>
+              <a:rPr lang="en-US" dirty="0"/>
+              <a:t>comparing two drugs A &amp; B.</a:t>
+            </a:r>
+          </a:p>
+        </p:txBody>
+      </p:sp>
+      <p:sp>
+        <p:nvSpPr>
+          <p:cNvPr id="9" name="TextBox 8">
+            <a:extLst>
+              <a:ext uri="{FF2B5EF4-FFF2-40B4-BE49-F238E27FC236}">
+                <a16:creationId xmlns:a16="http://schemas.microsoft.com/office/drawing/2014/main" id="{9D171819-C6E6-4541-8406-01258005E5A5}"/>
+              </a:ext>
+            </a:extLst>
+          </p:cNvPr>
+          <p:cNvSpPr txBox="1"/>
+          <p:nvPr/>
+        </p:nvSpPr>
+        <p:spPr>
+          <a:xfrm>
+            <a:off x="54591" y="1255593"/>
+            <a:ext cx="5595582" cy="307777"/>
+          </a:xfrm>
+          <a:prstGeom prst="rect">
+            <a:avLst/>
+          </a:prstGeom>
+          <a:noFill/>
+        </p:spPr>
+        <p:txBody>
+          <a:bodyPr wrap="square" rtlCol="0">
+            <a:spAutoFit/>
+          </a:bodyPr>
+          <a:lstStyle/>
+          <a:p>
+            <a:r>
+              <a:rPr lang="en-US" dirty="0"/>
+              <a:t>Allen Downey – </a:t>
+            </a:r>
+            <a:r>
+              <a:rPr lang="en-US" dirty="0">
+                <a:hlinkClick r:id="rId2"/>
+              </a:rPr>
+              <a:t>https://www.youtube.com/watch?v=R6d-AbkhBQ8</a:t>
+            </a:r>
+            <a:r>
+              <a:rPr lang="en-US" dirty="0"/>
+              <a:t> </a:t>
+            </a:r>
+          </a:p>
+        </p:txBody>
+      </p:sp>
+      <p:sp>
+        <p:nvSpPr>
+          <p:cNvPr id="10" name="TextBox 9">
+            <a:extLst>
+              <a:ext uri="{FF2B5EF4-FFF2-40B4-BE49-F238E27FC236}">
+                <a16:creationId xmlns:a16="http://schemas.microsoft.com/office/drawing/2014/main" id="{E9BADB20-D64C-6847-BE85-8D8A5503503B}"/>
+              </a:ext>
+            </a:extLst>
+          </p:cNvPr>
+          <p:cNvSpPr txBox="1"/>
+          <p:nvPr/>
+        </p:nvSpPr>
+        <p:spPr>
+          <a:xfrm>
+            <a:off x="6985379" y="5330152"/>
+            <a:ext cx="5206621" cy="307777"/>
+          </a:xfrm>
+          <a:prstGeom prst="rect">
+            <a:avLst/>
+          </a:prstGeom>
+          <a:noFill/>
+        </p:spPr>
+        <p:txBody>
+          <a:bodyPr wrap="square" rtlCol="0">
+            <a:spAutoFit/>
+          </a:bodyPr>
+          <a:lstStyle/>
+          <a:p>
+            <a:r>
+              <a:rPr lang="en-US" b="1" dirty="0">
+                <a:solidFill>
+                  <a:srgbClr val="FF0000"/>
+                </a:solidFill>
+              </a:rPr>
+              <a:t>Example4: </a:t>
+            </a:r>
+            <a:r>
+              <a:rPr lang="en-US" dirty="0"/>
+              <a:t>MCMC (Markov-Chain Monte-Carlo)</a:t>
+            </a:r>
+          </a:p>
+        </p:txBody>
+      </p:sp>
+    </p:spTree>
+    <p:extLst>
+      <p:ext uri="{BB962C8B-B14F-4D97-AF65-F5344CB8AC3E}">
+        <p14:creationId xmlns:p14="http://schemas.microsoft.com/office/powerpoint/2010/main" val="1794610867"/>
+      </p:ext>
+    </p:extLst>
+  </p:cSld>
+  <p:clrMapOvr>
+    <a:masterClrMapping/>
+  </p:clrMapOvr>
+</p:sld>
+</file>
+
+<file path=ppt/slides/slide7.xml><?xml version="1.0" encoding="utf-8"?>
+<p:sld xmlns:a="http://schemas.openxmlformats.org/drawingml/2006/main" xmlns:r="http://schemas.openxmlformats.org/officeDocument/2006/relationships" xmlns:p="http://schemas.openxmlformats.org/presentationml/2006/main">
+  <p:cSld>
+    <p:spTree>
+      <p:nvGrpSpPr>
+        <p:cNvPr id="1" name=""/>
+        <p:cNvGrpSpPr/>
+        <p:nvPr/>
+      </p:nvGrpSpPr>
+      <p:grpSpPr>
+        <a:xfrm>
+          <a:off x="0" y="0"/>
+          <a:ext cx="0" cy="0"/>
+          <a:chOff x="0" y="0"/>
+          <a:chExt cx="0" cy="0"/>
+        </a:xfrm>
+      </p:grpSpPr>
+      <p:sp>
+        <p:nvSpPr>
+          <p:cNvPr id="4" name="TextBox 3">
+            <a:extLst>
+              <a:ext uri="{FF2B5EF4-FFF2-40B4-BE49-F238E27FC236}">
+                <a16:creationId xmlns:a16="http://schemas.microsoft.com/office/drawing/2014/main" id="{8A0212EB-D5F5-7C42-9867-3F4106A76AC3}"/>
+              </a:ext>
+            </a:extLst>
+          </p:cNvPr>
+          <p:cNvSpPr txBox="1"/>
+          <p:nvPr/>
+        </p:nvSpPr>
+        <p:spPr>
+          <a:xfrm>
+            <a:off x="0" y="37572"/>
+            <a:ext cx="4572000" cy="523220"/>
+          </a:xfrm>
+          <a:prstGeom prst="rect">
+            <a:avLst/>
+          </a:prstGeom>
+          <a:noFill/>
+        </p:spPr>
+        <p:txBody>
+          <a:bodyPr wrap="square" rtlCol="0">
+            <a:spAutoFit/>
+          </a:bodyPr>
+          <a:lstStyle/>
+          <a:p>
+            <a:r>
+              <a:rPr lang="en-US" sz="2800" b="1" dirty="0"/>
+              <a:t>Bayesian vs Frequentist</a:t>
+            </a:r>
+          </a:p>
+        </p:txBody>
+      </p:sp>
+      <p:sp>
+        <p:nvSpPr>
+          <p:cNvPr id="11" name="TextBox 10">
+            <a:extLst>
+              <a:ext uri="{FF2B5EF4-FFF2-40B4-BE49-F238E27FC236}">
+                <a16:creationId xmlns:a16="http://schemas.microsoft.com/office/drawing/2014/main" id="{2A85AADB-CA8B-934D-84A1-D6DA208D498F}"/>
+              </a:ext>
+            </a:extLst>
+          </p:cNvPr>
+          <p:cNvSpPr txBox="1"/>
+          <p:nvPr/>
+        </p:nvSpPr>
+        <p:spPr>
+          <a:xfrm>
+            <a:off x="0" y="560792"/>
+            <a:ext cx="5636525" cy="523220"/>
+          </a:xfrm>
+          <a:prstGeom prst="rect">
+            <a:avLst/>
+          </a:prstGeom>
+          <a:noFill/>
+        </p:spPr>
+        <p:txBody>
+          <a:bodyPr wrap="square" rtlCol="0">
+            <a:spAutoFit/>
+          </a:bodyPr>
+          <a:lstStyle/>
+          <a:p>
+            <a:r>
+              <a:rPr lang="en-US" dirty="0"/>
+              <a:t>Jake </a:t>
+            </a:r>
+            <a:r>
+              <a:rPr lang="en-US" dirty="0" err="1"/>
+              <a:t>VanderPlas</a:t>
+            </a:r>
+            <a:r>
+              <a:rPr lang="en-US" dirty="0"/>
+              <a:t> </a:t>
+            </a:r>
+          </a:p>
+          <a:p>
+            <a:r>
+              <a:rPr lang="en-US" dirty="0"/>
+              <a:t>  - </a:t>
+            </a:r>
+            <a:r>
+              <a:rPr lang="en-US" dirty="0">
+                <a:hlinkClick r:id="rId2"/>
+              </a:rPr>
+              <a:t>https://www.youtube.com/watch?v=KhAUfqhLakw</a:t>
+            </a:r>
+            <a:endParaRPr lang="en-US" dirty="0"/>
+          </a:p>
+        </p:txBody>
+      </p:sp>
+      <p:pic>
+        <p:nvPicPr>
+          <p:cNvPr id="12" name="Picture 11">
+            <a:extLst>
+              <a:ext uri="{FF2B5EF4-FFF2-40B4-BE49-F238E27FC236}">
+                <a16:creationId xmlns:a16="http://schemas.microsoft.com/office/drawing/2014/main" id="{7BC1EEDA-D36B-3745-8521-9723E046CF62}"/>
+              </a:ext>
+            </a:extLst>
+          </p:cNvPr>
+          <p:cNvPicPr>
+            <a:picLocks noChangeAspect="1"/>
+          </p:cNvPicPr>
+          <p:nvPr/>
+        </p:nvPicPr>
+        <p:blipFill>
+          <a:blip r:embed="rId3" cstate="email">
+            <a:extLst>
+              <a:ext uri="{28A0092B-C50C-407E-A947-70E740481C1C}">
+                <a14:useLocalDpi xmlns:a14="http://schemas.microsoft.com/office/drawing/2010/main"/>
+              </a:ext>
+            </a:extLst>
+          </a:blip>
+          <a:stretch>
+            <a:fillRect/>
+          </a:stretch>
+        </p:blipFill>
+        <p:spPr>
+          <a:xfrm>
+            <a:off x="7958110" y="37572"/>
+            <a:ext cx="3942737" cy="2854280"/>
+          </a:xfrm>
+          <a:prstGeom prst="rect">
+            <a:avLst/>
+          </a:prstGeom>
+        </p:spPr>
+      </p:pic>
+      <p:pic>
+        <p:nvPicPr>
+          <p:cNvPr id="13" name="Picture 12">
+            <a:extLst>
+              <a:ext uri="{FF2B5EF4-FFF2-40B4-BE49-F238E27FC236}">
+                <a16:creationId xmlns:a16="http://schemas.microsoft.com/office/drawing/2014/main" id="{756ED8DC-2BE1-094A-8A81-44CA1481AF23}"/>
+              </a:ext>
+            </a:extLst>
+          </p:cNvPr>
+          <p:cNvPicPr>
+            <a:picLocks noChangeAspect="1"/>
+          </p:cNvPicPr>
+          <p:nvPr/>
+        </p:nvPicPr>
+        <p:blipFill>
+          <a:blip r:embed="rId4" cstate="email">
+            <a:extLst>
+              <a:ext uri="{28A0092B-C50C-407E-A947-70E740481C1C}">
+                <a14:useLocalDpi xmlns:a14="http://schemas.microsoft.com/office/drawing/2010/main"/>
+              </a:ext>
+            </a:extLst>
+          </a:blip>
+          <a:stretch>
+            <a:fillRect/>
+          </a:stretch>
+        </p:blipFill>
+        <p:spPr>
+          <a:xfrm>
+            <a:off x="105952" y="3131170"/>
+            <a:ext cx="4872900" cy="3624471"/>
+          </a:xfrm>
+          <a:prstGeom prst="rect">
+            <a:avLst/>
+          </a:prstGeom>
+        </p:spPr>
+      </p:pic>
+      <p:pic>
+        <p:nvPicPr>
+          <p:cNvPr id="14" name="Picture 13">
+            <a:extLst>
+              <a:ext uri="{FF2B5EF4-FFF2-40B4-BE49-F238E27FC236}">
+                <a16:creationId xmlns:a16="http://schemas.microsoft.com/office/drawing/2014/main" id="{6CFCE086-5AD0-8344-AE93-F843BE43AD52}"/>
+              </a:ext>
+            </a:extLst>
+          </p:cNvPr>
+          <p:cNvPicPr>
+            <a:picLocks noChangeAspect="1"/>
+          </p:cNvPicPr>
+          <p:nvPr/>
+        </p:nvPicPr>
+        <p:blipFill>
+          <a:blip r:embed="rId5" cstate="email">
+            <a:extLst>
+              <a:ext uri="{28A0092B-C50C-407E-A947-70E740481C1C}">
+                <a14:useLocalDpi xmlns:a14="http://schemas.microsoft.com/office/drawing/2010/main"/>
+              </a:ext>
+            </a:extLst>
+          </a:blip>
+          <a:stretch>
+            <a:fillRect/>
+          </a:stretch>
+        </p:blipFill>
+        <p:spPr>
+          <a:xfrm>
+            <a:off x="5771810" y="3131171"/>
+            <a:ext cx="4723317" cy="3624470"/>
+          </a:xfrm>
+          <a:prstGeom prst="rect">
+            <a:avLst/>
+          </a:prstGeom>
+        </p:spPr>
+      </p:pic>
+      <p:sp>
+        <p:nvSpPr>
+          <p:cNvPr id="2" name="TextBox 1">
+            <a:extLst>
+              <a:ext uri="{FF2B5EF4-FFF2-40B4-BE49-F238E27FC236}">
+                <a16:creationId xmlns:a16="http://schemas.microsoft.com/office/drawing/2014/main" id="{1B7E5E53-FD25-1743-9C2C-515C3CCE6CCD}"/>
+              </a:ext>
+            </a:extLst>
+          </p:cNvPr>
+          <p:cNvSpPr txBox="1"/>
+          <p:nvPr/>
+        </p:nvSpPr>
+        <p:spPr>
+          <a:xfrm>
+            <a:off x="6360881" y="200276"/>
+            <a:ext cx="1338363" cy="523220"/>
+          </a:xfrm>
+          <a:prstGeom prst="rect">
+            <a:avLst/>
+          </a:prstGeom>
+          <a:noFill/>
+        </p:spPr>
+        <p:txBody>
+          <a:bodyPr wrap="square" rtlCol="0">
+            <a:spAutoFit/>
+          </a:bodyPr>
+          <a:lstStyle/>
+          <a:p>
+            <a:r>
+              <a:rPr lang="en-US" b="1" dirty="0">
+                <a:solidFill>
+                  <a:srgbClr val="FF0000"/>
+                </a:solidFill>
+              </a:rPr>
+              <a:t>Example:</a:t>
+            </a:r>
+          </a:p>
+          <a:p>
+            <a:r>
+              <a:rPr lang="en-US" b="1" dirty="0">
+                <a:solidFill>
+                  <a:srgbClr val="FF0000"/>
+                </a:solidFill>
+              </a:rPr>
+              <a:t>estimating </a:t>
+            </a:r>
+            <a:r>
+              <a:rPr lang="el-GR" b="1" dirty="0">
+                <a:solidFill>
+                  <a:srgbClr val="FF0000"/>
+                </a:solidFill>
+              </a:rPr>
+              <a:t>θ</a:t>
+            </a:r>
+            <a:r>
+              <a:rPr lang="en-US" b="1" dirty="0">
+                <a:solidFill>
+                  <a:srgbClr val="FF0000"/>
+                </a:solidFill>
+              </a:rPr>
+              <a:t>  </a:t>
+            </a:r>
+          </a:p>
+        </p:txBody>
+      </p:sp>
+      <p:sp>
+        <p:nvSpPr>
+          <p:cNvPr id="3" name="TextBox 2">
+            <a:extLst>
+              <a:ext uri="{FF2B5EF4-FFF2-40B4-BE49-F238E27FC236}">
+                <a16:creationId xmlns:a16="http://schemas.microsoft.com/office/drawing/2014/main" id="{650AEA09-D359-3F4C-ADEB-940C7824EFEA}"/>
+              </a:ext>
+            </a:extLst>
+          </p:cNvPr>
+          <p:cNvSpPr txBox="1"/>
+          <p:nvPr/>
+        </p:nvSpPr>
+        <p:spPr>
+          <a:xfrm>
+            <a:off x="204717" y="1392072"/>
+            <a:ext cx="4271749" cy="523220"/>
+          </a:xfrm>
+          <a:prstGeom prst="rect">
+            <a:avLst/>
+          </a:prstGeom>
+          <a:noFill/>
+        </p:spPr>
+        <p:txBody>
+          <a:bodyPr wrap="square" rtlCol="0">
+            <a:spAutoFit/>
+          </a:bodyPr>
+          <a:lstStyle/>
+          <a:p>
+            <a:r>
+              <a:rPr lang="en-US" dirty="0"/>
+              <a:t>Frequentist approach gives interval 10.2 - 12.2</a:t>
+            </a:r>
+          </a:p>
+          <a:p>
+            <a:r>
+              <a:rPr lang="en-US" dirty="0"/>
+              <a:t>Bayesian approach gives interval 9.0 - 10.0</a:t>
+            </a:r>
+          </a:p>
+        </p:txBody>
+      </p:sp>
+    </p:spTree>
+    <p:extLst>
+      <p:ext uri="{BB962C8B-B14F-4D97-AF65-F5344CB8AC3E}">
+        <p14:creationId xmlns:p14="http://schemas.microsoft.com/office/powerpoint/2010/main" val="272889797"/>
       </p:ext>
     </p:extLst>
   </p:cSld>

--- a/Bayes_Bayesian.pptx
+++ b/Bayes_Bayesian.pptx
@@ -5,7 +5,7 @@
     <p:sldMasterId id="2147483659" r:id="rId1"/>
   </p:sldMasterIdLst>
   <p:notesMasterIdLst>
-    <p:notesMasterId r:id="rId9"/>
+    <p:notesMasterId r:id="rId10"/>
   </p:notesMasterIdLst>
   <p:sldIdLst>
     <p:sldId id="256" r:id="rId2"/>
@@ -13,8 +13,9 @@
     <p:sldId id="260" r:id="rId4"/>
     <p:sldId id="258" r:id="rId5"/>
     <p:sldId id="259" r:id="rId6"/>
-    <p:sldId id="261" r:id="rId7"/>
-    <p:sldId id="262" r:id="rId8"/>
+    <p:sldId id="291" r:id="rId7"/>
+    <p:sldId id="263" r:id="rId8"/>
+    <p:sldId id="262" r:id="rId9"/>
   </p:sldIdLst>
   <p:sldSz cx="12192000" cy="6858000"/>
   <p:notesSz cx="6858000" cy="9144000"/>
@@ -21423,8 +21424,8 @@
         </p:nvSpPr>
         <p:spPr>
           <a:xfrm>
-            <a:off x="0" y="37572"/>
-            <a:ext cx="4572000" cy="523220"/>
+            <a:off x="-1" y="37572"/>
+            <a:ext cx="6694715" cy="523220"/>
           </a:xfrm>
           <a:prstGeom prst="rect">
             <a:avLst/>
@@ -21439,7 +21440,7 @@
           <a:p>
             <a:r>
               <a:rPr lang="en-US" sz="2800" b="1" dirty="0"/>
-              <a:t>Bayesian vs Frequentist</a:t>
+              <a:t>Probability - Bayesian vs Frequentist</a:t>
             </a:r>
           </a:p>
         </p:txBody>
@@ -21458,8 +21459,8 @@
         </p:nvSpPr>
         <p:spPr>
           <a:xfrm>
-            <a:off x="54592" y="1563370"/>
-            <a:ext cx="5929952" cy="2031325"/>
+            <a:off x="185221" y="4350908"/>
+            <a:ext cx="5929952" cy="2462213"/>
           </a:xfrm>
           <a:prstGeom prst="rect">
             <a:avLst/>
@@ -21471,6 +21472,65 @@
             <a:spAutoFit/>
           </a:bodyPr>
           <a:lstStyle/>
+          <a:p>
+            <a:r>
+              <a:rPr lang="en-US" b="1" dirty="0">
+                <a:solidFill>
+                  <a:srgbClr val="FF0000"/>
+                </a:solidFill>
+              </a:rPr>
+              <a:t>Frequentist (classical):</a:t>
+            </a:r>
+          </a:p>
+          <a:p>
+            <a:r>
+              <a:rPr lang="en-US" dirty="0"/>
+              <a:t>    Calculate means (estimates) and confidence intervals</a:t>
+            </a:r>
+          </a:p>
+          <a:p>
+            <a:r>
+              <a:rPr lang="en-US" dirty="0"/>
+              <a:t>    Problems treating missing data (</a:t>
+            </a:r>
+            <a:r>
+              <a:rPr lang="en-US" b="1" dirty="0">
+                <a:solidFill>
+                  <a:srgbClr val="FF0000"/>
+                </a:solidFill>
+              </a:rPr>
+              <a:t>survivorship bias</a:t>
+            </a:r>
+            <a:r>
+              <a:rPr lang="en-US" dirty="0"/>
+              <a:t>)</a:t>
+            </a:r>
+          </a:p>
+          <a:p>
+            <a:r>
+              <a:rPr lang="en-US" dirty="0"/>
+              <a:t>    Problems with hypothesis testing (</a:t>
+            </a:r>
+            <a:r>
+              <a:rPr lang="en-US" b="1" dirty="0">
+                <a:solidFill>
+                  <a:srgbClr val="FF0000"/>
+                </a:solidFill>
+              </a:rPr>
+              <a:t>p-hacking</a:t>
+            </a:r>
+            <a:r>
+              <a:rPr lang="en-US" dirty="0"/>
+              <a:t>)</a:t>
+            </a:r>
+          </a:p>
+          <a:p>
+            <a:endParaRPr lang="en-US" b="1" dirty="0">
+              <a:solidFill>
+                <a:srgbClr val="FF0000"/>
+              </a:solidFill>
+            </a:endParaRPr>
+          </a:p>
           <a:p>
             <a:r>
               <a:rPr lang="en-US" b="1" dirty="0">
@@ -21506,32 +21566,11 @@
             </a:r>
           </a:p>
           <a:p>
-            <a:r>
-              <a:rPr lang="en-US" b="1" dirty="0">
-                <a:solidFill>
-                  <a:srgbClr val="FF0000"/>
-                </a:solidFill>
-              </a:rPr>
-              <a:t>Frequentist (classical):</a:t>
-            </a:r>
-          </a:p>
-          <a:p>
-            <a:r>
-              <a:rPr lang="en-US" dirty="0"/>
-              <a:t>    Calculate means (estimates) and confidence intervals</a:t>
-            </a:r>
-          </a:p>
-          <a:p>
-            <a:r>
-              <a:rPr lang="en-US" dirty="0"/>
-              <a:t>    Problems treating missing data (survivorship bias)</a:t>
-            </a:r>
-          </a:p>
-          <a:p>
-            <a:r>
-              <a:rPr lang="en-US" dirty="0"/>
-              <a:t>    Problems with hypothesis testing (p-hacking)</a:t>
-            </a:r>
+            <a:endParaRPr lang="en-US" b="1" dirty="0">
+              <a:solidFill>
+                <a:srgbClr val="FF0000"/>
+              </a:solidFill>
+            </a:endParaRPr>
           </a:p>
         </p:txBody>
       </p:sp>
@@ -21634,7 +21673,7 @@
         </p:nvSpPr>
         <p:spPr>
           <a:xfrm>
-            <a:off x="6985379" y="2498608"/>
+            <a:off x="6985379" y="2596582"/>
             <a:ext cx="5206621" cy="1600438"/>
           </a:xfrm>
           <a:prstGeom prst="rect">
@@ -21713,8 +21752,8 @@
         </p:nvSpPr>
         <p:spPr>
           <a:xfrm>
-            <a:off x="6985379" y="4099046"/>
-            <a:ext cx="5206621" cy="1169551"/>
+            <a:off x="6985379" y="4294994"/>
+            <a:ext cx="5206621" cy="954107"/>
           </a:xfrm>
           <a:prstGeom prst="rect">
             <a:avLst/>
@@ -21758,12 +21797,6 @@
               <a:t>Whoever is closer (without going over) wins.</a:t>
             </a:r>
           </a:p>
-          <a:p>
-            <a:r>
-              <a:rPr lang="en-US" dirty="0"/>
-              <a:t>comparing two drugs A &amp; B.</a:t>
-            </a:r>
-          </a:p>
         </p:txBody>
       </p:sp>
       <p:sp>
@@ -21780,7 +21813,7 @@
         </p:nvSpPr>
         <p:spPr>
           <a:xfrm>
-            <a:off x="54591" y="1255593"/>
+            <a:off x="185220" y="4043131"/>
             <a:ext cx="5595582" cy="307777"/>
           </a:xfrm>
           <a:prstGeom prst="rect">
@@ -21825,7 +21858,7 @@
         </p:nvSpPr>
         <p:spPr>
           <a:xfrm>
-            <a:off x="6985379" y="5330152"/>
+            <a:off x="6985379" y="5526100"/>
             <a:ext cx="5206621" cy="307777"/>
           </a:xfrm>
           <a:prstGeom prst="rect">
@@ -21854,10 +21887,96 @@
           </a:p>
         </p:txBody>
       </p:sp>
+      <p:sp>
+        <p:nvSpPr>
+          <p:cNvPr id="2" name="TextBox 1">
+            <a:extLst>
+              <a:ext uri="{FF2B5EF4-FFF2-40B4-BE49-F238E27FC236}">
+                <a16:creationId xmlns:a16="http://schemas.microsoft.com/office/drawing/2014/main" id="{809CB213-96B1-CD42-937A-368036DCD1E0}"/>
+              </a:ext>
+            </a:extLst>
+          </p:cNvPr>
+          <p:cNvSpPr txBox="1"/>
+          <p:nvPr/>
+        </p:nvSpPr>
+        <p:spPr>
+          <a:xfrm>
+            <a:off x="353867" y="868569"/>
+            <a:ext cx="5560001" cy="2677656"/>
+          </a:xfrm>
+          <a:prstGeom prst="rect">
+            <a:avLst/>
+          </a:prstGeom>
+          <a:noFill/>
+        </p:spPr>
+        <p:txBody>
+          <a:bodyPr wrap="square" rtlCol="0">
+            <a:spAutoFit/>
+          </a:bodyPr>
+          <a:lstStyle/>
+          <a:p>
+            <a:r>
+              <a:rPr lang="en-US" dirty="0"/>
+              <a:t>The </a:t>
+            </a:r>
+            <a:r>
+              <a:rPr lang="en-US" b="1" dirty="0">
+                <a:solidFill>
+                  <a:srgbClr val="FF0000"/>
+                </a:solidFill>
+              </a:rPr>
+              <a:t>Frequentist</a:t>
+            </a:r>
+            <a:r>
+              <a:rPr lang="en-US" dirty="0"/>
+              <a:t> see probability as something that has to do with a limiting frequency based on an observed proportion.</a:t>
+            </a:r>
+          </a:p>
+          <a:p>
+            <a:endParaRPr lang="en-US" dirty="0"/>
+          </a:p>
+          <a:p>
+            <a:r>
+              <a:rPr lang="en-US" dirty="0"/>
+              <a:t>The </a:t>
+            </a:r>
+            <a:r>
+              <a:rPr lang="en-US" b="1" dirty="0">
+                <a:solidFill>
+                  <a:srgbClr val="FF0000"/>
+                </a:solidFill>
+              </a:rPr>
+              <a:t>Bayesian</a:t>
+            </a:r>
+            <a:r>
+              <a:rPr lang="en-US" dirty="0"/>
+              <a:t> is subjective and uses a priori beliefs to define a prior probability distribution on the possible values of the unknown parameters.</a:t>
+            </a:r>
+          </a:p>
+          <a:p>
+            <a:endParaRPr lang="en-US" dirty="0"/>
+          </a:p>
+          <a:p>
+            <a:r>
+              <a:rPr lang="en-US" dirty="0"/>
+              <a:t>Frequentists accuse Bayesians for being subjective in selecting a prior model / distribution. </a:t>
+            </a:r>
+          </a:p>
+          <a:p>
+            <a:endParaRPr lang="en-US" dirty="0"/>
+          </a:p>
+          <a:p>
+            <a:r>
+              <a:rPr lang="en-US" dirty="0"/>
+              <a:t>Bayesians snap back that at least they have a model, whereas Frequentists just calculate averages of observed data</a:t>
+            </a:r>
+          </a:p>
+        </p:txBody>
+      </p:sp>
     </p:spTree>
     <p:extLst>
       <p:ext uri="{BB962C8B-B14F-4D97-AF65-F5344CB8AC3E}">
-        <p14:creationId xmlns:p14="http://schemas.microsoft.com/office/powerpoint/2010/main" val="1794610867"/>
+        <p14:creationId xmlns:p14="http://schemas.microsoft.com/office/powerpoint/2010/main" val="4124171004"/>
       </p:ext>
     </p:extLst>
   </p:cSld>
@@ -21868,6 +21987,284 @@
 </file>
 
 <file path=ppt/slides/slide7.xml><?xml version="1.0" encoding="utf-8"?>
+<p:sld xmlns:a="http://schemas.openxmlformats.org/drawingml/2006/main" xmlns:r="http://schemas.openxmlformats.org/officeDocument/2006/relationships" xmlns:p="http://schemas.openxmlformats.org/presentationml/2006/main">
+  <p:cSld>
+    <p:spTree>
+      <p:nvGrpSpPr>
+        <p:cNvPr id="1" name=""/>
+        <p:cNvGrpSpPr/>
+        <p:nvPr/>
+      </p:nvGrpSpPr>
+      <p:grpSpPr>
+        <a:xfrm>
+          <a:off x="0" y="0"/>
+          <a:ext cx="0" cy="0"/>
+          <a:chOff x="0" y="0"/>
+          <a:chExt cx="0" cy="0"/>
+        </a:xfrm>
+      </p:grpSpPr>
+      <p:sp>
+        <p:nvSpPr>
+          <p:cNvPr id="4" name="TextBox 3">
+            <a:extLst>
+              <a:ext uri="{FF2B5EF4-FFF2-40B4-BE49-F238E27FC236}">
+                <a16:creationId xmlns:a16="http://schemas.microsoft.com/office/drawing/2014/main" id="{93FB964B-A29C-1649-A2C4-81BC78C24A50}"/>
+              </a:ext>
+            </a:extLst>
+          </p:cNvPr>
+          <p:cNvSpPr txBox="1"/>
+          <p:nvPr/>
+        </p:nvSpPr>
+        <p:spPr>
+          <a:xfrm>
+            <a:off x="238539" y="225286"/>
+            <a:ext cx="5579165" cy="6555641"/>
+          </a:xfrm>
+          <a:prstGeom prst="rect">
+            <a:avLst/>
+          </a:prstGeom>
+          <a:noFill/>
+        </p:spPr>
+        <p:txBody>
+          <a:bodyPr wrap="square" rtlCol="0">
+            <a:spAutoFit/>
+          </a:bodyPr>
+          <a:lstStyle/>
+          <a:p>
+            <a:r>
+              <a:rPr lang="en-US" b="1" dirty="0"/>
+              <a:t>Bayesian vs Frequentist – Survivorship Bias in World War 2</a:t>
+            </a:r>
+          </a:p>
+          <a:p>
+            <a:endParaRPr lang="en-US" dirty="0"/>
+          </a:p>
+          <a:p>
+            <a:r>
+              <a:rPr lang="en-US" dirty="0"/>
+              <a:t>During World War II the US military's concluded that the most-hit areas of the plane needed additional armor.</a:t>
+            </a:r>
+          </a:p>
+          <a:p>
+            <a:r>
+              <a:rPr lang="en-US" dirty="0"/>
+              <a:t>But statistician Abraham Wald (Statistical Research Group (SRG) at Columbia University) has recommended adding armor to the areas that showed the least damage. His reasoning was that the sample didn't include the planes which were shot down.</a:t>
+            </a:r>
+          </a:p>
+          <a:p>
+            <a:endParaRPr lang="en-US" dirty="0"/>
+          </a:p>
+          <a:p>
+            <a:r>
+              <a:rPr lang="en-US" dirty="0"/>
+              <a:t>It is dangerous to use data "as is" to create a model,</a:t>
+            </a:r>
+            <a:br>
+              <a:rPr lang="en-US" dirty="0"/>
+            </a:br>
+            <a:r>
+              <a:rPr lang="en-US" dirty="0"/>
+              <a:t>because the data may be biased to start with,</a:t>
+            </a:r>
+            <a:br>
+              <a:rPr lang="en-US" dirty="0"/>
+            </a:br>
+            <a:r>
+              <a:rPr lang="en-US" dirty="0"/>
+              <a:t>and it can easily lead to creating a biased model</a:t>
+            </a:r>
+            <a:br>
+              <a:rPr lang="en-US" dirty="0"/>
+            </a:br>
+            <a:br>
+              <a:rPr lang="en-US" dirty="0"/>
+            </a:br>
+            <a:r>
+              <a:rPr lang="en-US" dirty="0"/>
+              <a:t>Problem occur when we have:</a:t>
+            </a:r>
+            <a:br>
+              <a:rPr lang="en-US" dirty="0"/>
+            </a:br>
+            <a:r>
+              <a:rPr lang="en-US" dirty="0"/>
+              <a:t> - under-represented features (missing data)</a:t>
+            </a:r>
+            <a:br>
+              <a:rPr lang="en-US" dirty="0"/>
+            </a:br>
+            <a:r>
+              <a:rPr lang="en-US" dirty="0"/>
+              <a:t> - over-represented features,</a:t>
+            </a:r>
+            <a:br>
+              <a:rPr lang="en-US" dirty="0"/>
+            </a:br>
+            <a:r>
+              <a:rPr lang="en-US" dirty="0"/>
+              <a:t> - "target leakage" effect.</a:t>
+            </a:r>
+            <a:br>
+              <a:rPr lang="en-US" dirty="0"/>
+            </a:br>
+            <a:br>
+              <a:rPr lang="en-US" dirty="0"/>
+            </a:br>
+            <a:r>
+              <a:rPr lang="en-US" dirty="0"/>
+              <a:t>Survivorship bias:</a:t>
+            </a:r>
+            <a:br>
+              <a:rPr lang="en-US" dirty="0"/>
+            </a:br>
+            <a:r>
+              <a:rPr lang="en-US" dirty="0"/>
+              <a:t> - </a:t>
+            </a:r>
+            <a:r>
+              <a:rPr lang="en-US" dirty="0">
+                <a:hlinkClick r:id="rId2"/>
+              </a:rPr>
+              <a:t>https://www.youtube.com/watch?v=B3YQJ5DwTzM</a:t>
+            </a:r>
+            <a:r>
+              <a:rPr lang="en-US" dirty="0"/>
+              <a:t> </a:t>
+            </a:r>
+            <a:br>
+              <a:rPr lang="en-US" dirty="0"/>
+            </a:br>
+            <a:br>
+              <a:rPr lang="en-US" dirty="0"/>
+            </a:br>
+            <a:r>
+              <a:rPr lang="en-US" dirty="0"/>
+              <a:t>Gender Bias:</a:t>
+            </a:r>
+            <a:br>
+              <a:rPr lang="en-US" dirty="0"/>
+            </a:br>
+            <a:r>
+              <a:rPr lang="en-US" dirty="0"/>
+              <a:t> - </a:t>
+            </a:r>
+            <a:r>
+              <a:rPr lang="en-US" dirty="0">
+                <a:hlinkClick r:id="rId3"/>
+              </a:rPr>
+              <a:t>https://www.youtube.com/watch?v=p60-Jdq754A</a:t>
+            </a:r>
+            <a:r>
+              <a:rPr lang="en-US" dirty="0"/>
+              <a:t> </a:t>
+            </a:r>
+            <a:br>
+              <a:rPr lang="en-US" dirty="0"/>
+            </a:br>
+            <a:br>
+              <a:rPr lang="en-US" dirty="0"/>
+            </a:br>
+            <a:r>
+              <a:rPr lang="en-US" dirty="0"/>
+              <a:t>Bias in criminal justice:</a:t>
+            </a:r>
+            <a:br>
+              <a:rPr lang="en-US" dirty="0"/>
+            </a:br>
+            <a:r>
+              <a:rPr lang="en-US" dirty="0"/>
+              <a:t> - </a:t>
+            </a:r>
+            <a:r>
+              <a:rPr lang="en-US" dirty="0">
+                <a:hlinkClick r:id="rId4"/>
+              </a:rPr>
+              <a:t>https://www.youtube.com/watch?v=Gi4YeRqfb24</a:t>
+            </a:r>
+            <a:r>
+              <a:rPr lang="en-US" dirty="0"/>
+              <a:t> </a:t>
+            </a:r>
+            <a:br>
+              <a:rPr lang="en-US" dirty="0"/>
+            </a:br>
+            <a:br>
+              <a:rPr lang="en-US" dirty="0"/>
+            </a:br>
+            <a:r>
+              <a:rPr lang="en-US" dirty="0"/>
+              <a:t>Target Leakage:</a:t>
+            </a:r>
+            <a:br>
+              <a:rPr lang="en-US" dirty="0"/>
+            </a:br>
+            <a:r>
+              <a:rPr lang="en-US" dirty="0"/>
+              <a:t> - </a:t>
+            </a:r>
+            <a:r>
+              <a:rPr lang="en-US" dirty="0">
+                <a:hlinkClick r:id="rId5"/>
+              </a:rPr>
+              <a:t>https://www.youtube.com/watch?v=y8qaI5mpJeA</a:t>
+            </a:r>
+            <a:r>
+              <a:rPr lang="en-US" dirty="0"/>
+              <a:t> </a:t>
+            </a:r>
+          </a:p>
+        </p:txBody>
+      </p:sp>
+      <p:pic>
+        <p:nvPicPr>
+          <p:cNvPr id="6" name="Picture 5">
+            <a:extLst>
+              <a:ext uri="{FF2B5EF4-FFF2-40B4-BE49-F238E27FC236}">
+                <a16:creationId xmlns:a16="http://schemas.microsoft.com/office/drawing/2014/main" id="{EA27DDEE-0422-6E4F-AC95-3AFA579C3DB8}"/>
+              </a:ext>
+            </a:extLst>
+          </p:cNvPr>
+          <p:cNvPicPr>
+            <a:picLocks noChangeAspect="1"/>
+          </p:cNvPicPr>
+          <p:nvPr/>
+        </p:nvPicPr>
+        <p:blipFill>
+          <a:blip r:embed="rId6" cstate="email">
+            <a:extLst>
+              <a:ext uri="{28A0092B-C50C-407E-A947-70E740481C1C}">
+                <a14:useLocalDpi xmlns:a14="http://schemas.microsoft.com/office/drawing/2010/main"/>
+              </a:ext>
+            </a:extLst>
+          </a:blip>
+          <a:stretch>
+            <a:fillRect/>
+          </a:stretch>
+        </p:blipFill>
+        <p:spPr>
+          <a:xfrm>
+            <a:off x="6617056" y="225286"/>
+            <a:ext cx="5429170" cy="3419062"/>
+          </a:xfrm>
+          <a:prstGeom prst="rect">
+            <a:avLst/>
+          </a:prstGeom>
+        </p:spPr>
+      </p:pic>
+    </p:spTree>
+    <p:extLst>
+      <p:ext uri="{BB962C8B-B14F-4D97-AF65-F5344CB8AC3E}">
+        <p14:creationId xmlns:p14="http://schemas.microsoft.com/office/powerpoint/2010/main" val="3774625219"/>
+      </p:ext>
+    </p:extLst>
+  </p:cSld>
+  <p:clrMapOvr>
+    <a:masterClrMapping/>
+  </p:clrMapOvr>
+</p:sld>
+</file>
+
+<file path=ppt/slides/slide8.xml><?xml version="1.0" encoding="utf-8"?>
 <p:sld xmlns:a="http://schemas.openxmlformats.org/drawingml/2006/main" xmlns:r="http://schemas.openxmlformats.org/officeDocument/2006/relationships" xmlns:p="http://schemas.openxmlformats.org/presentationml/2006/main">
   <p:cSld>
     <p:spTree>
@@ -21933,7 +22330,7 @@
         </p:nvSpPr>
         <p:spPr>
           <a:xfrm>
-            <a:off x="0" y="560792"/>
+            <a:off x="0" y="645511"/>
             <a:ext cx="5636525" cy="523220"/>
           </a:xfrm>
           <a:prstGeom prst="rect">
@@ -21957,7 +22354,7 @@
             </a:r>
             <a:r>
               <a:rPr lang="en-US" dirty="0"/>
-              <a:t> </a:t>
+              <a:t> (26 min lecture) </a:t>
             </a:r>
           </a:p>
           <a:p>
@@ -22162,8 +22559,8 @@
         </p:nvSpPr>
         <p:spPr>
           <a:xfrm>
-            <a:off x="204717" y="1392072"/>
-            <a:ext cx="4271749" cy="523220"/>
+            <a:off x="0" y="1291414"/>
+            <a:ext cx="7699244" cy="1600438"/>
           </a:xfrm>
           <a:prstGeom prst="rect">
             <a:avLst/>
@@ -22178,13 +22575,38 @@
           <a:p>
             <a:r>
               <a:rPr lang="en-US" dirty="0"/>
-              <a:t>Frequentist approach gives interval 10.2 - 12.2</a:t>
+              <a:t>Example - truncated exponential.</a:t>
+            </a:r>
+            <a:br>
+              <a:rPr lang="en-US" dirty="0"/>
+            </a:br>
+            <a:r>
+              <a:rPr lang="en-US" dirty="0"/>
+              <a:t>You observe times of failures of something.</a:t>
             </a:r>
           </a:p>
           <a:p>
             <a:r>
               <a:rPr lang="en-US" dirty="0"/>
-              <a:t>Bayesian approach gives interval 9.0 - 10.0</a:t>
+              <a:t>The time should be less than 10 min, but for the first 10 min there are no failures because the "device" is protected. You can only measure after 10 min. </a:t>
+            </a:r>
+          </a:p>
+          <a:p>
+            <a:r>
+              <a:rPr lang="en-US" dirty="0"/>
+              <a:t>Frequentist approach just "averages" the observed values. </a:t>
+            </a:r>
+          </a:p>
+          <a:p>
+            <a:r>
+              <a:rPr lang="en-US" dirty="0"/>
+              <a:t>As all of them are &gt;10, it gives interval 10.2 - 12.2 min</a:t>
+            </a:r>
+          </a:p>
+          <a:p>
+            <a:r>
+              <a:rPr lang="en-US" dirty="0"/>
+              <a:t>Bayesian approach with subjective flat prior gives interval 9.0 - 10.0 min, which is correct.</a:t>
             </a:r>
           </a:p>
         </p:txBody>

--- a/Bayes_Bayesian.pptx
+++ b/Bayes_Bayesian.pptx
@@ -5,17 +5,19 @@
     <p:sldMasterId id="2147483659" r:id="rId1"/>
   </p:sldMasterIdLst>
   <p:notesMasterIdLst>
-    <p:notesMasterId r:id="rId10"/>
+    <p:notesMasterId r:id="rId12"/>
   </p:notesMasterIdLst>
   <p:sldIdLst>
     <p:sldId id="256" r:id="rId2"/>
-    <p:sldId id="257" r:id="rId3"/>
-    <p:sldId id="260" r:id="rId4"/>
-    <p:sldId id="258" r:id="rId5"/>
-    <p:sldId id="259" r:id="rId6"/>
-    <p:sldId id="291" r:id="rId7"/>
-    <p:sldId id="263" r:id="rId8"/>
-    <p:sldId id="262" r:id="rId9"/>
+    <p:sldId id="263" r:id="rId3"/>
+    <p:sldId id="292" r:id="rId4"/>
+    <p:sldId id="291" r:id="rId5"/>
+    <p:sldId id="257" r:id="rId6"/>
+    <p:sldId id="258" r:id="rId7"/>
+    <p:sldId id="260" r:id="rId8"/>
+    <p:sldId id="293" r:id="rId9"/>
+    <p:sldId id="294" r:id="rId10"/>
+    <p:sldId id="262" r:id="rId11"/>
   </p:sldIdLst>
   <p:sldSz cx="12192000" cy="6858000"/>
   <p:notesSz cx="6858000" cy="9144000"/>
@@ -254,20 +256,6 @@
     </p:ext>
   </p:extLst>
 </p:presentation>
-</file>
-
-<file path=ppt/changesInfos/changesInfo1.xml><?xml version="1.0" encoding="utf-8"?>
-<pc:chgInfo xmlns:a="http://schemas.openxmlformats.org/drawingml/2006/main" xmlns:r="http://schemas.openxmlformats.org/officeDocument/2006/relationships" xmlns:ac="http://schemas.microsoft.com/office/drawing/2013/main/command" xmlns:pc="http://schemas.microsoft.com/office/powerpoint/2013/main/command">
-  <pc:docChgLst>
-    <pc:chgData name="Javier Valderrama" userId="S::javier.valderrama@nationaldebtrelief.com::4c07f5f7-6816-4e17-a145-d1bcaae26731" providerId="AD" clId="Web-{2A5AFB3E-5A76-6412-34B2-0286C53A7609}"/>
-  </pc:docChgLst>
-  <pc:docChgLst>
-    <pc:chgData name="Lev Selector" userId="314cf8c1-d356-4160-b242-72dee3bb7a46" providerId="ADAL" clId="{8C9BD69C-BC63-A845-A806-EC4BD0D69649}"/>
-  </pc:docChgLst>
-  <pc:docChgLst>
-    <pc:chgData name="Lev Selector" userId="314cf8c1-d356-4160-b242-72dee3bb7a46" providerId="ADAL" clId="{4CBB6E57-5808-8F48-8E34-7993863C1B7B}"/>
-  </pc:docChgLst>
-</pc:chgInfo>
 </file>
 
 <file path=ppt/notesMasters/notesMaster1.xml><?xml version="1.0" encoding="utf-8"?>
@@ -1876,7 +1864,116 @@
     </p:spTree>
     <p:extLst>
       <p:ext uri="{BB962C8B-B14F-4D97-AF65-F5344CB8AC3E}">
-        <p14:creationId xmlns:p14="http://schemas.microsoft.com/office/powerpoint/2010/main" val="528192325"/>
+        <p14:creationId xmlns:p14="http://schemas.microsoft.com/office/powerpoint/2010/main" val="3496740530"/>
+      </p:ext>
+    </p:extLst>
+  </p:cSld>
+  <p:clrMapOvr>
+    <a:masterClrMapping/>
+  </p:clrMapOvr>
+</p:notes>
+</file>
+
+<file path=ppt/notesSlides/notesSlide5.xml><?xml version="1.0" encoding="utf-8"?>
+<p:notes xmlns:a="http://schemas.openxmlformats.org/drawingml/2006/main" xmlns:r="http://schemas.openxmlformats.org/officeDocument/2006/relationships" xmlns:p="http://schemas.openxmlformats.org/presentationml/2006/main" showMasterSp="0" showMasterPhAnim="0">
+  <p:cSld>
+    <p:spTree>
+      <p:nvGrpSpPr>
+        <p:cNvPr id="1" name="Shape 84"/>
+        <p:cNvGrpSpPr/>
+        <p:nvPr/>
+      </p:nvGrpSpPr>
+      <p:grpSpPr>
+        <a:xfrm>
+          <a:off x="0" y="0"/>
+          <a:ext cx="0" cy="0"/>
+          <a:chOff x="0" y="0"/>
+          <a:chExt cx="0" cy="0"/>
+        </a:xfrm>
+      </p:grpSpPr>
+      <p:sp>
+        <p:nvSpPr>
+          <p:cNvPr id="85" name="Google Shape;85;p3:notes"/>
+          <p:cNvSpPr txBox="1">
+            <a:spLocks noGrp="1"/>
+          </p:cNvSpPr>
+          <p:nvPr>
+            <p:ph type="body" idx="1"/>
+          </p:nvPr>
+        </p:nvSpPr>
+        <p:spPr>
+          <a:xfrm>
+            <a:off x="685800" y="4400550"/>
+            <a:ext cx="5486400" cy="3600450"/>
+          </a:xfrm>
+          <a:prstGeom prst="rect">
+            <a:avLst/>
+          </a:prstGeom>
+        </p:spPr>
+        <p:txBody>
+          <a:bodyPr spcFirstLastPara="1" wrap="square" lIns="91425" tIns="91425" rIns="91425" bIns="91425" anchor="t" anchorCtr="0">
+            <a:noAutofit/>
+          </a:bodyPr>
+          <a:lstStyle/>
+          <a:p>
+            <a:pPr marL="0" lvl="0" indent="0" algn="l" rtl="0">
+              <a:spcBef>
+                <a:spcPts val="0"/>
+              </a:spcBef>
+              <a:spcAft>
+                <a:spcPts val="0"/>
+              </a:spcAft>
+              <a:buNone/>
+            </a:pPr>
+            <a:endParaRPr/>
+          </a:p>
+        </p:txBody>
+      </p:sp>
+      <p:sp>
+        <p:nvSpPr>
+          <p:cNvPr id="86" name="Google Shape;86;p3:notes"/>
+          <p:cNvSpPr>
+            <a:spLocks noGrp="1" noRot="1" noChangeAspect="1"/>
+          </p:cNvSpPr>
+          <p:nvPr>
+            <p:ph type="sldImg" idx="2"/>
+          </p:nvPr>
+        </p:nvSpPr>
+        <p:spPr>
+          <a:xfrm>
+            <a:off x="685800" y="1143000"/>
+            <a:ext cx="5486400" cy="3086100"/>
+          </a:xfrm>
+          <a:custGeom>
+            <a:avLst/>
+            <a:gdLst/>
+            <a:ahLst/>
+            <a:cxnLst/>
+            <a:rect l="l" t="t" r="r" b="b"/>
+            <a:pathLst>
+              <a:path w="120000" h="120000" extrusionOk="0">
+                <a:moveTo>
+                  <a:pt x="0" y="0"/>
+                </a:moveTo>
+                <a:lnTo>
+                  <a:pt x="120000" y="0"/>
+                </a:lnTo>
+                <a:lnTo>
+                  <a:pt x="120000" y="120000"/>
+                </a:lnTo>
+                <a:lnTo>
+                  <a:pt x="0" y="120000"/>
+                </a:lnTo>
+                <a:close/>
+              </a:path>
+            </a:pathLst>
+          </a:custGeom>
+        </p:spPr>
+      </p:sp>
+    </p:spTree>
+    <p:extLst>
+      <p:ext uri="{BB962C8B-B14F-4D97-AF65-F5344CB8AC3E}">
+        <p14:creationId xmlns:p14="http://schemas.microsoft.com/office/powerpoint/2010/main" val="2886059565"/>
       </p:ext>
     </p:extLst>
   </p:cSld>
@@ -15830,8 +15927,8 @@
           <a:chExt cx="0" cy="0"/>
         </a:xfrm>
       </p:grpSpPr>
-      <mc:AlternateContent xmlns:mc="http://schemas.openxmlformats.org/markup-compatibility/2006" xmlns:a14="http://schemas.microsoft.com/office/drawing/2010/main">
-        <mc:Choice Requires="a14">
+      <mc:AlternateContent xmlns:mc="http://schemas.openxmlformats.org/markup-compatibility/2006">
+        <mc:Choice xmlns:a14="http://schemas.microsoft.com/office/drawing/2010/main" Requires="a14">
           <p:sp>
             <p:nvSpPr>
               <p:cNvPr id="88" name="Google Shape;88;p13"/>
@@ -15840,8 +15937,8 @@
             </p:nvSpPr>
             <p:spPr>
               <a:xfrm>
-                <a:off x="45811" y="978513"/>
-                <a:ext cx="6187097" cy="2739291"/>
+                <a:off x="46886" y="1208258"/>
+                <a:ext cx="6187097" cy="2450487"/>
               </a:xfrm>
               <a:prstGeom prst="rect">
                 <a:avLst/>
@@ -15907,7 +16004,7 @@
                   </a:spcAft>
                   <a:buNone/>
                 </a:pPr>
-                <a:endParaRPr lang="en-US" sz="2000" b="0" i="0" u="none" strike="noStrike" cap="none" dirty="0">
+                <a:endParaRPr lang="en-US" sz="1200" b="0" i="0" u="none" strike="noStrike" cap="none" dirty="0">
                   <a:solidFill>
                     <a:schemeClr val="dk1"/>
                   </a:solidFill>
@@ -16234,7 +16331,7 @@
                   </a:spcAft>
                   <a:buNone/>
                 </a:pPr>
-                <a:endParaRPr lang="en-US" sz="2000" dirty="0">
+                <a:endParaRPr lang="en-US" sz="1200" dirty="0">
                   <a:solidFill>
                     <a:schemeClr val="dk1"/>
                   </a:solidFill>
@@ -16278,7 +16375,7 @@
             </p:txBody>
           </p:sp>
         </mc:Choice>
-        <mc:Fallback xmlns="">
+        <mc:Fallback>
           <p:sp>
             <p:nvSpPr>
               <p:cNvPr id="88" name="Google Shape;88;p13"/>
@@ -16289,8 +16386,8 @@
             </p:nvSpPr>
             <p:spPr>
               <a:xfrm>
-                <a:off x="45811" y="978513"/>
-                <a:ext cx="6187097" cy="2739291"/>
+                <a:off x="46886" y="1208258"/>
+                <a:ext cx="6187097" cy="2450487"/>
               </a:xfrm>
               <a:prstGeom prst="rect">
                 <a:avLst/>
@@ -16298,7 +16395,7 @@
               <a:blipFill>
                 <a:blip r:embed="rId3"/>
                 <a:stretch>
-                  <a:fillRect l="-2051" t="-1743"/>
+                  <a:fillRect l="-2028" t="-2010" b="-1005"/>
                 </a:stretch>
               </a:blipFill>
               <a:ln w="63500" cap="flat" cmpd="sng">
@@ -16334,8 +16431,8 @@
         </p:nvSpPr>
         <p:spPr>
           <a:xfrm>
-            <a:off x="6532782" y="3589349"/>
-            <a:ext cx="5637488" cy="3278206"/>
+            <a:off x="4800731" y="4169514"/>
+            <a:ext cx="4378046" cy="2482057"/>
           </a:xfrm>
           <a:prstGeom prst="rect">
             <a:avLst/>
@@ -16361,30 +16458,7 @@
               <a:buNone/>
             </a:pPr>
             <a:r>
-              <a:rPr lang="en-US" sz="1800" b="0" i="0" u="none" strike="noStrike" cap="none" dirty="0">
-                <a:solidFill>
-                  <a:schemeClr val="dk1"/>
-                </a:solidFill>
-                <a:latin typeface="Calibri"/>
-                <a:ea typeface="Calibri"/>
-                <a:cs typeface="Calibri"/>
-                <a:sym typeface="Calibri"/>
-              </a:rPr>
-              <a:t>Intuitive explanation of Bayesian rule (on the left). </a:t>
-            </a:r>
-          </a:p>
-          <a:p>
-            <a:pPr marL="0" marR="0" lvl="0" indent="0" algn="l" rtl="0">
-              <a:spcBef>
-                <a:spcPts val="0"/>
-              </a:spcBef>
-              <a:spcAft>
-                <a:spcPts val="0"/>
-              </a:spcAft>
-              <a:buNone/>
-            </a:pPr>
-            <a:r>
-              <a:rPr lang="en-US" sz="1800" dirty="0">
+              <a:rPr lang="en-US" dirty="0">
                 <a:solidFill>
                   <a:schemeClr val="dk1"/>
                 </a:solidFill>
@@ -16407,7 +16481,7 @@
               <a:buNone/>
             </a:pPr>
             <a:r>
-              <a:rPr lang="en-US" sz="1800" dirty="0">
+              <a:rPr lang="en-US" dirty="0">
                 <a:solidFill>
                   <a:schemeClr val="dk1"/>
                 </a:solidFill>
@@ -16430,7 +16504,7 @@
               <a:buNone/>
             </a:pPr>
             <a:r>
-              <a:rPr lang="en-US" sz="1800" dirty="0">
+              <a:rPr lang="en-US" dirty="0">
                 <a:solidFill>
                   <a:schemeClr val="dk1"/>
                 </a:solidFill>
@@ -16452,76 +16526,7 @@
               </a:spcAft>
               <a:buNone/>
             </a:pPr>
-            <a:r>
-              <a:rPr lang="en-US" sz="1800" dirty="0">
-                <a:solidFill>
-                  <a:schemeClr val="dk1"/>
-                </a:solidFill>
-                <a:latin typeface="Calibri"/>
-                <a:ea typeface="Calibri"/>
-                <a:cs typeface="Calibri"/>
-                <a:sym typeface="Calibri"/>
-              </a:rPr>
-              <a:t>P(A &amp; B) = 4% = probability of rich &amp; happy (Green)</a:t>
-            </a:r>
-          </a:p>
-          <a:p>
-            <a:pPr marL="0" marR="0" lvl="0" indent="0" algn="l" rtl="0">
-              <a:spcBef>
-                <a:spcPts val="0"/>
-              </a:spcBef>
-              <a:spcAft>
-                <a:spcPts val="0"/>
-              </a:spcAft>
-              <a:buNone/>
-            </a:pPr>
-            <a:r>
-              <a:rPr lang="en-US" sz="1800" dirty="0">
-                <a:solidFill>
-                  <a:schemeClr val="dk1"/>
-                </a:solidFill>
-                <a:latin typeface="Calibri"/>
-                <a:ea typeface="Calibri"/>
-                <a:cs typeface="Calibri"/>
-                <a:sym typeface="Calibri"/>
-              </a:rPr>
-              <a:t>P(B|A) = 10% = probability of being rich given that Happy</a:t>
-            </a:r>
-          </a:p>
-          <a:p>
-            <a:pPr marL="0" marR="0" lvl="0" indent="0" algn="l" rtl="0">
-              <a:spcBef>
-                <a:spcPts val="0"/>
-              </a:spcBef>
-              <a:spcAft>
-                <a:spcPts val="0"/>
-              </a:spcAft>
-              <a:buNone/>
-            </a:pPr>
-            <a:r>
-              <a:rPr lang="en-US" sz="1800" dirty="0">
-                <a:solidFill>
-                  <a:schemeClr val="dk1"/>
-                </a:solidFill>
-                <a:latin typeface="Calibri"/>
-                <a:ea typeface="Calibri"/>
-                <a:cs typeface="Calibri"/>
-                <a:sym typeface="Calibri"/>
-              </a:rPr>
-              <a:t>P(A|B) = 80% = probability of being happy given that rich</a:t>
-            </a:r>
-          </a:p>
-          <a:p>
-            <a:pPr marL="0" marR="0" lvl="0" indent="0" algn="l" rtl="0">
-              <a:spcBef>
-                <a:spcPts val="0"/>
-              </a:spcBef>
-              <a:spcAft>
-                <a:spcPts val="0"/>
-              </a:spcAft>
-              <a:buNone/>
-            </a:pPr>
-            <a:endParaRPr lang="en-US" sz="1800" dirty="0">
+            <a:endParaRPr lang="en-US" dirty="0">
               <a:solidFill>
                 <a:schemeClr val="dk1"/>
               </a:solidFill>
@@ -16532,6 +16537,36 @@
             </a:endParaRPr>
           </a:p>
           <a:p>
+            <a:pPr lvl="0"/>
+            <a:r>
+              <a:rPr lang="en-US" dirty="0">
+                <a:solidFill>
+                  <a:schemeClr val="dk1"/>
+                </a:solidFill>
+                <a:latin typeface="Calibri"/>
+                <a:ea typeface="Calibri"/>
+                <a:cs typeface="Calibri"/>
+                <a:sym typeface="Calibri"/>
+              </a:rPr>
+              <a:t>P(B|A) = 10% = probability of being rich given that Happy</a:t>
+            </a:r>
+          </a:p>
+          <a:p>
+            <a:pPr lvl="0"/>
+            <a:r>
+              <a:rPr lang="en-US" dirty="0">
+                <a:solidFill>
+                  <a:schemeClr val="dk1"/>
+                </a:solidFill>
+                <a:latin typeface="Calibri"/>
+                <a:ea typeface="Calibri"/>
+                <a:cs typeface="Calibri"/>
+                <a:sym typeface="Calibri"/>
+              </a:rPr>
+              <a:t>P(A|B) = 80% = probability of being happy given that rich</a:t>
+            </a:r>
+          </a:p>
+          <a:p>
             <a:pPr marL="0" marR="0" lvl="0" indent="0" algn="l" rtl="0">
               <a:spcBef>
                 <a:spcPts val="0"/>
@@ -16541,42 +16576,7 @@
               </a:spcAft>
               <a:buNone/>
             </a:pPr>
-            <a:r>
-              <a:rPr lang="en-US" sz="1800" dirty="0">
-                <a:solidFill>
-                  <a:schemeClr val="dk1"/>
-                </a:solidFill>
-                <a:latin typeface="Calibri"/>
-                <a:ea typeface="Calibri"/>
-                <a:cs typeface="Calibri"/>
-                <a:sym typeface="Calibri"/>
-              </a:rPr>
-              <a:t>You can calculate green intersection using two methods:</a:t>
-            </a:r>
-          </a:p>
-          <a:p>
-            <a:pPr marL="0" marR="0" lvl="0" indent="0" algn="l" rtl="0">
-              <a:spcBef>
-                <a:spcPts val="0"/>
-              </a:spcBef>
-              <a:spcAft>
-                <a:spcPts val="0"/>
-              </a:spcAft>
-              <a:buNone/>
-            </a:pPr>
-            <a:r>
-              <a:rPr lang="en-US" sz="1800" dirty="0">
-                <a:solidFill>
-                  <a:schemeClr val="dk1"/>
-                </a:solidFill>
-                <a:latin typeface="Calibri"/>
-                <a:ea typeface="Calibri"/>
-                <a:cs typeface="Calibri"/>
-                <a:sym typeface="Calibri"/>
-              </a:rPr>
-              <a:t>P(A|B)*P(B) = 80%*5% = 4%</a:t>
-            </a:r>
-            <a:endParaRPr sz="1800" dirty="0">
+            <a:endParaRPr lang="en-US" dirty="0">
               <a:solidFill>
                 <a:schemeClr val="dk1"/>
               </a:solidFill>
@@ -16597,7 +16597,76 @@
               <a:buNone/>
             </a:pPr>
             <a:r>
-              <a:rPr lang="en-US" sz="1800" dirty="0">
+              <a:rPr lang="en-US" dirty="0">
+                <a:solidFill>
+                  <a:schemeClr val="dk1"/>
+                </a:solidFill>
+                <a:latin typeface="Calibri"/>
+                <a:ea typeface="Calibri"/>
+                <a:cs typeface="Calibri"/>
+                <a:sym typeface="Calibri"/>
+              </a:rPr>
+              <a:t>Intersection:</a:t>
+            </a:r>
+          </a:p>
+          <a:p>
+            <a:r>
+              <a:rPr lang="en-US" dirty="0">
+                <a:solidFill>
+                  <a:schemeClr val="dk1"/>
+                </a:solidFill>
+                <a:latin typeface="Calibri"/>
+                <a:ea typeface="Calibri"/>
+                <a:cs typeface="Calibri"/>
+                <a:sym typeface="Calibri"/>
+              </a:rPr>
+              <a:t>P(A &amp; B) = 4% = probability of rich &amp; happy (Green)</a:t>
+            </a:r>
+          </a:p>
+          <a:p>
+            <a:pPr marL="0" marR="0" lvl="0" indent="0" algn="l" rtl="0">
+              <a:spcBef>
+                <a:spcPts val="0"/>
+              </a:spcBef>
+              <a:spcAft>
+                <a:spcPts val="0"/>
+              </a:spcAft>
+              <a:buNone/>
+            </a:pPr>
+            <a:r>
+              <a:rPr lang="en-US" dirty="0">
+                <a:solidFill>
+                  <a:schemeClr val="dk1"/>
+                </a:solidFill>
+                <a:latin typeface="Calibri"/>
+                <a:ea typeface="Calibri"/>
+                <a:cs typeface="Calibri"/>
+                <a:sym typeface="Calibri"/>
+              </a:rPr>
+              <a:t>P(A|B)*P(B) = 80%*5% = 4%</a:t>
+            </a:r>
+            <a:endParaRPr dirty="0">
+              <a:solidFill>
+                <a:schemeClr val="dk1"/>
+              </a:solidFill>
+              <a:latin typeface="Calibri"/>
+              <a:ea typeface="Calibri"/>
+              <a:cs typeface="Calibri"/>
+              <a:sym typeface="Calibri"/>
+            </a:endParaRPr>
+          </a:p>
+          <a:p>
+            <a:pPr marL="0" marR="0" lvl="0" indent="0" algn="l" rtl="0">
+              <a:spcBef>
+                <a:spcPts val="0"/>
+              </a:spcBef>
+              <a:spcAft>
+                <a:spcPts val="0"/>
+              </a:spcAft>
+              <a:buNone/>
+            </a:pPr>
+            <a:r>
+              <a:rPr lang="en-US" dirty="0">
                 <a:solidFill>
                   <a:schemeClr val="dk1"/>
                 </a:solidFill>
@@ -16818,7 +16887,7 @@
         </p:nvSpPr>
         <p:spPr>
           <a:xfrm>
-            <a:off x="523454" y="4272171"/>
+            <a:off x="124872" y="4295617"/>
             <a:ext cx="4588042" cy="2229852"/>
           </a:xfrm>
           <a:prstGeom prst="rect">
@@ -16872,7 +16941,7 @@
         </p:nvSpPr>
         <p:spPr>
           <a:xfrm>
-            <a:off x="1166937" y="4576971"/>
+            <a:off x="768355" y="4600417"/>
             <a:ext cx="3224463" cy="1764631"/>
           </a:xfrm>
           <a:prstGeom prst="ellipse">
@@ -16926,7 +16995,7 @@
         </p:nvSpPr>
         <p:spPr>
           <a:xfrm>
-            <a:off x="3342855" y="5008818"/>
+            <a:off x="2944273" y="5032264"/>
             <a:ext cx="1397874" cy="900935"/>
           </a:xfrm>
           <a:prstGeom prst="ellipse">
@@ -16982,7 +17051,7 @@
         </p:nvSpPr>
         <p:spPr>
           <a:xfrm>
-            <a:off x="2068401" y="5008818"/>
+            <a:off x="1669819" y="5032264"/>
             <a:ext cx="1274454" cy="900935"/>
           </a:xfrm>
           <a:prstGeom prst="rect">
@@ -17009,7 +17078,7 @@
               <a:buNone/>
             </a:pPr>
             <a:r>
-              <a:rPr lang="en-US" sz="2400" b="1" dirty="0">
+              <a:rPr lang="en-US" sz="2000" b="1" dirty="0">
                 <a:solidFill>
                   <a:srgbClr val="FF0000"/>
                 </a:solidFill>
@@ -17032,7 +17101,7 @@
               <a:buNone/>
             </a:pPr>
             <a:r>
-              <a:rPr lang="en-US" sz="2400" b="1" dirty="0">
+              <a:rPr lang="en-US" sz="2000" b="1" dirty="0">
                 <a:solidFill>
                   <a:srgbClr val="FF0000"/>
                 </a:solidFill>
@@ -17043,7 +17112,7 @@
               </a:rPr>
               <a:t>Happy</a:t>
             </a:r>
-            <a:endParaRPr sz="2400" b="1" dirty="0">
+            <a:endParaRPr sz="2000" b="1" dirty="0">
               <a:solidFill>
                 <a:srgbClr val="FF0000"/>
               </a:solidFill>
@@ -17063,8 +17132,8 @@
         </p:nvSpPr>
         <p:spPr>
           <a:xfrm>
-            <a:off x="3903802" y="5014208"/>
-            <a:ext cx="1083013" cy="745778"/>
+            <a:off x="3989078" y="5200812"/>
+            <a:ext cx="727576" cy="753546"/>
           </a:xfrm>
           <a:prstGeom prst="rect">
             <a:avLst/>
@@ -17090,7 +17159,7 @@
               <a:buNone/>
             </a:pPr>
             <a:r>
-              <a:rPr lang="en-US" sz="2400" b="1" dirty="0">
+              <a:rPr lang="en-US" sz="2000" b="1" dirty="0">
                 <a:solidFill>
                   <a:srgbClr val="FF0000"/>
                 </a:solidFill>
@@ -17113,7 +17182,7 @@
               <a:buNone/>
             </a:pPr>
             <a:r>
-              <a:rPr lang="en-US" sz="2400" b="1" dirty="0">
+              <a:rPr lang="en-US" sz="2000" b="1" dirty="0">
                 <a:solidFill>
                   <a:srgbClr val="FF0000"/>
                 </a:solidFill>
@@ -17124,7 +17193,7 @@
               </a:rPr>
               <a:t>Rich</a:t>
             </a:r>
-            <a:endParaRPr sz="2400" b="1" dirty="0">
+            <a:endParaRPr sz="2000" b="1" dirty="0">
               <a:solidFill>
                 <a:srgbClr val="FF0000"/>
               </a:solidFill>
@@ -17144,7 +17213,7 @@
         </p:nvSpPr>
         <p:spPr>
           <a:xfrm>
-            <a:off x="3693291" y="4254614"/>
+            <a:off x="3294709" y="4278060"/>
             <a:ext cx="1530878" cy="461665"/>
           </a:xfrm>
           <a:prstGeom prst="rect">
@@ -17171,7 +17240,7 @@
               <a:buNone/>
             </a:pPr>
             <a:r>
-              <a:rPr lang="en-US" sz="2400" b="1" dirty="0">
+              <a:rPr lang="en-US" sz="2000" b="1" dirty="0">
                 <a:solidFill>
                   <a:srgbClr val="FF0000"/>
                 </a:solidFill>
@@ -17182,7 +17251,7 @@
               </a:rPr>
               <a:t>All People</a:t>
             </a:r>
-            <a:endParaRPr sz="2400" b="1" dirty="0">
+            <a:endParaRPr sz="2000" b="1" dirty="0">
               <a:solidFill>
                 <a:srgbClr val="FF0000"/>
               </a:solidFill>
@@ -17233,6 +17302,113 @@
           </a:ln>
         </p:spPr>
       </p:pic>
+      <p:sp>
+        <p:nvSpPr>
+          <p:cNvPr id="4" name="TextBox 3">
+            <a:extLst>
+              <a:ext uri="{FF2B5EF4-FFF2-40B4-BE49-F238E27FC236}">
+                <a16:creationId xmlns:a16="http://schemas.microsoft.com/office/drawing/2014/main" id="{23D95E1F-CDDC-4A4B-82A6-9F51C79D9ADF}"/>
+              </a:ext>
+            </a:extLst>
+          </p:cNvPr>
+          <p:cNvSpPr txBox="1"/>
+          <p:nvPr/>
+        </p:nvSpPr>
+        <p:spPr>
+          <a:xfrm>
+            <a:off x="9397063" y="4569363"/>
+            <a:ext cx="2670065" cy="1384995"/>
+          </a:xfrm>
+          <a:prstGeom prst="rect">
+            <a:avLst/>
+          </a:prstGeom>
+          <a:noFill/>
+        </p:spPr>
+        <p:txBody>
+          <a:bodyPr wrap="square" rtlCol="0">
+            <a:spAutoFit/>
+          </a:bodyPr>
+          <a:lstStyle/>
+          <a:p>
+            <a:r>
+              <a:rPr lang="en-US" b="1" dirty="0">
+                <a:solidFill>
+                  <a:srgbClr val="00B050"/>
+                </a:solidFill>
+                <a:latin typeface="Menlo" panose="020B0609030804020204" pitchFamily="49" charset="0"/>
+                <a:ea typeface="Menlo" panose="020B0609030804020204" pitchFamily="49" charset="0"/>
+                <a:cs typeface="Menlo" panose="020B0609030804020204" pitchFamily="49" charset="0"/>
+              </a:rPr>
+              <a:t>+-----+--------+------+</a:t>
+            </a:r>
+          </a:p>
+          <a:p>
+            <a:r>
+              <a:rPr lang="en-US" b="1" dirty="0">
+                <a:solidFill>
+                  <a:srgbClr val="00B050"/>
+                </a:solidFill>
+                <a:latin typeface="Menlo" panose="020B0609030804020204" pitchFamily="49" charset="0"/>
+                <a:ea typeface="Menlo" panose="020B0609030804020204" pitchFamily="49" charset="0"/>
+                <a:cs typeface="Menlo" panose="020B0609030804020204" pitchFamily="49" charset="0"/>
+              </a:rPr>
+              <a:t>|     | Happy  |      |</a:t>
+            </a:r>
+          </a:p>
+          <a:p>
+            <a:r>
+              <a:rPr lang="en-US" b="1" dirty="0">
+                <a:solidFill>
+                  <a:srgbClr val="00B050"/>
+                </a:solidFill>
+                <a:latin typeface="Menlo" panose="020B0609030804020204" pitchFamily="49" charset="0"/>
+                <a:ea typeface="Menlo" panose="020B0609030804020204" pitchFamily="49" charset="0"/>
+                <a:cs typeface="Menlo" panose="020B0609030804020204" pitchFamily="49" charset="0"/>
+              </a:rPr>
+              <a:t>+-----+--------+------+</a:t>
+            </a:r>
+          </a:p>
+          <a:p>
+            <a:r>
+              <a:rPr lang="en-US" b="1" dirty="0">
+                <a:solidFill>
+                  <a:srgbClr val="00B050"/>
+                </a:solidFill>
+                <a:latin typeface="Menlo" panose="020B0609030804020204" pitchFamily="49" charset="0"/>
+                <a:ea typeface="Menlo" panose="020B0609030804020204" pitchFamily="49" charset="0"/>
+                <a:cs typeface="Menlo" panose="020B0609030804020204" pitchFamily="49" charset="0"/>
+              </a:rPr>
+              <a:t>|Rich |   4    |   1  |</a:t>
+            </a:r>
+          </a:p>
+          <a:p>
+            <a:r>
+              <a:rPr lang="en-US" b="1" dirty="0">
+                <a:solidFill>
+                  <a:srgbClr val="00B050"/>
+                </a:solidFill>
+                <a:latin typeface="Menlo" panose="020B0609030804020204" pitchFamily="49" charset="0"/>
+                <a:ea typeface="Menlo" panose="020B0609030804020204" pitchFamily="49" charset="0"/>
+                <a:cs typeface="Menlo" panose="020B0609030804020204" pitchFamily="49" charset="0"/>
+              </a:rPr>
+              <a:t>|     |  36    |  59  |</a:t>
+            </a:r>
+          </a:p>
+          <a:p>
+            <a:r>
+              <a:rPr lang="en-US" b="1" dirty="0">
+                <a:solidFill>
+                  <a:srgbClr val="00B050"/>
+                </a:solidFill>
+                <a:latin typeface="Menlo" panose="020B0609030804020204" pitchFamily="49" charset="0"/>
+                <a:ea typeface="Menlo" panose="020B0609030804020204" pitchFamily="49" charset="0"/>
+                <a:cs typeface="Menlo" panose="020B0609030804020204" pitchFamily="49" charset="0"/>
+              </a:rPr>
+              <a:t>+-----+--------+------+</a:t>
+            </a:r>
+          </a:p>
+        </p:txBody>
+      </p:sp>
     </p:spTree>
     <p:extLst>
       <p:ext uri="{BB962C8B-B14F-4D97-AF65-F5344CB8AC3E}">
@@ -17246,7 +17422,3343 @@
 </p:sld>
 </file>
 
+<file path=ppt/slides/slide10.xml><?xml version="1.0" encoding="utf-8"?>
+<p:sld xmlns:a="http://schemas.openxmlformats.org/drawingml/2006/main" xmlns:r="http://schemas.openxmlformats.org/officeDocument/2006/relationships" xmlns:p="http://schemas.openxmlformats.org/presentationml/2006/main">
+  <p:cSld>
+    <p:spTree>
+      <p:nvGrpSpPr>
+        <p:cNvPr id="1" name=""/>
+        <p:cNvGrpSpPr/>
+        <p:nvPr/>
+      </p:nvGrpSpPr>
+      <p:grpSpPr>
+        <a:xfrm>
+          <a:off x="0" y="0"/>
+          <a:ext cx="0" cy="0"/>
+          <a:chOff x="0" y="0"/>
+          <a:chExt cx="0" cy="0"/>
+        </a:xfrm>
+      </p:grpSpPr>
+      <p:sp>
+        <p:nvSpPr>
+          <p:cNvPr id="4" name="TextBox 3">
+            <a:extLst>
+              <a:ext uri="{FF2B5EF4-FFF2-40B4-BE49-F238E27FC236}">
+                <a16:creationId xmlns:a16="http://schemas.microsoft.com/office/drawing/2014/main" id="{8A0212EB-D5F5-7C42-9867-3F4106A76AC3}"/>
+              </a:ext>
+            </a:extLst>
+          </p:cNvPr>
+          <p:cNvSpPr txBox="1"/>
+          <p:nvPr/>
+        </p:nvSpPr>
+        <p:spPr>
+          <a:xfrm>
+            <a:off x="0" y="37572"/>
+            <a:ext cx="4572000" cy="523220"/>
+          </a:xfrm>
+          <a:prstGeom prst="rect">
+            <a:avLst/>
+          </a:prstGeom>
+          <a:noFill/>
+        </p:spPr>
+        <p:txBody>
+          <a:bodyPr wrap="square" rtlCol="0">
+            <a:spAutoFit/>
+          </a:bodyPr>
+          <a:lstStyle/>
+          <a:p>
+            <a:r>
+              <a:rPr lang="en-US" sz="2800" b="1" dirty="0"/>
+              <a:t>Bayesian vs Frequentist</a:t>
+            </a:r>
+          </a:p>
+        </p:txBody>
+      </p:sp>
+      <p:sp>
+        <p:nvSpPr>
+          <p:cNvPr id="11" name="TextBox 10">
+            <a:extLst>
+              <a:ext uri="{FF2B5EF4-FFF2-40B4-BE49-F238E27FC236}">
+                <a16:creationId xmlns:a16="http://schemas.microsoft.com/office/drawing/2014/main" id="{2A85AADB-CA8B-934D-84A1-D6DA208D498F}"/>
+              </a:ext>
+            </a:extLst>
+          </p:cNvPr>
+          <p:cNvSpPr txBox="1"/>
+          <p:nvPr/>
+        </p:nvSpPr>
+        <p:spPr>
+          <a:xfrm>
+            <a:off x="0" y="778920"/>
+            <a:ext cx="4478215" cy="523220"/>
+          </a:xfrm>
+          <a:prstGeom prst="rect">
+            <a:avLst/>
+          </a:prstGeom>
+          <a:noFill/>
+        </p:spPr>
+        <p:txBody>
+          <a:bodyPr wrap="square" rtlCol="0">
+            <a:spAutoFit/>
+          </a:bodyPr>
+          <a:lstStyle/>
+          <a:p>
+            <a:r>
+              <a:rPr lang="en-US" dirty="0"/>
+              <a:t>Jake </a:t>
+            </a:r>
+            <a:r>
+              <a:rPr lang="en-US" dirty="0" err="1"/>
+              <a:t>VanderPlas</a:t>
+            </a:r>
+            <a:r>
+              <a:rPr lang="en-US" dirty="0"/>
+              <a:t> (26 min lecture) </a:t>
+            </a:r>
+          </a:p>
+          <a:p>
+            <a:r>
+              <a:rPr lang="en-US" dirty="0"/>
+              <a:t>  - </a:t>
+            </a:r>
+            <a:r>
+              <a:rPr lang="en-US" dirty="0">
+                <a:hlinkClick r:id="rId2"/>
+              </a:rPr>
+              <a:t>https://www.youtube.com/watch?v=KhAUfqhLakw</a:t>
+            </a:r>
+            <a:endParaRPr lang="en-US" dirty="0"/>
+          </a:p>
+        </p:txBody>
+      </p:sp>
+      <p:pic>
+        <p:nvPicPr>
+          <p:cNvPr id="12" name="Picture 11">
+            <a:extLst>
+              <a:ext uri="{FF2B5EF4-FFF2-40B4-BE49-F238E27FC236}">
+                <a16:creationId xmlns:a16="http://schemas.microsoft.com/office/drawing/2014/main" id="{7BC1EEDA-D36B-3745-8521-9723E046CF62}"/>
+              </a:ext>
+            </a:extLst>
+          </p:cNvPr>
+          <p:cNvPicPr>
+            <a:picLocks noChangeAspect="1"/>
+          </p:cNvPicPr>
+          <p:nvPr/>
+        </p:nvPicPr>
+        <p:blipFill>
+          <a:blip r:embed="rId3" cstate="email">
+            <a:extLst>
+              <a:ext uri="{28A0092B-C50C-407E-A947-70E740481C1C}">
+                <a14:useLocalDpi xmlns:a14="http://schemas.microsoft.com/office/drawing/2010/main"/>
+              </a:ext>
+            </a:extLst>
+          </a:blip>
+          <a:stretch>
+            <a:fillRect/>
+          </a:stretch>
+        </p:blipFill>
+        <p:spPr>
+          <a:xfrm>
+            <a:off x="199070" y="4407378"/>
+            <a:ext cx="3243065" cy="2347764"/>
+          </a:xfrm>
+          <a:prstGeom prst="rect">
+            <a:avLst/>
+          </a:prstGeom>
+        </p:spPr>
+      </p:pic>
+      <p:pic>
+        <p:nvPicPr>
+          <p:cNvPr id="13" name="Picture 12">
+            <a:extLst>
+              <a:ext uri="{FF2B5EF4-FFF2-40B4-BE49-F238E27FC236}">
+                <a16:creationId xmlns:a16="http://schemas.microsoft.com/office/drawing/2014/main" id="{756ED8DC-2BE1-094A-8A81-44CA1481AF23}"/>
+              </a:ext>
+            </a:extLst>
+          </p:cNvPr>
+          <p:cNvPicPr>
+            <a:picLocks noChangeAspect="1"/>
+          </p:cNvPicPr>
+          <p:nvPr/>
+        </p:nvPicPr>
+        <p:blipFill>
+          <a:blip r:embed="rId4" cstate="email">
+            <a:extLst>
+              <a:ext uri="{28A0092B-C50C-407E-A947-70E740481C1C}">
+                <a14:useLocalDpi xmlns:a14="http://schemas.microsoft.com/office/drawing/2010/main"/>
+              </a:ext>
+            </a:extLst>
+          </a:blip>
+          <a:stretch>
+            <a:fillRect/>
+          </a:stretch>
+        </p:blipFill>
+        <p:spPr>
+          <a:xfrm>
+            <a:off x="4101534" y="4407378"/>
+            <a:ext cx="3156438" cy="2347764"/>
+          </a:xfrm>
+          <a:prstGeom prst="rect">
+            <a:avLst/>
+          </a:prstGeom>
+        </p:spPr>
+      </p:pic>
+      <p:pic>
+        <p:nvPicPr>
+          <p:cNvPr id="14" name="Picture 13">
+            <a:extLst>
+              <a:ext uri="{FF2B5EF4-FFF2-40B4-BE49-F238E27FC236}">
+                <a16:creationId xmlns:a16="http://schemas.microsoft.com/office/drawing/2014/main" id="{6CFCE086-5AD0-8344-AE93-F843BE43AD52}"/>
+              </a:ext>
+            </a:extLst>
+          </p:cNvPr>
+          <p:cNvPicPr>
+            <a:picLocks noChangeAspect="1"/>
+          </p:cNvPicPr>
+          <p:nvPr/>
+        </p:nvPicPr>
+        <p:blipFill>
+          <a:blip r:embed="rId5" cstate="email">
+            <a:extLst>
+              <a:ext uri="{28A0092B-C50C-407E-A947-70E740481C1C}">
+                <a14:useLocalDpi xmlns:a14="http://schemas.microsoft.com/office/drawing/2010/main"/>
+              </a:ext>
+            </a:extLst>
+          </a:blip>
+          <a:stretch>
+            <a:fillRect/>
+          </a:stretch>
+        </p:blipFill>
+        <p:spPr>
+          <a:xfrm>
+            <a:off x="7679015" y="4407378"/>
+            <a:ext cx="3059546" cy="2347764"/>
+          </a:xfrm>
+          <a:prstGeom prst="rect">
+            <a:avLst/>
+          </a:prstGeom>
+        </p:spPr>
+      </p:pic>
+      <p:sp>
+        <p:nvSpPr>
+          <p:cNvPr id="2" name="TextBox 1">
+            <a:extLst>
+              <a:ext uri="{FF2B5EF4-FFF2-40B4-BE49-F238E27FC236}">
+                <a16:creationId xmlns:a16="http://schemas.microsoft.com/office/drawing/2014/main" id="{1B7E5E53-FD25-1743-9C2C-515C3CCE6CCD}"/>
+              </a:ext>
+            </a:extLst>
+          </p:cNvPr>
+          <p:cNvSpPr txBox="1"/>
+          <p:nvPr/>
+        </p:nvSpPr>
+        <p:spPr>
+          <a:xfrm>
+            <a:off x="987858" y="3994984"/>
+            <a:ext cx="1338363" cy="307777"/>
+          </a:xfrm>
+          <a:prstGeom prst="rect">
+            <a:avLst/>
+          </a:prstGeom>
+          <a:noFill/>
+        </p:spPr>
+        <p:txBody>
+          <a:bodyPr wrap="square" rtlCol="0">
+            <a:spAutoFit/>
+          </a:bodyPr>
+          <a:lstStyle/>
+          <a:p>
+            <a:r>
+              <a:rPr lang="en-US" b="1" dirty="0">
+                <a:solidFill>
+                  <a:srgbClr val="FF0000"/>
+                </a:solidFill>
+              </a:rPr>
+              <a:t>Observations</a:t>
+            </a:r>
+          </a:p>
+        </p:txBody>
+      </p:sp>
+      <p:sp>
+        <p:nvSpPr>
+          <p:cNvPr id="3" name="TextBox 2">
+            <a:extLst>
+              <a:ext uri="{FF2B5EF4-FFF2-40B4-BE49-F238E27FC236}">
+                <a16:creationId xmlns:a16="http://schemas.microsoft.com/office/drawing/2014/main" id="{650AEA09-D359-3F4C-ADEB-940C7824EFEA}"/>
+              </a:ext>
+            </a:extLst>
+          </p:cNvPr>
+          <p:cNvSpPr txBox="1"/>
+          <p:nvPr/>
+        </p:nvSpPr>
+        <p:spPr>
+          <a:xfrm>
+            <a:off x="0" y="1520268"/>
+            <a:ext cx="7257972" cy="2246769"/>
+          </a:xfrm>
+          <a:prstGeom prst="rect">
+            <a:avLst/>
+          </a:prstGeom>
+          <a:noFill/>
+        </p:spPr>
+        <p:txBody>
+          <a:bodyPr wrap="square" rtlCol="0">
+            <a:spAutoFit/>
+          </a:bodyPr>
+          <a:lstStyle/>
+          <a:p>
+            <a:r>
+              <a:rPr lang="en-US" b="1" dirty="0">
+                <a:solidFill>
+                  <a:srgbClr val="00B050"/>
+                </a:solidFill>
+              </a:rPr>
+              <a:t>Example - truncated exponential.</a:t>
+            </a:r>
+            <a:br>
+              <a:rPr lang="en-US" dirty="0"/>
+            </a:br>
+            <a:r>
+              <a:rPr lang="en-US" dirty="0"/>
+              <a:t>You observe times of failures of something.</a:t>
+            </a:r>
+          </a:p>
+          <a:p>
+            <a:r>
+              <a:rPr lang="en-US" dirty="0"/>
+              <a:t>The time should be less than 10 min, </a:t>
+            </a:r>
+          </a:p>
+          <a:p>
+            <a:r>
+              <a:rPr lang="en-US" dirty="0"/>
+              <a:t>but for the first 10 min there are no failures because the "device" is protected. </a:t>
+            </a:r>
+          </a:p>
+          <a:p>
+            <a:r>
+              <a:rPr lang="en-US" dirty="0"/>
+              <a:t>You can only measure after 10 min. </a:t>
+            </a:r>
+          </a:p>
+          <a:p>
+            <a:endParaRPr lang="en-US" dirty="0"/>
+          </a:p>
+          <a:p>
+            <a:r>
+              <a:rPr lang="en-US" dirty="0"/>
+              <a:t>Frequentist approach just "averages" the observed values. </a:t>
+            </a:r>
+          </a:p>
+          <a:p>
+            <a:r>
+              <a:rPr lang="en-US" dirty="0"/>
+              <a:t>As all of them are &gt;10, it gives interval 10.2 - 12.2 min</a:t>
+            </a:r>
+          </a:p>
+          <a:p>
+            <a:endParaRPr lang="en-US" dirty="0"/>
+          </a:p>
+          <a:p>
+            <a:r>
+              <a:rPr lang="en-US" dirty="0"/>
+              <a:t>Bayesian approach with subjective flat prior gives interval 9.0 - 10.0 min, which is correct.</a:t>
+            </a:r>
+          </a:p>
+        </p:txBody>
+      </p:sp>
+      <p:pic>
+        <p:nvPicPr>
+          <p:cNvPr id="5" name="Picture 4">
+            <a:extLst>
+              <a:ext uri="{FF2B5EF4-FFF2-40B4-BE49-F238E27FC236}">
+                <a16:creationId xmlns:a16="http://schemas.microsoft.com/office/drawing/2014/main" id="{6FE4EB9A-6EB9-2542-835F-97BCA447F233}"/>
+              </a:ext>
+            </a:extLst>
+          </p:cNvPr>
+          <p:cNvPicPr>
+            <a:picLocks noChangeAspect="1"/>
+          </p:cNvPicPr>
+          <p:nvPr/>
+        </p:nvPicPr>
+        <p:blipFill>
+          <a:blip r:embed="rId6" cstate="email">
+            <a:extLst>
+              <a:ext uri="{28A0092B-C50C-407E-A947-70E740481C1C}">
+                <a14:useLocalDpi xmlns:a14="http://schemas.microsoft.com/office/drawing/2010/main"/>
+              </a:ext>
+            </a:extLst>
+          </a:blip>
+          <a:stretch>
+            <a:fillRect/>
+          </a:stretch>
+        </p:blipFill>
+        <p:spPr>
+          <a:xfrm>
+            <a:off x="7478248" y="102359"/>
+            <a:ext cx="4621671" cy="2558779"/>
+          </a:xfrm>
+          <a:prstGeom prst="rect">
+            <a:avLst/>
+          </a:prstGeom>
+        </p:spPr>
+      </p:pic>
+      <p:sp>
+        <p:nvSpPr>
+          <p:cNvPr id="10" name="TextBox 9">
+            <a:extLst>
+              <a:ext uri="{FF2B5EF4-FFF2-40B4-BE49-F238E27FC236}">
+                <a16:creationId xmlns:a16="http://schemas.microsoft.com/office/drawing/2014/main" id="{8D69AEEA-F894-8445-A7AF-678B66CA726E}"/>
+              </a:ext>
+            </a:extLst>
+          </p:cNvPr>
+          <p:cNvSpPr txBox="1"/>
+          <p:nvPr/>
+        </p:nvSpPr>
+        <p:spPr>
+          <a:xfrm>
+            <a:off x="5010571" y="3994983"/>
+            <a:ext cx="1338363" cy="307777"/>
+          </a:xfrm>
+          <a:prstGeom prst="rect">
+            <a:avLst/>
+          </a:prstGeom>
+          <a:noFill/>
+        </p:spPr>
+        <p:txBody>
+          <a:bodyPr wrap="square" rtlCol="0">
+            <a:spAutoFit/>
+          </a:bodyPr>
+          <a:lstStyle/>
+          <a:p>
+            <a:r>
+              <a:rPr lang="en-US" b="1" dirty="0">
+                <a:solidFill>
+                  <a:srgbClr val="FF0000"/>
+                </a:solidFill>
+              </a:rPr>
+              <a:t>Frequentist</a:t>
+            </a:r>
+          </a:p>
+        </p:txBody>
+      </p:sp>
+      <p:sp>
+        <p:nvSpPr>
+          <p:cNvPr id="15" name="TextBox 14">
+            <a:extLst>
+              <a:ext uri="{FF2B5EF4-FFF2-40B4-BE49-F238E27FC236}">
+                <a16:creationId xmlns:a16="http://schemas.microsoft.com/office/drawing/2014/main" id="{875BB597-953E-9E44-8B87-FA12DE7218C4}"/>
+              </a:ext>
+            </a:extLst>
+          </p:cNvPr>
+          <p:cNvSpPr txBox="1"/>
+          <p:nvPr/>
+        </p:nvSpPr>
+        <p:spPr>
+          <a:xfrm>
+            <a:off x="8256653" y="3994984"/>
+            <a:ext cx="1338363" cy="307777"/>
+          </a:xfrm>
+          <a:prstGeom prst="rect">
+            <a:avLst/>
+          </a:prstGeom>
+          <a:noFill/>
+        </p:spPr>
+        <p:txBody>
+          <a:bodyPr wrap="square" rtlCol="0">
+            <a:spAutoFit/>
+          </a:bodyPr>
+          <a:lstStyle/>
+          <a:p>
+            <a:r>
+              <a:rPr lang="en-US" b="1" dirty="0" err="1">
+                <a:solidFill>
+                  <a:srgbClr val="FF0000"/>
+                </a:solidFill>
+              </a:rPr>
+              <a:t>Bayessian</a:t>
+            </a:r>
+            <a:endParaRPr lang="en-US" b="1" dirty="0">
+              <a:solidFill>
+                <a:srgbClr val="FF0000"/>
+              </a:solidFill>
+            </a:endParaRPr>
+          </a:p>
+        </p:txBody>
+      </p:sp>
+    </p:spTree>
+    <p:extLst>
+      <p:ext uri="{BB962C8B-B14F-4D97-AF65-F5344CB8AC3E}">
+        <p14:creationId xmlns:p14="http://schemas.microsoft.com/office/powerpoint/2010/main" val="272889797"/>
+      </p:ext>
+    </p:extLst>
+  </p:cSld>
+  <p:clrMapOvr>
+    <a:masterClrMapping/>
+  </p:clrMapOvr>
+</p:sld>
+</file>
+
 <file path=ppt/slides/slide2.xml><?xml version="1.0" encoding="utf-8"?>
+<p:sld xmlns:a="http://schemas.openxmlformats.org/drawingml/2006/main" xmlns:r="http://schemas.openxmlformats.org/officeDocument/2006/relationships" xmlns:p="http://schemas.openxmlformats.org/presentationml/2006/main">
+  <p:cSld>
+    <p:spTree>
+      <p:nvGrpSpPr>
+        <p:cNvPr id="1" name=""/>
+        <p:cNvGrpSpPr/>
+        <p:nvPr/>
+      </p:nvGrpSpPr>
+      <p:grpSpPr>
+        <a:xfrm>
+          <a:off x="0" y="0"/>
+          <a:ext cx="0" cy="0"/>
+          <a:chOff x="0" y="0"/>
+          <a:chExt cx="0" cy="0"/>
+        </a:xfrm>
+      </p:grpSpPr>
+      <p:sp>
+        <p:nvSpPr>
+          <p:cNvPr id="4" name="TextBox 3">
+            <a:extLst>
+              <a:ext uri="{FF2B5EF4-FFF2-40B4-BE49-F238E27FC236}">
+                <a16:creationId xmlns:a16="http://schemas.microsoft.com/office/drawing/2014/main" id="{93FB964B-A29C-1649-A2C4-81BC78C24A50}"/>
+              </a:ext>
+            </a:extLst>
+          </p:cNvPr>
+          <p:cNvSpPr txBox="1"/>
+          <p:nvPr/>
+        </p:nvSpPr>
+        <p:spPr>
+          <a:xfrm>
+            <a:off x="0" y="58846"/>
+            <a:ext cx="5579165" cy="6740307"/>
+          </a:xfrm>
+          <a:prstGeom prst="rect">
+            <a:avLst/>
+          </a:prstGeom>
+          <a:noFill/>
+        </p:spPr>
+        <p:txBody>
+          <a:bodyPr wrap="square" rtlCol="0">
+            <a:spAutoFit/>
+          </a:bodyPr>
+          <a:lstStyle/>
+          <a:p>
+            <a:r>
+              <a:rPr lang="en-US" sz="2000" b="1" dirty="0"/>
+              <a:t>Bayesian vs Frequentist</a:t>
+            </a:r>
+          </a:p>
+          <a:p>
+            <a:r>
+              <a:rPr lang="en-US" sz="2000" b="1" dirty="0"/>
+              <a:t>Survivorship Bias in World War 2</a:t>
+            </a:r>
+          </a:p>
+          <a:p>
+            <a:endParaRPr lang="en-US" dirty="0"/>
+          </a:p>
+          <a:p>
+            <a:r>
+              <a:rPr lang="en-US" dirty="0"/>
+              <a:t>During World War II the US military's concluded that the most-hit areas of the plane needed additional armor.</a:t>
+            </a:r>
+          </a:p>
+          <a:p>
+            <a:r>
+              <a:rPr lang="en-US" dirty="0"/>
+              <a:t>But statistician Abraham Wald (Statistical Research Group (SRG) at Columbia University) has recommended adding armor to the areas that showed the least damage. His reasoning was that the sample didn't include the planes which were shot down.</a:t>
+            </a:r>
+          </a:p>
+          <a:p>
+            <a:endParaRPr lang="en-US" dirty="0"/>
+          </a:p>
+          <a:p>
+            <a:r>
+              <a:rPr lang="en-US" dirty="0"/>
+              <a:t>It is dangerous to use data "as is" to create a model,</a:t>
+            </a:r>
+            <a:br>
+              <a:rPr lang="en-US" dirty="0"/>
+            </a:br>
+            <a:r>
+              <a:rPr lang="en-US" dirty="0"/>
+              <a:t>because the data may be biased to start with,</a:t>
+            </a:r>
+            <a:br>
+              <a:rPr lang="en-US" dirty="0"/>
+            </a:br>
+            <a:r>
+              <a:rPr lang="en-US" dirty="0"/>
+              <a:t>and it can easily lead to creating a biased model</a:t>
+            </a:r>
+            <a:br>
+              <a:rPr lang="en-US" dirty="0"/>
+            </a:br>
+            <a:br>
+              <a:rPr lang="en-US" dirty="0"/>
+            </a:br>
+            <a:r>
+              <a:rPr lang="en-US" dirty="0"/>
+              <a:t>Problem occur when we have:</a:t>
+            </a:r>
+            <a:br>
+              <a:rPr lang="en-US" dirty="0"/>
+            </a:br>
+            <a:r>
+              <a:rPr lang="en-US" dirty="0"/>
+              <a:t> - under-represented features (missing data)</a:t>
+            </a:r>
+            <a:br>
+              <a:rPr lang="en-US" dirty="0"/>
+            </a:br>
+            <a:r>
+              <a:rPr lang="en-US" dirty="0"/>
+              <a:t> - over-represented features,</a:t>
+            </a:r>
+            <a:br>
+              <a:rPr lang="en-US" dirty="0"/>
+            </a:br>
+            <a:r>
+              <a:rPr lang="en-US" dirty="0"/>
+              <a:t> - "target leakage" effect.</a:t>
+            </a:r>
+            <a:br>
+              <a:rPr lang="en-US" dirty="0"/>
+            </a:br>
+            <a:br>
+              <a:rPr lang="en-US" dirty="0"/>
+            </a:br>
+            <a:r>
+              <a:rPr lang="en-US" dirty="0"/>
+              <a:t>Survivorship bias:</a:t>
+            </a:r>
+            <a:br>
+              <a:rPr lang="en-US" dirty="0"/>
+            </a:br>
+            <a:r>
+              <a:rPr lang="en-US" dirty="0"/>
+              <a:t> - </a:t>
+            </a:r>
+            <a:r>
+              <a:rPr lang="en-US" dirty="0">
+                <a:hlinkClick r:id="rId2"/>
+              </a:rPr>
+              <a:t>https://www.youtube.com/watch?v=B3YQJ5DwTzM</a:t>
+            </a:r>
+            <a:r>
+              <a:rPr lang="en-US" dirty="0"/>
+              <a:t> </a:t>
+            </a:r>
+            <a:br>
+              <a:rPr lang="en-US" dirty="0"/>
+            </a:br>
+            <a:br>
+              <a:rPr lang="en-US" dirty="0"/>
+            </a:br>
+            <a:r>
+              <a:rPr lang="en-US" dirty="0"/>
+              <a:t>Gender Bias:</a:t>
+            </a:r>
+            <a:br>
+              <a:rPr lang="en-US" dirty="0"/>
+            </a:br>
+            <a:r>
+              <a:rPr lang="en-US" dirty="0"/>
+              <a:t> - </a:t>
+            </a:r>
+            <a:r>
+              <a:rPr lang="en-US" dirty="0">
+                <a:hlinkClick r:id="rId3"/>
+              </a:rPr>
+              <a:t>https://www.youtube.com/watch?v=p60-Jdq754A</a:t>
+            </a:r>
+            <a:r>
+              <a:rPr lang="en-US" dirty="0"/>
+              <a:t> </a:t>
+            </a:r>
+            <a:br>
+              <a:rPr lang="en-US" dirty="0"/>
+            </a:br>
+            <a:br>
+              <a:rPr lang="en-US" dirty="0"/>
+            </a:br>
+            <a:r>
+              <a:rPr lang="en-US" dirty="0"/>
+              <a:t>Bias in criminal justice:</a:t>
+            </a:r>
+            <a:br>
+              <a:rPr lang="en-US" dirty="0"/>
+            </a:br>
+            <a:r>
+              <a:rPr lang="en-US" dirty="0"/>
+              <a:t> - </a:t>
+            </a:r>
+            <a:r>
+              <a:rPr lang="en-US" dirty="0">
+                <a:hlinkClick r:id="rId4"/>
+              </a:rPr>
+              <a:t>https://www.youtube.com/watch?v=Gi4YeRqfb24</a:t>
+            </a:r>
+            <a:r>
+              <a:rPr lang="en-US" dirty="0"/>
+              <a:t> </a:t>
+            </a:r>
+            <a:br>
+              <a:rPr lang="en-US" dirty="0"/>
+            </a:br>
+            <a:br>
+              <a:rPr lang="en-US" dirty="0"/>
+            </a:br>
+            <a:r>
+              <a:rPr lang="en-US" dirty="0"/>
+              <a:t>Target Leakage:</a:t>
+            </a:r>
+            <a:br>
+              <a:rPr lang="en-US" dirty="0"/>
+            </a:br>
+            <a:r>
+              <a:rPr lang="en-US" dirty="0"/>
+              <a:t> - </a:t>
+            </a:r>
+            <a:r>
+              <a:rPr lang="en-US" dirty="0">
+                <a:hlinkClick r:id="rId5"/>
+              </a:rPr>
+              <a:t>https://www.youtube.com/watch?v=y8qaI5mpJeA</a:t>
+            </a:r>
+            <a:r>
+              <a:rPr lang="en-US" dirty="0"/>
+              <a:t> </a:t>
+            </a:r>
+          </a:p>
+        </p:txBody>
+      </p:sp>
+      <p:pic>
+        <p:nvPicPr>
+          <p:cNvPr id="6" name="Picture 5">
+            <a:extLst>
+              <a:ext uri="{FF2B5EF4-FFF2-40B4-BE49-F238E27FC236}">
+                <a16:creationId xmlns:a16="http://schemas.microsoft.com/office/drawing/2014/main" id="{EA27DDEE-0422-6E4F-AC95-3AFA579C3DB8}"/>
+              </a:ext>
+            </a:extLst>
+          </p:cNvPr>
+          <p:cNvPicPr>
+            <a:picLocks noChangeAspect="1"/>
+          </p:cNvPicPr>
+          <p:nvPr/>
+        </p:nvPicPr>
+        <p:blipFill>
+          <a:blip r:embed="rId6" cstate="email">
+            <a:extLst>
+              <a:ext uri="{28A0092B-C50C-407E-A947-70E740481C1C}">
+                <a14:useLocalDpi xmlns:a14="http://schemas.microsoft.com/office/drawing/2010/main"/>
+              </a:ext>
+            </a:extLst>
+          </a:blip>
+          <a:stretch>
+            <a:fillRect/>
+          </a:stretch>
+        </p:blipFill>
+        <p:spPr>
+          <a:xfrm>
+            <a:off x="6617056" y="225286"/>
+            <a:ext cx="5429170" cy="3419062"/>
+          </a:xfrm>
+          <a:prstGeom prst="rect">
+            <a:avLst/>
+          </a:prstGeom>
+        </p:spPr>
+      </p:pic>
+      <p:sp>
+        <p:nvSpPr>
+          <p:cNvPr id="5" name="Google Shape;93;p13">
+            <a:extLst>
+              <a:ext uri="{FF2B5EF4-FFF2-40B4-BE49-F238E27FC236}">
+                <a16:creationId xmlns:a16="http://schemas.microsoft.com/office/drawing/2014/main" id="{F5066C6A-F841-BB4E-888A-251B4AF760F4}"/>
+              </a:ext>
+            </a:extLst>
+          </p:cNvPr>
+          <p:cNvSpPr txBox="1"/>
+          <p:nvPr/>
+        </p:nvSpPr>
+        <p:spPr>
+          <a:xfrm>
+            <a:off x="6706366" y="4175048"/>
+            <a:ext cx="5250549" cy="2457666"/>
+          </a:xfrm>
+          <a:prstGeom prst="rect">
+            <a:avLst/>
+          </a:prstGeom>
+          <a:noFill/>
+          <a:ln w="63500">
+            <a:solidFill>
+              <a:schemeClr val="accent6">
+                <a:lumMod val="40000"/>
+                <a:lumOff val="60000"/>
+              </a:schemeClr>
+            </a:solidFill>
+          </a:ln>
+        </p:spPr>
+        <p:txBody>
+          <a:bodyPr spcFirstLastPara="1" wrap="square" lIns="91425" tIns="45700" rIns="91425" bIns="45700" anchor="t" anchorCtr="0">
+            <a:noAutofit/>
+          </a:bodyPr>
+          <a:lstStyle/>
+          <a:p>
+            <a:pPr marL="0" marR="0" lvl="0" indent="0" algn="l" rtl="0">
+              <a:spcBef>
+                <a:spcPts val="0"/>
+              </a:spcBef>
+              <a:spcAft>
+                <a:spcPts val="0"/>
+              </a:spcAft>
+              <a:buNone/>
+            </a:pPr>
+            <a:r>
+              <a:rPr lang="en-US" b="1" dirty="0">
+                <a:solidFill>
+                  <a:schemeClr val="accent1"/>
+                </a:solidFill>
+                <a:latin typeface="Calibri" panose="020F0502020204030204" pitchFamily="34" charset="0"/>
+                <a:cs typeface="Calibri" panose="020F0502020204030204" pitchFamily="34" charset="0"/>
+                <a:sym typeface="Calibri"/>
+              </a:rPr>
+              <a:t>Frequentist interpretation of Bayes’ theorem.</a:t>
+            </a:r>
+            <a:endParaRPr b="1" dirty="0">
+              <a:solidFill>
+                <a:schemeClr val="accent1"/>
+              </a:solidFill>
+              <a:latin typeface="Calibri" panose="020F0502020204030204" pitchFamily="34" charset="0"/>
+              <a:cs typeface="Calibri" panose="020F0502020204030204" pitchFamily="34" charset="0"/>
+            </a:endParaRPr>
+          </a:p>
+          <a:p>
+            <a:pPr marL="0" marR="0" lvl="0" indent="0" algn="l" rtl="0">
+              <a:spcBef>
+                <a:spcPts val="0"/>
+              </a:spcBef>
+              <a:spcAft>
+                <a:spcPts val="0"/>
+              </a:spcAft>
+              <a:buNone/>
+            </a:pPr>
+            <a:r>
+              <a:rPr lang="en-US" dirty="0">
+                <a:solidFill>
+                  <a:schemeClr val="dk1"/>
+                </a:solidFill>
+                <a:latin typeface="Calibri" panose="020F0502020204030204" pitchFamily="34" charset="0"/>
+                <a:cs typeface="Calibri" panose="020F0502020204030204" pitchFamily="34" charset="0"/>
+                <a:sym typeface="Calibri"/>
+              </a:rPr>
+              <a:t>Probability measures a proportion of outcomes.</a:t>
+            </a:r>
+            <a:endParaRPr dirty="0">
+              <a:solidFill>
+                <a:schemeClr val="dk1"/>
+              </a:solidFill>
+              <a:latin typeface="Calibri" panose="020F0502020204030204" pitchFamily="34" charset="0"/>
+              <a:cs typeface="Calibri" panose="020F0502020204030204" pitchFamily="34" charset="0"/>
+              <a:sym typeface="Calibri"/>
+            </a:endParaRPr>
+          </a:p>
+          <a:p>
+            <a:pPr marL="0" marR="0" lvl="0" indent="0" algn="l" rtl="0">
+              <a:spcBef>
+                <a:spcPts val="0"/>
+              </a:spcBef>
+              <a:spcAft>
+                <a:spcPts val="0"/>
+              </a:spcAft>
+              <a:buNone/>
+            </a:pPr>
+            <a:r>
+              <a:rPr lang="en-US" dirty="0">
+                <a:solidFill>
+                  <a:schemeClr val="dk1"/>
+                </a:solidFill>
+                <a:latin typeface="Calibri" panose="020F0502020204030204" pitchFamily="34" charset="0"/>
+                <a:cs typeface="Calibri" panose="020F0502020204030204" pitchFamily="34" charset="0"/>
+                <a:sym typeface="Calibri"/>
+              </a:rPr>
+              <a:t>P(A) is the proportion of outcomes with A,  P(B) – with B.</a:t>
+            </a:r>
+            <a:endParaRPr dirty="0">
+              <a:solidFill>
+                <a:schemeClr val="dk1"/>
+              </a:solidFill>
+              <a:latin typeface="Calibri" panose="020F0502020204030204" pitchFamily="34" charset="0"/>
+              <a:cs typeface="Calibri" panose="020F0502020204030204" pitchFamily="34" charset="0"/>
+            </a:endParaRPr>
+          </a:p>
+          <a:p>
+            <a:pPr marL="0" marR="0" lvl="0" indent="0" algn="l" rtl="0">
+              <a:spcBef>
+                <a:spcPts val="0"/>
+              </a:spcBef>
+              <a:spcAft>
+                <a:spcPts val="0"/>
+              </a:spcAft>
+              <a:buNone/>
+            </a:pPr>
+            <a:r>
+              <a:rPr lang="en-US" dirty="0">
+                <a:solidFill>
+                  <a:schemeClr val="dk1"/>
+                </a:solidFill>
+                <a:latin typeface="Calibri" panose="020F0502020204030204" pitchFamily="34" charset="0"/>
+                <a:cs typeface="Calibri" panose="020F0502020204030204" pitchFamily="34" charset="0"/>
+                <a:sym typeface="Calibri"/>
+              </a:rPr>
+              <a:t>P(B|A) is the proportion of outcomes with property B </a:t>
+            </a:r>
+            <a:endParaRPr dirty="0">
+              <a:solidFill>
+                <a:schemeClr val="dk1"/>
+              </a:solidFill>
+              <a:latin typeface="Calibri" panose="020F0502020204030204" pitchFamily="34" charset="0"/>
+              <a:cs typeface="Calibri" panose="020F0502020204030204" pitchFamily="34" charset="0"/>
+              <a:sym typeface="Calibri"/>
+            </a:endParaRPr>
+          </a:p>
+          <a:p>
+            <a:pPr marL="0" marR="0" lvl="0" indent="0" algn="l" rtl="0">
+              <a:spcBef>
+                <a:spcPts val="0"/>
+              </a:spcBef>
+              <a:spcAft>
+                <a:spcPts val="0"/>
+              </a:spcAft>
+              <a:buNone/>
+            </a:pPr>
+            <a:r>
+              <a:rPr lang="en-US" dirty="0">
+                <a:solidFill>
+                  <a:schemeClr val="dk1"/>
+                </a:solidFill>
+                <a:latin typeface="Calibri" panose="020F0502020204030204" pitchFamily="34" charset="0"/>
+                <a:cs typeface="Calibri" panose="020F0502020204030204" pitchFamily="34" charset="0"/>
+                <a:sym typeface="Calibri"/>
+              </a:rPr>
+              <a:t>out of outcomes with property A.</a:t>
+            </a:r>
+          </a:p>
+          <a:p>
+            <a:pPr marL="0" marR="0" lvl="0" indent="0" algn="l" rtl="0">
+              <a:spcBef>
+                <a:spcPts val="0"/>
+              </a:spcBef>
+              <a:spcAft>
+                <a:spcPts val="0"/>
+              </a:spcAft>
+              <a:buNone/>
+            </a:pPr>
+            <a:endParaRPr lang="en-US" dirty="0">
+              <a:solidFill>
+                <a:schemeClr val="dk1"/>
+              </a:solidFill>
+              <a:latin typeface="Calibri" panose="020F0502020204030204" pitchFamily="34" charset="0"/>
+              <a:cs typeface="Calibri" panose="020F0502020204030204" pitchFamily="34" charset="0"/>
+              <a:sym typeface="Calibri"/>
+            </a:endParaRPr>
+          </a:p>
+          <a:p>
+            <a:r>
+              <a:rPr lang="en-US" b="1" dirty="0">
+                <a:solidFill>
+                  <a:schemeClr val="accent1"/>
+                </a:solidFill>
+                <a:latin typeface="Calibri" panose="020F0502020204030204" pitchFamily="34" charset="0"/>
+                <a:cs typeface="Calibri" panose="020F0502020204030204" pitchFamily="34" charset="0"/>
+                <a:sym typeface="Calibri"/>
+              </a:rPr>
+              <a:t>Bayesian interpretation of Bayes’ theorem.</a:t>
+            </a:r>
+            <a:endParaRPr lang="en-US" b="1" dirty="0">
+              <a:solidFill>
+                <a:schemeClr val="accent1"/>
+              </a:solidFill>
+              <a:latin typeface="Calibri" panose="020F0502020204030204" pitchFamily="34" charset="0"/>
+              <a:cs typeface="Calibri" panose="020F0502020204030204" pitchFamily="34" charset="0"/>
+            </a:endParaRPr>
+          </a:p>
+          <a:p>
+            <a:pPr lvl="0"/>
+            <a:r>
+              <a:rPr lang="en-US" dirty="0">
+                <a:solidFill>
+                  <a:schemeClr val="dk1"/>
+                </a:solidFill>
+                <a:latin typeface="Calibri" panose="020F0502020204030204" pitchFamily="34" charset="0"/>
+                <a:cs typeface="Calibri" panose="020F0502020204030204" pitchFamily="34" charset="0"/>
+                <a:sym typeface="Calibri"/>
+              </a:rPr>
+              <a:t>Probability measures a degree of belief.</a:t>
+            </a:r>
+            <a:br>
+              <a:rPr lang="en-US" dirty="0">
+                <a:solidFill>
+                  <a:schemeClr val="dk1"/>
+                </a:solidFill>
+                <a:latin typeface="Calibri" panose="020F0502020204030204" pitchFamily="34" charset="0"/>
+                <a:cs typeface="Calibri" panose="020F0502020204030204" pitchFamily="34" charset="0"/>
+                <a:sym typeface="Calibri"/>
+              </a:rPr>
+            </a:br>
+            <a:r>
+              <a:rPr lang="en-US" dirty="0">
+                <a:solidFill>
+                  <a:schemeClr val="dk1"/>
+                </a:solidFill>
+                <a:latin typeface="Calibri" panose="020F0502020204030204" pitchFamily="34" charset="0"/>
+                <a:cs typeface="Calibri" panose="020F0502020204030204" pitchFamily="34" charset="0"/>
+                <a:sym typeface="Calibri"/>
+              </a:rPr>
+              <a:t>P(A), the </a:t>
+            </a:r>
+            <a:r>
+              <a:rPr lang="en-US" b="1" dirty="0">
+                <a:solidFill>
+                  <a:schemeClr val="accent1"/>
+                </a:solidFill>
+                <a:latin typeface="Calibri" panose="020F0502020204030204" pitchFamily="34" charset="0"/>
+                <a:cs typeface="Calibri" panose="020F0502020204030204" pitchFamily="34" charset="0"/>
+                <a:sym typeface="Calibri"/>
+              </a:rPr>
+              <a:t>prior</a:t>
+            </a:r>
+            <a:r>
+              <a:rPr lang="en-US" dirty="0">
+                <a:solidFill>
+                  <a:schemeClr val="dk1"/>
+                </a:solidFill>
+                <a:latin typeface="Calibri" panose="020F0502020204030204" pitchFamily="34" charset="0"/>
+                <a:cs typeface="Calibri" panose="020F0502020204030204" pitchFamily="34" charset="0"/>
+                <a:sym typeface="Calibri"/>
+              </a:rPr>
+              <a:t>, is the initial degree of belief in A.</a:t>
+            </a:r>
+            <a:endParaRPr lang="en-US" dirty="0">
+              <a:solidFill>
+                <a:schemeClr val="dk1"/>
+              </a:solidFill>
+              <a:latin typeface="Calibri" panose="020F0502020204030204" pitchFamily="34" charset="0"/>
+              <a:cs typeface="Calibri" panose="020F0502020204030204" pitchFamily="34" charset="0"/>
+            </a:endParaRPr>
+          </a:p>
+          <a:p>
+            <a:pPr lvl="0"/>
+            <a:r>
+              <a:rPr lang="en-US" dirty="0">
+                <a:solidFill>
+                  <a:schemeClr val="dk1"/>
+                </a:solidFill>
+                <a:latin typeface="Calibri" panose="020F0502020204030204" pitchFamily="34" charset="0"/>
+                <a:cs typeface="Calibri" panose="020F0502020204030204" pitchFamily="34" charset="0"/>
+                <a:sym typeface="Calibri"/>
+              </a:rPr>
+              <a:t>P(A|B), the </a:t>
+            </a:r>
+            <a:r>
+              <a:rPr lang="en-US" b="1" dirty="0">
+                <a:solidFill>
+                  <a:schemeClr val="accent1"/>
+                </a:solidFill>
+                <a:latin typeface="Calibri" panose="020F0502020204030204" pitchFamily="34" charset="0"/>
+                <a:cs typeface="Calibri" panose="020F0502020204030204" pitchFamily="34" charset="0"/>
+                <a:sym typeface="Calibri"/>
+              </a:rPr>
+              <a:t>posterior</a:t>
+            </a:r>
+            <a:r>
+              <a:rPr lang="en-US" dirty="0">
+                <a:solidFill>
+                  <a:schemeClr val="dk1"/>
+                </a:solidFill>
+                <a:latin typeface="Calibri" panose="020F0502020204030204" pitchFamily="34" charset="0"/>
+                <a:cs typeface="Calibri" panose="020F0502020204030204" pitchFamily="34" charset="0"/>
+                <a:sym typeface="Calibri"/>
+              </a:rPr>
+              <a:t>, is the degree of belief having accounted for B.</a:t>
+            </a:r>
+            <a:br>
+              <a:rPr lang="en-US" dirty="0">
+                <a:solidFill>
+                  <a:schemeClr val="dk1"/>
+                </a:solidFill>
+                <a:latin typeface="Calibri" panose="020F0502020204030204" pitchFamily="34" charset="0"/>
+                <a:cs typeface="Calibri" panose="020F0502020204030204" pitchFamily="34" charset="0"/>
+                <a:sym typeface="Calibri"/>
+              </a:rPr>
+            </a:br>
+            <a:r>
+              <a:rPr lang="en-US" dirty="0">
+                <a:solidFill>
+                  <a:schemeClr val="dk1"/>
+                </a:solidFill>
+                <a:latin typeface="Calibri" panose="020F0502020204030204" pitchFamily="34" charset="0"/>
+                <a:cs typeface="Calibri" panose="020F0502020204030204" pitchFamily="34" charset="0"/>
+                <a:sym typeface="Calibri"/>
+              </a:rPr>
+              <a:t>P(B|A)/P(B) – represents the support B provides for A.</a:t>
+            </a:r>
+            <a:endParaRPr lang="en-US" dirty="0">
+              <a:solidFill>
+                <a:schemeClr val="dk1"/>
+              </a:solidFill>
+              <a:latin typeface="Calibri" panose="020F0502020204030204" pitchFamily="34" charset="0"/>
+              <a:cs typeface="Calibri" panose="020F0502020204030204" pitchFamily="34" charset="0"/>
+            </a:endParaRPr>
+          </a:p>
+          <a:p>
+            <a:pPr marL="0" marR="0" lvl="0" indent="0" algn="l" rtl="0">
+              <a:spcBef>
+                <a:spcPts val="0"/>
+              </a:spcBef>
+              <a:spcAft>
+                <a:spcPts val="0"/>
+              </a:spcAft>
+              <a:buNone/>
+            </a:pPr>
+            <a:endParaRPr dirty="0">
+              <a:latin typeface="Calibri" panose="020F0502020204030204" pitchFamily="34" charset="0"/>
+              <a:cs typeface="Calibri" panose="020F0502020204030204" pitchFamily="34" charset="0"/>
+            </a:endParaRPr>
+          </a:p>
+        </p:txBody>
+      </p:sp>
+    </p:spTree>
+    <p:extLst>
+      <p:ext uri="{BB962C8B-B14F-4D97-AF65-F5344CB8AC3E}">
+        <p14:creationId xmlns:p14="http://schemas.microsoft.com/office/powerpoint/2010/main" val="3774625219"/>
+      </p:ext>
+    </p:extLst>
+  </p:cSld>
+  <p:clrMapOvr>
+    <a:masterClrMapping/>
+  </p:clrMapOvr>
+</p:sld>
+</file>
+
+<file path=ppt/slides/slide3.xml><?xml version="1.0" encoding="utf-8"?>
+<p:sld xmlns:a="http://schemas.openxmlformats.org/drawingml/2006/main" xmlns:r="http://schemas.openxmlformats.org/officeDocument/2006/relationships" xmlns:p="http://schemas.openxmlformats.org/presentationml/2006/main">
+  <p:cSld>
+    <p:spTree>
+      <p:nvGrpSpPr>
+        <p:cNvPr id="1" name=""/>
+        <p:cNvGrpSpPr/>
+        <p:nvPr/>
+      </p:nvGrpSpPr>
+      <p:grpSpPr>
+        <a:xfrm>
+          <a:off x="0" y="0"/>
+          <a:ext cx="0" cy="0"/>
+          <a:chOff x="0" y="0"/>
+          <a:chExt cx="0" cy="0"/>
+        </a:xfrm>
+      </p:grpSpPr>
+      <p:sp>
+        <p:nvSpPr>
+          <p:cNvPr id="2" name="TextBox 1">
+            <a:extLst>
+              <a:ext uri="{FF2B5EF4-FFF2-40B4-BE49-F238E27FC236}">
+                <a16:creationId xmlns:a16="http://schemas.microsoft.com/office/drawing/2014/main" id="{B3B32340-E706-FA41-BDA5-397606042A7E}"/>
+              </a:ext>
+            </a:extLst>
+          </p:cNvPr>
+          <p:cNvSpPr txBox="1"/>
+          <p:nvPr/>
+        </p:nvSpPr>
+        <p:spPr>
+          <a:xfrm>
+            <a:off x="-1" y="37572"/>
+            <a:ext cx="7901355" cy="523220"/>
+          </a:xfrm>
+          <a:prstGeom prst="rect">
+            <a:avLst/>
+          </a:prstGeom>
+          <a:noFill/>
+        </p:spPr>
+        <p:txBody>
+          <a:bodyPr wrap="square" rtlCol="0">
+            <a:spAutoFit/>
+          </a:bodyPr>
+          <a:lstStyle/>
+          <a:p>
+            <a:r>
+              <a:rPr lang="en-US" sz="2800" b="1" dirty="0"/>
+              <a:t>Example – Coffee and Damaged Flash Drives</a:t>
+            </a:r>
+          </a:p>
+        </p:txBody>
+      </p:sp>
+      <p:sp>
+        <p:nvSpPr>
+          <p:cNvPr id="3" name="TextBox 2">
+            <a:extLst>
+              <a:ext uri="{FF2B5EF4-FFF2-40B4-BE49-F238E27FC236}">
+                <a16:creationId xmlns:a16="http://schemas.microsoft.com/office/drawing/2014/main" id="{2443CC5D-9378-E348-8505-A594E821478A}"/>
+              </a:ext>
+            </a:extLst>
+          </p:cNvPr>
+          <p:cNvSpPr txBox="1"/>
+          <p:nvPr/>
+        </p:nvSpPr>
+        <p:spPr>
+          <a:xfrm>
+            <a:off x="141099" y="678252"/>
+            <a:ext cx="4325394" cy="954107"/>
+          </a:xfrm>
+          <a:prstGeom prst="rect">
+            <a:avLst/>
+          </a:prstGeom>
+          <a:noFill/>
+          <a:ln w="63500">
+            <a:solidFill>
+              <a:schemeClr val="accent6">
+                <a:lumMod val="40000"/>
+                <a:lumOff val="60000"/>
+              </a:schemeClr>
+            </a:solidFill>
+          </a:ln>
+        </p:spPr>
+        <p:txBody>
+          <a:bodyPr wrap="square" rtlCol="0">
+            <a:spAutoFit/>
+          </a:bodyPr>
+          <a:lstStyle/>
+          <a:p>
+            <a:r>
+              <a:rPr lang="en-US" dirty="0"/>
+              <a:t>We have 100 damaged flash drives, </a:t>
+            </a:r>
+          </a:p>
+          <a:p>
+            <a:r>
+              <a:rPr lang="en-US" dirty="0"/>
+              <a:t>80 of them have coffee stains on them.</a:t>
+            </a:r>
+          </a:p>
+          <a:p>
+            <a:endParaRPr lang="en-US" dirty="0"/>
+          </a:p>
+          <a:p>
+            <a:r>
+              <a:rPr lang="en-US" dirty="0"/>
+              <a:t>What can we say about coffee causing the damage?</a:t>
+            </a:r>
+          </a:p>
+        </p:txBody>
+      </p:sp>
+      <p:sp>
+        <p:nvSpPr>
+          <p:cNvPr id="5" name="Google Shape;89;p13">
+            <a:extLst>
+              <a:ext uri="{FF2B5EF4-FFF2-40B4-BE49-F238E27FC236}">
+                <a16:creationId xmlns:a16="http://schemas.microsoft.com/office/drawing/2014/main" id="{452FF8D6-C125-B84A-B6C6-3F252EF37ED5}"/>
+              </a:ext>
+            </a:extLst>
+          </p:cNvPr>
+          <p:cNvSpPr txBox="1"/>
+          <p:nvPr/>
+        </p:nvSpPr>
+        <p:spPr>
+          <a:xfrm>
+            <a:off x="6674033" y="2032595"/>
+            <a:ext cx="4287044" cy="2050775"/>
+          </a:xfrm>
+          <a:prstGeom prst="rect">
+            <a:avLst/>
+          </a:prstGeom>
+          <a:noFill/>
+          <a:ln>
+            <a:noFill/>
+          </a:ln>
+        </p:spPr>
+        <p:txBody>
+          <a:bodyPr spcFirstLastPara="1" wrap="square" lIns="91425" tIns="45700" rIns="91425" bIns="45700" anchor="t" anchorCtr="0">
+            <a:noAutofit/>
+          </a:bodyPr>
+          <a:lstStyle/>
+          <a:p>
+            <a:pPr marL="0" marR="0" lvl="0" indent="0" algn="l" rtl="0">
+              <a:spcBef>
+                <a:spcPts val="0"/>
+              </a:spcBef>
+              <a:spcAft>
+                <a:spcPts val="0"/>
+              </a:spcAft>
+              <a:buNone/>
+            </a:pPr>
+            <a:r>
+              <a:rPr lang="en-US" sz="1200" dirty="0">
+                <a:solidFill>
+                  <a:schemeClr val="dk1"/>
+                </a:solidFill>
+                <a:latin typeface="Calibri"/>
+                <a:cs typeface="Calibri"/>
+                <a:sym typeface="Calibri"/>
+              </a:rPr>
+              <a:t>A = Coffee, B = Damaged</a:t>
+            </a:r>
+            <a:endParaRPr lang="en-US" sz="1200" dirty="0">
+              <a:solidFill>
+                <a:schemeClr val="dk1"/>
+              </a:solidFill>
+              <a:latin typeface="Calibri"/>
+              <a:ea typeface="Calibri"/>
+              <a:cs typeface="Calibri"/>
+              <a:sym typeface="Calibri"/>
+            </a:endParaRPr>
+          </a:p>
+          <a:p>
+            <a:pPr lvl="0"/>
+            <a:r>
+              <a:rPr lang="en-US" sz="1200" dirty="0">
+                <a:solidFill>
+                  <a:schemeClr val="dk1"/>
+                </a:solidFill>
+                <a:latin typeface="Calibri"/>
+                <a:ea typeface="Calibri"/>
+                <a:cs typeface="Calibri"/>
+                <a:sym typeface="Calibri"/>
+              </a:rPr>
+              <a:t>P(A) = 40% = probability of </a:t>
+            </a:r>
+            <a:r>
+              <a:rPr lang="en-US" sz="1200" dirty="0">
+                <a:solidFill>
+                  <a:schemeClr val="dk1"/>
+                </a:solidFill>
+                <a:latin typeface="Calibri"/>
+                <a:cs typeface="Calibri"/>
+                <a:sym typeface="Calibri"/>
+              </a:rPr>
+              <a:t>Coffee</a:t>
+            </a:r>
+            <a:r>
+              <a:rPr lang="en-US" sz="1200" dirty="0">
+                <a:solidFill>
+                  <a:schemeClr val="dk1"/>
+                </a:solidFill>
+                <a:latin typeface="Calibri"/>
+                <a:ea typeface="Calibri"/>
+                <a:cs typeface="Calibri"/>
+                <a:sym typeface="Calibri"/>
+              </a:rPr>
+              <a:t> (Yellow)</a:t>
+            </a:r>
+          </a:p>
+          <a:p>
+            <a:pPr marL="0" marR="0" lvl="0" indent="0" algn="l" rtl="0">
+              <a:spcBef>
+                <a:spcPts val="0"/>
+              </a:spcBef>
+              <a:spcAft>
+                <a:spcPts val="0"/>
+              </a:spcAft>
+              <a:buNone/>
+            </a:pPr>
+            <a:r>
+              <a:rPr lang="en-US" sz="1200" dirty="0">
+                <a:solidFill>
+                  <a:schemeClr val="dk1"/>
+                </a:solidFill>
+                <a:latin typeface="Calibri"/>
+                <a:ea typeface="Calibri"/>
+                <a:cs typeface="Calibri"/>
+                <a:sym typeface="Calibri"/>
+              </a:rPr>
+              <a:t>P(B) = 5% = probability of Damaged (Blue)</a:t>
+            </a:r>
+          </a:p>
+          <a:p>
+            <a:pPr marL="0" marR="0" lvl="0" indent="0" algn="l" rtl="0">
+              <a:spcBef>
+                <a:spcPts val="0"/>
+              </a:spcBef>
+              <a:spcAft>
+                <a:spcPts val="0"/>
+              </a:spcAft>
+              <a:buNone/>
+            </a:pPr>
+            <a:endParaRPr lang="en-US" sz="1200" dirty="0">
+              <a:solidFill>
+                <a:schemeClr val="dk1"/>
+              </a:solidFill>
+              <a:latin typeface="Calibri"/>
+              <a:ea typeface="Calibri"/>
+              <a:cs typeface="Calibri"/>
+              <a:sym typeface="Calibri"/>
+            </a:endParaRPr>
+          </a:p>
+          <a:p>
+            <a:pPr lvl="0"/>
+            <a:r>
+              <a:rPr lang="en-US" sz="1200" b="1" dirty="0">
+                <a:solidFill>
+                  <a:srgbClr val="00B0F0"/>
+                </a:solidFill>
+                <a:latin typeface="Calibri"/>
+                <a:ea typeface="Calibri"/>
+                <a:cs typeface="Calibri"/>
+                <a:sym typeface="Calibri"/>
+              </a:rPr>
+              <a:t>P(B|A) = 10% = probability of Damaged given that Coffee</a:t>
+            </a:r>
+          </a:p>
+          <a:p>
+            <a:pPr lvl="0"/>
+            <a:r>
+              <a:rPr lang="en-US" sz="1200" dirty="0">
+                <a:solidFill>
+                  <a:schemeClr val="dk1"/>
+                </a:solidFill>
+                <a:latin typeface="Calibri"/>
+                <a:ea typeface="Calibri"/>
+                <a:cs typeface="Calibri"/>
+                <a:sym typeface="Calibri"/>
+              </a:rPr>
+              <a:t>P(A|B) = 80% = probability of Coffee given that Damaged</a:t>
+            </a:r>
+          </a:p>
+          <a:p>
+            <a:pPr marL="0" marR="0" lvl="0" indent="0" algn="l" rtl="0">
+              <a:spcBef>
+                <a:spcPts val="0"/>
+              </a:spcBef>
+              <a:spcAft>
+                <a:spcPts val="0"/>
+              </a:spcAft>
+              <a:buNone/>
+            </a:pPr>
+            <a:endParaRPr lang="en-US" sz="1200" dirty="0">
+              <a:solidFill>
+                <a:schemeClr val="dk1"/>
+              </a:solidFill>
+              <a:latin typeface="Calibri"/>
+              <a:ea typeface="Calibri"/>
+              <a:cs typeface="Calibri"/>
+              <a:sym typeface="Calibri"/>
+            </a:endParaRPr>
+          </a:p>
+          <a:p>
+            <a:r>
+              <a:rPr lang="en-US" sz="1200" dirty="0">
+                <a:solidFill>
+                  <a:schemeClr val="dk1"/>
+                </a:solidFill>
+                <a:latin typeface="Calibri"/>
+                <a:ea typeface="Calibri"/>
+                <a:cs typeface="Calibri"/>
+                <a:sym typeface="Calibri"/>
+              </a:rPr>
+              <a:t>Intersection:</a:t>
+            </a:r>
+          </a:p>
+          <a:p>
+            <a:pPr marL="0" marR="0" lvl="0" indent="0" algn="l" rtl="0">
+              <a:spcBef>
+                <a:spcPts val="0"/>
+              </a:spcBef>
+              <a:spcAft>
+                <a:spcPts val="0"/>
+              </a:spcAft>
+              <a:buNone/>
+            </a:pPr>
+            <a:r>
+              <a:rPr lang="en-US" sz="1200" dirty="0">
+                <a:solidFill>
+                  <a:schemeClr val="dk1"/>
+                </a:solidFill>
+                <a:latin typeface="Calibri"/>
+                <a:ea typeface="Calibri"/>
+                <a:cs typeface="Calibri"/>
+                <a:sym typeface="Calibri"/>
+              </a:rPr>
+              <a:t>P(A &amp; B) = 4% = probability of Coffee &amp; Damaged (Green)</a:t>
+            </a:r>
+          </a:p>
+          <a:p>
+            <a:pPr marL="0" marR="0" lvl="0" indent="0" algn="l" rtl="0">
+              <a:spcBef>
+                <a:spcPts val="0"/>
+              </a:spcBef>
+              <a:spcAft>
+                <a:spcPts val="0"/>
+              </a:spcAft>
+              <a:buNone/>
+            </a:pPr>
+            <a:r>
+              <a:rPr lang="en-US" sz="1200" dirty="0">
+                <a:solidFill>
+                  <a:schemeClr val="dk1"/>
+                </a:solidFill>
+                <a:latin typeface="Calibri"/>
+                <a:ea typeface="Calibri"/>
+                <a:cs typeface="Calibri"/>
+                <a:sym typeface="Calibri"/>
+              </a:rPr>
+              <a:t>P(A|B)*P(B) = 80%*5% = 4%</a:t>
+            </a:r>
+            <a:endParaRPr sz="1200" dirty="0">
+              <a:solidFill>
+                <a:schemeClr val="dk1"/>
+              </a:solidFill>
+              <a:latin typeface="Calibri"/>
+              <a:ea typeface="Calibri"/>
+              <a:cs typeface="Calibri"/>
+              <a:sym typeface="Calibri"/>
+            </a:endParaRPr>
+          </a:p>
+          <a:p>
+            <a:pPr marL="0" marR="0" lvl="0" indent="0" algn="l" rtl="0">
+              <a:spcBef>
+                <a:spcPts val="0"/>
+              </a:spcBef>
+              <a:spcAft>
+                <a:spcPts val="0"/>
+              </a:spcAft>
+              <a:buNone/>
+            </a:pPr>
+            <a:r>
+              <a:rPr lang="en-US" sz="1200" dirty="0">
+                <a:solidFill>
+                  <a:schemeClr val="dk1"/>
+                </a:solidFill>
+                <a:latin typeface="Calibri"/>
+                <a:ea typeface="Calibri"/>
+                <a:cs typeface="Calibri"/>
+                <a:sym typeface="Calibri"/>
+              </a:rPr>
+              <a:t>P(B|A)*P(A) = 10%*40% = 4%</a:t>
+            </a:r>
+          </a:p>
+        </p:txBody>
+      </p:sp>
+      <p:sp>
+        <p:nvSpPr>
+          <p:cNvPr id="6" name="Google Shape;96;p13">
+            <a:extLst>
+              <a:ext uri="{FF2B5EF4-FFF2-40B4-BE49-F238E27FC236}">
+                <a16:creationId xmlns:a16="http://schemas.microsoft.com/office/drawing/2014/main" id="{404A001F-C0A0-BE48-A3B1-C838E48FDF8F}"/>
+              </a:ext>
+            </a:extLst>
+          </p:cNvPr>
+          <p:cNvSpPr/>
+          <p:nvPr/>
+        </p:nvSpPr>
+        <p:spPr>
+          <a:xfrm>
+            <a:off x="1531632" y="1974106"/>
+            <a:ext cx="5033285" cy="2229852"/>
+          </a:xfrm>
+          <a:prstGeom prst="rect">
+            <a:avLst/>
+          </a:prstGeom>
+          <a:solidFill>
+            <a:srgbClr val="FBE4D4"/>
+          </a:solidFill>
+          <a:ln w="12700" cap="flat" cmpd="sng">
+            <a:solidFill>
+              <a:srgbClr val="31538F"/>
+            </a:solidFill>
+            <a:prstDash val="solid"/>
+            <a:miter lim="800000"/>
+            <a:headEnd type="none" w="sm" len="sm"/>
+            <a:tailEnd type="none" w="sm" len="sm"/>
+          </a:ln>
+        </p:spPr>
+        <p:txBody>
+          <a:bodyPr spcFirstLastPara="1" wrap="square" lIns="91425" tIns="45700" rIns="91425" bIns="45700" anchor="ctr" anchorCtr="0">
+            <a:noAutofit/>
+          </a:bodyPr>
+          <a:lstStyle/>
+          <a:p>
+            <a:pPr marL="0" marR="0" lvl="0" indent="0" algn="ctr" rtl="0">
+              <a:spcBef>
+                <a:spcPts val="0"/>
+              </a:spcBef>
+              <a:spcAft>
+                <a:spcPts val="0"/>
+              </a:spcAft>
+              <a:buNone/>
+            </a:pPr>
+            <a:endParaRPr sz="1800">
+              <a:solidFill>
+                <a:schemeClr val="lt1"/>
+              </a:solidFill>
+              <a:latin typeface="Calibri"/>
+              <a:ea typeface="Calibri"/>
+              <a:cs typeface="Calibri"/>
+              <a:sym typeface="Calibri"/>
+            </a:endParaRPr>
+          </a:p>
+        </p:txBody>
+      </p:sp>
+      <p:sp>
+        <p:nvSpPr>
+          <p:cNvPr id="7" name="Google Shape;97;p13">
+            <a:extLst>
+              <a:ext uri="{FF2B5EF4-FFF2-40B4-BE49-F238E27FC236}">
+                <a16:creationId xmlns:a16="http://schemas.microsoft.com/office/drawing/2014/main" id="{31FE829C-2386-834C-996B-C2F3AE8AE45B}"/>
+              </a:ext>
+            </a:extLst>
+          </p:cNvPr>
+          <p:cNvSpPr/>
+          <p:nvPr/>
+        </p:nvSpPr>
+        <p:spPr>
+          <a:xfrm>
+            <a:off x="2175116" y="2278906"/>
+            <a:ext cx="3224463" cy="1764631"/>
+          </a:xfrm>
+          <a:prstGeom prst="ellipse">
+            <a:avLst/>
+          </a:prstGeom>
+          <a:solidFill>
+            <a:srgbClr val="FFC000"/>
+          </a:solidFill>
+          <a:ln w="12700" cap="flat" cmpd="sng">
+            <a:solidFill>
+              <a:srgbClr val="31538F"/>
+            </a:solidFill>
+            <a:prstDash val="solid"/>
+            <a:miter lim="800000"/>
+            <a:headEnd type="none" w="sm" len="sm"/>
+            <a:tailEnd type="none" w="sm" len="sm"/>
+          </a:ln>
+        </p:spPr>
+        <p:txBody>
+          <a:bodyPr spcFirstLastPara="1" wrap="square" lIns="91425" tIns="45700" rIns="91425" bIns="45700" anchor="ctr" anchorCtr="0">
+            <a:noAutofit/>
+          </a:bodyPr>
+          <a:lstStyle/>
+          <a:p>
+            <a:pPr marL="0" marR="0" lvl="0" indent="0" algn="ctr" rtl="0">
+              <a:spcBef>
+                <a:spcPts val="0"/>
+              </a:spcBef>
+              <a:spcAft>
+                <a:spcPts val="0"/>
+              </a:spcAft>
+              <a:buNone/>
+            </a:pPr>
+            <a:endParaRPr sz="1800">
+              <a:solidFill>
+                <a:schemeClr val="lt1"/>
+              </a:solidFill>
+              <a:latin typeface="Calibri"/>
+              <a:ea typeface="Calibri"/>
+              <a:cs typeface="Calibri"/>
+              <a:sym typeface="Calibri"/>
+            </a:endParaRPr>
+          </a:p>
+        </p:txBody>
+      </p:sp>
+      <p:sp>
+        <p:nvSpPr>
+          <p:cNvPr id="8" name="Google Shape;98;p13">
+            <a:extLst>
+              <a:ext uri="{FF2B5EF4-FFF2-40B4-BE49-F238E27FC236}">
+                <a16:creationId xmlns:a16="http://schemas.microsoft.com/office/drawing/2014/main" id="{DDB1E21D-A88D-F84D-A4C7-D15B09894D17}"/>
+              </a:ext>
+            </a:extLst>
+          </p:cNvPr>
+          <p:cNvSpPr/>
+          <p:nvPr/>
+        </p:nvSpPr>
+        <p:spPr>
+          <a:xfrm>
+            <a:off x="4351034" y="2710753"/>
+            <a:ext cx="1397874" cy="900935"/>
+          </a:xfrm>
+          <a:prstGeom prst="ellipse">
+            <a:avLst/>
+          </a:prstGeom>
+          <a:solidFill>
+            <a:srgbClr val="00B0F0">
+              <a:alpha val="40784"/>
+            </a:srgbClr>
+          </a:solidFill>
+          <a:ln w="12700" cap="flat" cmpd="sng">
+            <a:solidFill>
+              <a:srgbClr val="31538F"/>
+            </a:solidFill>
+            <a:prstDash val="solid"/>
+            <a:miter lim="800000"/>
+            <a:headEnd type="none" w="sm" len="sm"/>
+            <a:tailEnd type="none" w="sm" len="sm"/>
+          </a:ln>
+        </p:spPr>
+        <p:txBody>
+          <a:bodyPr spcFirstLastPara="1" wrap="square" lIns="91425" tIns="45700" rIns="91425" bIns="45700" anchor="ctr" anchorCtr="0">
+            <a:noAutofit/>
+          </a:bodyPr>
+          <a:lstStyle/>
+          <a:p>
+            <a:pPr marL="0" marR="0" lvl="0" indent="0" algn="ctr" rtl="0">
+              <a:spcBef>
+                <a:spcPts val="0"/>
+              </a:spcBef>
+              <a:spcAft>
+                <a:spcPts val="0"/>
+              </a:spcAft>
+              <a:buNone/>
+            </a:pPr>
+            <a:endParaRPr sz="1800">
+              <a:solidFill>
+                <a:schemeClr val="lt1"/>
+              </a:solidFill>
+              <a:latin typeface="Calibri"/>
+              <a:ea typeface="Calibri"/>
+              <a:cs typeface="Calibri"/>
+              <a:sym typeface="Calibri"/>
+            </a:endParaRPr>
+          </a:p>
+        </p:txBody>
+      </p:sp>
+      <p:sp>
+        <p:nvSpPr>
+          <p:cNvPr id="9" name="Google Shape;99;p13">
+            <a:extLst>
+              <a:ext uri="{FF2B5EF4-FFF2-40B4-BE49-F238E27FC236}">
+                <a16:creationId xmlns:a16="http://schemas.microsoft.com/office/drawing/2014/main" id="{4B219D50-9096-DC46-8C16-4EC0A06BA7C0}"/>
+              </a:ext>
+            </a:extLst>
+          </p:cNvPr>
+          <p:cNvSpPr txBox="1"/>
+          <p:nvPr/>
+        </p:nvSpPr>
+        <p:spPr>
+          <a:xfrm>
+            <a:off x="3076580" y="2710753"/>
+            <a:ext cx="971694" cy="647909"/>
+          </a:xfrm>
+          <a:prstGeom prst="rect">
+            <a:avLst/>
+          </a:prstGeom>
+          <a:noFill/>
+          <a:ln>
+            <a:noFill/>
+          </a:ln>
+        </p:spPr>
+        <p:txBody>
+          <a:bodyPr spcFirstLastPara="1" wrap="square" lIns="91425" tIns="45700" rIns="91425" bIns="45700" anchor="t" anchorCtr="0">
+            <a:noAutofit/>
+          </a:bodyPr>
+          <a:lstStyle>
+            <a:defPPr marR="0" lvl="0" algn="l" rtl="0">
+              <a:lnSpc>
+                <a:spcPct val="100000"/>
+              </a:lnSpc>
+              <a:spcBef>
+                <a:spcPts val="0"/>
+              </a:spcBef>
+              <a:spcAft>
+                <a:spcPts val="0"/>
+              </a:spcAft>
+            </a:defPPr>
+            <a:lvl1pPr marL="0" indent="0">
+              <a:buNone/>
+              <a:defRPr sz="1800" b="1">
+                <a:solidFill>
+                  <a:srgbClr val="FF0000"/>
+                </a:solidFill>
+                <a:latin typeface="Calibri"/>
+                <a:ea typeface="Calibri"/>
+                <a:cs typeface="Calibri"/>
+              </a:defRPr>
+            </a:lvl1pPr>
+          </a:lstStyle>
+          <a:p>
+            <a:r>
+              <a:rPr lang="en-US" dirty="0">
+                <a:sym typeface="Calibri"/>
+              </a:rPr>
+              <a:t>A</a:t>
+            </a:r>
+          </a:p>
+          <a:p>
+            <a:r>
+              <a:rPr lang="en-US" dirty="0">
+                <a:sym typeface="Calibri"/>
+              </a:rPr>
+              <a:t>Coffee</a:t>
+            </a:r>
+            <a:endParaRPr dirty="0">
+              <a:sym typeface="Calibri"/>
+            </a:endParaRPr>
+          </a:p>
+        </p:txBody>
+      </p:sp>
+      <p:sp>
+        <p:nvSpPr>
+          <p:cNvPr id="10" name="Google Shape;100;p13">
+            <a:extLst>
+              <a:ext uri="{FF2B5EF4-FFF2-40B4-BE49-F238E27FC236}">
+                <a16:creationId xmlns:a16="http://schemas.microsoft.com/office/drawing/2014/main" id="{A8D1023C-103A-914C-952D-A30BFA64F4CA}"/>
+              </a:ext>
+            </a:extLst>
+          </p:cNvPr>
+          <p:cNvSpPr txBox="1"/>
+          <p:nvPr/>
+        </p:nvSpPr>
+        <p:spPr>
+          <a:xfrm>
+            <a:off x="5399579" y="2985773"/>
+            <a:ext cx="1397874" cy="745778"/>
+          </a:xfrm>
+          <a:prstGeom prst="rect">
+            <a:avLst/>
+          </a:prstGeom>
+          <a:noFill/>
+          <a:ln>
+            <a:noFill/>
+          </a:ln>
+        </p:spPr>
+        <p:txBody>
+          <a:bodyPr spcFirstLastPara="1" wrap="square" lIns="91425" tIns="45700" rIns="91425" bIns="45700" anchor="t" anchorCtr="0">
+            <a:noAutofit/>
+          </a:bodyPr>
+          <a:lstStyle/>
+          <a:p>
+            <a:pPr marL="0" marR="0" lvl="0" indent="0" algn="l" rtl="0">
+              <a:spcBef>
+                <a:spcPts val="0"/>
+              </a:spcBef>
+              <a:spcAft>
+                <a:spcPts val="0"/>
+              </a:spcAft>
+              <a:buNone/>
+            </a:pPr>
+            <a:r>
+              <a:rPr lang="en-US" sz="1800" b="1" dirty="0">
+                <a:solidFill>
+                  <a:srgbClr val="FF0000"/>
+                </a:solidFill>
+                <a:latin typeface="Calibri"/>
+                <a:ea typeface="Calibri"/>
+                <a:cs typeface="Calibri"/>
+                <a:sym typeface="Calibri"/>
+              </a:rPr>
+              <a:t>B</a:t>
+            </a:r>
+          </a:p>
+          <a:p>
+            <a:pPr marL="0" marR="0" lvl="0" indent="0" algn="l" rtl="0">
+              <a:spcBef>
+                <a:spcPts val="0"/>
+              </a:spcBef>
+              <a:spcAft>
+                <a:spcPts val="0"/>
+              </a:spcAft>
+              <a:buNone/>
+            </a:pPr>
+            <a:r>
+              <a:rPr lang="en-US" sz="1800" b="1" dirty="0">
+                <a:solidFill>
+                  <a:srgbClr val="FF0000"/>
+                </a:solidFill>
+                <a:latin typeface="Calibri"/>
+                <a:ea typeface="Calibri"/>
+                <a:cs typeface="Calibri"/>
+                <a:sym typeface="Calibri"/>
+              </a:rPr>
+              <a:t>Damaged</a:t>
+            </a:r>
+            <a:endParaRPr sz="1800" b="1" dirty="0">
+              <a:solidFill>
+                <a:srgbClr val="FF0000"/>
+              </a:solidFill>
+              <a:latin typeface="Calibri"/>
+              <a:ea typeface="Calibri"/>
+              <a:cs typeface="Calibri"/>
+              <a:sym typeface="Calibri"/>
+            </a:endParaRPr>
+          </a:p>
+        </p:txBody>
+      </p:sp>
+      <p:sp>
+        <p:nvSpPr>
+          <p:cNvPr id="11" name="Google Shape;101;p13">
+            <a:extLst>
+              <a:ext uri="{FF2B5EF4-FFF2-40B4-BE49-F238E27FC236}">
+                <a16:creationId xmlns:a16="http://schemas.microsoft.com/office/drawing/2014/main" id="{7B123850-E879-7745-BC69-FED970CB58A9}"/>
+              </a:ext>
+            </a:extLst>
+          </p:cNvPr>
+          <p:cNvSpPr txBox="1"/>
+          <p:nvPr/>
+        </p:nvSpPr>
+        <p:spPr>
+          <a:xfrm>
+            <a:off x="4701470" y="1956549"/>
+            <a:ext cx="1530878" cy="461665"/>
+          </a:xfrm>
+          <a:prstGeom prst="rect">
+            <a:avLst/>
+          </a:prstGeom>
+          <a:noFill/>
+          <a:ln>
+            <a:noFill/>
+          </a:ln>
+        </p:spPr>
+        <p:txBody>
+          <a:bodyPr spcFirstLastPara="1" wrap="square" lIns="91425" tIns="45700" rIns="91425" bIns="45700" anchor="t" anchorCtr="0">
+            <a:noAutofit/>
+          </a:bodyPr>
+          <a:lstStyle/>
+          <a:p>
+            <a:pPr marL="0" marR="0" lvl="0" indent="0" algn="l" rtl="0">
+              <a:spcBef>
+                <a:spcPts val="0"/>
+              </a:spcBef>
+              <a:spcAft>
+                <a:spcPts val="0"/>
+              </a:spcAft>
+              <a:buNone/>
+            </a:pPr>
+            <a:r>
+              <a:rPr lang="en-US" sz="2400" b="1" dirty="0">
+                <a:solidFill>
+                  <a:srgbClr val="FF0000"/>
+                </a:solidFill>
+                <a:latin typeface="Calibri"/>
+                <a:ea typeface="Calibri"/>
+                <a:cs typeface="Calibri"/>
+                <a:sym typeface="Calibri"/>
+              </a:rPr>
+              <a:t>All Drives</a:t>
+            </a:r>
+            <a:endParaRPr sz="2400" b="1" dirty="0">
+              <a:solidFill>
+                <a:srgbClr val="FF0000"/>
+              </a:solidFill>
+              <a:latin typeface="Calibri"/>
+              <a:ea typeface="Calibri"/>
+              <a:cs typeface="Calibri"/>
+              <a:sym typeface="Calibri"/>
+            </a:endParaRPr>
+          </a:p>
+        </p:txBody>
+      </p:sp>
+      <p:sp>
+        <p:nvSpPr>
+          <p:cNvPr id="12" name="Google Shape;89;p13">
+            <a:extLst>
+              <a:ext uri="{FF2B5EF4-FFF2-40B4-BE49-F238E27FC236}">
+                <a16:creationId xmlns:a16="http://schemas.microsoft.com/office/drawing/2014/main" id="{3C8C744F-A8AE-1E49-818B-4076BC1271A0}"/>
+              </a:ext>
+            </a:extLst>
+          </p:cNvPr>
+          <p:cNvSpPr txBox="1"/>
+          <p:nvPr/>
+        </p:nvSpPr>
+        <p:spPr>
+          <a:xfrm>
+            <a:off x="6674032" y="4576281"/>
+            <a:ext cx="4287043" cy="2050775"/>
+          </a:xfrm>
+          <a:prstGeom prst="rect">
+            <a:avLst/>
+          </a:prstGeom>
+          <a:noFill/>
+          <a:ln>
+            <a:noFill/>
+          </a:ln>
+        </p:spPr>
+        <p:txBody>
+          <a:bodyPr spcFirstLastPara="1" wrap="square" lIns="91425" tIns="45700" rIns="91425" bIns="45700" anchor="t" anchorCtr="0">
+            <a:noAutofit/>
+          </a:bodyPr>
+          <a:lstStyle/>
+          <a:p>
+            <a:pPr marL="0" marR="0" lvl="0" indent="0" algn="l" rtl="0">
+              <a:spcBef>
+                <a:spcPts val="0"/>
+              </a:spcBef>
+              <a:spcAft>
+                <a:spcPts val="0"/>
+              </a:spcAft>
+              <a:buNone/>
+            </a:pPr>
+            <a:r>
+              <a:rPr lang="en-US" sz="1200" dirty="0">
+                <a:solidFill>
+                  <a:schemeClr val="dk1"/>
+                </a:solidFill>
+                <a:latin typeface="Calibri"/>
+                <a:cs typeface="Calibri"/>
+                <a:sym typeface="Calibri"/>
+              </a:rPr>
+              <a:t>A = Coffee, B = Damaged</a:t>
+            </a:r>
+            <a:endParaRPr lang="en-US" sz="1200" dirty="0">
+              <a:solidFill>
+                <a:schemeClr val="dk1"/>
+              </a:solidFill>
+              <a:latin typeface="Calibri"/>
+              <a:ea typeface="Calibri"/>
+              <a:cs typeface="Calibri"/>
+              <a:sym typeface="Calibri"/>
+            </a:endParaRPr>
+          </a:p>
+          <a:p>
+            <a:pPr lvl="0"/>
+            <a:r>
+              <a:rPr lang="en-US" sz="1200" dirty="0">
+                <a:solidFill>
+                  <a:schemeClr val="dk1"/>
+                </a:solidFill>
+                <a:latin typeface="Calibri"/>
+                <a:ea typeface="Calibri"/>
+                <a:cs typeface="Calibri"/>
+                <a:sym typeface="Calibri"/>
+              </a:rPr>
+              <a:t>P(A) = 5% = probability of </a:t>
+            </a:r>
+            <a:r>
+              <a:rPr lang="en-US" sz="1200" dirty="0">
+                <a:solidFill>
+                  <a:schemeClr val="dk1"/>
+                </a:solidFill>
+                <a:latin typeface="Calibri"/>
+                <a:cs typeface="Calibri"/>
+                <a:sym typeface="Calibri"/>
+              </a:rPr>
+              <a:t>Coffee</a:t>
+            </a:r>
+            <a:r>
+              <a:rPr lang="en-US" sz="1200" dirty="0">
+                <a:solidFill>
+                  <a:schemeClr val="dk1"/>
+                </a:solidFill>
+                <a:latin typeface="Calibri"/>
+                <a:ea typeface="Calibri"/>
+                <a:cs typeface="Calibri"/>
+                <a:sym typeface="Calibri"/>
+              </a:rPr>
+              <a:t> (Yellow)</a:t>
+            </a:r>
+          </a:p>
+          <a:p>
+            <a:pPr marL="0" marR="0" lvl="0" indent="0" algn="l" rtl="0">
+              <a:spcBef>
+                <a:spcPts val="0"/>
+              </a:spcBef>
+              <a:spcAft>
+                <a:spcPts val="0"/>
+              </a:spcAft>
+              <a:buNone/>
+            </a:pPr>
+            <a:r>
+              <a:rPr lang="en-US" sz="1200" dirty="0">
+                <a:solidFill>
+                  <a:schemeClr val="dk1"/>
+                </a:solidFill>
+                <a:latin typeface="Calibri"/>
+                <a:ea typeface="Calibri"/>
+                <a:cs typeface="Calibri"/>
+                <a:sym typeface="Calibri"/>
+              </a:rPr>
+              <a:t>P(B) = 5% = probability of Damaged (Blue)</a:t>
+            </a:r>
+          </a:p>
+          <a:p>
+            <a:pPr lvl="0"/>
+            <a:endParaRPr lang="en-US" sz="1200" dirty="0">
+              <a:solidFill>
+                <a:schemeClr val="dk1"/>
+              </a:solidFill>
+              <a:latin typeface="Calibri"/>
+              <a:ea typeface="Calibri"/>
+              <a:cs typeface="Calibri"/>
+              <a:sym typeface="Calibri"/>
+            </a:endParaRPr>
+          </a:p>
+          <a:p>
+            <a:r>
+              <a:rPr lang="en-US" sz="1200" b="1" dirty="0">
+                <a:solidFill>
+                  <a:srgbClr val="00B0F0"/>
+                </a:solidFill>
+                <a:latin typeface="Calibri"/>
+                <a:cs typeface="Calibri"/>
+                <a:sym typeface="Calibri"/>
+              </a:rPr>
+              <a:t>P(B|A) = 80% = probability of Damaged given that Coffee</a:t>
+            </a:r>
+          </a:p>
+          <a:p>
+            <a:pPr lvl="0"/>
+            <a:r>
+              <a:rPr lang="en-US" sz="1200" dirty="0">
+                <a:solidFill>
+                  <a:schemeClr val="dk1"/>
+                </a:solidFill>
+                <a:latin typeface="Calibri"/>
+                <a:ea typeface="Calibri"/>
+                <a:cs typeface="Calibri"/>
+                <a:sym typeface="Calibri"/>
+              </a:rPr>
+              <a:t>P(A|B) = 80% = probability of Coffee given that Damaged</a:t>
+            </a:r>
+          </a:p>
+          <a:p>
+            <a:pPr lvl="0"/>
+            <a:endParaRPr lang="en-US" sz="1200" dirty="0">
+              <a:solidFill>
+                <a:schemeClr val="dk1"/>
+              </a:solidFill>
+              <a:latin typeface="Calibri"/>
+              <a:ea typeface="Calibri"/>
+              <a:cs typeface="Calibri"/>
+              <a:sym typeface="Calibri"/>
+            </a:endParaRPr>
+          </a:p>
+          <a:p>
+            <a:pPr marL="0" marR="0" lvl="0" indent="0" algn="l" rtl="0">
+              <a:spcBef>
+                <a:spcPts val="0"/>
+              </a:spcBef>
+              <a:spcAft>
+                <a:spcPts val="0"/>
+              </a:spcAft>
+              <a:buNone/>
+            </a:pPr>
+            <a:r>
+              <a:rPr lang="en-US" sz="1200" dirty="0">
+                <a:solidFill>
+                  <a:schemeClr val="dk1"/>
+                </a:solidFill>
+                <a:latin typeface="Calibri"/>
+                <a:ea typeface="Calibri"/>
+                <a:cs typeface="Calibri"/>
+                <a:sym typeface="Calibri"/>
+              </a:rPr>
+              <a:t>Intersection:</a:t>
+            </a:r>
+          </a:p>
+          <a:p>
+            <a:r>
+              <a:rPr lang="en-US" sz="1200" dirty="0">
+                <a:solidFill>
+                  <a:schemeClr val="dk1"/>
+                </a:solidFill>
+                <a:latin typeface="Calibri"/>
+                <a:ea typeface="Calibri"/>
+                <a:cs typeface="Calibri"/>
+                <a:sym typeface="Calibri"/>
+              </a:rPr>
+              <a:t>P(A &amp; B) = 4% = probability of Coffee &amp; Damaged (Green)</a:t>
+            </a:r>
+          </a:p>
+          <a:p>
+            <a:pPr marL="0" marR="0" lvl="0" indent="0" algn="l" rtl="0">
+              <a:spcBef>
+                <a:spcPts val="0"/>
+              </a:spcBef>
+              <a:spcAft>
+                <a:spcPts val="0"/>
+              </a:spcAft>
+              <a:buNone/>
+            </a:pPr>
+            <a:r>
+              <a:rPr lang="en-US" sz="1200" dirty="0">
+                <a:solidFill>
+                  <a:schemeClr val="dk1"/>
+                </a:solidFill>
+                <a:latin typeface="Calibri"/>
+                <a:ea typeface="Calibri"/>
+                <a:cs typeface="Calibri"/>
+                <a:sym typeface="Calibri"/>
+              </a:rPr>
+              <a:t>P(A|B)*P(B) = 80%*5% = 4%</a:t>
+            </a:r>
+            <a:endParaRPr sz="1200" dirty="0">
+              <a:solidFill>
+                <a:schemeClr val="dk1"/>
+              </a:solidFill>
+              <a:latin typeface="Calibri"/>
+              <a:ea typeface="Calibri"/>
+              <a:cs typeface="Calibri"/>
+              <a:sym typeface="Calibri"/>
+            </a:endParaRPr>
+          </a:p>
+          <a:p>
+            <a:pPr marL="0" marR="0" lvl="0" indent="0" algn="l" rtl="0">
+              <a:spcBef>
+                <a:spcPts val="0"/>
+              </a:spcBef>
+              <a:spcAft>
+                <a:spcPts val="0"/>
+              </a:spcAft>
+              <a:buNone/>
+            </a:pPr>
+            <a:r>
+              <a:rPr lang="en-US" sz="1200" dirty="0">
+                <a:solidFill>
+                  <a:schemeClr val="dk1"/>
+                </a:solidFill>
+                <a:latin typeface="Calibri"/>
+                <a:ea typeface="Calibri"/>
+                <a:cs typeface="Calibri"/>
+                <a:sym typeface="Calibri"/>
+              </a:rPr>
+              <a:t>P(B|A)*P(A) = 80%*5% = 4%</a:t>
+            </a:r>
+          </a:p>
+        </p:txBody>
+      </p:sp>
+      <p:sp>
+        <p:nvSpPr>
+          <p:cNvPr id="13" name="Google Shape;96;p13">
+            <a:extLst>
+              <a:ext uri="{FF2B5EF4-FFF2-40B4-BE49-F238E27FC236}">
+                <a16:creationId xmlns:a16="http://schemas.microsoft.com/office/drawing/2014/main" id="{569DD241-518F-8F46-AE6A-34E80876D3BC}"/>
+              </a:ext>
+            </a:extLst>
+          </p:cNvPr>
+          <p:cNvSpPr/>
+          <p:nvPr/>
+        </p:nvSpPr>
+        <p:spPr>
+          <a:xfrm>
+            <a:off x="1531632" y="4517792"/>
+            <a:ext cx="5033285" cy="2229852"/>
+          </a:xfrm>
+          <a:prstGeom prst="rect">
+            <a:avLst/>
+          </a:prstGeom>
+          <a:solidFill>
+            <a:srgbClr val="FBE4D4"/>
+          </a:solidFill>
+          <a:ln w="12700" cap="flat" cmpd="sng">
+            <a:solidFill>
+              <a:srgbClr val="31538F"/>
+            </a:solidFill>
+            <a:prstDash val="solid"/>
+            <a:miter lim="800000"/>
+            <a:headEnd type="none" w="sm" len="sm"/>
+            <a:tailEnd type="none" w="sm" len="sm"/>
+          </a:ln>
+        </p:spPr>
+        <p:txBody>
+          <a:bodyPr spcFirstLastPara="1" wrap="square" lIns="91425" tIns="45700" rIns="91425" bIns="45700" anchor="ctr" anchorCtr="0">
+            <a:noAutofit/>
+          </a:bodyPr>
+          <a:lstStyle/>
+          <a:p>
+            <a:pPr marL="0" marR="0" lvl="0" indent="0" algn="ctr" rtl="0">
+              <a:spcBef>
+                <a:spcPts val="0"/>
+              </a:spcBef>
+              <a:spcAft>
+                <a:spcPts val="0"/>
+              </a:spcAft>
+              <a:buNone/>
+            </a:pPr>
+            <a:endParaRPr sz="1800">
+              <a:solidFill>
+                <a:schemeClr val="lt1"/>
+              </a:solidFill>
+              <a:latin typeface="Calibri"/>
+              <a:ea typeface="Calibri"/>
+              <a:cs typeface="Calibri"/>
+              <a:sym typeface="Calibri"/>
+            </a:endParaRPr>
+          </a:p>
+        </p:txBody>
+      </p:sp>
+      <p:sp>
+        <p:nvSpPr>
+          <p:cNvPr id="14" name="Google Shape;97;p13">
+            <a:extLst>
+              <a:ext uri="{FF2B5EF4-FFF2-40B4-BE49-F238E27FC236}">
+                <a16:creationId xmlns:a16="http://schemas.microsoft.com/office/drawing/2014/main" id="{30AA5D0A-2560-CE4A-B38C-91AD69134962}"/>
+              </a:ext>
+            </a:extLst>
+          </p:cNvPr>
+          <p:cNvSpPr/>
+          <p:nvPr/>
+        </p:nvSpPr>
+        <p:spPr>
+          <a:xfrm>
+            <a:off x="4001705" y="5384791"/>
+            <a:ext cx="1397874" cy="900935"/>
+          </a:xfrm>
+          <a:prstGeom prst="ellipse">
+            <a:avLst/>
+          </a:prstGeom>
+          <a:solidFill>
+            <a:srgbClr val="FFC000"/>
+          </a:solidFill>
+          <a:ln w="12700" cap="flat" cmpd="sng">
+            <a:solidFill>
+              <a:srgbClr val="31538F"/>
+            </a:solidFill>
+            <a:prstDash val="solid"/>
+            <a:miter lim="800000"/>
+            <a:headEnd type="none" w="sm" len="sm"/>
+            <a:tailEnd type="none" w="sm" len="sm"/>
+          </a:ln>
+        </p:spPr>
+        <p:txBody>
+          <a:bodyPr spcFirstLastPara="1" wrap="square" lIns="91425" tIns="45700" rIns="91425" bIns="45700" anchor="ctr" anchorCtr="0">
+            <a:noAutofit/>
+          </a:bodyPr>
+          <a:lstStyle/>
+          <a:p>
+            <a:pPr marL="0" marR="0" lvl="0" indent="0" algn="ctr" rtl="0">
+              <a:spcBef>
+                <a:spcPts val="0"/>
+              </a:spcBef>
+              <a:spcAft>
+                <a:spcPts val="0"/>
+              </a:spcAft>
+              <a:buNone/>
+            </a:pPr>
+            <a:endParaRPr sz="1800">
+              <a:solidFill>
+                <a:schemeClr val="lt1"/>
+              </a:solidFill>
+              <a:latin typeface="Calibri"/>
+              <a:ea typeface="Calibri"/>
+              <a:cs typeface="Calibri"/>
+              <a:sym typeface="Calibri"/>
+            </a:endParaRPr>
+          </a:p>
+        </p:txBody>
+      </p:sp>
+      <p:sp>
+        <p:nvSpPr>
+          <p:cNvPr id="15" name="Google Shape;98;p13">
+            <a:extLst>
+              <a:ext uri="{FF2B5EF4-FFF2-40B4-BE49-F238E27FC236}">
+                <a16:creationId xmlns:a16="http://schemas.microsoft.com/office/drawing/2014/main" id="{655DB671-3DA8-B149-8288-4F8B78A39734}"/>
+              </a:ext>
+            </a:extLst>
+          </p:cNvPr>
+          <p:cNvSpPr/>
+          <p:nvPr/>
+        </p:nvSpPr>
+        <p:spPr>
+          <a:xfrm>
+            <a:off x="4351034" y="5254439"/>
+            <a:ext cx="1397874" cy="900935"/>
+          </a:xfrm>
+          <a:prstGeom prst="ellipse">
+            <a:avLst/>
+          </a:prstGeom>
+          <a:solidFill>
+            <a:srgbClr val="00B0F0">
+              <a:alpha val="40784"/>
+            </a:srgbClr>
+          </a:solidFill>
+          <a:ln w="12700" cap="flat" cmpd="sng">
+            <a:solidFill>
+              <a:srgbClr val="31538F"/>
+            </a:solidFill>
+            <a:prstDash val="solid"/>
+            <a:miter lim="800000"/>
+            <a:headEnd type="none" w="sm" len="sm"/>
+            <a:tailEnd type="none" w="sm" len="sm"/>
+          </a:ln>
+        </p:spPr>
+        <p:txBody>
+          <a:bodyPr spcFirstLastPara="1" wrap="square" lIns="91425" tIns="45700" rIns="91425" bIns="45700" anchor="ctr" anchorCtr="0">
+            <a:noAutofit/>
+          </a:bodyPr>
+          <a:lstStyle/>
+          <a:p>
+            <a:pPr marL="0" marR="0" lvl="0" indent="0" algn="ctr" rtl="0">
+              <a:spcBef>
+                <a:spcPts val="0"/>
+              </a:spcBef>
+              <a:spcAft>
+                <a:spcPts val="0"/>
+              </a:spcAft>
+              <a:buNone/>
+            </a:pPr>
+            <a:endParaRPr sz="1800">
+              <a:solidFill>
+                <a:schemeClr val="lt1"/>
+              </a:solidFill>
+              <a:latin typeface="Calibri"/>
+              <a:ea typeface="Calibri"/>
+              <a:cs typeface="Calibri"/>
+              <a:sym typeface="Calibri"/>
+            </a:endParaRPr>
+          </a:p>
+        </p:txBody>
+      </p:sp>
+      <p:sp>
+        <p:nvSpPr>
+          <p:cNvPr id="16" name="Google Shape;99;p13">
+            <a:extLst>
+              <a:ext uri="{FF2B5EF4-FFF2-40B4-BE49-F238E27FC236}">
+                <a16:creationId xmlns:a16="http://schemas.microsoft.com/office/drawing/2014/main" id="{E19F1E77-6C1D-CF40-A056-B5F0A0067705}"/>
+              </a:ext>
+            </a:extLst>
+          </p:cNvPr>
+          <p:cNvSpPr txBox="1"/>
+          <p:nvPr/>
+        </p:nvSpPr>
+        <p:spPr>
+          <a:xfrm>
+            <a:off x="4048274" y="5632718"/>
+            <a:ext cx="581015" cy="431253"/>
+          </a:xfrm>
+          <a:prstGeom prst="rect">
+            <a:avLst/>
+          </a:prstGeom>
+          <a:noFill/>
+          <a:ln>
+            <a:noFill/>
+          </a:ln>
+        </p:spPr>
+        <p:txBody>
+          <a:bodyPr spcFirstLastPara="1" wrap="square" lIns="91425" tIns="45700" rIns="91425" bIns="45700" anchor="t" anchorCtr="0">
+            <a:noAutofit/>
+          </a:bodyPr>
+          <a:lstStyle/>
+          <a:p>
+            <a:pPr marL="0" marR="0" lvl="0" indent="0" algn="l" rtl="0">
+              <a:spcBef>
+                <a:spcPts val="0"/>
+              </a:spcBef>
+              <a:spcAft>
+                <a:spcPts val="0"/>
+              </a:spcAft>
+              <a:buNone/>
+            </a:pPr>
+            <a:r>
+              <a:rPr lang="en-US" sz="2400" b="1" dirty="0">
+                <a:solidFill>
+                  <a:srgbClr val="FF0000"/>
+                </a:solidFill>
+                <a:latin typeface="Calibri"/>
+                <a:ea typeface="Calibri"/>
+                <a:cs typeface="Calibri"/>
+                <a:sym typeface="Calibri"/>
+              </a:rPr>
+              <a:t>A</a:t>
+            </a:r>
+            <a:endParaRPr sz="2400" b="1" dirty="0">
+              <a:solidFill>
+                <a:srgbClr val="FF0000"/>
+              </a:solidFill>
+              <a:latin typeface="Calibri"/>
+              <a:ea typeface="Calibri"/>
+              <a:cs typeface="Calibri"/>
+              <a:sym typeface="Calibri"/>
+            </a:endParaRPr>
+          </a:p>
+        </p:txBody>
+      </p:sp>
+      <p:sp>
+        <p:nvSpPr>
+          <p:cNvPr id="17" name="Google Shape;100;p13">
+            <a:extLst>
+              <a:ext uri="{FF2B5EF4-FFF2-40B4-BE49-F238E27FC236}">
+                <a16:creationId xmlns:a16="http://schemas.microsoft.com/office/drawing/2014/main" id="{61C18CBF-01D4-C848-A7B2-E04510A0F7B8}"/>
+              </a:ext>
+            </a:extLst>
+          </p:cNvPr>
+          <p:cNvSpPr txBox="1"/>
+          <p:nvPr/>
+        </p:nvSpPr>
+        <p:spPr>
+          <a:xfrm>
+            <a:off x="5379642" y="5384791"/>
+            <a:ext cx="640540" cy="433753"/>
+          </a:xfrm>
+          <a:prstGeom prst="rect">
+            <a:avLst/>
+          </a:prstGeom>
+          <a:noFill/>
+          <a:ln>
+            <a:noFill/>
+          </a:ln>
+        </p:spPr>
+        <p:txBody>
+          <a:bodyPr spcFirstLastPara="1" wrap="square" lIns="91425" tIns="45700" rIns="91425" bIns="45700" anchor="t" anchorCtr="0">
+            <a:noAutofit/>
+          </a:bodyPr>
+          <a:lstStyle/>
+          <a:p>
+            <a:pPr marL="0" marR="0" lvl="0" indent="0" algn="l" rtl="0">
+              <a:spcBef>
+                <a:spcPts val="0"/>
+              </a:spcBef>
+              <a:spcAft>
+                <a:spcPts val="0"/>
+              </a:spcAft>
+              <a:buNone/>
+            </a:pPr>
+            <a:r>
+              <a:rPr lang="en-US" sz="2400" b="1" dirty="0">
+                <a:solidFill>
+                  <a:srgbClr val="FF0000"/>
+                </a:solidFill>
+                <a:latin typeface="Calibri"/>
+                <a:ea typeface="Calibri"/>
+                <a:cs typeface="Calibri"/>
+                <a:sym typeface="Calibri"/>
+              </a:rPr>
+              <a:t>B</a:t>
+            </a:r>
+          </a:p>
+        </p:txBody>
+      </p:sp>
+      <p:sp>
+        <p:nvSpPr>
+          <p:cNvPr id="18" name="Google Shape;101;p13">
+            <a:extLst>
+              <a:ext uri="{FF2B5EF4-FFF2-40B4-BE49-F238E27FC236}">
+                <a16:creationId xmlns:a16="http://schemas.microsoft.com/office/drawing/2014/main" id="{C254AE81-7BEC-E24E-A3FD-EA1283594849}"/>
+              </a:ext>
+            </a:extLst>
+          </p:cNvPr>
+          <p:cNvSpPr txBox="1"/>
+          <p:nvPr/>
+        </p:nvSpPr>
+        <p:spPr>
+          <a:xfrm>
+            <a:off x="4701470" y="4500235"/>
+            <a:ext cx="1530878" cy="461665"/>
+          </a:xfrm>
+          <a:prstGeom prst="rect">
+            <a:avLst/>
+          </a:prstGeom>
+          <a:noFill/>
+          <a:ln>
+            <a:noFill/>
+          </a:ln>
+        </p:spPr>
+        <p:txBody>
+          <a:bodyPr spcFirstLastPara="1" wrap="square" lIns="91425" tIns="45700" rIns="91425" bIns="45700" anchor="t" anchorCtr="0">
+            <a:noAutofit/>
+          </a:bodyPr>
+          <a:lstStyle/>
+          <a:p>
+            <a:pPr marL="0" marR="0" lvl="0" indent="0" algn="l" rtl="0">
+              <a:spcBef>
+                <a:spcPts val="0"/>
+              </a:spcBef>
+              <a:spcAft>
+                <a:spcPts val="0"/>
+              </a:spcAft>
+              <a:buNone/>
+            </a:pPr>
+            <a:r>
+              <a:rPr lang="en-US" sz="2400" b="1" dirty="0">
+                <a:solidFill>
+                  <a:srgbClr val="FF0000"/>
+                </a:solidFill>
+                <a:latin typeface="Calibri"/>
+                <a:ea typeface="Calibri"/>
+                <a:cs typeface="Calibri"/>
+                <a:sym typeface="Calibri"/>
+              </a:rPr>
+              <a:t>All Drives</a:t>
+            </a:r>
+            <a:endParaRPr sz="2400" b="1" dirty="0">
+              <a:solidFill>
+                <a:srgbClr val="FF0000"/>
+              </a:solidFill>
+              <a:latin typeface="Calibri"/>
+              <a:ea typeface="Calibri"/>
+              <a:cs typeface="Calibri"/>
+              <a:sym typeface="Calibri"/>
+            </a:endParaRPr>
+          </a:p>
+        </p:txBody>
+      </p:sp>
+      <p:sp>
+        <p:nvSpPr>
+          <p:cNvPr id="19" name="TextBox 18">
+            <a:extLst>
+              <a:ext uri="{FF2B5EF4-FFF2-40B4-BE49-F238E27FC236}">
+                <a16:creationId xmlns:a16="http://schemas.microsoft.com/office/drawing/2014/main" id="{6E6E4C8B-2E60-5C46-9FFF-EB63ACF4895B}"/>
+              </a:ext>
+            </a:extLst>
+          </p:cNvPr>
+          <p:cNvSpPr txBox="1"/>
+          <p:nvPr/>
+        </p:nvSpPr>
+        <p:spPr>
+          <a:xfrm>
+            <a:off x="8930917" y="462807"/>
+            <a:ext cx="3119984" cy="1384995"/>
+          </a:xfrm>
+          <a:prstGeom prst="rect">
+            <a:avLst/>
+          </a:prstGeom>
+          <a:noFill/>
+        </p:spPr>
+        <p:txBody>
+          <a:bodyPr wrap="square" rtlCol="0">
+            <a:spAutoFit/>
+          </a:bodyPr>
+          <a:lstStyle/>
+          <a:p>
+            <a:r>
+              <a:rPr lang="en-US" b="1" dirty="0">
+                <a:solidFill>
+                  <a:srgbClr val="00B050"/>
+                </a:solidFill>
+                <a:latin typeface="Menlo" panose="020B0609030804020204" pitchFamily="49" charset="0"/>
+                <a:ea typeface="Menlo" panose="020B0609030804020204" pitchFamily="49" charset="0"/>
+                <a:cs typeface="Menlo" panose="020B0609030804020204" pitchFamily="49" charset="0"/>
+              </a:rPr>
+              <a:t>+-------+----------+------+</a:t>
+            </a:r>
+          </a:p>
+          <a:p>
+            <a:r>
+              <a:rPr lang="en-US" b="1" dirty="0">
+                <a:solidFill>
+                  <a:srgbClr val="00B050"/>
+                </a:solidFill>
+                <a:latin typeface="Menlo" panose="020B0609030804020204" pitchFamily="49" charset="0"/>
+                <a:ea typeface="Menlo" panose="020B0609030804020204" pitchFamily="49" charset="0"/>
+                <a:cs typeface="Menlo" panose="020B0609030804020204" pitchFamily="49" charset="0"/>
+              </a:rPr>
+              <a:t>|       | Damaged  |      |</a:t>
+            </a:r>
+          </a:p>
+          <a:p>
+            <a:r>
+              <a:rPr lang="en-US" b="1" dirty="0">
+                <a:solidFill>
+                  <a:srgbClr val="00B050"/>
+                </a:solidFill>
+                <a:latin typeface="Menlo" panose="020B0609030804020204" pitchFamily="49" charset="0"/>
+                <a:ea typeface="Menlo" panose="020B0609030804020204" pitchFamily="49" charset="0"/>
+                <a:cs typeface="Menlo" panose="020B0609030804020204" pitchFamily="49" charset="0"/>
+              </a:rPr>
+              <a:t>+-------+----------+------+</a:t>
+            </a:r>
+          </a:p>
+          <a:p>
+            <a:r>
+              <a:rPr lang="en-US" b="1" dirty="0">
+                <a:solidFill>
+                  <a:srgbClr val="00B050"/>
+                </a:solidFill>
+                <a:latin typeface="Menlo" panose="020B0609030804020204" pitchFamily="49" charset="0"/>
+                <a:ea typeface="Menlo" panose="020B0609030804020204" pitchFamily="49" charset="0"/>
+                <a:cs typeface="Menlo" panose="020B0609030804020204" pitchFamily="49" charset="0"/>
+              </a:rPr>
+              <a:t>|Coffee |  80      |  -   |</a:t>
+            </a:r>
+          </a:p>
+          <a:p>
+            <a:r>
+              <a:rPr lang="en-US" b="1" dirty="0">
+                <a:solidFill>
+                  <a:srgbClr val="00B050"/>
+                </a:solidFill>
+                <a:latin typeface="Menlo" panose="020B0609030804020204" pitchFamily="49" charset="0"/>
+                <a:ea typeface="Menlo" panose="020B0609030804020204" pitchFamily="49" charset="0"/>
+                <a:cs typeface="Menlo" panose="020B0609030804020204" pitchFamily="49" charset="0"/>
+              </a:rPr>
+              <a:t>|       |  20      |  -   |</a:t>
+            </a:r>
+          </a:p>
+          <a:p>
+            <a:r>
+              <a:rPr lang="en-US" b="1" dirty="0">
+                <a:solidFill>
+                  <a:srgbClr val="00B050"/>
+                </a:solidFill>
+                <a:latin typeface="Menlo" panose="020B0609030804020204" pitchFamily="49" charset="0"/>
+                <a:ea typeface="Menlo" panose="020B0609030804020204" pitchFamily="49" charset="0"/>
+                <a:cs typeface="Menlo" panose="020B0609030804020204" pitchFamily="49" charset="0"/>
+              </a:rPr>
+              <a:t>+-------+----------+------+</a:t>
+            </a:r>
+          </a:p>
+        </p:txBody>
+      </p:sp>
+    </p:spTree>
+    <p:extLst>
+      <p:ext uri="{BB962C8B-B14F-4D97-AF65-F5344CB8AC3E}">
+        <p14:creationId xmlns:p14="http://schemas.microsoft.com/office/powerpoint/2010/main" val="418091737"/>
+      </p:ext>
+    </p:extLst>
+  </p:cSld>
+  <p:clrMapOvr>
+    <a:masterClrMapping/>
+  </p:clrMapOvr>
+</p:sld>
+</file>
+
+<file path=ppt/slides/slide4.xml><?xml version="1.0" encoding="utf-8"?>
+<p:sld xmlns:a="http://schemas.openxmlformats.org/drawingml/2006/main" xmlns:r="http://schemas.openxmlformats.org/officeDocument/2006/relationships" xmlns:p="http://schemas.openxmlformats.org/presentationml/2006/main">
+  <p:cSld>
+    <p:spTree>
+      <p:nvGrpSpPr>
+        <p:cNvPr id="1" name=""/>
+        <p:cNvGrpSpPr/>
+        <p:nvPr/>
+      </p:nvGrpSpPr>
+      <p:grpSpPr>
+        <a:xfrm>
+          <a:off x="0" y="0"/>
+          <a:ext cx="0" cy="0"/>
+          <a:chOff x="0" y="0"/>
+          <a:chExt cx="0" cy="0"/>
+        </a:xfrm>
+      </p:grpSpPr>
+      <p:sp>
+        <p:nvSpPr>
+          <p:cNvPr id="4" name="TextBox 3">
+            <a:extLst>
+              <a:ext uri="{FF2B5EF4-FFF2-40B4-BE49-F238E27FC236}">
+                <a16:creationId xmlns:a16="http://schemas.microsoft.com/office/drawing/2014/main" id="{8A0212EB-D5F5-7C42-9867-3F4106A76AC3}"/>
+              </a:ext>
+            </a:extLst>
+          </p:cNvPr>
+          <p:cNvSpPr txBox="1"/>
+          <p:nvPr/>
+        </p:nvSpPr>
+        <p:spPr>
+          <a:xfrm>
+            <a:off x="-1" y="37572"/>
+            <a:ext cx="6694715" cy="523220"/>
+          </a:xfrm>
+          <a:prstGeom prst="rect">
+            <a:avLst/>
+          </a:prstGeom>
+          <a:noFill/>
+        </p:spPr>
+        <p:txBody>
+          <a:bodyPr wrap="square" rtlCol="0">
+            <a:spAutoFit/>
+          </a:bodyPr>
+          <a:lstStyle/>
+          <a:p>
+            <a:r>
+              <a:rPr lang="en-US" sz="2800" b="1" dirty="0"/>
+              <a:t>Probability - Bayesian vs Frequentist</a:t>
+            </a:r>
+          </a:p>
+        </p:txBody>
+      </p:sp>
+      <p:sp>
+        <p:nvSpPr>
+          <p:cNvPr id="5" name="TextBox 4">
+            <a:extLst>
+              <a:ext uri="{FF2B5EF4-FFF2-40B4-BE49-F238E27FC236}">
+                <a16:creationId xmlns:a16="http://schemas.microsoft.com/office/drawing/2014/main" id="{AADE8889-8C42-E543-BA59-6986D4778221}"/>
+              </a:ext>
+            </a:extLst>
+          </p:cNvPr>
+          <p:cNvSpPr txBox="1"/>
+          <p:nvPr/>
+        </p:nvSpPr>
+        <p:spPr>
+          <a:xfrm>
+            <a:off x="340391" y="4255692"/>
+            <a:ext cx="5929952" cy="2246769"/>
+          </a:xfrm>
+          <a:prstGeom prst="rect">
+            <a:avLst/>
+          </a:prstGeom>
+          <a:noFill/>
+          <a:ln w="63500">
+            <a:solidFill>
+              <a:schemeClr val="accent6">
+                <a:lumMod val="40000"/>
+                <a:lumOff val="60000"/>
+              </a:schemeClr>
+            </a:solidFill>
+          </a:ln>
+        </p:spPr>
+        <p:txBody>
+          <a:bodyPr wrap="square" rtlCol="0">
+            <a:spAutoFit/>
+          </a:bodyPr>
+          <a:lstStyle/>
+          <a:p>
+            <a:r>
+              <a:rPr lang="en-US" b="1" dirty="0">
+                <a:solidFill>
+                  <a:srgbClr val="FF0000"/>
+                </a:solidFill>
+              </a:rPr>
+              <a:t>Frequentist (classical):</a:t>
+            </a:r>
+          </a:p>
+          <a:p>
+            <a:r>
+              <a:rPr lang="en-US" dirty="0"/>
+              <a:t>    Calculate means (estimates) and confidence intervals</a:t>
+            </a:r>
+          </a:p>
+          <a:p>
+            <a:r>
+              <a:rPr lang="en-US" dirty="0"/>
+              <a:t>    Problems treating missing data (</a:t>
+            </a:r>
+            <a:r>
+              <a:rPr lang="en-US" b="1" dirty="0">
+                <a:solidFill>
+                  <a:srgbClr val="FF0000"/>
+                </a:solidFill>
+              </a:rPr>
+              <a:t>survivorship bias</a:t>
+            </a:r>
+            <a:r>
+              <a:rPr lang="en-US" dirty="0"/>
+              <a:t>)</a:t>
+            </a:r>
+          </a:p>
+          <a:p>
+            <a:r>
+              <a:rPr lang="en-US" dirty="0"/>
+              <a:t>    Problems with hypothesis testing (</a:t>
+            </a:r>
+            <a:r>
+              <a:rPr lang="en-US" b="1" dirty="0">
+                <a:solidFill>
+                  <a:srgbClr val="FF0000"/>
+                </a:solidFill>
+              </a:rPr>
+              <a:t>p-hacking</a:t>
+            </a:r>
+            <a:r>
+              <a:rPr lang="en-US" dirty="0"/>
+              <a:t>)</a:t>
+            </a:r>
+          </a:p>
+          <a:p>
+            <a:endParaRPr lang="en-US" b="1" dirty="0">
+              <a:solidFill>
+                <a:srgbClr val="FF0000"/>
+              </a:solidFill>
+            </a:endParaRPr>
+          </a:p>
+          <a:p>
+            <a:r>
+              <a:rPr lang="en-US" b="1" dirty="0">
+                <a:solidFill>
+                  <a:srgbClr val="FF0000"/>
+                </a:solidFill>
+              </a:rPr>
+              <a:t>Bayesian:</a:t>
+            </a:r>
+          </a:p>
+          <a:p>
+            <a:r>
+              <a:rPr lang="en-US" dirty="0"/>
+              <a:t>    Enumerate all possible </a:t>
+            </a:r>
+            <a:r>
+              <a:rPr lang="en-US" b="1" dirty="0">
+                <a:solidFill>
+                  <a:srgbClr val="FF0000"/>
+                </a:solidFill>
+              </a:rPr>
+              <a:t>hypotheses</a:t>
+            </a:r>
+            <a:r>
+              <a:rPr lang="en-US" dirty="0"/>
+              <a:t> – and compute their probabilities.</a:t>
+            </a:r>
+          </a:p>
+          <a:p>
+            <a:r>
+              <a:rPr lang="en-US" dirty="0"/>
+              <a:t>    We make a (subjective) choice of “</a:t>
+            </a:r>
+            <a:r>
+              <a:rPr lang="en-US" b="1" dirty="0">
+                <a:solidFill>
+                  <a:srgbClr val="FF0000"/>
+                </a:solidFill>
+              </a:rPr>
+              <a:t>prior</a:t>
+            </a:r>
+            <a:r>
+              <a:rPr lang="en-US" dirty="0"/>
+              <a:t>” (model, distribution)</a:t>
+            </a:r>
+          </a:p>
+          <a:p>
+            <a:r>
+              <a:rPr lang="en-US" dirty="0"/>
+              <a:t>    and produce </a:t>
+            </a:r>
+            <a:r>
+              <a:rPr lang="en-US" b="1" dirty="0">
+                <a:solidFill>
+                  <a:srgbClr val="FF0000"/>
+                </a:solidFill>
+              </a:rPr>
+              <a:t>posterior</a:t>
+            </a:r>
+            <a:r>
+              <a:rPr lang="en-US" dirty="0"/>
+              <a:t> distribution.</a:t>
+            </a:r>
+          </a:p>
+          <a:p>
+            <a:r>
+              <a:rPr lang="en-US" dirty="0"/>
+              <a:t>    Allows for complex decision analysis under uncertainty.</a:t>
+            </a:r>
+          </a:p>
+        </p:txBody>
+      </p:sp>
+      <p:sp>
+        <p:nvSpPr>
+          <p:cNvPr id="6" name="TextBox 5">
+            <a:extLst>
+              <a:ext uri="{FF2B5EF4-FFF2-40B4-BE49-F238E27FC236}">
+                <a16:creationId xmlns:a16="http://schemas.microsoft.com/office/drawing/2014/main" id="{D86CA22F-D1DB-184B-8C0D-193FFD538439}"/>
+              </a:ext>
+            </a:extLst>
+          </p:cNvPr>
+          <p:cNvSpPr txBox="1"/>
+          <p:nvPr/>
+        </p:nvSpPr>
+        <p:spPr>
+          <a:xfrm>
+            <a:off x="7515267" y="2288868"/>
+            <a:ext cx="4573575" cy="4339650"/>
+          </a:xfrm>
+          <a:prstGeom prst="rect">
+            <a:avLst/>
+          </a:prstGeom>
+          <a:noFill/>
+        </p:spPr>
+        <p:txBody>
+          <a:bodyPr wrap="square" rtlCol="0">
+            <a:spAutoFit/>
+          </a:bodyPr>
+          <a:lstStyle/>
+          <a:p>
+            <a:pPr marL="171450" indent="-171450">
+              <a:buFont typeface="Arial" panose="020B0604020202020204" pitchFamily="34" charset="0"/>
+              <a:buChar char="•"/>
+            </a:pPr>
+            <a:r>
+              <a:rPr lang="en-US" sz="1200" b="1" dirty="0">
+                <a:solidFill>
+                  <a:srgbClr val="FF0000"/>
+                </a:solidFill>
+              </a:rPr>
+              <a:t>Example1: </a:t>
+            </a:r>
+            <a:r>
+              <a:rPr lang="en-US" sz="1200" dirty="0"/>
+              <a:t>Polling, two candidates: Alice &amp; Bob.</a:t>
+            </a:r>
+            <a:br>
+              <a:rPr lang="en-US" sz="1200" dirty="0"/>
+            </a:br>
+            <a:r>
+              <a:rPr lang="en-US" sz="1200" dirty="0"/>
+              <a:t>52% of polled voters intend to vote for Alice.</a:t>
+            </a:r>
+            <a:br>
+              <a:rPr lang="en-US" sz="1200" dirty="0"/>
+            </a:br>
+            <a:r>
+              <a:rPr lang="en-US" sz="1200" dirty="0"/>
+              <a:t>Confidence interval [42%,62%], p-value = 0.34</a:t>
+            </a:r>
+            <a:br>
+              <a:rPr lang="en-US" sz="1200" dirty="0"/>
+            </a:br>
+            <a:r>
+              <a:rPr lang="en-US" sz="1200" dirty="0"/>
+              <a:t>What is the probability that Alice will win ?</a:t>
+            </a:r>
+            <a:br>
+              <a:rPr lang="en-US" sz="1200" dirty="0"/>
+            </a:br>
+            <a:r>
+              <a:rPr lang="en-US" sz="1200" dirty="0"/>
+              <a:t>Classical frequentist approach can not answer this question.</a:t>
+            </a:r>
+            <a:br>
+              <a:rPr lang="en-US" sz="1200" dirty="0"/>
+            </a:br>
+            <a:r>
+              <a:rPr lang="en-US" sz="1200" dirty="0"/>
+              <a:t>Bayesian method – result is a posterior distribution of possible</a:t>
+            </a:r>
+            <a:br>
+              <a:rPr lang="en-US" sz="1200" dirty="0"/>
+            </a:br>
+            <a:r>
+              <a:rPr lang="en-US" sz="1200" dirty="0"/>
+              <a:t>outcomes based on data.</a:t>
+            </a:r>
+            <a:br>
+              <a:rPr lang="en-US" sz="1200" dirty="0"/>
+            </a:br>
+            <a:r>
+              <a:rPr lang="en-US" sz="1200" dirty="0"/>
+              <a:t>Thus you can get your answer.</a:t>
+            </a:r>
+          </a:p>
+          <a:p>
+            <a:endParaRPr lang="en-US" sz="1200" dirty="0"/>
+          </a:p>
+          <a:p>
+            <a:pPr marL="171450" indent="-171450">
+              <a:buFont typeface="Arial" panose="020B0604020202020204" pitchFamily="34" charset="0"/>
+              <a:buChar char="•"/>
+            </a:pPr>
+            <a:r>
+              <a:rPr lang="en-US" sz="1200" b="1" dirty="0">
+                <a:solidFill>
+                  <a:srgbClr val="FF0000"/>
+                </a:solidFill>
+              </a:rPr>
+              <a:t>Example2:</a:t>
+            </a:r>
+            <a:r>
+              <a:rPr lang="en-US" sz="1200" dirty="0"/>
+              <a:t> comparing two drugs A &amp; B.</a:t>
+            </a:r>
+            <a:br>
+              <a:rPr lang="en-US" sz="1200" dirty="0"/>
+            </a:br>
+            <a:r>
+              <a:rPr lang="en-US" sz="1200" dirty="0"/>
+              <a:t>A is better than B with p value &lt; 0.001</a:t>
+            </a:r>
+            <a:br>
+              <a:rPr lang="en-US" sz="1200" dirty="0"/>
+            </a:br>
+            <a:r>
+              <a:rPr lang="en-US" sz="1200" dirty="0"/>
+              <a:t>A is more expensive.</a:t>
+            </a:r>
+            <a:br>
+              <a:rPr lang="en-US" sz="1200" dirty="0"/>
+            </a:br>
+            <a:r>
+              <a:rPr lang="en-US" sz="1200" dirty="0"/>
+              <a:t>Which drug should we prescribe?</a:t>
+            </a:r>
+            <a:br>
+              <a:rPr lang="en-US" sz="1200" dirty="0"/>
+            </a:br>
+            <a:r>
+              <a:rPr lang="en-US" sz="1200" dirty="0"/>
+              <a:t>Cost-benefit. </a:t>
+            </a:r>
+            <a:br>
+              <a:rPr lang="en-US" sz="1200" dirty="0"/>
+            </a:br>
+            <a:r>
+              <a:rPr lang="en-US" sz="1200" dirty="0"/>
+              <a:t>Suppose we get predicted probability of survival with A and B.</a:t>
+            </a:r>
+            <a:br>
+              <a:rPr lang="en-US" sz="1200" dirty="0"/>
+            </a:br>
+            <a:r>
+              <a:rPr lang="en-US" sz="1200" dirty="0"/>
+              <a:t>We could then compute dollars per life saved. </a:t>
+            </a:r>
+          </a:p>
+          <a:p>
+            <a:endParaRPr lang="en-US" sz="1200" dirty="0"/>
+          </a:p>
+          <a:p>
+            <a:pPr marL="171450" indent="-171450">
+              <a:buFont typeface="Arial" panose="020B0604020202020204" pitchFamily="34" charset="0"/>
+              <a:buChar char="•"/>
+            </a:pPr>
+            <a:r>
+              <a:rPr lang="en-US" sz="1200" b="1" dirty="0">
+                <a:solidFill>
+                  <a:srgbClr val="FF0000"/>
+                </a:solidFill>
+              </a:rPr>
+              <a:t>Example3:</a:t>
+            </a:r>
+            <a:r>
+              <a:rPr lang="en-US" sz="1200" dirty="0"/>
+              <a:t> Guessing game</a:t>
+            </a:r>
+            <a:br>
+              <a:rPr lang="en-US" sz="1200" dirty="0"/>
+            </a:br>
+            <a:r>
+              <a:rPr lang="en-US" sz="1200" dirty="0"/>
+              <a:t>You see the prize – and guess the price</a:t>
+            </a:r>
+            <a:br>
+              <a:rPr lang="en-US" sz="1200" dirty="0"/>
+            </a:br>
+            <a:r>
+              <a:rPr lang="en-US" sz="1200" dirty="0"/>
+              <a:t>Opponent sees a different prize – and guesses the price.</a:t>
+            </a:r>
+            <a:br>
+              <a:rPr lang="en-US" sz="1200" dirty="0"/>
+            </a:br>
+            <a:r>
+              <a:rPr lang="en-US" sz="1200" dirty="0"/>
+              <a:t>Whoever is closer (without going over) wins.</a:t>
+            </a:r>
+          </a:p>
+          <a:p>
+            <a:endParaRPr lang="en-US" sz="1200" dirty="0"/>
+          </a:p>
+          <a:p>
+            <a:pPr marL="171450" indent="-171450">
+              <a:buFont typeface="Arial" panose="020B0604020202020204" pitchFamily="34" charset="0"/>
+              <a:buChar char="•"/>
+            </a:pPr>
+            <a:r>
+              <a:rPr lang="en-US" sz="1200" b="1" dirty="0">
+                <a:solidFill>
+                  <a:srgbClr val="FF0000"/>
+                </a:solidFill>
+              </a:rPr>
+              <a:t>Example4: </a:t>
+            </a:r>
+            <a:r>
+              <a:rPr lang="en-US" sz="1200" dirty="0"/>
+              <a:t>MCMC (Markov-Chain Monte-Carlo)</a:t>
+            </a:r>
+          </a:p>
+        </p:txBody>
+      </p:sp>
+      <p:sp>
+        <p:nvSpPr>
+          <p:cNvPr id="9" name="TextBox 8">
+            <a:extLst>
+              <a:ext uri="{FF2B5EF4-FFF2-40B4-BE49-F238E27FC236}">
+                <a16:creationId xmlns:a16="http://schemas.microsoft.com/office/drawing/2014/main" id="{9D171819-C6E6-4541-8406-01258005E5A5}"/>
+              </a:ext>
+            </a:extLst>
+          </p:cNvPr>
+          <p:cNvSpPr txBox="1"/>
+          <p:nvPr/>
+        </p:nvSpPr>
+        <p:spPr>
+          <a:xfrm>
+            <a:off x="7934173" y="1385016"/>
+            <a:ext cx="4351611" cy="523220"/>
+          </a:xfrm>
+          <a:prstGeom prst="rect">
+            <a:avLst/>
+          </a:prstGeom>
+          <a:noFill/>
+        </p:spPr>
+        <p:txBody>
+          <a:bodyPr wrap="square" rtlCol="0">
+            <a:spAutoFit/>
+          </a:bodyPr>
+          <a:lstStyle/>
+          <a:p>
+            <a:r>
+              <a:rPr lang="en-US" dirty="0"/>
+              <a:t>Allen Downey </a:t>
+            </a:r>
+          </a:p>
+          <a:p>
+            <a:r>
+              <a:rPr lang="en-US" dirty="0"/>
+              <a:t>- </a:t>
+            </a:r>
+            <a:r>
+              <a:rPr lang="en-US" dirty="0">
+                <a:hlinkClick r:id="rId2"/>
+              </a:rPr>
+              <a:t>https://www.youtube.com/watch?v=R6d-AbkhBQ8</a:t>
+            </a:r>
+            <a:r>
+              <a:rPr lang="en-US" dirty="0"/>
+              <a:t> </a:t>
+            </a:r>
+          </a:p>
+        </p:txBody>
+      </p:sp>
+      <p:sp>
+        <p:nvSpPr>
+          <p:cNvPr id="2" name="TextBox 1">
+            <a:extLst>
+              <a:ext uri="{FF2B5EF4-FFF2-40B4-BE49-F238E27FC236}">
+                <a16:creationId xmlns:a16="http://schemas.microsoft.com/office/drawing/2014/main" id="{809CB213-96B1-CD42-937A-368036DCD1E0}"/>
+              </a:ext>
+            </a:extLst>
+          </p:cNvPr>
+          <p:cNvSpPr txBox="1"/>
+          <p:nvPr/>
+        </p:nvSpPr>
+        <p:spPr>
+          <a:xfrm>
+            <a:off x="340391" y="921460"/>
+            <a:ext cx="5560001" cy="2893100"/>
+          </a:xfrm>
+          <a:prstGeom prst="rect">
+            <a:avLst/>
+          </a:prstGeom>
+          <a:noFill/>
+          <a:ln w="63500">
+            <a:solidFill>
+              <a:schemeClr val="accent6">
+                <a:lumMod val="40000"/>
+                <a:lumOff val="60000"/>
+              </a:schemeClr>
+            </a:solidFill>
+          </a:ln>
+        </p:spPr>
+        <p:txBody>
+          <a:bodyPr wrap="square" rtlCol="0">
+            <a:spAutoFit/>
+          </a:bodyPr>
+          <a:lstStyle/>
+          <a:p>
+            <a:r>
+              <a:rPr lang="en-US" dirty="0"/>
+              <a:t>The </a:t>
+            </a:r>
+            <a:r>
+              <a:rPr lang="en-US" b="1" dirty="0">
+                <a:solidFill>
+                  <a:srgbClr val="FF0000"/>
+                </a:solidFill>
+              </a:rPr>
+              <a:t>Frequentist</a:t>
+            </a:r>
+            <a:r>
+              <a:rPr lang="en-US" dirty="0"/>
+              <a:t> see probability as finding intervals of possible frequencies based on an observed proportion.</a:t>
+            </a:r>
+          </a:p>
+          <a:p>
+            <a:endParaRPr lang="en-US" dirty="0"/>
+          </a:p>
+          <a:p>
+            <a:r>
+              <a:rPr lang="en-US" dirty="0"/>
+              <a:t>The </a:t>
+            </a:r>
+            <a:r>
+              <a:rPr lang="en-US" b="1" dirty="0">
+                <a:solidFill>
+                  <a:srgbClr val="FF0000"/>
+                </a:solidFill>
+              </a:rPr>
+              <a:t>Bayesian</a:t>
+            </a:r>
+            <a:r>
+              <a:rPr lang="en-US" dirty="0"/>
+              <a:t> is subjective and uses a priori beliefs to define a prior probability distribution on the possible values of the unknown parameters – and computing their probabilities (solving </a:t>
+            </a:r>
+            <a:r>
+              <a:rPr lang="en-US" b="1" dirty="0">
+                <a:solidFill>
+                  <a:srgbClr val="00B050"/>
+                </a:solidFill>
+              </a:rPr>
+              <a:t>"inverse probability problem"</a:t>
+            </a:r>
+            <a:r>
+              <a:rPr lang="en-US" dirty="0"/>
+              <a:t>.)</a:t>
+            </a:r>
+          </a:p>
+          <a:p>
+            <a:endParaRPr lang="en-US" dirty="0"/>
+          </a:p>
+          <a:p>
+            <a:r>
+              <a:rPr lang="en-US" b="1" dirty="0">
+                <a:solidFill>
+                  <a:srgbClr val="FF0000"/>
+                </a:solidFill>
+              </a:rPr>
+              <a:t>Frequentists</a:t>
+            </a:r>
+            <a:r>
+              <a:rPr lang="en-US" dirty="0"/>
+              <a:t> accuse Bayesians for being subjective in selecting a prior model / distribution. </a:t>
+            </a:r>
+          </a:p>
+          <a:p>
+            <a:endParaRPr lang="en-US" dirty="0"/>
+          </a:p>
+          <a:p>
+            <a:r>
+              <a:rPr lang="en-US" b="1" dirty="0">
+                <a:solidFill>
+                  <a:srgbClr val="FF0000"/>
+                </a:solidFill>
+              </a:rPr>
+              <a:t>Bayesians</a:t>
+            </a:r>
+            <a:r>
+              <a:rPr lang="en-US" dirty="0"/>
+              <a:t> snap back that at least they have a model, whereas Frequentists just calculate averages of observed data</a:t>
+            </a:r>
+          </a:p>
+        </p:txBody>
+      </p:sp>
+      <p:pic>
+        <p:nvPicPr>
+          <p:cNvPr id="3" name="Picture 2">
+            <a:extLst>
+              <a:ext uri="{FF2B5EF4-FFF2-40B4-BE49-F238E27FC236}">
+                <a16:creationId xmlns:a16="http://schemas.microsoft.com/office/drawing/2014/main" id="{E6EEDA71-99AC-A641-AF32-73A8DD7D6C21}"/>
+              </a:ext>
+            </a:extLst>
+          </p:cNvPr>
+          <p:cNvPicPr>
+            <a:picLocks noChangeAspect="1"/>
+          </p:cNvPicPr>
+          <p:nvPr/>
+        </p:nvPicPr>
+        <p:blipFill>
+          <a:blip r:embed="rId3" cstate="email">
+            <a:extLst>
+              <a:ext uri="{28A0092B-C50C-407E-A947-70E740481C1C}">
+                <a14:useLocalDpi xmlns:a14="http://schemas.microsoft.com/office/drawing/2010/main"/>
+              </a:ext>
+            </a:extLst>
+          </a:blip>
+          <a:stretch>
+            <a:fillRect/>
+          </a:stretch>
+        </p:blipFill>
+        <p:spPr>
+          <a:xfrm>
+            <a:off x="9625988" y="65359"/>
+            <a:ext cx="2462854" cy="1311038"/>
+          </a:xfrm>
+          <a:prstGeom prst="rect">
+            <a:avLst/>
+          </a:prstGeom>
+        </p:spPr>
+      </p:pic>
+    </p:spTree>
+    <p:extLst>
+      <p:ext uri="{BB962C8B-B14F-4D97-AF65-F5344CB8AC3E}">
+        <p14:creationId xmlns:p14="http://schemas.microsoft.com/office/powerpoint/2010/main" val="4124171004"/>
+      </p:ext>
+    </p:extLst>
+  </p:cSld>
+  <p:clrMapOvr>
+    <a:masterClrMapping/>
+  </p:clrMapOvr>
+</p:sld>
+</file>
+
+<file path=ppt/slides/slide5.xml><?xml version="1.0" encoding="utf-8"?>
 <p:sld xmlns:a="http://schemas.openxmlformats.org/drawingml/2006/main" xmlns:r="http://schemas.openxmlformats.org/officeDocument/2006/relationships" xmlns:p="http://schemas.openxmlformats.org/presentationml/2006/main">
   <p:cSld>
     <p:spTree>
@@ -17271,8 +20783,8 @@
         </p:nvSpPr>
         <p:spPr>
           <a:xfrm>
-            <a:off x="9397" y="33382"/>
-            <a:ext cx="8128763" cy="3374561"/>
+            <a:off x="9397" y="33383"/>
+            <a:ext cx="7563711" cy="3159957"/>
           </a:xfrm>
           <a:prstGeom prst="rect">
             <a:avLst/>
@@ -17298,22 +20810,22 @@
               <a:buNone/>
             </a:pPr>
             <a:r>
-              <a:rPr lang="en-US" sz="3200" b="1" dirty="0">
-                <a:solidFill>
-                  <a:schemeClr val="dk1"/>
-                </a:solidFill>
-                <a:latin typeface="Calibri"/>
+              <a:rPr lang="en-US" sz="2800" b="1" dirty="0">
+                <a:solidFill>
+                  <a:schemeClr val="dk1"/>
+                </a:solidFill>
+                <a:latin typeface="+mn-lt"/>
                 <a:ea typeface="Calibri"/>
                 <a:cs typeface="Calibri"/>
                 <a:sym typeface="Calibri"/>
               </a:rPr>
               <a:t>Naive Bayes Classifiers </a:t>
             </a:r>
-            <a:endParaRPr sz="3200" b="1" dirty="0">
+            <a:endParaRPr sz="2800" b="1" dirty="0">
               <a:solidFill>
                 <a:schemeClr val="dk1"/>
               </a:solidFill>
-              <a:latin typeface="Calibri"/>
+              <a:latin typeface="+mn-lt"/>
               <a:ea typeface="Calibri"/>
               <a:cs typeface="Calibri"/>
               <a:sym typeface="Calibri"/>
@@ -17329,126 +20841,259 @@
               </a:spcAft>
               <a:buNone/>
             </a:pPr>
-            <a:r>
-              <a:rPr lang="en-US" sz="1800" dirty="0">
-                <a:solidFill>
-                  <a:schemeClr val="dk1"/>
-                </a:solidFill>
-                <a:latin typeface="Calibri"/>
-                <a:ea typeface="Calibri"/>
-                <a:cs typeface="Calibri"/>
-                <a:sym typeface="Calibri"/>
-              </a:rPr>
-              <a:t>Simple probabilistic classifiers based on applying Bayes' theorem. </a:t>
-            </a:r>
-          </a:p>
-          <a:p>
-            <a:pPr lvl="0"/>
-            <a:r>
-              <a:rPr lang="en-US" sz="1800" dirty="0">
-                <a:solidFill>
-                  <a:schemeClr val="dk1"/>
-                </a:solidFill>
-                <a:latin typeface="Calibri"/>
-                <a:ea typeface="Calibri"/>
-                <a:cs typeface="Calibri"/>
-                <a:sym typeface="Calibri"/>
-              </a:rPr>
-              <a:t>The main "Naive" assumption is that although individual features may </a:t>
-            </a:r>
-            <a:r>
-              <a:rPr lang="en-US" sz="1800">
-                <a:solidFill>
-                  <a:schemeClr val="dk1"/>
-                </a:solidFill>
-                <a:latin typeface="Calibri"/>
-                <a:ea typeface="Calibri"/>
-                <a:cs typeface="Calibri"/>
-                <a:sym typeface="Calibri"/>
-              </a:rPr>
-              <a:t>have inter-dependencies </a:t>
-            </a:r>
-            <a:r>
-              <a:rPr lang="en-US" sz="1800" dirty="0">
-                <a:solidFill>
-                  <a:schemeClr val="dk1"/>
-                </a:solidFill>
-                <a:latin typeface="Calibri"/>
-                <a:ea typeface="Calibri"/>
-                <a:cs typeface="Calibri"/>
-                <a:sym typeface="Calibri"/>
-              </a:rPr>
-              <a:t>and may have different importance, we "naively" assume that each feature makes an </a:t>
-            </a:r>
-            <a:r>
-              <a:rPr lang="en-US" sz="1800" b="1" dirty="0">
-                <a:solidFill>
-                  <a:srgbClr val="0070C0"/>
-                </a:solidFill>
-                <a:latin typeface="Calibri"/>
-                <a:ea typeface="Calibri"/>
-                <a:cs typeface="Calibri"/>
-                <a:sym typeface="Calibri"/>
-              </a:rPr>
-              <a:t>independent</a:t>
-            </a:r>
-            <a:r>
-              <a:rPr lang="en-US" sz="1800" dirty="0">
-                <a:solidFill>
-                  <a:schemeClr val="dk1"/>
-                </a:solidFill>
-                <a:latin typeface="Calibri"/>
-                <a:ea typeface="Calibri"/>
-                <a:cs typeface="Calibri"/>
-                <a:sym typeface="Calibri"/>
-              </a:rPr>
-              <a:t> and </a:t>
-            </a:r>
-            <a:r>
-              <a:rPr lang="en-US" sz="1800" b="1" dirty="0">
-                <a:solidFill>
-                  <a:srgbClr val="0070C0"/>
-                </a:solidFill>
-                <a:latin typeface="Calibri"/>
-                <a:ea typeface="Calibri"/>
-                <a:cs typeface="Calibri"/>
-                <a:sym typeface="Calibri"/>
-              </a:rPr>
-              <a:t>equal </a:t>
-            </a:r>
-            <a:r>
-              <a:rPr lang="en-US" sz="1800" dirty="0">
-                <a:solidFill>
-                  <a:schemeClr val="dk1"/>
-                </a:solidFill>
-                <a:latin typeface="Calibri"/>
-                <a:ea typeface="Calibri"/>
-                <a:cs typeface="Calibri"/>
-                <a:sym typeface="Calibri"/>
-              </a:rPr>
-              <a:t>contribution to the outcome. </a:t>
-            </a:r>
-          </a:p>
-          <a:p>
-            <a:pPr lvl="0"/>
-            <a:endParaRPr lang="en-US" sz="1800" dirty="0">
+            <a:endParaRPr lang="en-US" dirty="0">
               <a:solidFill>
                 <a:schemeClr val="dk1"/>
               </a:solidFill>
-              <a:latin typeface="Calibri"/>
+              <a:latin typeface="+mn-lt"/>
               <a:ea typeface="Calibri"/>
               <a:cs typeface="Calibri"/>
               <a:sym typeface="Calibri"/>
             </a:endParaRPr>
           </a:p>
           <a:p>
+            <a:pPr marL="0" marR="0" lvl="0" indent="0" algn="l" rtl="0">
+              <a:spcBef>
+                <a:spcPts val="0"/>
+              </a:spcBef>
+              <a:spcAft>
+                <a:spcPts val="0"/>
+              </a:spcAft>
+              <a:buNone/>
+            </a:pPr>
+            <a:r>
+              <a:rPr lang="en-US" dirty="0">
+                <a:solidFill>
+                  <a:schemeClr val="dk1"/>
+                </a:solidFill>
+                <a:latin typeface="+mn-lt"/>
+                <a:ea typeface="Calibri"/>
+                <a:cs typeface="Calibri"/>
+                <a:sym typeface="Calibri"/>
+              </a:rPr>
+              <a:t>Simple probabilistic classifiers based on Bayes theorem. </a:t>
+            </a:r>
+          </a:p>
+          <a:p>
+            <a:pPr marL="0" marR="0" lvl="0" indent="0" algn="l" rtl="0">
+              <a:spcBef>
+                <a:spcPts val="0"/>
+              </a:spcBef>
+              <a:spcAft>
+                <a:spcPts val="0"/>
+              </a:spcAft>
+              <a:buNone/>
+            </a:pPr>
+            <a:endParaRPr lang="en-US" dirty="0">
+              <a:solidFill>
+                <a:schemeClr val="dk1"/>
+              </a:solidFill>
+              <a:latin typeface="+mn-lt"/>
+              <a:ea typeface="Calibri"/>
+              <a:cs typeface="Calibri"/>
+              <a:sym typeface="Calibri"/>
+            </a:endParaRPr>
+          </a:p>
+          <a:p>
             <a:pPr lvl="0"/>
             <a:r>
-              <a:rPr lang="en-US" sz="1800" dirty="0">
-                <a:solidFill>
-                  <a:schemeClr val="dk1"/>
-                </a:solidFill>
-                <a:latin typeface="Calibri"/>
+              <a:rPr lang="en-US" dirty="0">
+                <a:solidFill>
+                  <a:schemeClr val="dk1"/>
+                </a:solidFill>
+                <a:latin typeface="+mn-lt"/>
+                <a:ea typeface="Calibri"/>
+                <a:cs typeface="Calibri"/>
+                <a:sym typeface="Calibri"/>
+              </a:rPr>
+              <a:t>The main "</a:t>
+            </a:r>
+            <a:r>
+              <a:rPr lang="en-US" b="1" dirty="0">
+                <a:solidFill>
+                  <a:srgbClr val="FF0000"/>
+                </a:solidFill>
+                <a:latin typeface="+mn-lt"/>
+                <a:ea typeface="Calibri"/>
+                <a:cs typeface="Calibri"/>
+                <a:sym typeface="Calibri"/>
+              </a:rPr>
+              <a:t>Naive</a:t>
+            </a:r>
+            <a:r>
+              <a:rPr lang="en-US" dirty="0">
+                <a:solidFill>
+                  <a:schemeClr val="dk1"/>
+                </a:solidFill>
+                <a:latin typeface="+mn-lt"/>
+                <a:ea typeface="Calibri"/>
+                <a:cs typeface="Calibri"/>
+                <a:sym typeface="Calibri"/>
+              </a:rPr>
+              <a:t>" assumption is </a:t>
+            </a:r>
+          </a:p>
+          <a:p>
+            <a:pPr lvl="0"/>
+            <a:r>
+              <a:rPr lang="en-US" dirty="0">
+                <a:solidFill>
+                  <a:schemeClr val="dk1"/>
+                </a:solidFill>
+                <a:latin typeface="+mn-lt"/>
+                <a:ea typeface="Calibri"/>
+                <a:cs typeface="Calibri"/>
+                <a:sym typeface="Calibri"/>
+              </a:rPr>
+              <a:t>that </a:t>
+            </a:r>
+            <a:r>
+              <a:rPr lang="en-US" dirty="0">
+                <a:solidFill>
+                  <a:schemeClr val="dk1"/>
+                </a:solidFill>
+                <a:ea typeface="Calibri"/>
+                <a:cs typeface="Calibri"/>
+                <a:sym typeface="Calibri"/>
+              </a:rPr>
+              <a:t>each feature makes an </a:t>
+            </a:r>
+            <a:r>
+              <a:rPr lang="en-US" b="1" dirty="0">
+                <a:solidFill>
+                  <a:srgbClr val="0070C0"/>
+                </a:solidFill>
+                <a:ea typeface="Calibri"/>
+                <a:cs typeface="Calibri"/>
+                <a:sym typeface="Calibri"/>
+              </a:rPr>
+              <a:t>independent</a:t>
+            </a:r>
+            <a:r>
+              <a:rPr lang="en-US" dirty="0">
+                <a:solidFill>
+                  <a:schemeClr val="dk1"/>
+                </a:solidFill>
+                <a:ea typeface="Calibri"/>
+                <a:cs typeface="Calibri"/>
+                <a:sym typeface="Calibri"/>
+              </a:rPr>
+              <a:t> and </a:t>
+            </a:r>
+            <a:r>
+              <a:rPr lang="en-US" b="1" dirty="0">
+                <a:solidFill>
+                  <a:srgbClr val="0070C0"/>
+                </a:solidFill>
+                <a:ea typeface="Calibri"/>
+                <a:cs typeface="Calibri"/>
+                <a:sym typeface="Calibri"/>
+              </a:rPr>
+              <a:t>equal </a:t>
+            </a:r>
+            <a:r>
+              <a:rPr lang="en-US" dirty="0">
+                <a:solidFill>
+                  <a:schemeClr val="dk1"/>
+                </a:solidFill>
+                <a:ea typeface="Calibri"/>
+                <a:cs typeface="Calibri"/>
+                <a:sym typeface="Calibri"/>
+              </a:rPr>
+              <a:t>contribution to the outcome</a:t>
+            </a:r>
+            <a:endParaRPr lang="en-US" dirty="0">
+              <a:solidFill>
+                <a:schemeClr val="dk1"/>
+              </a:solidFill>
+              <a:latin typeface="+mn-lt"/>
+              <a:ea typeface="Calibri"/>
+              <a:cs typeface="Calibri"/>
+              <a:sym typeface="Calibri"/>
+            </a:endParaRPr>
+          </a:p>
+          <a:p>
+            <a:pPr lvl="0"/>
+            <a:r>
+              <a:rPr lang="en-US" dirty="0">
+                <a:solidFill>
+                  <a:schemeClr val="dk1"/>
+                </a:solidFill>
+                <a:latin typeface="+mn-lt"/>
+                <a:ea typeface="Calibri"/>
+                <a:cs typeface="Calibri"/>
+                <a:sym typeface="Calibri"/>
+              </a:rPr>
+              <a:t>( although features may have </a:t>
+            </a:r>
+            <a:r>
+              <a:rPr lang="en-US" b="1" dirty="0">
+                <a:solidFill>
+                  <a:srgbClr val="00B050"/>
+                </a:solidFill>
+                <a:latin typeface="+mn-lt"/>
+                <a:ea typeface="Calibri"/>
+                <a:cs typeface="Calibri"/>
+                <a:sym typeface="Calibri"/>
+              </a:rPr>
+              <a:t>inter-dependencies</a:t>
+            </a:r>
+            <a:r>
+              <a:rPr lang="en-US" dirty="0">
+                <a:solidFill>
+                  <a:schemeClr val="dk1"/>
+                </a:solidFill>
+                <a:latin typeface="+mn-lt"/>
+                <a:ea typeface="Calibri"/>
+                <a:cs typeface="Calibri"/>
+                <a:sym typeface="Calibri"/>
+              </a:rPr>
+              <a:t> and may have </a:t>
+            </a:r>
+            <a:r>
+              <a:rPr lang="en-US" b="1" dirty="0">
+                <a:solidFill>
+                  <a:srgbClr val="00B050"/>
+                </a:solidFill>
+                <a:latin typeface="+mn-lt"/>
+                <a:cs typeface="Calibri"/>
+                <a:sym typeface="Calibri"/>
+              </a:rPr>
+              <a:t>different importance</a:t>
+            </a:r>
+            <a:r>
+              <a:rPr lang="en-US" dirty="0">
+                <a:solidFill>
+                  <a:schemeClr val="dk1"/>
+                </a:solidFill>
+                <a:latin typeface="+mn-lt"/>
+                <a:ea typeface="Calibri"/>
+                <a:cs typeface="Calibri"/>
+                <a:sym typeface="Calibri"/>
+              </a:rPr>
+              <a:t> )</a:t>
+            </a:r>
+          </a:p>
+          <a:p>
+            <a:pPr lvl="0"/>
+            <a:endParaRPr lang="en-US" dirty="0">
+              <a:solidFill>
+                <a:schemeClr val="dk1"/>
+              </a:solidFill>
+              <a:latin typeface="+mn-lt"/>
+              <a:ea typeface="Calibri"/>
+              <a:cs typeface="Calibri"/>
+              <a:sym typeface="Calibri"/>
+            </a:endParaRPr>
+          </a:p>
+          <a:p>
+            <a:pPr lvl="0"/>
+            <a:r>
+              <a:rPr lang="en-US" dirty="0">
+                <a:solidFill>
+                  <a:schemeClr val="dk1"/>
+                </a:solidFill>
+                <a:latin typeface="+mn-lt"/>
                 <a:ea typeface="Calibri"/>
                 <a:cs typeface="Calibri"/>
                 <a:sym typeface="Calibri"/>
@@ -17459,11 +21104,11 @@
           <a:p>
             <a:pPr lvl="0"/>
             <a:r>
-              <a:rPr lang="en-US" sz="1800" dirty="0">
-                <a:solidFill>
-                  <a:schemeClr val="dk1"/>
-                </a:solidFill>
-                <a:latin typeface="Calibri"/>
+              <a:rPr lang="en-US" dirty="0">
+                <a:solidFill>
+                  <a:schemeClr val="dk1"/>
+                </a:solidFill>
+                <a:latin typeface="+mn-lt"/>
                 <a:ea typeface="Calibri"/>
                 <a:cs typeface="Calibri"/>
                 <a:sym typeface="Calibri"/>
@@ -17473,12 +21118,24 @@
           </a:p>
           <a:p>
             <a:pPr lvl="0"/>
-            <a:r>
-              <a:rPr lang="en-US" sz="1800" dirty="0">
-                <a:solidFill>
-                  <a:schemeClr val="dk1"/>
-                </a:solidFill>
-                <a:latin typeface="Calibri"/>
+            <a:endParaRPr lang="en-US" dirty="0">
+              <a:solidFill>
+                <a:schemeClr val="dk1"/>
+              </a:solidFill>
+              <a:latin typeface="+mn-lt"/>
+              <a:ea typeface="Calibri"/>
+              <a:cs typeface="Calibri"/>
+              <a:sym typeface="Calibri"/>
+            </a:endParaRPr>
+          </a:p>
+          <a:p>
+            <a:pPr lvl="0"/>
+            <a:r>
+              <a:rPr lang="en-US" dirty="0">
+                <a:solidFill>
+                  <a:schemeClr val="dk1"/>
+                </a:solidFill>
+                <a:latin typeface="+mn-lt"/>
                 <a:ea typeface="Calibri"/>
                 <a:cs typeface="Calibri"/>
                 <a:sym typeface="Calibri"/>
@@ -17489,31 +21146,16 @@
           <a:p>
             <a:pPr lvl="0"/>
             <a:r>
-              <a:rPr lang="en-US" sz="1800" dirty="0">
-                <a:solidFill>
-                  <a:schemeClr val="dk1"/>
-                </a:solidFill>
-                <a:latin typeface="Calibri"/>
+              <a:rPr lang="en-US" dirty="0">
+                <a:solidFill>
+                  <a:schemeClr val="dk1"/>
+                </a:solidFill>
+                <a:latin typeface="+mn-lt"/>
                 <a:ea typeface="Calibri"/>
                 <a:cs typeface="Calibri"/>
                 <a:sym typeface="Calibri"/>
               </a:rPr>
-              <a:t>But in reality daily exercising probably contributes more. </a:t>
-            </a:r>
-          </a:p>
-          <a:p>
-            <a:pPr lvl="0"/>
-            <a:r>
-              <a:rPr lang="en-US" sz="1800" dirty="0">
-                <a:solidFill>
-                  <a:schemeClr val="dk1"/>
-                </a:solidFill>
-                <a:latin typeface="Calibri"/>
-                <a:ea typeface="Calibri"/>
-                <a:cs typeface="Calibri"/>
-                <a:sym typeface="Calibri"/>
-              </a:rPr>
-              <a:t>Our naive model doesn't take this into account.</a:t>
+              <a:t>In reality, doing exercises daily probably contributes more – but our model disregards this.</a:t>
             </a:r>
           </a:p>
         </p:txBody>
@@ -17567,7 +21209,7 @@
         </p:nvSpPr>
         <p:spPr>
           <a:xfrm>
-            <a:off x="198355" y="3544856"/>
+            <a:off x="122155" y="3697256"/>
             <a:ext cx="6702776" cy="3041841"/>
           </a:xfrm>
           <a:prstGeom prst="rect">
@@ -17627,7 +21269,7 @@
         </p:nvSpPr>
         <p:spPr>
           <a:xfrm>
-            <a:off x="641760" y="4139794"/>
+            <a:off x="565560" y="4292194"/>
             <a:ext cx="3774964" cy="1764631"/>
           </a:xfrm>
           <a:prstGeom prst="ellipse">
@@ -17687,7 +21329,7 @@
         </p:nvSpPr>
         <p:spPr>
           <a:xfrm>
-            <a:off x="2535840" y="3933325"/>
+            <a:off x="2459640" y="4085725"/>
             <a:ext cx="4174638" cy="1423396"/>
           </a:xfrm>
           <a:prstGeom prst="ellipse">
@@ -17749,7 +21391,7 @@
         </p:nvSpPr>
         <p:spPr>
           <a:xfrm>
-            <a:off x="1453029" y="4791275"/>
+            <a:off x="1376829" y="4943675"/>
             <a:ext cx="1113783" cy="461665"/>
           </a:xfrm>
           <a:prstGeom prst="rect">
@@ -17813,7 +21455,7 @@
         </p:nvSpPr>
         <p:spPr>
           <a:xfrm>
-            <a:off x="3965881" y="4090215"/>
+            <a:off x="3889681" y="4242615"/>
             <a:ext cx="2935250" cy="461665"/>
           </a:xfrm>
           <a:prstGeom prst="rect">
@@ -17877,7 +21519,7 @@
         </p:nvSpPr>
         <p:spPr>
           <a:xfrm>
-            <a:off x="217657" y="3544856"/>
+            <a:off x="141457" y="3697256"/>
             <a:ext cx="1530878" cy="461665"/>
           </a:xfrm>
           <a:prstGeom prst="rect">
@@ -17941,7 +21583,7 @@
         </p:nvSpPr>
         <p:spPr>
           <a:xfrm>
-            <a:off x="2492108" y="4617869"/>
+            <a:off x="2415908" y="4770269"/>
             <a:ext cx="4116519" cy="1638072"/>
           </a:xfrm>
           <a:prstGeom prst="ellipse">
@@ -18003,7 +21645,7 @@
         </p:nvSpPr>
         <p:spPr>
           <a:xfrm>
-            <a:off x="4037214" y="5536803"/>
+            <a:off x="3961014" y="5689203"/>
             <a:ext cx="2673263" cy="461665"/>
           </a:xfrm>
           <a:prstGeom prst="rect">
@@ -18067,8 +21709,8 @@
         </p:nvSpPr>
         <p:spPr>
           <a:xfrm>
-            <a:off x="7227040" y="4398030"/>
-            <a:ext cx="2255288" cy="1600438"/>
+            <a:off x="6907128" y="4663505"/>
+            <a:ext cx="2255288" cy="1384995"/>
           </a:xfrm>
           <a:prstGeom prst="rect">
             <a:avLst/>
@@ -18113,13 +21755,10 @@
               <a:t>     B – Person is Fit</a:t>
             </a:r>
           </a:p>
-          <a:p>
-            <a:endParaRPr lang="en-US" dirty="0"/>
-          </a:p>
         </p:txBody>
       </p:sp>
-      <mc:AlternateContent xmlns:mc="http://schemas.openxmlformats.org/markup-compatibility/2006" xmlns:a14="http://schemas.microsoft.com/office/drawing/2010/main">
-        <mc:Choice Requires="a14">
+      <mc:AlternateContent xmlns:mc="http://schemas.openxmlformats.org/markup-compatibility/2006">
+        <mc:Choice xmlns:a14="http://schemas.microsoft.com/office/drawing/2010/main" Requires="a14">
           <p:sp>
             <p:nvSpPr>
               <p:cNvPr id="18" name="Google Shape;88;p13">
@@ -18134,7 +21773,7 @@
             </p:nvSpPr>
             <p:spPr>
               <a:xfrm>
-                <a:off x="8988552" y="114998"/>
+                <a:off x="9034272" y="145478"/>
                 <a:ext cx="3020568" cy="1494897"/>
               </a:xfrm>
               <a:prstGeom prst="rect">
@@ -18399,7 +22038,7 @@
             </p:txBody>
           </p:sp>
         </mc:Choice>
-        <mc:Fallback xmlns="">
+        <mc:Fallback>
           <p:sp>
             <p:nvSpPr>
               <p:cNvPr id="18" name="Google Shape;88;p13">
@@ -18416,7 +22055,7 @@
             </p:nvSpPr>
             <p:spPr>
               <a:xfrm>
-                <a:off x="8988552" y="114998"/>
+                <a:off x="9034272" y="145478"/>
                 <a:ext cx="3020568" cy="1494897"/>
               </a:xfrm>
               <a:prstGeom prst="rect">
@@ -18425,7 +22064,7 @@
               <a:blipFill>
                 <a:blip r:embed="rId3"/>
                 <a:stretch>
-                  <a:fillRect l="-4098" t="-3226" r="-2049"/>
+                  <a:fillRect l="-3689" t="-3252" r="-2869"/>
                 </a:stretch>
               </a:blipFill>
               <a:ln w="63500" cap="flat" cmpd="sng">
@@ -18453,6 +22092,706 @@
           </p:sp>
         </mc:Fallback>
       </mc:AlternateContent>
+      <mc:AlternateContent xmlns:mc="http://schemas.openxmlformats.org/markup-compatibility/2006">
+        <mc:Choice xmlns:a14="http://schemas.microsoft.com/office/drawing/2010/main" Requires="a14">
+          <p:sp>
+            <p:nvSpPr>
+              <p:cNvPr id="19" name="TextBox 18">
+                <a:extLst>
+                  <a:ext uri="{FF2B5EF4-FFF2-40B4-BE49-F238E27FC236}">
+                    <a16:creationId xmlns:a16="http://schemas.microsoft.com/office/drawing/2014/main" id="{C18BF3F9-41BB-1D45-8949-62D567A837E2}"/>
+                  </a:ext>
+                </a:extLst>
+              </p:cNvPr>
+              <p:cNvSpPr txBox="1"/>
+              <p:nvPr/>
+            </p:nvSpPr>
+            <p:spPr>
+              <a:xfrm>
+                <a:off x="7908064" y="2078755"/>
+                <a:ext cx="4190152" cy="756361"/>
+              </a:xfrm>
+              <a:prstGeom prst="rect">
+                <a:avLst/>
+              </a:prstGeom>
+              <a:noFill/>
+            </p:spPr>
+            <p:txBody>
+              <a:bodyPr wrap="square" rtlCol="0">
+                <a:spAutoFit/>
+              </a:bodyPr>
+              <a:lstStyle/>
+              <a:p>
+                <a:endParaRPr lang="en-US" dirty="0"/>
+              </a:p>
+              <a:p>
+                <a:pPr/>
+                <a14:m>
+                  <m:oMathPara xmlns:m="http://schemas.openxmlformats.org/officeDocument/2006/math">
+                    <m:oMathParaPr>
+                      <m:jc m:val="left"/>
+                    </m:oMathParaPr>
+                    <m:oMath xmlns:m="http://schemas.openxmlformats.org/officeDocument/2006/math">
+                      <m:r>
+                        <a:rPr lang="en-US" b="1" i="1">
+                          <a:latin typeface="Cambria Math" panose="02040503050406030204" pitchFamily="18" charset="0"/>
+                        </a:rPr>
+                        <m:t>𝑷</m:t>
+                      </m:r>
+                      <m:r>
+                        <a:rPr lang="en-US" b="1" i="1" baseline="-25000" smtClean="0">
+                          <a:latin typeface="Cambria Math" panose="02040503050406030204" pitchFamily="18" charset="0"/>
+                        </a:rPr>
+                        <m:t>𝑭𝒊𝒕</m:t>
+                      </m:r>
+                      <m:r>
+                        <a:rPr lang="en-US" b="1" i="1" baseline="-25000" smtClean="0">
+                          <a:latin typeface="Cambria Math" panose="02040503050406030204" pitchFamily="18" charset="0"/>
+                        </a:rPr>
+                        <m:t> </m:t>
+                      </m:r>
+                      <m:r>
+                        <a:rPr lang="en-US" b="1" i="1" baseline="-25000" smtClean="0">
+                          <a:latin typeface="Cambria Math" panose="02040503050406030204" pitchFamily="18" charset="0"/>
+                        </a:rPr>
+                        <m:t> </m:t>
+                      </m:r>
+                      <m:r>
+                        <a:rPr lang="en-US" b="1" i="1" smtClean="0">
+                          <a:latin typeface="Cambria Math" panose="02040503050406030204" pitchFamily="18" charset="0"/>
+                        </a:rPr>
+                        <m:t>= </m:t>
+                      </m:r>
+                      <m:r>
+                        <a:rPr lang="en-US" b="1" i="1" smtClean="0">
+                          <a:latin typeface="Cambria Math" panose="02040503050406030204" pitchFamily="18" charset="0"/>
+                        </a:rPr>
+                        <m:t>𝑷</m:t>
+                      </m:r>
+                      <m:d>
+                        <m:dPr>
+                          <m:ctrlPr>
+                            <a:rPr lang="en-US" b="1" i="1">
+                              <a:latin typeface="Cambria Math" panose="02040503050406030204" pitchFamily="18" charset="0"/>
+                            </a:rPr>
+                          </m:ctrlPr>
+                        </m:dPr>
+                        <m:e>
+                          <m:r>
+                            <a:rPr lang="en-US" b="1" i="1" smtClean="0">
+                              <a:latin typeface="Cambria Math" panose="02040503050406030204" pitchFamily="18" charset="0"/>
+                            </a:rPr>
+                            <m:t>𝑭𝒊𝒕</m:t>
+                          </m:r>
+                        </m:e>
+                        <m:e>
+                          <m:r>
+                            <a:rPr lang="en-US" b="1" i="1" smtClean="0">
+                              <a:latin typeface="Cambria Math" panose="02040503050406030204" pitchFamily="18" charset="0"/>
+                            </a:rPr>
+                            <m:t>𝑨</m:t>
+                          </m:r>
+                          <m:r>
+                            <a:rPr lang="en-US" b="1" i="1">
+                              <a:latin typeface="Cambria Math" panose="02040503050406030204" pitchFamily="18" charset="0"/>
+                            </a:rPr>
+                            <m:t>𝟏</m:t>
+                          </m:r>
+                          <m:r>
+                            <a:rPr lang="en-US" b="1" i="1">
+                              <a:latin typeface="Cambria Math" panose="02040503050406030204" pitchFamily="18" charset="0"/>
+                            </a:rPr>
+                            <m:t>,</m:t>
+                          </m:r>
+                          <m:r>
+                            <a:rPr lang="en-US" b="1" i="1" smtClean="0">
+                              <a:latin typeface="Cambria Math" panose="02040503050406030204" pitchFamily="18" charset="0"/>
+                            </a:rPr>
+                            <m:t>𝑨</m:t>
+                          </m:r>
+                          <m:r>
+                            <a:rPr lang="en-US" b="1" i="1" smtClean="0">
+                              <a:latin typeface="Cambria Math" panose="02040503050406030204" pitchFamily="18" charset="0"/>
+                            </a:rPr>
+                            <m:t>𝟐</m:t>
+                          </m:r>
+                        </m:e>
+                      </m:d>
+                      <m:r>
+                        <a:rPr lang="en-US" b="1" i="1" smtClean="0">
+                          <a:latin typeface="Cambria Math" panose="02040503050406030204" pitchFamily="18" charset="0"/>
+                        </a:rPr>
+                        <m:t>  =   </m:t>
+                      </m:r>
+                      <m:f>
+                        <m:fPr>
+                          <m:ctrlPr>
+                            <a:rPr lang="en-US" b="1" i="1">
+                              <a:latin typeface="Cambria Math" panose="02040503050406030204" pitchFamily="18" charset="0"/>
+                            </a:rPr>
+                          </m:ctrlPr>
+                        </m:fPr>
+                        <m:num>
+                          <m:r>
+                            <a:rPr lang="en-US" b="1" i="1">
+                              <a:latin typeface="Cambria Math" panose="02040503050406030204" pitchFamily="18" charset="0"/>
+                            </a:rPr>
+                            <m:t>𝑷</m:t>
+                          </m:r>
+                          <m:r>
+                            <a:rPr lang="en-US" b="1" i="1">
+                              <a:latin typeface="Cambria Math" panose="02040503050406030204" pitchFamily="18" charset="0"/>
+                            </a:rPr>
+                            <m:t>(</m:t>
+                          </m:r>
+                          <m:r>
+                            <a:rPr lang="en-US" b="1" i="1" smtClean="0">
+                              <a:latin typeface="Cambria Math" panose="02040503050406030204" pitchFamily="18" charset="0"/>
+                            </a:rPr>
+                            <m:t>𝑨</m:t>
+                          </m:r>
+                          <m:r>
+                            <a:rPr lang="en-US" b="1" i="1">
+                              <a:latin typeface="Cambria Math" panose="02040503050406030204" pitchFamily="18" charset="0"/>
+                            </a:rPr>
+                            <m:t>𝟏</m:t>
+                          </m:r>
+                          <m:r>
+                            <a:rPr lang="en-US" b="1" i="1" smtClean="0">
+                              <a:latin typeface="Cambria Math" panose="02040503050406030204" pitchFamily="18" charset="0"/>
+                            </a:rPr>
+                            <m:t>,</m:t>
+                          </m:r>
+                          <m:r>
+                            <a:rPr lang="en-US" b="1" i="1" smtClean="0">
+                              <a:latin typeface="Cambria Math" panose="02040503050406030204" pitchFamily="18" charset="0"/>
+                            </a:rPr>
+                            <m:t>𝑨</m:t>
+                          </m:r>
+                          <m:r>
+                            <a:rPr lang="en-US" b="1" i="1" smtClean="0">
+                              <a:latin typeface="Cambria Math" panose="02040503050406030204" pitchFamily="18" charset="0"/>
+                            </a:rPr>
+                            <m:t>𝟐</m:t>
+                          </m:r>
+                          <m:r>
+                            <a:rPr lang="en-US" b="1" i="1">
+                              <a:latin typeface="Cambria Math" panose="02040503050406030204" pitchFamily="18" charset="0"/>
+                            </a:rPr>
+                            <m:t>|</m:t>
+                          </m:r>
+                          <m:r>
+                            <a:rPr lang="en-US" b="1" i="1" smtClean="0">
+                              <a:latin typeface="Cambria Math" panose="02040503050406030204" pitchFamily="18" charset="0"/>
+                            </a:rPr>
+                            <m:t>𝑭𝒊𝒕</m:t>
+                          </m:r>
+                          <m:r>
+                            <a:rPr lang="en-US" b="1" i="1">
+                              <a:latin typeface="Cambria Math" panose="02040503050406030204" pitchFamily="18" charset="0"/>
+                            </a:rPr>
+                            <m:t>)∗ </m:t>
+                          </m:r>
+                          <m:r>
+                            <a:rPr lang="en-US" b="1" i="1" smtClean="0">
+                              <a:solidFill>
+                                <a:srgbClr val="0070C0"/>
+                              </a:solidFill>
+                              <a:latin typeface="Cambria Math" panose="02040503050406030204" pitchFamily="18" charset="0"/>
+                            </a:rPr>
+                            <m:t>𝑷</m:t>
+                          </m:r>
+                          <m:r>
+                            <a:rPr lang="en-US" b="1" i="1" smtClean="0">
+                              <a:solidFill>
+                                <a:srgbClr val="0070C0"/>
+                              </a:solidFill>
+                              <a:latin typeface="Cambria Math" panose="02040503050406030204" pitchFamily="18" charset="0"/>
+                            </a:rPr>
+                            <m:t>(</m:t>
+                          </m:r>
+                          <m:r>
+                            <a:rPr lang="en-US" b="1" i="1" smtClean="0">
+                              <a:solidFill>
+                                <a:srgbClr val="0070C0"/>
+                              </a:solidFill>
+                              <a:latin typeface="Cambria Math" panose="02040503050406030204" pitchFamily="18" charset="0"/>
+                            </a:rPr>
+                            <m:t>𝑭𝒊𝒕</m:t>
+                          </m:r>
+                          <m:r>
+                            <a:rPr lang="en-US" b="1" i="1" smtClean="0">
+                              <a:solidFill>
+                                <a:srgbClr val="0070C0"/>
+                              </a:solidFill>
+                              <a:latin typeface="Cambria Math" panose="02040503050406030204" pitchFamily="18" charset="0"/>
+                            </a:rPr>
+                            <m:t>)</m:t>
+                          </m:r>
+                        </m:num>
+                        <m:den>
+                          <m:r>
+                            <a:rPr lang="en-US" b="1" i="1">
+                              <a:latin typeface="Cambria Math" panose="02040503050406030204" pitchFamily="18" charset="0"/>
+                            </a:rPr>
+                            <m:t>𝑷</m:t>
+                          </m:r>
+                          <m:r>
+                            <a:rPr lang="en-US" b="1" i="1">
+                              <a:latin typeface="Cambria Math" panose="02040503050406030204" pitchFamily="18" charset="0"/>
+                            </a:rPr>
+                            <m:t>(</m:t>
+                          </m:r>
+                          <m:r>
+                            <a:rPr lang="en-US" b="1" i="1" smtClean="0">
+                              <a:latin typeface="Cambria Math" panose="02040503050406030204" pitchFamily="18" charset="0"/>
+                            </a:rPr>
+                            <m:t>𝑨</m:t>
+                          </m:r>
+                          <m:r>
+                            <a:rPr lang="en-US" b="1" i="1">
+                              <a:latin typeface="Cambria Math" panose="02040503050406030204" pitchFamily="18" charset="0"/>
+                            </a:rPr>
+                            <m:t>𝟏</m:t>
+                          </m:r>
+                          <m:r>
+                            <a:rPr lang="en-US" b="1" i="1">
+                              <a:latin typeface="Cambria Math" panose="02040503050406030204" pitchFamily="18" charset="0"/>
+                            </a:rPr>
+                            <m:t>,</m:t>
+                          </m:r>
+                          <m:r>
+                            <a:rPr lang="en-US" b="1" i="1" smtClean="0">
+                              <a:latin typeface="Cambria Math" panose="02040503050406030204" pitchFamily="18" charset="0"/>
+                            </a:rPr>
+                            <m:t>𝑨</m:t>
+                          </m:r>
+                          <m:r>
+                            <a:rPr lang="en-US" b="1" i="1" smtClean="0">
+                              <a:latin typeface="Cambria Math" panose="02040503050406030204" pitchFamily="18" charset="0"/>
+                            </a:rPr>
+                            <m:t>𝟐</m:t>
+                          </m:r>
+                          <m:r>
+                            <a:rPr lang="en-US" b="1" i="1">
+                              <a:latin typeface="Cambria Math" panose="02040503050406030204" pitchFamily="18" charset="0"/>
+                            </a:rPr>
+                            <m:t>)</m:t>
+                          </m:r>
+                        </m:den>
+                      </m:f>
+                    </m:oMath>
+                  </m:oMathPara>
+                </a14:m>
+                <a:endParaRPr lang="en-US" dirty="0"/>
+              </a:p>
+            </p:txBody>
+          </p:sp>
+        </mc:Choice>
+        <mc:Fallback>
+          <p:sp>
+            <p:nvSpPr>
+              <p:cNvPr id="19" name="TextBox 18">
+                <a:extLst>
+                  <a:ext uri="{FF2B5EF4-FFF2-40B4-BE49-F238E27FC236}">
+                    <a16:creationId xmlns:a16="http://schemas.microsoft.com/office/drawing/2014/main" id="{C18BF3F9-41BB-1D45-8949-62D567A837E2}"/>
+                  </a:ext>
+                </a:extLst>
+              </p:cNvPr>
+              <p:cNvSpPr txBox="1">
+                <a:spLocks noRot="1" noChangeAspect="1" noMove="1" noResize="1" noEditPoints="1" noAdjustHandles="1" noChangeArrowheads="1" noChangeShapeType="1" noTextEdit="1"/>
+              </p:cNvSpPr>
+              <p:nvPr/>
+            </p:nvSpPr>
+            <p:spPr>
+              <a:xfrm>
+                <a:off x="7908064" y="2078755"/>
+                <a:ext cx="4190152" cy="756361"/>
+              </a:xfrm>
+              <a:prstGeom prst="rect">
+                <a:avLst/>
+              </a:prstGeom>
+              <a:blipFill>
+                <a:blip r:embed="rId4"/>
+                <a:stretch>
+                  <a:fillRect b="-3279"/>
+                </a:stretch>
+              </a:blipFill>
+            </p:spPr>
+            <p:txBody>
+              <a:bodyPr/>
+              <a:lstStyle/>
+              <a:p>
+                <a:r>
+                  <a:rPr lang="en-US">
+                    <a:noFill/>
+                  </a:rPr>
+                  <a:t> </a:t>
+                </a:r>
+              </a:p>
+            </p:txBody>
+          </p:sp>
+        </mc:Fallback>
+      </mc:AlternateContent>
+      <mc:AlternateContent xmlns:mc="http://schemas.openxmlformats.org/markup-compatibility/2006">
+        <mc:Choice xmlns:a14="http://schemas.microsoft.com/office/drawing/2010/main" Requires="a14">
+          <p:sp>
+            <p:nvSpPr>
+              <p:cNvPr id="20" name="TextBox 19">
+                <a:extLst>
+                  <a:ext uri="{FF2B5EF4-FFF2-40B4-BE49-F238E27FC236}">
+                    <a16:creationId xmlns:a16="http://schemas.microsoft.com/office/drawing/2014/main" id="{A3C17639-B2CB-5F4A-8710-9F35E10CFB69}"/>
+                  </a:ext>
+                </a:extLst>
+              </p:cNvPr>
+              <p:cNvSpPr txBox="1"/>
+              <p:nvPr/>
+            </p:nvSpPr>
+            <p:spPr>
+              <a:xfrm>
+                <a:off x="7908064" y="3303835"/>
+                <a:ext cx="3592274" cy="756361"/>
+              </a:xfrm>
+              <a:prstGeom prst="rect">
+                <a:avLst/>
+              </a:prstGeom>
+              <a:noFill/>
+            </p:spPr>
+            <p:txBody>
+              <a:bodyPr wrap="square" rtlCol="0">
+                <a:spAutoFit/>
+              </a:bodyPr>
+              <a:lstStyle/>
+              <a:p>
+                <a:endParaRPr lang="en-US" dirty="0"/>
+              </a:p>
+              <a:p>
+                <a:pPr/>
+                <a14:m>
+                  <m:oMathPara xmlns:m="http://schemas.openxmlformats.org/officeDocument/2006/math">
+                    <m:oMathParaPr>
+                      <m:jc m:val="left"/>
+                    </m:oMathParaPr>
+                    <m:oMath xmlns:m="http://schemas.openxmlformats.org/officeDocument/2006/math">
+                      <m:r>
+                        <a:rPr lang="en-US" b="1" i="1">
+                          <a:latin typeface="Cambria Math" panose="02040503050406030204" pitchFamily="18" charset="0"/>
+                        </a:rPr>
+                        <m:t>𝑷</m:t>
+                      </m:r>
+                      <m:r>
+                        <a:rPr lang="en-US" b="1" i="1" baseline="-25000" smtClean="0">
+                          <a:latin typeface="Cambria Math" panose="02040503050406030204" pitchFamily="18" charset="0"/>
+                        </a:rPr>
+                        <m:t>𝑭𝒊𝒕</m:t>
+                      </m:r>
+                      <m:r>
+                        <a:rPr lang="en-US" b="1" i="1" baseline="-25000" smtClean="0">
+                          <a:latin typeface="Cambria Math" panose="02040503050406030204" pitchFamily="18" charset="0"/>
+                        </a:rPr>
+                        <m:t> </m:t>
+                      </m:r>
+                      <m:r>
+                        <a:rPr lang="en-US" b="1" i="1" smtClean="0">
+                          <a:latin typeface="Cambria Math" panose="02040503050406030204" pitchFamily="18" charset="0"/>
+                        </a:rPr>
+                        <m:t> </m:t>
+                      </m:r>
+                      <m:r>
+                        <a:rPr lang="en-US" b="1" i="1">
+                          <a:latin typeface="Cambria Math" panose="02040503050406030204" pitchFamily="18" charset="0"/>
+                        </a:rPr>
+                        <m:t>= </m:t>
+                      </m:r>
+                      <m:r>
+                        <a:rPr lang="en-US" b="1" i="1" smtClean="0">
+                          <a:latin typeface="Cambria Math" panose="02040503050406030204" pitchFamily="18" charset="0"/>
+                        </a:rPr>
+                        <m:t>   </m:t>
+                      </m:r>
+                      <m:f>
+                        <m:fPr>
+                          <m:ctrlPr>
+                            <a:rPr lang="en-US" b="1" i="1">
+                              <a:latin typeface="Cambria Math" panose="02040503050406030204" pitchFamily="18" charset="0"/>
+                            </a:rPr>
+                          </m:ctrlPr>
+                        </m:fPr>
+                        <m:num>
+                          <m:r>
+                            <a:rPr lang="en-US" b="1" i="1">
+                              <a:latin typeface="Cambria Math" panose="02040503050406030204" pitchFamily="18" charset="0"/>
+                            </a:rPr>
+                            <m:t>𝑷</m:t>
+                          </m:r>
+                          <m:r>
+                            <a:rPr lang="en-US" b="1" i="1">
+                              <a:latin typeface="Cambria Math" panose="02040503050406030204" pitchFamily="18" charset="0"/>
+                            </a:rPr>
+                            <m:t>(</m:t>
+                          </m:r>
+                          <m:r>
+                            <a:rPr lang="en-US" b="1" i="1" smtClean="0">
+                              <a:latin typeface="Cambria Math" panose="02040503050406030204" pitchFamily="18" charset="0"/>
+                            </a:rPr>
+                            <m:t>𝑨</m:t>
+                          </m:r>
+                          <m:r>
+                            <a:rPr lang="en-US" b="1" i="1">
+                              <a:latin typeface="Cambria Math" panose="02040503050406030204" pitchFamily="18" charset="0"/>
+                            </a:rPr>
+                            <m:t>𝟏</m:t>
+                          </m:r>
+                          <m:r>
+                            <a:rPr lang="en-US" b="1" i="1">
+                              <a:latin typeface="Cambria Math" panose="02040503050406030204" pitchFamily="18" charset="0"/>
+                            </a:rPr>
+                            <m:t>|</m:t>
+                          </m:r>
+                          <m:r>
+                            <a:rPr lang="en-US" b="1" i="1" smtClean="0">
+                              <a:latin typeface="Cambria Math" panose="02040503050406030204" pitchFamily="18" charset="0"/>
+                            </a:rPr>
+                            <m:t>𝑭𝒊𝒕</m:t>
+                          </m:r>
+                          <m:r>
+                            <a:rPr lang="en-US" b="1" i="1">
+                              <a:latin typeface="Cambria Math" panose="02040503050406030204" pitchFamily="18" charset="0"/>
+                            </a:rPr>
+                            <m:t>) ∗ </m:t>
+                          </m:r>
+                          <m:r>
+                            <a:rPr lang="en-US" b="1" i="1">
+                              <a:latin typeface="Cambria Math" panose="02040503050406030204" pitchFamily="18" charset="0"/>
+                            </a:rPr>
+                            <m:t>𝑷</m:t>
+                          </m:r>
+                          <m:r>
+                            <a:rPr lang="en-US" b="1" i="1">
+                              <a:latin typeface="Cambria Math" panose="02040503050406030204" pitchFamily="18" charset="0"/>
+                            </a:rPr>
+                            <m:t>(</m:t>
+                          </m:r>
+                          <m:r>
+                            <a:rPr lang="en-US" b="1" i="1" smtClean="0">
+                              <a:latin typeface="Cambria Math" panose="02040503050406030204" pitchFamily="18" charset="0"/>
+                            </a:rPr>
+                            <m:t>𝑨</m:t>
+                          </m:r>
+                          <m:r>
+                            <a:rPr lang="en-US" b="1" i="1">
+                              <a:latin typeface="Cambria Math" panose="02040503050406030204" pitchFamily="18" charset="0"/>
+                            </a:rPr>
+                            <m:t>𝟐</m:t>
+                          </m:r>
+                          <m:r>
+                            <a:rPr lang="en-US" b="1" i="1">
+                              <a:latin typeface="Cambria Math" panose="02040503050406030204" pitchFamily="18" charset="0"/>
+                            </a:rPr>
+                            <m:t>|</m:t>
+                          </m:r>
+                          <m:r>
+                            <a:rPr lang="en-US" b="1" i="1">
+                              <a:latin typeface="Cambria Math" panose="02040503050406030204" pitchFamily="18" charset="0"/>
+                            </a:rPr>
+                            <m:t>𝑭𝒊𝒕</m:t>
+                          </m:r>
+                          <m:r>
+                            <a:rPr lang="en-US" b="1" i="1">
+                              <a:latin typeface="Cambria Math" panose="02040503050406030204" pitchFamily="18" charset="0"/>
+                            </a:rPr>
+                            <m:t>) ∗ </m:t>
+                          </m:r>
+                          <m:r>
+                            <a:rPr lang="en-US" b="1" i="1" smtClean="0">
+                              <a:solidFill>
+                                <a:srgbClr val="0070C0"/>
+                              </a:solidFill>
+                              <a:latin typeface="Cambria Math" panose="02040503050406030204" pitchFamily="18" charset="0"/>
+                            </a:rPr>
+                            <m:t>𝑷</m:t>
+                          </m:r>
+                          <m:r>
+                            <a:rPr lang="en-US" b="1" i="1" smtClean="0">
+                              <a:solidFill>
+                                <a:srgbClr val="0070C0"/>
+                              </a:solidFill>
+                              <a:latin typeface="Cambria Math" panose="02040503050406030204" pitchFamily="18" charset="0"/>
+                            </a:rPr>
+                            <m:t>(</m:t>
+                          </m:r>
+                          <m:r>
+                            <a:rPr lang="en-US" b="1" i="1">
+                              <a:solidFill>
+                                <a:srgbClr val="0070C0"/>
+                              </a:solidFill>
+                              <a:latin typeface="Cambria Math" panose="02040503050406030204" pitchFamily="18" charset="0"/>
+                            </a:rPr>
+                            <m:t>𝑭𝒊𝒕</m:t>
+                          </m:r>
+                          <m:r>
+                            <a:rPr lang="en-US" b="1" i="1" smtClean="0">
+                              <a:solidFill>
+                                <a:srgbClr val="0070C0"/>
+                              </a:solidFill>
+                              <a:latin typeface="Cambria Math" panose="02040503050406030204" pitchFamily="18" charset="0"/>
+                            </a:rPr>
+                            <m:t>)</m:t>
+                          </m:r>
+                        </m:num>
+                        <m:den>
+                          <m:r>
+                            <a:rPr lang="en-US" b="1" i="1">
+                              <a:latin typeface="Cambria Math" panose="02040503050406030204" pitchFamily="18" charset="0"/>
+                            </a:rPr>
+                            <m:t>𝑷</m:t>
+                          </m:r>
+                          <m:r>
+                            <a:rPr lang="en-US" b="1" i="1">
+                              <a:latin typeface="Cambria Math" panose="02040503050406030204" pitchFamily="18" charset="0"/>
+                            </a:rPr>
+                            <m:t>(</m:t>
+                          </m:r>
+                          <m:r>
+                            <a:rPr lang="en-US" b="1" i="1" smtClean="0">
+                              <a:latin typeface="Cambria Math" panose="02040503050406030204" pitchFamily="18" charset="0"/>
+                            </a:rPr>
+                            <m:t>𝑨</m:t>
+                          </m:r>
+                          <m:r>
+                            <a:rPr lang="en-US" b="1" i="1">
+                              <a:latin typeface="Cambria Math" panose="02040503050406030204" pitchFamily="18" charset="0"/>
+                            </a:rPr>
+                            <m:t>𝟏</m:t>
+                          </m:r>
+                          <m:r>
+                            <a:rPr lang="en-US" b="1" i="1">
+                              <a:latin typeface="Cambria Math" panose="02040503050406030204" pitchFamily="18" charset="0"/>
+                            </a:rPr>
+                            <m:t>,</m:t>
+                          </m:r>
+                          <m:r>
+                            <a:rPr lang="en-US" b="1" i="1" smtClean="0">
+                              <a:latin typeface="Cambria Math" panose="02040503050406030204" pitchFamily="18" charset="0"/>
+                            </a:rPr>
+                            <m:t>𝑨</m:t>
+                          </m:r>
+                          <m:r>
+                            <a:rPr lang="en-US" b="1" i="1">
+                              <a:latin typeface="Cambria Math" panose="02040503050406030204" pitchFamily="18" charset="0"/>
+                            </a:rPr>
+                            <m:t>𝟐</m:t>
+                          </m:r>
+                          <m:r>
+                            <a:rPr lang="en-US" b="1" i="1">
+                              <a:latin typeface="Cambria Math" panose="02040503050406030204" pitchFamily="18" charset="0"/>
+                            </a:rPr>
+                            <m:t>)</m:t>
+                          </m:r>
+                        </m:den>
+                      </m:f>
+                    </m:oMath>
+                  </m:oMathPara>
+                </a14:m>
+                <a:endParaRPr lang="en-US" dirty="0"/>
+              </a:p>
+            </p:txBody>
+          </p:sp>
+        </mc:Choice>
+        <mc:Fallback>
+          <p:sp>
+            <p:nvSpPr>
+              <p:cNvPr id="20" name="TextBox 19">
+                <a:extLst>
+                  <a:ext uri="{FF2B5EF4-FFF2-40B4-BE49-F238E27FC236}">
+                    <a16:creationId xmlns:a16="http://schemas.microsoft.com/office/drawing/2014/main" id="{A3C17639-B2CB-5F4A-8710-9F35E10CFB69}"/>
+                  </a:ext>
+                </a:extLst>
+              </p:cNvPr>
+              <p:cNvSpPr txBox="1">
+                <a:spLocks noRot="1" noChangeAspect="1" noMove="1" noResize="1" noEditPoints="1" noAdjustHandles="1" noChangeArrowheads="1" noChangeShapeType="1" noTextEdit="1"/>
+              </p:cNvSpPr>
+              <p:nvPr/>
+            </p:nvSpPr>
+            <p:spPr>
+              <a:xfrm>
+                <a:off x="7908064" y="3303835"/>
+                <a:ext cx="3592274" cy="756361"/>
+              </a:xfrm>
+              <a:prstGeom prst="rect">
+                <a:avLst/>
+              </a:prstGeom>
+              <a:blipFill>
+                <a:blip r:embed="rId5"/>
+                <a:stretch>
+                  <a:fillRect b="-5000"/>
+                </a:stretch>
+              </a:blipFill>
+            </p:spPr>
+            <p:txBody>
+              <a:bodyPr/>
+              <a:lstStyle/>
+              <a:p>
+                <a:r>
+                  <a:rPr lang="en-US">
+                    <a:noFill/>
+                  </a:rPr>
+                  <a:t> </a:t>
+                </a:r>
+              </a:p>
+            </p:txBody>
+          </p:sp>
+        </mc:Fallback>
+      </mc:AlternateContent>
+      <p:sp>
+        <p:nvSpPr>
+          <p:cNvPr id="2" name="Down Arrow 1">
+            <a:extLst>
+              <a:ext uri="{FF2B5EF4-FFF2-40B4-BE49-F238E27FC236}">
+                <a16:creationId xmlns:a16="http://schemas.microsoft.com/office/drawing/2014/main" id="{4E5DB39C-A2AB-B047-AE7B-AEB0B4609893}"/>
+              </a:ext>
+            </a:extLst>
+          </p:cNvPr>
+          <p:cNvSpPr/>
+          <p:nvPr/>
+        </p:nvSpPr>
+        <p:spPr>
+          <a:xfrm rot="2264946">
+            <a:off x="9928613" y="2824594"/>
+            <a:ext cx="156536" cy="587491"/>
+          </a:xfrm>
+          <a:prstGeom prst="downArrow">
+            <a:avLst/>
+          </a:prstGeom>
+          <a:solidFill>
+            <a:srgbClr val="00B050"/>
+          </a:solidFill>
+        </p:spPr>
+        <p:style>
+          <a:lnRef idx="2">
+            <a:schemeClr val="accent1">
+              <a:shade val="50000"/>
+            </a:schemeClr>
+          </a:lnRef>
+          <a:fillRef idx="1">
+            <a:schemeClr val="accent1"/>
+          </a:fillRef>
+          <a:effectRef idx="0">
+            <a:schemeClr val="accent1"/>
+          </a:effectRef>
+          <a:fontRef idx="minor">
+            <a:schemeClr val="lt1"/>
+          </a:fontRef>
+        </p:style>
+        <p:txBody>
+          <a:bodyPr rtlCol="0" anchor="ctr"/>
+          <a:lstStyle/>
+          <a:p>
+            <a:pPr algn="ctr"/>
+            <a:endParaRPr lang="en-US"/>
+          </a:p>
+        </p:txBody>
+      </p:sp>
     </p:spTree>
   </p:cSld>
   <p:clrMapOvr>
@@ -18461,603 +22800,7 @@
 </p:sld>
 </file>
 
-<file path=ppt/slides/slide3.xml><?xml version="1.0" encoding="utf-8"?>
-<p:sld xmlns:a="http://schemas.openxmlformats.org/drawingml/2006/main" xmlns:r="http://schemas.openxmlformats.org/officeDocument/2006/relationships" xmlns:p="http://schemas.openxmlformats.org/presentationml/2006/main">
-  <p:cSld>
-    <p:spTree>
-      <p:nvGrpSpPr>
-        <p:cNvPr id="1" name="Shape 106"/>
-        <p:cNvGrpSpPr/>
-        <p:nvPr/>
-      </p:nvGrpSpPr>
-      <p:grpSpPr>
-        <a:xfrm>
-          <a:off x="0" y="0"/>
-          <a:ext cx="0" cy="0"/>
-          <a:chOff x="0" y="0"/>
-          <a:chExt cx="0" cy="0"/>
-        </a:xfrm>
-      </p:grpSpPr>
-      <p:sp>
-        <p:nvSpPr>
-          <p:cNvPr id="108" name="Google Shape;108;p14"/>
-          <p:cNvSpPr txBox="1"/>
-          <p:nvPr/>
-        </p:nvSpPr>
-        <p:spPr>
-          <a:xfrm>
-            <a:off x="64171" y="64169"/>
-            <a:ext cx="7136729" cy="4206079"/>
-          </a:xfrm>
-          <a:prstGeom prst="rect">
-            <a:avLst/>
-          </a:prstGeom>
-          <a:noFill/>
-          <a:ln>
-            <a:noFill/>
-          </a:ln>
-        </p:spPr>
-        <p:txBody>
-          <a:bodyPr spcFirstLastPara="1" wrap="square" lIns="91425" tIns="45700" rIns="91425" bIns="45700" anchor="t" anchorCtr="0">
-            <a:noAutofit/>
-          </a:bodyPr>
-          <a:lstStyle/>
-          <a:p>
-            <a:pPr marL="0" marR="0" lvl="0" indent="0" algn="l" rtl="0">
-              <a:spcBef>
-                <a:spcPts val="0"/>
-              </a:spcBef>
-              <a:spcAft>
-                <a:spcPts val="0"/>
-              </a:spcAft>
-              <a:buNone/>
-            </a:pPr>
-            <a:r>
-              <a:rPr lang="en-US" sz="3200" b="1" dirty="0">
-                <a:solidFill>
-                  <a:schemeClr val="dk1"/>
-                </a:solidFill>
-                <a:latin typeface="Calibri"/>
-                <a:ea typeface="Calibri"/>
-                <a:cs typeface="Calibri"/>
-                <a:sym typeface="Calibri"/>
-              </a:rPr>
-              <a:t>Naive Bayes classifiers - continued</a:t>
-            </a:r>
-            <a:endParaRPr sz="3200" b="1" dirty="0">
-              <a:solidFill>
-                <a:schemeClr val="dk1"/>
-              </a:solidFill>
-              <a:latin typeface="Calibri"/>
-              <a:ea typeface="Calibri"/>
-              <a:cs typeface="Calibri"/>
-              <a:sym typeface="Calibri"/>
-            </a:endParaRPr>
-          </a:p>
-          <a:p>
-            <a:pPr lvl="0"/>
-            <a:r>
-              <a:rPr lang="en-US" sz="1800" dirty="0">
-                <a:solidFill>
-                  <a:schemeClr val="dk1"/>
-                </a:solidFill>
-                <a:latin typeface="Calibri"/>
-                <a:ea typeface="Calibri"/>
-                <a:cs typeface="Calibri"/>
-                <a:sym typeface="Calibri"/>
-              </a:rPr>
-              <a:t>In the table to the right we have 4 columns A</a:t>
-            </a:r>
-            <a:r>
-              <a:rPr lang="en-US" sz="1800" baseline="-25000" dirty="0">
-                <a:solidFill>
-                  <a:schemeClr val="dk1"/>
-                </a:solidFill>
-                <a:latin typeface="Calibri"/>
-                <a:ea typeface="Calibri"/>
-                <a:cs typeface="Calibri"/>
-                <a:sym typeface="Calibri"/>
-              </a:rPr>
-              <a:t>i</a:t>
-            </a:r>
-            <a:r>
-              <a:rPr lang="en-US" sz="1800" dirty="0">
-                <a:solidFill>
-                  <a:schemeClr val="dk1"/>
-                </a:solidFill>
-                <a:latin typeface="Calibri"/>
-                <a:ea typeface="Calibri"/>
-                <a:cs typeface="Calibri"/>
-                <a:sym typeface="Calibri"/>
-              </a:rPr>
-              <a:t> with features </a:t>
-            </a:r>
-          </a:p>
-          <a:p>
-            <a:pPr lvl="0"/>
-            <a:r>
-              <a:rPr lang="en-US" sz="1800" dirty="0">
-                <a:solidFill>
-                  <a:schemeClr val="dk1"/>
-                </a:solidFill>
-                <a:latin typeface="Calibri"/>
-                <a:ea typeface="Calibri"/>
-                <a:cs typeface="Calibri"/>
-                <a:sym typeface="Calibri"/>
-              </a:rPr>
-              <a:t>and one outcome column B - "Play Golf". </a:t>
-            </a:r>
-          </a:p>
-          <a:p>
-            <a:pPr lvl="0"/>
-            <a:r>
-              <a:rPr lang="en-US" sz="1800" dirty="0">
-                <a:solidFill>
-                  <a:schemeClr val="dk1"/>
-                </a:solidFill>
-                <a:latin typeface="Calibri"/>
-                <a:ea typeface="Calibri"/>
-                <a:cs typeface="Calibri"/>
-                <a:sym typeface="Calibri"/>
-              </a:rPr>
-              <a:t>For each value of the outcome (Yes or No) we can calculate the conditional probability/frequency of seeing each feature value A</a:t>
-            </a:r>
-            <a:r>
-              <a:rPr lang="en-US" sz="1800" baseline="-25000" dirty="0">
-                <a:solidFill>
-                  <a:schemeClr val="dk1"/>
-                </a:solidFill>
-                <a:latin typeface="Calibri"/>
-                <a:ea typeface="Calibri"/>
-                <a:cs typeface="Calibri"/>
-                <a:sym typeface="Calibri"/>
-              </a:rPr>
-              <a:t>i</a:t>
-            </a:r>
-            <a:r>
-              <a:rPr lang="en-US" sz="1800" dirty="0">
-                <a:solidFill>
-                  <a:schemeClr val="dk1"/>
-                </a:solidFill>
-                <a:latin typeface="Calibri"/>
-                <a:ea typeface="Calibri"/>
-                <a:cs typeface="Calibri"/>
-                <a:sym typeface="Calibri"/>
-              </a:rPr>
-              <a:t> for a given outcome B:    </a:t>
-            </a:r>
-          </a:p>
-          <a:p>
-            <a:pPr lvl="0"/>
-            <a:r>
-              <a:rPr lang="en-US" sz="1800" dirty="0">
-                <a:solidFill>
-                  <a:schemeClr val="dk1"/>
-                </a:solidFill>
-                <a:latin typeface="Calibri"/>
-                <a:ea typeface="Calibri"/>
-                <a:cs typeface="Calibri"/>
-                <a:sym typeface="Calibri"/>
-              </a:rPr>
-              <a:t>                                   P(A</a:t>
-            </a:r>
-            <a:r>
-              <a:rPr lang="en-US" sz="1800" baseline="-25000" dirty="0">
-                <a:solidFill>
-                  <a:schemeClr val="dk1"/>
-                </a:solidFill>
-                <a:latin typeface="Calibri"/>
-                <a:ea typeface="Calibri"/>
-                <a:cs typeface="Calibri"/>
-                <a:sym typeface="Calibri"/>
-              </a:rPr>
-              <a:t>i</a:t>
-            </a:r>
-            <a:r>
-              <a:rPr lang="en-US" sz="1800" dirty="0">
-                <a:solidFill>
-                  <a:schemeClr val="dk1"/>
-                </a:solidFill>
-                <a:latin typeface="Calibri"/>
-                <a:ea typeface="Calibri"/>
-                <a:cs typeface="Calibri"/>
-                <a:sym typeface="Calibri"/>
-              </a:rPr>
-              <a:t>| B)</a:t>
-            </a:r>
-          </a:p>
-          <a:p>
-            <a:pPr lvl="0"/>
-            <a:endParaRPr lang="en-US" sz="1800" dirty="0">
-              <a:solidFill>
-                <a:schemeClr val="dk1"/>
-              </a:solidFill>
-              <a:latin typeface="Calibri"/>
-              <a:ea typeface="Calibri"/>
-              <a:cs typeface="Calibri"/>
-              <a:sym typeface="Calibri"/>
-            </a:endParaRPr>
-          </a:p>
-          <a:p>
-            <a:pPr lvl="0"/>
-            <a:r>
-              <a:rPr lang="en-US" sz="1800" dirty="0">
-                <a:solidFill>
-                  <a:schemeClr val="dk1"/>
-                </a:solidFill>
-                <a:latin typeface="Calibri"/>
-                <a:ea typeface="Calibri"/>
-                <a:cs typeface="Calibri"/>
-                <a:sym typeface="Calibri"/>
-              </a:rPr>
-              <a:t>For example we can calculate how often we played or not played golf when it was rainy, etc. </a:t>
-            </a:r>
-          </a:p>
-          <a:p>
-            <a:pPr lvl="0"/>
-            <a:r>
-              <a:rPr lang="en-US" sz="1800" dirty="0">
-                <a:solidFill>
-                  <a:schemeClr val="dk1"/>
-                </a:solidFill>
-                <a:latin typeface="Calibri"/>
-                <a:ea typeface="Calibri"/>
-                <a:cs typeface="Calibri"/>
-                <a:sym typeface="Calibri"/>
-              </a:rPr>
-              <a:t>Then we will be calculating the opposite – probability of playing golf</a:t>
-            </a:r>
-          </a:p>
-          <a:p>
-            <a:pPr lvl="0"/>
-            <a:r>
-              <a:rPr lang="en-US" sz="1800" dirty="0">
-                <a:solidFill>
-                  <a:schemeClr val="dk1"/>
-                </a:solidFill>
-                <a:latin typeface="Calibri"/>
-                <a:ea typeface="Calibri"/>
-                <a:cs typeface="Calibri"/>
-                <a:sym typeface="Calibri"/>
-              </a:rPr>
-              <a:t>given a specific set of features: P(</a:t>
-            </a:r>
-            <a:r>
-              <a:rPr lang="en-US" sz="1800" dirty="0" err="1">
-                <a:solidFill>
-                  <a:schemeClr val="dk1"/>
-                </a:solidFill>
-                <a:latin typeface="Calibri"/>
-                <a:ea typeface="Calibri"/>
-                <a:cs typeface="Calibri"/>
-                <a:sym typeface="Calibri"/>
-              </a:rPr>
-              <a:t>B|A</a:t>
-            </a:r>
-            <a:r>
-              <a:rPr lang="en-US" sz="1800" baseline="-25000" dirty="0" err="1">
-                <a:solidFill>
-                  <a:schemeClr val="dk1"/>
-                </a:solidFill>
-                <a:latin typeface="Calibri"/>
-                <a:ea typeface="Calibri"/>
-                <a:cs typeface="Calibri"/>
-                <a:sym typeface="Calibri"/>
-              </a:rPr>
-              <a:t>i</a:t>
-            </a:r>
-            <a:r>
-              <a:rPr lang="en-US" sz="1800" dirty="0">
-                <a:solidFill>
-                  <a:schemeClr val="dk1"/>
-                </a:solidFill>
-                <a:latin typeface="Calibri"/>
-                <a:ea typeface="Calibri"/>
-                <a:cs typeface="Calibri"/>
-                <a:sym typeface="Calibri"/>
-              </a:rPr>
-              <a:t>) . We will use Bayes formula for this.</a:t>
-            </a:r>
-          </a:p>
-          <a:p>
-            <a:pPr lvl="0"/>
-            <a:endParaRPr lang="en-US" sz="1800" dirty="0">
-              <a:solidFill>
-                <a:schemeClr val="dk1"/>
-              </a:solidFill>
-              <a:latin typeface="Calibri"/>
-              <a:ea typeface="Calibri"/>
-              <a:cs typeface="Calibri"/>
-              <a:sym typeface="Calibri"/>
-            </a:endParaRPr>
-          </a:p>
-          <a:p>
-            <a:pPr lvl="0"/>
-            <a:r>
-              <a:rPr lang="en-US" sz="1800" dirty="0">
-                <a:solidFill>
-                  <a:schemeClr val="dk1"/>
-                </a:solidFill>
-                <a:latin typeface="Calibri"/>
-                <a:ea typeface="Calibri"/>
-                <a:cs typeface="Calibri"/>
-                <a:sym typeface="Calibri"/>
-              </a:rPr>
-              <a:t>In other words, we will be able to predict outcome B from features A</a:t>
-            </a:r>
-            <a:r>
-              <a:rPr lang="en-US" sz="1800" baseline="-25000" dirty="0">
-                <a:solidFill>
-                  <a:schemeClr val="dk1"/>
-                </a:solidFill>
-                <a:latin typeface="Calibri"/>
-                <a:ea typeface="Calibri"/>
-                <a:cs typeface="Calibri"/>
-                <a:sym typeface="Calibri"/>
-              </a:rPr>
-              <a:t>i</a:t>
-            </a:r>
-            <a:r>
-              <a:rPr lang="en-US" sz="1800" dirty="0">
-                <a:solidFill>
-                  <a:schemeClr val="dk1"/>
-                </a:solidFill>
-                <a:latin typeface="Calibri"/>
-                <a:ea typeface="Calibri"/>
-                <a:cs typeface="Calibri"/>
-                <a:sym typeface="Calibri"/>
-              </a:rPr>
-              <a:t>.</a:t>
-            </a:r>
-          </a:p>
-        </p:txBody>
-      </p:sp>
-      <p:sp>
-        <p:nvSpPr>
-          <p:cNvPr id="10" name="TextBox 9">
-            <a:extLst>
-              <a:ext uri="{FF2B5EF4-FFF2-40B4-BE49-F238E27FC236}">
-                <a16:creationId xmlns:a16="http://schemas.microsoft.com/office/drawing/2014/main" id="{812C9AFE-2DC4-2C49-A11B-4A24EEEF46C2}"/>
-              </a:ext>
-            </a:extLst>
-          </p:cNvPr>
-          <p:cNvSpPr txBox="1"/>
-          <p:nvPr/>
-        </p:nvSpPr>
-        <p:spPr>
-          <a:xfrm>
-            <a:off x="90386" y="4885456"/>
-            <a:ext cx="11071467" cy="1754326"/>
-          </a:xfrm>
-          <a:prstGeom prst="rect">
-            <a:avLst/>
-          </a:prstGeom>
-          <a:noFill/>
-        </p:spPr>
-        <p:txBody>
-          <a:bodyPr wrap="square" rtlCol="0">
-            <a:spAutoFit/>
-          </a:bodyPr>
-          <a:lstStyle/>
-          <a:p>
-            <a:r>
-              <a:rPr lang="en-US" sz="1800" dirty="0">
-                <a:latin typeface="Calibri" panose="020F0502020204030204" pitchFamily="34" charset="0"/>
-                <a:cs typeface="Calibri" panose="020F0502020204030204" pitchFamily="34" charset="0"/>
-              </a:rPr>
-              <a:t>Here is a very good short video explaining the Naive Bayes Classification on a specific simple example:</a:t>
-            </a:r>
-          </a:p>
-          <a:p>
-            <a:r>
-              <a:rPr lang="en-US" sz="1800" dirty="0">
-                <a:latin typeface="Calibri" panose="020F0502020204030204" pitchFamily="34" charset="0"/>
-                <a:cs typeface="Calibri" panose="020F0502020204030204" pitchFamily="34" charset="0"/>
-              </a:rPr>
-              <a:t> - </a:t>
-            </a:r>
-            <a:r>
-              <a:rPr lang="en-US" sz="1800" dirty="0">
-                <a:latin typeface="Calibri" panose="020F0502020204030204" pitchFamily="34" charset="0"/>
-                <a:cs typeface="Calibri" panose="020F0502020204030204" pitchFamily="34" charset="0"/>
-                <a:hlinkClick r:id="rId3"/>
-              </a:rPr>
-              <a:t>https://www.youtube.com/watch?v=CPqOCI0ahss</a:t>
-            </a:r>
-            <a:endParaRPr lang="en-US" sz="1800" dirty="0">
-              <a:latin typeface="Calibri" panose="020F0502020204030204" pitchFamily="34" charset="0"/>
-              <a:cs typeface="Calibri" panose="020F0502020204030204" pitchFamily="34" charset="0"/>
-            </a:endParaRPr>
-          </a:p>
-          <a:p>
-            <a:r>
-              <a:rPr lang="en-US" sz="1800" dirty="0">
-                <a:latin typeface="Calibri" panose="020F0502020204030204" pitchFamily="34" charset="0"/>
-                <a:cs typeface="Calibri" panose="020F0502020204030204" pitchFamily="34" charset="0"/>
-              </a:rPr>
-              <a:t>Note – there is a (common) mistake in this video! Author calculates denominators via multiplication of individual probabilities. This is wrong. You can see it by yourself how making calculation this way makes the sum of two probabilities greater than one. </a:t>
-            </a:r>
-          </a:p>
-          <a:p>
-            <a:r>
-              <a:rPr lang="en-US" sz="1800" dirty="0">
-                <a:latin typeface="Calibri" panose="020F0502020204030204" pitchFamily="34" charset="0"/>
-                <a:cs typeface="Calibri" panose="020F0502020204030204" pitchFamily="34" charset="0"/>
-              </a:rPr>
-              <a:t>Also here is a good article - </a:t>
-            </a:r>
-            <a:r>
-              <a:rPr lang="en-US" sz="1800" dirty="0">
-                <a:latin typeface="Calibri" panose="020F0502020204030204" pitchFamily="34" charset="0"/>
-                <a:cs typeface="Calibri" panose="020F0502020204030204" pitchFamily="34" charset="0"/>
-                <a:hlinkClick r:id="rId4"/>
-              </a:rPr>
-              <a:t>https://www.geeksforgeeks.org/naive-bayes-classifiers/</a:t>
-            </a:r>
-            <a:r>
-              <a:rPr lang="en-US" sz="1800" dirty="0">
-                <a:latin typeface="Calibri" panose="020F0502020204030204" pitchFamily="34" charset="0"/>
-                <a:cs typeface="Calibri" panose="020F0502020204030204" pitchFamily="34" charset="0"/>
-              </a:rPr>
-              <a:t> </a:t>
-            </a:r>
-          </a:p>
-        </p:txBody>
-      </p:sp>
-      <p:pic>
-        <p:nvPicPr>
-          <p:cNvPr id="2" name="Picture 1">
-            <a:extLst>
-              <a:ext uri="{FF2B5EF4-FFF2-40B4-BE49-F238E27FC236}">
-                <a16:creationId xmlns:a16="http://schemas.microsoft.com/office/drawing/2014/main" id="{4627EC18-8F38-2442-B549-FBAD6F81E7EB}"/>
-              </a:ext>
-            </a:extLst>
-          </p:cNvPr>
-          <p:cNvPicPr>
-            <a:picLocks noChangeAspect="1"/>
-          </p:cNvPicPr>
-          <p:nvPr/>
-        </p:nvPicPr>
-        <p:blipFill>
-          <a:blip r:embed="rId5"/>
-          <a:stretch>
-            <a:fillRect/>
-          </a:stretch>
-        </p:blipFill>
-        <p:spPr>
-          <a:xfrm>
-            <a:off x="7200900" y="891251"/>
-            <a:ext cx="4991100" cy="3594100"/>
-          </a:xfrm>
-          <a:prstGeom prst="rect">
-            <a:avLst/>
-          </a:prstGeom>
-        </p:spPr>
-      </p:pic>
-      <p:sp>
-        <p:nvSpPr>
-          <p:cNvPr id="3" name="TextBox 2">
-            <a:extLst>
-              <a:ext uri="{FF2B5EF4-FFF2-40B4-BE49-F238E27FC236}">
-                <a16:creationId xmlns:a16="http://schemas.microsoft.com/office/drawing/2014/main" id="{11C7D318-EE28-164A-87A7-71DE10B21FD7}"/>
-              </a:ext>
-            </a:extLst>
-          </p:cNvPr>
-          <p:cNvSpPr txBox="1"/>
-          <p:nvPr/>
-        </p:nvSpPr>
-        <p:spPr>
-          <a:xfrm>
-            <a:off x="9005104" y="68509"/>
-            <a:ext cx="1030147" cy="830997"/>
-          </a:xfrm>
-          <a:prstGeom prst="rect">
-            <a:avLst/>
-          </a:prstGeom>
-          <a:noFill/>
-        </p:spPr>
-        <p:txBody>
-          <a:bodyPr wrap="square" rtlCol="0">
-            <a:spAutoFit/>
-          </a:bodyPr>
-          <a:lstStyle/>
-          <a:p>
-            <a:r>
-              <a:rPr lang="en-US" sz="4800" dirty="0"/>
-              <a:t>A</a:t>
-            </a:r>
-            <a:r>
-              <a:rPr lang="en-US" sz="4800" baseline="-25000" dirty="0"/>
-              <a:t>i</a:t>
-            </a:r>
-            <a:endParaRPr lang="en-US" sz="4800" dirty="0"/>
-          </a:p>
-        </p:txBody>
-      </p:sp>
-      <p:sp>
-        <p:nvSpPr>
-          <p:cNvPr id="11" name="TextBox 10">
-            <a:extLst>
-              <a:ext uri="{FF2B5EF4-FFF2-40B4-BE49-F238E27FC236}">
-                <a16:creationId xmlns:a16="http://schemas.microsoft.com/office/drawing/2014/main" id="{270CC2C1-38F9-C44F-AD2B-8120DE55C977}"/>
-              </a:ext>
-            </a:extLst>
-          </p:cNvPr>
-          <p:cNvSpPr txBox="1"/>
-          <p:nvPr/>
-        </p:nvSpPr>
-        <p:spPr>
-          <a:xfrm>
-            <a:off x="11161853" y="31655"/>
-            <a:ext cx="760071" cy="830997"/>
-          </a:xfrm>
-          <a:prstGeom prst="rect">
-            <a:avLst/>
-          </a:prstGeom>
-          <a:noFill/>
-        </p:spPr>
-        <p:txBody>
-          <a:bodyPr wrap="square" rtlCol="0">
-            <a:spAutoFit/>
-          </a:bodyPr>
-          <a:lstStyle/>
-          <a:p>
-            <a:r>
-              <a:rPr lang="en-US" sz="4800" dirty="0"/>
-              <a:t>B</a:t>
-            </a:r>
-          </a:p>
-        </p:txBody>
-      </p:sp>
-      <p:sp>
-        <p:nvSpPr>
-          <p:cNvPr id="4" name="TextBox 3">
-            <a:extLst>
-              <a:ext uri="{FF2B5EF4-FFF2-40B4-BE49-F238E27FC236}">
-                <a16:creationId xmlns:a16="http://schemas.microsoft.com/office/drawing/2014/main" id="{C5F4338A-7460-2D43-8709-4C01BE3CBAE1}"/>
-              </a:ext>
-            </a:extLst>
-          </p:cNvPr>
-          <p:cNvSpPr txBox="1"/>
-          <p:nvPr/>
-        </p:nvSpPr>
-        <p:spPr>
-          <a:xfrm>
-            <a:off x="-2791968" y="-475488"/>
-            <a:ext cx="1107996" cy="307777"/>
-          </a:xfrm>
-          <a:prstGeom prst="rect">
-            <a:avLst/>
-          </a:prstGeom>
-          <a:noFill/>
-        </p:spPr>
-        <p:txBody>
-          <a:bodyPr wrap="none" rtlCol="0">
-            <a:spAutoFit/>
-          </a:bodyPr>
-          <a:lstStyle/>
-          <a:p>
-            <a:r>
-              <a:rPr lang="en-US" dirty="0"/>
-              <a:t>b	</a:t>
-            </a:r>
-          </a:p>
-        </p:txBody>
-      </p:sp>
-    </p:spTree>
-    <p:extLst>
-      <p:ext uri="{BB962C8B-B14F-4D97-AF65-F5344CB8AC3E}">
-        <p14:creationId xmlns:p14="http://schemas.microsoft.com/office/powerpoint/2010/main" val="2024227266"/>
-      </p:ext>
-    </p:extLst>
-  </p:cSld>
-  <p:clrMapOvr>
-    <a:masterClrMapping/>
-  </p:clrMapOvr>
-</p:sld>
-</file>
-
-<file path=ppt/slides/slide4.xml><?xml version="1.0" encoding="utf-8"?>
+<file path=ppt/slides/slide6.xml><?xml version="1.0" encoding="utf-8"?>
 <p:sld xmlns:a="http://schemas.openxmlformats.org/drawingml/2006/main" xmlns:r="http://schemas.openxmlformats.org/officeDocument/2006/relationships" xmlns:p="http://schemas.openxmlformats.org/presentationml/2006/main">
   <p:cSld>
     <p:spTree>
@@ -20125,8 +23868,8 @@
           </p:sp>
         </mc:Fallback>
       </mc:AlternateContent>
-      <mc:AlternateContent xmlns:mc="http://schemas.openxmlformats.org/markup-compatibility/2006" xmlns:a14="http://schemas.microsoft.com/office/drawing/2010/main">
-        <mc:Choice Requires="a14">
+      <mc:AlternateContent xmlns:mc="http://schemas.openxmlformats.org/markup-compatibility/2006">
+        <mc:Choice xmlns:a14="http://schemas.microsoft.com/office/drawing/2010/main" Requires="a14">
           <p:sp>
             <p:nvSpPr>
               <p:cNvPr id="6" name="TextBox 5">
@@ -20141,7 +23884,7 @@
             </p:nvSpPr>
             <p:spPr>
               <a:xfrm>
-                <a:off x="126122" y="3464488"/>
+                <a:off x="126122" y="3405873"/>
                 <a:ext cx="11109435" cy="3341684"/>
               </a:xfrm>
               <a:prstGeom prst="rect">
@@ -20172,7 +23915,31 @@
               <a:p>
                 <a:r>
                   <a:rPr lang="en-US" dirty="0"/>
-                  <a:t>Also note that the probability in the denominator is NOT split into multiplication. </a:t>
+                  <a:t>Also note that the probability in the </a:t>
+                </a:r>
+                <a:r>
+                  <a:rPr lang="en-US" b="1" dirty="0">
+                    <a:solidFill>
+                      <a:srgbClr val="00B050"/>
+                    </a:solidFill>
+                  </a:rPr>
+                  <a:t>denominator</a:t>
+                </a:r>
+                <a:r>
+                  <a:rPr lang="en-US" dirty="0"/>
+                  <a:t> </a:t>
+                </a:r>
+                <a:r>
+                  <a:rPr lang="en-US" b="1" dirty="0">
+                    <a:solidFill>
+                      <a:srgbClr val="FF0000"/>
+                    </a:solidFill>
+                  </a:rPr>
+                  <a:t>is NOT split into multiplication</a:t>
+                </a:r>
+                <a:r>
+                  <a:rPr lang="en-US" dirty="0"/>
+                  <a:t>. </a:t>
                 </a:r>
                 <a:br>
                   <a:rPr lang="en-US" dirty="0"/>
@@ -20401,7 +24168,7 @@
             </p:txBody>
           </p:sp>
         </mc:Choice>
-        <mc:Fallback xmlns="">
+        <mc:Fallback>
           <p:sp>
             <p:nvSpPr>
               <p:cNvPr id="6" name="TextBox 5">
@@ -20418,7 +24185,7 @@
             </p:nvSpPr>
             <p:spPr>
               <a:xfrm>
-                <a:off x="126122" y="3464488"/>
+                <a:off x="126122" y="3405873"/>
                 <a:ext cx="11109435" cy="3341684"/>
               </a:xfrm>
               <a:prstGeom prst="rect">
@@ -20427,7 +24194,7 @@
               <a:blipFill>
                 <a:blip r:embed="rId3"/>
                 <a:stretch>
-                  <a:fillRect l="-114" t="-379"/>
+                  <a:fillRect l="-229" t="-379"/>
                 </a:stretch>
               </a:blipFill>
             </p:spPr>
@@ -20495,7 +24262,771 @@
 </p:sld>
 </file>
 
-<file path=ppt/slides/slide5.xml><?xml version="1.0" encoding="utf-8"?>
+<file path=ppt/slides/slide7.xml><?xml version="1.0" encoding="utf-8"?>
+<p:sld xmlns:a="http://schemas.openxmlformats.org/drawingml/2006/main" xmlns:r="http://schemas.openxmlformats.org/officeDocument/2006/relationships" xmlns:p="http://schemas.openxmlformats.org/presentationml/2006/main">
+  <p:cSld>
+    <p:spTree>
+      <p:nvGrpSpPr>
+        <p:cNvPr id="1" name="Shape 106"/>
+        <p:cNvGrpSpPr/>
+        <p:nvPr/>
+      </p:nvGrpSpPr>
+      <p:grpSpPr>
+        <a:xfrm>
+          <a:off x="0" y="0"/>
+          <a:ext cx="0" cy="0"/>
+          <a:chOff x="0" y="0"/>
+          <a:chExt cx="0" cy="0"/>
+        </a:xfrm>
+      </p:grpSpPr>
+      <p:sp>
+        <p:nvSpPr>
+          <p:cNvPr id="108" name="Google Shape;108;p14"/>
+          <p:cNvSpPr txBox="1"/>
+          <p:nvPr/>
+        </p:nvSpPr>
+        <p:spPr>
+          <a:xfrm>
+            <a:off x="64172" y="64169"/>
+            <a:ext cx="5293274" cy="521985"/>
+          </a:xfrm>
+          <a:prstGeom prst="rect">
+            <a:avLst/>
+          </a:prstGeom>
+          <a:noFill/>
+          <a:ln>
+            <a:noFill/>
+          </a:ln>
+        </p:spPr>
+        <p:txBody>
+          <a:bodyPr spcFirstLastPara="1" wrap="square" lIns="91425" tIns="45700" rIns="91425" bIns="45700" anchor="t" anchorCtr="0">
+            <a:noAutofit/>
+          </a:bodyPr>
+          <a:lstStyle/>
+          <a:p>
+            <a:pPr marL="0" marR="0" lvl="0" indent="0" algn="l" rtl="0">
+              <a:spcBef>
+                <a:spcPts val="0"/>
+              </a:spcBef>
+              <a:spcAft>
+                <a:spcPts val="0"/>
+              </a:spcAft>
+              <a:buNone/>
+            </a:pPr>
+            <a:r>
+              <a:rPr lang="en-US" sz="2800" b="1" dirty="0">
+                <a:solidFill>
+                  <a:schemeClr val="dk1"/>
+                </a:solidFill>
+                <a:latin typeface="Calibri"/>
+                <a:ea typeface="Calibri"/>
+                <a:cs typeface="Calibri"/>
+                <a:sym typeface="Calibri"/>
+              </a:rPr>
+              <a:t>Naive Bayes classifiers - continued</a:t>
+            </a:r>
+            <a:endParaRPr sz="2800" b="1" dirty="0">
+              <a:solidFill>
+                <a:schemeClr val="dk1"/>
+              </a:solidFill>
+              <a:latin typeface="Calibri"/>
+              <a:ea typeface="Calibri"/>
+              <a:cs typeface="Calibri"/>
+              <a:sym typeface="Calibri"/>
+            </a:endParaRPr>
+          </a:p>
+        </p:txBody>
+      </p:sp>
+      <p:sp>
+        <p:nvSpPr>
+          <p:cNvPr id="10" name="TextBox 9">
+            <a:extLst>
+              <a:ext uri="{FF2B5EF4-FFF2-40B4-BE49-F238E27FC236}">
+                <a16:creationId xmlns:a16="http://schemas.microsoft.com/office/drawing/2014/main" id="{812C9AFE-2DC4-2C49-A11B-4A24EEEF46C2}"/>
+              </a:ext>
+            </a:extLst>
+          </p:cNvPr>
+          <p:cNvSpPr txBox="1"/>
+          <p:nvPr/>
+        </p:nvSpPr>
+        <p:spPr>
+          <a:xfrm>
+            <a:off x="64171" y="5166530"/>
+            <a:ext cx="8350229" cy="1600438"/>
+          </a:xfrm>
+          <a:prstGeom prst="rect">
+            <a:avLst/>
+          </a:prstGeom>
+          <a:noFill/>
+        </p:spPr>
+        <p:txBody>
+          <a:bodyPr wrap="square" rtlCol="0">
+            <a:spAutoFit/>
+          </a:bodyPr>
+          <a:lstStyle/>
+          <a:p>
+            <a:r>
+              <a:rPr lang="en-US" dirty="0">
+                <a:latin typeface="Calibri" panose="020F0502020204030204" pitchFamily="34" charset="0"/>
+                <a:cs typeface="Calibri" panose="020F0502020204030204" pitchFamily="34" charset="0"/>
+              </a:rPr>
+              <a:t>Here is a very good short video explaining the Naive Bayes Classification on a specific simple example:</a:t>
+            </a:r>
+          </a:p>
+          <a:p>
+            <a:r>
+              <a:rPr lang="en-US" dirty="0">
+                <a:latin typeface="Calibri" panose="020F0502020204030204" pitchFamily="34" charset="0"/>
+                <a:cs typeface="Calibri" panose="020F0502020204030204" pitchFamily="34" charset="0"/>
+              </a:rPr>
+              <a:t> - </a:t>
+            </a:r>
+            <a:r>
+              <a:rPr lang="en-US" dirty="0">
+                <a:latin typeface="Calibri" panose="020F0502020204030204" pitchFamily="34" charset="0"/>
+                <a:cs typeface="Calibri" panose="020F0502020204030204" pitchFamily="34" charset="0"/>
+                <a:hlinkClick r:id="rId3"/>
+              </a:rPr>
+              <a:t>https://www.youtube.com/watch?v=CPqOCI0ahss</a:t>
+            </a:r>
+            <a:endParaRPr lang="en-US" dirty="0">
+              <a:latin typeface="Calibri" panose="020F0502020204030204" pitchFamily="34" charset="0"/>
+              <a:cs typeface="Calibri" panose="020F0502020204030204" pitchFamily="34" charset="0"/>
+            </a:endParaRPr>
+          </a:p>
+          <a:p>
+            <a:r>
+              <a:rPr lang="en-US" dirty="0">
+                <a:latin typeface="Calibri" panose="020F0502020204030204" pitchFamily="34" charset="0"/>
+                <a:cs typeface="Calibri" panose="020F0502020204030204" pitchFamily="34" charset="0"/>
+              </a:rPr>
+              <a:t>Note – there is a (common) mistake in this video! </a:t>
+            </a:r>
+          </a:p>
+          <a:p>
+            <a:r>
+              <a:rPr lang="en-US" dirty="0">
+                <a:latin typeface="Calibri" panose="020F0502020204030204" pitchFamily="34" charset="0"/>
+                <a:cs typeface="Calibri" panose="020F0502020204030204" pitchFamily="34" charset="0"/>
+              </a:rPr>
+              <a:t>Author calculates denominators via multiplication of individual probabilities. </a:t>
+            </a:r>
+          </a:p>
+          <a:p>
+            <a:r>
+              <a:rPr lang="en-US" dirty="0">
+                <a:latin typeface="Calibri" panose="020F0502020204030204" pitchFamily="34" charset="0"/>
+                <a:cs typeface="Calibri" panose="020F0502020204030204" pitchFamily="34" charset="0"/>
+              </a:rPr>
+              <a:t>This is wrong. </a:t>
+            </a:r>
+          </a:p>
+          <a:p>
+            <a:r>
+              <a:rPr lang="en-US" dirty="0">
+                <a:latin typeface="Calibri" panose="020F0502020204030204" pitchFamily="34" charset="0"/>
+                <a:cs typeface="Calibri" panose="020F0502020204030204" pitchFamily="34" charset="0"/>
+              </a:rPr>
+              <a:t>You can see it by yourself how making calculation this way makes the sum of two probabilities greater than one. </a:t>
+            </a:r>
+          </a:p>
+          <a:p>
+            <a:r>
+              <a:rPr lang="en-US" dirty="0">
+                <a:latin typeface="Calibri" panose="020F0502020204030204" pitchFamily="34" charset="0"/>
+                <a:cs typeface="Calibri" panose="020F0502020204030204" pitchFamily="34" charset="0"/>
+              </a:rPr>
+              <a:t>Also here is a good article - </a:t>
+            </a:r>
+            <a:r>
+              <a:rPr lang="en-US" dirty="0">
+                <a:latin typeface="Calibri" panose="020F0502020204030204" pitchFamily="34" charset="0"/>
+                <a:cs typeface="Calibri" panose="020F0502020204030204" pitchFamily="34" charset="0"/>
+                <a:hlinkClick r:id="rId4"/>
+              </a:rPr>
+              <a:t>https://www.geeksforgeeks.org/naive-bayes-classifiers/</a:t>
+            </a:r>
+            <a:r>
+              <a:rPr lang="en-US" dirty="0">
+                <a:latin typeface="Calibri" panose="020F0502020204030204" pitchFamily="34" charset="0"/>
+                <a:cs typeface="Calibri" panose="020F0502020204030204" pitchFamily="34" charset="0"/>
+              </a:rPr>
+              <a:t> </a:t>
+            </a:r>
+          </a:p>
+        </p:txBody>
+      </p:sp>
+      <p:pic>
+        <p:nvPicPr>
+          <p:cNvPr id="2" name="Picture 1">
+            <a:extLst>
+              <a:ext uri="{FF2B5EF4-FFF2-40B4-BE49-F238E27FC236}">
+                <a16:creationId xmlns:a16="http://schemas.microsoft.com/office/drawing/2014/main" id="{4627EC18-8F38-2442-B549-FBAD6F81E7EB}"/>
+              </a:ext>
+            </a:extLst>
+          </p:cNvPr>
+          <p:cNvPicPr>
+            <a:picLocks noChangeAspect="1"/>
+          </p:cNvPicPr>
+          <p:nvPr/>
+        </p:nvPicPr>
+        <p:blipFill>
+          <a:blip r:embed="rId5"/>
+          <a:stretch>
+            <a:fillRect/>
+          </a:stretch>
+        </p:blipFill>
+        <p:spPr>
+          <a:xfrm>
+            <a:off x="7200900" y="891251"/>
+            <a:ext cx="4991100" cy="3594100"/>
+          </a:xfrm>
+          <a:prstGeom prst="rect">
+            <a:avLst/>
+          </a:prstGeom>
+        </p:spPr>
+      </p:pic>
+      <p:sp>
+        <p:nvSpPr>
+          <p:cNvPr id="3" name="TextBox 2">
+            <a:extLst>
+              <a:ext uri="{FF2B5EF4-FFF2-40B4-BE49-F238E27FC236}">
+                <a16:creationId xmlns:a16="http://schemas.microsoft.com/office/drawing/2014/main" id="{11C7D318-EE28-164A-87A7-71DE10B21FD7}"/>
+              </a:ext>
+            </a:extLst>
+          </p:cNvPr>
+          <p:cNvSpPr txBox="1"/>
+          <p:nvPr/>
+        </p:nvSpPr>
+        <p:spPr>
+          <a:xfrm>
+            <a:off x="7527086" y="502864"/>
+            <a:ext cx="4385619" cy="400110"/>
+          </a:xfrm>
+          <a:prstGeom prst="rect">
+            <a:avLst/>
+          </a:prstGeom>
+          <a:noFill/>
+        </p:spPr>
+        <p:txBody>
+          <a:bodyPr wrap="square" rtlCol="0">
+            <a:spAutoFit/>
+          </a:bodyPr>
+          <a:lstStyle/>
+          <a:p>
+            <a:r>
+              <a:rPr lang="en-US" sz="2000" b="1" dirty="0">
+                <a:solidFill>
+                  <a:srgbClr val="00B050"/>
+                </a:solidFill>
+              </a:rPr>
+              <a:t>A</a:t>
+            </a:r>
+            <a:r>
+              <a:rPr lang="en-US" sz="2000" b="1" baseline="-25000" dirty="0">
+                <a:solidFill>
+                  <a:srgbClr val="00B050"/>
+                </a:solidFill>
+              </a:rPr>
+              <a:t>1</a:t>
+            </a:r>
+            <a:r>
+              <a:rPr lang="en-US" sz="2000" b="1" dirty="0">
+                <a:solidFill>
+                  <a:srgbClr val="00B050"/>
+                </a:solidFill>
+              </a:rPr>
+              <a:t>         A</a:t>
+            </a:r>
+            <a:r>
+              <a:rPr lang="en-US" sz="2000" b="1" baseline="-25000" dirty="0">
+                <a:solidFill>
+                  <a:srgbClr val="00B050"/>
+                </a:solidFill>
+              </a:rPr>
+              <a:t>2</a:t>
+            </a:r>
+            <a:r>
+              <a:rPr lang="en-US" sz="2000" b="1" dirty="0">
+                <a:solidFill>
+                  <a:srgbClr val="00B050"/>
+                </a:solidFill>
+              </a:rPr>
+              <a:t>          A</a:t>
+            </a:r>
+            <a:r>
+              <a:rPr lang="en-US" sz="2000" b="1" baseline="-25000" dirty="0">
+                <a:solidFill>
+                  <a:srgbClr val="00B050"/>
+                </a:solidFill>
+              </a:rPr>
+              <a:t>3</a:t>
+            </a:r>
+            <a:r>
+              <a:rPr lang="en-US" sz="2000" b="1" dirty="0">
+                <a:solidFill>
+                  <a:srgbClr val="00B050"/>
+                </a:solidFill>
+              </a:rPr>
+              <a:t>          A</a:t>
+            </a:r>
+            <a:r>
+              <a:rPr lang="en-US" sz="2000" b="1" baseline="-25000" dirty="0">
+                <a:solidFill>
+                  <a:srgbClr val="00B050"/>
+                </a:solidFill>
+              </a:rPr>
+              <a:t>4</a:t>
+            </a:r>
+            <a:r>
+              <a:rPr lang="en-US" sz="2000" b="1" dirty="0">
+                <a:solidFill>
+                  <a:srgbClr val="00B050"/>
+                </a:solidFill>
+              </a:rPr>
+              <a:t>          B</a:t>
+            </a:r>
+          </a:p>
+        </p:txBody>
+      </p:sp>
+      <p:sp>
+        <p:nvSpPr>
+          <p:cNvPr id="4" name="TextBox 3">
+            <a:extLst>
+              <a:ext uri="{FF2B5EF4-FFF2-40B4-BE49-F238E27FC236}">
+                <a16:creationId xmlns:a16="http://schemas.microsoft.com/office/drawing/2014/main" id="{C5F4338A-7460-2D43-8709-4C01BE3CBAE1}"/>
+              </a:ext>
+            </a:extLst>
+          </p:cNvPr>
+          <p:cNvSpPr txBox="1"/>
+          <p:nvPr/>
+        </p:nvSpPr>
+        <p:spPr>
+          <a:xfrm>
+            <a:off x="-2791968" y="-475488"/>
+            <a:ext cx="1107996" cy="307777"/>
+          </a:xfrm>
+          <a:prstGeom prst="rect">
+            <a:avLst/>
+          </a:prstGeom>
+          <a:noFill/>
+        </p:spPr>
+        <p:txBody>
+          <a:bodyPr wrap="none" rtlCol="0">
+            <a:spAutoFit/>
+          </a:bodyPr>
+          <a:lstStyle/>
+          <a:p>
+            <a:r>
+              <a:rPr lang="en-US" dirty="0"/>
+              <a:t>b	</a:t>
+            </a:r>
+          </a:p>
+        </p:txBody>
+      </p:sp>
+      <p:sp>
+        <p:nvSpPr>
+          <p:cNvPr id="8" name="Google Shape;108;p14">
+            <a:extLst>
+              <a:ext uri="{FF2B5EF4-FFF2-40B4-BE49-F238E27FC236}">
+                <a16:creationId xmlns:a16="http://schemas.microsoft.com/office/drawing/2014/main" id="{661B5C5B-4BA7-1847-83DD-79D68EBBF580}"/>
+              </a:ext>
+            </a:extLst>
+          </p:cNvPr>
+          <p:cNvSpPr txBox="1"/>
+          <p:nvPr/>
+        </p:nvSpPr>
+        <p:spPr>
+          <a:xfrm>
+            <a:off x="219196" y="1111554"/>
+            <a:ext cx="5879429" cy="3153494"/>
+          </a:xfrm>
+          <a:prstGeom prst="rect">
+            <a:avLst/>
+          </a:prstGeom>
+          <a:noFill/>
+          <a:ln>
+            <a:noFill/>
+          </a:ln>
+        </p:spPr>
+        <p:txBody>
+          <a:bodyPr spcFirstLastPara="1" wrap="square" lIns="91425" tIns="45700" rIns="91425" bIns="45700" anchor="t" anchorCtr="0">
+            <a:noAutofit/>
+          </a:bodyPr>
+          <a:lstStyle/>
+          <a:p>
+            <a:pPr lvl="0"/>
+            <a:r>
+              <a:rPr lang="en-US" dirty="0">
+                <a:solidFill>
+                  <a:schemeClr val="dk1"/>
+                </a:solidFill>
+                <a:latin typeface="Calibri"/>
+                <a:ea typeface="Calibri"/>
+                <a:cs typeface="Calibri"/>
+                <a:sym typeface="Calibri"/>
+              </a:rPr>
+              <a:t>In the table to the right we have 4 columns A</a:t>
+            </a:r>
+            <a:r>
+              <a:rPr lang="en-US" baseline="-25000" dirty="0">
+                <a:solidFill>
+                  <a:schemeClr val="dk1"/>
+                </a:solidFill>
+                <a:latin typeface="Calibri"/>
+                <a:ea typeface="Calibri"/>
+                <a:cs typeface="Calibri"/>
+                <a:sym typeface="Calibri"/>
+              </a:rPr>
+              <a:t>i</a:t>
+            </a:r>
+            <a:r>
+              <a:rPr lang="en-US" dirty="0">
+                <a:solidFill>
+                  <a:schemeClr val="dk1"/>
+                </a:solidFill>
+                <a:latin typeface="Calibri"/>
+                <a:ea typeface="Calibri"/>
+                <a:cs typeface="Calibri"/>
+                <a:sym typeface="Calibri"/>
+              </a:rPr>
+              <a:t> with features </a:t>
+            </a:r>
+          </a:p>
+          <a:p>
+            <a:pPr lvl="0"/>
+            <a:r>
+              <a:rPr lang="en-US" dirty="0">
+                <a:solidFill>
+                  <a:schemeClr val="dk1"/>
+                </a:solidFill>
+                <a:latin typeface="Calibri"/>
+                <a:ea typeface="Calibri"/>
+                <a:cs typeface="Calibri"/>
+                <a:sym typeface="Calibri"/>
+              </a:rPr>
+              <a:t>and one outcome column B - "Play Golf". </a:t>
+            </a:r>
+          </a:p>
+          <a:p>
+            <a:pPr lvl="0"/>
+            <a:r>
+              <a:rPr lang="en-US" dirty="0">
+                <a:solidFill>
+                  <a:schemeClr val="dk1"/>
+                </a:solidFill>
+                <a:latin typeface="Calibri"/>
+                <a:ea typeface="Calibri"/>
+                <a:cs typeface="Calibri"/>
+                <a:sym typeface="Calibri"/>
+              </a:rPr>
+              <a:t>For each value of the outcome (Yes or No) we can calculate the conditional probability/frequency of seeing each feature value A</a:t>
+            </a:r>
+            <a:r>
+              <a:rPr lang="en-US" baseline="-25000" dirty="0">
+                <a:solidFill>
+                  <a:schemeClr val="dk1"/>
+                </a:solidFill>
+                <a:latin typeface="Calibri"/>
+                <a:ea typeface="Calibri"/>
+                <a:cs typeface="Calibri"/>
+                <a:sym typeface="Calibri"/>
+              </a:rPr>
+              <a:t>i</a:t>
+            </a:r>
+            <a:r>
+              <a:rPr lang="en-US" dirty="0">
+                <a:solidFill>
+                  <a:schemeClr val="dk1"/>
+                </a:solidFill>
+                <a:latin typeface="Calibri"/>
+                <a:ea typeface="Calibri"/>
+                <a:cs typeface="Calibri"/>
+                <a:sym typeface="Calibri"/>
+              </a:rPr>
+              <a:t> for a given outcome B:    </a:t>
+            </a:r>
+          </a:p>
+          <a:p>
+            <a:pPr lvl="0"/>
+            <a:r>
+              <a:rPr lang="en-US" dirty="0">
+                <a:solidFill>
+                  <a:schemeClr val="dk1"/>
+                </a:solidFill>
+                <a:latin typeface="Calibri"/>
+                <a:ea typeface="Calibri"/>
+                <a:cs typeface="Calibri"/>
+                <a:sym typeface="Calibri"/>
+              </a:rPr>
+              <a:t>                                   P(A</a:t>
+            </a:r>
+            <a:r>
+              <a:rPr lang="en-US" baseline="-25000" dirty="0">
+                <a:solidFill>
+                  <a:schemeClr val="dk1"/>
+                </a:solidFill>
+                <a:latin typeface="Calibri"/>
+                <a:ea typeface="Calibri"/>
+                <a:cs typeface="Calibri"/>
+                <a:sym typeface="Calibri"/>
+              </a:rPr>
+              <a:t>i</a:t>
+            </a:r>
+            <a:r>
+              <a:rPr lang="en-US" dirty="0">
+                <a:solidFill>
+                  <a:schemeClr val="dk1"/>
+                </a:solidFill>
+                <a:latin typeface="Calibri"/>
+                <a:ea typeface="Calibri"/>
+                <a:cs typeface="Calibri"/>
+                <a:sym typeface="Calibri"/>
+              </a:rPr>
+              <a:t>| B)</a:t>
+            </a:r>
+          </a:p>
+          <a:p>
+            <a:pPr lvl="0"/>
+            <a:endParaRPr lang="en-US" dirty="0">
+              <a:solidFill>
+                <a:schemeClr val="dk1"/>
+              </a:solidFill>
+              <a:latin typeface="Calibri"/>
+              <a:ea typeface="Calibri"/>
+              <a:cs typeface="Calibri"/>
+              <a:sym typeface="Calibri"/>
+            </a:endParaRPr>
+          </a:p>
+          <a:p>
+            <a:pPr lvl="0"/>
+            <a:r>
+              <a:rPr lang="en-US" dirty="0">
+                <a:solidFill>
+                  <a:schemeClr val="dk1"/>
+                </a:solidFill>
+                <a:latin typeface="Calibri"/>
+                <a:ea typeface="Calibri"/>
+                <a:cs typeface="Calibri"/>
+                <a:sym typeface="Calibri"/>
+              </a:rPr>
+              <a:t>For example we can calculate </a:t>
+            </a:r>
+          </a:p>
+          <a:p>
+            <a:pPr lvl="0"/>
+            <a:r>
+              <a:rPr lang="en-US" dirty="0">
+                <a:solidFill>
+                  <a:schemeClr val="dk1"/>
+                </a:solidFill>
+                <a:latin typeface="Calibri"/>
+                <a:ea typeface="Calibri"/>
+                <a:cs typeface="Calibri"/>
+                <a:sym typeface="Calibri"/>
+              </a:rPr>
+              <a:t>how often we played or not played golf when it was rainy, etc. </a:t>
+            </a:r>
+          </a:p>
+          <a:p>
+            <a:pPr lvl="0"/>
+            <a:endParaRPr lang="en-US" dirty="0">
+              <a:solidFill>
+                <a:schemeClr val="dk1"/>
+              </a:solidFill>
+              <a:latin typeface="Calibri"/>
+              <a:ea typeface="Calibri"/>
+              <a:cs typeface="Calibri"/>
+              <a:sym typeface="Calibri"/>
+            </a:endParaRPr>
+          </a:p>
+          <a:p>
+            <a:pPr lvl="0"/>
+            <a:r>
+              <a:rPr lang="en-US" dirty="0">
+                <a:solidFill>
+                  <a:schemeClr val="dk1"/>
+                </a:solidFill>
+                <a:latin typeface="Calibri"/>
+                <a:ea typeface="Calibri"/>
+                <a:cs typeface="Calibri"/>
+                <a:sym typeface="Calibri"/>
+              </a:rPr>
+              <a:t>Then we will be calculating the opposite – the probability of playing golf</a:t>
+            </a:r>
+          </a:p>
+          <a:p>
+            <a:pPr lvl="0"/>
+            <a:r>
+              <a:rPr lang="en-US" dirty="0">
+                <a:solidFill>
+                  <a:schemeClr val="dk1"/>
+                </a:solidFill>
+                <a:latin typeface="Calibri"/>
+                <a:ea typeface="Calibri"/>
+                <a:cs typeface="Calibri"/>
+                <a:sym typeface="Calibri"/>
+              </a:rPr>
+              <a:t>given a specific set of features: P(</a:t>
+            </a:r>
+            <a:r>
+              <a:rPr lang="en-US" dirty="0" err="1">
+                <a:solidFill>
+                  <a:schemeClr val="dk1"/>
+                </a:solidFill>
+                <a:latin typeface="Calibri"/>
+                <a:ea typeface="Calibri"/>
+                <a:cs typeface="Calibri"/>
+                <a:sym typeface="Calibri"/>
+              </a:rPr>
+              <a:t>B|A</a:t>
+            </a:r>
+            <a:r>
+              <a:rPr lang="en-US" baseline="-25000" dirty="0" err="1">
+                <a:solidFill>
+                  <a:schemeClr val="dk1"/>
+                </a:solidFill>
+                <a:latin typeface="Calibri"/>
+                <a:ea typeface="Calibri"/>
+                <a:cs typeface="Calibri"/>
+                <a:sym typeface="Calibri"/>
+              </a:rPr>
+              <a:t>i</a:t>
+            </a:r>
+            <a:r>
+              <a:rPr lang="en-US" dirty="0">
+                <a:solidFill>
+                  <a:schemeClr val="dk1"/>
+                </a:solidFill>
+                <a:latin typeface="Calibri"/>
+                <a:ea typeface="Calibri"/>
+                <a:cs typeface="Calibri"/>
+                <a:sym typeface="Calibri"/>
+              </a:rPr>
+              <a:t>) . </a:t>
+            </a:r>
+          </a:p>
+          <a:p>
+            <a:pPr lvl="0"/>
+            <a:r>
+              <a:rPr lang="en-US" dirty="0">
+                <a:solidFill>
+                  <a:schemeClr val="dk1"/>
+                </a:solidFill>
+                <a:latin typeface="Calibri"/>
+                <a:ea typeface="Calibri"/>
+                <a:cs typeface="Calibri"/>
+                <a:sym typeface="Calibri"/>
+              </a:rPr>
+              <a:t>We will use Bayes formula for this.</a:t>
+            </a:r>
+          </a:p>
+          <a:p>
+            <a:pPr lvl="0"/>
+            <a:endParaRPr lang="en-US" dirty="0">
+              <a:solidFill>
+                <a:schemeClr val="dk1"/>
+              </a:solidFill>
+              <a:latin typeface="Calibri"/>
+              <a:ea typeface="Calibri"/>
+              <a:cs typeface="Calibri"/>
+              <a:sym typeface="Calibri"/>
+            </a:endParaRPr>
+          </a:p>
+          <a:p>
+            <a:pPr lvl="0"/>
+            <a:r>
+              <a:rPr lang="en-US" dirty="0">
+                <a:solidFill>
+                  <a:schemeClr val="dk1"/>
+                </a:solidFill>
+                <a:latin typeface="Calibri"/>
+                <a:ea typeface="Calibri"/>
+                <a:cs typeface="Calibri"/>
+                <a:sym typeface="Calibri"/>
+              </a:rPr>
+              <a:t>In other words, we will be able to predict outcome B from features A</a:t>
+            </a:r>
+            <a:r>
+              <a:rPr lang="en-US" baseline="-25000" dirty="0">
+                <a:solidFill>
+                  <a:schemeClr val="dk1"/>
+                </a:solidFill>
+                <a:latin typeface="Calibri"/>
+                <a:ea typeface="Calibri"/>
+                <a:cs typeface="Calibri"/>
+                <a:sym typeface="Calibri"/>
+              </a:rPr>
+              <a:t>i</a:t>
+            </a:r>
+            <a:r>
+              <a:rPr lang="en-US" dirty="0">
+                <a:solidFill>
+                  <a:schemeClr val="dk1"/>
+                </a:solidFill>
+                <a:latin typeface="Calibri"/>
+                <a:ea typeface="Calibri"/>
+                <a:cs typeface="Calibri"/>
+                <a:sym typeface="Calibri"/>
+              </a:rPr>
+              <a:t>.</a:t>
+            </a:r>
+          </a:p>
+        </p:txBody>
+      </p:sp>
+      <p:sp>
+        <p:nvSpPr>
+          <p:cNvPr id="12" name="TextBox 11">
+            <a:extLst>
+              <a:ext uri="{FF2B5EF4-FFF2-40B4-BE49-F238E27FC236}">
+                <a16:creationId xmlns:a16="http://schemas.microsoft.com/office/drawing/2014/main" id="{B5293DFC-1E53-314F-8AC5-957A175E20A6}"/>
+              </a:ext>
+            </a:extLst>
+          </p:cNvPr>
+          <p:cNvSpPr txBox="1"/>
+          <p:nvPr/>
+        </p:nvSpPr>
+        <p:spPr>
+          <a:xfrm>
+            <a:off x="7503640" y="96893"/>
+            <a:ext cx="4624188" cy="400110"/>
+          </a:xfrm>
+          <a:prstGeom prst="rect">
+            <a:avLst/>
+          </a:prstGeom>
+          <a:noFill/>
+        </p:spPr>
+        <p:txBody>
+          <a:bodyPr wrap="square" rtlCol="0">
+            <a:spAutoFit/>
+          </a:bodyPr>
+          <a:lstStyle/>
+          <a:p>
+            <a:r>
+              <a:rPr lang="en-US" sz="2000" b="1" dirty="0">
+                <a:solidFill>
+                  <a:srgbClr val="00B050"/>
+                </a:solidFill>
+              </a:rPr>
+              <a:t>               Features                    Target</a:t>
+            </a:r>
+          </a:p>
+        </p:txBody>
+      </p:sp>
+    </p:spTree>
+    <p:extLst>
+      <p:ext uri="{BB962C8B-B14F-4D97-AF65-F5344CB8AC3E}">
+        <p14:creationId xmlns:p14="http://schemas.microsoft.com/office/powerpoint/2010/main" val="2024227266"/>
+      </p:ext>
+    </p:extLst>
+  </p:cSld>
+  <p:clrMapOvr>
+    <a:masterClrMapping/>
+  </p:clrMapOvr>
+</p:sld>
+</file>
+
+<file path=ppt/slides/slide8.xml><?xml version="1.0" encoding="utf-8"?>
 <p:sld xmlns:a="http://schemas.openxmlformats.org/drawingml/2006/main" xmlns:r="http://schemas.openxmlformats.org/officeDocument/2006/relationships" xmlns:p="http://schemas.openxmlformats.org/presentationml/2006/main">
   <p:cSld>
     <p:spTree>
@@ -20514,14 +25045,20 @@
       </p:grpSpPr>
       <p:sp>
         <p:nvSpPr>
-          <p:cNvPr id="93" name="Google Shape;93;p13"/>
+          <p:cNvPr id="18" name="Google Shape;107;p14">
+            <a:extLst>
+              <a:ext uri="{FF2B5EF4-FFF2-40B4-BE49-F238E27FC236}">
+                <a16:creationId xmlns:a16="http://schemas.microsoft.com/office/drawing/2014/main" id="{C2992640-6531-5D46-B219-A020079806DB}"/>
+              </a:ext>
+            </a:extLst>
+          </p:cNvPr>
           <p:cNvSpPr txBox="1"/>
           <p:nvPr/>
         </p:nvSpPr>
         <p:spPr>
           <a:xfrm>
-            <a:off x="0" y="0"/>
-            <a:ext cx="6705600" cy="2942898"/>
+            <a:off x="244584" y="1005791"/>
+            <a:ext cx="6613415" cy="4401781"/>
           </a:xfrm>
           <a:prstGeom prst="rect">
             <a:avLst/>
@@ -20547,7 +25084,7 @@
               <a:buNone/>
             </a:pPr>
             <a:r>
-              <a:rPr lang="en-US" sz="1800" b="1">
+              <a:rPr lang="en-US" sz="1800" b="1" dirty="0">
                 <a:solidFill>
                   <a:schemeClr val="accent1"/>
                 </a:solidFill>
@@ -20555,441 +25092,20 @@
                 <a:cs typeface="Calibri" panose="020F0502020204030204" pitchFamily="34" charset="0"/>
                 <a:sym typeface="Calibri"/>
               </a:rPr>
-              <a:t>Frequentist interpretation of Bayes’ theorem.</a:t>
-            </a:r>
-            <a:endParaRPr sz="1800" b="1">
-              <a:solidFill>
-                <a:schemeClr val="accent1"/>
-              </a:solidFill>
-              <a:latin typeface="Calibri" panose="020F0502020204030204" pitchFamily="34" charset="0"/>
-              <a:cs typeface="Calibri" panose="020F0502020204030204" pitchFamily="34" charset="0"/>
-            </a:endParaRPr>
-          </a:p>
-          <a:p>
-            <a:pPr marL="0" marR="0" lvl="0" indent="0" algn="l" rtl="0">
-              <a:spcBef>
-                <a:spcPts val="0"/>
-              </a:spcBef>
-              <a:spcAft>
-                <a:spcPts val="0"/>
-              </a:spcAft>
-              <a:buNone/>
-            </a:pPr>
-            <a:r>
-              <a:rPr lang="en-US" sz="1800">
-                <a:solidFill>
-                  <a:schemeClr val="dk1"/>
+              <a:t>Bayesian network  </a:t>
+            </a:r>
+            <a:br>
+              <a:rPr lang="en-US" sz="1800" b="1" dirty="0">
+                <a:solidFill>
+                  <a:schemeClr val="accent1"/>
                 </a:solidFill>
                 <a:latin typeface="Calibri" panose="020F0502020204030204" pitchFamily="34" charset="0"/>
                 <a:cs typeface="Calibri" panose="020F0502020204030204" pitchFamily="34" charset="0"/>
                 <a:sym typeface="Calibri"/>
               </a:rPr>
-              <a:t>Probability measures a proportion of outcomes.</a:t>
-            </a:r>
-            <a:endParaRPr sz="1800">
-              <a:solidFill>
-                <a:schemeClr val="dk1"/>
-              </a:solidFill>
-              <a:latin typeface="Calibri" panose="020F0502020204030204" pitchFamily="34" charset="0"/>
-              <a:cs typeface="Calibri" panose="020F0502020204030204" pitchFamily="34" charset="0"/>
-              <a:sym typeface="Calibri"/>
-            </a:endParaRPr>
-          </a:p>
-          <a:p>
-            <a:pPr marL="0" marR="0" lvl="0" indent="0" algn="l" rtl="0">
-              <a:spcBef>
-                <a:spcPts val="0"/>
-              </a:spcBef>
-              <a:spcAft>
-                <a:spcPts val="0"/>
-              </a:spcAft>
-              <a:buNone/>
-            </a:pPr>
-            <a:r>
-              <a:rPr lang="en-US" sz="1800">
-                <a:solidFill>
-                  <a:schemeClr val="dk1"/>
-                </a:solidFill>
-                <a:latin typeface="Calibri" panose="020F0502020204030204" pitchFamily="34" charset="0"/>
-                <a:cs typeface="Calibri" panose="020F0502020204030204" pitchFamily="34" charset="0"/>
-                <a:sym typeface="Calibri"/>
-              </a:rPr>
-              <a:t>P(A) is the proportion of outcomes with A,  P(B) – with B.</a:t>
-            </a:r>
-            <a:endParaRPr sz="1800">
-              <a:solidFill>
-                <a:schemeClr val="dk1"/>
-              </a:solidFill>
-              <a:latin typeface="Calibri" panose="020F0502020204030204" pitchFamily="34" charset="0"/>
-              <a:cs typeface="Calibri" panose="020F0502020204030204" pitchFamily="34" charset="0"/>
-            </a:endParaRPr>
-          </a:p>
-          <a:p>
-            <a:pPr marL="0" marR="0" lvl="0" indent="0" algn="l" rtl="0">
-              <a:spcBef>
-                <a:spcPts val="0"/>
-              </a:spcBef>
-              <a:spcAft>
-                <a:spcPts val="0"/>
-              </a:spcAft>
-              <a:buNone/>
-            </a:pPr>
-            <a:r>
-              <a:rPr lang="en-US" sz="1800">
-                <a:solidFill>
-                  <a:schemeClr val="dk1"/>
-                </a:solidFill>
-                <a:latin typeface="Calibri" panose="020F0502020204030204" pitchFamily="34" charset="0"/>
-                <a:cs typeface="Calibri" panose="020F0502020204030204" pitchFamily="34" charset="0"/>
-                <a:sym typeface="Calibri"/>
-              </a:rPr>
-              <a:t>P(B|A) is the proportion of outcomes with property B </a:t>
-            </a:r>
-            <a:endParaRPr sz="1800">
-              <a:solidFill>
-                <a:schemeClr val="dk1"/>
-              </a:solidFill>
-              <a:latin typeface="Calibri" panose="020F0502020204030204" pitchFamily="34" charset="0"/>
-              <a:cs typeface="Calibri" panose="020F0502020204030204" pitchFamily="34" charset="0"/>
-              <a:sym typeface="Calibri"/>
-            </a:endParaRPr>
-          </a:p>
-          <a:p>
-            <a:pPr marL="0" marR="0" lvl="0" indent="0" algn="l" rtl="0">
-              <a:spcBef>
-                <a:spcPts val="0"/>
-              </a:spcBef>
-              <a:spcAft>
-                <a:spcPts val="0"/>
-              </a:spcAft>
-              <a:buNone/>
-            </a:pPr>
-            <a:r>
-              <a:rPr lang="en-US" sz="1800">
-                <a:solidFill>
-                  <a:schemeClr val="dk1"/>
-                </a:solidFill>
-                <a:latin typeface="Calibri" panose="020F0502020204030204" pitchFamily="34" charset="0"/>
-                <a:cs typeface="Calibri" panose="020F0502020204030204" pitchFamily="34" charset="0"/>
-                <a:sym typeface="Calibri"/>
-              </a:rPr>
-              <a:t>out of outcomes with property A.</a:t>
-            </a:r>
-          </a:p>
-          <a:p>
-            <a:r>
-              <a:rPr lang="en-US" sz="1800" b="1">
-                <a:solidFill>
-                  <a:schemeClr val="accent1"/>
-                </a:solidFill>
-                <a:latin typeface="Calibri" panose="020F0502020204030204" pitchFamily="34" charset="0"/>
-                <a:cs typeface="Calibri" panose="020F0502020204030204" pitchFamily="34" charset="0"/>
-                <a:sym typeface="Calibri"/>
-              </a:rPr>
-              <a:t>Bayesian interpretation of Bayes’ theorem.</a:t>
-            </a:r>
-            <a:endParaRPr lang="en-US" sz="1800" b="1">
-              <a:solidFill>
-                <a:schemeClr val="accent1"/>
-              </a:solidFill>
-              <a:latin typeface="Calibri" panose="020F0502020204030204" pitchFamily="34" charset="0"/>
-              <a:cs typeface="Calibri" panose="020F0502020204030204" pitchFamily="34" charset="0"/>
-            </a:endParaRPr>
-          </a:p>
-          <a:p>
-            <a:pPr lvl="0"/>
-            <a:r>
-              <a:rPr lang="en-US" sz="1800">
-                <a:solidFill>
-                  <a:schemeClr val="dk1"/>
-                </a:solidFill>
-                <a:latin typeface="Calibri" panose="020F0502020204030204" pitchFamily="34" charset="0"/>
-                <a:cs typeface="Calibri" panose="020F0502020204030204" pitchFamily="34" charset="0"/>
-                <a:sym typeface="Calibri"/>
-              </a:rPr>
-              <a:t>Probability measures a degree of belief.</a:t>
-            </a:r>
-            <a:br>
-              <a:rPr lang="en-US" sz="1800">
-                <a:solidFill>
-                  <a:schemeClr val="dk1"/>
-                </a:solidFill>
-                <a:latin typeface="Calibri" panose="020F0502020204030204" pitchFamily="34" charset="0"/>
-                <a:cs typeface="Calibri" panose="020F0502020204030204" pitchFamily="34" charset="0"/>
-                <a:sym typeface="Calibri"/>
-              </a:rPr>
             </a:br>
             <a:r>
-              <a:rPr lang="en-US" sz="1800">
-                <a:solidFill>
-                  <a:schemeClr val="dk1"/>
-                </a:solidFill>
-                <a:latin typeface="Calibri" panose="020F0502020204030204" pitchFamily="34" charset="0"/>
-                <a:cs typeface="Calibri" panose="020F0502020204030204" pitchFamily="34" charset="0"/>
-                <a:sym typeface="Calibri"/>
-              </a:rPr>
-              <a:t>P(A), the </a:t>
-            </a:r>
-            <a:r>
-              <a:rPr lang="en-US" sz="1800" b="1">
-                <a:solidFill>
-                  <a:schemeClr val="accent1"/>
-                </a:solidFill>
-                <a:latin typeface="Calibri" panose="020F0502020204030204" pitchFamily="34" charset="0"/>
-                <a:cs typeface="Calibri" panose="020F0502020204030204" pitchFamily="34" charset="0"/>
-                <a:sym typeface="Calibri"/>
-              </a:rPr>
-              <a:t>prior</a:t>
-            </a:r>
-            <a:r>
-              <a:rPr lang="en-US" sz="1800">
-                <a:solidFill>
-                  <a:schemeClr val="dk1"/>
-                </a:solidFill>
-                <a:latin typeface="Calibri" panose="020F0502020204030204" pitchFamily="34" charset="0"/>
-                <a:cs typeface="Calibri" panose="020F0502020204030204" pitchFamily="34" charset="0"/>
-                <a:sym typeface="Calibri"/>
-              </a:rPr>
-              <a:t>, is the initial degree of belief in A.</a:t>
-            </a:r>
-            <a:endParaRPr lang="en-US" sz="1800">
-              <a:solidFill>
-                <a:schemeClr val="dk1"/>
-              </a:solidFill>
-              <a:latin typeface="Calibri" panose="020F0502020204030204" pitchFamily="34" charset="0"/>
-              <a:cs typeface="Calibri" panose="020F0502020204030204" pitchFamily="34" charset="0"/>
-            </a:endParaRPr>
-          </a:p>
-          <a:p>
-            <a:pPr lvl="0"/>
-            <a:r>
-              <a:rPr lang="en-US" sz="1800">
-                <a:solidFill>
-                  <a:schemeClr val="dk1"/>
-                </a:solidFill>
-                <a:latin typeface="Calibri" panose="020F0502020204030204" pitchFamily="34" charset="0"/>
-                <a:cs typeface="Calibri" panose="020F0502020204030204" pitchFamily="34" charset="0"/>
-                <a:sym typeface="Calibri"/>
-              </a:rPr>
-              <a:t>P(A|B), the </a:t>
-            </a:r>
-            <a:r>
-              <a:rPr lang="en-US" sz="1800" b="1">
-                <a:solidFill>
-                  <a:schemeClr val="accent1"/>
-                </a:solidFill>
-                <a:latin typeface="Calibri" panose="020F0502020204030204" pitchFamily="34" charset="0"/>
-                <a:cs typeface="Calibri" panose="020F0502020204030204" pitchFamily="34" charset="0"/>
-                <a:sym typeface="Calibri"/>
-              </a:rPr>
-              <a:t>posterior</a:t>
-            </a:r>
-            <a:r>
-              <a:rPr lang="en-US" sz="1800">
-                <a:solidFill>
-                  <a:schemeClr val="dk1"/>
-                </a:solidFill>
-                <a:latin typeface="Calibri" panose="020F0502020204030204" pitchFamily="34" charset="0"/>
-                <a:cs typeface="Calibri" panose="020F0502020204030204" pitchFamily="34" charset="0"/>
-                <a:sym typeface="Calibri"/>
-              </a:rPr>
-              <a:t>, is the degree of belief having accounted for B.</a:t>
-            </a:r>
-            <a:br>
-              <a:rPr lang="en-US" sz="1800">
-                <a:solidFill>
-                  <a:schemeClr val="dk1"/>
-                </a:solidFill>
-                <a:latin typeface="Calibri" panose="020F0502020204030204" pitchFamily="34" charset="0"/>
-                <a:cs typeface="Calibri" panose="020F0502020204030204" pitchFamily="34" charset="0"/>
-                <a:sym typeface="Calibri"/>
-              </a:rPr>
-            </a:br>
-            <a:r>
-              <a:rPr lang="en-US" sz="1800">
-                <a:solidFill>
-                  <a:schemeClr val="dk1"/>
-                </a:solidFill>
-                <a:latin typeface="Calibri" panose="020F0502020204030204" pitchFamily="34" charset="0"/>
-                <a:cs typeface="Calibri" panose="020F0502020204030204" pitchFamily="34" charset="0"/>
-                <a:sym typeface="Calibri"/>
-              </a:rPr>
-              <a:t>P(B|A)/P(B) – represents the support B provides for A.</a:t>
-            </a:r>
-            <a:endParaRPr lang="en-US" sz="1800">
-              <a:solidFill>
-                <a:schemeClr val="dk1"/>
-              </a:solidFill>
-              <a:latin typeface="Calibri" panose="020F0502020204030204" pitchFamily="34" charset="0"/>
-              <a:cs typeface="Calibri" panose="020F0502020204030204" pitchFamily="34" charset="0"/>
-            </a:endParaRPr>
-          </a:p>
-          <a:p>
-            <a:pPr marL="0" marR="0" lvl="0" indent="0" algn="l" rtl="0">
-              <a:spcBef>
-                <a:spcPts val="0"/>
-              </a:spcBef>
-              <a:spcAft>
-                <a:spcPts val="0"/>
-              </a:spcAft>
-              <a:buNone/>
-            </a:pPr>
-            <a:endParaRPr>
-              <a:latin typeface="Calibri" panose="020F0502020204030204" pitchFamily="34" charset="0"/>
-              <a:cs typeface="Calibri" panose="020F0502020204030204" pitchFamily="34" charset="0"/>
-            </a:endParaRPr>
-          </a:p>
-        </p:txBody>
-      </p:sp>
-      <p:sp>
-        <p:nvSpPr>
-          <p:cNvPr id="17" name="Google Shape;113;p14">
-            <a:extLst>
-              <a:ext uri="{FF2B5EF4-FFF2-40B4-BE49-F238E27FC236}">
-                <a16:creationId xmlns:a16="http://schemas.microsoft.com/office/drawing/2014/main" id="{686E86FA-5888-014D-BB3F-938CE5095920}"/>
-              </a:ext>
-            </a:extLst>
-          </p:cNvPr>
-          <p:cNvSpPr txBox="1"/>
-          <p:nvPr/>
-        </p:nvSpPr>
-        <p:spPr>
-          <a:xfrm>
-            <a:off x="6779172" y="105038"/>
-            <a:ext cx="5412828" cy="1138773"/>
-          </a:xfrm>
-          <a:prstGeom prst="rect">
-            <a:avLst/>
-          </a:prstGeom>
-          <a:noFill/>
-          <a:ln>
-            <a:noFill/>
-          </a:ln>
-        </p:spPr>
-        <p:txBody>
-          <a:bodyPr spcFirstLastPara="1" wrap="square" lIns="91425" tIns="45700" rIns="91425" bIns="45700" anchor="t" anchorCtr="0">
-            <a:noAutofit/>
-          </a:bodyPr>
-          <a:lstStyle/>
-          <a:p>
-            <a:pPr marL="0" marR="0" lvl="0" indent="0" algn="l" rtl="0">
-              <a:spcBef>
-                <a:spcPts val="0"/>
-              </a:spcBef>
-              <a:spcAft>
-                <a:spcPts val="0"/>
-              </a:spcAft>
-              <a:buNone/>
-            </a:pPr>
-            <a:r>
-              <a:rPr lang="en-US" sz="1800" b="1">
-                <a:solidFill>
-                  <a:schemeClr val="accent1"/>
-                </a:solidFill>
-                <a:latin typeface="Calibri" panose="020F0502020204030204" pitchFamily="34" charset="0"/>
-                <a:cs typeface="Calibri" panose="020F0502020204030204" pitchFamily="34" charset="0"/>
-                <a:sym typeface="Calibri"/>
-              </a:rPr>
-              <a:t>Bayesian optimization </a:t>
-            </a:r>
-            <a:endParaRPr sz="1800" b="1">
-              <a:solidFill>
-                <a:schemeClr val="accent1"/>
-              </a:solidFill>
-              <a:latin typeface="Calibri" panose="020F0502020204030204" pitchFamily="34" charset="0"/>
-              <a:cs typeface="Calibri" panose="020F0502020204030204" pitchFamily="34" charset="0"/>
-              <a:sym typeface="Calibri"/>
-            </a:endParaRPr>
-          </a:p>
-          <a:p>
-            <a:pPr marL="0" marR="0" lvl="0" indent="0" algn="l" rtl="0">
-              <a:spcBef>
-                <a:spcPts val="0"/>
-              </a:spcBef>
-              <a:spcAft>
-                <a:spcPts val="0"/>
-              </a:spcAft>
-              <a:buNone/>
-            </a:pPr>
-            <a:r>
-              <a:rPr lang="en-US" sz="1800">
-                <a:solidFill>
-                  <a:schemeClr val="dk1"/>
-                </a:solidFill>
-                <a:latin typeface="Calibri"/>
-                <a:ea typeface="Calibri"/>
-                <a:cs typeface="Calibri"/>
-                <a:sym typeface="Calibri"/>
-              </a:rPr>
-              <a:t>A sequential design strategy for global optimization of black-box functions that doesn't require derivatives.</a:t>
-            </a:r>
-            <a:endParaRPr/>
-          </a:p>
-        </p:txBody>
-      </p:sp>
-      <p:sp>
-        <p:nvSpPr>
-          <p:cNvPr id="18" name="Google Shape;107;p14">
-            <a:extLst>
-              <a:ext uri="{FF2B5EF4-FFF2-40B4-BE49-F238E27FC236}">
-                <a16:creationId xmlns:a16="http://schemas.microsoft.com/office/drawing/2014/main" id="{C2992640-6531-5D46-B219-A020079806DB}"/>
-              </a:ext>
-            </a:extLst>
-          </p:cNvPr>
-          <p:cNvSpPr txBox="1"/>
-          <p:nvPr/>
-        </p:nvSpPr>
-        <p:spPr>
-          <a:xfrm>
-            <a:off x="-1" y="3104101"/>
-            <a:ext cx="8082455" cy="3234069"/>
-          </a:xfrm>
-          <a:prstGeom prst="rect">
-            <a:avLst/>
-          </a:prstGeom>
-          <a:noFill/>
-          <a:ln>
-            <a:noFill/>
-          </a:ln>
-        </p:spPr>
-        <p:txBody>
-          <a:bodyPr spcFirstLastPara="1" wrap="square" lIns="91425" tIns="45700" rIns="91425" bIns="45700" anchor="t" anchorCtr="0">
-            <a:noAutofit/>
-          </a:bodyPr>
-          <a:lstStyle/>
-          <a:p>
-            <a:pPr marL="0" marR="0" lvl="0" indent="0" algn="l" rtl="0">
-              <a:spcBef>
-                <a:spcPts val="0"/>
-              </a:spcBef>
-              <a:spcAft>
-                <a:spcPts val="0"/>
-              </a:spcAft>
-              <a:buNone/>
-            </a:pPr>
-            <a:r>
-              <a:rPr lang="en-US" sz="1800" b="1">
-                <a:solidFill>
-                  <a:schemeClr val="accent1"/>
-                </a:solidFill>
-                <a:latin typeface="Calibri" panose="020F0502020204030204" pitchFamily="34" charset="0"/>
-                <a:cs typeface="Calibri" panose="020F0502020204030204" pitchFamily="34" charset="0"/>
-                <a:sym typeface="Calibri"/>
-              </a:rPr>
-              <a:t>Bayesian network  </a:t>
-            </a:r>
-            <a:br>
-              <a:rPr lang="en-US" sz="1800" b="1">
-                <a:solidFill>
-                  <a:schemeClr val="accent1"/>
-                </a:solidFill>
-                <a:latin typeface="Calibri" panose="020F0502020204030204" pitchFamily="34" charset="0"/>
-                <a:cs typeface="Calibri" panose="020F0502020204030204" pitchFamily="34" charset="0"/>
-                <a:sym typeface="Calibri"/>
-              </a:rPr>
-            </a:br>
-            <a:r>
-              <a:rPr lang="en-US" sz="1800">
+              <a:rPr lang="en-US" sz="1800" dirty="0">
                 <a:solidFill>
                   <a:schemeClr val="dk1"/>
                 </a:solidFill>
@@ -21000,7 +25116,7 @@
               <a:t>(Bayes network, belief network, Bayes(</a:t>
             </a:r>
             <a:r>
-              <a:rPr lang="en-US" sz="1800" err="1">
+              <a:rPr lang="en-US" sz="1800" dirty="0" err="1">
                 <a:solidFill>
                   <a:schemeClr val="dk1"/>
                 </a:solidFill>
@@ -21011,7 +25127,7 @@
               <a:t>ian</a:t>
             </a:r>
             <a:r>
-              <a:rPr lang="en-US" sz="1800">
+              <a:rPr lang="en-US" sz="1800" dirty="0">
                 <a:solidFill>
                   <a:schemeClr val="dk1"/>
                 </a:solidFill>
@@ -21022,7 +25138,7 @@
               <a:t>) model or probabilistic directed acyclic graphical model)</a:t>
             </a:r>
             <a:r>
-              <a:rPr lang="en-US" sz="1800">
+              <a:rPr lang="en-US" sz="1800" dirty="0">
                 <a:solidFill>
                   <a:schemeClr val="dk1"/>
                 </a:solidFill>
@@ -21033,7 +25149,18 @@
               </a:rPr>
               <a:t> is a probabilistic graphical model (a type of statistical model) that represents a set of random variables and their conditional dependencies via a directed acyclic graph (DAG). </a:t>
             </a:r>
-            <a:endParaRPr sz="1800">
+          </a:p>
+          <a:p>
+            <a:pPr marL="0" marR="0" lvl="0" indent="0" algn="l" rtl="0">
+              <a:spcBef>
+                <a:spcPts val="0"/>
+              </a:spcBef>
+              <a:spcAft>
+                <a:spcPts val="0"/>
+              </a:spcAft>
+              <a:buNone/>
+            </a:pPr>
+            <a:endParaRPr lang="en-US" sz="1800" dirty="0">
               <a:solidFill>
                 <a:schemeClr val="dk1"/>
               </a:solidFill>
@@ -21053,7 +25180,7 @@
               </a:spcAft>
               <a:buNone/>
             </a:pPr>
-            <a:endParaRPr lang="en-US" sz="1800">
+            <a:endParaRPr sz="1800" dirty="0">
               <a:solidFill>
                 <a:schemeClr val="dk1"/>
               </a:solidFill>
@@ -21073,7 +25200,7 @@
               </a:spcAft>
               <a:buNone/>
             </a:pPr>
-            <a:endParaRPr lang="en-US" sz="1800">
+            <a:endParaRPr lang="en-US" sz="1800" dirty="0">
               <a:solidFill>
                 <a:schemeClr val="dk1"/>
               </a:solidFill>
@@ -21094,7 +25221,7 @@
               <a:buNone/>
             </a:pPr>
             <a:r>
-              <a:rPr lang="en-US" sz="1800">
+              <a:rPr lang="en-US" sz="1800" dirty="0">
                 <a:solidFill>
                   <a:schemeClr val="dk1"/>
                 </a:solidFill>
@@ -21105,7 +25232,72 @@
               </a:rPr>
               <a:t>Example: </a:t>
             </a:r>
-            <a:endParaRPr sz="1800">
+          </a:p>
+          <a:p>
+            <a:pPr lvl="0"/>
+            <a:r>
+              <a:rPr lang="en-US" sz="1800" dirty="0">
+                <a:solidFill>
+                  <a:schemeClr val="dk1"/>
+                </a:solidFill>
+                <a:latin typeface="Calibri"/>
+                <a:ea typeface="Calibri"/>
+                <a:cs typeface="Calibri"/>
+                <a:sym typeface="Calibri"/>
+              </a:rPr>
+              <a:t>    </a:t>
+            </a:r>
+            <a:r>
+              <a:rPr lang="en-US" sz="1800" b="1" dirty="0">
+                <a:solidFill>
+                  <a:srgbClr val="0070C0"/>
+                </a:solidFill>
+                <a:latin typeface="Calibri"/>
+                <a:ea typeface="Calibri"/>
+                <a:cs typeface="Calibri"/>
+                <a:sym typeface="Calibri"/>
+              </a:rPr>
+              <a:t>Deep Belief Networks </a:t>
+            </a:r>
+            <a:r>
+              <a:rPr lang="en-US" sz="1800" dirty="0">
+                <a:solidFill>
+                  <a:schemeClr val="dk1"/>
+                </a:solidFill>
+                <a:latin typeface="Calibri"/>
+                <a:ea typeface="Calibri"/>
+                <a:cs typeface="Calibri"/>
+                <a:sym typeface="Calibri"/>
+              </a:rPr>
+              <a:t>- made of layers of RBMs </a:t>
+            </a:r>
+          </a:p>
+          <a:p>
+            <a:pPr lvl="0"/>
+            <a:r>
+              <a:rPr lang="en-US" sz="1800" dirty="0">
+                <a:solidFill>
+                  <a:schemeClr val="dk1"/>
+                </a:solidFill>
+                <a:latin typeface="Calibri"/>
+                <a:ea typeface="Calibri"/>
+                <a:cs typeface="Calibri"/>
+                <a:sym typeface="Calibri"/>
+              </a:rPr>
+              <a:t>     each next layer (“B”) is trained on top of the previous layer (“A”).</a:t>
+            </a:r>
+          </a:p>
+          <a:p>
+            <a:pPr marL="0" marR="0" lvl="0" indent="0" algn="l" rtl="0">
+              <a:spcBef>
+                <a:spcPts val="0"/>
+              </a:spcBef>
+              <a:spcAft>
+                <a:spcPts val="0"/>
+              </a:spcAft>
+              <a:buNone/>
+            </a:pPr>
+            <a:endParaRPr lang="en-US" sz="1800" dirty="0">
               <a:solidFill>
                 <a:schemeClr val="dk1"/>
               </a:solidFill>
@@ -21126,7 +25318,7 @@
               <a:buNone/>
             </a:pPr>
             <a:r>
-              <a:rPr lang="en-US" sz="1800">
+              <a:rPr lang="en-US" sz="1800" dirty="0">
                 <a:solidFill>
                   <a:schemeClr val="dk1"/>
                 </a:solidFill>
@@ -21135,10 +25327,10 @@
                 <a:cs typeface="Calibri"/>
                 <a:sym typeface="Calibri"/>
               </a:rPr>
-              <a:t>    </a:t>
-            </a:r>
-            <a:r>
-              <a:rPr lang="en-US" sz="1800" b="1">
+              <a:t>    here </a:t>
+            </a:r>
+            <a:r>
+              <a:rPr lang="en-US" sz="1800" b="1" dirty="0">
                 <a:solidFill>
                   <a:srgbClr val="0070C0"/>
                 </a:solidFill>
@@ -21147,10 +25339,10 @@
                 <a:cs typeface="Calibri"/>
                 <a:sym typeface="Calibri"/>
               </a:rPr>
-              <a:t>Deep Belief Networks </a:t>
-            </a:r>
-            <a:r>
-              <a:rPr lang="en-US" sz="1800">
+              <a:t>RBM</a:t>
+            </a:r>
+            <a:r>
+              <a:rPr lang="en-US" sz="1800" dirty="0">
                 <a:solidFill>
                   <a:schemeClr val="dk1"/>
                 </a:solidFill>
@@ -21159,72 +25351,8 @@
                 <a:cs typeface="Calibri"/>
                 <a:sym typeface="Calibri"/>
               </a:rPr>
-              <a:t>- made of layers of RBMs </a:t>
-            </a:r>
-          </a:p>
-          <a:p>
-            <a:pPr marL="0" marR="0" lvl="0" indent="0" algn="l" rtl="0">
-              <a:spcBef>
-                <a:spcPts val="0"/>
-              </a:spcBef>
-              <a:spcAft>
-                <a:spcPts val="0"/>
-              </a:spcAft>
-              <a:buNone/>
-            </a:pPr>
-            <a:r>
-              <a:rPr lang="en-US" sz="1800">
-                <a:solidFill>
-                  <a:schemeClr val="dk1"/>
-                </a:solidFill>
-                <a:latin typeface="Calibri"/>
-                <a:ea typeface="Calibri"/>
-                <a:cs typeface="Calibri"/>
-                <a:sym typeface="Calibri"/>
-              </a:rPr>
-              <a:t>    (Restricted Boltzmann Machines), </a:t>
-            </a:r>
-            <a:endParaRPr sz="1800">
-              <a:solidFill>
-                <a:schemeClr val="dk1"/>
-              </a:solidFill>
-              <a:latin typeface="Calibri"/>
-              <a:ea typeface="Calibri"/>
-              <a:cs typeface="Calibri"/>
-              <a:sym typeface="Calibri"/>
-            </a:endParaRPr>
-          </a:p>
-          <a:p>
-            <a:pPr marL="0" marR="0" lvl="0" indent="0" algn="l" rtl="0">
-              <a:spcBef>
-                <a:spcPts val="0"/>
-              </a:spcBef>
-              <a:spcAft>
-                <a:spcPts val="0"/>
-              </a:spcAft>
-              <a:buNone/>
-            </a:pPr>
-            <a:r>
-              <a:rPr lang="en-US" sz="1800">
-                <a:solidFill>
-                  <a:schemeClr val="dk1"/>
-                </a:solidFill>
-                <a:latin typeface="Calibri"/>
-                <a:ea typeface="Calibri"/>
-                <a:cs typeface="Calibri"/>
-                <a:sym typeface="Calibri"/>
-              </a:rPr>
-              <a:t>     each next layer (“B”) is trained on top of the previous layer (“A”).</a:t>
-            </a:r>
-            <a:endParaRPr sz="1800">
-              <a:solidFill>
-                <a:schemeClr val="dk1"/>
-              </a:solidFill>
-              <a:latin typeface="Calibri"/>
-              <a:ea typeface="Calibri"/>
-              <a:cs typeface="Calibri"/>
-              <a:sym typeface="Calibri"/>
-            </a:endParaRPr>
+              <a:t> (Restricted Boltzmann Machine) - a two-layered artificial neural network.</a:t>
+            </a:r>
           </a:p>
         </p:txBody>
       </p:sp>
@@ -21241,16 +25369,21 @@
           <p:nvPr/>
         </p:nvPicPr>
         <p:blipFill rotWithShape="1">
-          <a:blip r:embed="rId3">
+          <a:blip r:embed="rId3" cstate="email">
             <a:alphaModFix/>
+            <a:extLst>
+              <a:ext uri="{28A0092B-C50C-407E-A947-70E740481C1C}">
+                <a14:useLocalDpi xmlns:a14="http://schemas.microsoft.com/office/drawing/2010/main"/>
+              </a:ext>
+            </a:extLst>
           </a:blip>
           <a:srcRect/>
           <a:stretch/>
         </p:blipFill>
         <p:spPr>
           <a:xfrm>
-            <a:off x="9734988" y="1537237"/>
-            <a:ext cx="2074067" cy="2412900"/>
+            <a:off x="7532728" y="415640"/>
+            <a:ext cx="1829483" cy="2128359"/>
           </a:xfrm>
           <a:prstGeom prst="rect">
             <a:avLst/>
@@ -21263,15 +25396,15 @@
       </p:pic>
       <p:pic>
         <p:nvPicPr>
-          <p:cNvPr id="2" name="Picture 1">
+          <p:cNvPr id="1026" name="Picture 2" descr="A name for layered directed graph as in a fully-connected neural network -  Mathematics Stack Exchange">
             <a:extLst>
               <a:ext uri="{FF2B5EF4-FFF2-40B4-BE49-F238E27FC236}">
-                <a16:creationId xmlns:a16="http://schemas.microsoft.com/office/drawing/2014/main" id="{1ACCABFF-30F1-C24A-8208-2DD7566C1ADD}"/>
+                <a16:creationId xmlns:a16="http://schemas.microsoft.com/office/drawing/2014/main" id="{9F27D678-C094-7546-8A93-B3B6A7DC683E}"/>
               </a:ext>
             </a:extLst>
           </p:cNvPr>
           <p:cNvPicPr>
-            <a:picLocks noChangeAspect="1"/>
+            <a:picLocks noChangeAspect="1" noChangeArrowheads="1"/>
           </p:cNvPicPr>
           <p:nvPr/>
         </p:nvPicPr>
@@ -21283,107 +25416,35 @@
               </a:ext>
             </a:extLst>
           </a:blip>
+          <a:srcRect/>
           <a:stretch>
             <a:fillRect/>
           </a:stretch>
         </p:blipFill>
-        <p:spPr>
+        <p:spPr bwMode="auto">
           <a:xfrm>
-            <a:off x="8799567" y="4536988"/>
-            <a:ext cx="3308350" cy="2273031"/>
+            <a:off x="6857999" y="3617628"/>
+            <a:ext cx="4388069" cy="2234581"/>
           </a:xfrm>
           <a:prstGeom prst="rect">
             <a:avLst/>
           </a:prstGeom>
+          <a:noFill/>
+          <a:extLst>
+            <a:ext uri="{909E8E84-426E-40DD-AFC4-6F175D3DCCD1}">
+              <a14:hiddenFill xmlns:a14="http://schemas.microsoft.com/office/drawing/2010/main">
+                <a:solidFill>
+                  <a:srgbClr val="FFFFFF"/>
+                </a:solidFill>
+              </a14:hiddenFill>
+            </a:ext>
+          </a:extLst>
         </p:spPr>
       </p:pic>
-      <p:cxnSp>
-        <p:nvCxnSpPr>
-          <p:cNvPr id="4" name="Straight Arrow Connector 3">
-            <a:extLst>
-              <a:ext uri="{FF2B5EF4-FFF2-40B4-BE49-F238E27FC236}">
-                <a16:creationId xmlns:a16="http://schemas.microsoft.com/office/drawing/2014/main" id="{E055C238-B21B-A94E-B3FA-927006824DB1}"/>
-              </a:ext>
-            </a:extLst>
-          </p:cNvPr>
-          <p:cNvCxnSpPr>
-            <a:cxnSpLocks/>
-          </p:cNvCxnSpPr>
-          <p:nvPr/>
-        </p:nvCxnSpPr>
-        <p:spPr>
-          <a:xfrm flipV="1">
-            <a:off x="8262335" y="3353896"/>
-            <a:ext cx="1074464" cy="150207"/>
-          </a:xfrm>
-          <a:prstGeom prst="straightConnector1">
-            <a:avLst/>
-          </a:prstGeom>
-          <a:ln w="76200">
-            <a:tailEnd type="triangle"/>
-          </a:ln>
-        </p:spPr>
-        <p:style>
-          <a:lnRef idx="1">
-            <a:schemeClr val="accent1"/>
-          </a:lnRef>
-          <a:fillRef idx="0">
-            <a:schemeClr val="accent1"/>
-          </a:fillRef>
-          <a:effectRef idx="0">
-            <a:schemeClr val="accent1"/>
-          </a:effectRef>
-          <a:fontRef idx="minor">
-            <a:schemeClr val="tx1"/>
-          </a:fontRef>
-        </p:style>
-      </p:cxnSp>
-      <p:cxnSp>
-        <p:nvCxnSpPr>
-          <p:cNvPr id="23" name="Straight Arrow Connector 22">
-            <a:extLst>
-              <a:ext uri="{FF2B5EF4-FFF2-40B4-BE49-F238E27FC236}">
-                <a16:creationId xmlns:a16="http://schemas.microsoft.com/office/drawing/2014/main" id="{21C78CF4-58E9-AC47-9EBD-FD10204A9181}"/>
-              </a:ext>
-            </a:extLst>
-          </p:cNvPr>
-          <p:cNvCxnSpPr>
-            <a:cxnSpLocks/>
-            <a:endCxn id="2" idx="1"/>
-          </p:cNvCxnSpPr>
-          <p:nvPr/>
-        </p:nvCxnSpPr>
-        <p:spPr>
-          <a:xfrm>
-            <a:off x="6705600" y="5673504"/>
-            <a:ext cx="2093967" cy="0"/>
-          </a:xfrm>
-          <a:prstGeom prst="straightConnector1">
-            <a:avLst/>
-          </a:prstGeom>
-          <a:ln w="76200">
-            <a:tailEnd type="triangle"/>
-          </a:ln>
-        </p:spPr>
-        <p:style>
-          <a:lnRef idx="1">
-            <a:schemeClr val="accent1"/>
-          </a:lnRef>
-          <a:fillRef idx="0">
-            <a:schemeClr val="accent1"/>
-          </a:fillRef>
-          <a:effectRef idx="0">
-            <a:schemeClr val="accent1"/>
-          </a:effectRef>
-          <a:fontRef idx="minor">
-            <a:schemeClr val="tx1"/>
-          </a:fontRef>
-        </p:style>
-      </p:cxnSp>
     </p:spTree>
     <p:extLst>
       <p:ext uri="{BB962C8B-B14F-4D97-AF65-F5344CB8AC3E}">
-        <p14:creationId xmlns:p14="http://schemas.microsoft.com/office/powerpoint/2010/main" val="3833733288"/>
+        <p14:creationId xmlns:p14="http://schemas.microsoft.com/office/powerpoint/2010/main" val="4205312314"/>
       </p:ext>
     </p:extLst>
   </p:cSld>
@@ -21393,12 +25454,12 @@
 </p:sld>
 </file>
 
-<file path=ppt/slides/slide6.xml><?xml version="1.0" encoding="utf-8"?>
+<file path=ppt/slides/slide9.xml><?xml version="1.0" encoding="utf-8"?>
 <p:sld xmlns:a="http://schemas.openxmlformats.org/drawingml/2006/main" xmlns:r="http://schemas.openxmlformats.org/officeDocument/2006/relationships" xmlns:p="http://schemas.openxmlformats.org/presentationml/2006/main">
   <p:cSld>
     <p:spTree>
       <p:nvGrpSpPr>
-        <p:cNvPr id="1" name=""/>
+        <p:cNvPr id="1" name="Shape 87"/>
         <p:cNvGrpSpPr/>
         <p:nvPr/>
       </p:nvGrpSpPr>
@@ -21412,10 +25473,10 @@
       </p:grpSpPr>
       <p:sp>
         <p:nvSpPr>
-          <p:cNvPr id="4" name="TextBox 3">
+          <p:cNvPr id="17" name="Google Shape;113;p14">
             <a:extLst>
               <a:ext uri="{FF2B5EF4-FFF2-40B4-BE49-F238E27FC236}">
-                <a16:creationId xmlns:a16="http://schemas.microsoft.com/office/drawing/2014/main" id="{8A0212EB-D5F5-7C42-9867-3F4106A76AC3}"/>
+                <a16:creationId xmlns:a16="http://schemas.microsoft.com/office/drawing/2014/main" id="{686E86FA-5888-014D-BB3F-938CE5095920}"/>
               </a:ext>
             </a:extLst>
           </p:cNvPr>
@@ -21424,965 +25485,65 @@
         </p:nvSpPr>
         <p:spPr>
           <a:xfrm>
-            <a:off x="-1" y="37572"/>
-            <a:ext cx="6694715" cy="523220"/>
+            <a:off x="0" y="126766"/>
+            <a:ext cx="3658586" cy="551152"/>
           </a:xfrm>
           <a:prstGeom prst="rect">
             <a:avLst/>
           </a:prstGeom>
           <a:noFill/>
+          <a:ln>
+            <a:noFill/>
+          </a:ln>
         </p:spPr>
         <p:txBody>
-          <a:bodyPr wrap="square" rtlCol="0">
-            <a:spAutoFit/>
+          <a:bodyPr spcFirstLastPara="1" wrap="square" lIns="91425" tIns="45700" rIns="91425" bIns="45700" anchor="t" anchorCtr="0">
+            <a:noAutofit/>
           </a:bodyPr>
           <a:lstStyle/>
           <a:p>
-            <a:r>
-              <a:rPr lang="en-US" sz="2800" b="1" dirty="0"/>
-              <a:t>Probability - Bayesian vs Frequentist</a:t>
-            </a:r>
-          </a:p>
-        </p:txBody>
-      </p:sp>
-      <p:sp>
-        <p:nvSpPr>
-          <p:cNvPr id="5" name="TextBox 4">
-            <a:extLst>
-              <a:ext uri="{FF2B5EF4-FFF2-40B4-BE49-F238E27FC236}">
-                <a16:creationId xmlns:a16="http://schemas.microsoft.com/office/drawing/2014/main" id="{AADE8889-8C42-E543-BA59-6986D4778221}"/>
-              </a:ext>
-            </a:extLst>
-          </p:cNvPr>
-          <p:cNvSpPr txBox="1"/>
-          <p:nvPr/>
-        </p:nvSpPr>
-        <p:spPr>
-          <a:xfrm>
-            <a:off x="185221" y="4350908"/>
-            <a:ext cx="5929952" cy="2462213"/>
-          </a:xfrm>
-          <a:prstGeom prst="rect">
-            <a:avLst/>
-          </a:prstGeom>
-          <a:noFill/>
-        </p:spPr>
-        <p:txBody>
-          <a:bodyPr wrap="square" rtlCol="0">
-            <a:spAutoFit/>
-          </a:bodyPr>
-          <a:lstStyle/>
-          <a:p>
-            <a:r>
-              <a:rPr lang="en-US" b="1" dirty="0">
-                <a:solidFill>
-                  <a:srgbClr val="FF0000"/>
-                </a:solidFill>
+            <a:pPr marL="0" marR="0" lvl="0" indent="0" algn="l" rtl="0">
+              <a:spcBef>
+                <a:spcPts val="0"/>
+              </a:spcBef>
+              <a:spcAft>
+                <a:spcPts val="0"/>
+              </a:spcAft>
+              <a:buNone/>
+            </a:pPr>
+            <a:r>
+              <a:rPr lang="en-US" sz="2800" b="1" dirty="0">
+                <a:solidFill>
+                  <a:schemeClr val="tx1"/>
+                </a:solidFill>
+                <a:latin typeface="Calibri" panose="020F0502020204030204" pitchFamily="34" charset="0"/>
+                <a:cs typeface="Calibri" panose="020F0502020204030204" pitchFamily="34" charset="0"/>
+                <a:sym typeface="Calibri"/>
               </a:rPr>
-              <a:t>Frequentist (classical):</a:t>
-            </a:r>
-          </a:p>
-          <a:p>
-            <a:r>
-              <a:rPr lang="en-US" dirty="0"/>
-              <a:t>    Calculate means (estimates) and confidence intervals</a:t>
-            </a:r>
-          </a:p>
-          <a:p>
-            <a:r>
-              <a:rPr lang="en-US" dirty="0"/>
-              <a:t>    Problems treating missing data (</a:t>
-            </a:r>
-            <a:r>
-              <a:rPr lang="en-US" b="1" dirty="0">
-                <a:solidFill>
-                  <a:srgbClr val="FF0000"/>
-                </a:solidFill>
-              </a:rPr>
-              <a:t>survivorship bias</a:t>
-            </a:r>
-            <a:r>
-              <a:rPr lang="en-US" dirty="0"/>
-              <a:t>)</a:t>
-            </a:r>
-          </a:p>
-          <a:p>
-            <a:r>
-              <a:rPr lang="en-US" dirty="0"/>
-              <a:t>    Problems with hypothesis testing (</a:t>
-            </a:r>
-            <a:r>
-              <a:rPr lang="en-US" b="1" dirty="0">
-                <a:solidFill>
-                  <a:srgbClr val="FF0000"/>
-                </a:solidFill>
-              </a:rPr>
-              <a:t>p-hacking</a:t>
-            </a:r>
-            <a:r>
-              <a:rPr lang="en-US" dirty="0"/>
-              <a:t>)</a:t>
-            </a:r>
-          </a:p>
-          <a:p>
-            <a:endParaRPr lang="en-US" b="1" dirty="0">
+              <a:t>Bayesian Optimization </a:t>
+            </a:r>
+            <a:endParaRPr sz="2800" b="1" dirty="0">
               <a:solidFill>
-                <a:srgbClr val="FF0000"/>
+                <a:schemeClr val="tx1"/>
               </a:solidFill>
+              <a:latin typeface="Calibri" panose="020F0502020204030204" pitchFamily="34" charset="0"/>
+              <a:cs typeface="Calibri" panose="020F0502020204030204" pitchFamily="34" charset="0"/>
+              <a:sym typeface="Calibri"/>
             </a:endParaRPr>
-          </a:p>
-          <a:p>
-            <a:r>
-              <a:rPr lang="en-US" b="1" dirty="0">
-                <a:solidFill>
-                  <a:srgbClr val="FF0000"/>
-                </a:solidFill>
-              </a:rPr>
-              <a:t>Bayesian:</a:t>
-            </a:r>
-          </a:p>
-          <a:p>
-            <a:r>
-              <a:rPr lang="en-US" dirty="0"/>
-              <a:t>    Enumerate all possible hypotheses – and compute their probabilities.</a:t>
-            </a:r>
-          </a:p>
-          <a:p>
-            <a:r>
-              <a:rPr lang="en-US" dirty="0"/>
-              <a:t>    We make a (subjective) choice of “prior” (model, distribution)</a:t>
-            </a:r>
-          </a:p>
-          <a:p>
-            <a:r>
-              <a:rPr lang="en-US" dirty="0"/>
-              <a:t>    and produce posterior distribution.</a:t>
-            </a:r>
-          </a:p>
-          <a:p>
-            <a:r>
-              <a:rPr lang="en-US" dirty="0"/>
-              <a:t>    Allows for complex decision analysis under uncertainty.</a:t>
-            </a:r>
-          </a:p>
-          <a:p>
-            <a:endParaRPr lang="en-US" b="1" dirty="0">
-              <a:solidFill>
-                <a:srgbClr val="FF0000"/>
-              </a:solidFill>
-            </a:endParaRPr>
-          </a:p>
-        </p:txBody>
-      </p:sp>
-      <p:sp>
-        <p:nvSpPr>
-          <p:cNvPr id="6" name="TextBox 5">
-            <a:extLst>
-              <a:ext uri="{FF2B5EF4-FFF2-40B4-BE49-F238E27FC236}">
-                <a16:creationId xmlns:a16="http://schemas.microsoft.com/office/drawing/2014/main" id="{D86CA22F-D1DB-184B-8C0D-193FFD538439}"/>
-              </a:ext>
-            </a:extLst>
-          </p:cNvPr>
-          <p:cNvSpPr txBox="1"/>
-          <p:nvPr/>
-        </p:nvSpPr>
-        <p:spPr>
-          <a:xfrm>
-            <a:off x="6985379" y="682726"/>
-            <a:ext cx="5206621" cy="1815882"/>
-          </a:xfrm>
-          <a:prstGeom prst="rect">
-            <a:avLst/>
-          </a:prstGeom>
-          <a:noFill/>
-        </p:spPr>
-        <p:txBody>
-          <a:bodyPr wrap="square" rtlCol="0">
-            <a:spAutoFit/>
-          </a:bodyPr>
-          <a:lstStyle/>
-          <a:p>
-            <a:r>
-              <a:rPr lang="en-US" b="1" dirty="0">
-                <a:solidFill>
-                  <a:srgbClr val="FF0000"/>
-                </a:solidFill>
-              </a:rPr>
-              <a:t>Example1: </a:t>
-            </a:r>
-            <a:r>
-              <a:rPr lang="en-US" dirty="0"/>
-              <a:t>Polling, two candidates: Alice &amp; Bob.</a:t>
-            </a:r>
-          </a:p>
-          <a:p>
-            <a:r>
-              <a:rPr lang="en-US" dirty="0"/>
-              <a:t>52% of polled voters intend to vote for Alice.</a:t>
-            </a:r>
-          </a:p>
-          <a:p>
-            <a:r>
-              <a:rPr lang="en-US" dirty="0"/>
-              <a:t>Confidence interval [42%,62%], p-value = 0.34</a:t>
-            </a:r>
-          </a:p>
-          <a:p>
-            <a:r>
-              <a:rPr lang="en-US" dirty="0"/>
-              <a:t>What is the probability that Alice will win ?</a:t>
-            </a:r>
-          </a:p>
-          <a:p>
-            <a:r>
-              <a:rPr lang="en-US" dirty="0"/>
-              <a:t>Classical frequentist approach can not answer this question.</a:t>
-            </a:r>
-          </a:p>
-          <a:p>
-            <a:r>
-              <a:rPr lang="en-US" dirty="0"/>
-              <a:t>Bayesian method – result is a posterior distribution of possible </a:t>
-            </a:r>
-          </a:p>
-          <a:p>
-            <a:r>
-              <a:rPr lang="en-US" dirty="0"/>
-              <a:t>outcomes based on data.</a:t>
-            </a:r>
-          </a:p>
-          <a:p>
-            <a:r>
-              <a:rPr lang="en-US" dirty="0"/>
-              <a:t>Thus you can get your answer.</a:t>
-            </a:r>
-          </a:p>
-        </p:txBody>
-      </p:sp>
-      <p:sp>
-        <p:nvSpPr>
-          <p:cNvPr id="7" name="TextBox 6">
-            <a:extLst>
-              <a:ext uri="{FF2B5EF4-FFF2-40B4-BE49-F238E27FC236}">
-                <a16:creationId xmlns:a16="http://schemas.microsoft.com/office/drawing/2014/main" id="{E88A1638-21E4-C746-A837-4CF59231442C}"/>
-              </a:ext>
-            </a:extLst>
-          </p:cNvPr>
-          <p:cNvSpPr txBox="1"/>
-          <p:nvPr/>
-        </p:nvSpPr>
-        <p:spPr>
-          <a:xfrm>
-            <a:off x="6985379" y="2596582"/>
-            <a:ext cx="5206621" cy="1600438"/>
-          </a:xfrm>
-          <a:prstGeom prst="rect">
-            <a:avLst/>
-          </a:prstGeom>
-          <a:noFill/>
-        </p:spPr>
-        <p:txBody>
-          <a:bodyPr wrap="square" rtlCol="0">
-            <a:spAutoFit/>
-          </a:bodyPr>
-          <a:lstStyle/>
-          <a:p>
-            <a:r>
-              <a:rPr lang="en-US" b="1" dirty="0">
-                <a:solidFill>
-                  <a:srgbClr val="FF0000"/>
-                </a:solidFill>
-              </a:rPr>
-              <a:t>Example2:</a:t>
-            </a:r>
-            <a:r>
-              <a:rPr lang="en-US" dirty="0"/>
-              <a:t> comparing two drugs A &amp; B.</a:t>
-            </a:r>
-          </a:p>
-          <a:p>
-            <a:r>
-              <a:rPr lang="en-US" dirty="0"/>
-              <a:t>A is better than B with p value &lt; 0.001</a:t>
-            </a:r>
-          </a:p>
-          <a:p>
-            <a:r>
-              <a:rPr lang="en-US" dirty="0"/>
-              <a:t>A is more expensive.</a:t>
-            </a:r>
-          </a:p>
-          <a:p>
-            <a:r>
-              <a:rPr lang="en-US" dirty="0"/>
-              <a:t>Which drug should we prescribe?</a:t>
-            </a:r>
-          </a:p>
-          <a:p>
-            <a:r>
-              <a:rPr lang="en-US" dirty="0"/>
-              <a:t>Cost-benefit. </a:t>
-            </a:r>
-          </a:p>
-          <a:p>
-            <a:r>
-              <a:rPr lang="en-US" dirty="0"/>
-              <a:t>Suppose we get predicted probability of survival with A and B.</a:t>
-            </a:r>
-          </a:p>
-          <a:p>
-            <a:r>
-              <a:rPr lang="en-US" dirty="0"/>
-              <a:t>We could then compute dollars per life saved. </a:t>
-            </a:r>
-          </a:p>
-        </p:txBody>
-      </p:sp>
-      <p:sp>
-        <p:nvSpPr>
-          <p:cNvPr id="8" name="TextBox 7">
-            <a:extLst>
-              <a:ext uri="{FF2B5EF4-FFF2-40B4-BE49-F238E27FC236}">
-                <a16:creationId xmlns:a16="http://schemas.microsoft.com/office/drawing/2014/main" id="{81EB3310-1369-7647-9FF9-5016F01991CC}"/>
-              </a:ext>
-            </a:extLst>
-          </p:cNvPr>
-          <p:cNvSpPr txBox="1"/>
-          <p:nvPr/>
-        </p:nvSpPr>
-        <p:spPr>
-          <a:xfrm>
-            <a:off x="6985379" y="4294994"/>
-            <a:ext cx="5206621" cy="954107"/>
-          </a:xfrm>
-          <a:prstGeom prst="rect">
-            <a:avLst/>
-          </a:prstGeom>
-          <a:noFill/>
-        </p:spPr>
-        <p:txBody>
-          <a:bodyPr wrap="square" rtlCol="0">
-            <a:spAutoFit/>
-          </a:bodyPr>
-          <a:lstStyle/>
-          <a:p>
-            <a:r>
-              <a:rPr lang="en-US" b="1" dirty="0">
-                <a:solidFill>
-                  <a:srgbClr val="FF0000"/>
-                </a:solidFill>
-              </a:rPr>
-              <a:t>Example3:</a:t>
-            </a:r>
-            <a:r>
-              <a:rPr lang="en-US" dirty="0"/>
-              <a:t> Guessing game</a:t>
-            </a:r>
-          </a:p>
-          <a:p>
-            <a:r>
-              <a:rPr lang="en-US" dirty="0"/>
-              <a:t>You see the prize – and guess the price</a:t>
-            </a:r>
-          </a:p>
-          <a:p>
-            <a:r>
-              <a:rPr lang="en-US" dirty="0"/>
-              <a:t>Opponent sees a different prize – and guesses the price.</a:t>
-            </a:r>
-          </a:p>
-          <a:p>
-            <a:r>
-              <a:rPr lang="en-US" dirty="0"/>
-              <a:t>Whoever is closer (without going over) wins.</a:t>
-            </a:r>
-          </a:p>
-        </p:txBody>
-      </p:sp>
-      <p:sp>
-        <p:nvSpPr>
-          <p:cNvPr id="9" name="TextBox 8">
-            <a:extLst>
-              <a:ext uri="{FF2B5EF4-FFF2-40B4-BE49-F238E27FC236}">
-                <a16:creationId xmlns:a16="http://schemas.microsoft.com/office/drawing/2014/main" id="{9D171819-C6E6-4541-8406-01258005E5A5}"/>
-              </a:ext>
-            </a:extLst>
-          </p:cNvPr>
-          <p:cNvSpPr txBox="1"/>
-          <p:nvPr/>
-        </p:nvSpPr>
-        <p:spPr>
-          <a:xfrm>
-            <a:off x="185220" y="4043131"/>
-            <a:ext cx="5595582" cy="307777"/>
-          </a:xfrm>
-          <a:prstGeom prst="rect">
-            <a:avLst/>
-          </a:prstGeom>
-          <a:noFill/>
-        </p:spPr>
-        <p:txBody>
-          <a:bodyPr wrap="square" rtlCol="0">
-            <a:spAutoFit/>
-          </a:bodyPr>
-          <a:lstStyle/>
-          <a:p>
-            <a:r>
-              <a:rPr lang="en-US" dirty="0"/>
-              <a:t>Allen Downey – </a:t>
-            </a:r>
-            <a:r>
-              <a:rPr lang="en-US" dirty="0">
-                <a:hlinkClick r:id="rId2"/>
-              </a:rPr>
-              <a:t>https://www.youtube.com/watch?v=R6d-AbkhBQ8</a:t>
-            </a:r>
-            <a:r>
-              <a:rPr lang="en-US" dirty="0"/>
-              <a:t> </a:t>
-            </a:r>
-          </a:p>
-        </p:txBody>
-      </p:sp>
-      <p:sp>
-        <p:nvSpPr>
-          <p:cNvPr id="10" name="TextBox 9">
-            <a:extLst>
-              <a:ext uri="{FF2B5EF4-FFF2-40B4-BE49-F238E27FC236}">
-                <a16:creationId xmlns:a16="http://schemas.microsoft.com/office/drawing/2014/main" id="{E9BADB20-D64C-6847-BE85-8D8A5503503B}"/>
-              </a:ext>
-            </a:extLst>
-          </p:cNvPr>
-          <p:cNvSpPr txBox="1"/>
-          <p:nvPr/>
-        </p:nvSpPr>
-        <p:spPr>
-          <a:xfrm>
-            <a:off x="6985379" y="5526100"/>
-            <a:ext cx="5206621" cy="307777"/>
-          </a:xfrm>
-          <a:prstGeom prst="rect">
-            <a:avLst/>
-          </a:prstGeom>
-          <a:noFill/>
-        </p:spPr>
-        <p:txBody>
-          <a:bodyPr wrap="square" rtlCol="0">
-            <a:spAutoFit/>
-          </a:bodyPr>
-          <a:lstStyle/>
-          <a:p>
-            <a:r>
-              <a:rPr lang="en-US" b="1" dirty="0">
-                <a:solidFill>
-                  <a:srgbClr val="FF0000"/>
-                </a:solidFill>
-              </a:rPr>
-              <a:t>Example4: </a:t>
-            </a:r>
-            <a:r>
-              <a:rPr lang="en-US" dirty="0"/>
-              <a:t>MCMC (Markov-Chain Monte-Carlo)</a:t>
-            </a:r>
-          </a:p>
-        </p:txBody>
-      </p:sp>
-      <p:sp>
-        <p:nvSpPr>
-          <p:cNvPr id="2" name="TextBox 1">
-            <a:extLst>
-              <a:ext uri="{FF2B5EF4-FFF2-40B4-BE49-F238E27FC236}">
-                <a16:creationId xmlns:a16="http://schemas.microsoft.com/office/drawing/2014/main" id="{809CB213-96B1-CD42-937A-368036DCD1E0}"/>
-              </a:ext>
-            </a:extLst>
-          </p:cNvPr>
-          <p:cNvSpPr txBox="1"/>
-          <p:nvPr/>
-        </p:nvSpPr>
-        <p:spPr>
-          <a:xfrm>
-            <a:off x="353867" y="868569"/>
-            <a:ext cx="5560001" cy="2677656"/>
-          </a:xfrm>
-          <a:prstGeom prst="rect">
-            <a:avLst/>
-          </a:prstGeom>
-          <a:noFill/>
-        </p:spPr>
-        <p:txBody>
-          <a:bodyPr wrap="square" rtlCol="0">
-            <a:spAutoFit/>
-          </a:bodyPr>
-          <a:lstStyle/>
-          <a:p>
-            <a:r>
-              <a:rPr lang="en-US" dirty="0"/>
-              <a:t>The </a:t>
-            </a:r>
-            <a:r>
-              <a:rPr lang="en-US" b="1" dirty="0">
-                <a:solidFill>
-                  <a:srgbClr val="FF0000"/>
-                </a:solidFill>
-              </a:rPr>
-              <a:t>Frequentist</a:t>
-            </a:r>
-            <a:r>
-              <a:rPr lang="en-US" dirty="0"/>
-              <a:t> see probability as something that has to do with a limiting frequency based on an observed proportion.</a:t>
-            </a:r>
-          </a:p>
-          <a:p>
-            <a:endParaRPr lang="en-US" dirty="0"/>
-          </a:p>
-          <a:p>
-            <a:r>
-              <a:rPr lang="en-US" dirty="0"/>
-              <a:t>The </a:t>
-            </a:r>
-            <a:r>
-              <a:rPr lang="en-US" b="1" dirty="0">
-                <a:solidFill>
-                  <a:srgbClr val="FF0000"/>
-                </a:solidFill>
-              </a:rPr>
-              <a:t>Bayesian</a:t>
-            </a:r>
-            <a:r>
-              <a:rPr lang="en-US" dirty="0"/>
-              <a:t> is subjective and uses a priori beliefs to define a prior probability distribution on the possible values of the unknown parameters.</a:t>
-            </a:r>
-          </a:p>
-          <a:p>
-            <a:endParaRPr lang="en-US" dirty="0"/>
-          </a:p>
-          <a:p>
-            <a:r>
-              <a:rPr lang="en-US" dirty="0"/>
-              <a:t>Frequentists accuse Bayesians for being subjective in selecting a prior model / distribution. </a:t>
-            </a:r>
-          </a:p>
-          <a:p>
-            <a:endParaRPr lang="en-US" dirty="0"/>
-          </a:p>
-          <a:p>
-            <a:r>
-              <a:rPr lang="en-US" dirty="0"/>
-              <a:t>Bayesians snap back that at least they have a model, whereas Frequentists just calculate averages of observed data</a:t>
-            </a:r>
-          </a:p>
-        </p:txBody>
-      </p:sp>
-    </p:spTree>
-    <p:extLst>
-      <p:ext uri="{BB962C8B-B14F-4D97-AF65-F5344CB8AC3E}">
-        <p14:creationId xmlns:p14="http://schemas.microsoft.com/office/powerpoint/2010/main" val="4124171004"/>
-      </p:ext>
-    </p:extLst>
-  </p:cSld>
-  <p:clrMapOvr>
-    <a:masterClrMapping/>
-  </p:clrMapOvr>
-</p:sld>
-</file>
-
-<file path=ppt/slides/slide7.xml><?xml version="1.0" encoding="utf-8"?>
-<p:sld xmlns:a="http://schemas.openxmlformats.org/drawingml/2006/main" xmlns:r="http://schemas.openxmlformats.org/officeDocument/2006/relationships" xmlns:p="http://schemas.openxmlformats.org/presentationml/2006/main">
-  <p:cSld>
-    <p:spTree>
-      <p:nvGrpSpPr>
-        <p:cNvPr id="1" name=""/>
-        <p:cNvGrpSpPr/>
-        <p:nvPr/>
-      </p:nvGrpSpPr>
-      <p:grpSpPr>
-        <a:xfrm>
-          <a:off x="0" y="0"/>
-          <a:ext cx="0" cy="0"/>
-          <a:chOff x="0" y="0"/>
-          <a:chExt cx="0" cy="0"/>
-        </a:xfrm>
-      </p:grpSpPr>
-      <p:sp>
-        <p:nvSpPr>
-          <p:cNvPr id="4" name="TextBox 3">
-            <a:extLst>
-              <a:ext uri="{FF2B5EF4-FFF2-40B4-BE49-F238E27FC236}">
-                <a16:creationId xmlns:a16="http://schemas.microsoft.com/office/drawing/2014/main" id="{93FB964B-A29C-1649-A2C4-81BC78C24A50}"/>
-              </a:ext>
-            </a:extLst>
-          </p:cNvPr>
-          <p:cNvSpPr txBox="1"/>
-          <p:nvPr/>
-        </p:nvSpPr>
-        <p:spPr>
-          <a:xfrm>
-            <a:off x="238539" y="225286"/>
-            <a:ext cx="5579165" cy="6555641"/>
-          </a:xfrm>
-          <a:prstGeom prst="rect">
-            <a:avLst/>
-          </a:prstGeom>
-          <a:noFill/>
-        </p:spPr>
-        <p:txBody>
-          <a:bodyPr wrap="square" rtlCol="0">
-            <a:spAutoFit/>
-          </a:bodyPr>
-          <a:lstStyle/>
-          <a:p>
-            <a:r>
-              <a:rPr lang="en-US" b="1" dirty="0"/>
-              <a:t>Bayesian vs Frequentist – Survivorship Bias in World War 2</a:t>
-            </a:r>
-          </a:p>
-          <a:p>
-            <a:endParaRPr lang="en-US" dirty="0"/>
-          </a:p>
-          <a:p>
-            <a:r>
-              <a:rPr lang="en-US" dirty="0"/>
-              <a:t>During World War II the US military's concluded that the most-hit areas of the plane needed additional armor.</a:t>
-            </a:r>
-          </a:p>
-          <a:p>
-            <a:r>
-              <a:rPr lang="en-US" dirty="0"/>
-              <a:t>But statistician Abraham Wald (Statistical Research Group (SRG) at Columbia University) has recommended adding armor to the areas that showed the least damage. His reasoning was that the sample didn't include the planes which were shot down.</a:t>
-            </a:r>
-          </a:p>
-          <a:p>
-            <a:endParaRPr lang="en-US" dirty="0"/>
-          </a:p>
-          <a:p>
-            <a:r>
-              <a:rPr lang="en-US" dirty="0"/>
-              <a:t>It is dangerous to use data "as is" to create a model,</a:t>
-            </a:r>
-            <a:br>
-              <a:rPr lang="en-US" dirty="0"/>
-            </a:br>
-            <a:r>
-              <a:rPr lang="en-US" dirty="0"/>
-              <a:t>because the data may be biased to start with,</a:t>
-            </a:r>
-            <a:br>
-              <a:rPr lang="en-US" dirty="0"/>
-            </a:br>
-            <a:r>
-              <a:rPr lang="en-US" dirty="0"/>
-              <a:t>and it can easily lead to creating a biased model</a:t>
-            </a:r>
-            <a:br>
-              <a:rPr lang="en-US" dirty="0"/>
-            </a:br>
-            <a:br>
-              <a:rPr lang="en-US" dirty="0"/>
-            </a:br>
-            <a:r>
-              <a:rPr lang="en-US" dirty="0"/>
-              <a:t>Problem occur when we have:</a:t>
-            </a:r>
-            <a:br>
-              <a:rPr lang="en-US" dirty="0"/>
-            </a:br>
-            <a:r>
-              <a:rPr lang="en-US" dirty="0"/>
-              <a:t> - under-represented features (missing data)</a:t>
-            </a:r>
-            <a:br>
-              <a:rPr lang="en-US" dirty="0"/>
-            </a:br>
-            <a:r>
-              <a:rPr lang="en-US" dirty="0"/>
-              <a:t> - over-represented features,</a:t>
-            </a:r>
-            <a:br>
-              <a:rPr lang="en-US" dirty="0"/>
-            </a:br>
-            <a:r>
-              <a:rPr lang="en-US" dirty="0"/>
-              <a:t> - "target leakage" effect.</a:t>
-            </a:r>
-            <a:br>
-              <a:rPr lang="en-US" dirty="0"/>
-            </a:br>
-            <a:br>
-              <a:rPr lang="en-US" dirty="0"/>
-            </a:br>
-            <a:r>
-              <a:rPr lang="en-US" dirty="0"/>
-              <a:t>Survivorship bias:</a:t>
-            </a:r>
-            <a:br>
-              <a:rPr lang="en-US" dirty="0"/>
-            </a:br>
-            <a:r>
-              <a:rPr lang="en-US" dirty="0"/>
-              <a:t> - </a:t>
-            </a:r>
-            <a:r>
-              <a:rPr lang="en-US" dirty="0">
-                <a:hlinkClick r:id="rId2"/>
-              </a:rPr>
-              <a:t>https://www.youtube.com/watch?v=B3YQJ5DwTzM</a:t>
-            </a:r>
-            <a:r>
-              <a:rPr lang="en-US" dirty="0"/>
-              <a:t> </a:t>
-            </a:r>
-            <a:br>
-              <a:rPr lang="en-US" dirty="0"/>
-            </a:br>
-            <a:br>
-              <a:rPr lang="en-US" dirty="0"/>
-            </a:br>
-            <a:r>
-              <a:rPr lang="en-US" dirty="0"/>
-              <a:t>Gender Bias:</a:t>
-            </a:r>
-            <a:br>
-              <a:rPr lang="en-US" dirty="0"/>
-            </a:br>
-            <a:r>
-              <a:rPr lang="en-US" dirty="0"/>
-              <a:t> - </a:t>
-            </a:r>
-            <a:r>
-              <a:rPr lang="en-US" dirty="0">
-                <a:hlinkClick r:id="rId3"/>
-              </a:rPr>
-              <a:t>https://www.youtube.com/watch?v=p60-Jdq754A</a:t>
-            </a:r>
-            <a:r>
-              <a:rPr lang="en-US" dirty="0"/>
-              <a:t> </a:t>
-            </a:r>
-            <a:br>
-              <a:rPr lang="en-US" dirty="0"/>
-            </a:br>
-            <a:br>
-              <a:rPr lang="en-US" dirty="0"/>
-            </a:br>
-            <a:r>
-              <a:rPr lang="en-US" dirty="0"/>
-              <a:t>Bias in criminal justice:</a:t>
-            </a:r>
-            <a:br>
-              <a:rPr lang="en-US" dirty="0"/>
-            </a:br>
-            <a:r>
-              <a:rPr lang="en-US" dirty="0"/>
-              <a:t> - </a:t>
-            </a:r>
-            <a:r>
-              <a:rPr lang="en-US" dirty="0">
-                <a:hlinkClick r:id="rId4"/>
-              </a:rPr>
-              <a:t>https://www.youtube.com/watch?v=Gi4YeRqfb24</a:t>
-            </a:r>
-            <a:r>
-              <a:rPr lang="en-US" dirty="0"/>
-              <a:t> </a:t>
-            </a:r>
-            <a:br>
-              <a:rPr lang="en-US" dirty="0"/>
-            </a:br>
-            <a:br>
-              <a:rPr lang="en-US" dirty="0"/>
-            </a:br>
-            <a:r>
-              <a:rPr lang="en-US" dirty="0"/>
-              <a:t>Target Leakage:</a:t>
-            </a:r>
-            <a:br>
-              <a:rPr lang="en-US" dirty="0"/>
-            </a:br>
-            <a:r>
-              <a:rPr lang="en-US" dirty="0"/>
-              <a:t> - </a:t>
-            </a:r>
-            <a:r>
-              <a:rPr lang="en-US" dirty="0">
-                <a:hlinkClick r:id="rId5"/>
-              </a:rPr>
-              <a:t>https://www.youtube.com/watch?v=y8qaI5mpJeA</a:t>
-            </a:r>
-            <a:r>
-              <a:rPr lang="en-US" dirty="0"/>
-              <a:t> </a:t>
-            </a:r>
           </a:p>
         </p:txBody>
       </p:sp>
       <p:pic>
         <p:nvPicPr>
-          <p:cNvPr id="6" name="Picture 5">
+          <p:cNvPr id="2050" name="Picture 2" descr="Hyperparameter Optimization in Gradient Boosting Packages with Bayesian  Optimization | by Osman Mamun | Towards Data Science">
             <a:extLst>
               <a:ext uri="{FF2B5EF4-FFF2-40B4-BE49-F238E27FC236}">
-                <a16:creationId xmlns:a16="http://schemas.microsoft.com/office/drawing/2014/main" id="{EA27DDEE-0422-6E4F-AC95-3AFA579C3DB8}"/>
+                <a16:creationId xmlns:a16="http://schemas.microsoft.com/office/drawing/2014/main" id="{EF78F114-FFE9-BC45-8BB7-ED043E81B013}"/>
               </a:ext>
             </a:extLst>
           </p:cNvPr>
           <p:cNvPicPr>
-            <a:picLocks noChangeAspect="1"/>
-          </p:cNvPicPr>
-          <p:nvPr/>
-        </p:nvPicPr>
-        <p:blipFill>
-          <a:blip r:embed="rId6" cstate="email">
-            <a:extLst>
-              <a:ext uri="{28A0092B-C50C-407E-A947-70E740481C1C}">
-                <a14:useLocalDpi xmlns:a14="http://schemas.microsoft.com/office/drawing/2010/main"/>
-              </a:ext>
-            </a:extLst>
-          </a:blip>
-          <a:stretch>
-            <a:fillRect/>
-          </a:stretch>
-        </p:blipFill>
-        <p:spPr>
-          <a:xfrm>
-            <a:off x="6617056" y="225286"/>
-            <a:ext cx="5429170" cy="3419062"/>
-          </a:xfrm>
-          <a:prstGeom prst="rect">
-            <a:avLst/>
-          </a:prstGeom>
-        </p:spPr>
-      </p:pic>
-    </p:spTree>
-    <p:extLst>
-      <p:ext uri="{BB962C8B-B14F-4D97-AF65-F5344CB8AC3E}">
-        <p14:creationId xmlns:p14="http://schemas.microsoft.com/office/powerpoint/2010/main" val="3774625219"/>
-      </p:ext>
-    </p:extLst>
-  </p:cSld>
-  <p:clrMapOvr>
-    <a:masterClrMapping/>
-  </p:clrMapOvr>
-</p:sld>
-</file>
-
-<file path=ppt/slides/slide8.xml><?xml version="1.0" encoding="utf-8"?>
-<p:sld xmlns:a="http://schemas.openxmlformats.org/drawingml/2006/main" xmlns:r="http://schemas.openxmlformats.org/officeDocument/2006/relationships" xmlns:p="http://schemas.openxmlformats.org/presentationml/2006/main">
-  <p:cSld>
-    <p:spTree>
-      <p:nvGrpSpPr>
-        <p:cNvPr id="1" name=""/>
-        <p:cNvGrpSpPr/>
-        <p:nvPr/>
-      </p:nvGrpSpPr>
-      <p:grpSpPr>
-        <a:xfrm>
-          <a:off x="0" y="0"/>
-          <a:ext cx="0" cy="0"/>
-          <a:chOff x="0" y="0"/>
-          <a:chExt cx="0" cy="0"/>
-        </a:xfrm>
-      </p:grpSpPr>
-      <p:sp>
-        <p:nvSpPr>
-          <p:cNvPr id="4" name="TextBox 3">
-            <a:extLst>
-              <a:ext uri="{FF2B5EF4-FFF2-40B4-BE49-F238E27FC236}">
-                <a16:creationId xmlns:a16="http://schemas.microsoft.com/office/drawing/2014/main" id="{8A0212EB-D5F5-7C42-9867-3F4106A76AC3}"/>
-              </a:ext>
-            </a:extLst>
-          </p:cNvPr>
-          <p:cNvSpPr txBox="1"/>
-          <p:nvPr/>
-        </p:nvSpPr>
-        <p:spPr>
-          <a:xfrm>
-            <a:off x="0" y="37572"/>
-            <a:ext cx="4572000" cy="523220"/>
-          </a:xfrm>
-          <a:prstGeom prst="rect">
-            <a:avLst/>
-          </a:prstGeom>
-          <a:noFill/>
-        </p:spPr>
-        <p:txBody>
-          <a:bodyPr wrap="square" rtlCol="0">
-            <a:spAutoFit/>
-          </a:bodyPr>
-          <a:lstStyle/>
-          <a:p>
-            <a:r>
-              <a:rPr lang="en-US" sz="2800" b="1" dirty="0"/>
-              <a:t>Bayesian vs Frequentist</a:t>
-            </a:r>
-          </a:p>
-        </p:txBody>
-      </p:sp>
-      <p:sp>
-        <p:nvSpPr>
-          <p:cNvPr id="11" name="TextBox 10">
-            <a:extLst>
-              <a:ext uri="{FF2B5EF4-FFF2-40B4-BE49-F238E27FC236}">
-                <a16:creationId xmlns:a16="http://schemas.microsoft.com/office/drawing/2014/main" id="{2A85AADB-CA8B-934D-84A1-D6DA208D498F}"/>
-              </a:ext>
-            </a:extLst>
-          </p:cNvPr>
-          <p:cNvSpPr txBox="1"/>
-          <p:nvPr/>
-        </p:nvSpPr>
-        <p:spPr>
-          <a:xfrm>
-            <a:off x="0" y="645511"/>
-            <a:ext cx="5636525" cy="523220"/>
-          </a:xfrm>
-          <a:prstGeom prst="rect">
-            <a:avLst/>
-          </a:prstGeom>
-          <a:noFill/>
-        </p:spPr>
-        <p:txBody>
-          <a:bodyPr wrap="square" rtlCol="0">
-            <a:spAutoFit/>
-          </a:bodyPr>
-          <a:lstStyle/>
-          <a:p>
-            <a:r>
-              <a:rPr lang="en-US" dirty="0"/>
-              <a:t>Jake </a:t>
-            </a:r>
-            <a:r>
-              <a:rPr lang="en-US" dirty="0" err="1"/>
-              <a:t>VanderPlas</a:t>
-            </a:r>
-            <a:r>
-              <a:rPr lang="en-US" dirty="0"/>
-              <a:t> (26 min lecture) </a:t>
-            </a:r>
-          </a:p>
-          <a:p>
-            <a:r>
-              <a:rPr lang="en-US" dirty="0"/>
-              <a:t>  - </a:t>
-            </a:r>
-            <a:r>
-              <a:rPr lang="en-US" dirty="0">
-                <a:hlinkClick r:id="rId2"/>
-              </a:rPr>
-              <a:t>https://www.youtube.com/watch?v=KhAUfqhLakw</a:t>
-            </a:r>
-            <a:endParaRPr lang="en-US" dirty="0"/>
-          </a:p>
-        </p:txBody>
-      </p:sp>
-      <p:pic>
-        <p:nvPicPr>
-          <p:cNvPr id="12" name="Picture 11">
-            <a:extLst>
-              <a:ext uri="{FF2B5EF4-FFF2-40B4-BE49-F238E27FC236}">
-                <a16:creationId xmlns:a16="http://schemas.microsoft.com/office/drawing/2014/main" id="{7BC1EEDA-D36B-3745-8521-9723E046CF62}"/>
-              </a:ext>
-            </a:extLst>
-          </p:cNvPr>
-          <p:cNvPicPr>
-            <a:picLocks noChangeAspect="1"/>
+            <a:picLocks noChangeAspect="1" noChangeArrowheads="1"/>
           </p:cNvPicPr>
           <p:nvPr/>
         </p:nvPicPr>
@@ -22394,98 +25555,37 @@
               </a:ext>
             </a:extLst>
           </a:blip>
+          <a:srcRect/>
           <a:stretch>
             <a:fillRect/>
           </a:stretch>
         </p:blipFill>
-        <p:spPr>
+        <p:spPr bwMode="auto">
           <a:xfrm>
-            <a:off x="7958110" y="37572"/>
-            <a:ext cx="3942737" cy="2854280"/>
+            <a:off x="6463862" y="1714500"/>
+            <a:ext cx="5648325" cy="3429000"/>
           </a:xfrm>
           <a:prstGeom prst="rect">
             <a:avLst/>
           </a:prstGeom>
-        </p:spPr>
-      </p:pic>
-      <p:pic>
-        <p:nvPicPr>
-          <p:cNvPr id="13" name="Picture 12">
-            <a:extLst>
-              <a:ext uri="{FF2B5EF4-FFF2-40B4-BE49-F238E27FC236}">
-                <a16:creationId xmlns:a16="http://schemas.microsoft.com/office/drawing/2014/main" id="{756ED8DC-2BE1-094A-8A81-44CA1481AF23}"/>
-              </a:ext>
-            </a:extLst>
-          </p:cNvPr>
-          <p:cNvPicPr>
-            <a:picLocks noChangeAspect="1"/>
-          </p:cNvPicPr>
-          <p:nvPr/>
-        </p:nvPicPr>
-        <p:blipFill>
-          <a:blip r:embed="rId4" cstate="email">
-            <a:extLst>
-              <a:ext uri="{28A0092B-C50C-407E-A947-70E740481C1C}">
-                <a14:useLocalDpi xmlns:a14="http://schemas.microsoft.com/office/drawing/2010/main"/>
-              </a:ext>
-            </a:extLst>
-          </a:blip>
-          <a:stretch>
-            <a:fillRect/>
-          </a:stretch>
-        </p:blipFill>
-        <p:spPr>
-          <a:xfrm>
-            <a:off x="105952" y="3131170"/>
-            <a:ext cx="4872900" cy="3624471"/>
-          </a:xfrm>
-          <a:prstGeom prst="rect">
-            <a:avLst/>
-          </a:prstGeom>
-        </p:spPr>
-      </p:pic>
-      <p:pic>
-        <p:nvPicPr>
-          <p:cNvPr id="14" name="Picture 13">
-            <a:extLst>
-              <a:ext uri="{FF2B5EF4-FFF2-40B4-BE49-F238E27FC236}">
-                <a16:creationId xmlns:a16="http://schemas.microsoft.com/office/drawing/2014/main" id="{6CFCE086-5AD0-8344-AE93-F843BE43AD52}"/>
-              </a:ext>
-            </a:extLst>
-          </p:cNvPr>
-          <p:cNvPicPr>
-            <a:picLocks noChangeAspect="1"/>
-          </p:cNvPicPr>
-          <p:nvPr/>
-        </p:nvPicPr>
-        <p:blipFill>
-          <a:blip r:embed="rId5" cstate="email">
-            <a:extLst>
-              <a:ext uri="{28A0092B-C50C-407E-A947-70E740481C1C}">
-                <a14:useLocalDpi xmlns:a14="http://schemas.microsoft.com/office/drawing/2010/main"/>
-              </a:ext>
-            </a:extLst>
-          </a:blip>
-          <a:stretch>
-            <a:fillRect/>
-          </a:stretch>
-        </p:blipFill>
-        <p:spPr>
-          <a:xfrm>
-            <a:off x="5771810" y="3131171"/>
-            <a:ext cx="4723317" cy="3624470"/>
-          </a:xfrm>
-          <a:prstGeom prst="rect">
-            <a:avLst/>
-          </a:prstGeom>
+          <a:noFill/>
+          <a:extLst>
+            <a:ext uri="{909E8E84-426E-40DD-AFC4-6F175D3DCCD1}">
+              <a14:hiddenFill xmlns:a14="http://schemas.microsoft.com/office/drawing/2010/main">
+                <a:solidFill>
+                  <a:srgbClr val="FFFFFF"/>
+                </a:solidFill>
+              </a14:hiddenFill>
+            </a:ext>
+          </a:extLst>
         </p:spPr>
       </p:pic>
       <p:sp>
         <p:nvSpPr>
-          <p:cNvPr id="2" name="TextBox 1">
+          <p:cNvPr id="10" name="Google Shape;113;p14">
             <a:extLst>
               <a:ext uri="{FF2B5EF4-FFF2-40B4-BE49-F238E27FC236}">
-                <a16:creationId xmlns:a16="http://schemas.microsoft.com/office/drawing/2014/main" id="{1B7E5E53-FD25-1743-9C2C-515C3CCE6CCD}"/>
+                <a16:creationId xmlns:a16="http://schemas.microsoft.com/office/drawing/2014/main" id="{FC61AB3C-FF8E-7841-94D9-DEA2A67A3658}"/>
               </a:ext>
             </a:extLst>
           </p:cNvPr>
@@ -22494,127 +25594,322 @@
         </p:nvSpPr>
         <p:spPr>
           <a:xfrm>
-            <a:off x="6360881" y="200276"/>
-            <a:ext cx="1338363" cy="523220"/>
+            <a:off x="79812" y="677917"/>
+            <a:ext cx="6016187" cy="6053317"/>
           </a:xfrm>
           <a:prstGeom prst="rect">
             <a:avLst/>
           </a:prstGeom>
           <a:noFill/>
+          <a:ln>
+            <a:noFill/>
+          </a:ln>
         </p:spPr>
         <p:txBody>
-          <a:bodyPr wrap="square" rtlCol="0">
-            <a:spAutoFit/>
+          <a:bodyPr spcFirstLastPara="1" wrap="square" lIns="91425" tIns="45700" rIns="91425" bIns="45700" anchor="t" anchorCtr="0">
+            <a:noAutofit/>
           </a:bodyPr>
           <a:lstStyle/>
           <a:p>
+            <a:pPr lvl="0"/>
             <a:r>
               <a:rPr lang="en-US" b="1" dirty="0">
                 <a:solidFill>
                   <a:srgbClr val="FF0000"/>
                 </a:solidFill>
+                <a:latin typeface="Calibri"/>
+                <a:ea typeface="Calibri"/>
+                <a:cs typeface="Calibri"/>
+                <a:sym typeface="Calibri"/>
+              </a:rPr>
+              <a:t>Bayesian Optimization</a:t>
+            </a:r>
+            <a:r>
+              <a:rPr lang="en-US" dirty="0">
+                <a:solidFill>
+                  <a:schemeClr val="dk1"/>
+                </a:solidFill>
+                <a:latin typeface="Calibri"/>
+                <a:ea typeface="Calibri"/>
+                <a:cs typeface="Calibri"/>
+                <a:sym typeface="Calibri"/>
+              </a:rPr>
+              <a:t> is a sequential optimization strategy. </a:t>
+            </a:r>
+          </a:p>
+          <a:p>
+            <a:pPr marL="0" marR="0" lvl="0" indent="0" algn="l" rtl="0">
+              <a:spcBef>
+                <a:spcPts val="0"/>
+              </a:spcBef>
+              <a:spcAft>
+                <a:spcPts val="0"/>
+              </a:spcAft>
+              <a:buNone/>
+            </a:pPr>
+            <a:r>
+              <a:rPr lang="en-US" dirty="0">
+                <a:solidFill>
+                  <a:schemeClr val="dk1"/>
+                </a:solidFill>
+                <a:latin typeface="Calibri"/>
+                <a:ea typeface="Calibri"/>
+                <a:cs typeface="Calibri"/>
+                <a:sym typeface="Calibri"/>
+              </a:rPr>
+              <a:t>Optimizing a black-box system without calculatin</a:t>
+            </a:r>
+            <a:r>
+              <a:rPr lang="en-US" dirty="0">
+                <a:solidFill>
+                  <a:schemeClr val="dk1"/>
+                </a:solidFill>
+                <a:latin typeface="Calibri"/>
+                <a:cs typeface="Calibri"/>
+                <a:sym typeface="Calibri"/>
+              </a:rPr>
+              <a:t>g derivatives.</a:t>
+            </a:r>
+          </a:p>
+          <a:p>
+            <a:pPr marL="0" marR="0" lvl="0" indent="0" algn="l" rtl="0">
+              <a:spcBef>
+                <a:spcPts val="0"/>
+              </a:spcBef>
+              <a:spcAft>
+                <a:spcPts val="0"/>
+              </a:spcAft>
+              <a:buNone/>
+            </a:pPr>
+            <a:endParaRPr lang="en-US" dirty="0">
+              <a:solidFill>
+                <a:schemeClr val="dk1"/>
+              </a:solidFill>
+              <a:latin typeface="Calibri"/>
+              <a:cs typeface="Calibri"/>
+              <a:sym typeface="Calibri"/>
+            </a:endParaRPr>
+          </a:p>
+          <a:p>
+            <a:pPr lvl="0"/>
+            <a:r>
+              <a:rPr lang="en-US" b="1" dirty="0">
+                <a:solidFill>
+                  <a:srgbClr val="FF0000"/>
+                </a:solidFill>
+                <a:latin typeface="Calibri"/>
+                <a:ea typeface="Calibri"/>
+                <a:cs typeface="Calibri"/>
+                <a:sym typeface="Calibri"/>
+              </a:rPr>
+              <a:t>Bayesian Optimization</a:t>
+            </a:r>
+            <a:r>
+              <a:rPr lang="en-US" dirty="0">
+                <a:solidFill>
+                  <a:schemeClr val="dk1"/>
+                </a:solidFill>
+                <a:latin typeface="Calibri"/>
+                <a:cs typeface="Calibri"/>
+                <a:sym typeface="Calibri"/>
+              </a:rPr>
+              <a:t> works by constructing a posterior distribution of functions (gaussian process) that best describes the function you want to optimize. As the number of observations grows, the posterior distribution improves, and the algorithm becomes more certain of which regions in parameter space are worth exploring and which are not.</a:t>
+            </a:r>
+          </a:p>
+          <a:p>
+            <a:pPr lvl="0"/>
+            <a:endParaRPr lang="en-US" dirty="0">
+              <a:solidFill>
+                <a:schemeClr val="dk1"/>
+              </a:solidFill>
+              <a:latin typeface="Calibri"/>
+              <a:cs typeface="Calibri"/>
+              <a:sym typeface="Calibri"/>
+            </a:endParaRPr>
+          </a:p>
+          <a:p>
+            <a:pPr lvl="0"/>
+            <a:r>
+              <a:rPr lang="en-US" dirty="0">
+                <a:solidFill>
+                  <a:schemeClr val="dk1"/>
+                </a:solidFill>
+                <a:latin typeface="Calibri"/>
+                <a:cs typeface="Calibri"/>
+                <a:sym typeface="Calibri"/>
+              </a:rPr>
+              <a:t>As you iterate over and over, the algorithm balances its needs of exploration and exploitation taking into account what it knows about the target function. At each step a Gaussian Process is fitted to the known samples (points previously explored), and the posterior distribution, combined with a exploration strategy (such as UCB (Upper Confidence Bound), or EI (Expected Improvement)), are used to determine the next point that should be explored</a:t>
+            </a:r>
+          </a:p>
+          <a:p>
+            <a:pPr lvl="0"/>
+            <a:endParaRPr lang="en-US" dirty="0">
+              <a:solidFill>
+                <a:schemeClr val="dk1"/>
+              </a:solidFill>
+              <a:latin typeface="Calibri"/>
+              <a:cs typeface="Calibri"/>
+              <a:sym typeface="Calibri"/>
+            </a:endParaRPr>
+          </a:p>
+          <a:p>
+            <a:pPr lvl="0"/>
+            <a:r>
+              <a:rPr lang="en-US" dirty="0">
+                <a:solidFill>
+                  <a:schemeClr val="dk1"/>
+                </a:solidFill>
+                <a:latin typeface="Calibri"/>
+                <a:cs typeface="Calibri"/>
+                <a:sym typeface="Calibri"/>
+              </a:rPr>
+              <a:t>This process is designed to minimize the number of steps required to find a combination of parameters that are close to the optimal combination.</a:t>
+            </a:r>
+          </a:p>
+          <a:p>
+            <a:pPr marL="0" marR="0" lvl="0" indent="0" algn="l" rtl="0">
+              <a:spcBef>
+                <a:spcPts val="0"/>
+              </a:spcBef>
+              <a:spcAft>
+                <a:spcPts val="0"/>
+              </a:spcAft>
+              <a:buNone/>
+            </a:pPr>
+            <a:endParaRPr lang="en-US" dirty="0">
+              <a:solidFill>
+                <a:schemeClr val="dk1"/>
+              </a:solidFill>
+              <a:latin typeface="Calibri"/>
+              <a:cs typeface="Calibri"/>
+              <a:sym typeface="Calibri"/>
+            </a:endParaRPr>
+          </a:p>
+          <a:p>
+            <a:pPr lvl="0"/>
+            <a:r>
+              <a:rPr lang="en-US" b="1" dirty="0">
+                <a:solidFill>
+                  <a:srgbClr val="FF0000"/>
+                </a:solidFill>
+                <a:latin typeface="Calibri"/>
+                <a:ea typeface="Calibri"/>
+                <a:cs typeface="Calibri"/>
+                <a:sym typeface="Calibri"/>
+              </a:rPr>
+              <a:t>Bayesian Optimization</a:t>
+            </a:r>
+            <a:r>
+              <a:rPr lang="en-US" dirty="0">
+                <a:solidFill>
+                  <a:schemeClr val="dk1"/>
+                </a:solidFill>
+                <a:latin typeface="Calibri"/>
+                <a:cs typeface="Calibri"/>
+              </a:rPr>
+              <a:t> is typically used to find  optimal hyperparameters for Machine Learning models (it is better than grid search or random search).</a:t>
+            </a:r>
+          </a:p>
+          <a:p>
+            <a:pPr lvl="0"/>
+            <a:endParaRPr lang="en-US" dirty="0">
+              <a:solidFill>
+                <a:schemeClr val="dk1"/>
+              </a:solidFill>
+              <a:latin typeface="Calibri"/>
+              <a:cs typeface="Calibri"/>
+            </a:endParaRPr>
+          </a:p>
+          <a:p>
+            <a:pPr lvl="0"/>
+            <a:r>
+              <a:rPr lang="en-US" dirty="0">
+                <a:solidFill>
+                  <a:schemeClr val="dk1"/>
+                </a:solidFill>
+                <a:latin typeface="Calibri"/>
+                <a:cs typeface="Calibri"/>
               </a:rPr>
               <a:t>Example:</a:t>
             </a:r>
           </a:p>
           <a:p>
-            <a:r>
-              <a:rPr lang="en-US" b="1" dirty="0">
-                <a:solidFill>
-                  <a:srgbClr val="FF0000"/>
-                </a:solidFill>
+            <a:pPr marL="285750" lvl="0" indent="-285750">
+              <a:buFont typeface="Arial" panose="020B0604020202020204" pitchFamily="34" charset="0"/>
+              <a:buChar char="•"/>
+            </a:pPr>
+            <a:r>
+              <a:rPr lang="en-US" dirty="0">
+                <a:solidFill>
+                  <a:schemeClr val="dk1"/>
+                </a:solidFill>
+                <a:latin typeface="Calibri"/>
+                <a:cs typeface="Calibri"/>
+                <a:hlinkClick r:id="rId4"/>
               </a:rPr>
-              <a:t>estimating </a:t>
-            </a:r>
-            <a:r>
-              <a:rPr lang="el-GR" b="1" dirty="0">
-                <a:solidFill>
-                  <a:srgbClr val="FF0000"/>
-                </a:solidFill>
+              <a:t>https://towardsdatascience.com/hyperparameter-optimization-in-gradient-boosting-packages-with-bayesian-optimization-aaf1b27e7b90</a:t>
+            </a:r>
+            <a:r>
+              <a:rPr lang="en-US" dirty="0">
+                <a:solidFill>
+                  <a:schemeClr val="dk1"/>
+                </a:solidFill>
+                <a:latin typeface="Calibri"/>
+                <a:cs typeface="Calibri"/>
               </a:rPr>
-              <a:t>θ</a:t>
-            </a:r>
-            <a:r>
-              <a:rPr lang="en-US" b="1" dirty="0">
-                <a:solidFill>
-                  <a:srgbClr val="FF0000"/>
-                </a:solidFill>
+              <a:t> </a:t>
+            </a:r>
+          </a:p>
+          <a:p>
+            <a:pPr lvl="0"/>
+            <a:endParaRPr lang="en-US" dirty="0">
+              <a:solidFill>
+                <a:schemeClr val="dk1"/>
+              </a:solidFill>
+              <a:latin typeface="Calibri"/>
+              <a:cs typeface="Calibri"/>
+            </a:endParaRPr>
+          </a:p>
+          <a:p>
+            <a:pPr marL="285750" lvl="0" indent="-285750">
+              <a:buFont typeface="Arial" panose="020B0604020202020204" pitchFamily="34" charset="0"/>
+              <a:buChar char="•"/>
+            </a:pPr>
+            <a:r>
+              <a:rPr lang="en-US" dirty="0">
+                <a:solidFill>
+                  <a:schemeClr val="dk1"/>
+                </a:solidFill>
+                <a:latin typeface="Calibri"/>
+                <a:cs typeface="Calibri"/>
+                <a:hlinkClick r:id="rId5"/>
               </a:rPr>
-              <a:t>  </a:t>
-            </a:r>
-          </a:p>
-        </p:txBody>
-      </p:sp>
-      <p:sp>
-        <p:nvSpPr>
-          <p:cNvPr id="3" name="TextBox 2">
-            <a:extLst>
-              <a:ext uri="{FF2B5EF4-FFF2-40B4-BE49-F238E27FC236}">
-                <a16:creationId xmlns:a16="http://schemas.microsoft.com/office/drawing/2014/main" id="{650AEA09-D359-3F4C-ADEB-940C7824EFEA}"/>
-              </a:ext>
-            </a:extLst>
-          </p:cNvPr>
-          <p:cNvSpPr txBox="1"/>
-          <p:nvPr/>
-        </p:nvSpPr>
-        <p:spPr>
-          <a:xfrm>
-            <a:off x="0" y="1291414"/>
-            <a:ext cx="7699244" cy="1600438"/>
-          </a:xfrm>
-          <a:prstGeom prst="rect">
-            <a:avLst/>
-          </a:prstGeom>
-          <a:noFill/>
-        </p:spPr>
-        <p:txBody>
-          <a:bodyPr wrap="square" rtlCol="0">
-            <a:spAutoFit/>
-          </a:bodyPr>
-          <a:lstStyle/>
-          <a:p>
-            <a:r>
-              <a:rPr lang="en-US" dirty="0"/>
-              <a:t>Example - truncated exponential.</a:t>
-            </a:r>
-            <a:br>
-              <a:rPr lang="en-US" dirty="0"/>
-            </a:br>
-            <a:r>
-              <a:rPr lang="en-US" dirty="0"/>
-              <a:t>You observe times of failures of something.</a:t>
-            </a:r>
-          </a:p>
-          <a:p>
-            <a:r>
-              <a:rPr lang="en-US" dirty="0"/>
-              <a:t>The time should be less than 10 min, but for the first 10 min there are no failures because the "device" is protected. You can only measure after 10 min. </a:t>
-            </a:r>
-          </a:p>
-          <a:p>
-            <a:r>
-              <a:rPr lang="en-US" dirty="0"/>
-              <a:t>Frequentist approach just "averages" the observed values. </a:t>
-            </a:r>
-          </a:p>
-          <a:p>
-            <a:r>
-              <a:rPr lang="en-US" dirty="0"/>
-              <a:t>As all of them are &gt;10, it gives interval 10.2 - 12.2 min</a:t>
-            </a:r>
-          </a:p>
-          <a:p>
-            <a:r>
-              <a:rPr lang="en-US" dirty="0"/>
-              <a:t>Bayesian approach with subjective flat prior gives interval 9.0 - 10.0 min, which is correct.</a:t>
-            </a:r>
+              <a:t>https://github.com/fmfn/BayesianOptimization</a:t>
+            </a:r>
+            <a:r>
+              <a:rPr lang="en-US" dirty="0">
+                <a:solidFill>
+                  <a:schemeClr val="dk1"/>
+                </a:solidFill>
+                <a:latin typeface="Calibri"/>
+                <a:cs typeface="Calibri"/>
+              </a:rPr>
+              <a:t> </a:t>
+            </a:r>
+            <a:endParaRPr dirty="0">
+              <a:solidFill>
+                <a:schemeClr val="dk1"/>
+              </a:solidFill>
+              <a:latin typeface="Calibri"/>
+              <a:cs typeface="Calibri"/>
+            </a:endParaRPr>
           </a:p>
         </p:txBody>
       </p:sp>
     </p:spTree>
     <p:extLst>
       <p:ext uri="{BB962C8B-B14F-4D97-AF65-F5344CB8AC3E}">
-        <p14:creationId xmlns:p14="http://schemas.microsoft.com/office/powerpoint/2010/main" val="272889797"/>
+        <p14:creationId xmlns:p14="http://schemas.microsoft.com/office/powerpoint/2010/main" val="2214897208"/>
       </p:ext>
     </p:extLst>
   </p:cSld>

--- a/Bayes_Bayesian.pptx
+++ b/Bayes_Bayesian.pptx
@@ -15927,8 +15927,8 @@
           <a:chExt cx="0" cy="0"/>
         </a:xfrm>
       </p:grpSpPr>
-      <mc:AlternateContent xmlns:mc="http://schemas.openxmlformats.org/markup-compatibility/2006">
-        <mc:Choice xmlns:a14="http://schemas.microsoft.com/office/drawing/2010/main" Requires="a14">
+      <mc:AlternateContent xmlns:mc="http://schemas.openxmlformats.org/markup-compatibility/2006" xmlns:a14="http://schemas.microsoft.com/office/drawing/2010/main">
+        <mc:Choice Requires="a14">
           <p:sp>
             <p:nvSpPr>
               <p:cNvPr id="88" name="Google Shape;88;p13"/>
@@ -16375,7 +16375,7 @@
             </p:txBody>
           </p:sp>
         </mc:Choice>
-        <mc:Fallback>
+        <mc:Fallback xmlns="">
           <p:sp>
             <p:nvSpPr>
               <p:cNvPr id="88" name="Google Shape;88;p13"/>
@@ -16774,7 +16774,7 @@
         </p:nvSpPr>
         <p:spPr>
           <a:xfrm>
-            <a:off x="10587787" y="2213811"/>
+            <a:off x="10130582" y="2213811"/>
             <a:ext cx="1588170" cy="646331"/>
           </a:xfrm>
           <a:prstGeom prst="rect">
@@ -16801,7 +16801,7 @@
               <a:buNone/>
             </a:pPr>
             <a:r>
-              <a:rPr lang="en-US" sz="1800">
+              <a:rPr lang="en-US" sz="1800" dirty="0">
                 <a:solidFill>
                   <a:schemeClr val="dk1"/>
                 </a:solidFill>
@@ -16813,7 +16813,7 @@
               <a:t>Thomas Bayes </a:t>
             </a:r>
             <a:br>
-              <a:rPr lang="en-US" sz="1800">
+              <a:rPr lang="en-US" sz="1800" dirty="0">
                 <a:solidFill>
                   <a:schemeClr val="dk1"/>
                 </a:solidFill>
@@ -16824,7 +16824,7 @@
               </a:rPr>
             </a:br>
             <a:r>
-              <a:rPr lang="en-US" sz="1800">
+              <a:rPr lang="en-US" sz="1800" dirty="0">
                 <a:solidFill>
                   <a:schemeClr val="dk1"/>
                 </a:solidFill>
@@ -16835,7 +16835,7 @@
               </a:rPr>
               <a:t>(1701–1761)</a:t>
             </a:r>
-            <a:endParaRPr sz="1800">
+            <a:endParaRPr sz="1800" dirty="0">
               <a:solidFill>
                 <a:schemeClr val="dk1"/>
               </a:solidFill>
@@ -16867,7 +16867,7 @@
         </p:blipFill>
         <p:spPr>
           <a:xfrm>
-            <a:off x="10351783" y="0"/>
+            <a:off x="10005418" y="0"/>
             <a:ext cx="1818487" cy="2213811"/>
           </a:xfrm>
           <a:prstGeom prst="rect">
@@ -17284,7 +17284,7 @@
         </p:blipFill>
         <p:spPr>
           <a:xfrm>
-            <a:off x="6903091" y="1553411"/>
+            <a:off x="6441793" y="1862689"/>
             <a:ext cx="2946400" cy="660400"/>
           </a:xfrm>
           <a:prstGeom prst="rect">
@@ -17405,6 +17405,42 @@
                 <a:cs typeface="Menlo" panose="020B0609030804020204" pitchFamily="49" charset="0"/>
               </a:rPr>
               <a:t>+-----+--------+------+</a:t>
+            </a:r>
+          </a:p>
+        </p:txBody>
+      </p:sp>
+      <p:sp>
+        <p:nvSpPr>
+          <p:cNvPr id="2" name="TextBox 1">
+            <a:extLst>
+              <a:ext uri="{FF2B5EF4-FFF2-40B4-BE49-F238E27FC236}">
+                <a16:creationId xmlns:a16="http://schemas.microsoft.com/office/drawing/2014/main" id="{08D25109-BDA7-D542-BBD3-673AD585F84A}"/>
+              </a:ext>
+            </a:extLst>
+          </p:cNvPr>
+          <p:cNvSpPr txBox="1"/>
+          <p:nvPr/>
+        </p:nvSpPr>
+        <p:spPr>
+          <a:xfrm>
+            <a:off x="9849491" y="2860142"/>
+            <a:ext cx="2217637" cy="1384995"/>
+          </a:xfrm>
+          <a:prstGeom prst="rect">
+            <a:avLst/>
+          </a:prstGeom>
+          <a:noFill/>
+        </p:spPr>
+        <p:txBody>
+          <a:bodyPr wrap="square" rtlCol="0">
+            <a:spAutoFit/>
+          </a:bodyPr>
+          <a:lstStyle/>
+          <a:p>
+            <a:pPr algn="ctr"/>
+            <a:r>
+              <a:rPr lang="en-US" dirty="0"/>
+              <a:t>Bayes "solution" to a problem of inverse probability, was presented by Richard Price in 1763, two years after Bayes' death.</a:t>
             </a:r>
           </a:p>
         </p:txBody>
@@ -17489,7 +17525,7 @@
         <p:spPr>
           <a:xfrm>
             <a:off x="0" y="778920"/>
-            <a:ext cx="4478215" cy="523220"/>
+            <a:ext cx="7257972" cy="646331"/>
           </a:xfrm>
           <a:prstGeom prst="rect">
             <a:avLst/>
@@ -17512,21 +17548,40 @@
             </a:r>
             <a:r>
               <a:rPr lang="en-US" dirty="0"/>
-              <a:t> (26 min lecture) </a:t>
-            </a:r>
-          </a:p>
-          <a:p>
-            <a:r>
-              <a:rPr lang="en-US" dirty="0"/>
+              <a:t> (26 min lecture – and his blog) </a:t>
+            </a:r>
+          </a:p>
+          <a:p>
+            <a:r>
+              <a:rPr lang="en-US" sz="1100" dirty="0"/>
               <a:t>  - </a:t>
             </a:r>
             <a:r>
-              <a:rPr lang="en-US" dirty="0">
+              <a:rPr lang="en-US" sz="1100" dirty="0">
                 <a:hlinkClick r:id="rId2"/>
               </a:rPr>
               <a:t>https://www.youtube.com/watch?v=KhAUfqhLakw</a:t>
             </a:r>
-            <a:endParaRPr lang="en-US" dirty="0"/>
+            <a:r>
+              <a:rPr lang="en-US" sz="1100" dirty="0"/>
+              <a:t> </a:t>
+            </a:r>
+          </a:p>
+          <a:p>
+            <a:r>
+              <a:rPr lang="en-US" sz="1100" dirty="0"/>
+              <a:t>  - </a:t>
+            </a:r>
+            <a:r>
+              <a:rPr lang="en-US" sz="1100" dirty="0">
+                <a:hlinkClick r:id="rId3"/>
+              </a:rPr>
+              <a:t>http://jakevdp.github.io/blog/2014/06/12/frequentism-and-bayesianism-3-confidence-credibility/</a:t>
+            </a:r>
+            <a:r>
+              <a:rPr lang="en-US" sz="1100" dirty="0"/>
+              <a:t> </a:t>
+            </a:r>
           </a:p>
         </p:txBody>
       </p:sp>
@@ -17545,7 +17600,7 @@
           <p:nvPr/>
         </p:nvPicPr>
         <p:blipFill>
-          <a:blip r:embed="rId3" cstate="email">
+          <a:blip r:embed="rId4" cstate="email">
             <a:extLst>
               <a:ext uri="{28A0092B-C50C-407E-A947-70E740481C1C}">
                 <a14:useLocalDpi xmlns:a14="http://schemas.microsoft.com/office/drawing/2010/main"/>
@@ -17581,7 +17636,7 @@
           <p:nvPr/>
         </p:nvPicPr>
         <p:blipFill>
-          <a:blip r:embed="rId4" cstate="email">
+          <a:blip r:embed="rId5" cstate="email">
             <a:extLst>
               <a:ext uri="{28A0092B-C50C-407E-A947-70E740481C1C}">
                 <a14:useLocalDpi xmlns:a14="http://schemas.microsoft.com/office/drawing/2010/main"/>
@@ -17617,7 +17672,7 @@
           <p:nvPr/>
         </p:nvPicPr>
         <p:blipFill>
-          <a:blip r:embed="rId5" cstate="email">
+          <a:blip r:embed="rId6" cstate="email">
             <a:extLst>
               <a:ext uri="{28A0092B-C50C-407E-A947-70E740481C1C}">
                 <a14:useLocalDpi xmlns:a14="http://schemas.microsoft.com/office/drawing/2010/main"/>
@@ -17724,34 +17779,57 @@
           <a:p>
             <a:r>
               <a:rPr lang="en-US" dirty="0"/>
-              <a:t>The time should be less than 10 min, </a:t>
-            </a:r>
-          </a:p>
-          <a:p>
+              <a:t>For time "</a:t>
+            </a:r>
+            <a:r>
+              <a:rPr lang="el-GR" dirty="0"/>
+              <a:t>θ</a:t>
+            </a:r>
             <a:r>
               <a:rPr lang="en-US" dirty="0"/>
-              <a:t>but for the first 10 min there are no failures because the "device" is protected. </a:t>
-            </a:r>
-          </a:p>
-          <a:p>
+              <a:t>" there were no failures because the "device" is protected. </a:t>
+            </a:r>
+          </a:p>
+          <a:p>
+            <a:r>
+              <a:rPr lang="en-US" dirty="0" err="1"/>
+              <a:t>SUppose</a:t>
+            </a:r>
             <a:r>
               <a:rPr lang="en-US" dirty="0"/>
-              <a:t>You can only measure after 10 min. </a:t>
-            </a:r>
-          </a:p>
-          <a:p>
-            <a:endParaRPr lang="en-US" dirty="0"/>
+              <a:t> you have three times of failure – {10,12,15}</a:t>
+            </a:r>
           </a:p>
           <a:p>
             <a:r>
               <a:rPr lang="en-US" dirty="0"/>
-              <a:t>Frequentist approach just "averages" the observed values. </a:t>
-            </a:r>
-          </a:p>
-          <a:p>
+              <a:t>You need to estimate value of "</a:t>
+            </a:r>
+            <a:r>
+              <a:rPr lang="el-GR" dirty="0"/>
+              <a:t>θ</a:t>
+            </a:r>
             <a:r>
               <a:rPr lang="en-US" dirty="0"/>
-              <a:t>As all of them are &gt;10, it gives interval 10.2 - 12.2 min</a:t>
+              <a:t>".</a:t>
+            </a:r>
+          </a:p>
+          <a:p>
+            <a:r>
+              <a:rPr lang="en-US" dirty="0"/>
+              <a:t>Naturally it should be less than smallest data point, that it &lt; 10.</a:t>
+            </a:r>
+          </a:p>
+          <a:p>
+            <a:r>
+              <a:rPr lang="en-US" dirty="0"/>
+              <a:t>Frequentist approach just "averages" the observed values, </a:t>
+            </a:r>
+          </a:p>
+          <a:p>
+            <a:r>
+              <a:rPr lang="en-US" dirty="0"/>
+              <a:t>and gives range 10.2 - 12.2, which is wrong.</a:t>
             </a:r>
           </a:p>
           <a:p>
@@ -17780,7 +17858,7 @@
           <p:nvPr/>
         </p:nvPicPr>
         <p:blipFill>
-          <a:blip r:embed="rId6" cstate="email">
+          <a:blip r:embed="rId7" cstate="email">
             <a:extLst>
               <a:ext uri="{28A0092B-C50C-407E-A947-70E740481C1C}">
                 <a14:useLocalDpi xmlns:a14="http://schemas.microsoft.com/office/drawing/2010/main"/>
@@ -18182,7 +18260,7 @@
         </p:nvSpPr>
         <p:spPr>
           <a:xfrm>
-            <a:off x="6706366" y="4175048"/>
+            <a:off x="6706366" y="4022648"/>
             <a:ext cx="5250549" cy="2457666"/>
           </a:xfrm>
           <a:prstGeom prst="rect">
@@ -18243,9 +18321,9 @@
               <a:buNone/>
             </a:pPr>
             <a:r>
-              <a:rPr lang="en-US" dirty="0">
-                <a:solidFill>
-                  <a:schemeClr val="dk1"/>
+              <a:rPr lang="en-US" b="1" dirty="0">
+                <a:solidFill>
+                  <a:srgbClr val="00B050"/>
                 </a:solidFill>
                 <a:latin typeface="Calibri" panose="020F0502020204030204" pitchFamily="34" charset="0"/>
                 <a:cs typeface="Calibri" panose="020F0502020204030204" pitchFamily="34" charset="0"/>
@@ -18253,9 +18331,9 @@
               </a:rPr>
               <a:t>Probability measures a proportion of outcomes.</a:t>
             </a:r>
-            <a:endParaRPr dirty="0">
+            <a:endParaRPr b="1" dirty="0">
               <a:solidFill>
-                <a:schemeClr val="dk1"/>
+                <a:srgbClr val="00B050"/>
               </a:solidFill>
               <a:latin typeface="Calibri" panose="020F0502020204030204" pitchFamily="34" charset="0"/>
               <a:cs typeface="Calibri" panose="020F0502020204030204" pitchFamily="34" charset="0"/>
@@ -18281,26 +18359,10 @@
                 <a:cs typeface="Calibri" panose="020F0502020204030204" pitchFamily="34" charset="0"/>
                 <a:sym typeface="Calibri"/>
               </a:rPr>
-              <a:t>P(A) is the proportion of outcomes with A,  P(B) – with B.</a:t>
-            </a:r>
-            <a:endParaRPr dirty="0">
-              <a:solidFill>
-                <a:schemeClr val="dk1"/>
-              </a:solidFill>
-              <a:latin typeface="Calibri" panose="020F0502020204030204" pitchFamily="34" charset="0"/>
-              <a:cs typeface="Calibri" panose="020F0502020204030204" pitchFamily="34" charset="0"/>
-            </a:endParaRPr>
-          </a:p>
-          <a:p>
-            <a:pPr marL="0" marR="0" lvl="0" indent="0" algn="l" rtl="0">
-              <a:spcBef>
-                <a:spcPts val="0"/>
-              </a:spcBef>
-              <a:spcAft>
-                <a:spcPts val="0"/>
-              </a:spcAft>
-              <a:buNone/>
-            </a:pPr>
+              <a:t>P(A) - proportions of outcomes A</a:t>
+            </a:r>
+          </a:p>
+          <a:p>
             <a:r>
               <a:rPr lang="en-US" dirty="0">
                 <a:solidFill>
@@ -18310,16 +18372,8 @@
                 <a:cs typeface="Calibri" panose="020F0502020204030204" pitchFamily="34" charset="0"/>
                 <a:sym typeface="Calibri"/>
               </a:rPr>
-              <a:t>P(B|A) is the proportion of outcomes with property B </a:t>
-            </a:r>
-            <a:endParaRPr dirty="0">
-              <a:solidFill>
-                <a:schemeClr val="dk1"/>
-              </a:solidFill>
-              <a:latin typeface="Calibri" panose="020F0502020204030204" pitchFamily="34" charset="0"/>
-              <a:cs typeface="Calibri" panose="020F0502020204030204" pitchFamily="34" charset="0"/>
-              <a:sym typeface="Calibri"/>
-            </a:endParaRPr>
+              <a:t>P(B) - proportions of outcomes B</a:t>
+            </a:r>
           </a:p>
           <a:p>
             <a:pPr marL="0" marR="0" lvl="0" indent="0" algn="l" rtl="0">
@@ -18340,7 +18394,7 @@
                 <a:cs typeface="Calibri" panose="020F0502020204030204" pitchFamily="34" charset="0"/>
                 <a:sym typeface="Calibri"/>
               </a:rPr>
-              <a:t>out of outcomes with property A.</a:t>
+              <a:t>P(B|A) is the proportion of outcomes B out of outcomes A</a:t>
             </a:r>
           </a:p>
           <a:p>
@@ -18385,9 +18439,9 @@
           <a:p>
             <a:pPr lvl="0"/>
             <a:r>
-              <a:rPr lang="en-US" dirty="0">
-                <a:solidFill>
-                  <a:schemeClr val="dk1"/>
+              <a:rPr lang="en-US" b="1" dirty="0">
+                <a:solidFill>
+                  <a:srgbClr val="00B050"/>
                 </a:solidFill>
                 <a:latin typeface="Calibri" panose="020F0502020204030204" pitchFamily="34" charset="0"/>
                 <a:cs typeface="Calibri" panose="020F0502020204030204" pitchFamily="34" charset="0"/>
@@ -18396,9 +18450,9 @@
               <a:t>Probability measures a degree of belief.</a:t>
             </a:r>
             <a:br>
-              <a:rPr lang="en-US" dirty="0">
-                <a:solidFill>
-                  <a:schemeClr val="dk1"/>
+              <a:rPr lang="en-US" b="1" dirty="0">
+                <a:solidFill>
+                  <a:srgbClr val="00B050"/>
                 </a:solidFill>
                 <a:latin typeface="Calibri" panose="020F0502020204030204" pitchFamily="34" charset="0"/>
                 <a:cs typeface="Calibri" panose="020F0502020204030204" pitchFamily="34" charset="0"/>
@@ -21757,8 +21811,8 @@
           </a:p>
         </p:txBody>
       </p:sp>
-      <mc:AlternateContent xmlns:mc="http://schemas.openxmlformats.org/markup-compatibility/2006">
-        <mc:Choice xmlns:a14="http://schemas.microsoft.com/office/drawing/2010/main" Requires="a14">
+      <mc:AlternateContent xmlns:mc="http://schemas.openxmlformats.org/markup-compatibility/2006" xmlns:a14="http://schemas.microsoft.com/office/drawing/2010/main">
+        <mc:Choice Requires="a14">
           <p:sp>
             <p:nvSpPr>
               <p:cNvPr id="18" name="Google Shape;88;p13">
@@ -22038,7 +22092,7 @@
             </p:txBody>
           </p:sp>
         </mc:Choice>
-        <mc:Fallback>
+        <mc:Fallback xmlns="">
           <p:sp>
             <p:nvSpPr>
               <p:cNvPr id="18" name="Google Shape;88;p13">
@@ -22092,8 +22146,8 @@
           </p:sp>
         </mc:Fallback>
       </mc:AlternateContent>
-      <mc:AlternateContent xmlns:mc="http://schemas.openxmlformats.org/markup-compatibility/2006">
-        <mc:Choice xmlns:a14="http://schemas.microsoft.com/office/drawing/2010/main" Requires="a14">
+      <mc:AlternateContent xmlns:mc="http://schemas.openxmlformats.org/markup-compatibility/2006" xmlns:a14="http://schemas.microsoft.com/office/drawing/2010/main">
+        <mc:Choice Requires="a14">
           <p:sp>
             <p:nvSpPr>
               <p:cNvPr id="19" name="TextBox 18">
@@ -22148,19 +22202,7 @@
                         <a:rPr lang="en-US" b="1" i="1" baseline="-25000" smtClean="0">
                           <a:latin typeface="Cambria Math" panose="02040503050406030204" pitchFamily="18" charset="0"/>
                         </a:rPr>
-                        <m:t> </m:t>
-                      </m:r>
-                      <m:r>
-                        <a:rPr lang="en-US" b="1" i="1" baseline="-25000" smtClean="0">
-                          <a:latin typeface="Cambria Math" panose="02040503050406030204" pitchFamily="18" charset="0"/>
-                        </a:rPr>
-                        <m:t> </m:t>
-                      </m:r>
-                      <m:r>
-                        <a:rPr lang="en-US" b="1" i="1" smtClean="0">
-                          <a:latin typeface="Cambria Math" panose="02040503050406030204" pitchFamily="18" charset="0"/>
-                        </a:rPr>
-                        <m:t>= </m:t>
+                        <m:t>  = </m:t>
                       </m:r>
                       <m:r>
                         <a:rPr lang="en-US" b="1" i="1" smtClean="0">
@@ -22388,7 +22430,7 @@
             </p:txBody>
           </p:sp>
         </mc:Choice>
-        <mc:Fallback>
+        <mc:Fallback xmlns="">
           <p:sp>
             <p:nvSpPr>
               <p:cNvPr id="19" name="TextBox 18">
@@ -22433,8 +22475,8 @@
           </p:sp>
         </mc:Fallback>
       </mc:AlternateContent>
-      <mc:AlternateContent xmlns:mc="http://schemas.openxmlformats.org/markup-compatibility/2006">
-        <mc:Choice xmlns:a14="http://schemas.microsoft.com/office/drawing/2010/main" Requires="a14">
+      <mc:AlternateContent xmlns:mc="http://schemas.openxmlformats.org/markup-compatibility/2006" xmlns:a14="http://schemas.microsoft.com/office/drawing/2010/main">
+        <mc:Choice Requires="a14">
           <p:sp>
             <p:nvSpPr>
               <p:cNvPr id="20" name="TextBox 19">
@@ -22489,25 +22531,7 @@
                         <a:rPr lang="en-US" b="1" i="1" baseline="-25000" smtClean="0">
                           <a:latin typeface="Cambria Math" panose="02040503050406030204" pitchFamily="18" charset="0"/>
                         </a:rPr>
-                        <m:t> </m:t>
-                      </m:r>
-                      <m:r>
-                        <a:rPr lang="en-US" b="1" i="1" smtClean="0">
-                          <a:latin typeface="Cambria Math" panose="02040503050406030204" pitchFamily="18" charset="0"/>
-                        </a:rPr>
-                        <m:t> </m:t>
-                      </m:r>
-                      <m:r>
-                        <a:rPr lang="en-US" b="1" i="1">
-                          <a:latin typeface="Cambria Math" panose="02040503050406030204" pitchFamily="18" charset="0"/>
-                        </a:rPr>
-                        <m:t>= </m:t>
-                      </m:r>
-                      <m:r>
-                        <a:rPr lang="en-US" b="1" i="1" smtClean="0">
-                          <a:latin typeface="Cambria Math" panose="02040503050406030204" pitchFamily="18" charset="0"/>
-                        </a:rPr>
-                        <m:t>   </m:t>
+                        <m:t>  =    </m:t>
                       </m:r>
                       <m:f>
                         <m:fPr>
@@ -22698,7 +22722,7 @@
             </p:txBody>
           </p:sp>
         </mc:Choice>
-        <mc:Fallback>
+        <mc:Fallback xmlns="">
           <p:sp>
             <p:nvSpPr>
               <p:cNvPr id="20" name="TextBox 19">
@@ -22817,8 +22841,8 @@
           <a:chExt cx="0" cy="0"/>
         </a:xfrm>
       </p:grpSpPr>
-      <mc:AlternateContent xmlns:mc="http://schemas.openxmlformats.org/markup-compatibility/2006" xmlns:a14="http://schemas.microsoft.com/office/drawing/2010/main">
-        <mc:Choice Requires="a14">
+      <mc:AlternateContent xmlns:mc="http://schemas.openxmlformats.org/markup-compatibility/2006">
+        <mc:Choice xmlns:a14="http://schemas.microsoft.com/office/drawing/2010/main" Requires="a14">
           <p:sp>
             <p:nvSpPr>
               <p:cNvPr id="5" name="TextBox 4">
@@ -22891,6 +22915,12 @@
                       <m:jc m:val="left"/>
                     </m:oMathParaPr>
                     <m:oMath xmlns:m="http://schemas.openxmlformats.org/officeDocument/2006/math">
+                      <m:r>
+                        <a:rPr lang="en-US" b="1" i="1" smtClean="0">
+                          <a:latin typeface="Cambria Math" panose="02040503050406030204" pitchFamily="18" charset="0"/>
+                        </a:rPr>
+                        <m:t>        </m:t>
+                      </m:r>
                       <m:r>
                         <a:rPr lang="en-US" b="1" i="1">
                           <a:latin typeface="Cambria Math" panose="02040503050406030204" pitchFamily="18" charset="0"/>
@@ -23114,67 +23144,100 @@
                         </m:num>
                         <m:den>
                           <m:r>
-                            <a:rPr lang="en-US" b="1" i="1">
+                            <a:rPr lang="en-US" b="1" i="1" smtClean="0">
+                              <a:solidFill>
+                                <a:srgbClr val="00B050"/>
+                              </a:solidFill>
                               <a:latin typeface="Cambria Math" panose="02040503050406030204" pitchFamily="18" charset="0"/>
                             </a:rPr>
                             <m:t>𝑷</m:t>
                           </m:r>
                           <m:r>
-                            <a:rPr lang="en-US" b="1" i="1">
+                            <a:rPr lang="en-US" b="1" i="1" smtClean="0">
+                              <a:solidFill>
+                                <a:srgbClr val="00B050"/>
+                              </a:solidFill>
                               <a:latin typeface="Cambria Math" panose="02040503050406030204" pitchFamily="18" charset="0"/>
                             </a:rPr>
                             <m:t>(</m:t>
                           </m:r>
                           <m:r>
-                            <a:rPr lang="en-US" b="1" i="1">
+                            <a:rPr lang="en-US" b="1" i="1" smtClean="0">
+                              <a:solidFill>
+                                <a:srgbClr val="00B050"/>
+                              </a:solidFill>
                               <a:latin typeface="Cambria Math" panose="02040503050406030204" pitchFamily="18" charset="0"/>
                             </a:rPr>
                             <m:t>𝒆</m:t>
                           </m:r>
                           <m:r>
-                            <a:rPr lang="en-US" b="1" i="1">
+                            <a:rPr lang="en-US" b="1" i="1" smtClean="0">
+                              <a:solidFill>
+                                <a:srgbClr val="00B050"/>
+                              </a:solidFill>
                               <a:latin typeface="Cambria Math" panose="02040503050406030204" pitchFamily="18" charset="0"/>
                             </a:rPr>
                             <m:t>𝟏</m:t>
                           </m:r>
                           <m:r>
-                            <a:rPr lang="en-US" b="1" i="1">
+                            <a:rPr lang="en-US" b="1" i="1" smtClean="0">
+                              <a:solidFill>
+                                <a:srgbClr val="00B050"/>
+                              </a:solidFill>
                               <a:latin typeface="Cambria Math" panose="02040503050406030204" pitchFamily="18" charset="0"/>
                             </a:rPr>
                             <m:t>,</m:t>
                           </m:r>
                           <m:r>
-                            <a:rPr lang="en-US" b="1" i="1">
+                            <a:rPr lang="en-US" b="1" i="1" smtClean="0">
+                              <a:solidFill>
+                                <a:srgbClr val="00B050"/>
+                              </a:solidFill>
                               <a:latin typeface="Cambria Math" panose="02040503050406030204" pitchFamily="18" charset="0"/>
                             </a:rPr>
                             <m:t>𝒆</m:t>
                           </m:r>
                           <m:r>
-                            <a:rPr lang="en-US" b="1" i="1">
+                            <a:rPr lang="en-US" b="1" i="1" smtClean="0">
+                              <a:solidFill>
+                                <a:srgbClr val="00B050"/>
+                              </a:solidFill>
                               <a:latin typeface="Cambria Math" panose="02040503050406030204" pitchFamily="18" charset="0"/>
                             </a:rPr>
                             <m:t>𝟐</m:t>
                           </m:r>
                           <m:r>
-                            <a:rPr lang="en-US" b="1" i="1">
+                            <a:rPr lang="en-US" b="1" i="1" smtClean="0">
+                              <a:solidFill>
+                                <a:srgbClr val="00B050"/>
+                              </a:solidFill>
                               <a:latin typeface="Cambria Math" panose="02040503050406030204" pitchFamily="18" charset="0"/>
                             </a:rPr>
                             <m:t>,</m:t>
                           </m:r>
                           <m:r>
-                            <a:rPr lang="en-US" b="1" i="1">
+                            <a:rPr lang="en-US" b="1" i="1" smtClean="0">
+                              <a:solidFill>
+                                <a:srgbClr val="00B050"/>
+                              </a:solidFill>
                               <a:latin typeface="Cambria Math" panose="02040503050406030204" pitchFamily="18" charset="0"/>
                             </a:rPr>
                             <m:t>𝒆</m:t>
                           </m:r>
                           <m:r>
-                            <a:rPr lang="en-US" b="1" i="1">
+                            <a:rPr lang="en-US" b="1" i="1" smtClean="0">
+                              <a:solidFill>
+                                <a:srgbClr val="00B050"/>
+                              </a:solidFill>
                               <a:latin typeface="Cambria Math" panose="02040503050406030204" pitchFamily="18" charset="0"/>
                             </a:rPr>
                             <m:t>𝟑</m:t>
                           </m:r>
                           <m:r>
-                            <a:rPr lang="en-US" b="1" i="1">
+                            <a:rPr lang="en-US" b="1" i="1" smtClean="0">
+                              <a:solidFill>
+                                <a:srgbClr val="00B050"/>
+                              </a:solidFill>
                               <a:latin typeface="Cambria Math" panose="02040503050406030204" pitchFamily="18" charset="0"/>
                             </a:rPr>
                             <m:t>)</m:t>
@@ -23373,67 +23436,100 @@
                         </m:num>
                         <m:den>
                           <m:r>
-                            <a:rPr lang="en-US" b="1" i="1">
+                            <a:rPr lang="en-US" b="1" i="1" smtClean="0">
+                              <a:solidFill>
+                                <a:srgbClr val="00B050"/>
+                              </a:solidFill>
                               <a:latin typeface="Cambria Math" panose="02040503050406030204" pitchFamily="18" charset="0"/>
                             </a:rPr>
                             <m:t>𝑷</m:t>
                           </m:r>
                           <m:r>
-                            <a:rPr lang="en-US" b="1" i="1">
+                            <a:rPr lang="en-US" b="1" i="1" smtClean="0">
+                              <a:solidFill>
+                                <a:srgbClr val="00B050"/>
+                              </a:solidFill>
                               <a:latin typeface="Cambria Math" panose="02040503050406030204" pitchFamily="18" charset="0"/>
                             </a:rPr>
                             <m:t>(</m:t>
                           </m:r>
                           <m:r>
-                            <a:rPr lang="en-US" b="1" i="1">
+                            <a:rPr lang="en-US" b="1" i="1" smtClean="0">
+                              <a:solidFill>
+                                <a:srgbClr val="00B050"/>
+                              </a:solidFill>
                               <a:latin typeface="Cambria Math" panose="02040503050406030204" pitchFamily="18" charset="0"/>
                             </a:rPr>
                             <m:t>𝒆</m:t>
                           </m:r>
                           <m:r>
-                            <a:rPr lang="en-US" b="1" i="1">
+                            <a:rPr lang="en-US" b="1" i="1" smtClean="0">
+                              <a:solidFill>
+                                <a:srgbClr val="00B050"/>
+                              </a:solidFill>
                               <a:latin typeface="Cambria Math" panose="02040503050406030204" pitchFamily="18" charset="0"/>
                             </a:rPr>
                             <m:t>𝟏</m:t>
                           </m:r>
                           <m:r>
-                            <a:rPr lang="en-US" b="1" i="1">
+                            <a:rPr lang="en-US" b="1" i="1" smtClean="0">
+                              <a:solidFill>
+                                <a:srgbClr val="00B050"/>
+                              </a:solidFill>
                               <a:latin typeface="Cambria Math" panose="02040503050406030204" pitchFamily="18" charset="0"/>
                             </a:rPr>
                             <m:t>,</m:t>
                           </m:r>
                           <m:r>
-                            <a:rPr lang="en-US" b="1" i="1">
+                            <a:rPr lang="en-US" b="1" i="1" smtClean="0">
+                              <a:solidFill>
+                                <a:srgbClr val="00B050"/>
+                              </a:solidFill>
                               <a:latin typeface="Cambria Math" panose="02040503050406030204" pitchFamily="18" charset="0"/>
                             </a:rPr>
                             <m:t>𝒆</m:t>
                           </m:r>
                           <m:r>
-                            <a:rPr lang="en-US" b="1" i="1">
+                            <a:rPr lang="en-US" b="1" i="1" smtClean="0">
+                              <a:solidFill>
+                                <a:srgbClr val="00B050"/>
+                              </a:solidFill>
                               <a:latin typeface="Cambria Math" panose="02040503050406030204" pitchFamily="18" charset="0"/>
                             </a:rPr>
                             <m:t>𝟐</m:t>
                           </m:r>
                           <m:r>
-                            <a:rPr lang="en-US" b="1" i="1">
+                            <a:rPr lang="en-US" b="1" i="1" smtClean="0">
+                              <a:solidFill>
+                                <a:srgbClr val="00B050"/>
+                              </a:solidFill>
                               <a:latin typeface="Cambria Math" panose="02040503050406030204" pitchFamily="18" charset="0"/>
                             </a:rPr>
                             <m:t>,</m:t>
                           </m:r>
                           <m:r>
-                            <a:rPr lang="en-US" b="1" i="1">
+                            <a:rPr lang="en-US" b="1" i="1" smtClean="0">
+                              <a:solidFill>
+                                <a:srgbClr val="00B050"/>
+                              </a:solidFill>
                               <a:latin typeface="Cambria Math" panose="02040503050406030204" pitchFamily="18" charset="0"/>
                             </a:rPr>
                             <m:t>𝒆</m:t>
                           </m:r>
                           <m:r>
-                            <a:rPr lang="en-US" b="1" i="1">
+                            <a:rPr lang="en-US" b="1" i="1" smtClean="0">
+                              <a:solidFill>
+                                <a:srgbClr val="00B050"/>
+                              </a:solidFill>
                               <a:latin typeface="Cambria Math" panose="02040503050406030204" pitchFamily="18" charset="0"/>
                             </a:rPr>
                             <m:t>𝟑</m:t>
                           </m:r>
                           <m:r>
-                            <a:rPr lang="en-US" b="1" i="1">
+                            <a:rPr lang="en-US" b="1" i="1" smtClean="0">
+                              <a:solidFill>
+                                <a:srgbClr val="00B050"/>
+                              </a:solidFill>
                               <a:latin typeface="Cambria Math" panose="02040503050406030204" pitchFamily="18" charset="0"/>
                             </a:rPr>
                             <m:t>)</m:t>
@@ -23471,6 +23567,12 @@
                       <m:jc m:val="left"/>
                     </m:oMathParaPr>
                     <m:oMath xmlns:m="http://schemas.openxmlformats.org/officeDocument/2006/math">
+                      <m:r>
+                        <a:rPr lang="en-US" b="1" i="1">
+                          <a:latin typeface="Cambria Math" panose="02040503050406030204" pitchFamily="18" charset="0"/>
+                        </a:rPr>
+                        <m:t>        </m:t>
+                      </m:r>
                       <m:r>
                         <a:rPr lang="en-US" b="1" i="1">
                           <a:latin typeface="Cambria Math" panose="02040503050406030204" pitchFamily="18" charset="0"/>
@@ -23748,67 +23850,100 @@
                         </m:num>
                         <m:den>
                           <m:r>
-                            <a:rPr lang="en-US" b="1" i="1">
+                            <a:rPr lang="en-US" b="1" i="1" smtClean="0">
+                              <a:solidFill>
+                                <a:srgbClr val="00B050"/>
+                              </a:solidFill>
                               <a:latin typeface="Cambria Math" panose="02040503050406030204" pitchFamily="18" charset="0"/>
                             </a:rPr>
                             <m:t>𝑷</m:t>
                           </m:r>
                           <m:r>
-                            <a:rPr lang="en-US" b="1" i="1">
+                            <a:rPr lang="en-US" b="1" i="1" smtClean="0">
+                              <a:solidFill>
+                                <a:srgbClr val="00B050"/>
+                              </a:solidFill>
                               <a:latin typeface="Cambria Math" panose="02040503050406030204" pitchFamily="18" charset="0"/>
                             </a:rPr>
                             <m:t>(</m:t>
                           </m:r>
                           <m:r>
-                            <a:rPr lang="en-US" b="1" i="1">
+                            <a:rPr lang="en-US" b="1" i="1" smtClean="0">
+                              <a:solidFill>
+                                <a:srgbClr val="00B050"/>
+                              </a:solidFill>
                               <a:latin typeface="Cambria Math" panose="02040503050406030204" pitchFamily="18" charset="0"/>
                             </a:rPr>
                             <m:t>𝒆</m:t>
                           </m:r>
                           <m:r>
-                            <a:rPr lang="en-US" b="1" i="1">
+                            <a:rPr lang="en-US" b="1" i="1" smtClean="0">
+                              <a:solidFill>
+                                <a:srgbClr val="00B050"/>
+                              </a:solidFill>
                               <a:latin typeface="Cambria Math" panose="02040503050406030204" pitchFamily="18" charset="0"/>
                             </a:rPr>
                             <m:t>𝟏</m:t>
                           </m:r>
                           <m:r>
-                            <a:rPr lang="en-US" b="1" i="1">
+                            <a:rPr lang="en-US" b="1" i="1" smtClean="0">
+                              <a:solidFill>
+                                <a:srgbClr val="00B050"/>
+                              </a:solidFill>
                               <a:latin typeface="Cambria Math" panose="02040503050406030204" pitchFamily="18" charset="0"/>
                             </a:rPr>
                             <m:t>,</m:t>
                           </m:r>
                           <m:r>
-                            <a:rPr lang="en-US" b="1" i="1">
+                            <a:rPr lang="en-US" b="1" i="1" smtClean="0">
+                              <a:solidFill>
+                                <a:srgbClr val="00B050"/>
+                              </a:solidFill>
                               <a:latin typeface="Cambria Math" panose="02040503050406030204" pitchFamily="18" charset="0"/>
                             </a:rPr>
                             <m:t>𝒆</m:t>
                           </m:r>
                           <m:r>
-                            <a:rPr lang="en-US" b="1" i="1">
+                            <a:rPr lang="en-US" b="1" i="1" smtClean="0">
+                              <a:solidFill>
+                                <a:srgbClr val="00B050"/>
+                              </a:solidFill>
                               <a:latin typeface="Cambria Math" panose="02040503050406030204" pitchFamily="18" charset="0"/>
                             </a:rPr>
                             <m:t>𝟐</m:t>
                           </m:r>
                           <m:r>
-                            <a:rPr lang="en-US" b="1" i="1">
+                            <a:rPr lang="en-US" b="1" i="1" smtClean="0">
+                              <a:solidFill>
+                                <a:srgbClr val="00B050"/>
+                              </a:solidFill>
                               <a:latin typeface="Cambria Math" panose="02040503050406030204" pitchFamily="18" charset="0"/>
                             </a:rPr>
                             <m:t>,</m:t>
                           </m:r>
                           <m:r>
-                            <a:rPr lang="en-US" b="1" i="1">
+                            <a:rPr lang="en-US" b="1" i="1" smtClean="0">
+                              <a:solidFill>
+                                <a:srgbClr val="00B050"/>
+                              </a:solidFill>
                               <a:latin typeface="Cambria Math" panose="02040503050406030204" pitchFamily="18" charset="0"/>
                             </a:rPr>
                             <m:t>𝒆</m:t>
                           </m:r>
                           <m:r>
-                            <a:rPr lang="en-US" b="1" i="1">
+                            <a:rPr lang="en-US" b="1" i="1" smtClean="0">
+                              <a:solidFill>
+                                <a:srgbClr val="00B050"/>
+                              </a:solidFill>
                               <a:latin typeface="Cambria Math" panose="02040503050406030204" pitchFamily="18" charset="0"/>
                             </a:rPr>
                             <m:t>𝟑</m:t>
                           </m:r>
                           <m:r>
-                            <a:rPr lang="en-US" b="1" i="1">
+                            <a:rPr lang="en-US" b="1" i="1" smtClean="0">
+                              <a:solidFill>
+                                <a:srgbClr val="00B050"/>
+                              </a:solidFill>
                               <a:latin typeface="Cambria Math" panose="02040503050406030204" pitchFamily="18" charset="0"/>
                             </a:rPr>
                             <m:t>)</m:t>
@@ -23823,7 +23958,7 @@
             </p:txBody>
           </p:sp>
         </mc:Choice>
-        <mc:Fallback xmlns="">
+        <mc:Fallback>
           <p:sp>
             <p:nvSpPr>
               <p:cNvPr id="5" name="TextBox 4">
@@ -23849,7 +23984,7 @@
               <a:blipFill>
                 <a:blip r:embed="rId2"/>
                 <a:stretch>
-                  <a:fillRect l="-114" t="-508" b="-508"/>
+                  <a:fillRect l="-229" t="-505" b="-505"/>
                 </a:stretch>
               </a:blipFill>
             </p:spPr>
@@ -23868,8 +24003,8 @@
           </p:sp>
         </mc:Fallback>
       </mc:AlternateContent>
-      <mc:AlternateContent xmlns:mc="http://schemas.openxmlformats.org/markup-compatibility/2006">
-        <mc:Choice xmlns:a14="http://schemas.microsoft.com/office/drawing/2010/main" Requires="a14">
+      <mc:AlternateContent xmlns:mc="http://schemas.openxmlformats.org/markup-compatibility/2006" xmlns:a14="http://schemas.microsoft.com/office/drawing/2010/main">
+        <mc:Choice Requires="a14">
           <p:sp>
             <p:nvSpPr>
               <p:cNvPr id="6" name="TextBox 5">
@@ -24168,7 +24303,7 @@
             </p:txBody>
           </p:sp>
         </mc:Choice>
-        <mc:Fallback>
+        <mc:Fallback xmlns="">
           <p:sp>
             <p:nvSpPr>
               <p:cNvPr id="6" name="TextBox 5">
@@ -24351,7 +24486,7 @@
         </p:nvSpPr>
         <p:spPr>
           <a:xfrm>
-            <a:off x="64171" y="5166530"/>
+            <a:off x="64171" y="5027980"/>
             <a:ext cx="8350229" cy="1600438"/>
           </a:xfrm>
           <a:prstGeom prst="rect">
@@ -24478,7 +24613,7 @@
         </p:blipFill>
         <p:spPr>
           <a:xfrm>
-            <a:off x="7200900" y="891251"/>
+            <a:off x="7090060" y="960526"/>
             <a:ext cx="4991100" cy="3594100"/>
           </a:xfrm>
           <a:prstGeom prst="rect">
@@ -24500,7 +24635,7 @@
         </p:nvSpPr>
         <p:spPr>
           <a:xfrm>
-            <a:off x="7527086" y="502864"/>
+            <a:off x="7416246" y="572139"/>
             <a:ext cx="4385619" cy="400110"/>
           </a:xfrm>
           <a:prstGeom prst="rect">
@@ -24638,7 +24773,7 @@
         </p:nvSpPr>
         <p:spPr>
           <a:xfrm>
-            <a:off x="219196" y="1111554"/>
+            <a:off x="219196" y="1236249"/>
             <a:ext cx="5879429" cy="3153494"/>
           </a:xfrm>
           <a:prstGeom prst="rect">
@@ -24988,7 +25123,7 @@
         </p:nvSpPr>
         <p:spPr>
           <a:xfrm>
-            <a:off x="7503640" y="96893"/>
+            <a:off x="7392800" y="166168"/>
             <a:ext cx="4624188" cy="400110"/>
           </a:xfrm>
           <a:prstGeom prst="rect">
@@ -25057,8 +25192,8 @@
         </p:nvSpPr>
         <p:spPr>
           <a:xfrm>
-            <a:off x="244584" y="1005791"/>
-            <a:ext cx="6613415" cy="4401781"/>
+            <a:off x="91343" y="40387"/>
+            <a:ext cx="5893822" cy="1137250"/>
           </a:xfrm>
           <a:prstGeom prst="rect">
             <a:avLst/>
@@ -25084,9 +25219,9 @@
               <a:buNone/>
             </a:pPr>
             <a:r>
-              <a:rPr lang="en-US" sz="1800" b="1" dirty="0">
-                <a:solidFill>
-                  <a:schemeClr val="accent1"/>
+              <a:rPr lang="en-US" sz="2800" b="1" dirty="0">
+                <a:solidFill>
+                  <a:schemeClr val="tx1"/>
                 </a:solidFill>
                 <a:latin typeface="Calibri" panose="020F0502020204030204" pitchFamily="34" charset="0"/>
                 <a:cs typeface="Calibri" panose="020F0502020204030204" pitchFamily="34" charset="0"/>
@@ -25095,9 +25230,9 @@
               <a:t>Bayesian network  </a:t>
             </a:r>
             <a:br>
-              <a:rPr lang="en-US" sz="1800" b="1" dirty="0">
-                <a:solidFill>
-                  <a:schemeClr val="accent1"/>
+              <a:rPr lang="en-US" sz="2800" b="1" dirty="0">
+                <a:solidFill>
+                  <a:schemeClr val="tx1"/>
                 </a:solidFill>
                 <a:latin typeface="Calibri" panose="020F0502020204030204" pitchFamily="34" charset="0"/>
                 <a:cs typeface="Calibri" panose="020F0502020204030204" pitchFamily="34" charset="0"/>
@@ -25113,7 +25248,7 @@
                 <a:cs typeface="Calibri"/>
                 <a:sym typeface="Calibri"/>
               </a:rPr>
-              <a:t>(Bayes network, belief network, Bayes(</a:t>
+              <a:t>( a.k.a. Bayes network, belief network, Bayes(</a:t>
             </a:r>
             <a:r>
               <a:rPr lang="en-US" sz="1800" dirty="0" err="1">
@@ -25135,91 +25270,30 @@
                 <a:cs typeface="Calibri"/>
                 <a:sym typeface="Calibri"/>
               </a:rPr>
-              <a:t>) model or probabilistic directed acyclic graphical model)</a:t>
-            </a:r>
+              <a:t>) model </a:t>
+            </a:r>
+          </a:p>
+          <a:p>
+            <a:pPr marL="0" marR="0" lvl="0" indent="0" algn="l" rtl="0">
+              <a:spcBef>
+                <a:spcPts val="0"/>
+              </a:spcBef>
+              <a:spcAft>
+                <a:spcPts val="0"/>
+              </a:spcAft>
+              <a:buNone/>
+            </a:pPr>
             <a:r>
               <a:rPr lang="en-US" sz="1800" dirty="0">
                 <a:solidFill>
                   <a:schemeClr val="dk1"/>
                 </a:solidFill>
                 <a:latin typeface="Calibri"/>
-                <a:ea typeface="Calibri"/>
                 <a:cs typeface="Calibri"/>
                 <a:sym typeface="Calibri"/>
               </a:rPr>
-              <a:t> is a probabilistic graphical model (a type of statistical model) that represents a set of random variables and their conditional dependencies via a directed acyclic graph (DAG). </a:t>
-            </a:r>
-          </a:p>
-          <a:p>
-            <a:pPr marL="0" marR="0" lvl="0" indent="0" algn="l" rtl="0">
-              <a:spcBef>
-                <a:spcPts val="0"/>
-              </a:spcBef>
-              <a:spcAft>
-                <a:spcPts val="0"/>
-              </a:spcAft>
-              <a:buNone/>
-            </a:pPr>
-            <a:endParaRPr lang="en-US" sz="1800" dirty="0">
-              <a:solidFill>
-                <a:schemeClr val="dk1"/>
-              </a:solidFill>
-              <a:latin typeface="Calibri"/>
-              <a:ea typeface="Calibri"/>
-              <a:cs typeface="Calibri"/>
-              <a:sym typeface="Calibri"/>
-            </a:endParaRPr>
-          </a:p>
-          <a:p>
-            <a:pPr marL="0" marR="0" lvl="0" indent="0" algn="l" rtl="0">
-              <a:spcBef>
-                <a:spcPts val="0"/>
-              </a:spcBef>
-              <a:spcAft>
-                <a:spcPts val="0"/>
-              </a:spcAft>
-              <a:buNone/>
-            </a:pPr>
-            <a:endParaRPr sz="1800" dirty="0">
-              <a:solidFill>
-                <a:schemeClr val="dk1"/>
-              </a:solidFill>
-              <a:latin typeface="Calibri"/>
-              <a:ea typeface="Calibri"/>
-              <a:cs typeface="Calibri"/>
-              <a:sym typeface="Calibri"/>
-            </a:endParaRPr>
-          </a:p>
-          <a:p>
-            <a:pPr marL="0" marR="0" lvl="0" indent="0" algn="l" rtl="0">
-              <a:spcBef>
-                <a:spcPts val="0"/>
-              </a:spcBef>
-              <a:spcAft>
-                <a:spcPts val="0"/>
-              </a:spcAft>
-              <a:buNone/>
-            </a:pPr>
-            <a:endParaRPr lang="en-US" sz="1800" dirty="0">
-              <a:solidFill>
-                <a:schemeClr val="dk1"/>
-              </a:solidFill>
-              <a:latin typeface="Calibri"/>
-              <a:ea typeface="Calibri"/>
-              <a:cs typeface="Calibri"/>
-              <a:sym typeface="Calibri"/>
-            </a:endParaRPr>
-          </a:p>
-          <a:p>
-            <a:pPr marL="0" marR="0" lvl="0" indent="0" algn="l" rtl="0">
-              <a:spcBef>
-                <a:spcPts val="0"/>
-              </a:spcBef>
-              <a:spcAft>
-                <a:spcPts val="0"/>
-              </a:spcAft>
-              <a:buNone/>
-            </a:pPr>
+              <a:t>  or probabilistic directed acyclic graphical model )</a:t>
+            </a:r>
             <a:r>
               <a:rPr lang="en-US" sz="1800" dirty="0">
                 <a:solidFill>
@@ -25230,128 +25304,7 @@
                 <a:cs typeface="Calibri"/>
                 <a:sym typeface="Calibri"/>
               </a:rPr>
-              <a:t>Example: </a:t>
-            </a:r>
-          </a:p>
-          <a:p>
-            <a:pPr lvl="0"/>
-            <a:r>
-              <a:rPr lang="en-US" sz="1800" dirty="0">
-                <a:solidFill>
-                  <a:schemeClr val="dk1"/>
-                </a:solidFill>
-                <a:latin typeface="Calibri"/>
-                <a:ea typeface="Calibri"/>
-                <a:cs typeface="Calibri"/>
-                <a:sym typeface="Calibri"/>
-              </a:rPr>
-              <a:t>    </a:t>
-            </a:r>
-            <a:r>
-              <a:rPr lang="en-US" sz="1800" b="1" dirty="0">
-                <a:solidFill>
-                  <a:srgbClr val="0070C0"/>
-                </a:solidFill>
-                <a:latin typeface="Calibri"/>
-                <a:ea typeface="Calibri"/>
-                <a:cs typeface="Calibri"/>
-                <a:sym typeface="Calibri"/>
-              </a:rPr>
-              <a:t>Deep Belief Networks </a:t>
-            </a:r>
-            <a:r>
-              <a:rPr lang="en-US" sz="1800" dirty="0">
-                <a:solidFill>
-                  <a:schemeClr val="dk1"/>
-                </a:solidFill>
-                <a:latin typeface="Calibri"/>
-                <a:ea typeface="Calibri"/>
-                <a:cs typeface="Calibri"/>
-                <a:sym typeface="Calibri"/>
-              </a:rPr>
-              <a:t>- made of layers of RBMs </a:t>
-            </a:r>
-          </a:p>
-          <a:p>
-            <a:pPr lvl="0"/>
-            <a:r>
-              <a:rPr lang="en-US" sz="1800" dirty="0">
-                <a:solidFill>
-                  <a:schemeClr val="dk1"/>
-                </a:solidFill>
-                <a:latin typeface="Calibri"/>
-                <a:ea typeface="Calibri"/>
-                <a:cs typeface="Calibri"/>
-                <a:sym typeface="Calibri"/>
-              </a:rPr>
-              <a:t>     each next layer (“B”) is trained on top of the previous layer (“A”).</a:t>
-            </a:r>
-          </a:p>
-          <a:p>
-            <a:pPr marL="0" marR="0" lvl="0" indent="0" algn="l" rtl="0">
-              <a:spcBef>
-                <a:spcPts val="0"/>
-              </a:spcBef>
-              <a:spcAft>
-                <a:spcPts val="0"/>
-              </a:spcAft>
-              <a:buNone/>
-            </a:pPr>
-            <a:endParaRPr lang="en-US" sz="1800" dirty="0">
-              <a:solidFill>
-                <a:schemeClr val="dk1"/>
-              </a:solidFill>
-              <a:latin typeface="Calibri"/>
-              <a:ea typeface="Calibri"/>
-              <a:cs typeface="Calibri"/>
-              <a:sym typeface="Calibri"/>
-            </a:endParaRPr>
-          </a:p>
-          <a:p>
-            <a:pPr marL="0" marR="0" lvl="0" indent="0" algn="l" rtl="0">
-              <a:spcBef>
-                <a:spcPts val="0"/>
-              </a:spcBef>
-              <a:spcAft>
-                <a:spcPts val="0"/>
-              </a:spcAft>
-              <a:buNone/>
-            </a:pPr>
-            <a:r>
-              <a:rPr lang="en-US" sz="1800" dirty="0">
-                <a:solidFill>
-                  <a:schemeClr val="dk1"/>
-                </a:solidFill>
-                <a:latin typeface="Calibri"/>
-                <a:ea typeface="Calibri"/>
-                <a:cs typeface="Calibri"/>
-                <a:sym typeface="Calibri"/>
-              </a:rPr>
-              <a:t>    here </a:t>
-            </a:r>
-            <a:r>
-              <a:rPr lang="en-US" sz="1800" b="1" dirty="0">
-                <a:solidFill>
-                  <a:srgbClr val="0070C0"/>
-                </a:solidFill>
-                <a:latin typeface="Calibri"/>
-                <a:ea typeface="Calibri"/>
-                <a:cs typeface="Calibri"/>
-                <a:sym typeface="Calibri"/>
-              </a:rPr>
-              <a:t>RBM</a:t>
-            </a:r>
-            <a:r>
-              <a:rPr lang="en-US" sz="1800" dirty="0">
-                <a:solidFill>
-                  <a:schemeClr val="dk1"/>
-                </a:solidFill>
-                <a:latin typeface="Calibri"/>
-                <a:ea typeface="Calibri"/>
-                <a:cs typeface="Calibri"/>
-                <a:sym typeface="Calibri"/>
-              </a:rPr>
-              <a:t> (Restricted Boltzmann Machine) - a two-layered artificial neural network.</a:t>
+              <a:t> </a:t>
             </a:r>
           </a:p>
         </p:txBody>
@@ -25382,7 +25335,7 @@
         </p:blipFill>
         <p:spPr>
           <a:xfrm>
-            <a:off x="7532728" y="415640"/>
+            <a:off x="8197746" y="817421"/>
             <a:ext cx="1829483" cy="2128359"/>
           </a:xfrm>
           <a:prstGeom prst="rect">
@@ -25423,7 +25376,7 @@
         </p:blipFill>
         <p:spPr bwMode="auto">
           <a:xfrm>
-            <a:off x="6857999" y="3617628"/>
+            <a:off x="7168176" y="3617627"/>
             <a:ext cx="4388069" cy="2234581"/>
           </a:xfrm>
           <a:prstGeom prst="rect">
@@ -25441,6 +25394,296 @@
           </a:extLst>
         </p:spPr>
       </p:pic>
+      <p:sp>
+        <p:nvSpPr>
+          <p:cNvPr id="5" name="Google Shape;107;p14">
+            <a:extLst>
+              <a:ext uri="{FF2B5EF4-FFF2-40B4-BE49-F238E27FC236}">
+                <a16:creationId xmlns:a16="http://schemas.microsoft.com/office/drawing/2014/main" id="{341F2A09-BD6A-6E40-B245-BD73EC20CC51}"/>
+              </a:ext>
+            </a:extLst>
+          </p:cNvPr>
+          <p:cNvSpPr txBox="1"/>
+          <p:nvPr/>
+        </p:nvSpPr>
+        <p:spPr>
+          <a:xfrm>
+            <a:off x="91342" y="1416737"/>
+            <a:ext cx="6613415" cy="4401781"/>
+          </a:xfrm>
+          <a:prstGeom prst="rect">
+            <a:avLst/>
+          </a:prstGeom>
+          <a:noFill/>
+          <a:ln>
+            <a:noFill/>
+          </a:ln>
+        </p:spPr>
+        <p:txBody>
+          <a:bodyPr spcFirstLastPara="1" wrap="square" lIns="91425" tIns="45700" rIns="91425" bIns="45700" anchor="t" anchorCtr="0">
+            <a:noAutofit/>
+          </a:bodyPr>
+          <a:lstStyle/>
+          <a:p>
+            <a:pPr marL="0" marR="0" lvl="0" indent="0" algn="l" rtl="0">
+              <a:spcBef>
+                <a:spcPts val="0"/>
+              </a:spcBef>
+              <a:spcAft>
+                <a:spcPts val="0"/>
+              </a:spcAft>
+              <a:buNone/>
+            </a:pPr>
+            <a:r>
+              <a:rPr lang="en-US" sz="1800" b="1" dirty="0">
+                <a:solidFill>
+                  <a:schemeClr val="accent1"/>
+                </a:solidFill>
+                <a:latin typeface="Calibri" panose="020F0502020204030204" pitchFamily="34" charset="0"/>
+                <a:cs typeface="Calibri" panose="020F0502020204030204" pitchFamily="34" charset="0"/>
+                <a:sym typeface="Calibri"/>
+              </a:rPr>
+              <a:t>Bayesian network </a:t>
+            </a:r>
+            <a:r>
+              <a:rPr lang="en-US" sz="1800" dirty="0">
+                <a:solidFill>
+                  <a:schemeClr val="dk1"/>
+                </a:solidFill>
+                <a:latin typeface="Calibri"/>
+                <a:ea typeface="Calibri"/>
+                <a:cs typeface="Calibri"/>
+                <a:sym typeface="Calibri"/>
+              </a:rPr>
+              <a:t>is a probabilistic graphical model (a type of statistical model) that represents a set of random variables and their conditional dependencies via a directed acyclic graph (DAG). </a:t>
+            </a:r>
+          </a:p>
+          <a:p>
+            <a:pPr marL="0" marR="0" lvl="0" indent="0" algn="l" rtl="0">
+              <a:spcBef>
+                <a:spcPts val="0"/>
+              </a:spcBef>
+              <a:spcAft>
+                <a:spcPts val="0"/>
+              </a:spcAft>
+              <a:buNone/>
+            </a:pPr>
+            <a:endParaRPr lang="en-US" sz="1800" dirty="0">
+              <a:solidFill>
+                <a:schemeClr val="dk1"/>
+              </a:solidFill>
+              <a:latin typeface="Calibri"/>
+              <a:ea typeface="Calibri"/>
+              <a:cs typeface="Calibri"/>
+              <a:sym typeface="Calibri"/>
+            </a:endParaRPr>
+          </a:p>
+          <a:p>
+            <a:pPr marL="0" marR="0" lvl="0" indent="0" algn="l" rtl="0">
+              <a:spcBef>
+                <a:spcPts val="0"/>
+              </a:spcBef>
+              <a:spcAft>
+                <a:spcPts val="0"/>
+              </a:spcAft>
+              <a:buNone/>
+            </a:pPr>
+            <a:endParaRPr lang="en-US" sz="1800" dirty="0">
+              <a:solidFill>
+                <a:schemeClr val="dk1"/>
+              </a:solidFill>
+              <a:latin typeface="Calibri"/>
+              <a:ea typeface="Calibri"/>
+              <a:cs typeface="Calibri"/>
+              <a:sym typeface="Calibri"/>
+            </a:endParaRPr>
+          </a:p>
+          <a:p>
+            <a:pPr marL="0" marR="0" lvl="0" indent="0" algn="l" rtl="0">
+              <a:spcBef>
+                <a:spcPts val="0"/>
+              </a:spcBef>
+              <a:spcAft>
+                <a:spcPts val="0"/>
+              </a:spcAft>
+              <a:buNone/>
+            </a:pPr>
+            <a:endParaRPr sz="1800" dirty="0">
+              <a:solidFill>
+                <a:schemeClr val="dk1"/>
+              </a:solidFill>
+              <a:latin typeface="Calibri"/>
+              <a:ea typeface="Calibri"/>
+              <a:cs typeface="Calibri"/>
+              <a:sym typeface="Calibri"/>
+            </a:endParaRPr>
+          </a:p>
+          <a:p>
+            <a:pPr marL="0" marR="0" lvl="0" indent="0" algn="l" rtl="0">
+              <a:spcBef>
+                <a:spcPts val="0"/>
+              </a:spcBef>
+              <a:spcAft>
+                <a:spcPts val="0"/>
+              </a:spcAft>
+              <a:buNone/>
+            </a:pPr>
+            <a:endParaRPr lang="en-US" sz="1800" dirty="0">
+              <a:solidFill>
+                <a:schemeClr val="dk1"/>
+              </a:solidFill>
+              <a:latin typeface="Calibri"/>
+              <a:ea typeface="Calibri"/>
+              <a:cs typeface="Calibri"/>
+              <a:sym typeface="Calibri"/>
+            </a:endParaRPr>
+          </a:p>
+          <a:p>
+            <a:pPr marL="0" marR="0" lvl="0" indent="0" algn="l" rtl="0">
+              <a:spcBef>
+                <a:spcPts val="0"/>
+              </a:spcBef>
+              <a:spcAft>
+                <a:spcPts val="0"/>
+              </a:spcAft>
+              <a:buNone/>
+            </a:pPr>
+            <a:r>
+              <a:rPr lang="en-US" sz="1800" dirty="0">
+                <a:solidFill>
+                  <a:schemeClr val="dk1"/>
+                </a:solidFill>
+                <a:latin typeface="Calibri"/>
+                <a:ea typeface="Calibri"/>
+                <a:cs typeface="Calibri"/>
+                <a:sym typeface="Calibri"/>
+              </a:rPr>
+              <a:t>Example: </a:t>
+            </a:r>
+          </a:p>
+          <a:p>
+            <a:pPr lvl="0"/>
+            <a:r>
+              <a:rPr lang="en-US" sz="1800" dirty="0">
+                <a:solidFill>
+                  <a:schemeClr val="dk1"/>
+                </a:solidFill>
+                <a:latin typeface="Calibri"/>
+                <a:ea typeface="Calibri"/>
+                <a:cs typeface="Calibri"/>
+                <a:sym typeface="Calibri"/>
+              </a:rPr>
+              <a:t>    </a:t>
+            </a:r>
+            <a:r>
+              <a:rPr lang="en-US" sz="1800" b="1" dirty="0">
+                <a:solidFill>
+                  <a:srgbClr val="0070C0"/>
+                </a:solidFill>
+                <a:latin typeface="Calibri"/>
+                <a:ea typeface="Calibri"/>
+                <a:cs typeface="Calibri"/>
+                <a:sym typeface="Calibri"/>
+              </a:rPr>
+              <a:t>Deep Belief Networks </a:t>
+            </a:r>
+            <a:r>
+              <a:rPr lang="en-US" sz="1800" dirty="0">
+                <a:solidFill>
+                  <a:schemeClr val="dk1"/>
+                </a:solidFill>
+                <a:latin typeface="Calibri"/>
+                <a:ea typeface="Calibri"/>
+                <a:cs typeface="Calibri"/>
+                <a:sym typeface="Calibri"/>
+              </a:rPr>
+              <a:t>- made of layers of RBMs </a:t>
+            </a:r>
+          </a:p>
+          <a:p>
+            <a:pPr lvl="0"/>
+            <a:r>
+              <a:rPr lang="en-US" sz="1800" dirty="0">
+                <a:solidFill>
+                  <a:schemeClr val="dk1"/>
+                </a:solidFill>
+                <a:latin typeface="Calibri"/>
+                <a:ea typeface="Calibri"/>
+                <a:cs typeface="Calibri"/>
+                <a:sym typeface="Calibri"/>
+              </a:rPr>
+              <a:t>     each next layer (“B”) is trained on top of the previous layer (“A”).</a:t>
+            </a:r>
+          </a:p>
+          <a:p>
+            <a:pPr marL="0" marR="0" lvl="0" indent="0" algn="l" rtl="0">
+              <a:spcBef>
+                <a:spcPts val="0"/>
+              </a:spcBef>
+              <a:spcAft>
+                <a:spcPts val="0"/>
+              </a:spcAft>
+              <a:buNone/>
+            </a:pPr>
+            <a:endParaRPr lang="en-US" sz="1800" dirty="0">
+              <a:solidFill>
+                <a:schemeClr val="dk1"/>
+              </a:solidFill>
+              <a:latin typeface="Calibri"/>
+              <a:ea typeface="Calibri"/>
+              <a:cs typeface="Calibri"/>
+              <a:sym typeface="Calibri"/>
+            </a:endParaRPr>
+          </a:p>
+          <a:p>
+            <a:pPr marL="0" marR="0" lvl="0" indent="0" algn="l" rtl="0">
+              <a:spcBef>
+                <a:spcPts val="0"/>
+              </a:spcBef>
+              <a:spcAft>
+                <a:spcPts val="0"/>
+              </a:spcAft>
+              <a:buNone/>
+            </a:pPr>
+            <a:r>
+              <a:rPr lang="en-US" sz="1800" dirty="0">
+                <a:solidFill>
+                  <a:schemeClr val="dk1"/>
+                </a:solidFill>
+                <a:latin typeface="Calibri"/>
+                <a:ea typeface="Calibri"/>
+                <a:cs typeface="Calibri"/>
+                <a:sym typeface="Calibri"/>
+              </a:rPr>
+              <a:t>    Here </a:t>
+            </a:r>
+            <a:r>
+              <a:rPr lang="en-US" sz="1800" b="1" dirty="0">
+                <a:solidFill>
+                  <a:srgbClr val="0070C0"/>
+                </a:solidFill>
+                <a:latin typeface="Calibri"/>
+                <a:ea typeface="Calibri"/>
+                <a:cs typeface="Calibri"/>
+                <a:sym typeface="Calibri"/>
+              </a:rPr>
+              <a:t>RBM</a:t>
+            </a:r>
+            <a:r>
+              <a:rPr lang="en-US" sz="1800" dirty="0">
+                <a:solidFill>
+                  <a:schemeClr val="dk1"/>
+                </a:solidFill>
+                <a:latin typeface="Calibri"/>
+                <a:ea typeface="Calibri"/>
+                <a:cs typeface="Calibri"/>
+                <a:sym typeface="Calibri"/>
+              </a:rPr>
+              <a:t> (Restricted Boltzmann Machine) - a two-layered artificial neural network.</a:t>
+            </a:r>
+          </a:p>
+        </p:txBody>
+      </p:sp>
     </p:spTree>
     <p:extLst>
       <p:ext uri="{BB962C8B-B14F-4D97-AF65-F5344CB8AC3E}">
@@ -25562,8 +25805,8 @@
         </p:blipFill>
         <p:spPr bwMode="auto">
           <a:xfrm>
-            <a:off x="6463862" y="1714500"/>
-            <a:ext cx="5648325" cy="3429000"/>
+            <a:off x="6761230" y="53213"/>
+            <a:ext cx="5364210" cy="3256519"/>
           </a:xfrm>
           <a:prstGeom prst="rect">
             <a:avLst/>
@@ -25595,7 +25838,7 @@
         <p:spPr>
           <a:xfrm>
             <a:off x="79812" y="677917"/>
-            <a:ext cx="6016187" cy="6053317"/>
+            <a:ext cx="5804153" cy="6053317"/>
           </a:xfrm>
           <a:prstGeom prst="rect">
             <a:avLst/>
@@ -25691,7 +25934,6 @@
             </a:endParaRPr>
           </a:p>
           <a:p>
-            <a:pPr lvl="0"/>
             <a:r>
               <a:rPr lang="en-US" b="1" dirty="0">
                 <a:solidFill>
@@ -25711,9 +25953,115 @@
                 </a:solidFill>
                 <a:latin typeface="Calibri"/>
                 <a:cs typeface="Calibri"/>
-                <a:sym typeface="Calibri"/>
               </a:rPr>
-              <a:t> works by constructing a posterior distribution of functions (gaussian process) that best describes the function you want to optimize. As the number of observations grows, the posterior distribution improves, and the algorithm becomes more certain of which regions in parameter space are worth exploring and which are not.</a:t>
+              <a:t> is typically used to find  optimal hyperparameters for Machine Learning models (it is better than </a:t>
+            </a:r>
+            <a:r>
+              <a:rPr lang="en-US" b="1" dirty="0">
+                <a:solidFill>
+                  <a:srgbClr val="0070C0"/>
+                </a:solidFill>
+                <a:latin typeface="Calibri"/>
+                <a:cs typeface="Calibri"/>
+              </a:rPr>
+              <a:t>grid search</a:t>
+            </a:r>
+            <a:r>
+              <a:rPr lang="en-US" dirty="0">
+                <a:solidFill>
+                  <a:schemeClr val="dk1"/>
+                </a:solidFill>
+                <a:latin typeface="Calibri"/>
+                <a:cs typeface="Calibri"/>
+              </a:rPr>
+              <a:t> or </a:t>
+            </a:r>
+            <a:r>
+              <a:rPr lang="en-US" b="1" dirty="0">
+                <a:solidFill>
+                  <a:srgbClr val="0070C0"/>
+                </a:solidFill>
+                <a:latin typeface="Calibri"/>
+                <a:cs typeface="Calibri"/>
+              </a:rPr>
+              <a:t>random search</a:t>
+            </a:r>
+            <a:r>
+              <a:rPr lang="en-US" dirty="0">
+                <a:solidFill>
+                  <a:schemeClr val="dk1"/>
+                </a:solidFill>
+                <a:latin typeface="Calibri"/>
+                <a:cs typeface="Calibri"/>
+              </a:rPr>
+              <a:t>).</a:t>
+            </a:r>
+          </a:p>
+          <a:p>
+            <a:pPr marL="0" marR="0" lvl="0" indent="0" algn="l" rtl="0">
+              <a:spcBef>
+                <a:spcPts val="0"/>
+              </a:spcBef>
+              <a:spcAft>
+                <a:spcPts val="0"/>
+              </a:spcAft>
+              <a:buNone/>
+            </a:pPr>
+            <a:endParaRPr lang="en-US" dirty="0">
+              <a:solidFill>
+                <a:schemeClr val="dk1"/>
+              </a:solidFill>
+              <a:latin typeface="Calibri"/>
+              <a:cs typeface="Calibri"/>
+              <a:sym typeface="Calibri"/>
+            </a:endParaRPr>
+          </a:p>
+          <a:p>
+            <a:pPr lvl="0"/>
+            <a:r>
+              <a:rPr lang="en-US" b="1" dirty="0">
+                <a:solidFill>
+                  <a:srgbClr val="FF0000"/>
+                </a:solidFill>
+                <a:latin typeface="Calibri"/>
+                <a:ea typeface="Calibri"/>
+                <a:cs typeface="Calibri"/>
+                <a:sym typeface="Calibri"/>
+              </a:rPr>
+              <a:t>Bayesian Optimization</a:t>
+            </a:r>
+            <a:r>
+              <a:rPr lang="en-US" dirty="0">
+                <a:solidFill>
+                  <a:schemeClr val="dk1"/>
+                </a:solidFill>
+                <a:latin typeface="Calibri"/>
+                <a:cs typeface="Calibri"/>
+                <a:sym typeface="Calibri"/>
+              </a:rPr>
+              <a:t> works by constructing a posterior distribution of functions (</a:t>
+            </a:r>
+            <a:r>
+              <a:rPr lang="en-US" b="1" dirty="0">
+                <a:solidFill>
+                  <a:srgbClr val="0070C0"/>
+                </a:solidFill>
+                <a:latin typeface="Calibri"/>
+                <a:cs typeface="Calibri"/>
+                <a:sym typeface="Calibri"/>
+              </a:rPr>
+              <a:t>Gaussian Process</a:t>
+            </a:r>
+            <a:r>
+              <a:rPr lang="en-US" dirty="0">
+                <a:solidFill>
+                  <a:schemeClr val="dk1"/>
+                </a:solidFill>
+                <a:latin typeface="Calibri"/>
+                <a:cs typeface="Calibri"/>
+                <a:sym typeface="Calibri"/>
+              </a:rPr>
+              <a:t>) that best describes the function you want to optimize. As the number of observations grows, the posterior distribution improves, and the algorithm becomes more certain of which regions in parameter space are worth exploring and which are not.</a:t>
             </a:r>
           </a:p>
           <a:p>
@@ -25738,7 +26086,51 @@
                 <a:cs typeface="Calibri"/>
                 <a:sym typeface="Calibri"/>
               </a:rPr>
-              <a:t>As you iterate over and over, the algorithm balances its needs of exploration and exploitation taking into account what it knows about the target function. At each step a Gaussian Process is fitted to the known samples (points previously explored), and the posterior distribution, combined with a exploration strategy (such as UCB (Upper Confidence Bound), or EI (Expected Improvement)), are used to determine the next point that should be explored</a:t>
+              <a:t>As you iterate over and over, the algorithm balances its needs of exploration and exploitation taking into account what it knows about the target function. At each step a </a:t>
+            </a:r>
+            <a:r>
+              <a:rPr lang="en-US" b="1" dirty="0">
+                <a:solidFill>
+                  <a:srgbClr val="0070C0"/>
+                </a:solidFill>
+                <a:latin typeface="Calibri"/>
+                <a:cs typeface="Calibri"/>
+                <a:sym typeface="Calibri"/>
+              </a:rPr>
+              <a:t>Gaussian Process</a:t>
+            </a:r>
+            <a:r>
+              <a:rPr lang="en-US" dirty="0">
+                <a:solidFill>
+                  <a:schemeClr val="dk1"/>
+                </a:solidFill>
+                <a:latin typeface="Calibri"/>
+                <a:cs typeface="Calibri"/>
+                <a:sym typeface="Calibri"/>
+              </a:rPr>
+              <a:t> is fitted to the known samples (points previously explored), and the posterior distribution, combined with a exploration strategy are used to determine </a:t>
+            </a:r>
+            <a:r>
+              <a:rPr lang="en-US" b="1" dirty="0">
+                <a:solidFill>
+                  <a:srgbClr val="0070C0"/>
+                </a:solidFill>
+                <a:latin typeface="Calibri"/>
+                <a:cs typeface="Calibri"/>
+                <a:sym typeface="Calibri"/>
+              </a:rPr>
+              <a:t>the next point that should be explored</a:t>
+            </a:r>
+            <a:r>
+              <a:rPr lang="en-US" dirty="0">
+                <a:solidFill>
+                  <a:schemeClr val="dk1"/>
+                </a:solidFill>
+                <a:latin typeface="Calibri"/>
+                <a:cs typeface="Calibri"/>
+                <a:sym typeface="Calibri"/>
+              </a:rPr>
+              <a:t>.</a:t>
             </a:r>
           </a:p>
           <a:p>
@@ -25767,50 +26159,6 @@
             </a:r>
           </a:p>
           <a:p>
-            <a:pPr marL="0" marR="0" lvl="0" indent="0" algn="l" rtl="0">
-              <a:spcBef>
-                <a:spcPts val="0"/>
-              </a:spcBef>
-              <a:spcAft>
-                <a:spcPts val="0"/>
-              </a:spcAft>
-              <a:buNone/>
-            </a:pPr>
-            <a:endParaRPr lang="en-US" dirty="0">
-              <a:solidFill>
-                <a:schemeClr val="dk1"/>
-              </a:solidFill>
-              <a:latin typeface="Calibri"/>
-              <a:cs typeface="Calibri"/>
-              <a:sym typeface="Calibri"/>
-            </a:endParaRPr>
-          </a:p>
-          <a:p>
-            <a:pPr lvl="0"/>
-            <a:r>
-              <a:rPr lang="en-US" b="1" dirty="0">
-                <a:solidFill>
-                  <a:srgbClr val="FF0000"/>
-                </a:solidFill>
-                <a:latin typeface="Calibri"/>
-                <a:ea typeface="Calibri"/>
-                <a:cs typeface="Calibri"/>
-                <a:sym typeface="Calibri"/>
-              </a:rPr>
-              <a:t>Bayesian Optimization</a:t>
-            </a:r>
-            <a:r>
-              <a:rPr lang="en-US" dirty="0">
-                <a:solidFill>
-                  <a:schemeClr val="dk1"/>
-                </a:solidFill>
-                <a:latin typeface="Calibri"/>
-                <a:cs typeface="Calibri"/>
-              </a:rPr>
-              <a:t> is typically used to find  optimal hyperparameters for Machine Learning models (it is better than grid search or random search).</a:t>
-            </a:r>
-          </a:p>
-          <a:p>
             <a:pPr lvl="0"/>
             <a:endParaRPr lang="en-US" dirty="0">
               <a:solidFill>
@@ -25903,6 +26251,164 @@
               <a:latin typeface="Calibri"/>
               <a:cs typeface="Calibri"/>
             </a:endParaRPr>
+          </a:p>
+        </p:txBody>
+      </p:sp>
+      <p:sp>
+        <p:nvSpPr>
+          <p:cNvPr id="2" name="TextBox 1">
+            <a:extLst>
+              <a:ext uri="{FF2B5EF4-FFF2-40B4-BE49-F238E27FC236}">
+                <a16:creationId xmlns:a16="http://schemas.microsoft.com/office/drawing/2014/main" id="{BB66F01F-0498-204C-B082-40A9BFF950D5}"/>
+              </a:ext>
+            </a:extLst>
+          </p:cNvPr>
+          <p:cNvSpPr txBox="1"/>
+          <p:nvPr/>
+        </p:nvSpPr>
+        <p:spPr>
+          <a:xfrm>
+            <a:off x="6308037" y="3497460"/>
+            <a:ext cx="5870711" cy="3323987"/>
+          </a:xfrm>
+          <a:prstGeom prst="rect">
+            <a:avLst/>
+          </a:prstGeom>
+          <a:noFill/>
+        </p:spPr>
+        <p:txBody>
+          <a:bodyPr wrap="square" rtlCol="0">
+            <a:spAutoFit/>
+          </a:bodyPr>
+          <a:lstStyle/>
+          <a:p>
+            <a:r>
+              <a:rPr lang="en-US" dirty="0"/>
+              <a:t>Note:</a:t>
+            </a:r>
+          </a:p>
+          <a:p>
+            <a:pPr marL="285750" indent="-285750">
+              <a:buFont typeface="Arial" panose="020B0604020202020204" pitchFamily="34" charset="0"/>
+              <a:buChar char="•"/>
+            </a:pPr>
+            <a:r>
+              <a:rPr lang="en-US" b="1" dirty="0">
+                <a:solidFill>
+                  <a:srgbClr val="0070C0"/>
+                </a:solidFill>
+              </a:rPr>
+              <a:t>Gaussian Process</a:t>
+            </a:r>
+            <a:r>
+              <a:rPr lang="en-US" dirty="0"/>
+              <a:t> is a stochastic process (a collection of random variables indexed by time or space), such that every finite collection of those random variables has a multivariate normal distribution. </a:t>
+            </a:r>
+          </a:p>
+          <a:p>
+            <a:pPr marL="285750" indent="-285750">
+              <a:buFont typeface="Arial" panose="020B0604020202020204" pitchFamily="34" charset="0"/>
+              <a:buChar char="•"/>
+            </a:pPr>
+            <a:r>
+              <a:rPr lang="en-US" dirty="0"/>
+              <a:t>A machine-learning algorithm that involves a </a:t>
+            </a:r>
+            <a:r>
+              <a:rPr lang="en-US" b="1" dirty="0">
+                <a:solidFill>
+                  <a:srgbClr val="0070C0"/>
+                </a:solidFill>
+              </a:rPr>
+              <a:t>Gaussian Process</a:t>
+            </a:r>
+            <a:r>
+              <a:rPr lang="en-US" dirty="0"/>
+              <a:t> uses </a:t>
+            </a:r>
+            <a:r>
+              <a:rPr lang="en-US" b="1" dirty="0">
+                <a:solidFill>
+                  <a:srgbClr val="00B050"/>
+                </a:solidFill>
+              </a:rPr>
+              <a:t>lazy learning</a:t>
+            </a:r>
+            <a:r>
+              <a:rPr lang="en-US" dirty="0"/>
+              <a:t> and a </a:t>
+            </a:r>
+            <a:r>
+              <a:rPr lang="en-US" b="1" dirty="0">
+                <a:solidFill>
+                  <a:srgbClr val="00B050"/>
+                </a:solidFill>
+              </a:rPr>
+              <a:t>measure of the similarity between points</a:t>
+            </a:r>
+            <a:r>
+              <a:rPr lang="en-US" dirty="0"/>
+              <a:t> (the kernel function) to predict the value for an unseen point from training data. </a:t>
+            </a:r>
+          </a:p>
+          <a:p>
+            <a:pPr marL="285750" indent="-285750">
+              <a:buFont typeface="Arial" panose="020B0604020202020204" pitchFamily="34" charset="0"/>
+              <a:buChar char="•"/>
+            </a:pPr>
+            <a:r>
+              <a:rPr lang="en-US" dirty="0"/>
+              <a:t>The prediction is not just an estimate for that point, but also has </a:t>
+            </a:r>
+            <a:r>
+              <a:rPr lang="en-US" b="1" dirty="0">
+                <a:solidFill>
+                  <a:srgbClr val="00B050"/>
+                </a:solidFill>
+              </a:rPr>
+              <a:t>uncertainty information</a:t>
+            </a:r>
+            <a:r>
+              <a:rPr lang="en-US" dirty="0"/>
+              <a:t> (it is a Gaussian distribution). </a:t>
+            </a:r>
+          </a:p>
+          <a:p>
+            <a:pPr marL="285750" indent="-285750">
+              <a:buFont typeface="Arial" panose="020B0604020202020204" pitchFamily="34" charset="0"/>
+              <a:buChar char="•"/>
+            </a:pPr>
+            <a:r>
+              <a:rPr lang="en-US" dirty="0"/>
+              <a:t>In practice GP models are often evaluated on a grid using maximum likelihood and calculating multivariate Gaussian density using  approximation methods to speed up calculations.</a:t>
+            </a:r>
+          </a:p>
+          <a:p>
+            <a:pPr marL="285750" indent="-285750">
+              <a:buFont typeface="Arial" panose="020B0604020202020204" pitchFamily="34" charset="0"/>
+              <a:buChar char="•"/>
+            </a:pPr>
+            <a:r>
+              <a:rPr lang="en-US" dirty="0"/>
+              <a:t>Good 2-min explanation of Gaussian Process:</a:t>
+            </a:r>
+            <a:br>
+              <a:rPr lang="en-US" dirty="0"/>
+            </a:br>
+            <a:r>
+              <a:rPr lang="en-US" dirty="0"/>
+              <a:t> - </a:t>
+            </a:r>
+            <a:r>
+              <a:rPr lang="en-US" dirty="0">
+                <a:hlinkClick r:id="rId6"/>
+              </a:rPr>
+              <a:t>https://www.youtube.com/watch?v=mqOdIYxxNCs</a:t>
+            </a:r>
+            <a:r>
+              <a:rPr lang="en-US" dirty="0"/>
+              <a:t>   </a:t>
+            </a:r>
           </a:p>
         </p:txBody>
       </p:sp>

--- a/Bayes_Bayesian.pptx
+++ b/Bayes_Bayesian.pptx
@@ -17525,7 +17525,7 @@
         <p:spPr>
           <a:xfrm>
             <a:off x="0" y="778920"/>
-            <a:ext cx="7257972" cy="646331"/>
+            <a:ext cx="6591300" cy="646331"/>
           </a:xfrm>
           <a:prstGeom prst="rect">
             <a:avLst/>
@@ -22841,8 +22841,8 @@
           <a:chExt cx="0" cy="0"/>
         </a:xfrm>
       </p:grpSpPr>
-      <mc:AlternateContent xmlns:mc="http://schemas.openxmlformats.org/markup-compatibility/2006">
-        <mc:Choice xmlns:a14="http://schemas.microsoft.com/office/drawing/2010/main" Requires="a14">
+      <mc:AlternateContent xmlns:mc="http://schemas.openxmlformats.org/markup-compatibility/2006" xmlns:a14="http://schemas.microsoft.com/office/drawing/2010/main">
+        <mc:Choice Requires="a14">
           <p:sp>
             <p:nvSpPr>
               <p:cNvPr id="5" name="TextBox 4">
@@ -23577,13 +23577,7 @@
                         <a:rPr lang="en-US" b="1" i="1">
                           <a:latin typeface="Cambria Math" panose="02040503050406030204" pitchFamily="18" charset="0"/>
                         </a:rPr>
-                        <m:t>𝑷</m:t>
-                      </m:r>
-                      <m:r>
-                        <a:rPr lang="en-US" b="1" i="1" baseline="-25000" smtClean="0">
-                          <a:latin typeface="Cambria Math" panose="02040503050406030204" pitchFamily="18" charset="0"/>
-                        </a:rPr>
-                        <m:t>𝒇𝒂𝒍𝒔𝒆</m:t>
+                        <m:t>𝑷𝒇𝒂𝒍𝒔𝒆</m:t>
                       </m:r>
                       <m:r>
                         <a:rPr lang="en-US" b="1" i="1" baseline="-25000" smtClean="0">
@@ -23958,7 +23952,7 @@
             </p:txBody>
           </p:sp>
         </mc:Choice>
-        <mc:Fallback>
+        <mc:Fallback xmlns="">
           <p:sp>
             <p:nvSpPr>
               <p:cNvPr id="5" name="TextBox 4">
@@ -24486,8 +24480,8 @@
         </p:nvSpPr>
         <p:spPr>
           <a:xfrm>
-            <a:off x="64171" y="5027980"/>
-            <a:ext cx="8350229" cy="1600438"/>
+            <a:off x="110840" y="4969558"/>
+            <a:ext cx="6764097" cy="1815882"/>
           </a:xfrm>
           <a:prstGeom prst="rect">
             <a:avLst/>
@@ -24505,7 +24499,7 @@
                 <a:latin typeface="Calibri" panose="020F0502020204030204" pitchFamily="34" charset="0"/>
                 <a:cs typeface="Calibri" panose="020F0502020204030204" pitchFamily="34" charset="0"/>
               </a:rPr>
-              <a:t>Here is a very good short video explaining the Naive Bayes Classification on a specific simple example:</a:t>
+              <a:t>Here is a very good short video explaining the Naive Bayes Classification </a:t>
             </a:r>
           </a:p>
           <a:p>
@@ -24514,7 +24508,7 @@
                 <a:latin typeface="Calibri" panose="020F0502020204030204" pitchFamily="34" charset="0"/>
                 <a:cs typeface="Calibri" panose="020F0502020204030204" pitchFamily="34" charset="0"/>
               </a:rPr>
-              <a:t> - </a:t>
+              <a:t>on a specific simple example - </a:t>
             </a:r>
             <a:r>
               <a:rPr lang="en-US" dirty="0">
@@ -24530,6 +24524,12 @@
             </a:endParaRPr>
           </a:p>
           <a:p>
+            <a:endParaRPr lang="en-US" dirty="0">
+              <a:latin typeface="Calibri" panose="020F0502020204030204" pitchFamily="34" charset="0"/>
+              <a:cs typeface="Calibri" panose="020F0502020204030204" pitchFamily="34" charset="0"/>
+            </a:endParaRPr>
+          </a:p>
+          <a:p>
             <a:r>
               <a:rPr lang="en-US" dirty="0">
                 <a:latin typeface="Calibri" panose="020F0502020204030204" pitchFamily="34" charset="0"/>
@@ -24548,30 +24548,18 @@
             </a:r>
           </a:p>
           <a:p>
+            <a:endParaRPr lang="en-US" dirty="0">
+              <a:latin typeface="Calibri" panose="020F0502020204030204" pitchFamily="34" charset="0"/>
+              <a:cs typeface="Calibri" panose="020F0502020204030204" pitchFamily="34" charset="0"/>
+            </a:endParaRPr>
+          </a:p>
+          <a:p>
             <a:r>
               <a:rPr lang="en-US" dirty="0">
                 <a:latin typeface="Calibri" panose="020F0502020204030204" pitchFamily="34" charset="0"/>
                 <a:cs typeface="Calibri" panose="020F0502020204030204" pitchFamily="34" charset="0"/>
               </a:rPr>
-              <a:t>This is wrong. </a:t>
-            </a:r>
-          </a:p>
-          <a:p>
-            <a:r>
-              <a:rPr lang="en-US" dirty="0">
-                <a:latin typeface="Calibri" panose="020F0502020204030204" pitchFamily="34" charset="0"/>
-                <a:cs typeface="Calibri" panose="020F0502020204030204" pitchFamily="34" charset="0"/>
-              </a:rPr>
-              <a:t>You can see it by yourself how making calculation this way makes the sum of two probabilities greater than one. </a:t>
-            </a:r>
-          </a:p>
-          <a:p>
-            <a:r>
-              <a:rPr lang="en-US" dirty="0">
-                <a:latin typeface="Calibri" panose="020F0502020204030204" pitchFamily="34" charset="0"/>
-                <a:cs typeface="Calibri" panose="020F0502020204030204" pitchFamily="34" charset="0"/>
-              </a:rPr>
-              <a:t>Also here is a good article - </a:t>
+              <a:t>You can see that it is wrong because it makes the sum of two probabilities greater than one.  Also here is a good article - </a:t>
             </a:r>
             <a:r>
               <a:rPr lang="en-US" dirty="0">
@@ -24773,8 +24761,8 @@
         </p:nvSpPr>
         <p:spPr>
           <a:xfrm>
-            <a:off x="219196" y="1236249"/>
-            <a:ext cx="5879429" cy="3153494"/>
+            <a:off x="110840" y="586154"/>
+            <a:ext cx="6764097" cy="4383404"/>
           </a:xfrm>
           <a:prstGeom prst="rect">
             <a:avLst/>
@@ -24855,10 +24843,10 @@
                 <a:cs typeface="Calibri"/>
                 <a:sym typeface="Calibri"/>
               </a:rPr>
-              <a:t>For each value of the outcome (Yes or No) we can calculate the conditional probability/frequency of seeing each feature value A</a:t>
-            </a:r>
-            <a:r>
-              <a:rPr lang="en-US" baseline="-25000" dirty="0">
+              <a:t>For each value of the outcome (Yes or No) we can calculate the conditional probability/frequency of seeing each feature value </a:t>
+            </a:r>
+            <a:r>
+              <a:rPr lang="en-US" dirty="0" err="1">
                 <a:solidFill>
                   <a:schemeClr val="dk1"/>
                 </a:solidFill>
@@ -24867,7 +24855,19 @@
                 <a:cs typeface="Calibri"/>
                 <a:sym typeface="Calibri"/>
               </a:rPr>
-              <a:t>i</a:t>
+              <a:t>A</a:t>
+            </a:r>
+            <a:r>
+              <a:rPr lang="en-US" baseline="-25000" dirty="0" err="1">
+                <a:solidFill>
+                  <a:schemeClr val="dk1"/>
+                </a:solidFill>
+                <a:latin typeface="Calibri"/>
+                <a:ea typeface="Calibri"/>
+                <a:cs typeface="Calibri"/>
+                <a:sym typeface="Calibri"/>
+              </a:rPr>
+              <a:t>ij</a:t>
             </a:r>
             <a:r>
               <a:rPr lang="en-US" dirty="0">
@@ -24894,24 +24894,48 @@
                 <a:cs typeface="Calibri"/>
                 <a:sym typeface="Calibri"/>
               </a:rPr>
-              <a:t>                                   P(A</a:t>
-            </a:r>
-            <a:r>
-              <a:rPr lang="en-US" baseline="-25000" dirty="0">
-                <a:solidFill>
-                  <a:schemeClr val="dk1"/>
+              <a:t>                                   </a:t>
+            </a:r>
+            <a:r>
+              <a:rPr lang="en-US" b="1" dirty="0">
+                <a:solidFill>
+                  <a:srgbClr val="0070C0"/>
                 </a:solidFill>
                 <a:latin typeface="Calibri"/>
                 <a:ea typeface="Calibri"/>
                 <a:cs typeface="Calibri"/>
                 <a:sym typeface="Calibri"/>
               </a:rPr>
-              <a:t>i</a:t>
-            </a:r>
-            <a:r>
-              <a:rPr lang="en-US" dirty="0">
-                <a:solidFill>
-                  <a:schemeClr val="dk1"/>
+              <a:t>P(</a:t>
+            </a:r>
+            <a:r>
+              <a:rPr lang="en-US" b="1" dirty="0" err="1">
+                <a:solidFill>
+                  <a:srgbClr val="0070C0"/>
+                </a:solidFill>
+                <a:latin typeface="Calibri"/>
+                <a:ea typeface="Calibri"/>
+                <a:cs typeface="Calibri"/>
+                <a:sym typeface="Calibri"/>
+              </a:rPr>
+              <a:t>A</a:t>
+            </a:r>
+            <a:r>
+              <a:rPr lang="en-US" b="1" baseline="-25000" dirty="0" err="1">
+                <a:solidFill>
+                  <a:srgbClr val="0070C0"/>
+                </a:solidFill>
+                <a:latin typeface="Calibri"/>
+                <a:ea typeface="Calibri"/>
+                <a:cs typeface="Calibri"/>
+                <a:sym typeface="Calibri"/>
+              </a:rPr>
+              <a:t>ij</a:t>
+            </a:r>
+            <a:r>
+              <a:rPr lang="en-US" b="1" dirty="0">
+                <a:solidFill>
+                  <a:srgbClr val="0070C0"/>
                 </a:solidFill>
                 <a:latin typeface="Calibri"/>
                 <a:ea typeface="Calibri"/>
@@ -24945,11 +24969,20 @@
                 <a:cs typeface="Calibri"/>
                 <a:sym typeface="Calibri"/>
               </a:rPr>
-              <a:t>For example we can calculate </a:t>
-            </a:r>
-          </a:p>
-          <a:p>
-            <a:pPr lvl="0"/>
+              <a:t>where </a:t>
+            </a:r>
+            <a:r>
+              <a:rPr lang="en-US" dirty="0" err="1">
+                <a:solidFill>
+                  <a:schemeClr val="dk1"/>
+                </a:solidFill>
+                <a:latin typeface="Calibri"/>
+                <a:ea typeface="Calibri"/>
+                <a:cs typeface="Calibri"/>
+                <a:sym typeface="Calibri"/>
+              </a:rPr>
+              <a:t>i</a:t>
+            </a:r>
             <a:r>
               <a:rPr lang="en-US" dirty="0">
                 <a:solidFill>
@@ -24960,7 +24993,31 @@
                 <a:cs typeface="Calibri"/>
                 <a:sym typeface="Calibri"/>
               </a:rPr>
-              <a:t>how often we played or not played golf when it was rainy, etc. </a:t>
+              <a:t> = 1,2,3,4, j=1,2,3 for Outlook (</a:t>
+            </a:r>
+            <a:r>
+              <a:rPr lang="en-US" dirty="0" err="1">
+                <a:solidFill>
+                  <a:schemeClr val="dk1"/>
+                </a:solidFill>
+                <a:latin typeface="Calibri"/>
+                <a:ea typeface="Calibri"/>
+                <a:cs typeface="Calibri"/>
+                <a:sym typeface="Calibri"/>
+              </a:rPr>
+              <a:t>Rayny</a:t>
+            </a:r>
+            <a:r>
+              <a:rPr lang="en-US" dirty="0">
+                <a:solidFill>
+                  <a:schemeClr val="dk1"/>
+                </a:solidFill>
+                <a:latin typeface="Calibri"/>
+                <a:ea typeface="Calibri"/>
+                <a:cs typeface="Calibri"/>
+                <a:sym typeface="Calibri"/>
+              </a:rPr>
+              <a:t>, Overcast, Sunny), etc.</a:t>
             </a:r>
           </a:p>
           <a:p>
@@ -24987,73 +25044,84 @@
                 <a:cs typeface="Calibri"/>
                 <a:sym typeface="Calibri"/>
               </a:rPr>
-              <a:t>Then we will be calculating the opposite – the probability of playing golf</a:t>
+              <a:t>Let's calculate P(</a:t>
+            </a:r>
+            <a:r>
+              <a:rPr lang="en-US" dirty="0" err="1">
+                <a:solidFill>
+                  <a:schemeClr val="dk1"/>
+                </a:solidFill>
+                <a:latin typeface="Calibri"/>
+                <a:ea typeface="Calibri"/>
+                <a:cs typeface="Calibri"/>
+                <a:sym typeface="Calibri"/>
+              </a:rPr>
+              <a:t>Rainy|Yes</a:t>
+            </a:r>
+            <a:r>
+              <a:rPr lang="en-US" dirty="0">
+                <a:solidFill>
+                  <a:schemeClr val="dk1"/>
+                </a:solidFill>
+                <a:latin typeface="Calibri"/>
+                <a:ea typeface="Calibri"/>
+                <a:cs typeface="Calibri"/>
+                <a:sym typeface="Calibri"/>
+              </a:rPr>
+              <a:t>) and  P(</a:t>
+            </a:r>
+            <a:r>
+              <a:rPr lang="en-US" dirty="0" err="1">
+                <a:solidFill>
+                  <a:schemeClr val="dk1"/>
+                </a:solidFill>
+                <a:latin typeface="Calibri"/>
+                <a:ea typeface="Calibri"/>
+                <a:cs typeface="Calibri"/>
+                <a:sym typeface="Calibri"/>
+              </a:rPr>
+              <a:t>Rainy|No</a:t>
+            </a:r>
+            <a:r>
+              <a:rPr lang="en-US" dirty="0">
+                <a:solidFill>
+                  <a:schemeClr val="dk1"/>
+                </a:solidFill>
+                <a:latin typeface="Calibri"/>
+                <a:ea typeface="Calibri"/>
+                <a:cs typeface="Calibri"/>
+                <a:sym typeface="Calibri"/>
+              </a:rPr>
+              <a:t>):</a:t>
             </a:r>
           </a:p>
           <a:p>
             <a:pPr lvl="0"/>
             <a:r>
-              <a:rPr lang="en-US" dirty="0">
-                <a:solidFill>
-                  <a:schemeClr val="dk1"/>
-                </a:solidFill>
-                <a:latin typeface="Calibri"/>
-                <a:ea typeface="Calibri"/>
-                <a:cs typeface="Calibri"/>
+              <a:rPr lang="en-US" sz="1100" dirty="0">
+                <a:solidFill>
+                  <a:srgbClr val="0070C0"/>
+                </a:solidFill>
+                <a:latin typeface="Menlo" panose="020B0609030804020204" pitchFamily="49" charset="0"/>
+                <a:ea typeface="Menlo" panose="020B0609030804020204" pitchFamily="49" charset="0"/>
+                <a:cs typeface="Menlo" panose="020B0609030804020204" pitchFamily="49" charset="0"/>
                 <a:sym typeface="Calibri"/>
               </a:rPr>
-              <a:t>given a specific set of features: P(</a:t>
-            </a:r>
-            <a:r>
-              <a:rPr lang="en-US" dirty="0" err="1">
-                <a:solidFill>
-                  <a:schemeClr val="dk1"/>
-                </a:solidFill>
-                <a:latin typeface="Calibri"/>
-                <a:ea typeface="Calibri"/>
-                <a:cs typeface="Calibri"/>
+              <a:t>       P(Rainy | Yes) = 2/9    ( N(Yes) = 9, N(Yes, Rainy) =  2 )</a:t>
+            </a:r>
+          </a:p>
+          <a:p>
+            <a:r>
+              <a:rPr lang="en-US" sz="1100" dirty="0">
+                <a:solidFill>
+                  <a:srgbClr val="0070C0"/>
+                </a:solidFill>
+                <a:latin typeface="Menlo" panose="020B0609030804020204" pitchFamily="49" charset="0"/>
+                <a:ea typeface="Menlo" panose="020B0609030804020204" pitchFamily="49" charset="0"/>
+                <a:cs typeface="Menlo" panose="020B0609030804020204" pitchFamily="49" charset="0"/>
                 <a:sym typeface="Calibri"/>
               </a:rPr>
-              <a:t>B|A</a:t>
-            </a:r>
-            <a:r>
-              <a:rPr lang="en-US" baseline="-25000" dirty="0" err="1">
-                <a:solidFill>
-                  <a:schemeClr val="dk1"/>
-                </a:solidFill>
-                <a:latin typeface="Calibri"/>
-                <a:ea typeface="Calibri"/>
-                <a:cs typeface="Calibri"/>
-                <a:sym typeface="Calibri"/>
-              </a:rPr>
-              <a:t>i</a:t>
-            </a:r>
-            <a:r>
-              <a:rPr lang="en-US" dirty="0">
-                <a:solidFill>
-                  <a:schemeClr val="dk1"/>
-                </a:solidFill>
-                <a:latin typeface="Calibri"/>
-                <a:ea typeface="Calibri"/>
-                <a:cs typeface="Calibri"/>
-                <a:sym typeface="Calibri"/>
-              </a:rPr>
-              <a:t>) . </a:t>
-            </a:r>
-          </a:p>
-          <a:p>
-            <a:pPr lvl="0"/>
-            <a:r>
-              <a:rPr lang="en-US" dirty="0">
-                <a:solidFill>
-                  <a:schemeClr val="dk1"/>
-                </a:solidFill>
-                <a:latin typeface="Calibri"/>
-                <a:ea typeface="Calibri"/>
-                <a:cs typeface="Calibri"/>
-                <a:sym typeface="Calibri"/>
-              </a:rPr>
-              <a:t>We will use Bayes formula for this.</a:t>
+              <a:t>       P(Rainy |  No) = 3/5    ( N( No) = 5, N( No, Rainy) =  3 )</a:t>
             </a:r>
           </a:p>
           <a:p>
@@ -25080,10 +25148,13 @@
                 <a:cs typeface="Calibri"/>
                 <a:sym typeface="Calibri"/>
               </a:rPr>
-              <a:t>In other words, we will be able to predict outcome B from features A</a:t>
-            </a:r>
-            <a:r>
-              <a:rPr lang="en-US" baseline="-25000" dirty="0">
+              <a:t>Similarly we can calculate all other conditional probabilities.</a:t>
+            </a:r>
+          </a:p>
+          <a:p>
+            <a:pPr lvl="0"/>
+            <a:r>
+              <a:rPr lang="en-US" dirty="0">
                 <a:solidFill>
                   <a:schemeClr val="dk1"/>
                 </a:solidFill>
@@ -25092,19 +25163,136 @@
                 <a:cs typeface="Calibri"/>
                 <a:sym typeface="Calibri"/>
               </a:rPr>
-              <a:t>i</a:t>
-            </a:r>
+              <a:t>Then we can use Bayes formula to calculate the probability of playing golf</a:t>
+            </a:r>
+          </a:p>
+          <a:p>
+            <a:pPr lvl="0"/>
             <a:r>
               <a:rPr lang="en-US" dirty="0">
                 <a:solidFill>
                   <a:schemeClr val="dk1"/>
                 </a:solidFill>
                 <a:latin typeface="Calibri"/>
-                <a:ea typeface="Calibri"/>
                 <a:cs typeface="Calibri"/>
                 <a:sym typeface="Calibri"/>
               </a:rPr>
-              <a:t>.</a:t>
+              <a:t>given any specific set of features.</a:t>
+            </a:r>
+          </a:p>
+          <a:p>
+            <a:pPr lvl="0"/>
+            <a:endParaRPr lang="en-US" dirty="0">
+              <a:solidFill>
+                <a:schemeClr val="dk1"/>
+              </a:solidFill>
+              <a:latin typeface="Calibri"/>
+              <a:cs typeface="Calibri"/>
+              <a:sym typeface="Calibri"/>
+            </a:endParaRPr>
+          </a:p>
+          <a:p>
+            <a:r>
+              <a:rPr lang="en-US" dirty="0">
+                <a:solidFill>
+                  <a:schemeClr val="dk1"/>
+                </a:solidFill>
+                <a:latin typeface="Calibri"/>
+                <a:cs typeface="Calibri"/>
+              </a:rPr>
+              <a:t>Note that we don't have to calculate the denominator of the Bayes formula, because it is the same for both probabilities (Yes and No), and for classification purposes we only need to determine which value is larger. </a:t>
+            </a:r>
+          </a:p>
+          <a:p>
+            <a:r>
+              <a:rPr lang="en-US" dirty="0">
+                <a:solidFill>
+                  <a:schemeClr val="dk1"/>
+                </a:solidFill>
+                <a:latin typeface="Calibri"/>
+                <a:cs typeface="Calibri"/>
+              </a:rPr>
+              <a:t>Also we can normalize:  </a:t>
+            </a:r>
+            <a:r>
+              <a:rPr lang="en-US" b="1" dirty="0" err="1">
+                <a:solidFill>
+                  <a:srgbClr val="0070C0"/>
+                </a:solidFill>
+                <a:latin typeface="Calibri"/>
+                <a:cs typeface="Calibri"/>
+              </a:rPr>
+              <a:t>P</a:t>
+            </a:r>
+            <a:r>
+              <a:rPr lang="en-US" b="1" baseline="-25000" dirty="0" err="1">
+                <a:solidFill>
+                  <a:srgbClr val="0070C0"/>
+                </a:solidFill>
+                <a:latin typeface="Calibri"/>
+                <a:cs typeface="Calibri"/>
+              </a:rPr>
+              <a:t>Yes</a:t>
+            </a:r>
+            <a:r>
+              <a:rPr lang="en-US" b="1" dirty="0">
+                <a:solidFill>
+                  <a:srgbClr val="0070C0"/>
+                </a:solidFill>
+                <a:latin typeface="Calibri"/>
+                <a:cs typeface="Calibri"/>
+              </a:rPr>
+              <a:t> / (</a:t>
+            </a:r>
+            <a:r>
+              <a:rPr lang="en-US" b="1" dirty="0" err="1">
+                <a:solidFill>
+                  <a:srgbClr val="0070C0"/>
+                </a:solidFill>
+                <a:latin typeface="Calibri"/>
+                <a:cs typeface="Calibri"/>
+              </a:rPr>
+              <a:t>P</a:t>
+            </a:r>
+            <a:r>
+              <a:rPr lang="en-US" b="1" baseline="-25000" dirty="0" err="1">
+                <a:solidFill>
+                  <a:srgbClr val="0070C0"/>
+                </a:solidFill>
+                <a:latin typeface="Calibri"/>
+                <a:cs typeface="Calibri"/>
+              </a:rPr>
+              <a:t>Yes</a:t>
+            </a:r>
+            <a:r>
+              <a:rPr lang="en-US" b="1" dirty="0" err="1">
+                <a:solidFill>
+                  <a:srgbClr val="0070C0"/>
+                </a:solidFill>
+                <a:latin typeface="Calibri"/>
+                <a:cs typeface="Calibri"/>
+              </a:rPr>
+              <a:t>+P</a:t>
+            </a:r>
+            <a:r>
+              <a:rPr lang="en-US" b="1" baseline="-25000" dirty="0" err="1">
+                <a:solidFill>
+                  <a:srgbClr val="0070C0"/>
+                </a:solidFill>
+                <a:latin typeface="Calibri"/>
+                <a:cs typeface="Calibri"/>
+              </a:rPr>
+              <a:t>No</a:t>
+            </a:r>
+            <a:r>
+              <a:rPr lang="en-US" b="1" dirty="0">
+                <a:solidFill>
+                  <a:srgbClr val="0070C0"/>
+                </a:solidFill>
+                <a:latin typeface="Calibri"/>
+                <a:cs typeface="Calibri"/>
+              </a:rPr>
+              <a:t>)</a:t>
             </a:r>
           </a:p>
         </p:txBody>

--- a/Bayes_Bayesian.pptx
+++ b/Bayes_Bayesian.pptx
@@ -5,19 +5,21 @@
     <p:sldMasterId id="2147483659" r:id="rId1"/>
   </p:sldMasterIdLst>
   <p:notesMasterIdLst>
-    <p:notesMasterId r:id="rId12"/>
+    <p:notesMasterId r:id="rId14"/>
   </p:notesMasterIdLst>
   <p:sldIdLst>
     <p:sldId id="256" r:id="rId2"/>
     <p:sldId id="263" r:id="rId3"/>
-    <p:sldId id="292" r:id="rId4"/>
-    <p:sldId id="291" r:id="rId5"/>
-    <p:sldId id="257" r:id="rId6"/>
-    <p:sldId id="258" r:id="rId7"/>
-    <p:sldId id="260" r:id="rId8"/>
-    <p:sldId id="293" r:id="rId9"/>
-    <p:sldId id="294" r:id="rId10"/>
-    <p:sldId id="262" r:id="rId11"/>
+    <p:sldId id="295" r:id="rId4"/>
+    <p:sldId id="296" r:id="rId5"/>
+    <p:sldId id="291" r:id="rId6"/>
+    <p:sldId id="292" r:id="rId7"/>
+    <p:sldId id="257" r:id="rId8"/>
+    <p:sldId id="258" r:id="rId9"/>
+    <p:sldId id="260" r:id="rId10"/>
+    <p:sldId id="293" r:id="rId11"/>
+    <p:sldId id="294" r:id="rId12"/>
+    <p:sldId id="262" r:id="rId13"/>
   </p:sldIdLst>
   <p:sldSz cx="12192000" cy="6858000"/>
   <p:notesSz cx="6858000" cy="9144000"/>
@@ -15927,8 +15929,8 @@
           <a:chExt cx="0" cy="0"/>
         </a:xfrm>
       </p:grpSpPr>
-      <mc:AlternateContent xmlns:mc="http://schemas.openxmlformats.org/markup-compatibility/2006" xmlns:a14="http://schemas.microsoft.com/office/drawing/2010/main">
-        <mc:Choice Requires="a14">
+      <mc:AlternateContent xmlns:mc="http://schemas.openxmlformats.org/markup-compatibility/2006">
+        <mc:Choice xmlns:a14="http://schemas.microsoft.com/office/drawing/2010/main" Requires="a14">
           <p:sp>
             <p:nvSpPr>
               <p:cNvPr id="88" name="Google Shape;88;p13"/>
@@ -15937,7 +15939,7 @@
             </p:nvSpPr>
             <p:spPr>
               <a:xfrm>
-                <a:off x="46886" y="1208258"/>
+                <a:off x="145742" y="1208258"/>
                 <a:ext cx="6187097" cy="2450487"/>
               </a:xfrm>
               <a:prstGeom prst="rect">
@@ -16375,7 +16377,7 @@
             </p:txBody>
           </p:sp>
         </mc:Choice>
-        <mc:Fallback xmlns="">
+        <mc:Fallback>
           <p:sp>
             <p:nvSpPr>
               <p:cNvPr id="88" name="Google Shape;88;p13"/>
@@ -16386,7 +16388,7 @@
             </p:nvSpPr>
             <p:spPr>
               <a:xfrm>
-                <a:off x="46886" y="1208258"/>
+                <a:off x="145742" y="1208258"/>
                 <a:ext cx="6187097" cy="2450487"/>
               </a:xfrm>
               <a:prstGeom prst="rect">
@@ -17284,7 +17286,7 @@
         </p:blipFill>
         <p:spPr>
           <a:xfrm>
-            <a:off x="6441793" y="1862689"/>
+            <a:off x="6649954" y="1838425"/>
             <a:ext cx="2946400" cy="660400"/>
           </a:xfrm>
           <a:prstGeom prst="rect">
@@ -17445,6 +17447,146 @@
           </a:p>
         </p:txBody>
       </p:sp>
+      <p:sp>
+        <p:nvSpPr>
+          <p:cNvPr id="3" name="TextBox 2">
+            <a:extLst>
+              <a:ext uri="{FF2B5EF4-FFF2-40B4-BE49-F238E27FC236}">
+                <a16:creationId xmlns:a16="http://schemas.microsoft.com/office/drawing/2014/main" id="{680BD279-5025-984E-9F93-DDE8AEBFA92D}"/>
+              </a:ext>
+            </a:extLst>
+          </p:cNvPr>
+          <p:cNvSpPr txBox="1"/>
+          <p:nvPr/>
+        </p:nvSpPr>
+        <p:spPr>
+          <a:xfrm>
+            <a:off x="8719972" y="1445339"/>
+            <a:ext cx="890203" cy="307777"/>
+          </a:xfrm>
+          <a:prstGeom prst="rect">
+            <a:avLst/>
+          </a:prstGeom>
+          <a:noFill/>
+        </p:spPr>
+        <p:txBody>
+          <a:bodyPr wrap="square" rtlCol="0">
+            <a:spAutoFit/>
+          </a:bodyPr>
+          <a:lstStyle/>
+          <a:p>
+            <a:r>
+              <a:rPr lang="en-US" dirty="0"/>
+              <a:t>P(B|A)</a:t>
+            </a:r>
+          </a:p>
+        </p:txBody>
+      </p:sp>
+      <p:sp>
+        <p:nvSpPr>
+          <p:cNvPr id="18" name="TextBox 17">
+            <a:extLst>
+              <a:ext uri="{FF2B5EF4-FFF2-40B4-BE49-F238E27FC236}">
+                <a16:creationId xmlns:a16="http://schemas.microsoft.com/office/drawing/2014/main" id="{14E09531-C697-B042-B4BC-38DCCD68B758}"/>
+              </a:ext>
+            </a:extLst>
+          </p:cNvPr>
+          <p:cNvSpPr txBox="1"/>
+          <p:nvPr/>
+        </p:nvSpPr>
+        <p:spPr>
+          <a:xfrm>
+            <a:off x="7824512" y="1445339"/>
+            <a:ext cx="619677" cy="307777"/>
+          </a:xfrm>
+          <a:prstGeom prst="rect">
+            <a:avLst/>
+          </a:prstGeom>
+          <a:noFill/>
+        </p:spPr>
+        <p:txBody>
+          <a:bodyPr wrap="square" rtlCol="0">
+            <a:spAutoFit/>
+          </a:bodyPr>
+          <a:lstStyle/>
+          <a:p>
+            <a:r>
+              <a:rPr lang="en-US" dirty="0"/>
+              <a:t>P(A)</a:t>
+            </a:r>
+          </a:p>
+        </p:txBody>
+      </p:sp>
+      <p:sp>
+        <p:nvSpPr>
+          <p:cNvPr id="19" name="TextBox 18">
+            <a:extLst>
+              <a:ext uri="{FF2B5EF4-FFF2-40B4-BE49-F238E27FC236}">
+                <a16:creationId xmlns:a16="http://schemas.microsoft.com/office/drawing/2014/main" id="{F099BFE0-214E-2B4F-A1E1-A8D2AC7F6355}"/>
+              </a:ext>
+            </a:extLst>
+          </p:cNvPr>
+          <p:cNvSpPr txBox="1"/>
+          <p:nvPr/>
+        </p:nvSpPr>
+        <p:spPr>
+          <a:xfrm>
+            <a:off x="8413828" y="2542789"/>
+            <a:ext cx="677606" cy="307777"/>
+          </a:xfrm>
+          <a:prstGeom prst="rect">
+            <a:avLst/>
+          </a:prstGeom>
+          <a:noFill/>
+        </p:spPr>
+        <p:txBody>
+          <a:bodyPr wrap="square" rtlCol="0">
+            <a:spAutoFit/>
+          </a:bodyPr>
+          <a:lstStyle/>
+          <a:p>
+            <a:r>
+              <a:rPr lang="en-US" dirty="0"/>
+              <a:t>P(B)</a:t>
+            </a:r>
+          </a:p>
+        </p:txBody>
+      </p:sp>
+      <p:sp>
+        <p:nvSpPr>
+          <p:cNvPr id="20" name="TextBox 19">
+            <a:extLst>
+              <a:ext uri="{FF2B5EF4-FFF2-40B4-BE49-F238E27FC236}">
+                <a16:creationId xmlns:a16="http://schemas.microsoft.com/office/drawing/2014/main" id="{4D658A17-55A2-5249-ABB2-34BE8376768C}"/>
+              </a:ext>
+            </a:extLst>
+          </p:cNvPr>
+          <p:cNvSpPr txBox="1"/>
+          <p:nvPr/>
+        </p:nvSpPr>
+        <p:spPr>
+          <a:xfrm>
+            <a:off x="6673273" y="1445339"/>
+            <a:ext cx="890204" cy="307777"/>
+          </a:xfrm>
+          <a:prstGeom prst="rect">
+            <a:avLst/>
+          </a:prstGeom>
+          <a:noFill/>
+        </p:spPr>
+        <p:txBody>
+          <a:bodyPr wrap="square" rtlCol="0">
+            <a:spAutoFit/>
+          </a:bodyPr>
+          <a:lstStyle/>
+          <a:p>
+            <a:r>
+              <a:rPr lang="en-US" dirty="0"/>
+              <a:t>P(A|B)</a:t>
+            </a:r>
+          </a:p>
+        </p:txBody>
+      </p:sp>
     </p:spTree>
     <p:extLst>
       <p:ext uri="{BB962C8B-B14F-4D97-AF65-F5344CB8AC3E}">
@@ -17459,6 +17601,1472 @@
 </file>
 
 <file path=ppt/slides/slide10.xml><?xml version="1.0" encoding="utf-8"?>
+<p:sld xmlns:a="http://schemas.openxmlformats.org/drawingml/2006/main" xmlns:r="http://schemas.openxmlformats.org/officeDocument/2006/relationships" xmlns:p="http://schemas.openxmlformats.org/presentationml/2006/main">
+  <p:cSld>
+    <p:spTree>
+      <p:nvGrpSpPr>
+        <p:cNvPr id="1" name="Shape 87"/>
+        <p:cNvGrpSpPr/>
+        <p:nvPr/>
+      </p:nvGrpSpPr>
+      <p:grpSpPr>
+        <a:xfrm>
+          <a:off x="0" y="0"/>
+          <a:ext cx="0" cy="0"/>
+          <a:chOff x="0" y="0"/>
+          <a:chExt cx="0" cy="0"/>
+        </a:xfrm>
+      </p:grpSpPr>
+      <p:sp>
+        <p:nvSpPr>
+          <p:cNvPr id="18" name="Google Shape;107;p14">
+            <a:extLst>
+              <a:ext uri="{FF2B5EF4-FFF2-40B4-BE49-F238E27FC236}">
+                <a16:creationId xmlns:a16="http://schemas.microsoft.com/office/drawing/2014/main" id="{C2992640-6531-5D46-B219-A020079806DB}"/>
+              </a:ext>
+            </a:extLst>
+          </p:cNvPr>
+          <p:cNvSpPr txBox="1"/>
+          <p:nvPr/>
+        </p:nvSpPr>
+        <p:spPr>
+          <a:xfrm>
+            <a:off x="91343" y="40387"/>
+            <a:ext cx="5893822" cy="1137250"/>
+          </a:xfrm>
+          <a:prstGeom prst="rect">
+            <a:avLst/>
+          </a:prstGeom>
+          <a:noFill/>
+          <a:ln>
+            <a:noFill/>
+          </a:ln>
+        </p:spPr>
+        <p:txBody>
+          <a:bodyPr spcFirstLastPara="1" wrap="square" lIns="91425" tIns="45700" rIns="91425" bIns="45700" anchor="t" anchorCtr="0">
+            <a:noAutofit/>
+          </a:bodyPr>
+          <a:lstStyle/>
+          <a:p>
+            <a:pPr marL="0" marR="0" lvl="0" indent="0" algn="l" rtl="0">
+              <a:spcBef>
+                <a:spcPts val="0"/>
+              </a:spcBef>
+              <a:spcAft>
+                <a:spcPts val="0"/>
+              </a:spcAft>
+              <a:buNone/>
+            </a:pPr>
+            <a:r>
+              <a:rPr lang="en-US" sz="2800" b="1" dirty="0">
+                <a:solidFill>
+                  <a:schemeClr val="tx1"/>
+                </a:solidFill>
+                <a:latin typeface="Calibri" panose="020F0502020204030204" pitchFamily="34" charset="0"/>
+                <a:cs typeface="Calibri" panose="020F0502020204030204" pitchFamily="34" charset="0"/>
+                <a:sym typeface="Calibri"/>
+              </a:rPr>
+              <a:t>Bayesian network  </a:t>
+            </a:r>
+            <a:br>
+              <a:rPr lang="en-US" sz="2800" b="1" dirty="0">
+                <a:solidFill>
+                  <a:schemeClr val="tx1"/>
+                </a:solidFill>
+                <a:latin typeface="Calibri" panose="020F0502020204030204" pitchFamily="34" charset="0"/>
+                <a:cs typeface="Calibri" panose="020F0502020204030204" pitchFamily="34" charset="0"/>
+                <a:sym typeface="Calibri"/>
+              </a:rPr>
+            </a:br>
+            <a:r>
+              <a:rPr lang="en-US" sz="1800" dirty="0">
+                <a:solidFill>
+                  <a:schemeClr val="dk1"/>
+                </a:solidFill>
+                <a:latin typeface="Calibri"/>
+                <a:cs typeface="Calibri"/>
+                <a:sym typeface="Calibri"/>
+              </a:rPr>
+              <a:t>( a.k.a. Bayes network, belief network, Bayes(</a:t>
+            </a:r>
+            <a:r>
+              <a:rPr lang="en-US" sz="1800" dirty="0" err="1">
+                <a:solidFill>
+                  <a:schemeClr val="dk1"/>
+                </a:solidFill>
+                <a:latin typeface="Calibri"/>
+                <a:cs typeface="Calibri"/>
+                <a:sym typeface="Calibri"/>
+              </a:rPr>
+              <a:t>ian</a:t>
+            </a:r>
+            <a:r>
+              <a:rPr lang="en-US" sz="1800" dirty="0">
+                <a:solidFill>
+                  <a:schemeClr val="dk1"/>
+                </a:solidFill>
+                <a:latin typeface="Calibri"/>
+                <a:cs typeface="Calibri"/>
+                <a:sym typeface="Calibri"/>
+              </a:rPr>
+              <a:t>) model </a:t>
+            </a:r>
+          </a:p>
+          <a:p>
+            <a:pPr marL="0" marR="0" lvl="0" indent="0" algn="l" rtl="0">
+              <a:spcBef>
+                <a:spcPts val="0"/>
+              </a:spcBef>
+              <a:spcAft>
+                <a:spcPts val="0"/>
+              </a:spcAft>
+              <a:buNone/>
+            </a:pPr>
+            <a:r>
+              <a:rPr lang="en-US" sz="1800" dirty="0">
+                <a:solidFill>
+                  <a:schemeClr val="dk1"/>
+                </a:solidFill>
+                <a:latin typeface="Calibri"/>
+                <a:cs typeface="Calibri"/>
+                <a:sym typeface="Calibri"/>
+              </a:rPr>
+              <a:t>  or probabilistic directed acyclic graphical model )</a:t>
+            </a:r>
+            <a:r>
+              <a:rPr lang="en-US" sz="1800" dirty="0">
+                <a:solidFill>
+                  <a:schemeClr val="dk1"/>
+                </a:solidFill>
+                <a:latin typeface="Calibri"/>
+                <a:ea typeface="Calibri"/>
+                <a:cs typeface="Calibri"/>
+                <a:sym typeface="Calibri"/>
+              </a:rPr>
+              <a:t> </a:t>
+            </a:r>
+          </a:p>
+        </p:txBody>
+      </p:sp>
+      <p:pic>
+        <p:nvPicPr>
+          <p:cNvPr id="19" name="Google Shape;114;p14">
+            <a:extLst>
+              <a:ext uri="{FF2B5EF4-FFF2-40B4-BE49-F238E27FC236}">
+                <a16:creationId xmlns:a16="http://schemas.microsoft.com/office/drawing/2014/main" id="{6CEB8B6B-5D31-D04D-8340-CFFC67C74C71}"/>
+              </a:ext>
+            </a:extLst>
+          </p:cNvPr>
+          <p:cNvPicPr preferRelativeResize="0"/>
+          <p:nvPr/>
+        </p:nvPicPr>
+        <p:blipFill rotWithShape="1">
+          <a:blip r:embed="rId3" cstate="email">
+            <a:alphaModFix/>
+            <a:extLst>
+              <a:ext uri="{28A0092B-C50C-407E-A947-70E740481C1C}">
+                <a14:useLocalDpi xmlns:a14="http://schemas.microsoft.com/office/drawing/2010/main"/>
+              </a:ext>
+            </a:extLst>
+          </a:blip>
+          <a:srcRect/>
+          <a:stretch/>
+        </p:blipFill>
+        <p:spPr>
+          <a:xfrm>
+            <a:off x="7021286" y="418578"/>
+            <a:ext cx="1715986" cy="1996320"/>
+          </a:xfrm>
+          <a:prstGeom prst="rect">
+            <a:avLst/>
+          </a:prstGeom>
+          <a:noFill/>
+          <a:ln>
+            <a:noFill/>
+          </a:ln>
+        </p:spPr>
+      </p:pic>
+      <p:pic>
+        <p:nvPicPr>
+          <p:cNvPr id="1026" name="Picture 2" descr="A name for layered directed graph as in a fully-connected neural network -  Mathematics Stack Exchange">
+            <a:extLst>
+              <a:ext uri="{FF2B5EF4-FFF2-40B4-BE49-F238E27FC236}">
+                <a16:creationId xmlns:a16="http://schemas.microsoft.com/office/drawing/2014/main" id="{9F27D678-C094-7546-8A93-B3B6A7DC683E}"/>
+              </a:ext>
+            </a:extLst>
+          </p:cNvPr>
+          <p:cNvPicPr>
+            <a:picLocks noChangeAspect="1" noChangeArrowheads="1"/>
+          </p:cNvPicPr>
+          <p:nvPr/>
+        </p:nvPicPr>
+        <p:blipFill>
+          <a:blip r:embed="rId4" cstate="email">
+            <a:extLst>
+              <a:ext uri="{28A0092B-C50C-407E-A947-70E740481C1C}">
+                <a14:useLocalDpi xmlns:a14="http://schemas.microsoft.com/office/drawing/2010/main"/>
+              </a:ext>
+            </a:extLst>
+          </a:blip>
+          <a:srcRect/>
+          <a:stretch>
+            <a:fillRect/>
+          </a:stretch>
+        </p:blipFill>
+        <p:spPr bwMode="auto">
+          <a:xfrm>
+            <a:off x="7021286" y="3248453"/>
+            <a:ext cx="4388069" cy="2234581"/>
+          </a:xfrm>
+          <a:prstGeom prst="rect">
+            <a:avLst/>
+          </a:prstGeom>
+          <a:noFill/>
+          <a:extLst>
+            <a:ext uri="{909E8E84-426E-40DD-AFC4-6F175D3DCCD1}">
+              <a14:hiddenFill xmlns:a14="http://schemas.microsoft.com/office/drawing/2010/main">
+                <a:solidFill>
+                  <a:srgbClr val="FFFFFF"/>
+                </a:solidFill>
+              </a14:hiddenFill>
+            </a:ext>
+          </a:extLst>
+        </p:spPr>
+      </p:pic>
+      <p:sp>
+        <p:nvSpPr>
+          <p:cNvPr id="5" name="Google Shape;107;p14">
+            <a:extLst>
+              <a:ext uri="{FF2B5EF4-FFF2-40B4-BE49-F238E27FC236}">
+                <a16:creationId xmlns:a16="http://schemas.microsoft.com/office/drawing/2014/main" id="{341F2A09-BD6A-6E40-B245-BD73EC20CC51}"/>
+              </a:ext>
+            </a:extLst>
+          </p:cNvPr>
+          <p:cNvSpPr txBox="1"/>
+          <p:nvPr/>
+        </p:nvSpPr>
+        <p:spPr>
+          <a:xfrm>
+            <a:off x="91342" y="1416738"/>
+            <a:ext cx="6613415" cy="998160"/>
+          </a:xfrm>
+          <a:prstGeom prst="rect">
+            <a:avLst/>
+          </a:prstGeom>
+          <a:noFill/>
+          <a:ln>
+            <a:noFill/>
+          </a:ln>
+        </p:spPr>
+        <p:txBody>
+          <a:bodyPr spcFirstLastPara="1" wrap="square" lIns="91425" tIns="45700" rIns="91425" bIns="45700" anchor="t" anchorCtr="0">
+            <a:noAutofit/>
+          </a:bodyPr>
+          <a:lstStyle/>
+          <a:p>
+            <a:pPr marL="0" marR="0" lvl="0" indent="0" algn="l" rtl="0">
+              <a:spcBef>
+                <a:spcPts val="0"/>
+              </a:spcBef>
+              <a:spcAft>
+                <a:spcPts val="0"/>
+              </a:spcAft>
+              <a:buNone/>
+            </a:pPr>
+            <a:r>
+              <a:rPr lang="en-US" sz="1800" b="1" dirty="0">
+                <a:solidFill>
+                  <a:schemeClr val="accent1"/>
+                </a:solidFill>
+                <a:latin typeface="Calibri" panose="020F0502020204030204" pitchFamily="34" charset="0"/>
+                <a:cs typeface="Calibri" panose="020F0502020204030204" pitchFamily="34" charset="0"/>
+                <a:sym typeface="Calibri"/>
+              </a:rPr>
+              <a:t>Bayesian network </a:t>
+            </a:r>
+            <a:r>
+              <a:rPr lang="en-US" sz="1800" dirty="0">
+                <a:solidFill>
+                  <a:schemeClr val="dk1"/>
+                </a:solidFill>
+                <a:latin typeface="Calibri"/>
+                <a:ea typeface="Calibri"/>
+                <a:cs typeface="Calibri"/>
+                <a:sym typeface="Calibri"/>
+              </a:rPr>
+              <a:t>is a probabilistic graphical model (a type of statistical model) that represents a set of random variables and their conditional dependencies via a directed acyclic graph (DAG). </a:t>
+            </a:r>
+          </a:p>
+        </p:txBody>
+      </p:sp>
+      <p:sp>
+        <p:nvSpPr>
+          <p:cNvPr id="7" name="Google Shape;107;p14">
+            <a:extLst>
+              <a:ext uri="{FF2B5EF4-FFF2-40B4-BE49-F238E27FC236}">
+                <a16:creationId xmlns:a16="http://schemas.microsoft.com/office/drawing/2014/main" id="{4CCE08F0-3501-EE45-BB4D-DD3F87E80562}"/>
+              </a:ext>
+            </a:extLst>
+          </p:cNvPr>
+          <p:cNvSpPr txBox="1"/>
+          <p:nvPr/>
+        </p:nvSpPr>
+        <p:spPr>
+          <a:xfrm>
+            <a:off x="91342" y="2423668"/>
+            <a:ext cx="6428357" cy="1480847"/>
+          </a:xfrm>
+          <a:prstGeom prst="rect">
+            <a:avLst/>
+          </a:prstGeom>
+          <a:noFill/>
+          <a:ln>
+            <a:noFill/>
+          </a:ln>
+        </p:spPr>
+        <p:txBody>
+          <a:bodyPr spcFirstLastPara="1" wrap="square" lIns="91425" tIns="45700" rIns="91425" bIns="45700" anchor="t" anchorCtr="0">
+            <a:noAutofit/>
+          </a:bodyPr>
+          <a:lstStyle/>
+          <a:p>
+            <a:pPr marL="0" marR="0" lvl="0" indent="0" algn="l" rtl="0">
+              <a:spcBef>
+                <a:spcPts val="0"/>
+              </a:spcBef>
+              <a:spcAft>
+                <a:spcPts val="0"/>
+              </a:spcAft>
+              <a:buNone/>
+            </a:pPr>
+            <a:r>
+              <a:rPr lang="en-US" sz="1800" dirty="0">
+                <a:solidFill>
+                  <a:schemeClr val="dk1"/>
+                </a:solidFill>
+                <a:latin typeface="Calibri"/>
+                <a:ea typeface="Calibri"/>
+                <a:cs typeface="Calibri"/>
+                <a:sym typeface="Calibri"/>
+              </a:rPr>
+              <a:t>Example: </a:t>
+            </a:r>
+          </a:p>
+          <a:p>
+            <a:pPr lvl="0"/>
+            <a:r>
+              <a:rPr lang="en-US" sz="1800" b="1" dirty="0">
+                <a:solidFill>
+                  <a:srgbClr val="0070C0"/>
+                </a:solidFill>
+                <a:latin typeface="Calibri"/>
+                <a:ea typeface="Calibri"/>
+                <a:cs typeface="Calibri"/>
+                <a:sym typeface="Calibri"/>
+              </a:rPr>
+              <a:t>Deep Belief Networks </a:t>
+            </a:r>
+            <a:r>
+              <a:rPr lang="en-US" sz="1800" dirty="0">
+                <a:solidFill>
+                  <a:schemeClr val="dk1"/>
+                </a:solidFill>
+                <a:latin typeface="Calibri"/>
+                <a:ea typeface="Calibri"/>
+                <a:cs typeface="Calibri"/>
+                <a:sym typeface="Calibri"/>
+              </a:rPr>
+              <a:t>- made of layers of RBMs, each next layer (“B”) is trained on top of the previous layer (“A”).</a:t>
+            </a:r>
+          </a:p>
+          <a:p>
+            <a:pPr marL="0" marR="0" lvl="0" indent="0" algn="l" rtl="0">
+              <a:spcBef>
+                <a:spcPts val="0"/>
+              </a:spcBef>
+              <a:spcAft>
+                <a:spcPts val="0"/>
+              </a:spcAft>
+              <a:buNone/>
+            </a:pPr>
+            <a:r>
+              <a:rPr lang="en-US" sz="1800" dirty="0">
+                <a:solidFill>
+                  <a:schemeClr val="dk1"/>
+                </a:solidFill>
+                <a:latin typeface="Calibri"/>
+                <a:ea typeface="Calibri"/>
+                <a:cs typeface="Calibri"/>
+                <a:sym typeface="Calibri"/>
+              </a:rPr>
+              <a:t>Here </a:t>
+            </a:r>
+            <a:r>
+              <a:rPr lang="en-US" sz="1800" b="1" dirty="0">
+                <a:solidFill>
+                  <a:srgbClr val="0070C0"/>
+                </a:solidFill>
+                <a:latin typeface="Calibri"/>
+                <a:ea typeface="Calibri"/>
+                <a:cs typeface="Calibri"/>
+                <a:sym typeface="Calibri"/>
+              </a:rPr>
+              <a:t>RBM</a:t>
+            </a:r>
+            <a:r>
+              <a:rPr lang="en-US" sz="1800" dirty="0">
+                <a:solidFill>
+                  <a:schemeClr val="dk1"/>
+                </a:solidFill>
+                <a:latin typeface="Calibri"/>
+                <a:ea typeface="Calibri"/>
+                <a:cs typeface="Calibri"/>
+                <a:sym typeface="Calibri"/>
+              </a:rPr>
+              <a:t> (Restricted Boltzmann Machine) is a two-layered artificial neural network.</a:t>
+            </a:r>
+            <a:endParaRPr lang="en-US" sz="1800" dirty="0">
+              <a:solidFill>
+                <a:schemeClr val="dk1"/>
+              </a:solidFill>
+              <a:latin typeface="Calibri"/>
+              <a:cs typeface="Calibri"/>
+              <a:sym typeface="Calibri"/>
+            </a:endParaRPr>
+          </a:p>
+        </p:txBody>
+      </p:sp>
+      <p:pic>
+        <p:nvPicPr>
+          <p:cNvPr id="3" name="Picture 2">
+            <a:extLst>
+              <a:ext uri="{FF2B5EF4-FFF2-40B4-BE49-F238E27FC236}">
+                <a16:creationId xmlns:a16="http://schemas.microsoft.com/office/drawing/2014/main" id="{221CF74C-2765-1A49-9DE4-312EA056AB81}"/>
+              </a:ext>
+            </a:extLst>
+          </p:cNvPr>
+          <p:cNvPicPr>
+            <a:picLocks noChangeAspect="1"/>
+          </p:cNvPicPr>
+          <p:nvPr/>
+        </p:nvPicPr>
+        <p:blipFill rotWithShape="1">
+          <a:blip r:embed="rId5" cstate="email">
+            <a:extLst>
+              <a:ext uri="{28A0092B-C50C-407E-A947-70E740481C1C}">
+                <a14:useLocalDpi xmlns:a14="http://schemas.microsoft.com/office/drawing/2010/main"/>
+              </a:ext>
+            </a:extLst>
+          </a:blip>
+          <a:srcRect/>
+          <a:stretch/>
+        </p:blipFill>
+        <p:spPr>
+          <a:xfrm>
+            <a:off x="2476501" y="4071018"/>
+            <a:ext cx="1123506" cy="1412016"/>
+          </a:xfrm>
+          <a:prstGeom prst="rect">
+            <a:avLst/>
+          </a:prstGeom>
+        </p:spPr>
+      </p:pic>
+      <p:pic>
+        <p:nvPicPr>
+          <p:cNvPr id="4" name="Picture 3">
+            <a:extLst>
+              <a:ext uri="{FF2B5EF4-FFF2-40B4-BE49-F238E27FC236}">
+                <a16:creationId xmlns:a16="http://schemas.microsoft.com/office/drawing/2014/main" id="{F3F0E989-24F4-954F-8654-A11FAA84E879}"/>
+              </a:ext>
+            </a:extLst>
+          </p:cNvPr>
+          <p:cNvPicPr>
+            <a:picLocks noChangeAspect="1"/>
+          </p:cNvPicPr>
+          <p:nvPr/>
+        </p:nvPicPr>
+        <p:blipFill rotWithShape="1">
+          <a:blip r:embed="rId6" cstate="email">
+            <a:extLst>
+              <a:ext uri="{28A0092B-C50C-407E-A947-70E740481C1C}">
+                <a14:useLocalDpi xmlns:a14="http://schemas.microsoft.com/office/drawing/2010/main"/>
+              </a:ext>
+            </a:extLst>
+          </a:blip>
+          <a:srcRect/>
+          <a:stretch/>
+        </p:blipFill>
+        <p:spPr>
+          <a:xfrm>
+            <a:off x="570314" y="4041266"/>
+            <a:ext cx="1253671" cy="1417842"/>
+          </a:xfrm>
+          <a:prstGeom prst="rect">
+            <a:avLst/>
+          </a:prstGeom>
+        </p:spPr>
+      </p:pic>
+      <p:sp>
+        <p:nvSpPr>
+          <p:cNvPr id="10" name="Google Shape;107;p14">
+            <a:extLst>
+              <a:ext uri="{FF2B5EF4-FFF2-40B4-BE49-F238E27FC236}">
+                <a16:creationId xmlns:a16="http://schemas.microsoft.com/office/drawing/2014/main" id="{BBAA03BF-9CD1-2742-8F30-65CF844C9AE9}"/>
+              </a:ext>
+            </a:extLst>
+          </p:cNvPr>
+          <p:cNvSpPr txBox="1"/>
+          <p:nvPr/>
+        </p:nvSpPr>
+        <p:spPr>
+          <a:xfrm>
+            <a:off x="183869" y="5485948"/>
+            <a:ext cx="6428357" cy="1219839"/>
+          </a:xfrm>
+          <a:prstGeom prst="rect">
+            <a:avLst/>
+          </a:prstGeom>
+          <a:noFill/>
+          <a:ln>
+            <a:noFill/>
+          </a:ln>
+        </p:spPr>
+        <p:txBody>
+          <a:bodyPr spcFirstLastPara="1" wrap="square" lIns="91425" tIns="45700" rIns="91425" bIns="45700" anchor="t" anchorCtr="0">
+            <a:noAutofit/>
+          </a:bodyPr>
+          <a:lstStyle/>
+          <a:p>
+            <a:pPr lvl="0"/>
+            <a:r>
+              <a:rPr lang="en-US" sz="1800" dirty="0">
+                <a:solidFill>
+                  <a:schemeClr val="dk1"/>
+                </a:solidFill>
+                <a:latin typeface="Calibri"/>
+                <a:cs typeface="Calibri"/>
+              </a:rPr>
+              <a:t>Geoffrey Hinton &amp; Ruslan </a:t>
+            </a:r>
+            <a:r>
+              <a:rPr lang="en-US" sz="1800" dirty="0" err="1">
+                <a:solidFill>
+                  <a:schemeClr val="dk1"/>
+                </a:solidFill>
+                <a:latin typeface="Calibri"/>
+                <a:cs typeface="Calibri"/>
+              </a:rPr>
+              <a:t>Salakhutdinov</a:t>
+            </a:r>
+            <a:r>
+              <a:rPr lang="en-US" sz="1800" dirty="0">
+                <a:solidFill>
+                  <a:schemeClr val="dk1"/>
+                </a:solidFill>
+                <a:latin typeface="Calibri"/>
+                <a:cs typeface="Calibri"/>
+              </a:rPr>
+              <a:t> (2006). </a:t>
+            </a:r>
+          </a:p>
+          <a:p>
+            <a:pPr lvl="0"/>
+            <a:r>
+              <a:rPr lang="en-US" sz="1800" dirty="0">
+                <a:solidFill>
+                  <a:schemeClr val="dk1"/>
+                </a:solidFill>
+                <a:latin typeface="Calibri"/>
+                <a:cs typeface="Calibri"/>
+              </a:rPr>
+              <a:t>Reducing the dimensionality of data with neural networks.</a:t>
+            </a:r>
+          </a:p>
+          <a:p>
+            <a:pPr lvl="0"/>
+            <a:r>
+              <a:rPr lang="en-US" sz="1800" dirty="0">
+                <a:solidFill>
+                  <a:schemeClr val="dk1"/>
+                </a:solidFill>
+                <a:latin typeface="Calibri"/>
+                <a:cs typeface="Calibri"/>
+              </a:rPr>
+              <a:t>Science, 313, 504 – 507.</a:t>
+            </a:r>
+          </a:p>
+          <a:p>
+            <a:pPr lvl="0"/>
+            <a:r>
+              <a:rPr lang="en-US" sz="1800" dirty="0">
+                <a:solidFill>
+                  <a:schemeClr val="dk1"/>
+                </a:solidFill>
+                <a:latin typeface="Calibri"/>
+                <a:cs typeface="Calibri"/>
+                <a:sym typeface="Calibri"/>
+              </a:rPr>
+              <a:t> - </a:t>
+            </a:r>
+            <a:r>
+              <a:rPr lang="en-US" sz="1800" dirty="0">
+                <a:solidFill>
+                  <a:schemeClr val="dk1"/>
+                </a:solidFill>
+                <a:latin typeface="Calibri"/>
+                <a:cs typeface="Calibri"/>
+                <a:sym typeface="Calibri"/>
+                <a:hlinkClick r:id="rId7"/>
+              </a:rPr>
+              <a:t>https://www.cs.toronto.edu/~hinton/science.pdf</a:t>
+            </a:r>
+            <a:r>
+              <a:rPr lang="en-US" sz="1800" dirty="0">
+                <a:solidFill>
+                  <a:schemeClr val="dk1"/>
+                </a:solidFill>
+                <a:latin typeface="Calibri"/>
+                <a:cs typeface="Calibri"/>
+                <a:sym typeface="Calibri"/>
+              </a:rPr>
+              <a:t> </a:t>
+            </a:r>
+          </a:p>
+        </p:txBody>
+      </p:sp>
+      <p:sp>
+        <p:nvSpPr>
+          <p:cNvPr id="6" name="TextBox 5">
+            <a:extLst>
+              <a:ext uri="{FF2B5EF4-FFF2-40B4-BE49-F238E27FC236}">
+                <a16:creationId xmlns:a16="http://schemas.microsoft.com/office/drawing/2014/main" id="{AC6499AC-2623-244C-B653-E3602A825F7E}"/>
+              </a:ext>
+            </a:extLst>
+          </p:cNvPr>
+          <p:cNvSpPr txBox="1"/>
+          <p:nvPr/>
+        </p:nvSpPr>
+        <p:spPr>
+          <a:xfrm>
+            <a:off x="8118388" y="5609967"/>
+            <a:ext cx="2001795" cy="307777"/>
+          </a:xfrm>
+          <a:prstGeom prst="rect">
+            <a:avLst/>
+          </a:prstGeom>
+          <a:noFill/>
+        </p:spPr>
+        <p:txBody>
+          <a:bodyPr wrap="square" rtlCol="0">
+            <a:spAutoFit/>
+          </a:bodyPr>
+          <a:lstStyle/>
+          <a:p>
+            <a:r>
+              <a:rPr lang="en-US" dirty="0"/>
+              <a:t>A Deep Belief Network</a:t>
+            </a:r>
+          </a:p>
+        </p:txBody>
+      </p:sp>
+    </p:spTree>
+    <p:extLst>
+      <p:ext uri="{BB962C8B-B14F-4D97-AF65-F5344CB8AC3E}">
+        <p14:creationId xmlns:p14="http://schemas.microsoft.com/office/powerpoint/2010/main" val="4205312314"/>
+      </p:ext>
+    </p:extLst>
+  </p:cSld>
+  <p:clrMapOvr>
+    <a:masterClrMapping/>
+  </p:clrMapOvr>
+</p:sld>
+</file>
+
+<file path=ppt/slides/slide11.xml><?xml version="1.0" encoding="utf-8"?>
+<p:sld xmlns:a="http://schemas.openxmlformats.org/drawingml/2006/main" xmlns:r="http://schemas.openxmlformats.org/officeDocument/2006/relationships" xmlns:p="http://schemas.openxmlformats.org/presentationml/2006/main">
+  <p:cSld>
+    <p:spTree>
+      <p:nvGrpSpPr>
+        <p:cNvPr id="1" name="Shape 87"/>
+        <p:cNvGrpSpPr/>
+        <p:nvPr/>
+      </p:nvGrpSpPr>
+      <p:grpSpPr>
+        <a:xfrm>
+          <a:off x="0" y="0"/>
+          <a:ext cx="0" cy="0"/>
+          <a:chOff x="0" y="0"/>
+          <a:chExt cx="0" cy="0"/>
+        </a:xfrm>
+      </p:grpSpPr>
+      <p:sp>
+        <p:nvSpPr>
+          <p:cNvPr id="17" name="Google Shape;113;p14">
+            <a:extLst>
+              <a:ext uri="{FF2B5EF4-FFF2-40B4-BE49-F238E27FC236}">
+                <a16:creationId xmlns:a16="http://schemas.microsoft.com/office/drawing/2014/main" id="{686E86FA-5888-014D-BB3F-938CE5095920}"/>
+              </a:ext>
+            </a:extLst>
+          </p:cNvPr>
+          <p:cNvSpPr txBox="1"/>
+          <p:nvPr/>
+        </p:nvSpPr>
+        <p:spPr>
+          <a:xfrm>
+            <a:off x="0" y="126766"/>
+            <a:ext cx="3658586" cy="551152"/>
+          </a:xfrm>
+          <a:prstGeom prst="rect">
+            <a:avLst/>
+          </a:prstGeom>
+          <a:noFill/>
+          <a:ln>
+            <a:noFill/>
+          </a:ln>
+        </p:spPr>
+        <p:txBody>
+          <a:bodyPr spcFirstLastPara="1" wrap="square" lIns="91425" tIns="45700" rIns="91425" bIns="45700" anchor="t" anchorCtr="0">
+            <a:noAutofit/>
+          </a:bodyPr>
+          <a:lstStyle/>
+          <a:p>
+            <a:pPr marL="0" marR="0" lvl="0" indent="0" algn="l" rtl="0">
+              <a:spcBef>
+                <a:spcPts val="0"/>
+              </a:spcBef>
+              <a:spcAft>
+                <a:spcPts val="0"/>
+              </a:spcAft>
+              <a:buNone/>
+            </a:pPr>
+            <a:r>
+              <a:rPr lang="en-US" sz="2800" b="1" dirty="0">
+                <a:solidFill>
+                  <a:schemeClr val="tx1"/>
+                </a:solidFill>
+                <a:latin typeface="Calibri" panose="020F0502020204030204" pitchFamily="34" charset="0"/>
+                <a:cs typeface="Calibri" panose="020F0502020204030204" pitchFamily="34" charset="0"/>
+                <a:sym typeface="Calibri"/>
+              </a:rPr>
+              <a:t>Bayesian Optimization </a:t>
+            </a:r>
+            <a:endParaRPr sz="2800" b="1" dirty="0">
+              <a:solidFill>
+                <a:schemeClr val="tx1"/>
+              </a:solidFill>
+              <a:latin typeface="Calibri" panose="020F0502020204030204" pitchFamily="34" charset="0"/>
+              <a:cs typeface="Calibri" panose="020F0502020204030204" pitchFamily="34" charset="0"/>
+              <a:sym typeface="Calibri"/>
+            </a:endParaRPr>
+          </a:p>
+        </p:txBody>
+      </p:sp>
+      <p:pic>
+        <p:nvPicPr>
+          <p:cNvPr id="2050" name="Picture 2" descr="Hyperparameter Optimization in Gradient Boosting Packages with Bayesian  Optimization | by Osman Mamun | Towards Data Science">
+            <a:extLst>
+              <a:ext uri="{FF2B5EF4-FFF2-40B4-BE49-F238E27FC236}">
+                <a16:creationId xmlns:a16="http://schemas.microsoft.com/office/drawing/2014/main" id="{EF78F114-FFE9-BC45-8BB7-ED043E81B013}"/>
+              </a:ext>
+            </a:extLst>
+          </p:cNvPr>
+          <p:cNvPicPr>
+            <a:picLocks noChangeAspect="1" noChangeArrowheads="1"/>
+          </p:cNvPicPr>
+          <p:nvPr/>
+        </p:nvPicPr>
+        <p:blipFill>
+          <a:blip r:embed="rId3" cstate="email">
+            <a:extLst>
+              <a:ext uri="{28A0092B-C50C-407E-A947-70E740481C1C}">
+                <a14:useLocalDpi xmlns:a14="http://schemas.microsoft.com/office/drawing/2010/main"/>
+              </a:ext>
+            </a:extLst>
+          </a:blip>
+          <a:srcRect/>
+          <a:stretch>
+            <a:fillRect/>
+          </a:stretch>
+        </p:blipFill>
+        <p:spPr bwMode="auto">
+          <a:xfrm>
+            <a:off x="6761230" y="53213"/>
+            <a:ext cx="5364210" cy="3256519"/>
+          </a:xfrm>
+          <a:prstGeom prst="rect">
+            <a:avLst/>
+          </a:prstGeom>
+          <a:noFill/>
+          <a:extLst>
+            <a:ext uri="{909E8E84-426E-40DD-AFC4-6F175D3DCCD1}">
+              <a14:hiddenFill xmlns:a14="http://schemas.microsoft.com/office/drawing/2010/main">
+                <a:solidFill>
+                  <a:srgbClr val="FFFFFF"/>
+                </a:solidFill>
+              </a14:hiddenFill>
+            </a:ext>
+          </a:extLst>
+        </p:spPr>
+      </p:pic>
+      <p:sp>
+        <p:nvSpPr>
+          <p:cNvPr id="10" name="Google Shape;113;p14">
+            <a:extLst>
+              <a:ext uri="{FF2B5EF4-FFF2-40B4-BE49-F238E27FC236}">
+                <a16:creationId xmlns:a16="http://schemas.microsoft.com/office/drawing/2014/main" id="{FC61AB3C-FF8E-7841-94D9-DEA2A67A3658}"/>
+              </a:ext>
+            </a:extLst>
+          </p:cNvPr>
+          <p:cNvSpPr txBox="1"/>
+          <p:nvPr/>
+        </p:nvSpPr>
+        <p:spPr>
+          <a:xfrm>
+            <a:off x="79812" y="677917"/>
+            <a:ext cx="5804153" cy="6053317"/>
+          </a:xfrm>
+          <a:prstGeom prst="rect">
+            <a:avLst/>
+          </a:prstGeom>
+          <a:noFill/>
+          <a:ln>
+            <a:noFill/>
+          </a:ln>
+        </p:spPr>
+        <p:txBody>
+          <a:bodyPr spcFirstLastPara="1" wrap="square" lIns="91425" tIns="45700" rIns="91425" bIns="45700" anchor="t" anchorCtr="0">
+            <a:noAutofit/>
+          </a:bodyPr>
+          <a:lstStyle/>
+          <a:p>
+            <a:pPr lvl="0"/>
+            <a:r>
+              <a:rPr lang="en-US" b="1" dirty="0">
+                <a:solidFill>
+                  <a:srgbClr val="FF0000"/>
+                </a:solidFill>
+                <a:latin typeface="Calibri"/>
+                <a:ea typeface="Calibri"/>
+                <a:cs typeface="Calibri"/>
+                <a:sym typeface="Calibri"/>
+              </a:rPr>
+              <a:t>Bayesian Optimization</a:t>
+            </a:r>
+            <a:r>
+              <a:rPr lang="en-US" dirty="0">
+                <a:solidFill>
+                  <a:schemeClr val="dk1"/>
+                </a:solidFill>
+                <a:latin typeface="Calibri"/>
+                <a:ea typeface="Calibri"/>
+                <a:cs typeface="Calibri"/>
+                <a:sym typeface="Calibri"/>
+              </a:rPr>
+              <a:t> is a sequential optimization strategy. </a:t>
+            </a:r>
+          </a:p>
+          <a:p>
+            <a:pPr marL="0" marR="0" lvl="0" indent="0" algn="l" rtl="0">
+              <a:spcBef>
+                <a:spcPts val="0"/>
+              </a:spcBef>
+              <a:spcAft>
+                <a:spcPts val="0"/>
+              </a:spcAft>
+              <a:buNone/>
+            </a:pPr>
+            <a:r>
+              <a:rPr lang="en-US" dirty="0">
+                <a:solidFill>
+                  <a:schemeClr val="dk1"/>
+                </a:solidFill>
+                <a:latin typeface="Calibri"/>
+                <a:ea typeface="Calibri"/>
+                <a:cs typeface="Calibri"/>
+                <a:sym typeface="Calibri"/>
+              </a:rPr>
+              <a:t>Optimizing a black-box system without calculatin</a:t>
+            </a:r>
+            <a:r>
+              <a:rPr lang="en-US" dirty="0">
+                <a:solidFill>
+                  <a:schemeClr val="dk1"/>
+                </a:solidFill>
+                <a:latin typeface="Calibri"/>
+                <a:cs typeface="Calibri"/>
+                <a:sym typeface="Calibri"/>
+              </a:rPr>
+              <a:t>g derivatives.</a:t>
+            </a:r>
+          </a:p>
+          <a:p>
+            <a:pPr marL="0" marR="0" lvl="0" indent="0" algn="l" rtl="0">
+              <a:spcBef>
+                <a:spcPts val="0"/>
+              </a:spcBef>
+              <a:spcAft>
+                <a:spcPts val="0"/>
+              </a:spcAft>
+              <a:buNone/>
+            </a:pPr>
+            <a:endParaRPr lang="en-US" dirty="0">
+              <a:solidFill>
+                <a:schemeClr val="dk1"/>
+              </a:solidFill>
+              <a:latin typeface="Calibri"/>
+              <a:cs typeface="Calibri"/>
+              <a:sym typeface="Calibri"/>
+            </a:endParaRPr>
+          </a:p>
+          <a:p>
+            <a:r>
+              <a:rPr lang="en-US" b="1" dirty="0">
+                <a:solidFill>
+                  <a:srgbClr val="FF0000"/>
+                </a:solidFill>
+                <a:latin typeface="Calibri"/>
+                <a:ea typeface="Calibri"/>
+                <a:cs typeface="Calibri"/>
+                <a:sym typeface="Calibri"/>
+              </a:rPr>
+              <a:t>Bayesian Optimization</a:t>
+            </a:r>
+            <a:r>
+              <a:rPr lang="en-US" dirty="0">
+                <a:solidFill>
+                  <a:schemeClr val="dk1"/>
+                </a:solidFill>
+                <a:latin typeface="Calibri"/>
+                <a:cs typeface="Calibri"/>
+              </a:rPr>
+              <a:t> is typically used to find  </a:t>
+            </a:r>
+          </a:p>
+          <a:p>
+            <a:r>
+              <a:rPr lang="en-US" b="1" dirty="0">
+                <a:solidFill>
+                  <a:srgbClr val="00B050"/>
+                </a:solidFill>
+                <a:latin typeface="Calibri"/>
+                <a:cs typeface="Calibri"/>
+              </a:rPr>
+              <a:t>optimal hyperparameters for Machine Learning models</a:t>
+            </a:r>
+            <a:r>
+              <a:rPr lang="en-US" dirty="0">
+                <a:solidFill>
+                  <a:schemeClr val="dk1"/>
+                </a:solidFill>
+                <a:latin typeface="Calibri"/>
+                <a:cs typeface="Calibri"/>
+              </a:rPr>
+              <a:t> </a:t>
+            </a:r>
+          </a:p>
+          <a:p>
+            <a:r>
+              <a:rPr lang="en-US" dirty="0">
+                <a:solidFill>
+                  <a:schemeClr val="dk1"/>
+                </a:solidFill>
+                <a:latin typeface="Calibri"/>
+                <a:cs typeface="Calibri"/>
+              </a:rPr>
+              <a:t>(it is better than </a:t>
+            </a:r>
+            <a:r>
+              <a:rPr lang="en-US" b="1" dirty="0">
+                <a:solidFill>
+                  <a:srgbClr val="0070C0"/>
+                </a:solidFill>
+                <a:latin typeface="Calibri"/>
+                <a:cs typeface="Calibri"/>
+              </a:rPr>
+              <a:t>grid search</a:t>
+            </a:r>
+            <a:r>
+              <a:rPr lang="en-US" dirty="0">
+                <a:solidFill>
+                  <a:schemeClr val="dk1"/>
+                </a:solidFill>
+                <a:latin typeface="Calibri"/>
+                <a:cs typeface="Calibri"/>
+              </a:rPr>
+              <a:t> or </a:t>
+            </a:r>
+            <a:r>
+              <a:rPr lang="en-US" b="1" dirty="0">
+                <a:solidFill>
+                  <a:srgbClr val="0070C0"/>
+                </a:solidFill>
+                <a:latin typeface="Calibri"/>
+                <a:cs typeface="Calibri"/>
+              </a:rPr>
+              <a:t>random search</a:t>
+            </a:r>
+            <a:r>
+              <a:rPr lang="en-US" dirty="0">
+                <a:solidFill>
+                  <a:schemeClr val="dk1"/>
+                </a:solidFill>
+                <a:latin typeface="Calibri"/>
+                <a:cs typeface="Calibri"/>
+              </a:rPr>
+              <a:t>).</a:t>
+            </a:r>
+          </a:p>
+          <a:p>
+            <a:pPr marL="0" marR="0" lvl="0" indent="0" algn="l" rtl="0">
+              <a:spcBef>
+                <a:spcPts val="0"/>
+              </a:spcBef>
+              <a:spcAft>
+                <a:spcPts val="0"/>
+              </a:spcAft>
+              <a:buNone/>
+            </a:pPr>
+            <a:endParaRPr lang="en-US" dirty="0">
+              <a:solidFill>
+                <a:schemeClr val="dk1"/>
+              </a:solidFill>
+              <a:latin typeface="Calibri"/>
+              <a:cs typeface="Calibri"/>
+              <a:sym typeface="Calibri"/>
+            </a:endParaRPr>
+          </a:p>
+          <a:p>
+            <a:pPr lvl="0"/>
+            <a:r>
+              <a:rPr lang="en-US" b="1" dirty="0">
+                <a:solidFill>
+                  <a:srgbClr val="FF0000"/>
+                </a:solidFill>
+                <a:latin typeface="Calibri"/>
+                <a:ea typeface="Calibri"/>
+                <a:cs typeface="Calibri"/>
+                <a:sym typeface="Calibri"/>
+              </a:rPr>
+              <a:t>Bayesian Optimization</a:t>
+            </a:r>
+            <a:r>
+              <a:rPr lang="en-US" dirty="0">
+                <a:solidFill>
+                  <a:schemeClr val="dk1"/>
+                </a:solidFill>
+                <a:latin typeface="Calibri"/>
+                <a:cs typeface="Calibri"/>
+                <a:sym typeface="Calibri"/>
+              </a:rPr>
+              <a:t> works by constructing a posterior distribution of functions (</a:t>
+            </a:r>
+            <a:r>
+              <a:rPr lang="en-US" b="1" dirty="0">
+                <a:solidFill>
+                  <a:srgbClr val="0070C0"/>
+                </a:solidFill>
+                <a:latin typeface="Calibri"/>
+                <a:cs typeface="Calibri"/>
+                <a:sym typeface="Calibri"/>
+              </a:rPr>
+              <a:t>Gaussian Process</a:t>
+            </a:r>
+            <a:r>
+              <a:rPr lang="en-US" dirty="0">
+                <a:solidFill>
+                  <a:schemeClr val="dk1"/>
+                </a:solidFill>
+                <a:latin typeface="Calibri"/>
+                <a:cs typeface="Calibri"/>
+                <a:sym typeface="Calibri"/>
+              </a:rPr>
+              <a:t>) that best describes the function you want to optimize. As the number of observations grows, the posterior distribution improves, and the algorithm becomes more certain of which regions in parameter space are worth exploring and which are not.</a:t>
+            </a:r>
+          </a:p>
+          <a:p>
+            <a:pPr lvl="0"/>
+            <a:endParaRPr lang="en-US" dirty="0">
+              <a:solidFill>
+                <a:schemeClr val="dk1"/>
+              </a:solidFill>
+              <a:latin typeface="Calibri"/>
+              <a:cs typeface="Calibri"/>
+              <a:sym typeface="Calibri"/>
+            </a:endParaRPr>
+          </a:p>
+          <a:p>
+            <a:pPr lvl="0"/>
+            <a:r>
+              <a:rPr lang="en-US" dirty="0">
+                <a:solidFill>
+                  <a:schemeClr val="dk1"/>
+                </a:solidFill>
+                <a:latin typeface="Calibri"/>
+                <a:cs typeface="Calibri"/>
+                <a:sym typeface="Calibri"/>
+              </a:rPr>
+              <a:t>As you iterate over and over, the algorithm balances its needs of </a:t>
+            </a:r>
+            <a:r>
+              <a:rPr lang="en-US" b="1" dirty="0">
+                <a:solidFill>
+                  <a:srgbClr val="00B050"/>
+                </a:solidFill>
+                <a:latin typeface="Calibri"/>
+                <a:cs typeface="Calibri"/>
+                <a:sym typeface="Calibri"/>
+              </a:rPr>
+              <a:t>exploration and exploitation</a:t>
+            </a:r>
+            <a:r>
+              <a:rPr lang="en-US" dirty="0">
+                <a:solidFill>
+                  <a:schemeClr val="dk1"/>
+                </a:solidFill>
+                <a:latin typeface="Calibri"/>
+                <a:cs typeface="Calibri"/>
+                <a:sym typeface="Calibri"/>
+              </a:rPr>
+              <a:t> taking into account what it knows about the target function. At each step a </a:t>
+            </a:r>
+            <a:r>
+              <a:rPr lang="en-US" b="1" dirty="0">
+                <a:solidFill>
+                  <a:srgbClr val="0070C0"/>
+                </a:solidFill>
+                <a:latin typeface="Calibri"/>
+                <a:cs typeface="Calibri"/>
+                <a:sym typeface="Calibri"/>
+              </a:rPr>
+              <a:t>Gaussian Process</a:t>
+            </a:r>
+            <a:r>
+              <a:rPr lang="en-US" dirty="0">
+                <a:solidFill>
+                  <a:schemeClr val="dk1"/>
+                </a:solidFill>
+                <a:latin typeface="Calibri"/>
+                <a:cs typeface="Calibri"/>
+                <a:sym typeface="Calibri"/>
+              </a:rPr>
+              <a:t> is fitted to the known samples (points previously explored), and the posterior distribution, combined with a exploration strategy are used to determine </a:t>
+            </a:r>
+            <a:r>
+              <a:rPr lang="en-US" b="1" dirty="0">
+                <a:solidFill>
+                  <a:srgbClr val="0070C0"/>
+                </a:solidFill>
+                <a:latin typeface="Calibri"/>
+                <a:cs typeface="Calibri"/>
+                <a:sym typeface="Calibri"/>
+              </a:rPr>
+              <a:t>the next point that should be explored</a:t>
+            </a:r>
+            <a:r>
+              <a:rPr lang="en-US" dirty="0">
+                <a:solidFill>
+                  <a:schemeClr val="dk1"/>
+                </a:solidFill>
+                <a:latin typeface="Calibri"/>
+                <a:cs typeface="Calibri"/>
+                <a:sym typeface="Calibri"/>
+              </a:rPr>
+              <a:t>.</a:t>
+            </a:r>
+          </a:p>
+          <a:p>
+            <a:pPr lvl="0"/>
+            <a:endParaRPr lang="en-US" dirty="0">
+              <a:solidFill>
+                <a:schemeClr val="dk1"/>
+              </a:solidFill>
+              <a:latin typeface="Calibri"/>
+              <a:cs typeface="Calibri"/>
+              <a:sym typeface="Calibri"/>
+            </a:endParaRPr>
+          </a:p>
+          <a:p>
+            <a:pPr lvl="0"/>
+            <a:r>
+              <a:rPr lang="en-US" dirty="0">
+                <a:solidFill>
+                  <a:schemeClr val="dk1"/>
+                </a:solidFill>
+                <a:latin typeface="Calibri"/>
+                <a:cs typeface="Calibri"/>
+                <a:sym typeface="Calibri"/>
+              </a:rPr>
+              <a:t>This process is designed to minimize the number of steps required to find a combination of parameters that are close to the optimal combination.</a:t>
+            </a:r>
+          </a:p>
+          <a:p>
+            <a:pPr lvl="0"/>
+            <a:endParaRPr lang="en-US" dirty="0">
+              <a:solidFill>
+                <a:schemeClr val="dk1"/>
+              </a:solidFill>
+              <a:latin typeface="Calibri"/>
+              <a:cs typeface="Calibri"/>
+            </a:endParaRPr>
+          </a:p>
+          <a:p>
+            <a:pPr lvl="0"/>
+            <a:r>
+              <a:rPr lang="en-US" dirty="0">
+                <a:solidFill>
+                  <a:schemeClr val="dk1"/>
+                </a:solidFill>
+                <a:latin typeface="Calibri"/>
+                <a:cs typeface="Calibri"/>
+              </a:rPr>
+              <a:t>Example:</a:t>
+            </a:r>
+          </a:p>
+          <a:p>
+            <a:pPr marL="285750" lvl="0" indent="-285750">
+              <a:buFont typeface="Arial" panose="020B0604020202020204" pitchFamily="34" charset="0"/>
+              <a:buChar char="•"/>
+            </a:pPr>
+            <a:r>
+              <a:rPr lang="en-US" dirty="0">
+                <a:solidFill>
+                  <a:schemeClr val="dk1"/>
+                </a:solidFill>
+                <a:latin typeface="Calibri"/>
+                <a:cs typeface="Calibri"/>
+                <a:hlinkClick r:id="rId4"/>
+              </a:rPr>
+              <a:t>https://towardsdatascience.com/hyperparameter-optimization-in-gradient-boosting-packages-with-bayesian-optimization-aaf1b27e7b90</a:t>
+            </a:r>
+            <a:r>
+              <a:rPr lang="en-US" dirty="0">
+                <a:solidFill>
+                  <a:schemeClr val="dk1"/>
+                </a:solidFill>
+                <a:latin typeface="Calibri"/>
+                <a:cs typeface="Calibri"/>
+              </a:rPr>
+              <a:t> </a:t>
+            </a:r>
+          </a:p>
+          <a:p>
+            <a:pPr lvl="0"/>
+            <a:endParaRPr lang="en-US" dirty="0">
+              <a:solidFill>
+                <a:schemeClr val="dk1"/>
+              </a:solidFill>
+              <a:latin typeface="Calibri"/>
+              <a:cs typeface="Calibri"/>
+            </a:endParaRPr>
+          </a:p>
+          <a:p>
+            <a:pPr marL="285750" lvl="0" indent="-285750">
+              <a:buFont typeface="Arial" panose="020B0604020202020204" pitchFamily="34" charset="0"/>
+              <a:buChar char="•"/>
+            </a:pPr>
+            <a:r>
+              <a:rPr lang="en-US" dirty="0">
+                <a:solidFill>
+                  <a:schemeClr val="dk1"/>
+                </a:solidFill>
+                <a:latin typeface="Calibri"/>
+                <a:cs typeface="Calibri"/>
+                <a:hlinkClick r:id="rId5"/>
+              </a:rPr>
+              <a:t>https://github.com/fmfn/BayesianOptimization</a:t>
+            </a:r>
+            <a:r>
+              <a:rPr lang="en-US" dirty="0">
+                <a:solidFill>
+                  <a:schemeClr val="dk1"/>
+                </a:solidFill>
+                <a:latin typeface="Calibri"/>
+                <a:cs typeface="Calibri"/>
+              </a:rPr>
+              <a:t> </a:t>
+            </a:r>
+            <a:endParaRPr dirty="0">
+              <a:solidFill>
+                <a:schemeClr val="dk1"/>
+              </a:solidFill>
+              <a:latin typeface="Calibri"/>
+              <a:cs typeface="Calibri"/>
+            </a:endParaRPr>
+          </a:p>
+        </p:txBody>
+      </p:sp>
+      <p:sp>
+        <p:nvSpPr>
+          <p:cNvPr id="2" name="TextBox 1">
+            <a:extLst>
+              <a:ext uri="{FF2B5EF4-FFF2-40B4-BE49-F238E27FC236}">
+                <a16:creationId xmlns:a16="http://schemas.microsoft.com/office/drawing/2014/main" id="{BB66F01F-0498-204C-B082-40A9BFF950D5}"/>
+              </a:ext>
+            </a:extLst>
+          </p:cNvPr>
+          <p:cNvSpPr txBox="1"/>
+          <p:nvPr/>
+        </p:nvSpPr>
+        <p:spPr>
+          <a:xfrm>
+            <a:off x="6308037" y="3497460"/>
+            <a:ext cx="5870711" cy="3323987"/>
+          </a:xfrm>
+          <a:prstGeom prst="rect">
+            <a:avLst/>
+          </a:prstGeom>
+          <a:noFill/>
+        </p:spPr>
+        <p:txBody>
+          <a:bodyPr wrap="square" rtlCol="0">
+            <a:spAutoFit/>
+          </a:bodyPr>
+          <a:lstStyle/>
+          <a:p>
+            <a:r>
+              <a:rPr lang="en-US" dirty="0"/>
+              <a:t>Note:</a:t>
+            </a:r>
+          </a:p>
+          <a:p>
+            <a:pPr marL="285750" indent="-285750">
+              <a:buFont typeface="Arial" panose="020B0604020202020204" pitchFamily="34" charset="0"/>
+              <a:buChar char="•"/>
+            </a:pPr>
+            <a:r>
+              <a:rPr lang="en-US" b="1" dirty="0">
+                <a:solidFill>
+                  <a:srgbClr val="0070C0"/>
+                </a:solidFill>
+              </a:rPr>
+              <a:t>Gaussian Process</a:t>
+            </a:r>
+            <a:r>
+              <a:rPr lang="en-US" dirty="0"/>
+              <a:t> is a stochastic process (a collection of random variables indexed by time or space), such that every finite collection of those random variables has a multivariate normal distribution. </a:t>
+            </a:r>
+          </a:p>
+          <a:p>
+            <a:pPr marL="285750" indent="-285750">
+              <a:buFont typeface="Arial" panose="020B0604020202020204" pitchFamily="34" charset="0"/>
+              <a:buChar char="•"/>
+            </a:pPr>
+            <a:r>
+              <a:rPr lang="en-US" dirty="0"/>
+              <a:t>A machine-learning algorithm that involves a </a:t>
+            </a:r>
+            <a:r>
+              <a:rPr lang="en-US" b="1" dirty="0">
+                <a:solidFill>
+                  <a:srgbClr val="0070C0"/>
+                </a:solidFill>
+              </a:rPr>
+              <a:t>Gaussian Process</a:t>
+            </a:r>
+            <a:r>
+              <a:rPr lang="en-US" dirty="0"/>
+              <a:t> uses </a:t>
+            </a:r>
+            <a:r>
+              <a:rPr lang="en-US" b="1" dirty="0">
+                <a:solidFill>
+                  <a:srgbClr val="00B050"/>
+                </a:solidFill>
+              </a:rPr>
+              <a:t>lazy learning</a:t>
+            </a:r>
+            <a:r>
+              <a:rPr lang="en-US" dirty="0"/>
+              <a:t> and a </a:t>
+            </a:r>
+            <a:r>
+              <a:rPr lang="en-US" b="1" dirty="0">
+                <a:solidFill>
+                  <a:srgbClr val="00B050"/>
+                </a:solidFill>
+              </a:rPr>
+              <a:t>measure of the similarity between points</a:t>
+            </a:r>
+            <a:r>
+              <a:rPr lang="en-US" dirty="0"/>
+              <a:t> (the kernel function) to predict the value for an unseen point from training data. </a:t>
+            </a:r>
+          </a:p>
+          <a:p>
+            <a:pPr marL="285750" indent="-285750">
+              <a:buFont typeface="Arial" panose="020B0604020202020204" pitchFamily="34" charset="0"/>
+              <a:buChar char="•"/>
+            </a:pPr>
+            <a:r>
+              <a:rPr lang="en-US" dirty="0"/>
+              <a:t>The prediction is not just an estimate for that point, but also has </a:t>
+            </a:r>
+            <a:r>
+              <a:rPr lang="en-US" b="1" dirty="0">
+                <a:solidFill>
+                  <a:srgbClr val="00B050"/>
+                </a:solidFill>
+              </a:rPr>
+              <a:t>uncertainty information</a:t>
+            </a:r>
+            <a:r>
+              <a:rPr lang="en-US" dirty="0"/>
+              <a:t> (it is a Gaussian distribution). </a:t>
+            </a:r>
+          </a:p>
+          <a:p>
+            <a:pPr marL="285750" indent="-285750">
+              <a:buFont typeface="Arial" panose="020B0604020202020204" pitchFamily="34" charset="0"/>
+              <a:buChar char="•"/>
+            </a:pPr>
+            <a:r>
+              <a:rPr lang="en-US" dirty="0"/>
+              <a:t>In practice GP models are often evaluated on a grid using maximum likelihood and calculating multivariate Gaussian density using  approximation methods to speed up calculations.</a:t>
+            </a:r>
+          </a:p>
+          <a:p>
+            <a:pPr marL="285750" indent="-285750">
+              <a:buFont typeface="Arial" panose="020B0604020202020204" pitchFamily="34" charset="0"/>
+              <a:buChar char="•"/>
+            </a:pPr>
+            <a:r>
+              <a:rPr lang="en-US" dirty="0"/>
+              <a:t>Good 2-min explanation of Gaussian Process:</a:t>
+            </a:r>
+            <a:br>
+              <a:rPr lang="en-US" dirty="0"/>
+            </a:br>
+            <a:r>
+              <a:rPr lang="en-US" dirty="0"/>
+              <a:t> - </a:t>
+            </a:r>
+            <a:r>
+              <a:rPr lang="en-US" dirty="0">
+                <a:hlinkClick r:id="rId6"/>
+              </a:rPr>
+              <a:t>https://www.youtube.com/watch?v=mqOdIYxxNCs</a:t>
+            </a:r>
+            <a:r>
+              <a:rPr lang="en-US" dirty="0"/>
+              <a:t>   </a:t>
+            </a:r>
+          </a:p>
+        </p:txBody>
+      </p:sp>
+    </p:spTree>
+    <p:extLst>
+      <p:ext uri="{BB962C8B-B14F-4D97-AF65-F5344CB8AC3E}">
+        <p14:creationId xmlns:p14="http://schemas.microsoft.com/office/powerpoint/2010/main" val="2214897208"/>
+      </p:ext>
+    </p:extLst>
+  </p:cSld>
+  <p:clrMapOvr>
+    <a:masterClrMapping/>
+  </p:clrMapOvr>
+</p:sld>
+</file>
+
+<file path=ppt/slides/slide12.xml><?xml version="1.0" encoding="utf-8"?>
 <p:sld xmlns:a="http://schemas.openxmlformats.org/drawingml/2006/main" xmlns:r="http://schemas.openxmlformats.org/officeDocument/2006/relationships" xmlns:p="http://schemas.openxmlformats.org/presentationml/2006/main">
   <p:cSld>
     <p:spTree>
@@ -18246,341 +19854,6 @@
           </a:prstGeom>
         </p:spPr>
       </p:pic>
-      <p:sp>
-        <p:nvSpPr>
-          <p:cNvPr id="5" name="Google Shape;93;p13">
-            <a:extLst>
-              <a:ext uri="{FF2B5EF4-FFF2-40B4-BE49-F238E27FC236}">
-                <a16:creationId xmlns:a16="http://schemas.microsoft.com/office/drawing/2014/main" id="{F5066C6A-F841-BB4E-888A-251B4AF760F4}"/>
-              </a:ext>
-            </a:extLst>
-          </p:cNvPr>
-          <p:cNvSpPr txBox="1"/>
-          <p:nvPr/>
-        </p:nvSpPr>
-        <p:spPr>
-          <a:xfrm>
-            <a:off x="6706366" y="4022648"/>
-            <a:ext cx="5250549" cy="2457666"/>
-          </a:xfrm>
-          <a:prstGeom prst="rect">
-            <a:avLst/>
-          </a:prstGeom>
-          <a:noFill/>
-          <a:ln w="63500">
-            <a:solidFill>
-              <a:schemeClr val="accent6">
-                <a:lumMod val="40000"/>
-                <a:lumOff val="60000"/>
-              </a:schemeClr>
-            </a:solidFill>
-          </a:ln>
-        </p:spPr>
-        <p:txBody>
-          <a:bodyPr spcFirstLastPara="1" wrap="square" lIns="91425" tIns="45700" rIns="91425" bIns="45700" anchor="t" anchorCtr="0">
-            <a:noAutofit/>
-          </a:bodyPr>
-          <a:lstStyle/>
-          <a:p>
-            <a:pPr marL="0" marR="0" lvl="0" indent="0" algn="l" rtl="0">
-              <a:spcBef>
-                <a:spcPts val="0"/>
-              </a:spcBef>
-              <a:spcAft>
-                <a:spcPts val="0"/>
-              </a:spcAft>
-              <a:buNone/>
-            </a:pPr>
-            <a:r>
-              <a:rPr lang="en-US" b="1" dirty="0">
-                <a:solidFill>
-                  <a:schemeClr val="accent1"/>
-                </a:solidFill>
-                <a:latin typeface="Calibri" panose="020F0502020204030204" pitchFamily="34" charset="0"/>
-                <a:cs typeface="Calibri" panose="020F0502020204030204" pitchFamily="34" charset="0"/>
-                <a:sym typeface="Calibri"/>
-              </a:rPr>
-              <a:t>Frequentist interpretation of Bayes’ theorem.</a:t>
-            </a:r>
-            <a:endParaRPr b="1" dirty="0">
-              <a:solidFill>
-                <a:schemeClr val="accent1"/>
-              </a:solidFill>
-              <a:latin typeface="Calibri" panose="020F0502020204030204" pitchFamily="34" charset="0"/>
-              <a:cs typeface="Calibri" panose="020F0502020204030204" pitchFamily="34" charset="0"/>
-            </a:endParaRPr>
-          </a:p>
-          <a:p>
-            <a:pPr marL="0" marR="0" lvl="0" indent="0" algn="l" rtl="0">
-              <a:spcBef>
-                <a:spcPts val="0"/>
-              </a:spcBef>
-              <a:spcAft>
-                <a:spcPts val="0"/>
-              </a:spcAft>
-              <a:buNone/>
-            </a:pPr>
-            <a:r>
-              <a:rPr lang="en-US" b="1" dirty="0">
-                <a:solidFill>
-                  <a:srgbClr val="00B050"/>
-                </a:solidFill>
-                <a:latin typeface="Calibri" panose="020F0502020204030204" pitchFamily="34" charset="0"/>
-                <a:cs typeface="Calibri" panose="020F0502020204030204" pitchFamily="34" charset="0"/>
-                <a:sym typeface="Calibri"/>
-              </a:rPr>
-              <a:t>Probability measures a proportion of outcomes.</a:t>
-            </a:r>
-            <a:endParaRPr b="1" dirty="0">
-              <a:solidFill>
-                <a:srgbClr val="00B050"/>
-              </a:solidFill>
-              <a:latin typeface="Calibri" panose="020F0502020204030204" pitchFamily="34" charset="0"/>
-              <a:cs typeface="Calibri" panose="020F0502020204030204" pitchFamily="34" charset="0"/>
-              <a:sym typeface="Calibri"/>
-            </a:endParaRPr>
-          </a:p>
-          <a:p>
-            <a:pPr marL="0" marR="0" lvl="0" indent="0" algn="l" rtl="0">
-              <a:spcBef>
-                <a:spcPts val="0"/>
-              </a:spcBef>
-              <a:spcAft>
-                <a:spcPts val="0"/>
-              </a:spcAft>
-              <a:buNone/>
-            </a:pPr>
-            <a:r>
-              <a:rPr lang="en-US" dirty="0">
-                <a:solidFill>
-                  <a:schemeClr val="dk1"/>
-                </a:solidFill>
-                <a:latin typeface="Calibri" panose="020F0502020204030204" pitchFamily="34" charset="0"/>
-                <a:cs typeface="Calibri" panose="020F0502020204030204" pitchFamily="34" charset="0"/>
-                <a:sym typeface="Calibri"/>
-              </a:rPr>
-              <a:t>P(A) - proportions of outcomes A</a:t>
-            </a:r>
-          </a:p>
-          <a:p>
-            <a:r>
-              <a:rPr lang="en-US" dirty="0">
-                <a:solidFill>
-                  <a:schemeClr val="dk1"/>
-                </a:solidFill>
-                <a:latin typeface="Calibri" panose="020F0502020204030204" pitchFamily="34" charset="0"/>
-                <a:cs typeface="Calibri" panose="020F0502020204030204" pitchFamily="34" charset="0"/>
-                <a:sym typeface="Calibri"/>
-              </a:rPr>
-              <a:t>P(B) - proportions of outcomes B</a:t>
-            </a:r>
-          </a:p>
-          <a:p>
-            <a:pPr marL="0" marR="0" lvl="0" indent="0" algn="l" rtl="0">
-              <a:spcBef>
-                <a:spcPts val="0"/>
-              </a:spcBef>
-              <a:spcAft>
-                <a:spcPts val="0"/>
-              </a:spcAft>
-              <a:buNone/>
-            </a:pPr>
-            <a:r>
-              <a:rPr lang="en-US" dirty="0">
-                <a:solidFill>
-                  <a:schemeClr val="dk1"/>
-                </a:solidFill>
-                <a:latin typeface="Calibri" panose="020F0502020204030204" pitchFamily="34" charset="0"/>
-                <a:cs typeface="Calibri" panose="020F0502020204030204" pitchFamily="34" charset="0"/>
-                <a:sym typeface="Calibri"/>
-              </a:rPr>
-              <a:t>P(B|A) is the proportion of outcomes B out of outcomes A</a:t>
-            </a:r>
-          </a:p>
-          <a:p>
-            <a:pPr marL="0" marR="0" lvl="0" indent="0" algn="l" rtl="0">
-              <a:spcBef>
-                <a:spcPts val="0"/>
-              </a:spcBef>
-              <a:spcAft>
-                <a:spcPts val="0"/>
-              </a:spcAft>
-              <a:buNone/>
-            </a:pPr>
-            <a:endParaRPr lang="en-US" dirty="0">
-              <a:solidFill>
-                <a:schemeClr val="dk1"/>
-              </a:solidFill>
-              <a:latin typeface="Calibri" panose="020F0502020204030204" pitchFamily="34" charset="0"/>
-              <a:cs typeface="Calibri" panose="020F0502020204030204" pitchFamily="34" charset="0"/>
-              <a:sym typeface="Calibri"/>
-            </a:endParaRPr>
-          </a:p>
-          <a:p>
-            <a:r>
-              <a:rPr lang="en-US" b="1" dirty="0">
-                <a:solidFill>
-                  <a:schemeClr val="accent1"/>
-                </a:solidFill>
-                <a:latin typeface="Calibri" panose="020F0502020204030204" pitchFamily="34" charset="0"/>
-                <a:cs typeface="Calibri" panose="020F0502020204030204" pitchFamily="34" charset="0"/>
-                <a:sym typeface="Calibri"/>
-              </a:rPr>
-              <a:t>Bayesian interpretation of Bayes’ theorem.</a:t>
-            </a:r>
-            <a:endParaRPr lang="en-US" b="1" dirty="0">
-              <a:solidFill>
-                <a:schemeClr val="accent1"/>
-              </a:solidFill>
-              <a:latin typeface="Calibri" panose="020F0502020204030204" pitchFamily="34" charset="0"/>
-              <a:cs typeface="Calibri" panose="020F0502020204030204" pitchFamily="34" charset="0"/>
-            </a:endParaRPr>
-          </a:p>
-          <a:p>
-            <a:pPr lvl="0"/>
-            <a:r>
-              <a:rPr lang="en-US" b="1" dirty="0">
-                <a:solidFill>
-                  <a:srgbClr val="00B050"/>
-                </a:solidFill>
-                <a:latin typeface="Calibri" panose="020F0502020204030204" pitchFamily="34" charset="0"/>
-                <a:cs typeface="Calibri" panose="020F0502020204030204" pitchFamily="34" charset="0"/>
-                <a:sym typeface="Calibri"/>
-              </a:rPr>
-              <a:t>Probability measures a degree of belief.</a:t>
-            </a:r>
-            <a:br>
-              <a:rPr lang="en-US" b="1" dirty="0">
-                <a:solidFill>
-                  <a:srgbClr val="00B050"/>
-                </a:solidFill>
-                <a:latin typeface="Calibri" panose="020F0502020204030204" pitchFamily="34" charset="0"/>
-                <a:cs typeface="Calibri" panose="020F0502020204030204" pitchFamily="34" charset="0"/>
-                <a:sym typeface="Calibri"/>
-              </a:rPr>
-            </a:br>
-            <a:r>
-              <a:rPr lang="en-US" dirty="0">
-                <a:solidFill>
-                  <a:schemeClr val="dk1"/>
-                </a:solidFill>
-                <a:latin typeface="Calibri" panose="020F0502020204030204" pitchFamily="34" charset="0"/>
-                <a:cs typeface="Calibri" panose="020F0502020204030204" pitchFamily="34" charset="0"/>
-                <a:sym typeface="Calibri"/>
-              </a:rPr>
-              <a:t>P(A), the </a:t>
-            </a:r>
-            <a:r>
-              <a:rPr lang="en-US" b="1" dirty="0">
-                <a:solidFill>
-                  <a:schemeClr val="accent1"/>
-                </a:solidFill>
-                <a:latin typeface="Calibri" panose="020F0502020204030204" pitchFamily="34" charset="0"/>
-                <a:cs typeface="Calibri" panose="020F0502020204030204" pitchFamily="34" charset="0"/>
-                <a:sym typeface="Calibri"/>
-              </a:rPr>
-              <a:t>prior</a:t>
-            </a:r>
-            <a:r>
-              <a:rPr lang="en-US" dirty="0">
-                <a:solidFill>
-                  <a:schemeClr val="dk1"/>
-                </a:solidFill>
-                <a:latin typeface="Calibri" panose="020F0502020204030204" pitchFamily="34" charset="0"/>
-                <a:cs typeface="Calibri" panose="020F0502020204030204" pitchFamily="34" charset="0"/>
-                <a:sym typeface="Calibri"/>
-              </a:rPr>
-              <a:t>, is the initial degree of belief in A.</a:t>
-            </a:r>
-            <a:endParaRPr lang="en-US" dirty="0">
-              <a:solidFill>
-                <a:schemeClr val="dk1"/>
-              </a:solidFill>
-              <a:latin typeface="Calibri" panose="020F0502020204030204" pitchFamily="34" charset="0"/>
-              <a:cs typeface="Calibri" panose="020F0502020204030204" pitchFamily="34" charset="0"/>
-            </a:endParaRPr>
-          </a:p>
-          <a:p>
-            <a:pPr lvl="0"/>
-            <a:r>
-              <a:rPr lang="en-US" dirty="0">
-                <a:solidFill>
-                  <a:schemeClr val="dk1"/>
-                </a:solidFill>
-                <a:latin typeface="Calibri" panose="020F0502020204030204" pitchFamily="34" charset="0"/>
-                <a:cs typeface="Calibri" panose="020F0502020204030204" pitchFamily="34" charset="0"/>
-                <a:sym typeface="Calibri"/>
-              </a:rPr>
-              <a:t>P(A|B), the </a:t>
-            </a:r>
-            <a:r>
-              <a:rPr lang="en-US" b="1" dirty="0">
-                <a:solidFill>
-                  <a:schemeClr val="accent1"/>
-                </a:solidFill>
-                <a:latin typeface="Calibri" panose="020F0502020204030204" pitchFamily="34" charset="0"/>
-                <a:cs typeface="Calibri" panose="020F0502020204030204" pitchFamily="34" charset="0"/>
-                <a:sym typeface="Calibri"/>
-              </a:rPr>
-              <a:t>posterior</a:t>
-            </a:r>
-            <a:r>
-              <a:rPr lang="en-US" dirty="0">
-                <a:solidFill>
-                  <a:schemeClr val="dk1"/>
-                </a:solidFill>
-                <a:latin typeface="Calibri" panose="020F0502020204030204" pitchFamily="34" charset="0"/>
-                <a:cs typeface="Calibri" panose="020F0502020204030204" pitchFamily="34" charset="0"/>
-                <a:sym typeface="Calibri"/>
-              </a:rPr>
-              <a:t>, is the degree of belief having accounted for B.</a:t>
-            </a:r>
-            <a:br>
-              <a:rPr lang="en-US" dirty="0">
-                <a:solidFill>
-                  <a:schemeClr val="dk1"/>
-                </a:solidFill>
-                <a:latin typeface="Calibri" panose="020F0502020204030204" pitchFamily="34" charset="0"/>
-                <a:cs typeface="Calibri" panose="020F0502020204030204" pitchFamily="34" charset="0"/>
-                <a:sym typeface="Calibri"/>
-              </a:rPr>
-            </a:br>
-            <a:r>
-              <a:rPr lang="en-US" dirty="0">
-                <a:solidFill>
-                  <a:schemeClr val="dk1"/>
-                </a:solidFill>
-                <a:latin typeface="Calibri" panose="020F0502020204030204" pitchFamily="34" charset="0"/>
-                <a:cs typeface="Calibri" panose="020F0502020204030204" pitchFamily="34" charset="0"/>
-                <a:sym typeface="Calibri"/>
-              </a:rPr>
-              <a:t>P(B|A)/P(B) – represents the support B provides for A.</a:t>
-            </a:r>
-            <a:endParaRPr lang="en-US" dirty="0">
-              <a:solidFill>
-                <a:schemeClr val="dk1"/>
-              </a:solidFill>
-              <a:latin typeface="Calibri" panose="020F0502020204030204" pitchFamily="34" charset="0"/>
-              <a:cs typeface="Calibri" panose="020F0502020204030204" pitchFamily="34" charset="0"/>
-            </a:endParaRPr>
-          </a:p>
-          <a:p>
-            <a:pPr marL="0" marR="0" lvl="0" indent="0" algn="l" rtl="0">
-              <a:spcBef>
-                <a:spcPts val="0"/>
-              </a:spcBef>
-              <a:spcAft>
-                <a:spcPts val="0"/>
-              </a:spcAft>
-              <a:buNone/>
-            </a:pPr>
-            <a:endParaRPr dirty="0">
-              <a:latin typeface="Calibri" panose="020F0502020204030204" pitchFamily="34" charset="0"/>
-              <a:cs typeface="Calibri" panose="020F0502020204030204" pitchFamily="34" charset="0"/>
-            </a:endParaRPr>
-          </a:p>
-        </p:txBody>
-      </p:sp>
     </p:spTree>
     <p:extLst>
       <p:ext uri="{BB962C8B-B14F-4D97-AF65-F5344CB8AC3E}">
@@ -18616,7 +19889,7 @@
           <p:cNvPr id="2" name="TextBox 1">
             <a:extLst>
               <a:ext uri="{FF2B5EF4-FFF2-40B4-BE49-F238E27FC236}">
-                <a16:creationId xmlns:a16="http://schemas.microsoft.com/office/drawing/2014/main" id="{B3B32340-E706-FA41-BDA5-397606042A7E}"/>
+                <a16:creationId xmlns:a16="http://schemas.microsoft.com/office/drawing/2014/main" id="{45A3E503-F444-8740-9959-BAADA127EBBD}"/>
               </a:ext>
             </a:extLst>
           </p:cNvPr>
@@ -18625,8 +19898,8 @@
         </p:nvSpPr>
         <p:spPr>
           <a:xfrm>
-            <a:off x="-1" y="37572"/>
-            <a:ext cx="7901355" cy="523220"/>
+            <a:off x="-65351" y="0"/>
+            <a:ext cx="4585855" cy="523220"/>
           </a:xfrm>
           <a:prstGeom prst="rect">
             <a:avLst/>
@@ -18641,7 +19914,7 @@
           <a:p>
             <a:r>
               <a:rPr lang="en-US" sz="2800" b="1" dirty="0"/>
-              <a:t>Example – Coffee and Damaged Flash Drives</a:t>
+              <a:t>Confidence vs Credibility</a:t>
             </a:r>
           </a:p>
         </p:txBody>
@@ -18651,7 +19924,7 @@
           <p:cNvPr id="3" name="TextBox 2">
             <a:extLst>
               <a:ext uri="{FF2B5EF4-FFF2-40B4-BE49-F238E27FC236}">
-                <a16:creationId xmlns:a16="http://schemas.microsoft.com/office/drawing/2014/main" id="{2443CC5D-9378-E348-8505-A594E821478A}"/>
+                <a16:creationId xmlns:a16="http://schemas.microsoft.com/office/drawing/2014/main" id="{34C986C8-6494-5542-A5B4-2B5DE3F7F949}"/>
               </a:ext>
             </a:extLst>
           </p:cNvPr>
@@ -18660,8 +19933,1771 @@
         </p:nvSpPr>
         <p:spPr>
           <a:xfrm>
-            <a:off x="141099" y="678252"/>
-            <a:ext cx="4325394" cy="954107"/>
+            <a:off x="193963" y="904886"/>
+            <a:ext cx="3824583" cy="1477328"/>
+          </a:xfrm>
+          <a:prstGeom prst="rect">
+            <a:avLst/>
+          </a:prstGeom>
+          <a:noFill/>
+        </p:spPr>
+        <p:txBody>
+          <a:bodyPr wrap="square" rtlCol="0">
+            <a:spAutoFit/>
+          </a:bodyPr>
+          <a:lstStyle/>
+          <a:p>
+            <a:r>
+              <a:rPr lang="en-US" sz="2000" b="1" dirty="0" err="1">
+                <a:solidFill>
+                  <a:srgbClr val="FF0000"/>
+                </a:solidFill>
+              </a:rPr>
+              <a:t>Bayesianism</a:t>
+            </a:r>
+            <a:r>
+              <a:rPr lang="en-US" dirty="0"/>
+              <a:t>: </a:t>
+            </a:r>
+          </a:p>
+          <a:p>
+            <a:r>
+              <a:rPr lang="en-US" dirty="0"/>
+              <a:t>probabilistic statement about </a:t>
+            </a:r>
+          </a:p>
+          <a:p>
+            <a:endParaRPr lang="en-US" dirty="0"/>
+          </a:p>
+          <a:p>
+            <a:r>
+              <a:rPr lang="en-US" dirty="0"/>
+              <a:t>model parameters </a:t>
+            </a:r>
+          </a:p>
+          <a:p>
+            <a:endParaRPr lang="en-US" dirty="0"/>
+          </a:p>
+          <a:p>
+            <a:r>
+              <a:rPr lang="en-US" dirty="0"/>
+              <a:t>given a fixed credible region</a:t>
+            </a:r>
+          </a:p>
+        </p:txBody>
+      </p:sp>
+      <p:sp>
+        <p:nvSpPr>
+          <p:cNvPr id="4" name="TextBox 3">
+            <a:extLst>
+              <a:ext uri="{FF2B5EF4-FFF2-40B4-BE49-F238E27FC236}">
+                <a16:creationId xmlns:a16="http://schemas.microsoft.com/office/drawing/2014/main" id="{EED3848A-8A25-2249-A3FC-A28BF38BEC4C}"/>
+              </a:ext>
+            </a:extLst>
+          </p:cNvPr>
+          <p:cNvSpPr txBox="1"/>
+          <p:nvPr/>
+        </p:nvSpPr>
+        <p:spPr>
+          <a:xfrm>
+            <a:off x="193962" y="3777454"/>
+            <a:ext cx="3824583" cy="1692771"/>
+          </a:xfrm>
+          <a:prstGeom prst="rect">
+            <a:avLst/>
+          </a:prstGeom>
+          <a:noFill/>
+        </p:spPr>
+        <p:txBody>
+          <a:bodyPr wrap="square" rtlCol="0">
+            <a:spAutoFit/>
+          </a:bodyPr>
+          <a:lstStyle/>
+          <a:p>
+            <a:r>
+              <a:rPr lang="en-US" sz="2000" b="1" dirty="0">
+                <a:solidFill>
+                  <a:srgbClr val="FF0000"/>
+                </a:solidFill>
+              </a:rPr>
+              <a:t>Frequentism:</a:t>
+            </a:r>
+            <a:r>
+              <a:rPr lang="en-US" dirty="0"/>
+              <a:t> </a:t>
+            </a:r>
+          </a:p>
+          <a:p>
+            <a:r>
+              <a:rPr lang="en-US" dirty="0"/>
+              <a:t>probabilistic statement about </a:t>
+            </a:r>
+          </a:p>
+          <a:p>
+            <a:endParaRPr lang="en-US" dirty="0"/>
+          </a:p>
+          <a:p>
+            <a:r>
+              <a:rPr lang="en-US" dirty="0"/>
+              <a:t>a recipe for generating </a:t>
+            </a:r>
+          </a:p>
+          <a:p>
+            <a:r>
+              <a:rPr lang="en-US" dirty="0"/>
+              <a:t>confidence intervals</a:t>
+            </a:r>
+          </a:p>
+          <a:p>
+            <a:endParaRPr lang="en-US" dirty="0"/>
+          </a:p>
+          <a:p>
+            <a:r>
+              <a:rPr lang="en-US" dirty="0"/>
+              <a:t>given a fixed model parameter</a:t>
+            </a:r>
+          </a:p>
+        </p:txBody>
+      </p:sp>
+      <p:sp>
+        <p:nvSpPr>
+          <p:cNvPr id="5" name="Oval 4">
+            <a:extLst>
+              <a:ext uri="{FF2B5EF4-FFF2-40B4-BE49-F238E27FC236}">
+                <a16:creationId xmlns:a16="http://schemas.microsoft.com/office/drawing/2014/main" id="{97595D3F-C164-0840-A6D6-EBC1EDB6388E}"/>
+              </a:ext>
+            </a:extLst>
+          </p:cNvPr>
+          <p:cNvSpPr/>
+          <p:nvPr/>
+        </p:nvSpPr>
+        <p:spPr>
+          <a:xfrm>
+            <a:off x="4311296" y="902468"/>
+            <a:ext cx="3017520" cy="1232379"/>
+          </a:xfrm>
+          <a:prstGeom prst="ellipse">
+            <a:avLst/>
+          </a:prstGeom>
+          <a:solidFill>
+            <a:schemeClr val="accent5">
+              <a:lumMod val="20000"/>
+              <a:lumOff val="80000"/>
+              <a:alpha val="70672"/>
+            </a:schemeClr>
+          </a:solidFill>
+          <a:ln>
+            <a:solidFill>
+              <a:srgbClr val="0070C0"/>
+            </a:solidFill>
+          </a:ln>
+        </p:spPr>
+        <p:style>
+          <a:lnRef idx="2">
+            <a:schemeClr val="accent1">
+              <a:shade val="50000"/>
+            </a:schemeClr>
+          </a:lnRef>
+          <a:fillRef idx="1">
+            <a:schemeClr val="accent1"/>
+          </a:fillRef>
+          <a:effectRef idx="0">
+            <a:schemeClr val="accent1"/>
+          </a:effectRef>
+          <a:fontRef idx="minor">
+            <a:schemeClr val="lt1"/>
+          </a:fontRef>
+        </p:style>
+        <p:txBody>
+          <a:bodyPr rtlCol="0" anchor="ctr"/>
+          <a:lstStyle/>
+          <a:p>
+            <a:pPr algn="ctr"/>
+            <a:endParaRPr lang="en-US"/>
+          </a:p>
+        </p:txBody>
+      </p:sp>
+      <p:sp>
+        <p:nvSpPr>
+          <p:cNvPr id="6" name="Oval 5">
+            <a:extLst>
+              <a:ext uri="{FF2B5EF4-FFF2-40B4-BE49-F238E27FC236}">
+                <a16:creationId xmlns:a16="http://schemas.microsoft.com/office/drawing/2014/main" id="{0389F32D-E4AF-F74B-B423-B6CF1ADA4514}"/>
+              </a:ext>
+            </a:extLst>
+          </p:cNvPr>
+          <p:cNvSpPr/>
+          <p:nvPr/>
+        </p:nvSpPr>
+        <p:spPr>
+          <a:xfrm>
+            <a:off x="4268121" y="3608771"/>
+            <a:ext cx="2273857" cy="1232379"/>
+          </a:xfrm>
+          <a:prstGeom prst="ellipse">
+            <a:avLst/>
+          </a:prstGeom>
+          <a:solidFill>
+            <a:schemeClr val="accent5">
+              <a:lumMod val="20000"/>
+              <a:lumOff val="80000"/>
+              <a:alpha val="35911"/>
+            </a:schemeClr>
+          </a:solidFill>
+          <a:ln>
+            <a:solidFill>
+              <a:srgbClr val="0070C0"/>
+            </a:solidFill>
+          </a:ln>
+        </p:spPr>
+        <p:style>
+          <a:lnRef idx="2">
+            <a:schemeClr val="accent1">
+              <a:shade val="50000"/>
+            </a:schemeClr>
+          </a:lnRef>
+          <a:fillRef idx="1">
+            <a:schemeClr val="accent1"/>
+          </a:fillRef>
+          <a:effectRef idx="0">
+            <a:schemeClr val="accent1"/>
+          </a:effectRef>
+          <a:fontRef idx="minor">
+            <a:schemeClr val="lt1"/>
+          </a:fontRef>
+        </p:style>
+        <p:txBody>
+          <a:bodyPr rtlCol="0" anchor="ctr"/>
+          <a:lstStyle/>
+          <a:p>
+            <a:pPr algn="ctr"/>
+            <a:endParaRPr lang="en-US"/>
+          </a:p>
+        </p:txBody>
+      </p:sp>
+      <p:sp>
+        <p:nvSpPr>
+          <p:cNvPr id="7" name="Oval 6">
+            <a:extLst>
+              <a:ext uri="{FF2B5EF4-FFF2-40B4-BE49-F238E27FC236}">
+                <a16:creationId xmlns:a16="http://schemas.microsoft.com/office/drawing/2014/main" id="{9971E320-B45D-DC49-9CD1-B08E949D34C1}"/>
+              </a:ext>
+            </a:extLst>
+          </p:cNvPr>
+          <p:cNvSpPr/>
+          <p:nvPr/>
+        </p:nvSpPr>
+        <p:spPr>
+          <a:xfrm rot="965329">
+            <a:off x="5276487" y="4365250"/>
+            <a:ext cx="2057528" cy="1232379"/>
+          </a:xfrm>
+          <a:prstGeom prst="ellipse">
+            <a:avLst/>
+          </a:prstGeom>
+          <a:solidFill>
+            <a:schemeClr val="accent5">
+              <a:lumMod val="20000"/>
+              <a:lumOff val="80000"/>
+              <a:alpha val="35911"/>
+            </a:schemeClr>
+          </a:solidFill>
+          <a:ln>
+            <a:solidFill>
+              <a:srgbClr val="0070C0"/>
+            </a:solidFill>
+          </a:ln>
+        </p:spPr>
+        <p:style>
+          <a:lnRef idx="2">
+            <a:schemeClr val="accent1">
+              <a:shade val="50000"/>
+            </a:schemeClr>
+          </a:lnRef>
+          <a:fillRef idx="1">
+            <a:schemeClr val="accent1"/>
+          </a:fillRef>
+          <a:effectRef idx="0">
+            <a:schemeClr val="accent1"/>
+          </a:effectRef>
+          <a:fontRef idx="minor">
+            <a:schemeClr val="lt1"/>
+          </a:fontRef>
+        </p:style>
+        <p:txBody>
+          <a:bodyPr rtlCol="0" anchor="ctr"/>
+          <a:lstStyle/>
+          <a:p>
+            <a:pPr algn="ctr"/>
+            <a:endParaRPr lang="en-US"/>
+          </a:p>
+        </p:txBody>
+      </p:sp>
+      <p:sp>
+        <p:nvSpPr>
+          <p:cNvPr id="8" name="Oval 7">
+            <a:extLst>
+              <a:ext uri="{FF2B5EF4-FFF2-40B4-BE49-F238E27FC236}">
+                <a16:creationId xmlns:a16="http://schemas.microsoft.com/office/drawing/2014/main" id="{4D137703-CE6E-FB49-ACEE-A14BFBBC126E}"/>
+              </a:ext>
+            </a:extLst>
+          </p:cNvPr>
+          <p:cNvSpPr/>
+          <p:nvPr/>
+        </p:nvSpPr>
+        <p:spPr>
+          <a:xfrm rot="20412797">
+            <a:off x="5657103" y="3660341"/>
+            <a:ext cx="1999873" cy="1232379"/>
+          </a:xfrm>
+          <a:prstGeom prst="ellipse">
+            <a:avLst/>
+          </a:prstGeom>
+          <a:solidFill>
+            <a:schemeClr val="accent5">
+              <a:lumMod val="20000"/>
+              <a:lumOff val="80000"/>
+              <a:alpha val="35911"/>
+            </a:schemeClr>
+          </a:solidFill>
+          <a:ln>
+            <a:solidFill>
+              <a:srgbClr val="0070C0"/>
+            </a:solidFill>
+          </a:ln>
+        </p:spPr>
+        <p:style>
+          <a:lnRef idx="2">
+            <a:schemeClr val="accent1">
+              <a:shade val="50000"/>
+            </a:schemeClr>
+          </a:lnRef>
+          <a:fillRef idx="1">
+            <a:schemeClr val="accent1"/>
+          </a:fillRef>
+          <a:effectRef idx="0">
+            <a:schemeClr val="accent1"/>
+          </a:effectRef>
+          <a:fontRef idx="minor">
+            <a:schemeClr val="lt1"/>
+          </a:fontRef>
+        </p:style>
+        <p:txBody>
+          <a:bodyPr rtlCol="0" anchor="ctr"/>
+          <a:lstStyle/>
+          <a:p>
+            <a:pPr algn="ctr"/>
+            <a:endParaRPr lang="en-US"/>
+          </a:p>
+        </p:txBody>
+      </p:sp>
+      <p:sp>
+        <p:nvSpPr>
+          <p:cNvPr id="9" name="Oval 8">
+            <a:extLst>
+              <a:ext uri="{FF2B5EF4-FFF2-40B4-BE49-F238E27FC236}">
+                <a16:creationId xmlns:a16="http://schemas.microsoft.com/office/drawing/2014/main" id="{CB82C0F5-E1B3-2F41-9437-1892493D73C6}"/>
+              </a:ext>
+            </a:extLst>
+          </p:cNvPr>
+          <p:cNvSpPr/>
+          <p:nvPr/>
+        </p:nvSpPr>
+        <p:spPr>
+          <a:xfrm>
+            <a:off x="4777192" y="1224189"/>
+            <a:ext cx="294468" cy="294468"/>
+          </a:xfrm>
+          <a:prstGeom prst="ellipse">
+            <a:avLst/>
+          </a:prstGeom>
+          <a:solidFill>
+            <a:schemeClr val="accent4"/>
+          </a:solidFill>
+        </p:spPr>
+        <p:style>
+          <a:lnRef idx="2">
+            <a:schemeClr val="accent1">
+              <a:shade val="50000"/>
+            </a:schemeClr>
+          </a:lnRef>
+          <a:fillRef idx="1">
+            <a:schemeClr val="accent1"/>
+          </a:fillRef>
+          <a:effectRef idx="0">
+            <a:schemeClr val="accent1"/>
+          </a:effectRef>
+          <a:fontRef idx="minor">
+            <a:schemeClr val="lt1"/>
+          </a:fontRef>
+        </p:style>
+        <p:txBody>
+          <a:bodyPr rtlCol="0" anchor="ctr"/>
+          <a:lstStyle/>
+          <a:p>
+            <a:pPr algn="ctr"/>
+            <a:endParaRPr lang="en-US"/>
+          </a:p>
+        </p:txBody>
+      </p:sp>
+      <p:sp>
+        <p:nvSpPr>
+          <p:cNvPr id="10" name="Oval 9">
+            <a:extLst>
+              <a:ext uri="{FF2B5EF4-FFF2-40B4-BE49-F238E27FC236}">
+                <a16:creationId xmlns:a16="http://schemas.microsoft.com/office/drawing/2014/main" id="{FA9DEC98-9184-0042-8FCD-BE315EE1B302}"/>
+              </a:ext>
+            </a:extLst>
+          </p:cNvPr>
+          <p:cNvSpPr/>
+          <p:nvPr/>
+        </p:nvSpPr>
+        <p:spPr>
+          <a:xfrm>
+            <a:off x="4664182" y="1588259"/>
+            <a:ext cx="294468" cy="294468"/>
+          </a:xfrm>
+          <a:prstGeom prst="ellipse">
+            <a:avLst/>
+          </a:prstGeom>
+          <a:solidFill>
+            <a:schemeClr val="accent4"/>
+          </a:solidFill>
+        </p:spPr>
+        <p:style>
+          <a:lnRef idx="2">
+            <a:schemeClr val="accent1">
+              <a:shade val="50000"/>
+            </a:schemeClr>
+          </a:lnRef>
+          <a:fillRef idx="1">
+            <a:schemeClr val="accent1"/>
+          </a:fillRef>
+          <a:effectRef idx="0">
+            <a:schemeClr val="accent1"/>
+          </a:effectRef>
+          <a:fontRef idx="minor">
+            <a:schemeClr val="lt1"/>
+          </a:fontRef>
+        </p:style>
+        <p:txBody>
+          <a:bodyPr rtlCol="0" anchor="ctr"/>
+          <a:lstStyle/>
+          <a:p>
+            <a:pPr algn="ctr"/>
+            <a:endParaRPr lang="en-US"/>
+          </a:p>
+        </p:txBody>
+      </p:sp>
+      <p:sp>
+        <p:nvSpPr>
+          <p:cNvPr id="11" name="Oval 10">
+            <a:extLst>
+              <a:ext uri="{FF2B5EF4-FFF2-40B4-BE49-F238E27FC236}">
+                <a16:creationId xmlns:a16="http://schemas.microsoft.com/office/drawing/2014/main" id="{FC0CCFB6-ABDF-0F48-B91D-96BD9D06FF92}"/>
+              </a:ext>
+            </a:extLst>
+          </p:cNvPr>
+          <p:cNvSpPr/>
+          <p:nvPr/>
+        </p:nvSpPr>
+        <p:spPr>
+          <a:xfrm>
+            <a:off x="5918303" y="1390565"/>
+            <a:ext cx="294468" cy="294468"/>
+          </a:xfrm>
+          <a:prstGeom prst="ellipse">
+            <a:avLst/>
+          </a:prstGeom>
+          <a:solidFill>
+            <a:schemeClr val="accent4"/>
+          </a:solidFill>
+        </p:spPr>
+        <p:style>
+          <a:lnRef idx="2">
+            <a:schemeClr val="accent1">
+              <a:shade val="50000"/>
+            </a:schemeClr>
+          </a:lnRef>
+          <a:fillRef idx="1">
+            <a:schemeClr val="accent1"/>
+          </a:fillRef>
+          <a:effectRef idx="0">
+            <a:schemeClr val="accent1"/>
+          </a:effectRef>
+          <a:fontRef idx="minor">
+            <a:schemeClr val="lt1"/>
+          </a:fontRef>
+        </p:style>
+        <p:txBody>
+          <a:bodyPr rtlCol="0" anchor="ctr"/>
+          <a:lstStyle/>
+          <a:p>
+            <a:pPr algn="ctr"/>
+            <a:endParaRPr lang="en-US"/>
+          </a:p>
+        </p:txBody>
+      </p:sp>
+      <p:sp>
+        <p:nvSpPr>
+          <p:cNvPr id="12" name="Oval 11">
+            <a:extLst>
+              <a:ext uri="{FF2B5EF4-FFF2-40B4-BE49-F238E27FC236}">
+                <a16:creationId xmlns:a16="http://schemas.microsoft.com/office/drawing/2014/main" id="{19D6AF0D-4587-7A42-8D51-E0DC365C8D14}"/>
+              </a:ext>
+            </a:extLst>
+          </p:cNvPr>
+          <p:cNvSpPr/>
+          <p:nvPr/>
+        </p:nvSpPr>
+        <p:spPr>
+          <a:xfrm>
+            <a:off x="5234392" y="1681389"/>
+            <a:ext cx="294468" cy="294468"/>
+          </a:xfrm>
+          <a:prstGeom prst="ellipse">
+            <a:avLst/>
+          </a:prstGeom>
+          <a:solidFill>
+            <a:schemeClr val="accent4"/>
+          </a:solidFill>
+        </p:spPr>
+        <p:style>
+          <a:lnRef idx="2">
+            <a:schemeClr val="accent1">
+              <a:shade val="50000"/>
+            </a:schemeClr>
+          </a:lnRef>
+          <a:fillRef idx="1">
+            <a:schemeClr val="accent1"/>
+          </a:fillRef>
+          <a:effectRef idx="0">
+            <a:schemeClr val="accent1"/>
+          </a:effectRef>
+          <a:fontRef idx="minor">
+            <a:schemeClr val="lt1"/>
+          </a:fontRef>
+        </p:style>
+        <p:txBody>
+          <a:bodyPr rtlCol="0" anchor="ctr"/>
+          <a:lstStyle/>
+          <a:p>
+            <a:pPr algn="ctr"/>
+            <a:endParaRPr lang="en-US"/>
+          </a:p>
+        </p:txBody>
+      </p:sp>
+      <p:sp>
+        <p:nvSpPr>
+          <p:cNvPr id="13" name="Oval 12">
+            <a:extLst>
+              <a:ext uri="{FF2B5EF4-FFF2-40B4-BE49-F238E27FC236}">
+                <a16:creationId xmlns:a16="http://schemas.microsoft.com/office/drawing/2014/main" id="{907320EE-28A9-284A-B12A-770FA0ABE4AD}"/>
+              </a:ext>
+            </a:extLst>
+          </p:cNvPr>
+          <p:cNvSpPr/>
+          <p:nvPr/>
+        </p:nvSpPr>
+        <p:spPr>
+          <a:xfrm>
+            <a:off x="5264167" y="1105980"/>
+            <a:ext cx="294468" cy="294468"/>
+          </a:xfrm>
+          <a:prstGeom prst="ellipse">
+            <a:avLst/>
+          </a:prstGeom>
+          <a:solidFill>
+            <a:schemeClr val="accent4"/>
+          </a:solidFill>
+        </p:spPr>
+        <p:style>
+          <a:lnRef idx="2">
+            <a:schemeClr val="accent1">
+              <a:shade val="50000"/>
+            </a:schemeClr>
+          </a:lnRef>
+          <a:fillRef idx="1">
+            <a:schemeClr val="accent1"/>
+          </a:fillRef>
+          <a:effectRef idx="0">
+            <a:schemeClr val="accent1"/>
+          </a:effectRef>
+          <a:fontRef idx="minor">
+            <a:schemeClr val="lt1"/>
+          </a:fontRef>
+        </p:style>
+        <p:txBody>
+          <a:bodyPr rtlCol="0" anchor="ctr"/>
+          <a:lstStyle/>
+          <a:p>
+            <a:pPr algn="ctr"/>
+            <a:endParaRPr lang="en-US"/>
+          </a:p>
+        </p:txBody>
+      </p:sp>
+      <p:sp>
+        <p:nvSpPr>
+          <p:cNvPr id="14" name="Oval 13">
+            <a:extLst>
+              <a:ext uri="{FF2B5EF4-FFF2-40B4-BE49-F238E27FC236}">
+                <a16:creationId xmlns:a16="http://schemas.microsoft.com/office/drawing/2014/main" id="{E8579B37-E01E-664F-8F4C-083685EB2437}"/>
+              </a:ext>
+            </a:extLst>
+          </p:cNvPr>
+          <p:cNvSpPr/>
+          <p:nvPr/>
+        </p:nvSpPr>
+        <p:spPr>
+          <a:xfrm>
+            <a:off x="5491408" y="1412468"/>
+            <a:ext cx="294468" cy="294468"/>
+          </a:xfrm>
+          <a:prstGeom prst="ellipse">
+            <a:avLst/>
+          </a:prstGeom>
+          <a:solidFill>
+            <a:schemeClr val="accent4"/>
+          </a:solidFill>
+        </p:spPr>
+        <p:style>
+          <a:lnRef idx="2">
+            <a:schemeClr val="accent1">
+              <a:shade val="50000"/>
+            </a:schemeClr>
+          </a:lnRef>
+          <a:fillRef idx="1">
+            <a:schemeClr val="accent1"/>
+          </a:fillRef>
+          <a:effectRef idx="0">
+            <a:schemeClr val="accent1"/>
+          </a:effectRef>
+          <a:fontRef idx="minor">
+            <a:schemeClr val="lt1"/>
+          </a:fontRef>
+        </p:style>
+        <p:txBody>
+          <a:bodyPr rtlCol="0" anchor="ctr"/>
+          <a:lstStyle/>
+          <a:p>
+            <a:pPr algn="ctr"/>
+            <a:endParaRPr lang="en-US"/>
+          </a:p>
+        </p:txBody>
+      </p:sp>
+      <p:sp>
+        <p:nvSpPr>
+          <p:cNvPr id="15" name="Oval 14">
+            <a:extLst>
+              <a:ext uri="{FF2B5EF4-FFF2-40B4-BE49-F238E27FC236}">
+                <a16:creationId xmlns:a16="http://schemas.microsoft.com/office/drawing/2014/main" id="{B9B0E2BC-5D03-3341-9854-DFF10299782B}"/>
+              </a:ext>
+            </a:extLst>
+          </p:cNvPr>
+          <p:cNvSpPr/>
+          <p:nvPr/>
+        </p:nvSpPr>
+        <p:spPr>
+          <a:xfrm>
+            <a:off x="5728519" y="974410"/>
+            <a:ext cx="294468" cy="294468"/>
+          </a:xfrm>
+          <a:prstGeom prst="ellipse">
+            <a:avLst/>
+          </a:prstGeom>
+          <a:solidFill>
+            <a:schemeClr val="accent4"/>
+          </a:solidFill>
+        </p:spPr>
+        <p:style>
+          <a:lnRef idx="2">
+            <a:schemeClr val="accent1">
+              <a:shade val="50000"/>
+            </a:schemeClr>
+          </a:lnRef>
+          <a:fillRef idx="1">
+            <a:schemeClr val="accent1"/>
+          </a:fillRef>
+          <a:effectRef idx="0">
+            <a:schemeClr val="accent1"/>
+          </a:effectRef>
+          <a:fontRef idx="minor">
+            <a:schemeClr val="lt1"/>
+          </a:fontRef>
+        </p:style>
+        <p:txBody>
+          <a:bodyPr rtlCol="0" anchor="ctr"/>
+          <a:lstStyle/>
+          <a:p>
+            <a:pPr algn="ctr"/>
+            <a:endParaRPr lang="en-US"/>
+          </a:p>
+        </p:txBody>
+      </p:sp>
+      <p:sp>
+        <p:nvSpPr>
+          <p:cNvPr id="16" name="Oval 15">
+            <a:extLst>
+              <a:ext uri="{FF2B5EF4-FFF2-40B4-BE49-F238E27FC236}">
+                <a16:creationId xmlns:a16="http://schemas.microsoft.com/office/drawing/2014/main" id="{4361876C-0846-EA45-A05C-86C2E7B861C9}"/>
+              </a:ext>
+            </a:extLst>
+          </p:cNvPr>
+          <p:cNvSpPr/>
+          <p:nvPr/>
+        </p:nvSpPr>
+        <p:spPr>
+          <a:xfrm>
+            <a:off x="6281604" y="1758333"/>
+            <a:ext cx="294468" cy="294468"/>
+          </a:xfrm>
+          <a:prstGeom prst="ellipse">
+            <a:avLst/>
+          </a:prstGeom>
+          <a:solidFill>
+            <a:schemeClr val="accent4"/>
+          </a:solidFill>
+        </p:spPr>
+        <p:style>
+          <a:lnRef idx="2">
+            <a:schemeClr val="accent1">
+              <a:shade val="50000"/>
+            </a:schemeClr>
+          </a:lnRef>
+          <a:fillRef idx="1">
+            <a:schemeClr val="accent1"/>
+          </a:fillRef>
+          <a:effectRef idx="0">
+            <a:schemeClr val="accent1"/>
+          </a:effectRef>
+          <a:fontRef idx="minor">
+            <a:schemeClr val="lt1"/>
+          </a:fontRef>
+        </p:style>
+        <p:txBody>
+          <a:bodyPr rtlCol="0" anchor="ctr"/>
+          <a:lstStyle/>
+          <a:p>
+            <a:pPr algn="ctr"/>
+            <a:endParaRPr lang="en-US"/>
+          </a:p>
+        </p:txBody>
+      </p:sp>
+      <p:sp>
+        <p:nvSpPr>
+          <p:cNvPr id="17" name="Oval 16">
+            <a:extLst>
+              <a:ext uri="{FF2B5EF4-FFF2-40B4-BE49-F238E27FC236}">
+                <a16:creationId xmlns:a16="http://schemas.microsoft.com/office/drawing/2014/main" id="{FFBB75ED-CC7C-144E-964C-7C14A754F150}"/>
+              </a:ext>
+            </a:extLst>
+          </p:cNvPr>
+          <p:cNvSpPr/>
+          <p:nvPr/>
+        </p:nvSpPr>
+        <p:spPr>
+          <a:xfrm>
+            <a:off x="6535044" y="1293791"/>
+            <a:ext cx="294468" cy="294468"/>
+          </a:xfrm>
+          <a:prstGeom prst="ellipse">
+            <a:avLst/>
+          </a:prstGeom>
+          <a:solidFill>
+            <a:schemeClr val="accent4"/>
+          </a:solidFill>
+        </p:spPr>
+        <p:style>
+          <a:lnRef idx="2">
+            <a:schemeClr val="accent1">
+              <a:shade val="50000"/>
+            </a:schemeClr>
+          </a:lnRef>
+          <a:fillRef idx="1">
+            <a:schemeClr val="accent1"/>
+          </a:fillRef>
+          <a:effectRef idx="0">
+            <a:schemeClr val="accent1"/>
+          </a:effectRef>
+          <a:fontRef idx="minor">
+            <a:schemeClr val="lt1"/>
+          </a:fontRef>
+        </p:style>
+        <p:txBody>
+          <a:bodyPr rtlCol="0" anchor="ctr"/>
+          <a:lstStyle/>
+          <a:p>
+            <a:pPr algn="ctr"/>
+            <a:endParaRPr lang="en-US"/>
+          </a:p>
+        </p:txBody>
+      </p:sp>
+      <p:sp>
+        <p:nvSpPr>
+          <p:cNvPr id="18" name="Oval 17">
+            <a:extLst>
+              <a:ext uri="{FF2B5EF4-FFF2-40B4-BE49-F238E27FC236}">
+                <a16:creationId xmlns:a16="http://schemas.microsoft.com/office/drawing/2014/main" id="{739F93DF-8AB8-BA4E-BD98-C1C92669B7B7}"/>
+              </a:ext>
+            </a:extLst>
+          </p:cNvPr>
+          <p:cNvSpPr/>
+          <p:nvPr/>
+        </p:nvSpPr>
+        <p:spPr>
+          <a:xfrm>
+            <a:off x="6318744" y="973282"/>
+            <a:ext cx="294468" cy="294468"/>
+          </a:xfrm>
+          <a:prstGeom prst="ellipse">
+            <a:avLst/>
+          </a:prstGeom>
+          <a:solidFill>
+            <a:schemeClr val="accent4"/>
+          </a:solidFill>
+        </p:spPr>
+        <p:style>
+          <a:lnRef idx="2">
+            <a:schemeClr val="accent1">
+              <a:shade val="50000"/>
+            </a:schemeClr>
+          </a:lnRef>
+          <a:fillRef idx="1">
+            <a:schemeClr val="accent1"/>
+          </a:fillRef>
+          <a:effectRef idx="0">
+            <a:schemeClr val="accent1"/>
+          </a:effectRef>
+          <a:fontRef idx="minor">
+            <a:schemeClr val="lt1"/>
+          </a:fontRef>
+        </p:style>
+        <p:txBody>
+          <a:bodyPr rtlCol="0" anchor="ctr"/>
+          <a:lstStyle/>
+          <a:p>
+            <a:pPr algn="ctr"/>
+            <a:endParaRPr lang="en-US"/>
+          </a:p>
+        </p:txBody>
+      </p:sp>
+      <p:sp>
+        <p:nvSpPr>
+          <p:cNvPr id="19" name="Oval 18">
+            <a:extLst>
+              <a:ext uri="{FF2B5EF4-FFF2-40B4-BE49-F238E27FC236}">
+                <a16:creationId xmlns:a16="http://schemas.microsoft.com/office/drawing/2014/main" id="{71680A35-4E34-1D4E-A54E-FEEE28D00C07}"/>
+              </a:ext>
+            </a:extLst>
+          </p:cNvPr>
+          <p:cNvSpPr/>
+          <p:nvPr/>
+        </p:nvSpPr>
+        <p:spPr>
+          <a:xfrm>
+            <a:off x="6864464" y="1250398"/>
+            <a:ext cx="294468" cy="294468"/>
+          </a:xfrm>
+          <a:prstGeom prst="ellipse">
+            <a:avLst/>
+          </a:prstGeom>
+          <a:solidFill>
+            <a:schemeClr val="accent4"/>
+          </a:solidFill>
+        </p:spPr>
+        <p:style>
+          <a:lnRef idx="2">
+            <a:schemeClr val="accent1">
+              <a:shade val="50000"/>
+            </a:schemeClr>
+          </a:lnRef>
+          <a:fillRef idx="1">
+            <a:schemeClr val="accent1"/>
+          </a:fillRef>
+          <a:effectRef idx="0">
+            <a:schemeClr val="accent1"/>
+          </a:effectRef>
+          <a:fontRef idx="minor">
+            <a:schemeClr val="lt1"/>
+          </a:fontRef>
+        </p:style>
+        <p:txBody>
+          <a:bodyPr rtlCol="0" anchor="ctr"/>
+          <a:lstStyle/>
+          <a:p>
+            <a:pPr algn="ctr"/>
+            <a:endParaRPr lang="en-US"/>
+          </a:p>
+        </p:txBody>
+      </p:sp>
+      <p:sp>
+        <p:nvSpPr>
+          <p:cNvPr id="20" name="Oval 19">
+            <a:extLst>
+              <a:ext uri="{FF2B5EF4-FFF2-40B4-BE49-F238E27FC236}">
+                <a16:creationId xmlns:a16="http://schemas.microsoft.com/office/drawing/2014/main" id="{E298DDC5-F068-6140-8F06-B936894D64BE}"/>
+              </a:ext>
+            </a:extLst>
+          </p:cNvPr>
+          <p:cNvSpPr/>
+          <p:nvPr/>
+        </p:nvSpPr>
+        <p:spPr>
+          <a:xfrm>
+            <a:off x="5125137" y="1293062"/>
+            <a:ext cx="294468" cy="294468"/>
+          </a:xfrm>
+          <a:prstGeom prst="ellipse">
+            <a:avLst/>
+          </a:prstGeom>
+          <a:solidFill>
+            <a:schemeClr val="accent4"/>
+          </a:solidFill>
+        </p:spPr>
+        <p:style>
+          <a:lnRef idx="2">
+            <a:schemeClr val="accent1">
+              <a:shade val="50000"/>
+            </a:schemeClr>
+          </a:lnRef>
+          <a:fillRef idx="1">
+            <a:schemeClr val="accent1"/>
+          </a:fillRef>
+          <a:effectRef idx="0">
+            <a:schemeClr val="accent1"/>
+          </a:effectRef>
+          <a:fontRef idx="minor">
+            <a:schemeClr val="lt1"/>
+          </a:fontRef>
+        </p:style>
+        <p:txBody>
+          <a:bodyPr rtlCol="0" anchor="ctr"/>
+          <a:lstStyle/>
+          <a:p>
+            <a:pPr algn="ctr"/>
+            <a:endParaRPr lang="en-US"/>
+          </a:p>
+        </p:txBody>
+      </p:sp>
+      <p:sp>
+        <p:nvSpPr>
+          <p:cNvPr id="21" name="Oval 20">
+            <a:extLst>
+              <a:ext uri="{FF2B5EF4-FFF2-40B4-BE49-F238E27FC236}">
+                <a16:creationId xmlns:a16="http://schemas.microsoft.com/office/drawing/2014/main" id="{53355E27-83EF-0B41-97EE-326671135067}"/>
+              </a:ext>
+            </a:extLst>
+          </p:cNvPr>
+          <p:cNvSpPr/>
+          <p:nvPr/>
+        </p:nvSpPr>
+        <p:spPr>
+          <a:xfrm>
+            <a:off x="5713138" y="1659486"/>
+            <a:ext cx="294468" cy="294468"/>
+          </a:xfrm>
+          <a:prstGeom prst="ellipse">
+            <a:avLst/>
+          </a:prstGeom>
+          <a:solidFill>
+            <a:schemeClr val="accent4"/>
+          </a:solidFill>
+        </p:spPr>
+        <p:style>
+          <a:lnRef idx="2">
+            <a:schemeClr val="accent1">
+              <a:shade val="50000"/>
+            </a:schemeClr>
+          </a:lnRef>
+          <a:fillRef idx="1">
+            <a:schemeClr val="accent1"/>
+          </a:fillRef>
+          <a:effectRef idx="0">
+            <a:schemeClr val="accent1"/>
+          </a:effectRef>
+          <a:fontRef idx="minor">
+            <a:schemeClr val="lt1"/>
+          </a:fontRef>
+        </p:style>
+        <p:txBody>
+          <a:bodyPr rtlCol="0" anchor="ctr"/>
+          <a:lstStyle/>
+          <a:p>
+            <a:pPr algn="ctr"/>
+            <a:endParaRPr lang="en-US"/>
+          </a:p>
+        </p:txBody>
+      </p:sp>
+      <p:sp>
+        <p:nvSpPr>
+          <p:cNvPr id="22" name="Oval 21">
+            <a:extLst>
+              <a:ext uri="{FF2B5EF4-FFF2-40B4-BE49-F238E27FC236}">
+                <a16:creationId xmlns:a16="http://schemas.microsoft.com/office/drawing/2014/main" id="{2BD73340-6D1D-AE44-B09C-815640DC9FC8}"/>
+              </a:ext>
+            </a:extLst>
+          </p:cNvPr>
+          <p:cNvSpPr/>
+          <p:nvPr/>
+        </p:nvSpPr>
+        <p:spPr>
+          <a:xfrm>
+            <a:off x="6609850" y="1483231"/>
+            <a:ext cx="294468" cy="294468"/>
+          </a:xfrm>
+          <a:prstGeom prst="ellipse">
+            <a:avLst/>
+          </a:prstGeom>
+          <a:solidFill>
+            <a:schemeClr val="accent4"/>
+          </a:solidFill>
+        </p:spPr>
+        <p:style>
+          <a:lnRef idx="2">
+            <a:schemeClr val="accent1">
+              <a:shade val="50000"/>
+            </a:schemeClr>
+          </a:lnRef>
+          <a:fillRef idx="1">
+            <a:schemeClr val="accent1"/>
+          </a:fillRef>
+          <a:effectRef idx="0">
+            <a:schemeClr val="accent1"/>
+          </a:effectRef>
+          <a:fontRef idx="minor">
+            <a:schemeClr val="lt1"/>
+          </a:fontRef>
+        </p:style>
+        <p:txBody>
+          <a:bodyPr rtlCol="0" anchor="ctr"/>
+          <a:lstStyle/>
+          <a:p>
+            <a:pPr algn="ctr"/>
+            <a:endParaRPr lang="en-US"/>
+          </a:p>
+        </p:txBody>
+      </p:sp>
+      <p:sp>
+        <p:nvSpPr>
+          <p:cNvPr id="23" name="Oval 22">
+            <a:extLst>
+              <a:ext uri="{FF2B5EF4-FFF2-40B4-BE49-F238E27FC236}">
+                <a16:creationId xmlns:a16="http://schemas.microsoft.com/office/drawing/2014/main" id="{DC9430E1-6A51-E74C-AD08-B6208CCDFDE5}"/>
+              </a:ext>
+            </a:extLst>
+          </p:cNvPr>
+          <p:cNvSpPr/>
+          <p:nvPr/>
+        </p:nvSpPr>
+        <p:spPr>
+          <a:xfrm>
+            <a:off x="5060420" y="1677319"/>
+            <a:ext cx="294468" cy="294468"/>
+          </a:xfrm>
+          <a:prstGeom prst="ellipse">
+            <a:avLst/>
+          </a:prstGeom>
+          <a:solidFill>
+            <a:schemeClr val="accent4"/>
+          </a:solidFill>
+        </p:spPr>
+        <p:style>
+          <a:lnRef idx="2">
+            <a:schemeClr val="accent1">
+              <a:shade val="50000"/>
+            </a:schemeClr>
+          </a:lnRef>
+          <a:fillRef idx="1">
+            <a:schemeClr val="accent1"/>
+          </a:fillRef>
+          <a:effectRef idx="0">
+            <a:schemeClr val="accent1"/>
+          </a:effectRef>
+          <a:fontRef idx="minor">
+            <a:schemeClr val="lt1"/>
+          </a:fontRef>
+        </p:style>
+        <p:txBody>
+          <a:bodyPr rtlCol="0" anchor="ctr"/>
+          <a:lstStyle/>
+          <a:p>
+            <a:pPr algn="ctr"/>
+            <a:endParaRPr lang="en-US"/>
+          </a:p>
+        </p:txBody>
+      </p:sp>
+      <p:sp>
+        <p:nvSpPr>
+          <p:cNvPr id="24" name="Oval 23">
+            <a:extLst>
+              <a:ext uri="{FF2B5EF4-FFF2-40B4-BE49-F238E27FC236}">
+                <a16:creationId xmlns:a16="http://schemas.microsoft.com/office/drawing/2014/main" id="{86D1FB04-5468-8F4E-9755-25EC0332A18A}"/>
+              </a:ext>
+            </a:extLst>
+          </p:cNvPr>
+          <p:cNvSpPr/>
+          <p:nvPr/>
+        </p:nvSpPr>
+        <p:spPr>
+          <a:xfrm>
+            <a:off x="6036092" y="1179505"/>
+            <a:ext cx="294468" cy="294468"/>
+          </a:xfrm>
+          <a:prstGeom prst="ellipse">
+            <a:avLst/>
+          </a:prstGeom>
+          <a:solidFill>
+            <a:schemeClr val="accent4"/>
+          </a:solidFill>
+        </p:spPr>
+        <p:style>
+          <a:lnRef idx="2">
+            <a:schemeClr val="accent1">
+              <a:shade val="50000"/>
+            </a:schemeClr>
+          </a:lnRef>
+          <a:fillRef idx="1">
+            <a:schemeClr val="accent1"/>
+          </a:fillRef>
+          <a:effectRef idx="0">
+            <a:schemeClr val="accent1"/>
+          </a:effectRef>
+          <a:fontRef idx="minor">
+            <a:schemeClr val="lt1"/>
+          </a:fontRef>
+        </p:style>
+        <p:txBody>
+          <a:bodyPr rtlCol="0" anchor="ctr"/>
+          <a:lstStyle/>
+          <a:p>
+            <a:pPr algn="ctr"/>
+            <a:endParaRPr lang="en-US"/>
+          </a:p>
+        </p:txBody>
+      </p:sp>
+      <p:sp>
+        <p:nvSpPr>
+          <p:cNvPr id="25" name="Oval 24">
+            <a:extLst>
+              <a:ext uri="{FF2B5EF4-FFF2-40B4-BE49-F238E27FC236}">
+                <a16:creationId xmlns:a16="http://schemas.microsoft.com/office/drawing/2014/main" id="{146A4F47-2635-FE4D-BA59-CE43369FFE09}"/>
+              </a:ext>
+            </a:extLst>
+          </p:cNvPr>
+          <p:cNvSpPr/>
+          <p:nvPr/>
+        </p:nvSpPr>
+        <p:spPr>
+          <a:xfrm>
+            <a:off x="5582337" y="1750262"/>
+            <a:ext cx="294468" cy="294468"/>
+          </a:xfrm>
+          <a:prstGeom prst="ellipse">
+            <a:avLst/>
+          </a:prstGeom>
+          <a:solidFill>
+            <a:schemeClr val="accent4"/>
+          </a:solidFill>
+        </p:spPr>
+        <p:style>
+          <a:lnRef idx="2">
+            <a:schemeClr val="accent1">
+              <a:shade val="50000"/>
+            </a:schemeClr>
+          </a:lnRef>
+          <a:fillRef idx="1">
+            <a:schemeClr val="accent1"/>
+          </a:fillRef>
+          <a:effectRef idx="0">
+            <a:schemeClr val="accent1"/>
+          </a:effectRef>
+          <a:fontRef idx="minor">
+            <a:schemeClr val="lt1"/>
+          </a:fontRef>
+        </p:style>
+        <p:txBody>
+          <a:bodyPr rtlCol="0" anchor="ctr"/>
+          <a:lstStyle/>
+          <a:p>
+            <a:pPr algn="ctr"/>
+            <a:endParaRPr lang="en-US"/>
+          </a:p>
+        </p:txBody>
+      </p:sp>
+      <p:sp>
+        <p:nvSpPr>
+          <p:cNvPr id="26" name="Oval 25">
+            <a:extLst>
+              <a:ext uri="{FF2B5EF4-FFF2-40B4-BE49-F238E27FC236}">
+                <a16:creationId xmlns:a16="http://schemas.microsoft.com/office/drawing/2014/main" id="{E7633667-E8B9-1243-9559-B3506FE8D536}"/>
+              </a:ext>
+            </a:extLst>
+          </p:cNvPr>
+          <p:cNvSpPr/>
+          <p:nvPr/>
+        </p:nvSpPr>
+        <p:spPr>
+          <a:xfrm>
+            <a:off x="5780061" y="4401368"/>
+            <a:ext cx="294468" cy="294468"/>
+          </a:xfrm>
+          <a:prstGeom prst="ellipse">
+            <a:avLst/>
+          </a:prstGeom>
+          <a:solidFill>
+            <a:schemeClr val="accent4"/>
+          </a:solidFill>
+        </p:spPr>
+        <p:style>
+          <a:lnRef idx="2">
+            <a:schemeClr val="accent1">
+              <a:shade val="50000"/>
+            </a:schemeClr>
+          </a:lnRef>
+          <a:fillRef idx="1">
+            <a:schemeClr val="accent1"/>
+          </a:fillRef>
+          <a:effectRef idx="0">
+            <a:schemeClr val="accent1"/>
+          </a:effectRef>
+          <a:fontRef idx="minor">
+            <a:schemeClr val="lt1"/>
+          </a:fontRef>
+        </p:style>
+        <p:txBody>
+          <a:bodyPr rtlCol="0" anchor="ctr"/>
+          <a:lstStyle/>
+          <a:p>
+            <a:pPr algn="ctr"/>
+            <a:endParaRPr lang="en-US"/>
+          </a:p>
+        </p:txBody>
+      </p:sp>
+      <p:sp>
+        <p:nvSpPr>
+          <p:cNvPr id="27" name="Oval 26">
+            <a:extLst>
+              <a:ext uri="{FF2B5EF4-FFF2-40B4-BE49-F238E27FC236}">
+                <a16:creationId xmlns:a16="http://schemas.microsoft.com/office/drawing/2014/main" id="{CAC20ABF-F0A3-9045-B238-D3C46F483BE4}"/>
+              </a:ext>
+            </a:extLst>
+          </p:cNvPr>
+          <p:cNvSpPr/>
+          <p:nvPr/>
+        </p:nvSpPr>
+        <p:spPr>
+          <a:xfrm rot="17922373">
+            <a:off x="4550099" y="4599030"/>
+            <a:ext cx="2119979" cy="1232379"/>
+          </a:xfrm>
+          <a:prstGeom prst="ellipse">
+            <a:avLst/>
+          </a:prstGeom>
+          <a:solidFill>
+            <a:schemeClr val="accent5">
+              <a:lumMod val="20000"/>
+              <a:lumOff val="80000"/>
+              <a:alpha val="35911"/>
+            </a:schemeClr>
+          </a:solidFill>
+          <a:ln>
+            <a:solidFill>
+              <a:srgbClr val="0070C0"/>
+            </a:solidFill>
+          </a:ln>
+        </p:spPr>
+        <p:style>
+          <a:lnRef idx="2">
+            <a:schemeClr val="accent1">
+              <a:shade val="50000"/>
+            </a:schemeClr>
+          </a:lnRef>
+          <a:fillRef idx="1">
+            <a:schemeClr val="accent1"/>
+          </a:fillRef>
+          <a:effectRef idx="0">
+            <a:schemeClr val="accent1"/>
+          </a:effectRef>
+          <a:fontRef idx="minor">
+            <a:schemeClr val="lt1"/>
+          </a:fontRef>
+        </p:style>
+        <p:txBody>
+          <a:bodyPr rtlCol="0" anchor="ctr"/>
+          <a:lstStyle/>
+          <a:p>
+            <a:pPr algn="ctr"/>
+            <a:endParaRPr lang="en-US"/>
+          </a:p>
+        </p:txBody>
+      </p:sp>
+      <p:sp>
+        <p:nvSpPr>
+          <p:cNvPr id="32" name="Oval 31">
+            <a:extLst>
+              <a:ext uri="{FF2B5EF4-FFF2-40B4-BE49-F238E27FC236}">
+                <a16:creationId xmlns:a16="http://schemas.microsoft.com/office/drawing/2014/main" id="{8440E9EA-43C4-C54E-98F3-E733DFA077D9}"/>
+              </a:ext>
+            </a:extLst>
+          </p:cNvPr>
+          <p:cNvSpPr/>
+          <p:nvPr/>
+        </p:nvSpPr>
+        <p:spPr>
+          <a:xfrm>
+            <a:off x="2921676" y="1674506"/>
+            <a:ext cx="294468" cy="294468"/>
+          </a:xfrm>
+          <a:prstGeom prst="ellipse">
+            <a:avLst/>
+          </a:prstGeom>
+          <a:solidFill>
+            <a:schemeClr val="accent4"/>
+          </a:solidFill>
+        </p:spPr>
+        <p:style>
+          <a:lnRef idx="2">
+            <a:schemeClr val="accent1">
+              <a:shade val="50000"/>
+            </a:schemeClr>
+          </a:lnRef>
+          <a:fillRef idx="1">
+            <a:schemeClr val="accent1"/>
+          </a:fillRef>
+          <a:effectRef idx="0">
+            <a:schemeClr val="accent1"/>
+          </a:effectRef>
+          <a:fontRef idx="minor">
+            <a:schemeClr val="lt1"/>
+          </a:fontRef>
+        </p:style>
+        <p:txBody>
+          <a:bodyPr rtlCol="0" anchor="ctr"/>
+          <a:lstStyle/>
+          <a:p>
+            <a:pPr algn="ctr"/>
+            <a:endParaRPr lang="en-US"/>
+          </a:p>
+        </p:txBody>
+      </p:sp>
+      <p:sp>
+        <p:nvSpPr>
+          <p:cNvPr id="33" name="Oval 32">
+            <a:extLst>
+              <a:ext uri="{FF2B5EF4-FFF2-40B4-BE49-F238E27FC236}">
+                <a16:creationId xmlns:a16="http://schemas.microsoft.com/office/drawing/2014/main" id="{E895DA2D-D3D0-6547-A366-55CC61A6F780}"/>
+              </a:ext>
+            </a:extLst>
+          </p:cNvPr>
+          <p:cNvSpPr/>
+          <p:nvPr/>
+        </p:nvSpPr>
+        <p:spPr>
+          <a:xfrm>
+            <a:off x="2700289" y="2119084"/>
+            <a:ext cx="737242" cy="231018"/>
+          </a:xfrm>
+          <a:prstGeom prst="ellipse">
+            <a:avLst/>
+          </a:prstGeom>
+          <a:solidFill>
+            <a:schemeClr val="accent5">
+              <a:lumMod val="20000"/>
+              <a:lumOff val="80000"/>
+              <a:alpha val="70672"/>
+            </a:schemeClr>
+          </a:solidFill>
+          <a:ln>
+            <a:solidFill>
+              <a:srgbClr val="0070C0"/>
+            </a:solidFill>
+          </a:ln>
+        </p:spPr>
+        <p:style>
+          <a:lnRef idx="2">
+            <a:schemeClr val="accent1">
+              <a:shade val="50000"/>
+            </a:schemeClr>
+          </a:lnRef>
+          <a:fillRef idx="1">
+            <a:schemeClr val="accent1"/>
+          </a:fillRef>
+          <a:effectRef idx="0">
+            <a:schemeClr val="accent1"/>
+          </a:effectRef>
+          <a:fontRef idx="minor">
+            <a:schemeClr val="lt1"/>
+          </a:fontRef>
+        </p:style>
+        <p:txBody>
+          <a:bodyPr rtlCol="0" anchor="ctr"/>
+          <a:lstStyle/>
+          <a:p>
+            <a:pPr algn="ctr"/>
+            <a:endParaRPr lang="en-US"/>
+          </a:p>
+        </p:txBody>
+      </p:sp>
+      <p:sp>
+        <p:nvSpPr>
+          <p:cNvPr id="34" name="Oval 33">
+            <a:extLst>
+              <a:ext uri="{FF2B5EF4-FFF2-40B4-BE49-F238E27FC236}">
+                <a16:creationId xmlns:a16="http://schemas.microsoft.com/office/drawing/2014/main" id="{14E7C7C7-5362-AB42-9D0B-48F844AE0C7F}"/>
+              </a:ext>
+            </a:extLst>
+          </p:cNvPr>
+          <p:cNvSpPr/>
+          <p:nvPr/>
+        </p:nvSpPr>
+        <p:spPr>
+          <a:xfrm>
+            <a:off x="2700289" y="4706644"/>
+            <a:ext cx="737242" cy="231018"/>
+          </a:xfrm>
+          <a:prstGeom prst="ellipse">
+            <a:avLst/>
+          </a:prstGeom>
+          <a:solidFill>
+            <a:schemeClr val="accent5">
+              <a:lumMod val="20000"/>
+              <a:lumOff val="80000"/>
+              <a:alpha val="70672"/>
+            </a:schemeClr>
+          </a:solidFill>
+          <a:ln>
+            <a:solidFill>
+              <a:srgbClr val="0070C0"/>
+            </a:solidFill>
+          </a:ln>
+        </p:spPr>
+        <p:style>
+          <a:lnRef idx="2">
+            <a:schemeClr val="accent1">
+              <a:shade val="50000"/>
+            </a:schemeClr>
+          </a:lnRef>
+          <a:fillRef idx="1">
+            <a:schemeClr val="accent1"/>
+          </a:fillRef>
+          <a:effectRef idx="0">
+            <a:schemeClr val="accent1"/>
+          </a:effectRef>
+          <a:fontRef idx="minor">
+            <a:schemeClr val="lt1"/>
+          </a:fontRef>
+        </p:style>
+        <p:txBody>
+          <a:bodyPr rtlCol="0" anchor="ctr"/>
+          <a:lstStyle/>
+          <a:p>
+            <a:pPr algn="ctr"/>
+            <a:endParaRPr lang="en-US"/>
+          </a:p>
+        </p:txBody>
+      </p:sp>
+      <p:sp>
+        <p:nvSpPr>
+          <p:cNvPr id="35" name="Oval 34">
+            <a:extLst>
+              <a:ext uri="{FF2B5EF4-FFF2-40B4-BE49-F238E27FC236}">
+                <a16:creationId xmlns:a16="http://schemas.microsoft.com/office/drawing/2014/main" id="{CE3F0682-C169-2B45-B192-6427C490D3B6}"/>
+              </a:ext>
+            </a:extLst>
+          </p:cNvPr>
+          <p:cNvSpPr/>
+          <p:nvPr/>
+        </p:nvSpPr>
+        <p:spPr>
+          <a:xfrm>
+            <a:off x="2921676" y="5180331"/>
+            <a:ext cx="294468" cy="294468"/>
+          </a:xfrm>
+          <a:prstGeom prst="ellipse">
+            <a:avLst/>
+          </a:prstGeom>
+          <a:solidFill>
+            <a:schemeClr val="accent4"/>
+          </a:solidFill>
+        </p:spPr>
+        <p:style>
+          <a:lnRef idx="2">
+            <a:schemeClr val="accent1">
+              <a:shade val="50000"/>
+            </a:schemeClr>
+          </a:lnRef>
+          <a:fillRef idx="1">
+            <a:schemeClr val="accent1"/>
+          </a:fillRef>
+          <a:effectRef idx="0">
+            <a:schemeClr val="accent1"/>
+          </a:effectRef>
+          <a:fontRef idx="minor">
+            <a:schemeClr val="lt1"/>
+          </a:fontRef>
+        </p:style>
+        <p:txBody>
+          <a:bodyPr rtlCol="0" anchor="ctr"/>
+          <a:lstStyle/>
+          <a:p>
+            <a:pPr algn="ctr"/>
+            <a:endParaRPr lang="en-US"/>
+          </a:p>
+        </p:txBody>
+      </p:sp>
+      <p:sp>
+        <p:nvSpPr>
+          <p:cNvPr id="36" name="TextBox 35">
+            <a:extLst>
+              <a:ext uri="{FF2B5EF4-FFF2-40B4-BE49-F238E27FC236}">
+                <a16:creationId xmlns:a16="http://schemas.microsoft.com/office/drawing/2014/main" id="{17C850E5-2DF4-124E-AB45-622FF4D87943}"/>
+              </a:ext>
+            </a:extLst>
+          </p:cNvPr>
+          <p:cNvSpPr txBox="1"/>
+          <p:nvPr/>
+        </p:nvSpPr>
+        <p:spPr>
+          <a:xfrm>
+            <a:off x="7538024" y="6157292"/>
+            <a:ext cx="4653976" cy="523220"/>
+          </a:xfrm>
+          <a:prstGeom prst="rect">
+            <a:avLst/>
+          </a:prstGeom>
+          <a:noFill/>
+        </p:spPr>
+        <p:txBody>
+          <a:bodyPr wrap="square" rtlCol="0">
+            <a:spAutoFit/>
+          </a:bodyPr>
+          <a:lstStyle/>
+          <a:p>
+            <a:r>
+              <a:rPr lang="en-US" dirty="0"/>
+              <a:t>from Jake </a:t>
+            </a:r>
+            <a:r>
+              <a:rPr lang="en-US" dirty="0" err="1"/>
+              <a:t>VanderPlas</a:t>
+            </a:r>
+            <a:endParaRPr lang="en-US" dirty="0"/>
+          </a:p>
+          <a:p>
+            <a:r>
+              <a:rPr lang="en-US" dirty="0">
+                <a:hlinkClick r:id="rId2"/>
+              </a:rPr>
+              <a:t>https://www.youtube.com/watch?v=KhAUfqhLakw</a:t>
+            </a:r>
+            <a:r>
+              <a:rPr lang="en-US" dirty="0"/>
+              <a:t> </a:t>
+            </a:r>
+          </a:p>
+        </p:txBody>
+      </p:sp>
+      <p:sp>
+        <p:nvSpPr>
+          <p:cNvPr id="37" name="TextBox 36">
+            <a:extLst>
+              <a:ext uri="{FF2B5EF4-FFF2-40B4-BE49-F238E27FC236}">
+                <a16:creationId xmlns:a16="http://schemas.microsoft.com/office/drawing/2014/main" id="{DCA3305E-3FC6-4041-ABE0-3DEA2DC4C76B}"/>
+              </a:ext>
+            </a:extLst>
+          </p:cNvPr>
+          <p:cNvSpPr txBox="1"/>
+          <p:nvPr/>
+        </p:nvSpPr>
+        <p:spPr>
+          <a:xfrm>
+            <a:off x="8461363" y="3695285"/>
+            <a:ext cx="3634531" cy="1815882"/>
+          </a:xfrm>
+          <a:prstGeom prst="rect">
+            <a:avLst/>
+          </a:prstGeom>
+          <a:noFill/>
+        </p:spPr>
+        <p:txBody>
+          <a:bodyPr wrap="square" rtlCol="0">
+            <a:spAutoFit/>
+          </a:bodyPr>
+          <a:lstStyle/>
+          <a:p>
+            <a:r>
+              <a:rPr lang="en-US" dirty="0"/>
+              <a:t>In general, a frequentist's</a:t>
+            </a:r>
+          </a:p>
+          <a:p>
+            <a:r>
+              <a:rPr lang="en-US" dirty="0"/>
+              <a:t> </a:t>
+            </a:r>
+            <a:r>
+              <a:rPr lang="en-US" b="1" dirty="0">
+                <a:solidFill>
+                  <a:srgbClr val="FF0000"/>
+                </a:solidFill>
+              </a:rPr>
+              <a:t>95% Confidence Interval</a:t>
+            </a:r>
+          </a:p>
+          <a:p>
+            <a:r>
+              <a:rPr lang="en-US" b="1" dirty="0">
+                <a:solidFill>
+                  <a:srgbClr val="00B050"/>
+                </a:solidFill>
+              </a:rPr>
+              <a:t>is not 95% likely</a:t>
+            </a:r>
+            <a:r>
+              <a:rPr lang="en-US" dirty="0"/>
+              <a:t> to contain the true value!</a:t>
+            </a:r>
+          </a:p>
+          <a:p>
+            <a:endParaRPr lang="en-US" dirty="0"/>
+          </a:p>
+          <a:p>
+            <a:r>
+              <a:rPr lang="en-US" dirty="0"/>
+              <a:t>A frequentist only states that:</a:t>
+            </a:r>
+          </a:p>
+          <a:p>
+            <a:r>
+              <a:rPr lang="en-US" dirty="0"/>
+              <a:t>   if we repeat experiment multiple times</a:t>
+            </a:r>
+          </a:p>
+          <a:p>
+            <a:r>
+              <a:rPr lang="en-US" dirty="0"/>
+              <a:t>   then 95% of such confidence intervals</a:t>
+            </a:r>
+          </a:p>
+          <a:p>
+            <a:r>
+              <a:rPr lang="en-US" dirty="0"/>
+              <a:t>   will contain the true value.</a:t>
+            </a:r>
+          </a:p>
+        </p:txBody>
+      </p:sp>
+      <p:sp>
+        <p:nvSpPr>
+          <p:cNvPr id="38" name="Oval 37">
+            <a:extLst>
+              <a:ext uri="{FF2B5EF4-FFF2-40B4-BE49-F238E27FC236}">
+                <a16:creationId xmlns:a16="http://schemas.microsoft.com/office/drawing/2014/main" id="{CF6D186E-EF05-3242-87BC-E8DAD450D089}"/>
+              </a:ext>
+            </a:extLst>
+          </p:cNvPr>
+          <p:cNvSpPr/>
+          <p:nvPr/>
+        </p:nvSpPr>
+        <p:spPr>
+          <a:xfrm>
+            <a:off x="6159858" y="4192514"/>
+            <a:ext cx="1538352" cy="821425"/>
+          </a:xfrm>
+          <a:prstGeom prst="ellipse">
+            <a:avLst/>
+          </a:prstGeom>
+          <a:solidFill>
+            <a:schemeClr val="accent5">
+              <a:lumMod val="60000"/>
+              <a:lumOff val="40000"/>
+              <a:alpha val="77000"/>
+            </a:schemeClr>
+          </a:solidFill>
+          <a:ln>
+            <a:solidFill>
+              <a:srgbClr val="0070C0"/>
+            </a:solidFill>
+          </a:ln>
+        </p:spPr>
+        <p:style>
+          <a:lnRef idx="2">
+            <a:schemeClr val="accent1">
+              <a:shade val="50000"/>
+            </a:schemeClr>
+          </a:lnRef>
+          <a:fillRef idx="1">
+            <a:schemeClr val="accent1"/>
+          </a:fillRef>
+          <a:effectRef idx="0">
+            <a:schemeClr val="accent1"/>
+          </a:effectRef>
+          <a:fontRef idx="minor">
+            <a:schemeClr val="lt1"/>
+          </a:fontRef>
+        </p:style>
+        <p:txBody>
+          <a:bodyPr rtlCol="0" anchor="ctr"/>
+          <a:lstStyle/>
+          <a:p>
+            <a:pPr algn="ctr"/>
+            <a:r>
+              <a:rPr lang="en-US" dirty="0">
+                <a:solidFill>
+                  <a:srgbClr val="0070C0"/>
+                </a:solidFill>
+              </a:rPr>
+              <a:t>Our Particular Interval</a:t>
+            </a:r>
+          </a:p>
+        </p:txBody>
+      </p:sp>
+    </p:spTree>
+    <p:extLst>
+      <p:ext uri="{BB962C8B-B14F-4D97-AF65-F5344CB8AC3E}">
+        <p14:creationId xmlns:p14="http://schemas.microsoft.com/office/powerpoint/2010/main" val="333321039"/>
+      </p:ext>
+    </p:extLst>
+  </p:cSld>
+  <p:clrMapOvr>
+    <a:masterClrMapping/>
+  </p:clrMapOvr>
+</p:sld>
+</file>
+
+<file path=ppt/slides/slide4.xml><?xml version="1.0" encoding="utf-8"?>
+<p:sld xmlns:a="http://schemas.openxmlformats.org/drawingml/2006/main" xmlns:r="http://schemas.openxmlformats.org/officeDocument/2006/relationships" xmlns:p="http://schemas.openxmlformats.org/presentationml/2006/main">
+  <p:cSld>
+    <p:spTree>
+      <p:nvGrpSpPr>
+        <p:cNvPr id="1" name=""/>
+        <p:cNvGrpSpPr/>
+        <p:nvPr/>
+      </p:nvGrpSpPr>
+      <p:grpSpPr>
+        <a:xfrm>
+          <a:off x="0" y="0"/>
+          <a:ext cx="0" cy="0"/>
+          <a:chOff x="0" y="0"/>
+          <a:chExt cx="0" cy="0"/>
+        </a:xfrm>
+      </p:grpSpPr>
+      <p:sp>
+        <p:nvSpPr>
+          <p:cNvPr id="5" name="Google Shape;93;p13">
+            <a:extLst>
+              <a:ext uri="{FF2B5EF4-FFF2-40B4-BE49-F238E27FC236}">
+                <a16:creationId xmlns:a16="http://schemas.microsoft.com/office/drawing/2014/main" id="{F5066C6A-F841-BB4E-888A-251B4AF760F4}"/>
+              </a:ext>
+            </a:extLst>
+          </p:cNvPr>
+          <p:cNvSpPr txBox="1"/>
+          <p:nvPr/>
+        </p:nvSpPr>
+        <p:spPr>
+          <a:xfrm>
+            <a:off x="2748641" y="1644652"/>
+            <a:ext cx="6694715" cy="1637391"/>
           </a:xfrm>
           <a:prstGeom prst="rect">
             <a:avLst/>
@@ -18677,39 +21713,134 @@
           </a:ln>
         </p:spPr>
         <p:txBody>
-          <a:bodyPr wrap="square" rtlCol="0">
-            <a:spAutoFit/>
+          <a:bodyPr spcFirstLastPara="1" wrap="square" lIns="91425" tIns="45700" rIns="91425" bIns="45700" anchor="t" anchorCtr="0">
+            <a:noAutofit/>
           </a:bodyPr>
           <a:lstStyle/>
           <a:p>
-            <a:r>
-              <a:rPr lang="en-US" dirty="0"/>
-              <a:t>We have 100 damaged flash drives, </a:t>
-            </a:r>
-          </a:p>
-          <a:p>
-            <a:r>
-              <a:rPr lang="en-US" dirty="0"/>
-              <a:t>80 of them have coffee stains on them.</a:t>
-            </a:r>
-          </a:p>
-          <a:p>
-            <a:endParaRPr lang="en-US" dirty="0"/>
-          </a:p>
-          <a:p>
-            <a:r>
-              <a:rPr lang="en-US" dirty="0"/>
-              <a:t>What can we say about coffee causing the damage?</a:t>
+            <a:pPr marL="0" marR="0" lvl="0" indent="0" algn="l" rtl="0">
+              <a:spcBef>
+                <a:spcPts val="0"/>
+              </a:spcBef>
+              <a:spcAft>
+                <a:spcPts val="0"/>
+              </a:spcAft>
+              <a:buNone/>
+            </a:pPr>
+            <a:r>
+              <a:rPr lang="en-US" sz="2400" b="1" dirty="0">
+                <a:solidFill>
+                  <a:schemeClr val="accent1"/>
+                </a:solidFill>
+                <a:latin typeface="Calibri" panose="020F0502020204030204" pitchFamily="34" charset="0"/>
+                <a:cs typeface="Calibri" panose="020F0502020204030204" pitchFamily="34" charset="0"/>
+                <a:sym typeface="Calibri"/>
+              </a:rPr>
+              <a:t>Frequentist interpretation of Bayes’ theorem.</a:t>
+            </a:r>
+            <a:endParaRPr sz="2400" b="1" dirty="0">
+              <a:solidFill>
+                <a:schemeClr val="accent1"/>
+              </a:solidFill>
+              <a:latin typeface="Calibri" panose="020F0502020204030204" pitchFamily="34" charset="0"/>
+              <a:cs typeface="Calibri" panose="020F0502020204030204" pitchFamily="34" charset="0"/>
+            </a:endParaRPr>
+          </a:p>
+          <a:p>
+            <a:pPr marL="0" marR="0" lvl="0" indent="0" algn="l" rtl="0">
+              <a:spcBef>
+                <a:spcPts val="0"/>
+              </a:spcBef>
+              <a:spcAft>
+                <a:spcPts val="0"/>
+              </a:spcAft>
+              <a:buNone/>
+            </a:pPr>
+            <a:r>
+              <a:rPr lang="en-US" sz="1800" b="1" dirty="0">
+                <a:solidFill>
+                  <a:srgbClr val="00B050"/>
+                </a:solidFill>
+                <a:latin typeface="Calibri" panose="020F0502020204030204" pitchFamily="34" charset="0"/>
+                <a:cs typeface="Calibri" panose="020F0502020204030204" pitchFamily="34" charset="0"/>
+                <a:sym typeface="Calibri"/>
+              </a:rPr>
+              <a:t>Probability measures a proportion of outcomes.</a:t>
+            </a:r>
+            <a:endParaRPr sz="1800" b="1" dirty="0">
+              <a:solidFill>
+                <a:srgbClr val="00B050"/>
+              </a:solidFill>
+              <a:latin typeface="Calibri" panose="020F0502020204030204" pitchFamily="34" charset="0"/>
+              <a:cs typeface="Calibri" panose="020F0502020204030204" pitchFamily="34" charset="0"/>
+              <a:sym typeface="Calibri"/>
+            </a:endParaRPr>
+          </a:p>
+          <a:p>
+            <a:pPr marL="0" marR="0" lvl="0" indent="0" algn="l" rtl="0">
+              <a:spcBef>
+                <a:spcPts val="0"/>
+              </a:spcBef>
+              <a:spcAft>
+                <a:spcPts val="0"/>
+              </a:spcAft>
+              <a:buNone/>
+            </a:pPr>
+            <a:r>
+              <a:rPr lang="en-US" sz="1800" dirty="0">
+                <a:solidFill>
+                  <a:schemeClr val="dk1"/>
+                </a:solidFill>
+                <a:latin typeface="Calibri" panose="020F0502020204030204" pitchFamily="34" charset="0"/>
+                <a:cs typeface="Calibri" panose="020F0502020204030204" pitchFamily="34" charset="0"/>
+                <a:sym typeface="Calibri"/>
+              </a:rPr>
+              <a:t>P(A) - proportions of outcomes A</a:t>
+            </a:r>
+          </a:p>
+          <a:p>
+            <a:r>
+              <a:rPr lang="en-US" sz="1800" dirty="0">
+                <a:solidFill>
+                  <a:schemeClr val="dk1"/>
+                </a:solidFill>
+                <a:latin typeface="Calibri" panose="020F0502020204030204" pitchFamily="34" charset="0"/>
+                <a:cs typeface="Calibri" panose="020F0502020204030204" pitchFamily="34" charset="0"/>
+                <a:sym typeface="Calibri"/>
+              </a:rPr>
+              <a:t>P(B) - proportions of outcomes B</a:t>
+            </a:r>
+          </a:p>
+          <a:p>
+            <a:pPr marL="0" marR="0" lvl="0" indent="0" algn="l" rtl="0">
+              <a:spcBef>
+                <a:spcPts val="0"/>
+              </a:spcBef>
+              <a:spcAft>
+                <a:spcPts val="0"/>
+              </a:spcAft>
+              <a:buNone/>
+            </a:pPr>
+            <a:r>
+              <a:rPr lang="en-US" sz="1800" dirty="0">
+                <a:solidFill>
+                  <a:schemeClr val="dk1"/>
+                </a:solidFill>
+                <a:latin typeface="Calibri" panose="020F0502020204030204" pitchFamily="34" charset="0"/>
+                <a:cs typeface="Calibri" panose="020F0502020204030204" pitchFamily="34" charset="0"/>
+                <a:sym typeface="Calibri"/>
+              </a:rPr>
+              <a:t>P(B|A) is the proportion of outcomes B out of outcomes A</a:t>
             </a:r>
           </a:p>
         </p:txBody>
       </p:sp>
       <p:sp>
         <p:nvSpPr>
-          <p:cNvPr id="5" name="Google Shape;89;p13">
+          <p:cNvPr id="7" name="TextBox 6">
             <a:extLst>
               <a:ext uri="{FF2B5EF4-FFF2-40B4-BE49-F238E27FC236}">
-                <a16:creationId xmlns:a16="http://schemas.microsoft.com/office/drawing/2014/main" id="{452FF8D6-C125-B84A-B6C6-3F252EF37ED5}"/>
+                <a16:creationId xmlns:a16="http://schemas.microsoft.com/office/drawing/2014/main" id="{925C92EE-03D8-DB44-AE43-BDAD05469BE7}"/>
               </a:ext>
             </a:extLst>
           </p:cNvPr>
@@ -18718,1334 +21849,8 @@
         </p:nvSpPr>
         <p:spPr>
           <a:xfrm>
-            <a:off x="6674033" y="2032595"/>
-            <a:ext cx="4287044" cy="2050775"/>
-          </a:xfrm>
-          <a:prstGeom prst="rect">
-            <a:avLst/>
-          </a:prstGeom>
-          <a:noFill/>
-          <a:ln>
-            <a:noFill/>
-          </a:ln>
-        </p:spPr>
-        <p:txBody>
-          <a:bodyPr spcFirstLastPara="1" wrap="square" lIns="91425" tIns="45700" rIns="91425" bIns="45700" anchor="t" anchorCtr="0">
-            <a:noAutofit/>
-          </a:bodyPr>
-          <a:lstStyle/>
-          <a:p>
-            <a:pPr marL="0" marR="0" lvl="0" indent="0" algn="l" rtl="0">
-              <a:spcBef>
-                <a:spcPts val="0"/>
-              </a:spcBef>
-              <a:spcAft>
-                <a:spcPts val="0"/>
-              </a:spcAft>
-              <a:buNone/>
-            </a:pPr>
-            <a:r>
-              <a:rPr lang="en-US" sz="1200" dirty="0">
-                <a:solidFill>
-                  <a:schemeClr val="dk1"/>
-                </a:solidFill>
-                <a:latin typeface="Calibri"/>
-                <a:cs typeface="Calibri"/>
-                <a:sym typeface="Calibri"/>
-              </a:rPr>
-              <a:t>A = Coffee, B = Damaged</a:t>
-            </a:r>
-            <a:endParaRPr lang="en-US" sz="1200" dirty="0">
-              <a:solidFill>
-                <a:schemeClr val="dk1"/>
-              </a:solidFill>
-              <a:latin typeface="Calibri"/>
-              <a:ea typeface="Calibri"/>
-              <a:cs typeface="Calibri"/>
-              <a:sym typeface="Calibri"/>
-            </a:endParaRPr>
-          </a:p>
-          <a:p>
-            <a:pPr lvl="0"/>
-            <a:r>
-              <a:rPr lang="en-US" sz="1200" dirty="0">
-                <a:solidFill>
-                  <a:schemeClr val="dk1"/>
-                </a:solidFill>
-                <a:latin typeface="Calibri"/>
-                <a:ea typeface="Calibri"/>
-                <a:cs typeface="Calibri"/>
-                <a:sym typeface="Calibri"/>
-              </a:rPr>
-              <a:t>P(A) = 40% = probability of </a:t>
-            </a:r>
-            <a:r>
-              <a:rPr lang="en-US" sz="1200" dirty="0">
-                <a:solidFill>
-                  <a:schemeClr val="dk1"/>
-                </a:solidFill>
-                <a:latin typeface="Calibri"/>
-                <a:cs typeface="Calibri"/>
-                <a:sym typeface="Calibri"/>
-              </a:rPr>
-              <a:t>Coffee</a:t>
-            </a:r>
-            <a:r>
-              <a:rPr lang="en-US" sz="1200" dirty="0">
-                <a:solidFill>
-                  <a:schemeClr val="dk1"/>
-                </a:solidFill>
-                <a:latin typeface="Calibri"/>
-                <a:ea typeface="Calibri"/>
-                <a:cs typeface="Calibri"/>
-                <a:sym typeface="Calibri"/>
-              </a:rPr>
-              <a:t> (Yellow)</a:t>
-            </a:r>
-          </a:p>
-          <a:p>
-            <a:pPr marL="0" marR="0" lvl="0" indent="0" algn="l" rtl="0">
-              <a:spcBef>
-                <a:spcPts val="0"/>
-              </a:spcBef>
-              <a:spcAft>
-                <a:spcPts val="0"/>
-              </a:spcAft>
-              <a:buNone/>
-            </a:pPr>
-            <a:r>
-              <a:rPr lang="en-US" sz="1200" dirty="0">
-                <a:solidFill>
-                  <a:schemeClr val="dk1"/>
-                </a:solidFill>
-                <a:latin typeface="Calibri"/>
-                <a:ea typeface="Calibri"/>
-                <a:cs typeface="Calibri"/>
-                <a:sym typeface="Calibri"/>
-              </a:rPr>
-              <a:t>P(B) = 5% = probability of Damaged (Blue)</a:t>
-            </a:r>
-          </a:p>
-          <a:p>
-            <a:pPr marL="0" marR="0" lvl="0" indent="0" algn="l" rtl="0">
-              <a:spcBef>
-                <a:spcPts val="0"/>
-              </a:spcBef>
-              <a:spcAft>
-                <a:spcPts val="0"/>
-              </a:spcAft>
-              <a:buNone/>
-            </a:pPr>
-            <a:endParaRPr lang="en-US" sz="1200" dirty="0">
-              <a:solidFill>
-                <a:schemeClr val="dk1"/>
-              </a:solidFill>
-              <a:latin typeface="Calibri"/>
-              <a:ea typeface="Calibri"/>
-              <a:cs typeface="Calibri"/>
-              <a:sym typeface="Calibri"/>
-            </a:endParaRPr>
-          </a:p>
-          <a:p>
-            <a:pPr lvl="0"/>
-            <a:r>
-              <a:rPr lang="en-US" sz="1200" b="1" dirty="0">
-                <a:solidFill>
-                  <a:srgbClr val="00B0F0"/>
-                </a:solidFill>
-                <a:latin typeface="Calibri"/>
-                <a:ea typeface="Calibri"/>
-                <a:cs typeface="Calibri"/>
-                <a:sym typeface="Calibri"/>
-              </a:rPr>
-              <a:t>P(B|A) = 10% = probability of Damaged given that Coffee</a:t>
-            </a:r>
-          </a:p>
-          <a:p>
-            <a:pPr lvl="0"/>
-            <a:r>
-              <a:rPr lang="en-US" sz="1200" dirty="0">
-                <a:solidFill>
-                  <a:schemeClr val="dk1"/>
-                </a:solidFill>
-                <a:latin typeface="Calibri"/>
-                <a:ea typeface="Calibri"/>
-                <a:cs typeface="Calibri"/>
-                <a:sym typeface="Calibri"/>
-              </a:rPr>
-              <a:t>P(A|B) = 80% = probability of Coffee given that Damaged</a:t>
-            </a:r>
-          </a:p>
-          <a:p>
-            <a:pPr marL="0" marR="0" lvl="0" indent="0" algn="l" rtl="0">
-              <a:spcBef>
-                <a:spcPts val="0"/>
-              </a:spcBef>
-              <a:spcAft>
-                <a:spcPts val="0"/>
-              </a:spcAft>
-              <a:buNone/>
-            </a:pPr>
-            <a:endParaRPr lang="en-US" sz="1200" dirty="0">
-              <a:solidFill>
-                <a:schemeClr val="dk1"/>
-              </a:solidFill>
-              <a:latin typeface="Calibri"/>
-              <a:ea typeface="Calibri"/>
-              <a:cs typeface="Calibri"/>
-              <a:sym typeface="Calibri"/>
-            </a:endParaRPr>
-          </a:p>
-          <a:p>
-            <a:r>
-              <a:rPr lang="en-US" sz="1200" dirty="0">
-                <a:solidFill>
-                  <a:schemeClr val="dk1"/>
-                </a:solidFill>
-                <a:latin typeface="Calibri"/>
-                <a:ea typeface="Calibri"/>
-                <a:cs typeface="Calibri"/>
-                <a:sym typeface="Calibri"/>
-              </a:rPr>
-              <a:t>Intersection:</a:t>
-            </a:r>
-          </a:p>
-          <a:p>
-            <a:pPr marL="0" marR="0" lvl="0" indent="0" algn="l" rtl="0">
-              <a:spcBef>
-                <a:spcPts val="0"/>
-              </a:spcBef>
-              <a:spcAft>
-                <a:spcPts val="0"/>
-              </a:spcAft>
-              <a:buNone/>
-            </a:pPr>
-            <a:r>
-              <a:rPr lang="en-US" sz="1200" dirty="0">
-                <a:solidFill>
-                  <a:schemeClr val="dk1"/>
-                </a:solidFill>
-                <a:latin typeface="Calibri"/>
-                <a:ea typeface="Calibri"/>
-                <a:cs typeface="Calibri"/>
-                <a:sym typeface="Calibri"/>
-              </a:rPr>
-              <a:t>P(A &amp; B) = 4% = probability of Coffee &amp; Damaged (Green)</a:t>
-            </a:r>
-          </a:p>
-          <a:p>
-            <a:pPr marL="0" marR="0" lvl="0" indent="0" algn="l" rtl="0">
-              <a:spcBef>
-                <a:spcPts val="0"/>
-              </a:spcBef>
-              <a:spcAft>
-                <a:spcPts val="0"/>
-              </a:spcAft>
-              <a:buNone/>
-            </a:pPr>
-            <a:r>
-              <a:rPr lang="en-US" sz="1200" dirty="0">
-                <a:solidFill>
-                  <a:schemeClr val="dk1"/>
-                </a:solidFill>
-                <a:latin typeface="Calibri"/>
-                <a:ea typeface="Calibri"/>
-                <a:cs typeface="Calibri"/>
-                <a:sym typeface="Calibri"/>
-              </a:rPr>
-              <a:t>P(A|B)*P(B) = 80%*5% = 4%</a:t>
-            </a:r>
-            <a:endParaRPr sz="1200" dirty="0">
-              <a:solidFill>
-                <a:schemeClr val="dk1"/>
-              </a:solidFill>
-              <a:latin typeface="Calibri"/>
-              <a:ea typeface="Calibri"/>
-              <a:cs typeface="Calibri"/>
-              <a:sym typeface="Calibri"/>
-            </a:endParaRPr>
-          </a:p>
-          <a:p>
-            <a:pPr marL="0" marR="0" lvl="0" indent="0" algn="l" rtl="0">
-              <a:spcBef>
-                <a:spcPts val="0"/>
-              </a:spcBef>
-              <a:spcAft>
-                <a:spcPts val="0"/>
-              </a:spcAft>
-              <a:buNone/>
-            </a:pPr>
-            <a:r>
-              <a:rPr lang="en-US" sz="1200" dirty="0">
-                <a:solidFill>
-                  <a:schemeClr val="dk1"/>
-                </a:solidFill>
-                <a:latin typeface="Calibri"/>
-                <a:ea typeface="Calibri"/>
-                <a:cs typeface="Calibri"/>
-                <a:sym typeface="Calibri"/>
-              </a:rPr>
-              <a:t>P(B|A)*P(A) = 10%*40% = 4%</a:t>
-            </a:r>
-          </a:p>
-        </p:txBody>
-      </p:sp>
-      <p:sp>
-        <p:nvSpPr>
-          <p:cNvPr id="6" name="Google Shape;96;p13">
-            <a:extLst>
-              <a:ext uri="{FF2B5EF4-FFF2-40B4-BE49-F238E27FC236}">
-                <a16:creationId xmlns:a16="http://schemas.microsoft.com/office/drawing/2014/main" id="{404A001F-C0A0-BE48-A3B1-C838E48FDF8F}"/>
-              </a:ext>
-            </a:extLst>
-          </p:cNvPr>
-          <p:cNvSpPr/>
-          <p:nvPr/>
-        </p:nvSpPr>
-        <p:spPr>
-          <a:xfrm>
-            <a:off x="1531632" y="1974106"/>
-            <a:ext cx="5033285" cy="2229852"/>
-          </a:xfrm>
-          <a:prstGeom prst="rect">
-            <a:avLst/>
-          </a:prstGeom>
-          <a:solidFill>
-            <a:srgbClr val="FBE4D4"/>
-          </a:solidFill>
-          <a:ln w="12700" cap="flat" cmpd="sng">
-            <a:solidFill>
-              <a:srgbClr val="31538F"/>
-            </a:solidFill>
-            <a:prstDash val="solid"/>
-            <a:miter lim="800000"/>
-            <a:headEnd type="none" w="sm" len="sm"/>
-            <a:tailEnd type="none" w="sm" len="sm"/>
-          </a:ln>
-        </p:spPr>
-        <p:txBody>
-          <a:bodyPr spcFirstLastPara="1" wrap="square" lIns="91425" tIns="45700" rIns="91425" bIns="45700" anchor="ctr" anchorCtr="0">
-            <a:noAutofit/>
-          </a:bodyPr>
-          <a:lstStyle/>
-          <a:p>
-            <a:pPr marL="0" marR="0" lvl="0" indent="0" algn="ctr" rtl="0">
-              <a:spcBef>
-                <a:spcPts val="0"/>
-              </a:spcBef>
-              <a:spcAft>
-                <a:spcPts val="0"/>
-              </a:spcAft>
-              <a:buNone/>
-            </a:pPr>
-            <a:endParaRPr sz="1800">
-              <a:solidFill>
-                <a:schemeClr val="lt1"/>
-              </a:solidFill>
-              <a:latin typeface="Calibri"/>
-              <a:ea typeface="Calibri"/>
-              <a:cs typeface="Calibri"/>
-              <a:sym typeface="Calibri"/>
-            </a:endParaRPr>
-          </a:p>
-        </p:txBody>
-      </p:sp>
-      <p:sp>
-        <p:nvSpPr>
-          <p:cNvPr id="7" name="Google Shape;97;p13">
-            <a:extLst>
-              <a:ext uri="{FF2B5EF4-FFF2-40B4-BE49-F238E27FC236}">
-                <a16:creationId xmlns:a16="http://schemas.microsoft.com/office/drawing/2014/main" id="{31FE829C-2386-834C-996B-C2F3AE8AE45B}"/>
-              </a:ext>
-            </a:extLst>
-          </p:cNvPr>
-          <p:cNvSpPr/>
-          <p:nvPr/>
-        </p:nvSpPr>
-        <p:spPr>
-          <a:xfrm>
-            <a:off x="2175116" y="2278906"/>
-            <a:ext cx="3224463" cy="1764631"/>
-          </a:xfrm>
-          <a:prstGeom prst="ellipse">
-            <a:avLst/>
-          </a:prstGeom>
-          <a:solidFill>
-            <a:srgbClr val="FFC000"/>
-          </a:solidFill>
-          <a:ln w="12700" cap="flat" cmpd="sng">
-            <a:solidFill>
-              <a:srgbClr val="31538F"/>
-            </a:solidFill>
-            <a:prstDash val="solid"/>
-            <a:miter lim="800000"/>
-            <a:headEnd type="none" w="sm" len="sm"/>
-            <a:tailEnd type="none" w="sm" len="sm"/>
-          </a:ln>
-        </p:spPr>
-        <p:txBody>
-          <a:bodyPr spcFirstLastPara="1" wrap="square" lIns="91425" tIns="45700" rIns="91425" bIns="45700" anchor="ctr" anchorCtr="0">
-            <a:noAutofit/>
-          </a:bodyPr>
-          <a:lstStyle/>
-          <a:p>
-            <a:pPr marL="0" marR="0" lvl="0" indent="0" algn="ctr" rtl="0">
-              <a:spcBef>
-                <a:spcPts val="0"/>
-              </a:spcBef>
-              <a:spcAft>
-                <a:spcPts val="0"/>
-              </a:spcAft>
-              <a:buNone/>
-            </a:pPr>
-            <a:endParaRPr sz="1800">
-              <a:solidFill>
-                <a:schemeClr val="lt1"/>
-              </a:solidFill>
-              <a:latin typeface="Calibri"/>
-              <a:ea typeface="Calibri"/>
-              <a:cs typeface="Calibri"/>
-              <a:sym typeface="Calibri"/>
-            </a:endParaRPr>
-          </a:p>
-        </p:txBody>
-      </p:sp>
-      <p:sp>
-        <p:nvSpPr>
-          <p:cNvPr id="8" name="Google Shape;98;p13">
-            <a:extLst>
-              <a:ext uri="{FF2B5EF4-FFF2-40B4-BE49-F238E27FC236}">
-                <a16:creationId xmlns:a16="http://schemas.microsoft.com/office/drawing/2014/main" id="{DDB1E21D-A88D-F84D-A4C7-D15B09894D17}"/>
-              </a:ext>
-            </a:extLst>
-          </p:cNvPr>
-          <p:cNvSpPr/>
-          <p:nvPr/>
-        </p:nvSpPr>
-        <p:spPr>
-          <a:xfrm>
-            <a:off x="4351034" y="2710753"/>
-            <a:ext cx="1397874" cy="900935"/>
-          </a:xfrm>
-          <a:prstGeom prst="ellipse">
-            <a:avLst/>
-          </a:prstGeom>
-          <a:solidFill>
-            <a:srgbClr val="00B0F0">
-              <a:alpha val="40784"/>
-            </a:srgbClr>
-          </a:solidFill>
-          <a:ln w="12700" cap="flat" cmpd="sng">
-            <a:solidFill>
-              <a:srgbClr val="31538F"/>
-            </a:solidFill>
-            <a:prstDash val="solid"/>
-            <a:miter lim="800000"/>
-            <a:headEnd type="none" w="sm" len="sm"/>
-            <a:tailEnd type="none" w="sm" len="sm"/>
-          </a:ln>
-        </p:spPr>
-        <p:txBody>
-          <a:bodyPr spcFirstLastPara="1" wrap="square" lIns="91425" tIns="45700" rIns="91425" bIns="45700" anchor="ctr" anchorCtr="0">
-            <a:noAutofit/>
-          </a:bodyPr>
-          <a:lstStyle/>
-          <a:p>
-            <a:pPr marL="0" marR="0" lvl="0" indent="0" algn="ctr" rtl="0">
-              <a:spcBef>
-                <a:spcPts val="0"/>
-              </a:spcBef>
-              <a:spcAft>
-                <a:spcPts val="0"/>
-              </a:spcAft>
-              <a:buNone/>
-            </a:pPr>
-            <a:endParaRPr sz="1800">
-              <a:solidFill>
-                <a:schemeClr val="lt1"/>
-              </a:solidFill>
-              <a:latin typeface="Calibri"/>
-              <a:ea typeface="Calibri"/>
-              <a:cs typeface="Calibri"/>
-              <a:sym typeface="Calibri"/>
-            </a:endParaRPr>
-          </a:p>
-        </p:txBody>
-      </p:sp>
-      <p:sp>
-        <p:nvSpPr>
-          <p:cNvPr id="9" name="Google Shape;99;p13">
-            <a:extLst>
-              <a:ext uri="{FF2B5EF4-FFF2-40B4-BE49-F238E27FC236}">
-                <a16:creationId xmlns:a16="http://schemas.microsoft.com/office/drawing/2014/main" id="{4B219D50-9096-DC46-8C16-4EC0A06BA7C0}"/>
-              </a:ext>
-            </a:extLst>
-          </p:cNvPr>
-          <p:cNvSpPr txBox="1"/>
-          <p:nvPr/>
-        </p:nvSpPr>
-        <p:spPr>
-          <a:xfrm>
-            <a:off x="3076580" y="2710753"/>
-            <a:ext cx="971694" cy="647909"/>
-          </a:xfrm>
-          <a:prstGeom prst="rect">
-            <a:avLst/>
-          </a:prstGeom>
-          <a:noFill/>
-          <a:ln>
-            <a:noFill/>
-          </a:ln>
-        </p:spPr>
-        <p:txBody>
-          <a:bodyPr spcFirstLastPara="1" wrap="square" lIns="91425" tIns="45700" rIns="91425" bIns="45700" anchor="t" anchorCtr="0">
-            <a:noAutofit/>
-          </a:bodyPr>
-          <a:lstStyle>
-            <a:defPPr marR="0" lvl="0" algn="l" rtl="0">
-              <a:lnSpc>
-                <a:spcPct val="100000"/>
-              </a:lnSpc>
-              <a:spcBef>
-                <a:spcPts val="0"/>
-              </a:spcBef>
-              <a:spcAft>
-                <a:spcPts val="0"/>
-              </a:spcAft>
-            </a:defPPr>
-            <a:lvl1pPr marL="0" indent="0">
-              <a:buNone/>
-              <a:defRPr sz="1800" b="1">
-                <a:solidFill>
-                  <a:srgbClr val="FF0000"/>
-                </a:solidFill>
-                <a:latin typeface="Calibri"/>
-                <a:ea typeface="Calibri"/>
-                <a:cs typeface="Calibri"/>
-              </a:defRPr>
-            </a:lvl1pPr>
-          </a:lstStyle>
-          <a:p>
-            <a:r>
-              <a:rPr lang="en-US" dirty="0">
-                <a:sym typeface="Calibri"/>
-              </a:rPr>
-              <a:t>A</a:t>
-            </a:r>
-          </a:p>
-          <a:p>
-            <a:r>
-              <a:rPr lang="en-US" dirty="0">
-                <a:sym typeface="Calibri"/>
-              </a:rPr>
-              <a:t>Coffee</a:t>
-            </a:r>
-            <a:endParaRPr dirty="0">
-              <a:sym typeface="Calibri"/>
-            </a:endParaRPr>
-          </a:p>
-        </p:txBody>
-      </p:sp>
-      <p:sp>
-        <p:nvSpPr>
-          <p:cNvPr id="10" name="Google Shape;100;p13">
-            <a:extLst>
-              <a:ext uri="{FF2B5EF4-FFF2-40B4-BE49-F238E27FC236}">
-                <a16:creationId xmlns:a16="http://schemas.microsoft.com/office/drawing/2014/main" id="{A8D1023C-103A-914C-952D-A30BFA64F4CA}"/>
-              </a:ext>
-            </a:extLst>
-          </p:cNvPr>
-          <p:cNvSpPr txBox="1"/>
-          <p:nvPr/>
-        </p:nvSpPr>
-        <p:spPr>
-          <a:xfrm>
-            <a:off x="5399579" y="2985773"/>
-            <a:ext cx="1397874" cy="745778"/>
-          </a:xfrm>
-          <a:prstGeom prst="rect">
-            <a:avLst/>
-          </a:prstGeom>
-          <a:noFill/>
-          <a:ln>
-            <a:noFill/>
-          </a:ln>
-        </p:spPr>
-        <p:txBody>
-          <a:bodyPr spcFirstLastPara="1" wrap="square" lIns="91425" tIns="45700" rIns="91425" bIns="45700" anchor="t" anchorCtr="0">
-            <a:noAutofit/>
-          </a:bodyPr>
-          <a:lstStyle/>
-          <a:p>
-            <a:pPr marL="0" marR="0" lvl="0" indent="0" algn="l" rtl="0">
-              <a:spcBef>
-                <a:spcPts val="0"/>
-              </a:spcBef>
-              <a:spcAft>
-                <a:spcPts val="0"/>
-              </a:spcAft>
-              <a:buNone/>
-            </a:pPr>
-            <a:r>
-              <a:rPr lang="en-US" sz="1800" b="1" dirty="0">
-                <a:solidFill>
-                  <a:srgbClr val="FF0000"/>
-                </a:solidFill>
-                <a:latin typeface="Calibri"/>
-                <a:ea typeface="Calibri"/>
-                <a:cs typeface="Calibri"/>
-                <a:sym typeface="Calibri"/>
-              </a:rPr>
-              <a:t>B</a:t>
-            </a:r>
-          </a:p>
-          <a:p>
-            <a:pPr marL="0" marR="0" lvl="0" indent="0" algn="l" rtl="0">
-              <a:spcBef>
-                <a:spcPts val="0"/>
-              </a:spcBef>
-              <a:spcAft>
-                <a:spcPts val="0"/>
-              </a:spcAft>
-              <a:buNone/>
-            </a:pPr>
-            <a:r>
-              <a:rPr lang="en-US" sz="1800" b="1" dirty="0">
-                <a:solidFill>
-                  <a:srgbClr val="FF0000"/>
-                </a:solidFill>
-                <a:latin typeface="Calibri"/>
-                <a:ea typeface="Calibri"/>
-                <a:cs typeface="Calibri"/>
-                <a:sym typeface="Calibri"/>
-              </a:rPr>
-              <a:t>Damaged</a:t>
-            </a:r>
-            <a:endParaRPr sz="1800" b="1" dirty="0">
-              <a:solidFill>
-                <a:srgbClr val="FF0000"/>
-              </a:solidFill>
-              <a:latin typeface="Calibri"/>
-              <a:ea typeface="Calibri"/>
-              <a:cs typeface="Calibri"/>
-              <a:sym typeface="Calibri"/>
-            </a:endParaRPr>
-          </a:p>
-        </p:txBody>
-      </p:sp>
-      <p:sp>
-        <p:nvSpPr>
-          <p:cNvPr id="11" name="Google Shape;101;p13">
-            <a:extLst>
-              <a:ext uri="{FF2B5EF4-FFF2-40B4-BE49-F238E27FC236}">
-                <a16:creationId xmlns:a16="http://schemas.microsoft.com/office/drawing/2014/main" id="{7B123850-E879-7745-BC69-FED970CB58A9}"/>
-              </a:ext>
-            </a:extLst>
-          </p:cNvPr>
-          <p:cNvSpPr txBox="1"/>
-          <p:nvPr/>
-        </p:nvSpPr>
-        <p:spPr>
-          <a:xfrm>
-            <a:off x="4701470" y="1956549"/>
-            <a:ext cx="1530878" cy="461665"/>
-          </a:xfrm>
-          <a:prstGeom prst="rect">
-            <a:avLst/>
-          </a:prstGeom>
-          <a:noFill/>
-          <a:ln>
-            <a:noFill/>
-          </a:ln>
-        </p:spPr>
-        <p:txBody>
-          <a:bodyPr spcFirstLastPara="1" wrap="square" lIns="91425" tIns="45700" rIns="91425" bIns="45700" anchor="t" anchorCtr="0">
-            <a:noAutofit/>
-          </a:bodyPr>
-          <a:lstStyle/>
-          <a:p>
-            <a:pPr marL="0" marR="0" lvl="0" indent="0" algn="l" rtl="0">
-              <a:spcBef>
-                <a:spcPts val="0"/>
-              </a:spcBef>
-              <a:spcAft>
-                <a:spcPts val="0"/>
-              </a:spcAft>
-              <a:buNone/>
-            </a:pPr>
-            <a:r>
-              <a:rPr lang="en-US" sz="2400" b="1" dirty="0">
-                <a:solidFill>
-                  <a:srgbClr val="FF0000"/>
-                </a:solidFill>
-                <a:latin typeface="Calibri"/>
-                <a:ea typeface="Calibri"/>
-                <a:cs typeface="Calibri"/>
-                <a:sym typeface="Calibri"/>
-              </a:rPr>
-              <a:t>All Drives</a:t>
-            </a:r>
-            <a:endParaRPr sz="2400" b="1" dirty="0">
-              <a:solidFill>
-                <a:srgbClr val="FF0000"/>
-              </a:solidFill>
-              <a:latin typeface="Calibri"/>
-              <a:ea typeface="Calibri"/>
-              <a:cs typeface="Calibri"/>
-              <a:sym typeface="Calibri"/>
-            </a:endParaRPr>
-          </a:p>
-        </p:txBody>
-      </p:sp>
-      <p:sp>
-        <p:nvSpPr>
-          <p:cNvPr id="12" name="Google Shape;89;p13">
-            <a:extLst>
-              <a:ext uri="{FF2B5EF4-FFF2-40B4-BE49-F238E27FC236}">
-                <a16:creationId xmlns:a16="http://schemas.microsoft.com/office/drawing/2014/main" id="{3C8C744F-A8AE-1E49-818B-4076BC1271A0}"/>
-              </a:ext>
-            </a:extLst>
-          </p:cNvPr>
-          <p:cNvSpPr txBox="1"/>
-          <p:nvPr/>
-        </p:nvSpPr>
-        <p:spPr>
-          <a:xfrm>
-            <a:off x="6674032" y="4576281"/>
-            <a:ext cx="4287043" cy="2050775"/>
-          </a:xfrm>
-          <a:prstGeom prst="rect">
-            <a:avLst/>
-          </a:prstGeom>
-          <a:noFill/>
-          <a:ln>
-            <a:noFill/>
-          </a:ln>
-        </p:spPr>
-        <p:txBody>
-          <a:bodyPr spcFirstLastPara="1" wrap="square" lIns="91425" tIns="45700" rIns="91425" bIns="45700" anchor="t" anchorCtr="0">
-            <a:noAutofit/>
-          </a:bodyPr>
-          <a:lstStyle/>
-          <a:p>
-            <a:pPr marL="0" marR="0" lvl="0" indent="0" algn="l" rtl="0">
-              <a:spcBef>
-                <a:spcPts val="0"/>
-              </a:spcBef>
-              <a:spcAft>
-                <a:spcPts val="0"/>
-              </a:spcAft>
-              <a:buNone/>
-            </a:pPr>
-            <a:r>
-              <a:rPr lang="en-US" sz="1200" dirty="0">
-                <a:solidFill>
-                  <a:schemeClr val="dk1"/>
-                </a:solidFill>
-                <a:latin typeface="Calibri"/>
-                <a:cs typeface="Calibri"/>
-                <a:sym typeface="Calibri"/>
-              </a:rPr>
-              <a:t>A = Coffee, B = Damaged</a:t>
-            </a:r>
-            <a:endParaRPr lang="en-US" sz="1200" dirty="0">
-              <a:solidFill>
-                <a:schemeClr val="dk1"/>
-              </a:solidFill>
-              <a:latin typeface="Calibri"/>
-              <a:ea typeface="Calibri"/>
-              <a:cs typeface="Calibri"/>
-              <a:sym typeface="Calibri"/>
-            </a:endParaRPr>
-          </a:p>
-          <a:p>
-            <a:pPr lvl="0"/>
-            <a:r>
-              <a:rPr lang="en-US" sz="1200" dirty="0">
-                <a:solidFill>
-                  <a:schemeClr val="dk1"/>
-                </a:solidFill>
-                <a:latin typeface="Calibri"/>
-                <a:ea typeface="Calibri"/>
-                <a:cs typeface="Calibri"/>
-                <a:sym typeface="Calibri"/>
-              </a:rPr>
-              <a:t>P(A) = 5% = probability of </a:t>
-            </a:r>
-            <a:r>
-              <a:rPr lang="en-US" sz="1200" dirty="0">
-                <a:solidFill>
-                  <a:schemeClr val="dk1"/>
-                </a:solidFill>
-                <a:latin typeface="Calibri"/>
-                <a:cs typeface="Calibri"/>
-                <a:sym typeface="Calibri"/>
-              </a:rPr>
-              <a:t>Coffee</a:t>
-            </a:r>
-            <a:r>
-              <a:rPr lang="en-US" sz="1200" dirty="0">
-                <a:solidFill>
-                  <a:schemeClr val="dk1"/>
-                </a:solidFill>
-                <a:latin typeface="Calibri"/>
-                <a:ea typeface="Calibri"/>
-                <a:cs typeface="Calibri"/>
-                <a:sym typeface="Calibri"/>
-              </a:rPr>
-              <a:t> (Yellow)</a:t>
-            </a:r>
-          </a:p>
-          <a:p>
-            <a:pPr marL="0" marR="0" lvl="0" indent="0" algn="l" rtl="0">
-              <a:spcBef>
-                <a:spcPts val="0"/>
-              </a:spcBef>
-              <a:spcAft>
-                <a:spcPts val="0"/>
-              </a:spcAft>
-              <a:buNone/>
-            </a:pPr>
-            <a:r>
-              <a:rPr lang="en-US" sz="1200" dirty="0">
-                <a:solidFill>
-                  <a:schemeClr val="dk1"/>
-                </a:solidFill>
-                <a:latin typeface="Calibri"/>
-                <a:ea typeface="Calibri"/>
-                <a:cs typeface="Calibri"/>
-                <a:sym typeface="Calibri"/>
-              </a:rPr>
-              <a:t>P(B) = 5% = probability of Damaged (Blue)</a:t>
-            </a:r>
-          </a:p>
-          <a:p>
-            <a:pPr lvl="0"/>
-            <a:endParaRPr lang="en-US" sz="1200" dirty="0">
-              <a:solidFill>
-                <a:schemeClr val="dk1"/>
-              </a:solidFill>
-              <a:latin typeface="Calibri"/>
-              <a:ea typeface="Calibri"/>
-              <a:cs typeface="Calibri"/>
-              <a:sym typeface="Calibri"/>
-            </a:endParaRPr>
-          </a:p>
-          <a:p>
-            <a:r>
-              <a:rPr lang="en-US" sz="1200" b="1" dirty="0">
-                <a:solidFill>
-                  <a:srgbClr val="00B0F0"/>
-                </a:solidFill>
-                <a:latin typeface="Calibri"/>
-                <a:cs typeface="Calibri"/>
-                <a:sym typeface="Calibri"/>
-              </a:rPr>
-              <a:t>P(B|A) = 80% = probability of Damaged given that Coffee</a:t>
-            </a:r>
-          </a:p>
-          <a:p>
-            <a:pPr lvl="0"/>
-            <a:r>
-              <a:rPr lang="en-US" sz="1200" dirty="0">
-                <a:solidFill>
-                  <a:schemeClr val="dk1"/>
-                </a:solidFill>
-                <a:latin typeface="Calibri"/>
-                <a:ea typeface="Calibri"/>
-                <a:cs typeface="Calibri"/>
-                <a:sym typeface="Calibri"/>
-              </a:rPr>
-              <a:t>P(A|B) = 80% = probability of Coffee given that Damaged</a:t>
-            </a:r>
-          </a:p>
-          <a:p>
-            <a:pPr lvl="0"/>
-            <a:endParaRPr lang="en-US" sz="1200" dirty="0">
-              <a:solidFill>
-                <a:schemeClr val="dk1"/>
-              </a:solidFill>
-              <a:latin typeface="Calibri"/>
-              <a:ea typeface="Calibri"/>
-              <a:cs typeface="Calibri"/>
-              <a:sym typeface="Calibri"/>
-            </a:endParaRPr>
-          </a:p>
-          <a:p>
-            <a:pPr marL="0" marR="0" lvl="0" indent="0" algn="l" rtl="0">
-              <a:spcBef>
-                <a:spcPts val="0"/>
-              </a:spcBef>
-              <a:spcAft>
-                <a:spcPts val="0"/>
-              </a:spcAft>
-              <a:buNone/>
-            </a:pPr>
-            <a:r>
-              <a:rPr lang="en-US" sz="1200" dirty="0">
-                <a:solidFill>
-                  <a:schemeClr val="dk1"/>
-                </a:solidFill>
-                <a:latin typeface="Calibri"/>
-                <a:ea typeface="Calibri"/>
-                <a:cs typeface="Calibri"/>
-                <a:sym typeface="Calibri"/>
-              </a:rPr>
-              <a:t>Intersection:</a:t>
-            </a:r>
-          </a:p>
-          <a:p>
-            <a:r>
-              <a:rPr lang="en-US" sz="1200" dirty="0">
-                <a:solidFill>
-                  <a:schemeClr val="dk1"/>
-                </a:solidFill>
-                <a:latin typeface="Calibri"/>
-                <a:ea typeface="Calibri"/>
-                <a:cs typeface="Calibri"/>
-                <a:sym typeface="Calibri"/>
-              </a:rPr>
-              <a:t>P(A &amp; B) = 4% = probability of Coffee &amp; Damaged (Green)</a:t>
-            </a:r>
-          </a:p>
-          <a:p>
-            <a:pPr marL="0" marR="0" lvl="0" indent="0" algn="l" rtl="0">
-              <a:spcBef>
-                <a:spcPts val="0"/>
-              </a:spcBef>
-              <a:spcAft>
-                <a:spcPts val="0"/>
-              </a:spcAft>
-              <a:buNone/>
-            </a:pPr>
-            <a:r>
-              <a:rPr lang="en-US" sz="1200" dirty="0">
-                <a:solidFill>
-                  <a:schemeClr val="dk1"/>
-                </a:solidFill>
-                <a:latin typeface="Calibri"/>
-                <a:ea typeface="Calibri"/>
-                <a:cs typeface="Calibri"/>
-                <a:sym typeface="Calibri"/>
-              </a:rPr>
-              <a:t>P(A|B)*P(B) = 80%*5% = 4%</a:t>
-            </a:r>
-            <a:endParaRPr sz="1200" dirty="0">
-              <a:solidFill>
-                <a:schemeClr val="dk1"/>
-              </a:solidFill>
-              <a:latin typeface="Calibri"/>
-              <a:ea typeface="Calibri"/>
-              <a:cs typeface="Calibri"/>
-              <a:sym typeface="Calibri"/>
-            </a:endParaRPr>
-          </a:p>
-          <a:p>
-            <a:pPr marL="0" marR="0" lvl="0" indent="0" algn="l" rtl="0">
-              <a:spcBef>
-                <a:spcPts val="0"/>
-              </a:spcBef>
-              <a:spcAft>
-                <a:spcPts val="0"/>
-              </a:spcAft>
-              <a:buNone/>
-            </a:pPr>
-            <a:r>
-              <a:rPr lang="en-US" sz="1200" dirty="0">
-                <a:solidFill>
-                  <a:schemeClr val="dk1"/>
-                </a:solidFill>
-                <a:latin typeface="Calibri"/>
-                <a:ea typeface="Calibri"/>
-                <a:cs typeface="Calibri"/>
-                <a:sym typeface="Calibri"/>
-              </a:rPr>
-              <a:t>P(B|A)*P(A) = 80%*5% = 4%</a:t>
-            </a:r>
-          </a:p>
-        </p:txBody>
-      </p:sp>
-      <p:sp>
-        <p:nvSpPr>
-          <p:cNvPr id="13" name="Google Shape;96;p13">
-            <a:extLst>
-              <a:ext uri="{FF2B5EF4-FFF2-40B4-BE49-F238E27FC236}">
-                <a16:creationId xmlns:a16="http://schemas.microsoft.com/office/drawing/2014/main" id="{569DD241-518F-8F46-AE6A-34E80876D3BC}"/>
-              </a:ext>
-            </a:extLst>
-          </p:cNvPr>
-          <p:cNvSpPr/>
-          <p:nvPr/>
-        </p:nvSpPr>
-        <p:spPr>
-          <a:xfrm>
-            <a:off x="1531632" y="4517792"/>
-            <a:ext cx="5033285" cy="2229852"/>
-          </a:xfrm>
-          <a:prstGeom prst="rect">
-            <a:avLst/>
-          </a:prstGeom>
-          <a:solidFill>
-            <a:srgbClr val="FBE4D4"/>
-          </a:solidFill>
-          <a:ln w="12700" cap="flat" cmpd="sng">
-            <a:solidFill>
-              <a:srgbClr val="31538F"/>
-            </a:solidFill>
-            <a:prstDash val="solid"/>
-            <a:miter lim="800000"/>
-            <a:headEnd type="none" w="sm" len="sm"/>
-            <a:tailEnd type="none" w="sm" len="sm"/>
-          </a:ln>
-        </p:spPr>
-        <p:txBody>
-          <a:bodyPr spcFirstLastPara="1" wrap="square" lIns="91425" tIns="45700" rIns="91425" bIns="45700" anchor="ctr" anchorCtr="0">
-            <a:noAutofit/>
-          </a:bodyPr>
-          <a:lstStyle/>
-          <a:p>
-            <a:pPr marL="0" marR="0" lvl="0" indent="0" algn="ctr" rtl="0">
-              <a:spcBef>
-                <a:spcPts val="0"/>
-              </a:spcBef>
-              <a:spcAft>
-                <a:spcPts val="0"/>
-              </a:spcAft>
-              <a:buNone/>
-            </a:pPr>
-            <a:endParaRPr sz="1800">
-              <a:solidFill>
-                <a:schemeClr val="lt1"/>
-              </a:solidFill>
-              <a:latin typeface="Calibri"/>
-              <a:ea typeface="Calibri"/>
-              <a:cs typeface="Calibri"/>
-              <a:sym typeface="Calibri"/>
-            </a:endParaRPr>
-          </a:p>
-        </p:txBody>
-      </p:sp>
-      <p:sp>
-        <p:nvSpPr>
-          <p:cNvPr id="14" name="Google Shape;97;p13">
-            <a:extLst>
-              <a:ext uri="{FF2B5EF4-FFF2-40B4-BE49-F238E27FC236}">
-                <a16:creationId xmlns:a16="http://schemas.microsoft.com/office/drawing/2014/main" id="{30AA5D0A-2560-CE4A-B38C-91AD69134962}"/>
-              </a:ext>
-            </a:extLst>
-          </p:cNvPr>
-          <p:cNvSpPr/>
-          <p:nvPr/>
-        </p:nvSpPr>
-        <p:spPr>
-          <a:xfrm>
-            <a:off x="4001705" y="5384791"/>
-            <a:ext cx="1397874" cy="900935"/>
-          </a:xfrm>
-          <a:prstGeom prst="ellipse">
-            <a:avLst/>
-          </a:prstGeom>
-          <a:solidFill>
-            <a:srgbClr val="FFC000"/>
-          </a:solidFill>
-          <a:ln w="12700" cap="flat" cmpd="sng">
-            <a:solidFill>
-              <a:srgbClr val="31538F"/>
-            </a:solidFill>
-            <a:prstDash val="solid"/>
-            <a:miter lim="800000"/>
-            <a:headEnd type="none" w="sm" len="sm"/>
-            <a:tailEnd type="none" w="sm" len="sm"/>
-          </a:ln>
-        </p:spPr>
-        <p:txBody>
-          <a:bodyPr spcFirstLastPara="1" wrap="square" lIns="91425" tIns="45700" rIns="91425" bIns="45700" anchor="ctr" anchorCtr="0">
-            <a:noAutofit/>
-          </a:bodyPr>
-          <a:lstStyle/>
-          <a:p>
-            <a:pPr marL="0" marR="0" lvl="0" indent="0" algn="ctr" rtl="0">
-              <a:spcBef>
-                <a:spcPts val="0"/>
-              </a:spcBef>
-              <a:spcAft>
-                <a:spcPts val="0"/>
-              </a:spcAft>
-              <a:buNone/>
-            </a:pPr>
-            <a:endParaRPr sz="1800">
-              <a:solidFill>
-                <a:schemeClr val="lt1"/>
-              </a:solidFill>
-              <a:latin typeface="Calibri"/>
-              <a:ea typeface="Calibri"/>
-              <a:cs typeface="Calibri"/>
-              <a:sym typeface="Calibri"/>
-            </a:endParaRPr>
-          </a:p>
-        </p:txBody>
-      </p:sp>
-      <p:sp>
-        <p:nvSpPr>
-          <p:cNvPr id="15" name="Google Shape;98;p13">
-            <a:extLst>
-              <a:ext uri="{FF2B5EF4-FFF2-40B4-BE49-F238E27FC236}">
-                <a16:creationId xmlns:a16="http://schemas.microsoft.com/office/drawing/2014/main" id="{655DB671-3DA8-B149-8288-4F8B78A39734}"/>
-              </a:ext>
-            </a:extLst>
-          </p:cNvPr>
-          <p:cNvSpPr/>
-          <p:nvPr/>
-        </p:nvSpPr>
-        <p:spPr>
-          <a:xfrm>
-            <a:off x="4351034" y="5254439"/>
-            <a:ext cx="1397874" cy="900935"/>
-          </a:xfrm>
-          <a:prstGeom prst="ellipse">
-            <a:avLst/>
-          </a:prstGeom>
-          <a:solidFill>
-            <a:srgbClr val="00B0F0">
-              <a:alpha val="40784"/>
-            </a:srgbClr>
-          </a:solidFill>
-          <a:ln w="12700" cap="flat" cmpd="sng">
-            <a:solidFill>
-              <a:srgbClr val="31538F"/>
-            </a:solidFill>
-            <a:prstDash val="solid"/>
-            <a:miter lim="800000"/>
-            <a:headEnd type="none" w="sm" len="sm"/>
-            <a:tailEnd type="none" w="sm" len="sm"/>
-          </a:ln>
-        </p:spPr>
-        <p:txBody>
-          <a:bodyPr spcFirstLastPara="1" wrap="square" lIns="91425" tIns="45700" rIns="91425" bIns="45700" anchor="ctr" anchorCtr="0">
-            <a:noAutofit/>
-          </a:bodyPr>
-          <a:lstStyle/>
-          <a:p>
-            <a:pPr marL="0" marR="0" lvl="0" indent="0" algn="ctr" rtl="0">
-              <a:spcBef>
-                <a:spcPts val="0"/>
-              </a:spcBef>
-              <a:spcAft>
-                <a:spcPts val="0"/>
-              </a:spcAft>
-              <a:buNone/>
-            </a:pPr>
-            <a:endParaRPr sz="1800">
-              <a:solidFill>
-                <a:schemeClr val="lt1"/>
-              </a:solidFill>
-              <a:latin typeface="Calibri"/>
-              <a:ea typeface="Calibri"/>
-              <a:cs typeface="Calibri"/>
-              <a:sym typeface="Calibri"/>
-            </a:endParaRPr>
-          </a:p>
-        </p:txBody>
-      </p:sp>
-      <p:sp>
-        <p:nvSpPr>
-          <p:cNvPr id="16" name="Google Shape;99;p13">
-            <a:extLst>
-              <a:ext uri="{FF2B5EF4-FFF2-40B4-BE49-F238E27FC236}">
-                <a16:creationId xmlns:a16="http://schemas.microsoft.com/office/drawing/2014/main" id="{E19F1E77-6C1D-CF40-A056-B5F0A0067705}"/>
-              </a:ext>
-            </a:extLst>
-          </p:cNvPr>
-          <p:cNvSpPr txBox="1"/>
-          <p:nvPr/>
-        </p:nvSpPr>
-        <p:spPr>
-          <a:xfrm>
-            <a:off x="4048274" y="5632718"/>
-            <a:ext cx="581015" cy="431253"/>
-          </a:xfrm>
-          <a:prstGeom prst="rect">
-            <a:avLst/>
-          </a:prstGeom>
-          <a:noFill/>
-          <a:ln>
-            <a:noFill/>
-          </a:ln>
-        </p:spPr>
-        <p:txBody>
-          <a:bodyPr spcFirstLastPara="1" wrap="square" lIns="91425" tIns="45700" rIns="91425" bIns="45700" anchor="t" anchorCtr="0">
-            <a:noAutofit/>
-          </a:bodyPr>
-          <a:lstStyle/>
-          <a:p>
-            <a:pPr marL="0" marR="0" lvl="0" indent="0" algn="l" rtl="0">
-              <a:spcBef>
-                <a:spcPts val="0"/>
-              </a:spcBef>
-              <a:spcAft>
-                <a:spcPts val="0"/>
-              </a:spcAft>
-              <a:buNone/>
-            </a:pPr>
-            <a:r>
-              <a:rPr lang="en-US" sz="2400" b="1" dirty="0">
-                <a:solidFill>
-                  <a:srgbClr val="FF0000"/>
-                </a:solidFill>
-                <a:latin typeface="Calibri"/>
-                <a:ea typeface="Calibri"/>
-                <a:cs typeface="Calibri"/>
-                <a:sym typeface="Calibri"/>
-              </a:rPr>
-              <a:t>A</a:t>
-            </a:r>
-            <a:endParaRPr sz="2400" b="1" dirty="0">
-              <a:solidFill>
-                <a:srgbClr val="FF0000"/>
-              </a:solidFill>
-              <a:latin typeface="Calibri"/>
-              <a:ea typeface="Calibri"/>
-              <a:cs typeface="Calibri"/>
-              <a:sym typeface="Calibri"/>
-            </a:endParaRPr>
-          </a:p>
-        </p:txBody>
-      </p:sp>
-      <p:sp>
-        <p:nvSpPr>
-          <p:cNvPr id="17" name="Google Shape;100;p13">
-            <a:extLst>
-              <a:ext uri="{FF2B5EF4-FFF2-40B4-BE49-F238E27FC236}">
-                <a16:creationId xmlns:a16="http://schemas.microsoft.com/office/drawing/2014/main" id="{61C18CBF-01D4-C848-A7B2-E04510A0F7B8}"/>
-              </a:ext>
-            </a:extLst>
-          </p:cNvPr>
-          <p:cNvSpPr txBox="1"/>
-          <p:nvPr/>
-        </p:nvSpPr>
-        <p:spPr>
-          <a:xfrm>
-            <a:off x="5379642" y="5384791"/>
-            <a:ext cx="640540" cy="433753"/>
-          </a:xfrm>
-          <a:prstGeom prst="rect">
-            <a:avLst/>
-          </a:prstGeom>
-          <a:noFill/>
-          <a:ln>
-            <a:noFill/>
-          </a:ln>
-        </p:spPr>
-        <p:txBody>
-          <a:bodyPr spcFirstLastPara="1" wrap="square" lIns="91425" tIns="45700" rIns="91425" bIns="45700" anchor="t" anchorCtr="0">
-            <a:noAutofit/>
-          </a:bodyPr>
-          <a:lstStyle/>
-          <a:p>
-            <a:pPr marL="0" marR="0" lvl="0" indent="0" algn="l" rtl="0">
-              <a:spcBef>
-                <a:spcPts val="0"/>
-              </a:spcBef>
-              <a:spcAft>
-                <a:spcPts val="0"/>
-              </a:spcAft>
-              <a:buNone/>
-            </a:pPr>
-            <a:r>
-              <a:rPr lang="en-US" sz="2400" b="1" dirty="0">
-                <a:solidFill>
-                  <a:srgbClr val="FF0000"/>
-                </a:solidFill>
-                <a:latin typeface="Calibri"/>
-                <a:ea typeface="Calibri"/>
-                <a:cs typeface="Calibri"/>
-                <a:sym typeface="Calibri"/>
-              </a:rPr>
-              <a:t>B</a:t>
-            </a:r>
-          </a:p>
-        </p:txBody>
-      </p:sp>
-      <p:sp>
-        <p:nvSpPr>
-          <p:cNvPr id="18" name="Google Shape;101;p13">
-            <a:extLst>
-              <a:ext uri="{FF2B5EF4-FFF2-40B4-BE49-F238E27FC236}">
-                <a16:creationId xmlns:a16="http://schemas.microsoft.com/office/drawing/2014/main" id="{C254AE81-7BEC-E24E-A3FD-EA1283594849}"/>
-              </a:ext>
-            </a:extLst>
-          </p:cNvPr>
-          <p:cNvSpPr txBox="1"/>
-          <p:nvPr/>
-        </p:nvSpPr>
-        <p:spPr>
-          <a:xfrm>
-            <a:off x="4701470" y="4500235"/>
-            <a:ext cx="1530878" cy="461665"/>
-          </a:xfrm>
-          <a:prstGeom prst="rect">
-            <a:avLst/>
-          </a:prstGeom>
-          <a:noFill/>
-          <a:ln>
-            <a:noFill/>
-          </a:ln>
-        </p:spPr>
-        <p:txBody>
-          <a:bodyPr spcFirstLastPara="1" wrap="square" lIns="91425" tIns="45700" rIns="91425" bIns="45700" anchor="t" anchorCtr="0">
-            <a:noAutofit/>
-          </a:bodyPr>
-          <a:lstStyle/>
-          <a:p>
-            <a:pPr marL="0" marR="0" lvl="0" indent="0" algn="l" rtl="0">
-              <a:spcBef>
-                <a:spcPts val="0"/>
-              </a:spcBef>
-              <a:spcAft>
-                <a:spcPts val="0"/>
-              </a:spcAft>
-              <a:buNone/>
-            </a:pPr>
-            <a:r>
-              <a:rPr lang="en-US" sz="2400" b="1" dirty="0">
-                <a:solidFill>
-                  <a:srgbClr val="FF0000"/>
-                </a:solidFill>
-                <a:latin typeface="Calibri"/>
-                <a:ea typeface="Calibri"/>
-                <a:cs typeface="Calibri"/>
-                <a:sym typeface="Calibri"/>
-              </a:rPr>
-              <a:t>All Drives</a:t>
-            </a:r>
-            <a:endParaRPr sz="2400" b="1" dirty="0">
-              <a:solidFill>
-                <a:srgbClr val="FF0000"/>
-              </a:solidFill>
-              <a:latin typeface="Calibri"/>
-              <a:ea typeface="Calibri"/>
-              <a:cs typeface="Calibri"/>
-              <a:sym typeface="Calibri"/>
-            </a:endParaRPr>
-          </a:p>
-        </p:txBody>
-      </p:sp>
-      <p:sp>
-        <p:nvSpPr>
-          <p:cNvPr id="19" name="TextBox 18">
-            <a:extLst>
-              <a:ext uri="{FF2B5EF4-FFF2-40B4-BE49-F238E27FC236}">
-                <a16:creationId xmlns:a16="http://schemas.microsoft.com/office/drawing/2014/main" id="{6E6E4C8B-2E60-5C46-9FFF-EB63ACF4895B}"/>
-              </a:ext>
-            </a:extLst>
-          </p:cNvPr>
-          <p:cNvSpPr txBox="1"/>
-          <p:nvPr/>
-        </p:nvSpPr>
-        <p:spPr>
-          <a:xfrm>
-            <a:off x="8930917" y="462807"/>
-            <a:ext cx="3119984" cy="1384995"/>
+            <a:off x="-1" y="37572"/>
+            <a:ext cx="6694715" cy="523220"/>
           </a:xfrm>
           <a:prstGeom prst="rect">
             <a:avLst/>
@@ -20059,88 +21864,216 @@
           <a:lstStyle/>
           <a:p>
             <a:r>
-              <a:rPr lang="en-US" b="1" dirty="0">
+              <a:rPr lang="en-US" sz="2800" b="1" dirty="0"/>
+              <a:t>Frequentist vs Bayesian </a:t>
+            </a:r>
+          </a:p>
+        </p:txBody>
+      </p:sp>
+      <p:sp>
+        <p:nvSpPr>
+          <p:cNvPr id="8" name="Google Shape;93;p13">
+            <a:extLst>
+              <a:ext uri="{FF2B5EF4-FFF2-40B4-BE49-F238E27FC236}">
+                <a16:creationId xmlns:a16="http://schemas.microsoft.com/office/drawing/2014/main" id="{63B1458D-308E-4C42-81E2-BCB6757E15B7}"/>
+              </a:ext>
+            </a:extLst>
+          </p:cNvPr>
+          <p:cNvSpPr txBox="1"/>
+          <p:nvPr/>
+        </p:nvSpPr>
+        <p:spPr>
+          <a:xfrm>
+            <a:off x="2748642" y="4114801"/>
+            <a:ext cx="6694715" cy="1637390"/>
+          </a:xfrm>
+          <a:prstGeom prst="rect">
+            <a:avLst/>
+          </a:prstGeom>
+          <a:noFill/>
+          <a:ln w="63500">
+            <a:solidFill>
+              <a:schemeClr val="accent6">
+                <a:lumMod val="40000"/>
+                <a:lumOff val="60000"/>
+              </a:schemeClr>
+            </a:solidFill>
+          </a:ln>
+        </p:spPr>
+        <p:txBody>
+          <a:bodyPr spcFirstLastPara="1" wrap="square" lIns="91425" tIns="45700" rIns="91425" bIns="45700" anchor="t" anchorCtr="0">
+            <a:noAutofit/>
+          </a:bodyPr>
+          <a:lstStyle/>
+          <a:p>
+            <a:r>
+              <a:rPr lang="en-US" sz="2400" b="1" dirty="0">
+                <a:solidFill>
+                  <a:schemeClr val="accent1"/>
+                </a:solidFill>
+                <a:latin typeface="Calibri" panose="020F0502020204030204" pitchFamily="34" charset="0"/>
+                <a:cs typeface="Calibri" panose="020F0502020204030204" pitchFamily="34" charset="0"/>
+                <a:sym typeface="Calibri"/>
+              </a:rPr>
+              <a:t>Bayesian interpretation of Bayes’ theorem.</a:t>
+            </a:r>
+            <a:endParaRPr lang="en-US" sz="2400" b="1" dirty="0">
+              <a:solidFill>
+                <a:schemeClr val="accent1"/>
+              </a:solidFill>
+              <a:latin typeface="Calibri" panose="020F0502020204030204" pitchFamily="34" charset="0"/>
+              <a:cs typeface="Calibri" panose="020F0502020204030204" pitchFamily="34" charset="0"/>
+            </a:endParaRPr>
+          </a:p>
+          <a:p>
+            <a:pPr lvl="0"/>
+            <a:r>
+              <a:rPr lang="en-US" sz="1800" b="1" dirty="0">
                 <a:solidFill>
                   <a:srgbClr val="00B050"/>
                 </a:solidFill>
-                <a:latin typeface="Menlo" panose="020B0609030804020204" pitchFamily="49" charset="0"/>
-                <a:ea typeface="Menlo" panose="020B0609030804020204" pitchFamily="49" charset="0"/>
-                <a:cs typeface="Menlo" panose="020B0609030804020204" pitchFamily="49" charset="0"/>
+                <a:latin typeface="Calibri" panose="020F0502020204030204" pitchFamily="34" charset="0"/>
+                <a:cs typeface="Calibri" panose="020F0502020204030204" pitchFamily="34" charset="0"/>
+                <a:sym typeface="Calibri"/>
               </a:rPr>
-              <a:t>+-------+----------+------+</a:t>
-            </a:r>
-          </a:p>
-          <a:p>
-            <a:r>
-              <a:rPr lang="en-US" b="1" dirty="0">
+              <a:t>Probability measures a degree of belief.</a:t>
+            </a:r>
+            <a:br>
+              <a:rPr lang="en-US" sz="1800" b="1" dirty="0">
                 <a:solidFill>
                   <a:srgbClr val="00B050"/>
                 </a:solidFill>
-                <a:latin typeface="Menlo" panose="020B0609030804020204" pitchFamily="49" charset="0"/>
-                <a:ea typeface="Menlo" panose="020B0609030804020204" pitchFamily="49" charset="0"/>
-                <a:cs typeface="Menlo" panose="020B0609030804020204" pitchFamily="49" charset="0"/>
+                <a:latin typeface="Calibri" panose="020F0502020204030204" pitchFamily="34" charset="0"/>
+                <a:cs typeface="Calibri" panose="020F0502020204030204" pitchFamily="34" charset="0"/>
+                <a:sym typeface="Calibri"/>
               </a:rPr>
-              <a:t>|       | Damaged  |      |</a:t>
-            </a:r>
-          </a:p>
-          <a:p>
-            <a:r>
-              <a:rPr lang="en-US" b="1" dirty="0">
-                <a:solidFill>
-                  <a:srgbClr val="00B050"/>
-                </a:solidFill>
-                <a:latin typeface="Menlo" panose="020B0609030804020204" pitchFamily="49" charset="0"/>
-                <a:ea typeface="Menlo" panose="020B0609030804020204" pitchFamily="49" charset="0"/>
-                <a:cs typeface="Menlo" panose="020B0609030804020204" pitchFamily="49" charset="0"/>
+            </a:br>
+            <a:r>
+              <a:rPr lang="en-US" sz="1800" dirty="0">
+                <a:solidFill>
+                  <a:schemeClr val="dk1"/>
+                </a:solidFill>
+                <a:latin typeface="Calibri" panose="020F0502020204030204" pitchFamily="34" charset="0"/>
+                <a:cs typeface="Calibri" panose="020F0502020204030204" pitchFamily="34" charset="0"/>
+                <a:sym typeface="Calibri"/>
               </a:rPr>
-              <a:t>+-------+----------+------+</a:t>
-            </a:r>
-          </a:p>
-          <a:p>
-            <a:r>
-              <a:rPr lang="en-US" b="1" dirty="0">
-                <a:solidFill>
-                  <a:srgbClr val="00B050"/>
-                </a:solidFill>
-                <a:latin typeface="Menlo" panose="020B0609030804020204" pitchFamily="49" charset="0"/>
-                <a:ea typeface="Menlo" panose="020B0609030804020204" pitchFamily="49" charset="0"/>
-                <a:cs typeface="Menlo" panose="020B0609030804020204" pitchFamily="49" charset="0"/>
+              <a:t>P(A), the </a:t>
+            </a:r>
+            <a:r>
+              <a:rPr lang="en-US" sz="1800" b="1" dirty="0">
+                <a:solidFill>
+                  <a:schemeClr val="accent1"/>
+                </a:solidFill>
+                <a:latin typeface="Calibri" panose="020F0502020204030204" pitchFamily="34" charset="0"/>
+                <a:cs typeface="Calibri" panose="020F0502020204030204" pitchFamily="34" charset="0"/>
+                <a:sym typeface="Calibri"/>
               </a:rPr>
-              <a:t>|Coffee |  80      |  -   |</a:t>
-            </a:r>
-          </a:p>
-          <a:p>
-            <a:r>
-              <a:rPr lang="en-US" b="1" dirty="0">
-                <a:solidFill>
-                  <a:srgbClr val="00B050"/>
-                </a:solidFill>
-                <a:latin typeface="Menlo" panose="020B0609030804020204" pitchFamily="49" charset="0"/>
-                <a:ea typeface="Menlo" panose="020B0609030804020204" pitchFamily="49" charset="0"/>
-                <a:cs typeface="Menlo" panose="020B0609030804020204" pitchFamily="49" charset="0"/>
+              <a:t>prior</a:t>
+            </a:r>
+            <a:r>
+              <a:rPr lang="en-US" sz="1800" dirty="0">
+                <a:solidFill>
+                  <a:schemeClr val="dk1"/>
+                </a:solidFill>
+                <a:latin typeface="Calibri" panose="020F0502020204030204" pitchFamily="34" charset="0"/>
+                <a:cs typeface="Calibri" panose="020F0502020204030204" pitchFamily="34" charset="0"/>
+                <a:sym typeface="Calibri"/>
               </a:rPr>
-              <a:t>|       |  20      |  -   |</a:t>
-            </a:r>
-          </a:p>
-          <a:p>
-            <a:r>
-              <a:rPr lang="en-US" b="1" dirty="0">
-                <a:solidFill>
-                  <a:srgbClr val="00B050"/>
-                </a:solidFill>
-                <a:latin typeface="Menlo" panose="020B0609030804020204" pitchFamily="49" charset="0"/>
-                <a:ea typeface="Menlo" panose="020B0609030804020204" pitchFamily="49" charset="0"/>
-                <a:cs typeface="Menlo" panose="020B0609030804020204" pitchFamily="49" charset="0"/>
+              <a:t>, is the initial degree of belief in A.</a:t>
+            </a:r>
+            <a:endParaRPr lang="en-US" sz="1800" dirty="0">
+              <a:solidFill>
+                <a:schemeClr val="dk1"/>
+              </a:solidFill>
+              <a:latin typeface="Calibri" panose="020F0502020204030204" pitchFamily="34" charset="0"/>
+              <a:cs typeface="Calibri" panose="020F0502020204030204" pitchFamily="34" charset="0"/>
+            </a:endParaRPr>
+          </a:p>
+          <a:p>
+            <a:pPr lvl="0"/>
+            <a:r>
+              <a:rPr lang="en-US" sz="1800" dirty="0">
+                <a:solidFill>
+                  <a:schemeClr val="dk1"/>
+                </a:solidFill>
+                <a:latin typeface="Calibri" panose="020F0502020204030204" pitchFamily="34" charset="0"/>
+                <a:cs typeface="Calibri" panose="020F0502020204030204" pitchFamily="34" charset="0"/>
+                <a:sym typeface="Calibri"/>
               </a:rPr>
-              <a:t>+-------+----------+------+</a:t>
-            </a:r>
+              <a:t>P(A|B), the </a:t>
+            </a:r>
+            <a:r>
+              <a:rPr lang="en-US" sz="1800" b="1" dirty="0">
+                <a:solidFill>
+                  <a:schemeClr val="accent1"/>
+                </a:solidFill>
+                <a:latin typeface="Calibri" panose="020F0502020204030204" pitchFamily="34" charset="0"/>
+                <a:cs typeface="Calibri" panose="020F0502020204030204" pitchFamily="34" charset="0"/>
+                <a:sym typeface="Calibri"/>
+              </a:rPr>
+              <a:t>posterior</a:t>
+            </a:r>
+            <a:r>
+              <a:rPr lang="en-US" sz="1800" dirty="0">
+                <a:solidFill>
+                  <a:schemeClr val="dk1"/>
+                </a:solidFill>
+                <a:latin typeface="Calibri" panose="020F0502020204030204" pitchFamily="34" charset="0"/>
+                <a:cs typeface="Calibri" panose="020F0502020204030204" pitchFamily="34" charset="0"/>
+                <a:sym typeface="Calibri"/>
+              </a:rPr>
+              <a:t>, is the degree of belief having accounted for B.</a:t>
+            </a:r>
+            <a:br>
+              <a:rPr lang="en-US" sz="1800" dirty="0">
+                <a:solidFill>
+                  <a:schemeClr val="dk1"/>
+                </a:solidFill>
+                <a:latin typeface="Calibri" panose="020F0502020204030204" pitchFamily="34" charset="0"/>
+                <a:cs typeface="Calibri" panose="020F0502020204030204" pitchFamily="34" charset="0"/>
+                <a:sym typeface="Calibri"/>
+              </a:rPr>
+            </a:br>
+            <a:r>
+              <a:rPr lang="en-US" sz="1800" dirty="0">
+                <a:solidFill>
+                  <a:schemeClr val="dk1"/>
+                </a:solidFill>
+                <a:latin typeface="Calibri" panose="020F0502020204030204" pitchFamily="34" charset="0"/>
+                <a:cs typeface="Calibri" panose="020F0502020204030204" pitchFamily="34" charset="0"/>
+                <a:sym typeface="Calibri"/>
+              </a:rPr>
+              <a:t>P(B|A)/P(B) – represents the support B provides for A.</a:t>
+            </a:r>
+            <a:endParaRPr lang="en-US" sz="1800" dirty="0">
+              <a:solidFill>
+                <a:schemeClr val="dk1"/>
+              </a:solidFill>
+              <a:latin typeface="Calibri" panose="020F0502020204030204" pitchFamily="34" charset="0"/>
+              <a:cs typeface="Calibri" panose="020F0502020204030204" pitchFamily="34" charset="0"/>
+            </a:endParaRPr>
+          </a:p>
+          <a:p>
+            <a:pPr marL="0" marR="0" lvl="0" indent="0" algn="l" rtl="0">
+              <a:spcBef>
+                <a:spcPts val="0"/>
+              </a:spcBef>
+              <a:spcAft>
+                <a:spcPts val="0"/>
+              </a:spcAft>
+              <a:buNone/>
+            </a:pPr>
+            <a:endParaRPr sz="1800" dirty="0">
+              <a:latin typeface="Calibri" panose="020F0502020204030204" pitchFamily="34" charset="0"/>
+              <a:cs typeface="Calibri" panose="020F0502020204030204" pitchFamily="34" charset="0"/>
+            </a:endParaRPr>
           </a:p>
         </p:txBody>
       </p:sp>
     </p:spTree>
     <p:extLst>
       <p:ext uri="{BB962C8B-B14F-4D97-AF65-F5344CB8AC3E}">
-        <p14:creationId xmlns:p14="http://schemas.microsoft.com/office/powerpoint/2010/main" val="418091737"/>
+        <p14:creationId xmlns:p14="http://schemas.microsoft.com/office/powerpoint/2010/main" val="1824935014"/>
       </p:ext>
     </p:extLst>
   </p:cSld>
@@ -20150,7 +22083,7 @@
 </p:sld>
 </file>
 
-<file path=ppt/slides/slide4.xml><?xml version="1.0" encoding="utf-8"?>
+<file path=ppt/slides/slide5.xml><?xml version="1.0" encoding="utf-8"?>
 <p:sld xmlns:a="http://schemas.openxmlformats.org/drawingml/2006/main" xmlns:r="http://schemas.openxmlformats.org/officeDocument/2006/relationships" xmlns:p="http://schemas.openxmlformats.org/presentationml/2006/main">
   <p:cSld>
     <p:spTree>
@@ -20812,7 +22745,1563 @@
 </p:sld>
 </file>
 
-<file path=ppt/slides/slide5.xml><?xml version="1.0" encoding="utf-8"?>
+<file path=ppt/slides/slide6.xml><?xml version="1.0" encoding="utf-8"?>
+<p:sld xmlns:a="http://schemas.openxmlformats.org/drawingml/2006/main" xmlns:r="http://schemas.openxmlformats.org/officeDocument/2006/relationships" xmlns:p="http://schemas.openxmlformats.org/presentationml/2006/main">
+  <p:cSld>
+    <p:spTree>
+      <p:nvGrpSpPr>
+        <p:cNvPr id="1" name=""/>
+        <p:cNvGrpSpPr/>
+        <p:nvPr/>
+      </p:nvGrpSpPr>
+      <p:grpSpPr>
+        <a:xfrm>
+          <a:off x="0" y="0"/>
+          <a:ext cx="0" cy="0"/>
+          <a:chOff x="0" y="0"/>
+          <a:chExt cx="0" cy="0"/>
+        </a:xfrm>
+      </p:grpSpPr>
+      <p:sp>
+        <p:nvSpPr>
+          <p:cNvPr id="2" name="TextBox 1">
+            <a:extLst>
+              <a:ext uri="{FF2B5EF4-FFF2-40B4-BE49-F238E27FC236}">
+                <a16:creationId xmlns:a16="http://schemas.microsoft.com/office/drawing/2014/main" id="{B3B32340-E706-FA41-BDA5-397606042A7E}"/>
+              </a:ext>
+            </a:extLst>
+          </p:cNvPr>
+          <p:cNvSpPr txBox="1"/>
+          <p:nvPr/>
+        </p:nvSpPr>
+        <p:spPr>
+          <a:xfrm>
+            <a:off x="-1" y="37572"/>
+            <a:ext cx="7901355" cy="523220"/>
+          </a:xfrm>
+          <a:prstGeom prst="rect">
+            <a:avLst/>
+          </a:prstGeom>
+          <a:noFill/>
+        </p:spPr>
+        <p:txBody>
+          <a:bodyPr wrap="square" rtlCol="0">
+            <a:spAutoFit/>
+          </a:bodyPr>
+          <a:lstStyle/>
+          <a:p>
+            <a:r>
+              <a:rPr lang="en-US" sz="2800" b="1" dirty="0"/>
+              <a:t>Example – Coffee and Damaged Flash Drives</a:t>
+            </a:r>
+          </a:p>
+        </p:txBody>
+      </p:sp>
+      <p:sp>
+        <p:nvSpPr>
+          <p:cNvPr id="3" name="TextBox 2">
+            <a:extLst>
+              <a:ext uri="{FF2B5EF4-FFF2-40B4-BE49-F238E27FC236}">
+                <a16:creationId xmlns:a16="http://schemas.microsoft.com/office/drawing/2014/main" id="{2443CC5D-9378-E348-8505-A594E821478A}"/>
+              </a:ext>
+            </a:extLst>
+          </p:cNvPr>
+          <p:cNvSpPr txBox="1"/>
+          <p:nvPr/>
+        </p:nvSpPr>
+        <p:spPr>
+          <a:xfrm>
+            <a:off x="141099" y="678252"/>
+            <a:ext cx="4325394" cy="954107"/>
+          </a:xfrm>
+          <a:prstGeom prst="rect">
+            <a:avLst/>
+          </a:prstGeom>
+          <a:noFill/>
+          <a:ln w="63500">
+            <a:solidFill>
+              <a:schemeClr val="accent6">
+                <a:lumMod val="40000"/>
+                <a:lumOff val="60000"/>
+              </a:schemeClr>
+            </a:solidFill>
+          </a:ln>
+        </p:spPr>
+        <p:txBody>
+          <a:bodyPr wrap="square" rtlCol="0">
+            <a:spAutoFit/>
+          </a:bodyPr>
+          <a:lstStyle/>
+          <a:p>
+            <a:r>
+              <a:rPr lang="en-US" dirty="0"/>
+              <a:t>We have 100 damaged flash drives, </a:t>
+            </a:r>
+          </a:p>
+          <a:p>
+            <a:r>
+              <a:rPr lang="en-US" dirty="0"/>
+              <a:t>80 of them have coffee stains on them.</a:t>
+            </a:r>
+          </a:p>
+          <a:p>
+            <a:endParaRPr lang="en-US" dirty="0"/>
+          </a:p>
+          <a:p>
+            <a:r>
+              <a:rPr lang="en-US" dirty="0"/>
+              <a:t>What can we say about coffee causing the damage?</a:t>
+            </a:r>
+          </a:p>
+        </p:txBody>
+      </p:sp>
+      <p:sp>
+        <p:nvSpPr>
+          <p:cNvPr id="5" name="Google Shape;89;p13">
+            <a:extLst>
+              <a:ext uri="{FF2B5EF4-FFF2-40B4-BE49-F238E27FC236}">
+                <a16:creationId xmlns:a16="http://schemas.microsoft.com/office/drawing/2014/main" id="{452FF8D6-C125-B84A-B6C6-3F252EF37ED5}"/>
+              </a:ext>
+            </a:extLst>
+          </p:cNvPr>
+          <p:cNvSpPr txBox="1"/>
+          <p:nvPr/>
+        </p:nvSpPr>
+        <p:spPr>
+          <a:xfrm>
+            <a:off x="6674033" y="2032595"/>
+            <a:ext cx="4287044" cy="2050775"/>
+          </a:xfrm>
+          <a:prstGeom prst="rect">
+            <a:avLst/>
+          </a:prstGeom>
+          <a:noFill/>
+          <a:ln>
+            <a:noFill/>
+          </a:ln>
+        </p:spPr>
+        <p:txBody>
+          <a:bodyPr spcFirstLastPara="1" wrap="square" lIns="91425" tIns="45700" rIns="91425" bIns="45700" anchor="t" anchorCtr="0">
+            <a:noAutofit/>
+          </a:bodyPr>
+          <a:lstStyle/>
+          <a:p>
+            <a:pPr marL="0" marR="0" lvl="0" indent="0" algn="l" rtl="0">
+              <a:spcBef>
+                <a:spcPts val="0"/>
+              </a:spcBef>
+              <a:spcAft>
+                <a:spcPts val="0"/>
+              </a:spcAft>
+              <a:buNone/>
+            </a:pPr>
+            <a:r>
+              <a:rPr lang="en-US" sz="1200" dirty="0">
+                <a:solidFill>
+                  <a:schemeClr val="dk1"/>
+                </a:solidFill>
+                <a:latin typeface="Calibri"/>
+                <a:cs typeface="Calibri"/>
+                <a:sym typeface="Calibri"/>
+              </a:rPr>
+              <a:t>A = Coffee, B = Damaged</a:t>
+            </a:r>
+            <a:endParaRPr lang="en-US" sz="1200" dirty="0">
+              <a:solidFill>
+                <a:schemeClr val="dk1"/>
+              </a:solidFill>
+              <a:latin typeface="Calibri"/>
+              <a:ea typeface="Calibri"/>
+              <a:cs typeface="Calibri"/>
+              <a:sym typeface="Calibri"/>
+            </a:endParaRPr>
+          </a:p>
+          <a:p>
+            <a:pPr lvl="0"/>
+            <a:r>
+              <a:rPr lang="en-US" sz="1200" dirty="0">
+                <a:solidFill>
+                  <a:schemeClr val="dk1"/>
+                </a:solidFill>
+                <a:latin typeface="Calibri"/>
+                <a:ea typeface="Calibri"/>
+                <a:cs typeface="Calibri"/>
+                <a:sym typeface="Calibri"/>
+              </a:rPr>
+              <a:t>P(A) = 40% = probability of </a:t>
+            </a:r>
+            <a:r>
+              <a:rPr lang="en-US" sz="1200" dirty="0">
+                <a:solidFill>
+                  <a:schemeClr val="dk1"/>
+                </a:solidFill>
+                <a:latin typeface="Calibri"/>
+                <a:cs typeface="Calibri"/>
+                <a:sym typeface="Calibri"/>
+              </a:rPr>
+              <a:t>Coffee</a:t>
+            </a:r>
+            <a:r>
+              <a:rPr lang="en-US" sz="1200" dirty="0">
+                <a:solidFill>
+                  <a:schemeClr val="dk1"/>
+                </a:solidFill>
+                <a:latin typeface="Calibri"/>
+                <a:ea typeface="Calibri"/>
+                <a:cs typeface="Calibri"/>
+                <a:sym typeface="Calibri"/>
+              </a:rPr>
+              <a:t> (Yellow)</a:t>
+            </a:r>
+          </a:p>
+          <a:p>
+            <a:pPr marL="0" marR="0" lvl="0" indent="0" algn="l" rtl="0">
+              <a:spcBef>
+                <a:spcPts val="0"/>
+              </a:spcBef>
+              <a:spcAft>
+                <a:spcPts val="0"/>
+              </a:spcAft>
+              <a:buNone/>
+            </a:pPr>
+            <a:r>
+              <a:rPr lang="en-US" sz="1200" dirty="0">
+                <a:solidFill>
+                  <a:schemeClr val="dk1"/>
+                </a:solidFill>
+                <a:latin typeface="Calibri"/>
+                <a:ea typeface="Calibri"/>
+                <a:cs typeface="Calibri"/>
+                <a:sym typeface="Calibri"/>
+              </a:rPr>
+              <a:t>P(B) = 5% = probability of Damaged (Blue)</a:t>
+            </a:r>
+          </a:p>
+          <a:p>
+            <a:pPr marL="0" marR="0" lvl="0" indent="0" algn="l" rtl="0">
+              <a:spcBef>
+                <a:spcPts val="0"/>
+              </a:spcBef>
+              <a:spcAft>
+                <a:spcPts val="0"/>
+              </a:spcAft>
+              <a:buNone/>
+            </a:pPr>
+            <a:endParaRPr lang="en-US" sz="1200" dirty="0">
+              <a:solidFill>
+                <a:schemeClr val="dk1"/>
+              </a:solidFill>
+              <a:latin typeface="Calibri"/>
+              <a:ea typeface="Calibri"/>
+              <a:cs typeface="Calibri"/>
+              <a:sym typeface="Calibri"/>
+            </a:endParaRPr>
+          </a:p>
+          <a:p>
+            <a:pPr lvl="0"/>
+            <a:r>
+              <a:rPr lang="en-US" sz="1200" b="1" dirty="0">
+                <a:solidFill>
+                  <a:srgbClr val="00B0F0"/>
+                </a:solidFill>
+                <a:latin typeface="Calibri"/>
+                <a:ea typeface="Calibri"/>
+                <a:cs typeface="Calibri"/>
+                <a:sym typeface="Calibri"/>
+              </a:rPr>
+              <a:t>P(B|A) = 10% = probability of Damaged given that Coffee</a:t>
+            </a:r>
+          </a:p>
+          <a:p>
+            <a:pPr lvl="0"/>
+            <a:r>
+              <a:rPr lang="en-US" sz="1200" dirty="0">
+                <a:solidFill>
+                  <a:schemeClr val="dk1"/>
+                </a:solidFill>
+                <a:latin typeface="Calibri"/>
+                <a:ea typeface="Calibri"/>
+                <a:cs typeface="Calibri"/>
+                <a:sym typeface="Calibri"/>
+              </a:rPr>
+              <a:t>P(A|B) = 80% = probability of Coffee given that Damaged</a:t>
+            </a:r>
+          </a:p>
+          <a:p>
+            <a:pPr marL="0" marR="0" lvl="0" indent="0" algn="l" rtl="0">
+              <a:spcBef>
+                <a:spcPts val="0"/>
+              </a:spcBef>
+              <a:spcAft>
+                <a:spcPts val="0"/>
+              </a:spcAft>
+              <a:buNone/>
+            </a:pPr>
+            <a:endParaRPr lang="en-US" sz="1200" dirty="0">
+              <a:solidFill>
+                <a:schemeClr val="dk1"/>
+              </a:solidFill>
+              <a:latin typeface="Calibri"/>
+              <a:ea typeface="Calibri"/>
+              <a:cs typeface="Calibri"/>
+              <a:sym typeface="Calibri"/>
+            </a:endParaRPr>
+          </a:p>
+          <a:p>
+            <a:r>
+              <a:rPr lang="en-US" sz="1200" dirty="0">
+                <a:solidFill>
+                  <a:schemeClr val="dk1"/>
+                </a:solidFill>
+                <a:latin typeface="Calibri"/>
+                <a:ea typeface="Calibri"/>
+                <a:cs typeface="Calibri"/>
+                <a:sym typeface="Calibri"/>
+              </a:rPr>
+              <a:t>Intersection:</a:t>
+            </a:r>
+          </a:p>
+          <a:p>
+            <a:pPr marL="0" marR="0" lvl="0" indent="0" algn="l" rtl="0">
+              <a:spcBef>
+                <a:spcPts val="0"/>
+              </a:spcBef>
+              <a:spcAft>
+                <a:spcPts val="0"/>
+              </a:spcAft>
+              <a:buNone/>
+            </a:pPr>
+            <a:r>
+              <a:rPr lang="en-US" sz="1200" dirty="0">
+                <a:solidFill>
+                  <a:schemeClr val="dk1"/>
+                </a:solidFill>
+                <a:latin typeface="Calibri"/>
+                <a:ea typeface="Calibri"/>
+                <a:cs typeface="Calibri"/>
+                <a:sym typeface="Calibri"/>
+              </a:rPr>
+              <a:t>P(A &amp; B) = 4% = probability of Coffee &amp; Damaged (Green)</a:t>
+            </a:r>
+          </a:p>
+          <a:p>
+            <a:pPr marL="0" marR="0" lvl="0" indent="0" algn="l" rtl="0">
+              <a:spcBef>
+                <a:spcPts val="0"/>
+              </a:spcBef>
+              <a:spcAft>
+                <a:spcPts val="0"/>
+              </a:spcAft>
+              <a:buNone/>
+            </a:pPr>
+            <a:r>
+              <a:rPr lang="en-US" sz="1200" dirty="0">
+                <a:solidFill>
+                  <a:schemeClr val="dk1"/>
+                </a:solidFill>
+                <a:latin typeface="Calibri"/>
+                <a:ea typeface="Calibri"/>
+                <a:cs typeface="Calibri"/>
+                <a:sym typeface="Calibri"/>
+              </a:rPr>
+              <a:t>P(A|B)*P(B) = 80%*5% = 4%</a:t>
+            </a:r>
+            <a:endParaRPr sz="1200" dirty="0">
+              <a:solidFill>
+                <a:schemeClr val="dk1"/>
+              </a:solidFill>
+              <a:latin typeface="Calibri"/>
+              <a:ea typeface="Calibri"/>
+              <a:cs typeface="Calibri"/>
+              <a:sym typeface="Calibri"/>
+            </a:endParaRPr>
+          </a:p>
+          <a:p>
+            <a:pPr marL="0" marR="0" lvl="0" indent="0" algn="l" rtl="0">
+              <a:spcBef>
+                <a:spcPts val="0"/>
+              </a:spcBef>
+              <a:spcAft>
+                <a:spcPts val="0"/>
+              </a:spcAft>
+              <a:buNone/>
+            </a:pPr>
+            <a:r>
+              <a:rPr lang="en-US" sz="1200" dirty="0">
+                <a:solidFill>
+                  <a:schemeClr val="dk1"/>
+                </a:solidFill>
+                <a:latin typeface="Calibri"/>
+                <a:ea typeface="Calibri"/>
+                <a:cs typeface="Calibri"/>
+                <a:sym typeface="Calibri"/>
+              </a:rPr>
+              <a:t>P(B|A)*P(A) = 10%*40% = 4%</a:t>
+            </a:r>
+          </a:p>
+        </p:txBody>
+      </p:sp>
+      <p:sp>
+        <p:nvSpPr>
+          <p:cNvPr id="6" name="Google Shape;96;p13">
+            <a:extLst>
+              <a:ext uri="{FF2B5EF4-FFF2-40B4-BE49-F238E27FC236}">
+                <a16:creationId xmlns:a16="http://schemas.microsoft.com/office/drawing/2014/main" id="{404A001F-C0A0-BE48-A3B1-C838E48FDF8F}"/>
+              </a:ext>
+            </a:extLst>
+          </p:cNvPr>
+          <p:cNvSpPr/>
+          <p:nvPr/>
+        </p:nvSpPr>
+        <p:spPr>
+          <a:xfrm>
+            <a:off x="1531632" y="1974106"/>
+            <a:ext cx="5033285" cy="2229852"/>
+          </a:xfrm>
+          <a:prstGeom prst="rect">
+            <a:avLst/>
+          </a:prstGeom>
+          <a:solidFill>
+            <a:srgbClr val="FBE4D4"/>
+          </a:solidFill>
+          <a:ln w="12700" cap="flat" cmpd="sng">
+            <a:solidFill>
+              <a:srgbClr val="31538F"/>
+            </a:solidFill>
+            <a:prstDash val="solid"/>
+            <a:miter lim="800000"/>
+            <a:headEnd type="none" w="sm" len="sm"/>
+            <a:tailEnd type="none" w="sm" len="sm"/>
+          </a:ln>
+        </p:spPr>
+        <p:txBody>
+          <a:bodyPr spcFirstLastPara="1" wrap="square" lIns="91425" tIns="45700" rIns="91425" bIns="45700" anchor="ctr" anchorCtr="0">
+            <a:noAutofit/>
+          </a:bodyPr>
+          <a:lstStyle/>
+          <a:p>
+            <a:pPr marL="0" marR="0" lvl="0" indent="0" algn="ctr" rtl="0">
+              <a:spcBef>
+                <a:spcPts val="0"/>
+              </a:spcBef>
+              <a:spcAft>
+                <a:spcPts val="0"/>
+              </a:spcAft>
+              <a:buNone/>
+            </a:pPr>
+            <a:endParaRPr sz="1800">
+              <a:solidFill>
+                <a:schemeClr val="lt1"/>
+              </a:solidFill>
+              <a:latin typeface="Calibri"/>
+              <a:ea typeface="Calibri"/>
+              <a:cs typeface="Calibri"/>
+              <a:sym typeface="Calibri"/>
+            </a:endParaRPr>
+          </a:p>
+        </p:txBody>
+      </p:sp>
+      <p:sp>
+        <p:nvSpPr>
+          <p:cNvPr id="7" name="Google Shape;97;p13">
+            <a:extLst>
+              <a:ext uri="{FF2B5EF4-FFF2-40B4-BE49-F238E27FC236}">
+                <a16:creationId xmlns:a16="http://schemas.microsoft.com/office/drawing/2014/main" id="{31FE829C-2386-834C-996B-C2F3AE8AE45B}"/>
+              </a:ext>
+            </a:extLst>
+          </p:cNvPr>
+          <p:cNvSpPr/>
+          <p:nvPr/>
+        </p:nvSpPr>
+        <p:spPr>
+          <a:xfrm>
+            <a:off x="2175116" y="2278906"/>
+            <a:ext cx="3224463" cy="1764631"/>
+          </a:xfrm>
+          <a:prstGeom prst="ellipse">
+            <a:avLst/>
+          </a:prstGeom>
+          <a:solidFill>
+            <a:srgbClr val="FFC000"/>
+          </a:solidFill>
+          <a:ln w="12700" cap="flat" cmpd="sng">
+            <a:solidFill>
+              <a:srgbClr val="31538F"/>
+            </a:solidFill>
+            <a:prstDash val="solid"/>
+            <a:miter lim="800000"/>
+            <a:headEnd type="none" w="sm" len="sm"/>
+            <a:tailEnd type="none" w="sm" len="sm"/>
+          </a:ln>
+        </p:spPr>
+        <p:txBody>
+          <a:bodyPr spcFirstLastPara="1" wrap="square" lIns="91425" tIns="45700" rIns="91425" bIns="45700" anchor="ctr" anchorCtr="0">
+            <a:noAutofit/>
+          </a:bodyPr>
+          <a:lstStyle/>
+          <a:p>
+            <a:pPr marL="0" marR="0" lvl="0" indent="0" algn="ctr" rtl="0">
+              <a:spcBef>
+                <a:spcPts val="0"/>
+              </a:spcBef>
+              <a:spcAft>
+                <a:spcPts val="0"/>
+              </a:spcAft>
+              <a:buNone/>
+            </a:pPr>
+            <a:endParaRPr sz="1800">
+              <a:solidFill>
+                <a:schemeClr val="lt1"/>
+              </a:solidFill>
+              <a:latin typeface="Calibri"/>
+              <a:ea typeface="Calibri"/>
+              <a:cs typeface="Calibri"/>
+              <a:sym typeface="Calibri"/>
+            </a:endParaRPr>
+          </a:p>
+        </p:txBody>
+      </p:sp>
+      <p:sp>
+        <p:nvSpPr>
+          <p:cNvPr id="8" name="Google Shape;98;p13">
+            <a:extLst>
+              <a:ext uri="{FF2B5EF4-FFF2-40B4-BE49-F238E27FC236}">
+                <a16:creationId xmlns:a16="http://schemas.microsoft.com/office/drawing/2014/main" id="{DDB1E21D-A88D-F84D-A4C7-D15B09894D17}"/>
+              </a:ext>
+            </a:extLst>
+          </p:cNvPr>
+          <p:cNvSpPr/>
+          <p:nvPr/>
+        </p:nvSpPr>
+        <p:spPr>
+          <a:xfrm>
+            <a:off x="4351034" y="2710753"/>
+            <a:ext cx="1397874" cy="900935"/>
+          </a:xfrm>
+          <a:prstGeom prst="ellipse">
+            <a:avLst/>
+          </a:prstGeom>
+          <a:solidFill>
+            <a:srgbClr val="00B0F0">
+              <a:alpha val="40784"/>
+            </a:srgbClr>
+          </a:solidFill>
+          <a:ln w="12700" cap="flat" cmpd="sng">
+            <a:solidFill>
+              <a:srgbClr val="31538F"/>
+            </a:solidFill>
+            <a:prstDash val="solid"/>
+            <a:miter lim="800000"/>
+            <a:headEnd type="none" w="sm" len="sm"/>
+            <a:tailEnd type="none" w="sm" len="sm"/>
+          </a:ln>
+        </p:spPr>
+        <p:txBody>
+          <a:bodyPr spcFirstLastPara="1" wrap="square" lIns="91425" tIns="45700" rIns="91425" bIns="45700" anchor="ctr" anchorCtr="0">
+            <a:noAutofit/>
+          </a:bodyPr>
+          <a:lstStyle/>
+          <a:p>
+            <a:pPr marL="0" marR="0" lvl="0" indent="0" algn="ctr" rtl="0">
+              <a:spcBef>
+                <a:spcPts val="0"/>
+              </a:spcBef>
+              <a:spcAft>
+                <a:spcPts val="0"/>
+              </a:spcAft>
+              <a:buNone/>
+            </a:pPr>
+            <a:endParaRPr sz="1800">
+              <a:solidFill>
+                <a:schemeClr val="lt1"/>
+              </a:solidFill>
+              <a:latin typeface="Calibri"/>
+              <a:ea typeface="Calibri"/>
+              <a:cs typeface="Calibri"/>
+              <a:sym typeface="Calibri"/>
+            </a:endParaRPr>
+          </a:p>
+        </p:txBody>
+      </p:sp>
+      <p:sp>
+        <p:nvSpPr>
+          <p:cNvPr id="9" name="Google Shape;99;p13">
+            <a:extLst>
+              <a:ext uri="{FF2B5EF4-FFF2-40B4-BE49-F238E27FC236}">
+                <a16:creationId xmlns:a16="http://schemas.microsoft.com/office/drawing/2014/main" id="{4B219D50-9096-DC46-8C16-4EC0A06BA7C0}"/>
+              </a:ext>
+            </a:extLst>
+          </p:cNvPr>
+          <p:cNvSpPr txBox="1"/>
+          <p:nvPr/>
+        </p:nvSpPr>
+        <p:spPr>
+          <a:xfrm>
+            <a:off x="3076580" y="2710753"/>
+            <a:ext cx="971694" cy="647909"/>
+          </a:xfrm>
+          <a:prstGeom prst="rect">
+            <a:avLst/>
+          </a:prstGeom>
+          <a:noFill/>
+          <a:ln>
+            <a:noFill/>
+          </a:ln>
+        </p:spPr>
+        <p:txBody>
+          <a:bodyPr spcFirstLastPara="1" wrap="square" lIns="91425" tIns="45700" rIns="91425" bIns="45700" anchor="t" anchorCtr="0">
+            <a:noAutofit/>
+          </a:bodyPr>
+          <a:lstStyle>
+            <a:defPPr marR="0" lvl="0" algn="l" rtl="0">
+              <a:lnSpc>
+                <a:spcPct val="100000"/>
+              </a:lnSpc>
+              <a:spcBef>
+                <a:spcPts val="0"/>
+              </a:spcBef>
+              <a:spcAft>
+                <a:spcPts val="0"/>
+              </a:spcAft>
+            </a:defPPr>
+            <a:lvl1pPr marL="0" indent="0">
+              <a:buNone/>
+              <a:defRPr sz="1800" b="1">
+                <a:solidFill>
+                  <a:srgbClr val="FF0000"/>
+                </a:solidFill>
+                <a:latin typeface="Calibri"/>
+                <a:ea typeface="Calibri"/>
+                <a:cs typeface="Calibri"/>
+              </a:defRPr>
+            </a:lvl1pPr>
+          </a:lstStyle>
+          <a:p>
+            <a:r>
+              <a:rPr lang="en-US" dirty="0">
+                <a:sym typeface="Calibri"/>
+              </a:rPr>
+              <a:t>A</a:t>
+            </a:r>
+          </a:p>
+          <a:p>
+            <a:r>
+              <a:rPr lang="en-US" dirty="0">
+                <a:sym typeface="Calibri"/>
+              </a:rPr>
+              <a:t>Coffee</a:t>
+            </a:r>
+            <a:endParaRPr dirty="0">
+              <a:sym typeface="Calibri"/>
+            </a:endParaRPr>
+          </a:p>
+        </p:txBody>
+      </p:sp>
+      <p:sp>
+        <p:nvSpPr>
+          <p:cNvPr id="10" name="Google Shape;100;p13">
+            <a:extLst>
+              <a:ext uri="{FF2B5EF4-FFF2-40B4-BE49-F238E27FC236}">
+                <a16:creationId xmlns:a16="http://schemas.microsoft.com/office/drawing/2014/main" id="{A8D1023C-103A-914C-952D-A30BFA64F4CA}"/>
+              </a:ext>
+            </a:extLst>
+          </p:cNvPr>
+          <p:cNvSpPr txBox="1"/>
+          <p:nvPr/>
+        </p:nvSpPr>
+        <p:spPr>
+          <a:xfrm>
+            <a:off x="5399579" y="2985773"/>
+            <a:ext cx="1397874" cy="745778"/>
+          </a:xfrm>
+          <a:prstGeom prst="rect">
+            <a:avLst/>
+          </a:prstGeom>
+          <a:noFill/>
+          <a:ln>
+            <a:noFill/>
+          </a:ln>
+        </p:spPr>
+        <p:txBody>
+          <a:bodyPr spcFirstLastPara="1" wrap="square" lIns="91425" tIns="45700" rIns="91425" bIns="45700" anchor="t" anchorCtr="0">
+            <a:noAutofit/>
+          </a:bodyPr>
+          <a:lstStyle/>
+          <a:p>
+            <a:pPr marL="0" marR="0" lvl="0" indent="0" algn="l" rtl="0">
+              <a:spcBef>
+                <a:spcPts val="0"/>
+              </a:spcBef>
+              <a:spcAft>
+                <a:spcPts val="0"/>
+              </a:spcAft>
+              <a:buNone/>
+            </a:pPr>
+            <a:r>
+              <a:rPr lang="en-US" sz="1800" b="1" dirty="0">
+                <a:solidFill>
+                  <a:srgbClr val="FF0000"/>
+                </a:solidFill>
+                <a:latin typeface="Calibri"/>
+                <a:ea typeface="Calibri"/>
+                <a:cs typeface="Calibri"/>
+                <a:sym typeface="Calibri"/>
+              </a:rPr>
+              <a:t>B</a:t>
+            </a:r>
+          </a:p>
+          <a:p>
+            <a:pPr marL="0" marR="0" lvl="0" indent="0" algn="l" rtl="0">
+              <a:spcBef>
+                <a:spcPts val="0"/>
+              </a:spcBef>
+              <a:spcAft>
+                <a:spcPts val="0"/>
+              </a:spcAft>
+              <a:buNone/>
+            </a:pPr>
+            <a:r>
+              <a:rPr lang="en-US" sz="1800" b="1" dirty="0">
+                <a:solidFill>
+                  <a:srgbClr val="FF0000"/>
+                </a:solidFill>
+                <a:latin typeface="Calibri"/>
+                <a:ea typeface="Calibri"/>
+                <a:cs typeface="Calibri"/>
+                <a:sym typeface="Calibri"/>
+              </a:rPr>
+              <a:t>Damaged</a:t>
+            </a:r>
+            <a:endParaRPr sz="1800" b="1" dirty="0">
+              <a:solidFill>
+                <a:srgbClr val="FF0000"/>
+              </a:solidFill>
+              <a:latin typeface="Calibri"/>
+              <a:ea typeface="Calibri"/>
+              <a:cs typeface="Calibri"/>
+              <a:sym typeface="Calibri"/>
+            </a:endParaRPr>
+          </a:p>
+        </p:txBody>
+      </p:sp>
+      <p:sp>
+        <p:nvSpPr>
+          <p:cNvPr id="11" name="Google Shape;101;p13">
+            <a:extLst>
+              <a:ext uri="{FF2B5EF4-FFF2-40B4-BE49-F238E27FC236}">
+                <a16:creationId xmlns:a16="http://schemas.microsoft.com/office/drawing/2014/main" id="{7B123850-E879-7745-BC69-FED970CB58A9}"/>
+              </a:ext>
+            </a:extLst>
+          </p:cNvPr>
+          <p:cNvSpPr txBox="1"/>
+          <p:nvPr/>
+        </p:nvSpPr>
+        <p:spPr>
+          <a:xfrm>
+            <a:off x="4701470" y="1956549"/>
+            <a:ext cx="1530878" cy="461665"/>
+          </a:xfrm>
+          <a:prstGeom prst="rect">
+            <a:avLst/>
+          </a:prstGeom>
+          <a:noFill/>
+          <a:ln>
+            <a:noFill/>
+          </a:ln>
+        </p:spPr>
+        <p:txBody>
+          <a:bodyPr spcFirstLastPara="1" wrap="square" lIns="91425" tIns="45700" rIns="91425" bIns="45700" anchor="t" anchorCtr="0">
+            <a:noAutofit/>
+          </a:bodyPr>
+          <a:lstStyle/>
+          <a:p>
+            <a:pPr marL="0" marR="0" lvl="0" indent="0" algn="l" rtl="0">
+              <a:spcBef>
+                <a:spcPts val="0"/>
+              </a:spcBef>
+              <a:spcAft>
+                <a:spcPts val="0"/>
+              </a:spcAft>
+              <a:buNone/>
+            </a:pPr>
+            <a:r>
+              <a:rPr lang="en-US" sz="2400" b="1" dirty="0">
+                <a:solidFill>
+                  <a:srgbClr val="FF0000"/>
+                </a:solidFill>
+                <a:latin typeface="Calibri"/>
+                <a:ea typeface="Calibri"/>
+                <a:cs typeface="Calibri"/>
+                <a:sym typeface="Calibri"/>
+              </a:rPr>
+              <a:t>All Drives</a:t>
+            </a:r>
+            <a:endParaRPr sz="2400" b="1" dirty="0">
+              <a:solidFill>
+                <a:srgbClr val="FF0000"/>
+              </a:solidFill>
+              <a:latin typeface="Calibri"/>
+              <a:ea typeface="Calibri"/>
+              <a:cs typeface="Calibri"/>
+              <a:sym typeface="Calibri"/>
+            </a:endParaRPr>
+          </a:p>
+        </p:txBody>
+      </p:sp>
+      <p:sp>
+        <p:nvSpPr>
+          <p:cNvPr id="12" name="Google Shape;89;p13">
+            <a:extLst>
+              <a:ext uri="{FF2B5EF4-FFF2-40B4-BE49-F238E27FC236}">
+                <a16:creationId xmlns:a16="http://schemas.microsoft.com/office/drawing/2014/main" id="{3C8C744F-A8AE-1E49-818B-4076BC1271A0}"/>
+              </a:ext>
+            </a:extLst>
+          </p:cNvPr>
+          <p:cNvSpPr txBox="1"/>
+          <p:nvPr/>
+        </p:nvSpPr>
+        <p:spPr>
+          <a:xfrm>
+            <a:off x="6674032" y="4576281"/>
+            <a:ext cx="4287043" cy="2050775"/>
+          </a:xfrm>
+          <a:prstGeom prst="rect">
+            <a:avLst/>
+          </a:prstGeom>
+          <a:noFill/>
+          <a:ln>
+            <a:noFill/>
+          </a:ln>
+        </p:spPr>
+        <p:txBody>
+          <a:bodyPr spcFirstLastPara="1" wrap="square" lIns="91425" tIns="45700" rIns="91425" bIns="45700" anchor="t" anchorCtr="0">
+            <a:noAutofit/>
+          </a:bodyPr>
+          <a:lstStyle/>
+          <a:p>
+            <a:pPr marL="0" marR="0" lvl="0" indent="0" algn="l" rtl="0">
+              <a:spcBef>
+                <a:spcPts val="0"/>
+              </a:spcBef>
+              <a:spcAft>
+                <a:spcPts val="0"/>
+              </a:spcAft>
+              <a:buNone/>
+            </a:pPr>
+            <a:r>
+              <a:rPr lang="en-US" sz="1200" dirty="0">
+                <a:solidFill>
+                  <a:schemeClr val="dk1"/>
+                </a:solidFill>
+                <a:latin typeface="Calibri"/>
+                <a:cs typeface="Calibri"/>
+                <a:sym typeface="Calibri"/>
+              </a:rPr>
+              <a:t>A = Coffee, B = Damaged</a:t>
+            </a:r>
+            <a:endParaRPr lang="en-US" sz="1200" dirty="0">
+              <a:solidFill>
+                <a:schemeClr val="dk1"/>
+              </a:solidFill>
+              <a:latin typeface="Calibri"/>
+              <a:ea typeface="Calibri"/>
+              <a:cs typeface="Calibri"/>
+              <a:sym typeface="Calibri"/>
+            </a:endParaRPr>
+          </a:p>
+          <a:p>
+            <a:pPr lvl="0"/>
+            <a:r>
+              <a:rPr lang="en-US" sz="1200" dirty="0">
+                <a:solidFill>
+                  <a:schemeClr val="dk1"/>
+                </a:solidFill>
+                <a:latin typeface="Calibri"/>
+                <a:ea typeface="Calibri"/>
+                <a:cs typeface="Calibri"/>
+                <a:sym typeface="Calibri"/>
+              </a:rPr>
+              <a:t>P(A) = 5% = probability of </a:t>
+            </a:r>
+            <a:r>
+              <a:rPr lang="en-US" sz="1200" dirty="0">
+                <a:solidFill>
+                  <a:schemeClr val="dk1"/>
+                </a:solidFill>
+                <a:latin typeface="Calibri"/>
+                <a:cs typeface="Calibri"/>
+                <a:sym typeface="Calibri"/>
+              </a:rPr>
+              <a:t>Coffee</a:t>
+            </a:r>
+            <a:r>
+              <a:rPr lang="en-US" sz="1200" dirty="0">
+                <a:solidFill>
+                  <a:schemeClr val="dk1"/>
+                </a:solidFill>
+                <a:latin typeface="Calibri"/>
+                <a:ea typeface="Calibri"/>
+                <a:cs typeface="Calibri"/>
+                <a:sym typeface="Calibri"/>
+              </a:rPr>
+              <a:t> (Yellow)</a:t>
+            </a:r>
+          </a:p>
+          <a:p>
+            <a:pPr marL="0" marR="0" lvl="0" indent="0" algn="l" rtl="0">
+              <a:spcBef>
+                <a:spcPts val="0"/>
+              </a:spcBef>
+              <a:spcAft>
+                <a:spcPts val="0"/>
+              </a:spcAft>
+              <a:buNone/>
+            </a:pPr>
+            <a:r>
+              <a:rPr lang="en-US" sz="1200" dirty="0">
+                <a:solidFill>
+                  <a:schemeClr val="dk1"/>
+                </a:solidFill>
+                <a:latin typeface="Calibri"/>
+                <a:ea typeface="Calibri"/>
+                <a:cs typeface="Calibri"/>
+                <a:sym typeface="Calibri"/>
+              </a:rPr>
+              <a:t>P(B) = 5% = probability of Damaged (Blue)</a:t>
+            </a:r>
+          </a:p>
+          <a:p>
+            <a:pPr lvl="0"/>
+            <a:endParaRPr lang="en-US" sz="1200" dirty="0">
+              <a:solidFill>
+                <a:schemeClr val="dk1"/>
+              </a:solidFill>
+              <a:latin typeface="Calibri"/>
+              <a:ea typeface="Calibri"/>
+              <a:cs typeface="Calibri"/>
+              <a:sym typeface="Calibri"/>
+            </a:endParaRPr>
+          </a:p>
+          <a:p>
+            <a:r>
+              <a:rPr lang="en-US" sz="1200" b="1" dirty="0">
+                <a:solidFill>
+                  <a:srgbClr val="00B0F0"/>
+                </a:solidFill>
+                <a:latin typeface="Calibri"/>
+                <a:cs typeface="Calibri"/>
+                <a:sym typeface="Calibri"/>
+              </a:rPr>
+              <a:t>P(B|A) = 80% = probability of Damaged given that Coffee</a:t>
+            </a:r>
+          </a:p>
+          <a:p>
+            <a:pPr lvl="0"/>
+            <a:r>
+              <a:rPr lang="en-US" sz="1200" dirty="0">
+                <a:solidFill>
+                  <a:schemeClr val="dk1"/>
+                </a:solidFill>
+                <a:latin typeface="Calibri"/>
+                <a:ea typeface="Calibri"/>
+                <a:cs typeface="Calibri"/>
+                <a:sym typeface="Calibri"/>
+              </a:rPr>
+              <a:t>P(A|B) = 80% = probability of Coffee given that Damaged</a:t>
+            </a:r>
+          </a:p>
+          <a:p>
+            <a:pPr lvl="0"/>
+            <a:endParaRPr lang="en-US" sz="1200" dirty="0">
+              <a:solidFill>
+                <a:schemeClr val="dk1"/>
+              </a:solidFill>
+              <a:latin typeface="Calibri"/>
+              <a:ea typeface="Calibri"/>
+              <a:cs typeface="Calibri"/>
+              <a:sym typeface="Calibri"/>
+            </a:endParaRPr>
+          </a:p>
+          <a:p>
+            <a:pPr marL="0" marR="0" lvl="0" indent="0" algn="l" rtl="0">
+              <a:spcBef>
+                <a:spcPts val="0"/>
+              </a:spcBef>
+              <a:spcAft>
+                <a:spcPts val="0"/>
+              </a:spcAft>
+              <a:buNone/>
+            </a:pPr>
+            <a:r>
+              <a:rPr lang="en-US" sz="1200" dirty="0">
+                <a:solidFill>
+                  <a:schemeClr val="dk1"/>
+                </a:solidFill>
+                <a:latin typeface="Calibri"/>
+                <a:ea typeface="Calibri"/>
+                <a:cs typeface="Calibri"/>
+                <a:sym typeface="Calibri"/>
+              </a:rPr>
+              <a:t>Intersection:</a:t>
+            </a:r>
+          </a:p>
+          <a:p>
+            <a:r>
+              <a:rPr lang="en-US" sz="1200" dirty="0">
+                <a:solidFill>
+                  <a:schemeClr val="dk1"/>
+                </a:solidFill>
+                <a:latin typeface="Calibri"/>
+                <a:ea typeface="Calibri"/>
+                <a:cs typeface="Calibri"/>
+                <a:sym typeface="Calibri"/>
+              </a:rPr>
+              <a:t>P(A &amp; B) = 4% = probability of Coffee &amp; Damaged (Green)</a:t>
+            </a:r>
+          </a:p>
+          <a:p>
+            <a:pPr marL="0" marR="0" lvl="0" indent="0" algn="l" rtl="0">
+              <a:spcBef>
+                <a:spcPts val="0"/>
+              </a:spcBef>
+              <a:spcAft>
+                <a:spcPts val="0"/>
+              </a:spcAft>
+              <a:buNone/>
+            </a:pPr>
+            <a:r>
+              <a:rPr lang="en-US" sz="1200" dirty="0">
+                <a:solidFill>
+                  <a:schemeClr val="dk1"/>
+                </a:solidFill>
+                <a:latin typeface="Calibri"/>
+                <a:ea typeface="Calibri"/>
+                <a:cs typeface="Calibri"/>
+                <a:sym typeface="Calibri"/>
+              </a:rPr>
+              <a:t>P(A|B)*P(B) = 80%*5% = 4%</a:t>
+            </a:r>
+            <a:endParaRPr sz="1200" dirty="0">
+              <a:solidFill>
+                <a:schemeClr val="dk1"/>
+              </a:solidFill>
+              <a:latin typeface="Calibri"/>
+              <a:ea typeface="Calibri"/>
+              <a:cs typeface="Calibri"/>
+              <a:sym typeface="Calibri"/>
+            </a:endParaRPr>
+          </a:p>
+          <a:p>
+            <a:pPr marL="0" marR="0" lvl="0" indent="0" algn="l" rtl="0">
+              <a:spcBef>
+                <a:spcPts val="0"/>
+              </a:spcBef>
+              <a:spcAft>
+                <a:spcPts val="0"/>
+              </a:spcAft>
+              <a:buNone/>
+            </a:pPr>
+            <a:r>
+              <a:rPr lang="en-US" sz="1200" dirty="0">
+                <a:solidFill>
+                  <a:schemeClr val="dk1"/>
+                </a:solidFill>
+                <a:latin typeface="Calibri"/>
+                <a:ea typeface="Calibri"/>
+                <a:cs typeface="Calibri"/>
+                <a:sym typeface="Calibri"/>
+              </a:rPr>
+              <a:t>P(B|A)*P(A) = 80%*5% = 4%</a:t>
+            </a:r>
+          </a:p>
+        </p:txBody>
+      </p:sp>
+      <p:sp>
+        <p:nvSpPr>
+          <p:cNvPr id="13" name="Google Shape;96;p13">
+            <a:extLst>
+              <a:ext uri="{FF2B5EF4-FFF2-40B4-BE49-F238E27FC236}">
+                <a16:creationId xmlns:a16="http://schemas.microsoft.com/office/drawing/2014/main" id="{569DD241-518F-8F46-AE6A-34E80876D3BC}"/>
+              </a:ext>
+            </a:extLst>
+          </p:cNvPr>
+          <p:cNvSpPr/>
+          <p:nvPr/>
+        </p:nvSpPr>
+        <p:spPr>
+          <a:xfrm>
+            <a:off x="1531632" y="4517792"/>
+            <a:ext cx="5033285" cy="2229852"/>
+          </a:xfrm>
+          <a:prstGeom prst="rect">
+            <a:avLst/>
+          </a:prstGeom>
+          <a:solidFill>
+            <a:srgbClr val="FBE4D4"/>
+          </a:solidFill>
+          <a:ln w="12700" cap="flat" cmpd="sng">
+            <a:solidFill>
+              <a:srgbClr val="31538F"/>
+            </a:solidFill>
+            <a:prstDash val="solid"/>
+            <a:miter lim="800000"/>
+            <a:headEnd type="none" w="sm" len="sm"/>
+            <a:tailEnd type="none" w="sm" len="sm"/>
+          </a:ln>
+        </p:spPr>
+        <p:txBody>
+          <a:bodyPr spcFirstLastPara="1" wrap="square" lIns="91425" tIns="45700" rIns="91425" bIns="45700" anchor="ctr" anchorCtr="0">
+            <a:noAutofit/>
+          </a:bodyPr>
+          <a:lstStyle/>
+          <a:p>
+            <a:pPr marL="0" marR="0" lvl="0" indent="0" algn="ctr" rtl="0">
+              <a:spcBef>
+                <a:spcPts val="0"/>
+              </a:spcBef>
+              <a:spcAft>
+                <a:spcPts val="0"/>
+              </a:spcAft>
+              <a:buNone/>
+            </a:pPr>
+            <a:endParaRPr sz="1800">
+              <a:solidFill>
+                <a:schemeClr val="lt1"/>
+              </a:solidFill>
+              <a:latin typeface="Calibri"/>
+              <a:ea typeface="Calibri"/>
+              <a:cs typeface="Calibri"/>
+              <a:sym typeface="Calibri"/>
+            </a:endParaRPr>
+          </a:p>
+        </p:txBody>
+      </p:sp>
+      <p:sp>
+        <p:nvSpPr>
+          <p:cNvPr id="14" name="Google Shape;97;p13">
+            <a:extLst>
+              <a:ext uri="{FF2B5EF4-FFF2-40B4-BE49-F238E27FC236}">
+                <a16:creationId xmlns:a16="http://schemas.microsoft.com/office/drawing/2014/main" id="{30AA5D0A-2560-CE4A-B38C-91AD69134962}"/>
+              </a:ext>
+            </a:extLst>
+          </p:cNvPr>
+          <p:cNvSpPr/>
+          <p:nvPr/>
+        </p:nvSpPr>
+        <p:spPr>
+          <a:xfrm>
+            <a:off x="4001705" y="5384791"/>
+            <a:ext cx="1397874" cy="900935"/>
+          </a:xfrm>
+          <a:prstGeom prst="ellipse">
+            <a:avLst/>
+          </a:prstGeom>
+          <a:solidFill>
+            <a:srgbClr val="FFC000"/>
+          </a:solidFill>
+          <a:ln w="12700" cap="flat" cmpd="sng">
+            <a:solidFill>
+              <a:srgbClr val="31538F"/>
+            </a:solidFill>
+            <a:prstDash val="solid"/>
+            <a:miter lim="800000"/>
+            <a:headEnd type="none" w="sm" len="sm"/>
+            <a:tailEnd type="none" w="sm" len="sm"/>
+          </a:ln>
+        </p:spPr>
+        <p:txBody>
+          <a:bodyPr spcFirstLastPara="1" wrap="square" lIns="91425" tIns="45700" rIns="91425" bIns="45700" anchor="ctr" anchorCtr="0">
+            <a:noAutofit/>
+          </a:bodyPr>
+          <a:lstStyle/>
+          <a:p>
+            <a:pPr marL="0" marR="0" lvl="0" indent="0" algn="ctr" rtl="0">
+              <a:spcBef>
+                <a:spcPts val="0"/>
+              </a:spcBef>
+              <a:spcAft>
+                <a:spcPts val="0"/>
+              </a:spcAft>
+              <a:buNone/>
+            </a:pPr>
+            <a:endParaRPr sz="1800">
+              <a:solidFill>
+                <a:schemeClr val="lt1"/>
+              </a:solidFill>
+              <a:latin typeface="Calibri"/>
+              <a:ea typeface="Calibri"/>
+              <a:cs typeface="Calibri"/>
+              <a:sym typeface="Calibri"/>
+            </a:endParaRPr>
+          </a:p>
+        </p:txBody>
+      </p:sp>
+      <p:sp>
+        <p:nvSpPr>
+          <p:cNvPr id="15" name="Google Shape;98;p13">
+            <a:extLst>
+              <a:ext uri="{FF2B5EF4-FFF2-40B4-BE49-F238E27FC236}">
+                <a16:creationId xmlns:a16="http://schemas.microsoft.com/office/drawing/2014/main" id="{655DB671-3DA8-B149-8288-4F8B78A39734}"/>
+              </a:ext>
+            </a:extLst>
+          </p:cNvPr>
+          <p:cNvSpPr/>
+          <p:nvPr/>
+        </p:nvSpPr>
+        <p:spPr>
+          <a:xfrm>
+            <a:off x="4351034" y="5254439"/>
+            <a:ext cx="1397874" cy="900935"/>
+          </a:xfrm>
+          <a:prstGeom prst="ellipse">
+            <a:avLst/>
+          </a:prstGeom>
+          <a:solidFill>
+            <a:srgbClr val="00B0F0">
+              <a:alpha val="40784"/>
+            </a:srgbClr>
+          </a:solidFill>
+          <a:ln w="12700" cap="flat" cmpd="sng">
+            <a:solidFill>
+              <a:srgbClr val="31538F"/>
+            </a:solidFill>
+            <a:prstDash val="solid"/>
+            <a:miter lim="800000"/>
+            <a:headEnd type="none" w="sm" len="sm"/>
+            <a:tailEnd type="none" w="sm" len="sm"/>
+          </a:ln>
+        </p:spPr>
+        <p:txBody>
+          <a:bodyPr spcFirstLastPara="1" wrap="square" lIns="91425" tIns="45700" rIns="91425" bIns="45700" anchor="ctr" anchorCtr="0">
+            <a:noAutofit/>
+          </a:bodyPr>
+          <a:lstStyle/>
+          <a:p>
+            <a:pPr marL="0" marR="0" lvl="0" indent="0" algn="ctr" rtl="0">
+              <a:spcBef>
+                <a:spcPts val="0"/>
+              </a:spcBef>
+              <a:spcAft>
+                <a:spcPts val="0"/>
+              </a:spcAft>
+              <a:buNone/>
+            </a:pPr>
+            <a:endParaRPr sz="1800">
+              <a:solidFill>
+                <a:schemeClr val="lt1"/>
+              </a:solidFill>
+              <a:latin typeface="Calibri"/>
+              <a:ea typeface="Calibri"/>
+              <a:cs typeface="Calibri"/>
+              <a:sym typeface="Calibri"/>
+            </a:endParaRPr>
+          </a:p>
+        </p:txBody>
+      </p:sp>
+      <p:sp>
+        <p:nvSpPr>
+          <p:cNvPr id="16" name="Google Shape;99;p13">
+            <a:extLst>
+              <a:ext uri="{FF2B5EF4-FFF2-40B4-BE49-F238E27FC236}">
+                <a16:creationId xmlns:a16="http://schemas.microsoft.com/office/drawing/2014/main" id="{E19F1E77-6C1D-CF40-A056-B5F0A0067705}"/>
+              </a:ext>
+            </a:extLst>
+          </p:cNvPr>
+          <p:cNvSpPr txBox="1"/>
+          <p:nvPr/>
+        </p:nvSpPr>
+        <p:spPr>
+          <a:xfrm>
+            <a:off x="4048274" y="5632718"/>
+            <a:ext cx="581015" cy="431253"/>
+          </a:xfrm>
+          <a:prstGeom prst="rect">
+            <a:avLst/>
+          </a:prstGeom>
+          <a:noFill/>
+          <a:ln>
+            <a:noFill/>
+          </a:ln>
+        </p:spPr>
+        <p:txBody>
+          <a:bodyPr spcFirstLastPara="1" wrap="square" lIns="91425" tIns="45700" rIns="91425" bIns="45700" anchor="t" anchorCtr="0">
+            <a:noAutofit/>
+          </a:bodyPr>
+          <a:lstStyle/>
+          <a:p>
+            <a:pPr marL="0" marR="0" lvl="0" indent="0" algn="l" rtl="0">
+              <a:spcBef>
+                <a:spcPts val="0"/>
+              </a:spcBef>
+              <a:spcAft>
+                <a:spcPts val="0"/>
+              </a:spcAft>
+              <a:buNone/>
+            </a:pPr>
+            <a:r>
+              <a:rPr lang="en-US" sz="2400" b="1" dirty="0">
+                <a:solidFill>
+                  <a:srgbClr val="FF0000"/>
+                </a:solidFill>
+                <a:latin typeface="Calibri"/>
+                <a:ea typeface="Calibri"/>
+                <a:cs typeface="Calibri"/>
+                <a:sym typeface="Calibri"/>
+              </a:rPr>
+              <a:t>A</a:t>
+            </a:r>
+            <a:endParaRPr sz="2400" b="1" dirty="0">
+              <a:solidFill>
+                <a:srgbClr val="FF0000"/>
+              </a:solidFill>
+              <a:latin typeface="Calibri"/>
+              <a:ea typeface="Calibri"/>
+              <a:cs typeface="Calibri"/>
+              <a:sym typeface="Calibri"/>
+            </a:endParaRPr>
+          </a:p>
+        </p:txBody>
+      </p:sp>
+      <p:sp>
+        <p:nvSpPr>
+          <p:cNvPr id="17" name="Google Shape;100;p13">
+            <a:extLst>
+              <a:ext uri="{FF2B5EF4-FFF2-40B4-BE49-F238E27FC236}">
+                <a16:creationId xmlns:a16="http://schemas.microsoft.com/office/drawing/2014/main" id="{61C18CBF-01D4-C848-A7B2-E04510A0F7B8}"/>
+              </a:ext>
+            </a:extLst>
+          </p:cNvPr>
+          <p:cNvSpPr txBox="1"/>
+          <p:nvPr/>
+        </p:nvSpPr>
+        <p:spPr>
+          <a:xfrm>
+            <a:off x="5379642" y="5384791"/>
+            <a:ext cx="640540" cy="433753"/>
+          </a:xfrm>
+          <a:prstGeom prst="rect">
+            <a:avLst/>
+          </a:prstGeom>
+          <a:noFill/>
+          <a:ln>
+            <a:noFill/>
+          </a:ln>
+        </p:spPr>
+        <p:txBody>
+          <a:bodyPr spcFirstLastPara="1" wrap="square" lIns="91425" tIns="45700" rIns="91425" bIns="45700" anchor="t" anchorCtr="0">
+            <a:noAutofit/>
+          </a:bodyPr>
+          <a:lstStyle/>
+          <a:p>
+            <a:pPr marL="0" marR="0" lvl="0" indent="0" algn="l" rtl="0">
+              <a:spcBef>
+                <a:spcPts val="0"/>
+              </a:spcBef>
+              <a:spcAft>
+                <a:spcPts val="0"/>
+              </a:spcAft>
+              <a:buNone/>
+            </a:pPr>
+            <a:r>
+              <a:rPr lang="en-US" sz="2400" b="1" dirty="0">
+                <a:solidFill>
+                  <a:srgbClr val="FF0000"/>
+                </a:solidFill>
+                <a:latin typeface="Calibri"/>
+                <a:ea typeface="Calibri"/>
+                <a:cs typeface="Calibri"/>
+                <a:sym typeface="Calibri"/>
+              </a:rPr>
+              <a:t>B</a:t>
+            </a:r>
+          </a:p>
+        </p:txBody>
+      </p:sp>
+      <p:sp>
+        <p:nvSpPr>
+          <p:cNvPr id="18" name="Google Shape;101;p13">
+            <a:extLst>
+              <a:ext uri="{FF2B5EF4-FFF2-40B4-BE49-F238E27FC236}">
+                <a16:creationId xmlns:a16="http://schemas.microsoft.com/office/drawing/2014/main" id="{C254AE81-7BEC-E24E-A3FD-EA1283594849}"/>
+              </a:ext>
+            </a:extLst>
+          </p:cNvPr>
+          <p:cNvSpPr txBox="1"/>
+          <p:nvPr/>
+        </p:nvSpPr>
+        <p:spPr>
+          <a:xfrm>
+            <a:off x="4701470" y="4500235"/>
+            <a:ext cx="1530878" cy="461665"/>
+          </a:xfrm>
+          <a:prstGeom prst="rect">
+            <a:avLst/>
+          </a:prstGeom>
+          <a:noFill/>
+          <a:ln>
+            <a:noFill/>
+          </a:ln>
+        </p:spPr>
+        <p:txBody>
+          <a:bodyPr spcFirstLastPara="1" wrap="square" lIns="91425" tIns="45700" rIns="91425" bIns="45700" anchor="t" anchorCtr="0">
+            <a:noAutofit/>
+          </a:bodyPr>
+          <a:lstStyle/>
+          <a:p>
+            <a:pPr marL="0" marR="0" lvl="0" indent="0" algn="l" rtl="0">
+              <a:spcBef>
+                <a:spcPts val="0"/>
+              </a:spcBef>
+              <a:spcAft>
+                <a:spcPts val="0"/>
+              </a:spcAft>
+              <a:buNone/>
+            </a:pPr>
+            <a:r>
+              <a:rPr lang="en-US" sz="2400" b="1" dirty="0">
+                <a:solidFill>
+                  <a:srgbClr val="FF0000"/>
+                </a:solidFill>
+                <a:latin typeface="Calibri"/>
+                <a:ea typeface="Calibri"/>
+                <a:cs typeface="Calibri"/>
+                <a:sym typeface="Calibri"/>
+              </a:rPr>
+              <a:t>All Drives</a:t>
+            </a:r>
+            <a:endParaRPr sz="2400" b="1" dirty="0">
+              <a:solidFill>
+                <a:srgbClr val="FF0000"/>
+              </a:solidFill>
+              <a:latin typeface="Calibri"/>
+              <a:ea typeface="Calibri"/>
+              <a:cs typeface="Calibri"/>
+              <a:sym typeface="Calibri"/>
+            </a:endParaRPr>
+          </a:p>
+        </p:txBody>
+      </p:sp>
+      <p:sp>
+        <p:nvSpPr>
+          <p:cNvPr id="19" name="TextBox 18">
+            <a:extLst>
+              <a:ext uri="{FF2B5EF4-FFF2-40B4-BE49-F238E27FC236}">
+                <a16:creationId xmlns:a16="http://schemas.microsoft.com/office/drawing/2014/main" id="{6E6E4C8B-2E60-5C46-9FFF-EB63ACF4895B}"/>
+              </a:ext>
+            </a:extLst>
+          </p:cNvPr>
+          <p:cNvSpPr txBox="1"/>
+          <p:nvPr/>
+        </p:nvSpPr>
+        <p:spPr>
+          <a:xfrm>
+            <a:off x="8930917" y="462807"/>
+            <a:ext cx="3119984" cy="1384995"/>
+          </a:xfrm>
+          <a:prstGeom prst="rect">
+            <a:avLst/>
+          </a:prstGeom>
+          <a:noFill/>
+        </p:spPr>
+        <p:txBody>
+          <a:bodyPr wrap="square" rtlCol="0">
+            <a:spAutoFit/>
+          </a:bodyPr>
+          <a:lstStyle/>
+          <a:p>
+            <a:r>
+              <a:rPr lang="en-US" b="1" dirty="0">
+                <a:solidFill>
+                  <a:srgbClr val="00B050"/>
+                </a:solidFill>
+                <a:latin typeface="Menlo" panose="020B0609030804020204" pitchFamily="49" charset="0"/>
+                <a:ea typeface="Menlo" panose="020B0609030804020204" pitchFamily="49" charset="0"/>
+                <a:cs typeface="Menlo" panose="020B0609030804020204" pitchFamily="49" charset="0"/>
+              </a:rPr>
+              <a:t>+-------+----------+------+</a:t>
+            </a:r>
+          </a:p>
+          <a:p>
+            <a:r>
+              <a:rPr lang="en-US" b="1" dirty="0">
+                <a:solidFill>
+                  <a:srgbClr val="00B050"/>
+                </a:solidFill>
+                <a:latin typeface="Menlo" panose="020B0609030804020204" pitchFamily="49" charset="0"/>
+                <a:ea typeface="Menlo" panose="020B0609030804020204" pitchFamily="49" charset="0"/>
+                <a:cs typeface="Menlo" panose="020B0609030804020204" pitchFamily="49" charset="0"/>
+              </a:rPr>
+              <a:t>|       | Damaged  |      |</a:t>
+            </a:r>
+          </a:p>
+          <a:p>
+            <a:r>
+              <a:rPr lang="en-US" b="1" dirty="0">
+                <a:solidFill>
+                  <a:srgbClr val="00B050"/>
+                </a:solidFill>
+                <a:latin typeface="Menlo" panose="020B0609030804020204" pitchFamily="49" charset="0"/>
+                <a:ea typeface="Menlo" panose="020B0609030804020204" pitchFamily="49" charset="0"/>
+                <a:cs typeface="Menlo" panose="020B0609030804020204" pitchFamily="49" charset="0"/>
+              </a:rPr>
+              <a:t>+-------+----------+------+</a:t>
+            </a:r>
+          </a:p>
+          <a:p>
+            <a:r>
+              <a:rPr lang="en-US" b="1" dirty="0">
+                <a:solidFill>
+                  <a:srgbClr val="00B050"/>
+                </a:solidFill>
+                <a:latin typeface="Menlo" panose="020B0609030804020204" pitchFamily="49" charset="0"/>
+                <a:ea typeface="Menlo" panose="020B0609030804020204" pitchFamily="49" charset="0"/>
+                <a:cs typeface="Menlo" panose="020B0609030804020204" pitchFamily="49" charset="0"/>
+              </a:rPr>
+              <a:t>|Coffee |  80      |  -   |</a:t>
+            </a:r>
+          </a:p>
+          <a:p>
+            <a:r>
+              <a:rPr lang="en-US" b="1" dirty="0">
+                <a:solidFill>
+                  <a:srgbClr val="00B050"/>
+                </a:solidFill>
+                <a:latin typeface="Menlo" panose="020B0609030804020204" pitchFamily="49" charset="0"/>
+                <a:ea typeface="Menlo" panose="020B0609030804020204" pitchFamily="49" charset="0"/>
+                <a:cs typeface="Menlo" panose="020B0609030804020204" pitchFamily="49" charset="0"/>
+              </a:rPr>
+              <a:t>|       |  20      |  -   |</a:t>
+            </a:r>
+          </a:p>
+          <a:p>
+            <a:r>
+              <a:rPr lang="en-US" b="1" dirty="0">
+                <a:solidFill>
+                  <a:srgbClr val="00B050"/>
+                </a:solidFill>
+                <a:latin typeface="Menlo" panose="020B0609030804020204" pitchFamily="49" charset="0"/>
+                <a:ea typeface="Menlo" panose="020B0609030804020204" pitchFamily="49" charset="0"/>
+                <a:cs typeface="Menlo" panose="020B0609030804020204" pitchFamily="49" charset="0"/>
+              </a:rPr>
+              <a:t>+-------+----------+------+</a:t>
+            </a:r>
+          </a:p>
+        </p:txBody>
+      </p:sp>
+    </p:spTree>
+    <p:extLst>
+      <p:ext uri="{BB962C8B-B14F-4D97-AF65-F5344CB8AC3E}">
+        <p14:creationId xmlns:p14="http://schemas.microsoft.com/office/powerpoint/2010/main" val="418091737"/>
+      </p:ext>
+    </p:extLst>
+  </p:cSld>
+  <p:clrMapOvr>
+    <a:masterClrMapping/>
+  </p:clrMapOvr>
+</p:sld>
+</file>
+
+<file path=ppt/slides/slide7.xml><?xml version="1.0" encoding="utf-8"?>
 <p:sld xmlns:a="http://schemas.openxmlformats.org/drawingml/2006/main" xmlns:r="http://schemas.openxmlformats.org/officeDocument/2006/relationships" xmlns:p="http://schemas.openxmlformats.org/presentationml/2006/main">
   <p:cSld>
     <p:spTree>
@@ -22824,7 +26313,7 @@
 </p:sld>
 </file>
 
-<file path=ppt/slides/slide6.xml><?xml version="1.0" encoding="utf-8"?>
+<file path=ppt/slides/slide8.xml><?xml version="1.0" encoding="utf-8"?>
 <p:sld xmlns:a="http://schemas.openxmlformats.org/drawingml/2006/main" xmlns:r="http://schemas.openxmlformats.org/officeDocument/2006/relationships" xmlns:p="http://schemas.openxmlformats.org/presentationml/2006/main">
   <p:cSld>
     <p:spTree>
@@ -24391,7 +27880,7 @@
 </p:sld>
 </file>
 
-<file path=ppt/slides/slide7.xml><?xml version="1.0" encoding="utf-8"?>
+<file path=ppt/slides/slide9.xml><?xml version="1.0" encoding="utf-8"?>
 <p:sld xmlns:a="http://schemas.openxmlformats.org/drawingml/2006/main" xmlns:r="http://schemas.openxmlformats.org/officeDocument/2006/relationships" xmlns:p="http://schemas.openxmlformats.org/presentationml/2006/main">
   <p:cSld>
     <p:spTree>
@@ -25340,1270 +28829,6 @@
     <p:extLst>
       <p:ext uri="{BB962C8B-B14F-4D97-AF65-F5344CB8AC3E}">
         <p14:creationId xmlns:p14="http://schemas.microsoft.com/office/powerpoint/2010/main" val="2024227266"/>
-      </p:ext>
-    </p:extLst>
-  </p:cSld>
-  <p:clrMapOvr>
-    <a:masterClrMapping/>
-  </p:clrMapOvr>
-</p:sld>
-</file>
-
-<file path=ppt/slides/slide8.xml><?xml version="1.0" encoding="utf-8"?>
-<p:sld xmlns:a="http://schemas.openxmlformats.org/drawingml/2006/main" xmlns:r="http://schemas.openxmlformats.org/officeDocument/2006/relationships" xmlns:p="http://schemas.openxmlformats.org/presentationml/2006/main">
-  <p:cSld>
-    <p:spTree>
-      <p:nvGrpSpPr>
-        <p:cNvPr id="1" name="Shape 87"/>
-        <p:cNvGrpSpPr/>
-        <p:nvPr/>
-      </p:nvGrpSpPr>
-      <p:grpSpPr>
-        <a:xfrm>
-          <a:off x="0" y="0"/>
-          <a:ext cx="0" cy="0"/>
-          <a:chOff x="0" y="0"/>
-          <a:chExt cx="0" cy="0"/>
-        </a:xfrm>
-      </p:grpSpPr>
-      <p:sp>
-        <p:nvSpPr>
-          <p:cNvPr id="18" name="Google Shape;107;p14">
-            <a:extLst>
-              <a:ext uri="{FF2B5EF4-FFF2-40B4-BE49-F238E27FC236}">
-                <a16:creationId xmlns:a16="http://schemas.microsoft.com/office/drawing/2014/main" id="{C2992640-6531-5D46-B219-A020079806DB}"/>
-              </a:ext>
-            </a:extLst>
-          </p:cNvPr>
-          <p:cNvSpPr txBox="1"/>
-          <p:nvPr/>
-        </p:nvSpPr>
-        <p:spPr>
-          <a:xfrm>
-            <a:off x="91343" y="40387"/>
-            <a:ext cx="5893822" cy="1137250"/>
-          </a:xfrm>
-          <a:prstGeom prst="rect">
-            <a:avLst/>
-          </a:prstGeom>
-          <a:noFill/>
-          <a:ln>
-            <a:noFill/>
-          </a:ln>
-        </p:spPr>
-        <p:txBody>
-          <a:bodyPr spcFirstLastPara="1" wrap="square" lIns="91425" tIns="45700" rIns="91425" bIns="45700" anchor="t" anchorCtr="0">
-            <a:noAutofit/>
-          </a:bodyPr>
-          <a:lstStyle/>
-          <a:p>
-            <a:pPr marL="0" marR="0" lvl="0" indent="0" algn="l" rtl="0">
-              <a:spcBef>
-                <a:spcPts val="0"/>
-              </a:spcBef>
-              <a:spcAft>
-                <a:spcPts val="0"/>
-              </a:spcAft>
-              <a:buNone/>
-            </a:pPr>
-            <a:r>
-              <a:rPr lang="en-US" sz="2800" b="1" dirty="0">
-                <a:solidFill>
-                  <a:schemeClr val="tx1"/>
-                </a:solidFill>
-                <a:latin typeface="Calibri" panose="020F0502020204030204" pitchFamily="34" charset="0"/>
-                <a:cs typeface="Calibri" panose="020F0502020204030204" pitchFamily="34" charset="0"/>
-                <a:sym typeface="Calibri"/>
-              </a:rPr>
-              <a:t>Bayesian network  </a:t>
-            </a:r>
-            <a:br>
-              <a:rPr lang="en-US" sz="2800" b="1" dirty="0">
-                <a:solidFill>
-                  <a:schemeClr val="tx1"/>
-                </a:solidFill>
-                <a:latin typeface="Calibri" panose="020F0502020204030204" pitchFamily="34" charset="0"/>
-                <a:cs typeface="Calibri" panose="020F0502020204030204" pitchFamily="34" charset="0"/>
-                <a:sym typeface="Calibri"/>
-              </a:rPr>
-            </a:br>
-            <a:r>
-              <a:rPr lang="en-US" sz="1800" dirty="0">
-                <a:solidFill>
-                  <a:schemeClr val="dk1"/>
-                </a:solidFill>
-                <a:latin typeface="Calibri"/>
-                <a:cs typeface="Calibri"/>
-                <a:sym typeface="Calibri"/>
-              </a:rPr>
-              <a:t>( a.k.a. Bayes network, belief network, Bayes(</a:t>
-            </a:r>
-            <a:r>
-              <a:rPr lang="en-US" sz="1800" dirty="0" err="1">
-                <a:solidFill>
-                  <a:schemeClr val="dk1"/>
-                </a:solidFill>
-                <a:latin typeface="Calibri"/>
-                <a:cs typeface="Calibri"/>
-                <a:sym typeface="Calibri"/>
-              </a:rPr>
-              <a:t>ian</a:t>
-            </a:r>
-            <a:r>
-              <a:rPr lang="en-US" sz="1800" dirty="0">
-                <a:solidFill>
-                  <a:schemeClr val="dk1"/>
-                </a:solidFill>
-                <a:latin typeface="Calibri"/>
-                <a:cs typeface="Calibri"/>
-                <a:sym typeface="Calibri"/>
-              </a:rPr>
-              <a:t>) model </a:t>
-            </a:r>
-          </a:p>
-          <a:p>
-            <a:pPr marL="0" marR="0" lvl="0" indent="0" algn="l" rtl="0">
-              <a:spcBef>
-                <a:spcPts val="0"/>
-              </a:spcBef>
-              <a:spcAft>
-                <a:spcPts val="0"/>
-              </a:spcAft>
-              <a:buNone/>
-            </a:pPr>
-            <a:r>
-              <a:rPr lang="en-US" sz="1800" dirty="0">
-                <a:solidFill>
-                  <a:schemeClr val="dk1"/>
-                </a:solidFill>
-                <a:latin typeface="Calibri"/>
-                <a:cs typeface="Calibri"/>
-                <a:sym typeface="Calibri"/>
-              </a:rPr>
-              <a:t>  or probabilistic directed acyclic graphical model )</a:t>
-            </a:r>
-            <a:r>
-              <a:rPr lang="en-US" sz="1800" dirty="0">
-                <a:solidFill>
-                  <a:schemeClr val="dk1"/>
-                </a:solidFill>
-                <a:latin typeface="Calibri"/>
-                <a:ea typeface="Calibri"/>
-                <a:cs typeface="Calibri"/>
-                <a:sym typeface="Calibri"/>
-              </a:rPr>
-              <a:t> </a:t>
-            </a:r>
-          </a:p>
-        </p:txBody>
-      </p:sp>
-      <p:pic>
-        <p:nvPicPr>
-          <p:cNvPr id="19" name="Google Shape;114;p14">
-            <a:extLst>
-              <a:ext uri="{FF2B5EF4-FFF2-40B4-BE49-F238E27FC236}">
-                <a16:creationId xmlns:a16="http://schemas.microsoft.com/office/drawing/2014/main" id="{6CEB8B6B-5D31-D04D-8340-CFFC67C74C71}"/>
-              </a:ext>
-            </a:extLst>
-          </p:cNvPr>
-          <p:cNvPicPr preferRelativeResize="0"/>
-          <p:nvPr/>
-        </p:nvPicPr>
-        <p:blipFill rotWithShape="1">
-          <a:blip r:embed="rId3" cstate="email">
-            <a:alphaModFix/>
-            <a:extLst>
-              <a:ext uri="{28A0092B-C50C-407E-A947-70E740481C1C}">
-                <a14:useLocalDpi xmlns:a14="http://schemas.microsoft.com/office/drawing/2010/main"/>
-              </a:ext>
-            </a:extLst>
-          </a:blip>
-          <a:srcRect/>
-          <a:stretch/>
-        </p:blipFill>
-        <p:spPr>
-          <a:xfrm>
-            <a:off x="8197746" y="817421"/>
-            <a:ext cx="1829483" cy="2128359"/>
-          </a:xfrm>
-          <a:prstGeom prst="rect">
-            <a:avLst/>
-          </a:prstGeom>
-          <a:noFill/>
-          <a:ln>
-            <a:noFill/>
-          </a:ln>
-        </p:spPr>
-      </p:pic>
-      <p:pic>
-        <p:nvPicPr>
-          <p:cNvPr id="1026" name="Picture 2" descr="A name for layered directed graph as in a fully-connected neural network -  Mathematics Stack Exchange">
-            <a:extLst>
-              <a:ext uri="{FF2B5EF4-FFF2-40B4-BE49-F238E27FC236}">
-                <a16:creationId xmlns:a16="http://schemas.microsoft.com/office/drawing/2014/main" id="{9F27D678-C094-7546-8A93-B3B6A7DC683E}"/>
-              </a:ext>
-            </a:extLst>
-          </p:cNvPr>
-          <p:cNvPicPr>
-            <a:picLocks noChangeAspect="1" noChangeArrowheads="1"/>
-          </p:cNvPicPr>
-          <p:nvPr/>
-        </p:nvPicPr>
-        <p:blipFill>
-          <a:blip r:embed="rId4" cstate="email">
-            <a:extLst>
-              <a:ext uri="{28A0092B-C50C-407E-A947-70E740481C1C}">
-                <a14:useLocalDpi xmlns:a14="http://schemas.microsoft.com/office/drawing/2010/main"/>
-              </a:ext>
-            </a:extLst>
-          </a:blip>
-          <a:srcRect/>
-          <a:stretch>
-            <a:fillRect/>
-          </a:stretch>
-        </p:blipFill>
-        <p:spPr bwMode="auto">
-          <a:xfrm>
-            <a:off x="7168176" y="3617627"/>
-            <a:ext cx="4388069" cy="2234581"/>
-          </a:xfrm>
-          <a:prstGeom prst="rect">
-            <a:avLst/>
-          </a:prstGeom>
-          <a:noFill/>
-          <a:extLst>
-            <a:ext uri="{909E8E84-426E-40DD-AFC4-6F175D3DCCD1}">
-              <a14:hiddenFill xmlns:a14="http://schemas.microsoft.com/office/drawing/2010/main">
-                <a:solidFill>
-                  <a:srgbClr val="FFFFFF"/>
-                </a:solidFill>
-              </a14:hiddenFill>
-            </a:ext>
-          </a:extLst>
-        </p:spPr>
-      </p:pic>
-      <p:sp>
-        <p:nvSpPr>
-          <p:cNvPr id="5" name="Google Shape;107;p14">
-            <a:extLst>
-              <a:ext uri="{FF2B5EF4-FFF2-40B4-BE49-F238E27FC236}">
-                <a16:creationId xmlns:a16="http://schemas.microsoft.com/office/drawing/2014/main" id="{341F2A09-BD6A-6E40-B245-BD73EC20CC51}"/>
-              </a:ext>
-            </a:extLst>
-          </p:cNvPr>
-          <p:cNvSpPr txBox="1"/>
-          <p:nvPr/>
-        </p:nvSpPr>
-        <p:spPr>
-          <a:xfrm>
-            <a:off x="91342" y="1416737"/>
-            <a:ext cx="6613415" cy="4401781"/>
-          </a:xfrm>
-          <a:prstGeom prst="rect">
-            <a:avLst/>
-          </a:prstGeom>
-          <a:noFill/>
-          <a:ln>
-            <a:noFill/>
-          </a:ln>
-        </p:spPr>
-        <p:txBody>
-          <a:bodyPr spcFirstLastPara="1" wrap="square" lIns="91425" tIns="45700" rIns="91425" bIns="45700" anchor="t" anchorCtr="0">
-            <a:noAutofit/>
-          </a:bodyPr>
-          <a:lstStyle/>
-          <a:p>
-            <a:pPr marL="0" marR="0" lvl="0" indent="0" algn="l" rtl="0">
-              <a:spcBef>
-                <a:spcPts val="0"/>
-              </a:spcBef>
-              <a:spcAft>
-                <a:spcPts val="0"/>
-              </a:spcAft>
-              <a:buNone/>
-            </a:pPr>
-            <a:r>
-              <a:rPr lang="en-US" sz="1800" b="1" dirty="0">
-                <a:solidFill>
-                  <a:schemeClr val="accent1"/>
-                </a:solidFill>
-                <a:latin typeface="Calibri" panose="020F0502020204030204" pitchFamily="34" charset="0"/>
-                <a:cs typeface="Calibri" panose="020F0502020204030204" pitchFamily="34" charset="0"/>
-                <a:sym typeface="Calibri"/>
-              </a:rPr>
-              <a:t>Bayesian network </a:t>
-            </a:r>
-            <a:r>
-              <a:rPr lang="en-US" sz="1800" dirty="0">
-                <a:solidFill>
-                  <a:schemeClr val="dk1"/>
-                </a:solidFill>
-                <a:latin typeface="Calibri"/>
-                <a:ea typeface="Calibri"/>
-                <a:cs typeface="Calibri"/>
-                <a:sym typeface="Calibri"/>
-              </a:rPr>
-              <a:t>is a probabilistic graphical model (a type of statistical model) that represents a set of random variables and their conditional dependencies via a directed acyclic graph (DAG). </a:t>
-            </a:r>
-          </a:p>
-          <a:p>
-            <a:pPr marL="0" marR="0" lvl="0" indent="0" algn="l" rtl="0">
-              <a:spcBef>
-                <a:spcPts val="0"/>
-              </a:spcBef>
-              <a:spcAft>
-                <a:spcPts val="0"/>
-              </a:spcAft>
-              <a:buNone/>
-            </a:pPr>
-            <a:endParaRPr lang="en-US" sz="1800" dirty="0">
-              <a:solidFill>
-                <a:schemeClr val="dk1"/>
-              </a:solidFill>
-              <a:latin typeface="Calibri"/>
-              <a:ea typeface="Calibri"/>
-              <a:cs typeface="Calibri"/>
-              <a:sym typeface="Calibri"/>
-            </a:endParaRPr>
-          </a:p>
-          <a:p>
-            <a:pPr marL="0" marR="0" lvl="0" indent="0" algn="l" rtl="0">
-              <a:spcBef>
-                <a:spcPts val="0"/>
-              </a:spcBef>
-              <a:spcAft>
-                <a:spcPts val="0"/>
-              </a:spcAft>
-              <a:buNone/>
-            </a:pPr>
-            <a:endParaRPr lang="en-US" sz="1800" dirty="0">
-              <a:solidFill>
-                <a:schemeClr val="dk1"/>
-              </a:solidFill>
-              <a:latin typeface="Calibri"/>
-              <a:ea typeface="Calibri"/>
-              <a:cs typeface="Calibri"/>
-              <a:sym typeface="Calibri"/>
-            </a:endParaRPr>
-          </a:p>
-          <a:p>
-            <a:pPr marL="0" marR="0" lvl="0" indent="0" algn="l" rtl="0">
-              <a:spcBef>
-                <a:spcPts val="0"/>
-              </a:spcBef>
-              <a:spcAft>
-                <a:spcPts val="0"/>
-              </a:spcAft>
-              <a:buNone/>
-            </a:pPr>
-            <a:endParaRPr sz="1800" dirty="0">
-              <a:solidFill>
-                <a:schemeClr val="dk1"/>
-              </a:solidFill>
-              <a:latin typeface="Calibri"/>
-              <a:ea typeface="Calibri"/>
-              <a:cs typeface="Calibri"/>
-              <a:sym typeface="Calibri"/>
-            </a:endParaRPr>
-          </a:p>
-          <a:p>
-            <a:pPr marL="0" marR="0" lvl="0" indent="0" algn="l" rtl="0">
-              <a:spcBef>
-                <a:spcPts val="0"/>
-              </a:spcBef>
-              <a:spcAft>
-                <a:spcPts val="0"/>
-              </a:spcAft>
-              <a:buNone/>
-            </a:pPr>
-            <a:endParaRPr lang="en-US" sz="1800" dirty="0">
-              <a:solidFill>
-                <a:schemeClr val="dk1"/>
-              </a:solidFill>
-              <a:latin typeface="Calibri"/>
-              <a:ea typeface="Calibri"/>
-              <a:cs typeface="Calibri"/>
-              <a:sym typeface="Calibri"/>
-            </a:endParaRPr>
-          </a:p>
-          <a:p>
-            <a:pPr marL="0" marR="0" lvl="0" indent="0" algn="l" rtl="0">
-              <a:spcBef>
-                <a:spcPts val="0"/>
-              </a:spcBef>
-              <a:spcAft>
-                <a:spcPts val="0"/>
-              </a:spcAft>
-              <a:buNone/>
-            </a:pPr>
-            <a:r>
-              <a:rPr lang="en-US" sz="1800" dirty="0">
-                <a:solidFill>
-                  <a:schemeClr val="dk1"/>
-                </a:solidFill>
-                <a:latin typeface="Calibri"/>
-                <a:ea typeface="Calibri"/>
-                <a:cs typeface="Calibri"/>
-                <a:sym typeface="Calibri"/>
-              </a:rPr>
-              <a:t>Example: </a:t>
-            </a:r>
-          </a:p>
-          <a:p>
-            <a:pPr lvl="0"/>
-            <a:r>
-              <a:rPr lang="en-US" sz="1800" dirty="0">
-                <a:solidFill>
-                  <a:schemeClr val="dk1"/>
-                </a:solidFill>
-                <a:latin typeface="Calibri"/>
-                <a:ea typeface="Calibri"/>
-                <a:cs typeface="Calibri"/>
-                <a:sym typeface="Calibri"/>
-              </a:rPr>
-              <a:t>    </a:t>
-            </a:r>
-            <a:r>
-              <a:rPr lang="en-US" sz="1800" b="1" dirty="0">
-                <a:solidFill>
-                  <a:srgbClr val="0070C0"/>
-                </a:solidFill>
-                <a:latin typeface="Calibri"/>
-                <a:ea typeface="Calibri"/>
-                <a:cs typeface="Calibri"/>
-                <a:sym typeface="Calibri"/>
-              </a:rPr>
-              <a:t>Deep Belief Networks </a:t>
-            </a:r>
-            <a:r>
-              <a:rPr lang="en-US" sz="1800" dirty="0">
-                <a:solidFill>
-                  <a:schemeClr val="dk1"/>
-                </a:solidFill>
-                <a:latin typeface="Calibri"/>
-                <a:ea typeface="Calibri"/>
-                <a:cs typeface="Calibri"/>
-                <a:sym typeface="Calibri"/>
-              </a:rPr>
-              <a:t>- made of layers of RBMs </a:t>
-            </a:r>
-          </a:p>
-          <a:p>
-            <a:pPr lvl="0"/>
-            <a:r>
-              <a:rPr lang="en-US" sz="1800" dirty="0">
-                <a:solidFill>
-                  <a:schemeClr val="dk1"/>
-                </a:solidFill>
-                <a:latin typeface="Calibri"/>
-                <a:ea typeface="Calibri"/>
-                <a:cs typeface="Calibri"/>
-                <a:sym typeface="Calibri"/>
-              </a:rPr>
-              <a:t>     each next layer (“B”) is trained on top of the previous layer (“A”).</a:t>
-            </a:r>
-          </a:p>
-          <a:p>
-            <a:pPr marL="0" marR="0" lvl="0" indent="0" algn="l" rtl="0">
-              <a:spcBef>
-                <a:spcPts val="0"/>
-              </a:spcBef>
-              <a:spcAft>
-                <a:spcPts val="0"/>
-              </a:spcAft>
-              <a:buNone/>
-            </a:pPr>
-            <a:endParaRPr lang="en-US" sz="1800" dirty="0">
-              <a:solidFill>
-                <a:schemeClr val="dk1"/>
-              </a:solidFill>
-              <a:latin typeface="Calibri"/>
-              <a:ea typeface="Calibri"/>
-              <a:cs typeface="Calibri"/>
-              <a:sym typeface="Calibri"/>
-            </a:endParaRPr>
-          </a:p>
-          <a:p>
-            <a:pPr marL="0" marR="0" lvl="0" indent="0" algn="l" rtl="0">
-              <a:spcBef>
-                <a:spcPts val="0"/>
-              </a:spcBef>
-              <a:spcAft>
-                <a:spcPts val="0"/>
-              </a:spcAft>
-              <a:buNone/>
-            </a:pPr>
-            <a:r>
-              <a:rPr lang="en-US" sz="1800" dirty="0">
-                <a:solidFill>
-                  <a:schemeClr val="dk1"/>
-                </a:solidFill>
-                <a:latin typeface="Calibri"/>
-                <a:ea typeface="Calibri"/>
-                <a:cs typeface="Calibri"/>
-                <a:sym typeface="Calibri"/>
-              </a:rPr>
-              <a:t>    Here </a:t>
-            </a:r>
-            <a:r>
-              <a:rPr lang="en-US" sz="1800" b="1" dirty="0">
-                <a:solidFill>
-                  <a:srgbClr val="0070C0"/>
-                </a:solidFill>
-                <a:latin typeface="Calibri"/>
-                <a:ea typeface="Calibri"/>
-                <a:cs typeface="Calibri"/>
-                <a:sym typeface="Calibri"/>
-              </a:rPr>
-              <a:t>RBM</a:t>
-            </a:r>
-            <a:r>
-              <a:rPr lang="en-US" sz="1800" dirty="0">
-                <a:solidFill>
-                  <a:schemeClr val="dk1"/>
-                </a:solidFill>
-                <a:latin typeface="Calibri"/>
-                <a:ea typeface="Calibri"/>
-                <a:cs typeface="Calibri"/>
-                <a:sym typeface="Calibri"/>
-              </a:rPr>
-              <a:t> (Restricted Boltzmann Machine) - a two-layered artificial neural network.</a:t>
-            </a:r>
-          </a:p>
-        </p:txBody>
-      </p:sp>
-    </p:spTree>
-    <p:extLst>
-      <p:ext uri="{BB962C8B-B14F-4D97-AF65-F5344CB8AC3E}">
-        <p14:creationId xmlns:p14="http://schemas.microsoft.com/office/powerpoint/2010/main" val="4205312314"/>
-      </p:ext>
-    </p:extLst>
-  </p:cSld>
-  <p:clrMapOvr>
-    <a:masterClrMapping/>
-  </p:clrMapOvr>
-</p:sld>
-</file>
-
-<file path=ppt/slides/slide9.xml><?xml version="1.0" encoding="utf-8"?>
-<p:sld xmlns:a="http://schemas.openxmlformats.org/drawingml/2006/main" xmlns:r="http://schemas.openxmlformats.org/officeDocument/2006/relationships" xmlns:p="http://schemas.openxmlformats.org/presentationml/2006/main">
-  <p:cSld>
-    <p:spTree>
-      <p:nvGrpSpPr>
-        <p:cNvPr id="1" name="Shape 87"/>
-        <p:cNvGrpSpPr/>
-        <p:nvPr/>
-      </p:nvGrpSpPr>
-      <p:grpSpPr>
-        <a:xfrm>
-          <a:off x="0" y="0"/>
-          <a:ext cx="0" cy="0"/>
-          <a:chOff x="0" y="0"/>
-          <a:chExt cx="0" cy="0"/>
-        </a:xfrm>
-      </p:grpSpPr>
-      <p:sp>
-        <p:nvSpPr>
-          <p:cNvPr id="17" name="Google Shape;113;p14">
-            <a:extLst>
-              <a:ext uri="{FF2B5EF4-FFF2-40B4-BE49-F238E27FC236}">
-                <a16:creationId xmlns:a16="http://schemas.microsoft.com/office/drawing/2014/main" id="{686E86FA-5888-014D-BB3F-938CE5095920}"/>
-              </a:ext>
-            </a:extLst>
-          </p:cNvPr>
-          <p:cNvSpPr txBox="1"/>
-          <p:nvPr/>
-        </p:nvSpPr>
-        <p:spPr>
-          <a:xfrm>
-            <a:off x="0" y="126766"/>
-            <a:ext cx="3658586" cy="551152"/>
-          </a:xfrm>
-          <a:prstGeom prst="rect">
-            <a:avLst/>
-          </a:prstGeom>
-          <a:noFill/>
-          <a:ln>
-            <a:noFill/>
-          </a:ln>
-        </p:spPr>
-        <p:txBody>
-          <a:bodyPr spcFirstLastPara="1" wrap="square" lIns="91425" tIns="45700" rIns="91425" bIns="45700" anchor="t" anchorCtr="0">
-            <a:noAutofit/>
-          </a:bodyPr>
-          <a:lstStyle/>
-          <a:p>
-            <a:pPr marL="0" marR="0" lvl="0" indent="0" algn="l" rtl="0">
-              <a:spcBef>
-                <a:spcPts val="0"/>
-              </a:spcBef>
-              <a:spcAft>
-                <a:spcPts val="0"/>
-              </a:spcAft>
-              <a:buNone/>
-            </a:pPr>
-            <a:r>
-              <a:rPr lang="en-US" sz="2800" b="1" dirty="0">
-                <a:solidFill>
-                  <a:schemeClr val="tx1"/>
-                </a:solidFill>
-                <a:latin typeface="Calibri" panose="020F0502020204030204" pitchFamily="34" charset="0"/>
-                <a:cs typeface="Calibri" panose="020F0502020204030204" pitchFamily="34" charset="0"/>
-                <a:sym typeface="Calibri"/>
-              </a:rPr>
-              <a:t>Bayesian Optimization </a:t>
-            </a:r>
-            <a:endParaRPr sz="2800" b="1" dirty="0">
-              <a:solidFill>
-                <a:schemeClr val="tx1"/>
-              </a:solidFill>
-              <a:latin typeface="Calibri" panose="020F0502020204030204" pitchFamily="34" charset="0"/>
-              <a:cs typeface="Calibri" panose="020F0502020204030204" pitchFamily="34" charset="0"/>
-              <a:sym typeface="Calibri"/>
-            </a:endParaRPr>
-          </a:p>
-        </p:txBody>
-      </p:sp>
-      <p:pic>
-        <p:nvPicPr>
-          <p:cNvPr id="2050" name="Picture 2" descr="Hyperparameter Optimization in Gradient Boosting Packages with Bayesian  Optimization | by Osman Mamun | Towards Data Science">
-            <a:extLst>
-              <a:ext uri="{FF2B5EF4-FFF2-40B4-BE49-F238E27FC236}">
-                <a16:creationId xmlns:a16="http://schemas.microsoft.com/office/drawing/2014/main" id="{EF78F114-FFE9-BC45-8BB7-ED043E81B013}"/>
-              </a:ext>
-            </a:extLst>
-          </p:cNvPr>
-          <p:cNvPicPr>
-            <a:picLocks noChangeAspect="1" noChangeArrowheads="1"/>
-          </p:cNvPicPr>
-          <p:nvPr/>
-        </p:nvPicPr>
-        <p:blipFill>
-          <a:blip r:embed="rId3" cstate="email">
-            <a:extLst>
-              <a:ext uri="{28A0092B-C50C-407E-A947-70E740481C1C}">
-                <a14:useLocalDpi xmlns:a14="http://schemas.microsoft.com/office/drawing/2010/main"/>
-              </a:ext>
-            </a:extLst>
-          </a:blip>
-          <a:srcRect/>
-          <a:stretch>
-            <a:fillRect/>
-          </a:stretch>
-        </p:blipFill>
-        <p:spPr bwMode="auto">
-          <a:xfrm>
-            <a:off x="6761230" y="53213"/>
-            <a:ext cx="5364210" cy="3256519"/>
-          </a:xfrm>
-          <a:prstGeom prst="rect">
-            <a:avLst/>
-          </a:prstGeom>
-          <a:noFill/>
-          <a:extLst>
-            <a:ext uri="{909E8E84-426E-40DD-AFC4-6F175D3DCCD1}">
-              <a14:hiddenFill xmlns:a14="http://schemas.microsoft.com/office/drawing/2010/main">
-                <a:solidFill>
-                  <a:srgbClr val="FFFFFF"/>
-                </a:solidFill>
-              </a14:hiddenFill>
-            </a:ext>
-          </a:extLst>
-        </p:spPr>
-      </p:pic>
-      <p:sp>
-        <p:nvSpPr>
-          <p:cNvPr id="10" name="Google Shape;113;p14">
-            <a:extLst>
-              <a:ext uri="{FF2B5EF4-FFF2-40B4-BE49-F238E27FC236}">
-                <a16:creationId xmlns:a16="http://schemas.microsoft.com/office/drawing/2014/main" id="{FC61AB3C-FF8E-7841-94D9-DEA2A67A3658}"/>
-              </a:ext>
-            </a:extLst>
-          </p:cNvPr>
-          <p:cNvSpPr txBox="1"/>
-          <p:nvPr/>
-        </p:nvSpPr>
-        <p:spPr>
-          <a:xfrm>
-            <a:off x="79812" y="677917"/>
-            <a:ext cx="5804153" cy="6053317"/>
-          </a:xfrm>
-          <a:prstGeom prst="rect">
-            <a:avLst/>
-          </a:prstGeom>
-          <a:noFill/>
-          <a:ln>
-            <a:noFill/>
-          </a:ln>
-        </p:spPr>
-        <p:txBody>
-          <a:bodyPr spcFirstLastPara="1" wrap="square" lIns="91425" tIns="45700" rIns="91425" bIns="45700" anchor="t" anchorCtr="0">
-            <a:noAutofit/>
-          </a:bodyPr>
-          <a:lstStyle/>
-          <a:p>
-            <a:pPr lvl="0"/>
-            <a:r>
-              <a:rPr lang="en-US" b="1" dirty="0">
-                <a:solidFill>
-                  <a:srgbClr val="FF0000"/>
-                </a:solidFill>
-                <a:latin typeface="Calibri"/>
-                <a:ea typeface="Calibri"/>
-                <a:cs typeface="Calibri"/>
-                <a:sym typeface="Calibri"/>
-              </a:rPr>
-              <a:t>Bayesian Optimization</a:t>
-            </a:r>
-            <a:r>
-              <a:rPr lang="en-US" dirty="0">
-                <a:solidFill>
-                  <a:schemeClr val="dk1"/>
-                </a:solidFill>
-                <a:latin typeface="Calibri"/>
-                <a:ea typeface="Calibri"/>
-                <a:cs typeface="Calibri"/>
-                <a:sym typeface="Calibri"/>
-              </a:rPr>
-              <a:t> is a sequential optimization strategy. </a:t>
-            </a:r>
-          </a:p>
-          <a:p>
-            <a:pPr marL="0" marR="0" lvl="0" indent="0" algn="l" rtl="0">
-              <a:spcBef>
-                <a:spcPts val="0"/>
-              </a:spcBef>
-              <a:spcAft>
-                <a:spcPts val="0"/>
-              </a:spcAft>
-              <a:buNone/>
-            </a:pPr>
-            <a:r>
-              <a:rPr lang="en-US" dirty="0">
-                <a:solidFill>
-                  <a:schemeClr val="dk1"/>
-                </a:solidFill>
-                <a:latin typeface="Calibri"/>
-                <a:ea typeface="Calibri"/>
-                <a:cs typeface="Calibri"/>
-                <a:sym typeface="Calibri"/>
-              </a:rPr>
-              <a:t>Optimizing a black-box system without calculatin</a:t>
-            </a:r>
-            <a:r>
-              <a:rPr lang="en-US" dirty="0">
-                <a:solidFill>
-                  <a:schemeClr val="dk1"/>
-                </a:solidFill>
-                <a:latin typeface="Calibri"/>
-                <a:cs typeface="Calibri"/>
-                <a:sym typeface="Calibri"/>
-              </a:rPr>
-              <a:t>g derivatives.</a:t>
-            </a:r>
-          </a:p>
-          <a:p>
-            <a:pPr marL="0" marR="0" lvl="0" indent="0" algn="l" rtl="0">
-              <a:spcBef>
-                <a:spcPts val="0"/>
-              </a:spcBef>
-              <a:spcAft>
-                <a:spcPts val="0"/>
-              </a:spcAft>
-              <a:buNone/>
-            </a:pPr>
-            <a:endParaRPr lang="en-US" dirty="0">
-              <a:solidFill>
-                <a:schemeClr val="dk1"/>
-              </a:solidFill>
-              <a:latin typeface="Calibri"/>
-              <a:cs typeface="Calibri"/>
-              <a:sym typeface="Calibri"/>
-            </a:endParaRPr>
-          </a:p>
-          <a:p>
-            <a:r>
-              <a:rPr lang="en-US" b="1" dirty="0">
-                <a:solidFill>
-                  <a:srgbClr val="FF0000"/>
-                </a:solidFill>
-                <a:latin typeface="Calibri"/>
-                <a:ea typeface="Calibri"/>
-                <a:cs typeface="Calibri"/>
-                <a:sym typeface="Calibri"/>
-              </a:rPr>
-              <a:t>Bayesian Optimization</a:t>
-            </a:r>
-            <a:r>
-              <a:rPr lang="en-US" dirty="0">
-                <a:solidFill>
-                  <a:schemeClr val="dk1"/>
-                </a:solidFill>
-                <a:latin typeface="Calibri"/>
-                <a:cs typeface="Calibri"/>
-              </a:rPr>
-              <a:t> is typically used to find  optimal hyperparameters for Machine Learning models (it is better than </a:t>
-            </a:r>
-            <a:r>
-              <a:rPr lang="en-US" b="1" dirty="0">
-                <a:solidFill>
-                  <a:srgbClr val="0070C0"/>
-                </a:solidFill>
-                <a:latin typeface="Calibri"/>
-                <a:cs typeface="Calibri"/>
-              </a:rPr>
-              <a:t>grid search</a:t>
-            </a:r>
-            <a:r>
-              <a:rPr lang="en-US" dirty="0">
-                <a:solidFill>
-                  <a:schemeClr val="dk1"/>
-                </a:solidFill>
-                <a:latin typeface="Calibri"/>
-                <a:cs typeface="Calibri"/>
-              </a:rPr>
-              <a:t> or </a:t>
-            </a:r>
-            <a:r>
-              <a:rPr lang="en-US" b="1" dirty="0">
-                <a:solidFill>
-                  <a:srgbClr val="0070C0"/>
-                </a:solidFill>
-                <a:latin typeface="Calibri"/>
-                <a:cs typeface="Calibri"/>
-              </a:rPr>
-              <a:t>random search</a:t>
-            </a:r>
-            <a:r>
-              <a:rPr lang="en-US" dirty="0">
-                <a:solidFill>
-                  <a:schemeClr val="dk1"/>
-                </a:solidFill>
-                <a:latin typeface="Calibri"/>
-                <a:cs typeface="Calibri"/>
-              </a:rPr>
-              <a:t>).</a:t>
-            </a:r>
-          </a:p>
-          <a:p>
-            <a:pPr marL="0" marR="0" lvl="0" indent="0" algn="l" rtl="0">
-              <a:spcBef>
-                <a:spcPts val="0"/>
-              </a:spcBef>
-              <a:spcAft>
-                <a:spcPts val="0"/>
-              </a:spcAft>
-              <a:buNone/>
-            </a:pPr>
-            <a:endParaRPr lang="en-US" dirty="0">
-              <a:solidFill>
-                <a:schemeClr val="dk1"/>
-              </a:solidFill>
-              <a:latin typeface="Calibri"/>
-              <a:cs typeface="Calibri"/>
-              <a:sym typeface="Calibri"/>
-            </a:endParaRPr>
-          </a:p>
-          <a:p>
-            <a:pPr lvl="0"/>
-            <a:r>
-              <a:rPr lang="en-US" b="1" dirty="0">
-                <a:solidFill>
-                  <a:srgbClr val="FF0000"/>
-                </a:solidFill>
-                <a:latin typeface="Calibri"/>
-                <a:ea typeface="Calibri"/>
-                <a:cs typeface="Calibri"/>
-                <a:sym typeface="Calibri"/>
-              </a:rPr>
-              <a:t>Bayesian Optimization</a:t>
-            </a:r>
-            <a:r>
-              <a:rPr lang="en-US" dirty="0">
-                <a:solidFill>
-                  <a:schemeClr val="dk1"/>
-                </a:solidFill>
-                <a:latin typeface="Calibri"/>
-                <a:cs typeface="Calibri"/>
-                <a:sym typeface="Calibri"/>
-              </a:rPr>
-              <a:t> works by constructing a posterior distribution of functions (</a:t>
-            </a:r>
-            <a:r>
-              <a:rPr lang="en-US" b="1" dirty="0">
-                <a:solidFill>
-                  <a:srgbClr val="0070C0"/>
-                </a:solidFill>
-                <a:latin typeface="Calibri"/>
-                <a:cs typeface="Calibri"/>
-                <a:sym typeface="Calibri"/>
-              </a:rPr>
-              <a:t>Gaussian Process</a:t>
-            </a:r>
-            <a:r>
-              <a:rPr lang="en-US" dirty="0">
-                <a:solidFill>
-                  <a:schemeClr val="dk1"/>
-                </a:solidFill>
-                <a:latin typeface="Calibri"/>
-                <a:cs typeface="Calibri"/>
-                <a:sym typeface="Calibri"/>
-              </a:rPr>
-              <a:t>) that best describes the function you want to optimize. As the number of observations grows, the posterior distribution improves, and the algorithm becomes more certain of which regions in parameter space are worth exploring and which are not.</a:t>
-            </a:r>
-          </a:p>
-          <a:p>
-            <a:pPr lvl="0"/>
-            <a:endParaRPr lang="en-US" dirty="0">
-              <a:solidFill>
-                <a:schemeClr val="dk1"/>
-              </a:solidFill>
-              <a:latin typeface="Calibri"/>
-              <a:cs typeface="Calibri"/>
-              <a:sym typeface="Calibri"/>
-            </a:endParaRPr>
-          </a:p>
-          <a:p>
-            <a:pPr lvl="0"/>
-            <a:r>
-              <a:rPr lang="en-US" dirty="0">
-                <a:solidFill>
-                  <a:schemeClr val="dk1"/>
-                </a:solidFill>
-                <a:latin typeface="Calibri"/>
-                <a:cs typeface="Calibri"/>
-                <a:sym typeface="Calibri"/>
-              </a:rPr>
-              <a:t>As you iterate over and over, the algorithm balances its needs of exploration and exploitation taking into account what it knows about the target function. At each step a </a:t>
-            </a:r>
-            <a:r>
-              <a:rPr lang="en-US" b="1" dirty="0">
-                <a:solidFill>
-                  <a:srgbClr val="0070C0"/>
-                </a:solidFill>
-                <a:latin typeface="Calibri"/>
-                <a:cs typeface="Calibri"/>
-                <a:sym typeface="Calibri"/>
-              </a:rPr>
-              <a:t>Gaussian Process</a:t>
-            </a:r>
-            <a:r>
-              <a:rPr lang="en-US" dirty="0">
-                <a:solidFill>
-                  <a:schemeClr val="dk1"/>
-                </a:solidFill>
-                <a:latin typeface="Calibri"/>
-                <a:cs typeface="Calibri"/>
-                <a:sym typeface="Calibri"/>
-              </a:rPr>
-              <a:t> is fitted to the known samples (points previously explored), and the posterior distribution, combined with a exploration strategy are used to determine </a:t>
-            </a:r>
-            <a:r>
-              <a:rPr lang="en-US" b="1" dirty="0">
-                <a:solidFill>
-                  <a:srgbClr val="0070C0"/>
-                </a:solidFill>
-                <a:latin typeface="Calibri"/>
-                <a:cs typeface="Calibri"/>
-                <a:sym typeface="Calibri"/>
-              </a:rPr>
-              <a:t>the next point that should be explored</a:t>
-            </a:r>
-            <a:r>
-              <a:rPr lang="en-US" dirty="0">
-                <a:solidFill>
-                  <a:schemeClr val="dk1"/>
-                </a:solidFill>
-                <a:latin typeface="Calibri"/>
-                <a:cs typeface="Calibri"/>
-                <a:sym typeface="Calibri"/>
-              </a:rPr>
-              <a:t>.</a:t>
-            </a:r>
-          </a:p>
-          <a:p>
-            <a:pPr lvl="0"/>
-            <a:endParaRPr lang="en-US" dirty="0">
-              <a:solidFill>
-                <a:schemeClr val="dk1"/>
-              </a:solidFill>
-              <a:latin typeface="Calibri"/>
-              <a:cs typeface="Calibri"/>
-              <a:sym typeface="Calibri"/>
-            </a:endParaRPr>
-          </a:p>
-          <a:p>
-            <a:pPr lvl="0"/>
-            <a:r>
-              <a:rPr lang="en-US" dirty="0">
-                <a:solidFill>
-                  <a:schemeClr val="dk1"/>
-                </a:solidFill>
-                <a:latin typeface="Calibri"/>
-                <a:cs typeface="Calibri"/>
-                <a:sym typeface="Calibri"/>
-              </a:rPr>
-              <a:t>This process is designed to minimize the number of steps required to find a combination of parameters that are close to the optimal combination.</a:t>
-            </a:r>
-          </a:p>
-          <a:p>
-            <a:pPr lvl="0"/>
-            <a:endParaRPr lang="en-US" dirty="0">
-              <a:solidFill>
-                <a:schemeClr val="dk1"/>
-              </a:solidFill>
-              <a:latin typeface="Calibri"/>
-              <a:cs typeface="Calibri"/>
-            </a:endParaRPr>
-          </a:p>
-          <a:p>
-            <a:pPr lvl="0"/>
-            <a:r>
-              <a:rPr lang="en-US" dirty="0">
-                <a:solidFill>
-                  <a:schemeClr val="dk1"/>
-                </a:solidFill>
-                <a:latin typeface="Calibri"/>
-                <a:cs typeface="Calibri"/>
-              </a:rPr>
-              <a:t>Example:</a:t>
-            </a:r>
-          </a:p>
-          <a:p>
-            <a:pPr marL="285750" lvl="0" indent="-285750">
-              <a:buFont typeface="Arial" panose="020B0604020202020204" pitchFamily="34" charset="0"/>
-              <a:buChar char="•"/>
-            </a:pPr>
-            <a:r>
-              <a:rPr lang="en-US" dirty="0">
-                <a:solidFill>
-                  <a:schemeClr val="dk1"/>
-                </a:solidFill>
-                <a:latin typeface="Calibri"/>
-                <a:cs typeface="Calibri"/>
-                <a:hlinkClick r:id="rId4"/>
-              </a:rPr>
-              <a:t>https://towardsdatascience.com/hyperparameter-optimization-in-gradient-boosting-packages-with-bayesian-optimization-aaf1b27e7b90</a:t>
-            </a:r>
-            <a:r>
-              <a:rPr lang="en-US" dirty="0">
-                <a:solidFill>
-                  <a:schemeClr val="dk1"/>
-                </a:solidFill>
-                <a:latin typeface="Calibri"/>
-                <a:cs typeface="Calibri"/>
-              </a:rPr>
-              <a:t> </a:t>
-            </a:r>
-          </a:p>
-          <a:p>
-            <a:pPr lvl="0"/>
-            <a:endParaRPr lang="en-US" dirty="0">
-              <a:solidFill>
-                <a:schemeClr val="dk1"/>
-              </a:solidFill>
-              <a:latin typeface="Calibri"/>
-              <a:cs typeface="Calibri"/>
-            </a:endParaRPr>
-          </a:p>
-          <a:p>
-            <a:pPr marL="285750" lvl="0" indent="-285750">
-              <a:buFont typeface="Arial" panose="020B0604020202020204" pitchFamily="34" charset="0"/>
-              <a:buChar char="•"/>
-            </a:pPr>
-            <a:r>
-              <a:rPr lang="en-US" dirty="0">
-                <a:solidFill>
-                  <a:schemeClr val="dk1"/>
-                </a:solidFill>
-                <a:latin typeface="Calibri"/>
-                <a:cs typeface="Calibri"/>
-                <a:hlinkClick r:id="rId5"/>
-              </a:rPr>
-              <a:t>https://github.com/fmfn/BayesianOptimization</a:t>
-            </a:r>
-            <a:r>
-              <a:rPr lang="en-US" dirty="0">
-                <a:solidFill>
-                  <a:schemeClr val="dk1"/>
-                </a:solidFill>
-                <a:latin typeface="Calibri"/>
-                <a:cs typeface="Calibri"/>
-              </a:rPr>
-              <a:t> </a:t>
-            </a:r>
-            <a:endParaRPr dirty="0">
-              <a:solidFill>
-                <a:schemeClr val="dk1"/>
-              </a:solidFill>
-              <a:latin typeface="Calibri"/>
-              <a:cs typeface="Calibri"/>
-            </a:endParaRPr>
-          </a:p>
-        </p:txBody>
-      </p:sp>
-      <p:sp>
-        <p:nvSpPr>
-          <p:cNvPr id="2" name="TextBox 1">
-            <a:extLst>
-              <a:ext uri="{FF2B5EF4-FFF2-40B4-BE49-F238E27FC236}">
-                <a16:creationId xmlns:a16="http://schemas.microsoft.com/office/drawing/2014/main" id="{BB66F01F-0498-204C-B082-40A9BFF950D5}"/>
-              </a:ext>
-            </a:extLst>
-          </p:cNvPr>
-          <p:cNvSpPr txBox="1"/>
-          <p:nvPr/>
-        </p:nvSpPr>
-        <p:spPr>
-          <a:xfrm>
-            <a:off x="6308037" y="3497460"/>
-            <a:ext cx="5870711" cy="3323987"/>
-          </a:xfrm>
-          <a:prstGeom prst="rect">
-            <a:avLst/>
-          </a:prstGeom>
-          <a:noFill/>
-        </p:spPr>
-        <p:txBody>
-          <a:bodyPr wrap="square" rtlCol="0">
-            <a:spAutoFit/>
-          </a:bodyPr>
-          <a:lstStyle/>
-          <a:p>
-            <a:r>
-              <a:rPr lang="en-US" dirty="0"/>
-              <a:t>Note:</a:t>
-            </a:r>
-          </a:p>
-          <a:p>
-            <a:pPr marL="285750" indent="-285750">
-              <a:buFont typeface="Arial" panose="020B0604020202020204" pitchFamily="34" charset="0"/>
-              <a:buChar char="•"/>
-            </a:pPr>
-            <a:r>
-              <a:rPr lang="en-US" b="1" dirty="0">
-                <a:solidFill>
-                  <a:srgbClr val="0070C0"/>
-                </a:solidFill>
-              </a:rPr>
-              <a:t>Gaussian Process</a:t>
-            </a:r>
-            <a:r>
-              <a:rPr lang="en-US" dirty="0"/>
-              <a:t> is a stochastic process (a collection of random variables indexed by time or space), such that every finite collection of those random variables has a multivariate normal distribution. </a:t>
-            </a:r>
-          </a:p>
-          <a:p>
-            <a:pPr marL="285750" indent="-285750">
-              <a:buFont typeface="Arial" panose="020B0604020202020204" pitchFamily="34" charset="0"/>
-              <a:buChar char="•"/>
-            </a:pPr>
-            <a:r>
-              <a:rPr lang="en-US" dirty="0"/>
-              <a:t>A machine-learning algorithm that involves a </a:t>
-            </a:r>
-            <a:r>
-              <a:rPr lang="en-US" b="1" dirty="0">
-                <a:solidFill>
-                  <a:srgbClr val="0070C0"/>
-                </a:solidFill>
-              </a:rPr>
-              <a:t>Gaussian Process</a:t>
-            </a:r>
-            <a:r>
-              <a:rPr lang="en-US" dirty="0"/>
-              <a:t> uses </a:t>
-            </a:r>
-            <a:r>
-              <a:rPr lang="en-US" b="1" dirty="0">
-                <a:solidFill>
-                  <a:srgbClr val="00B050"/>
-                </a:solidFill>
-              </a:rPr>
-              <a:t>lazy learning</a:t>
-            </a:r>
-            <a:r>
-              <a:rPr lang="en-US" dirty="0"/>
-              <a:t> and a </a:t>
-            </a:r>
-            <a:r>
-              <a:rPr lang="en-US" b="1" dirty="0">
-                <a:solidFill>
-                  <a:srgbClr val="00B050"/>
-                </a:solidFill>
-              </a:rPr>
-              <a:t>measure of the similarity between points</a:t>
-            </a:r>
-            <a:r>
-              <a:rPr lang="en-US" dirty="0"/>
-              <a:t> (the kernel function) to predict the value for an unseen point from training data. </a:t>
-            </a:r>
-          </a:p>
-          <a:p>
-            <a:pPr marL="285750" indent="-285750">
-              <a:buFont typeface="Arial" panose="020B0604020202020204" pitchFamily="34" charset="0"/>
-              <a:buChar char="•"/>
-            </a:pPr>
-            <a:r>
-              <a:rPr lang="en-US" dirty="0"/>
-              <a:t>The prediction is not just an estimate for that point, but also has </a:t>
-            </a:r>
-            <a:r>
-              <a:rPr lang="en-US" b="1" dirty="0">
-                <a:solidFill>
-                  <a:srgbClr val="00B050"/>
-                </a:solidFill>
-              </a:rPr>
-              <a:t>uncertainty information</a:t>
-            </a:r>
-            <a:r>
-              <a:rPr lang="en-US" dirty="0"/>
-              <a:t> (it is a Gaussian distribution). </a:t>
-            </a:r>
-          </a:p>
-          <a:p>
-            <a:pPr marL="285750" indent="-285750">
-              <a:buFont typeface="Arial" panose="020B0604020202020204" pitchFamily="34" charset="0"/>
-              <a:buChar char="•"/>
-            </a:pPr>
-            <a:r>
-              <a:rPr lang="en-US" dirty="0"/>
-              <a:t>In practice GP models are often evaluated on a grid using maximum likelihood and calculating multivariate Gaussian density using  approximation methods to speed up calculations.</a:t>
-            </a:r>
-          </a:p>
-          <a:p>
-            <a:pPr marL="285750" indent="-285750">
-              <a:buFont typeface="Arial" panose="020B0604020202020204" pitchFamily="34" charset="0"/>
-              <a:buChar char="•"/>
-            </a:pPr>
-            <a:r>
-              <a:rPr lang="en-US" dirty="0"/>
-              <a:t>Good 2-min explanation of Gaussian Process:</a:t>
-            </a:r>
-            <a:br>
-              <a:rPr lang="en-US" dirty="0"/>
-            </a:br>
-            <a:r>
-              <a:rPr lang="en-US" dirty="0"/>
-              <a:t> - </a:t>
-            </a:r>
-            <a:r>
-              <a:rPr lang="en-US" dirty="0">
-                <a:hlinkClick r:id="rId6"/>
-              </a:rPr>
-              <a:t>https://www.youtube.com/watch?v=mqOdIYxxNCs</a:t>
-            </a:r>
-            <a:r>
-              <a:rPr lang="en-US" dirty="0"/>
-              <a:t>   </a:t>
-            </a:r>
-          </a:p>
-        </p:txBody>
-      </p:sp>
-    </p:spTree>
-    <p:extLst>
-      <p:ext uri="{BB962C8B-B14F-4D97-AF65-F5344CB8AC3E}">
-        <p14:creationId xmlns:p14="http://schemas.microsoft.com/office/powerpoint/2010/main" val="2214897208"/>
       </p:ext>
     </p:extLst>
   </p:cSld>
